--- a/courses/ai-native/sessions/s04.pptx
+++ b/courses/ai-native/sessions/s04.pptx
@@ -3987,7 +3987,7 @@
         </p:nvSpPr>
         <p:spPr>
           <a:xfrm>
-            <a:off x="365760" y="3011351"/>
+            <a:off x="365760" y="2649162"/>
             <a:ext cx="8412480" cy="990600"/>
           </a:xfrm>
           <a:prstGeom prst="rect">
@@ -4141,7 +4141,7 @@
         <p:spPr>
           <a:xfrm>
             <a:off x="365760" y="960120"/>
-            <a:ext cx="8412480" cy="1949631"/>
+            <a:ext cx="8412480" cy="1587442"/>
           </a:xfrm>
         </p:spPr>
         <p:txBody>
@@ -4289,7 +4289,7 @@
         </p:nvSpPr>
         <p:spPr>
           <a:xfrm>
-            <a:off x="365760" y="4111679"/>
+            <a:off x="365760" y="3749490"/>
             <a:ext cx="8412480" cy="1651000"/>
           </a:xfrm>
           <a:prstGeom prst="rect">
@@ -5855,7 +5855,7 @@
           </p:nvPr>
         </p:nvGraphicFramePr>
         <p:xfrm>
-          <a:off x="1872806" y="4708262"/>
+          <a:off x="1872806" y="4460985"/>
           <a:ext cx="5384800" cy="3873500"/>
         </p:xfrm>
         <a:graphic>
@@ -6594,7 +6594,7 @@
         <p:spPr>
           <a:xfrm>
             <a:off x="365760" y="960120"/>
-            <a:ext cx="8412480" cy="1949631"/>
+            <a:ext cx="8412480" cy="1587442"/>
           </a:xfrm>
           <a:prstGeom prst="rect">
             <a:avLst/>
@@ -6841,7 +6841,7 @@
         </p:nvSpPr>
         <p:spPr>
           <a:xfrm>
-            <a:off x="365760" y="4409812"/>
+            <a:off x="365760" y="4162535"/>
             <a:ext cx="8412480" cy="222250"/>
           </a:xfrm>
           <a:prstGeom prst="rect">
@@ -6890,8 +6890,8 @@
         </p:nvSpPr>
         <p:spPr>
           <a:xfrm>
-            <a:off x="365760" y="3011351"/>
-            <a:ext cx="8412480" cy="274320"/>
+            <a:off x="365760" y="2673650"/>
+            <a:ext cx="8412480" cy="201168"/>
           </a:xfrm>
           <a:prstGeom prst="rect">
             <a:avLst/>
@@ -6941,7 +6941,7 @@
         </p:blipFill>
         <p:spPr>
           <a:xfrm>
-            <a:off x="1453706" y="3285671"/>
+            <a:off x="1453706" y="2911394"/>
             <a:ext cx="6223000" cy="912813"/>
           </a:xfrm>
           <a:prstGeom prst="rect">
@@ -7130,7 +7130,7 @@
           </p:nvPr>
         </p:nvGraphicFramePr>
         <p:xfrm>
-          <a:off x="1816926" y="3823877"/>
+          <a:off x="1816926" y="3335366"/>
           <a:ext cx="5496560" cy="3873500"/>
         </p:xfrm>
         <a:graphic>
@@ -8037,7 +8037,7 @@
         <p:spPr>
           <a:xfrm>
             <a:off x="365760" y="960120"/>
-            <a:ext cx="8412480" cy="2463707"/>
+            <a:ext cx="8412480" cy="1996365"/>
           </a:xfrm>
           <a:prstGeom prst="rect">
             <a:avLst/>
@@ -8244,7 +8244,7 @@
         </p:nvSpPr>
         <p:spPr>
           <a:xfrm>
-            <a:off x="365760" y="3525427"/>
+            <a:off x="365760" y="3036916"/>
             <a:ext cx="8412480" cy="222250"/>
           </a:xfrm>
           <a:prstGeom prst="rect">
@@ -8704,8 +8704,8 @@
         </p:nvSpPr>
         <p:spPr>
           <a:xfrm>
-            <a:off x="365760" y="4041717"/>
-            <a:ext cx="8412480" cy="274320"/>
+            <a:off x="365760" y="3136392"/>
+            <a:ext cx="8412480" cy="201168"/>
           </a:xfrm>
           <a:prstGeom prst="rect">
             <a:avLst/>
@@ -8748,7 +8748,7 @@
         </p:blipFill>
         <p:spPr>
           <a:xfrm>
-            <a:off x="1833563" y="4316037"/>
+            <a:off x="1833563" y="3374136"/>
             <a:ext cx="5476875" cy="746125"/>
           </a:xfrm>
           <a:prstGeom prst="rect">
@@ -8965,7 +8965,7 @@
         </p:nvSpPr>
         <p:spPr>
           <a:xfrm>
-            <a:off x="365760" y="3268389"/>
+            <a:off x="365760" y="2649162"/>
             <a:ext cx="8412480" cy="1816100"/>
           </a:xfrm>
           <a:prstGeom prst="rect">
@@ -9239,7 +9239,7 @@
         <p:spPr>
           <a:xfrm>
             <a:off x="365760" y="960120"/>
-            <a:ext cx="8412480" cy="2206669"/>
+            <a:ext cx="8412480" cy="1587442"/>
           </a:xfrm>
         </p:spPr>
         <p:txBody>
@@ -9367,7 +9367,7 @@
         </p:nvSpPr>
         <p:spPr>
           <a:xfrm>
-            <a:off x="365760" y="5186089"/>
+            <a:off x="365760" y="4693862"/>
             <a:ext cx="8412480" cy="781278"/>
           </a:xfrm>
           <a:prstGeom prst="rect">
@@ -9626,7 +9626,7 @@
           </p:nvPr>
         </p:nvGraphicFramePr>
         <p:xfrm>
-          <a:off x="2276666" y="3052763"/>
+          <a:off x="2276666" y="2624628"/>
           <a:ext cx="4577080" cy="3873500"/>
         </p:xfrm>
         <a:graphic>
@@ -10350,7 +10350,7 @@
         <p:spPr>
           <a:xfrm>
             <a:off x="365760" y="960120"/>
-            <a:ext cx="8412480" cy="1692593"/>
+            <a:ext cx="8412480" cy="1330404"/>
           </a:xfrm>
           <a:prstGeom prst="rect">
             <a:avLst/>
@@ -10567,7 +10567,7 @@
         </p:nvSpPr>
         <p:spPr>
           <a:xfrm>
-            <a:off x="365760" y="2754313"/>
+            <a:off x="365760" y="2326178"/>
             <a:ext cx="8412480" cy="222250"/>
           </a:xfrm>
           <a:prstGeom prst="rect">
@@ -10811,7 +10811,7 @@
         </p:nvSpPr>
         <p:spPr>
           <a:xfrm>
-            <a:off x="365760" y="3011351"/>
+            <a:off x="365760" y="2649162"/>
             <a:ext cx="8412480" cy="1485900"/>
           </a:xfrm>
           <a:prstGeom prst="rect">
@@ -11037,7 +11037,7 @@
         <p:spPr>
           <a:xfrm>
             <a:off x="365760" y="960120"/>
-            <a:ext cx="8412480" cy="1949631"/>
+            <a:ext cx="8412480" cy="1587442"/>
           </a:xfrm>
         </p:spPr>
         <p:txBody>
@@ -11322,7 +11322,7 @@
           </p:nvPr>
         </p:nvGraphicFramePr>
         <p:xfrm>
-          <a:off x="491045" y="2398486"/>
+          <a:off x="491045" y="2386330"/>
           <a:ext cx="8148320" cy="3873500"/>
         </p:xfrm>
         <a:graphic>
@@ -12383,7 +12383,7 @@
         </p:nvSpPr>
         <p:spPr>
           <a:xfrm>
-            <a:off x="365760" y="2100036"/>
+            <a:off x="365760" y="2087880"/>
             <a:ext cx="8412480" cy="222250"/>
           </a:xfrm>
           <a:prstGeom prst="rect">
@@ -12599,7 +12599,7 @@
           </p:nvPr>
         </p:nvGraphicFramePr>
         <p:xfrm>
-          <a:off x="412306" y="2141448"/>
+          <a:off x="412306" y="2112010"/>
           <a:ext cx="8305800" cy="3873500"/>
         </p:xfrm>
         <a:graphic>
@@ -13996,7 +13996,7 @@
         </p:nvSpPr>
         <p:spPr>
           <a:xfrm>
-            <a:off x="365760" y="1842998"/>
+            <a:off x="365760" y="1813560"/>
             <a:ext cx="8412480" cy="222250"/>
           </a:xfrm>
           <a:prstGeom prst="rect">
@@ -15052,7 +15052,7 @@
         </p:nvSpPr>
         <p:spPr>
           <a:xfrm>
-            <a:off x="365760" y="3760698"/>
+            <a:off x="365760" y="3887698"/>
             <a:ext cx="8412480" cy="2346871"/>
           </a:xfrm>
           <a:prstGeom prst="rect">
@@ -15365,7 +15365,7 @@
           </p:nvPr>
         </p:nvGraphicFramePr>
         <p:xfrm>
-          <a:off x="1495616" y="2141448"/>
+          <a:off x="1495616" y="2112010"/>
           <a:ext cx="6139180" cy="3873500"/>
         </p:xfrm>
         <a:graphic>
@@ -16762,7 +16762,7 @@
         </p:nvSpPr>
         <p:spPr>
           <a:xfrm>
-            <a:off x="365760" y="1842998"/>
+            <a:off x="365760" y="1813560"/>
             <a:ext cx="8412480" cy="222250"/>
           </a:xfrm>
           <a:prstGeom prst="rect">
@@ -20972,8 +20972,8 @@
         </p:nvSpPr>
         <p:spPr>
           <a:xfrm>
-            <a:off x="365760" y="3992603"/>
-            <a:ext cx="8412480" cy="274320"/>
+            <a:off x="365760" y="3761232"/>
+            <a:ext cx="8412480" cy="201168"/>
           </a:xfrm>
           <a:prstGeom prst="rect">
             <a:avLst/>
@@ -21016,7 +21016,7 @@
         </p:blipFill>
         <p:spPr>
           <a:xfrm>
-            <a:off x="1460500" y="4266923"/>
+            <a:off x="1460500" y="3998976"/>
             <a:ext cx="6223000" cy="1317625"/>
           </a:xfrm>
           <a:prstGeom prst="rect">
@@ -21205,7 +21205,7 @@
           </p:nvPr>
         </p:nvGraphicFramePr>
         <p:xfrm>
-          <a:off x="1579436" y="3309801"/>
+          <a:off x="1579436" y="2898948"/>
           <a:ext cx="5971540" cy="3873500"/>
         </p:xfrm>
         <a:graphic>
@@ -22112,7 +22112,7 @@
         <p:spPr>
           <a:xfrm>
             <a:off x="365760" y="960120"/>
-            <a:ext cx="8412480" cy="1949631"/>
+            <a:ext cx="8412480" cy="1587442"/>
           </a:xfrm>
           <a:prstGeom prst="rect">
             <a:avLst/>
@@ -22309,7 +22309,7 @@
         </p:nvSpPr>
         <p:spPr>
           <a:xfrm>
-            <a:off x="365760" y="3011351"/>
+            <a:off x="365760" y="2600498"/>
             <a:ext cx="8412480" cy="222250"/>
           </a:xfrm>
           <a:prstGeom prst="rect">
@@ -22558,7 +22558,7 @@
         <p:spPr>
           <a:xfrm>
             <a:off x="365760" y="960120"/>
-            <a:ext cx="8412480" cy="2336800"/>
+            <a:ext cx="8412480" cy="2514600"/>
           </a:xfrm>
         </p:spPr>
         <p:txBody>
@@ -22706,8 +22706,8 @@
         </p:nvSpPr>
         <p:spPr>
           <a:xfrm>
-            <a:off x="365760" y="3587397"/>
-            <a:ext cx="8412480" cy="274320"/>
+            <a:off x="365760" y="2835748"/>
+            <a:ext cx="8412480" cy="201168"/>
           </a:xfrm>
           <a:prstGeom prst="rect">
             <a:avLst/>
@@ -22750,8 +22750,8 @@
         </p:blipFill>
         <p:spPr>
           <a:xfrm>
-            <a:off x="2137965" y="3861717"/>
-            <a:ext cx="4868070" cy="2514756"/>
+            <a:off x="2082800" y="3073492"/>
+            <a:ext cx="4978400" cy="2571750"/>
           </a:xfrm>
           <a:prstGeom prst="rect">
             <a:avLst/>
@@ -22939,7 +22939,7 @@
           </p:nvPr>
         </p:nvGraphicFramePr>
         <p:xfrm>
-          <a:off x="1174306" y="2398486"/>
+          <a:off x="1174306" y="2386330"/>
           <a:ext cx="6781800" cy="3873500"/>
         </p:xfrm>
         <a:graphic>
@@ -24178,7 +24178,7 @@
         </p:nvSpPr>
         <p:spPr>
           <a:xfrm>
-            <a:off x="365760" y="2100036"/>
+            <a:off x="365760" y="2087880"/>
             <a:ext cx="8412480" cy="222250"/>
           </a:xfrm>
           <a:prstGeom prst="rect">
@@ -24227,7 +24227,7 @@
         </p:nvSpPr>
         <p:spPr>
           <a:xfrm>
-            <a:off x="365760" y="4228086"/>
+            <a:off x="365760" y="4342930"/>
             <a:ext cx="8412480" cy="781278"/>
           </a:xfrm>
           <a:prstGeom prst="rect">
@@ -24466,7 +24466,7 @@
           </p:nvPr>
         </p:nvGraphicFramePr>
         <p:xfrm>
-          <a:off x="1009206" y="2398486"/>
+          <a:off x="1009206" y="2386330"/>
           <a:ext cx="7112000" cy="3873500"/>
         </p:xfrm>
         <a:graphic>
@@ -26109,7 +26109,7 @@
         </p:nvSpPr>
         <p:spPr>
           <a:xfrm>
-            <a:off x="365760" y="2100036"/>
+            <a:off x="365760" y="2087880"/>
             <a:ext cx="8412480" cy="222250"/>
           </a:xfrm>
           <a:prstGeom prst="rect">
@@ -26158,7 +26158,7 @@
         </p:nvSpPr>
         <p:spPr>
           <a:xfrm>
-            <a:off x="365760" y="3940086"/>
+            <a:off x="365760" y="4054930"/>
             <a:ext cx="8412480" cy="1435556"/>
           </a:xfrm>
           <a:prstGeom prst="rect">
@@ -26704,8 +26704,8 @@
         </p:nvSpPr>
         <p:spPr>
           <a:xfrm>
-            <a:off x="365760" y="4061561"/>
-            <a:ext cx="8412480" cy="274320"/>
+            <a:off x="365760" y="3136392"/>
+            <a:ext cx="8412480" cy="201168"/>
           </a:xfrm>
           <a:prstGeom prst="rect">
             <a:avLst/>
@@ -26748,7 +26748,7 @@
         </p:blipFill>
         <p:spPr>
           <a:xfrm>
-            <a:off x="1460500" y="4335881"/>
+            <a:off x="1460500" y="3374136"/>
             <a:ext cx="6223000" cy="706438"/>
           </a:xfrm>
           <a:prstGeom prst="rect">
@@ -26937,7 +26937,7 @@
           </p:nvPr>
         </p:nvGraphicFramePr>
         <p:xfrm>
-          <a:off x="1788986" y="2141448"/>
+          <a:off x="1788986" y="2112010"/>
           <a:ext cx="5552440" cy="3873500"/>
         </p:xfrm>
         <a:graphic>
@@ -28146,7 +28146,7 @@
         </p:nvSpPr>
         <p:spPr>
           <a:xfrm>
-            <a:off x="365760" y="1842998"/>
+            <a:off x="365760" y="1813560"/>
             <a:ext cx="8412480" cy="222250"/>
           </a:xfrm>
           <a:prstGeom prst="rect">
@@ -28195,7 +28195,7 @@
         </p:nvSpPr>
         <p:spPr>
           <a:xfrm>
-            <a:off x="365760" y="3971048"/>
+            <a:off x="365760" y="4068610"/>
             <a:ext cx="8412480" cy="781278"/>
           </a:xfrm>
           <a:prstGeom prst="rect">

--- a/courses/ai-native/sessions/s04.pptx
+++ b/courses/ai-native/sessions/s04.pptx
@@ -556,7 +556,7 @@
             <a:pPr lvl="0"/>
             <a:r>
               <a:rPr lang="ko-KR" sz="1200"/>
-              <a:t>인용 근거: Cucumber 공식 문서 "Behaviour-Driven Development" 원문 확인. 같은 문서는 Discovery·Formulation·Automation의 세 실천을 설명한다("03. 요구의 구체화와 명세"의 「BDD란?」).</a:t>
+              <a:t>인용 근거: Cucumber 공식 문서 "Behaviour-Driven Development" 원문 확인. 같은 문서는 Discovery·Formulation·Automation의 세 실천을 설명한다("세션 03. 요구의 구체화와 명세"의 「BDD란?」).</a:t>
             </a:r>
           </a:p>
           <a:p>
@@ -910,7 +910,7 @@
             <a:pPr lvl="0"/>
             <a:r>
               <a:rPr lang="ko-KR" sz="1200"/>
-              <a:t>파일은 code/s04/order/features.json이다. 기능 목록은 작업 상태를 저장소에 남기는 방법이며 "10. 실패 대응·재시도·복구"의 작업 상태와 이어진다.</a:t>
+              <a:t>파일은 code/s04/order/features.json이다. 기능 목록은 작업 상태를 저장소에 남기는 방법이며 "세션 10. 실패 대응·재시도·복구"의 작업 상태와 이어진다.</a:t>
             </a:r>
           </a:p>
         </p:txBody>
@@ -978,7 +978,7 @@
             <a:pPr lvl="0"/>
             <a:r>
               <a:rPr lang="ko-KR" sz="1200"/>
-              <a:t>완료의 정의는 작업 단위를 맡기기 전에 정한다. 이 정의를 실행 전·후에 강제하는 방법은 "08. 실행 제약과 가드레일의 역할"과 "09. 검증 하네스·결과 점검·피드백"에서 다룬다.</a:t>
+              <a:t>완료의 정의는 작업 단위를 맡기기 전에 정한다. 이 정의를 실행 전·후에 강제하는 방법은 "세션 08. 실행 제약과 가드레일의 역할"과 "세션 09. 검증 하네스·결과 점검·피드백"에서 다룬다.</a:t>
             </a:r>
           </a:p>
         </p:txBody>
@@ -1114,7 +1114,7 @@
             <a:pPr lvl="0"/>
             <a:r>
               <a:rPr lang="ko-KR" sz="1200"/>
-              <a:t>작업 명세서는 "03. 요구의 구체화와 명세"의 「주문한다의 작업 명세서」 그대로다. 업무 규칙마다 예가 있다.</a:t>
+              <a:t>작업 명세서는 "세션 03. 요구의 구체화와 명세"의 「주문한다의 작업 명세서」 그대로다. 업무 규칙마다 예가 있다.</a:t>
             </a:r>
           </a:p>
         </p:txBody>
@@ -1175,7 +1175,7 @@
             <a:pPr lvl="0"/>
             <a:r>
               <a:rPr lang="ko-KR" sz="1200"/>
-              <a:t>테스트도 맡긴 쪽이 통과한 이유는 작업 명세서에 업무 규칙마다 예가 있었기 때문이다. 요청 한 줄만 준 "01. AI 협업의 특성과 사람의 판단 책임"의 첫 시도와 비교한다.</a:t>
+              <a:t>테스트도 맡긴 쪽이 통과한 이유는 작업 명세서에 업무 규칙마다 예가 있었기 때문이다. 요청 한 줄만 준 "세션 01. AI 협업의 특성과 사람의 판단 책임"의 첫 시도와 비교한다.</a:t>
             </a:r>
           </a:p>
           <a:p>
@@ -1243,14 +1243,14 @@
             <a:pPr lvl="0"/>
             <a:r>
               <a:rPr lang="ko-KR" sz="1200"/>
-              <a:t>"03. 요구의 구체화와 명세"는 "무엇을 만들게 할까?"를 다뤘다. 이 세션은 "무엇으로 받아들일까?"를 다룬다.</a:t>
+              <a:t>"세션 03. 요구의 구체화와 명세"는 "무엇을 만들게 할까?"를 다뤘다. 이 세션은 "무엇으로 받아들일까?"를 다룬다.</a:t>
             </a:r>
           </a:p>
           <a:p>
             <a:pPr lvl="0"/>
             <a:r>
               <a:rPr lang="ko-KR" sz="1200"/>
-              <a:t>수용 기준은 "09. 검증 하네스·결과 점검·피드백"의 센서, "11. 평가 세트와 운영 점검 — 보안·비용·모델 변경"의 평가 세트가 된다.</a:t>
+              <a:t>수용 기준은 "세션 09. 검증 하네스·결과 점검·피드백"의 센서, "세션 11. 평가 세트와 운영 점검 — 보안·비용·모델 변경"의 평가 세트가 된다.</a:t>
             </a:r>
           </a:p>
         </p:txBody>
@@ -1393,7 +1393,7 @@
             <a:pPr lvl="0"/>
             <a:r>
               <a:rPr lang="ko-KR" sz="1200"/>
-              <a:t>수용 테스트를 바꾸지 못하게 강제하는 방법(파일 쓰기 금지, 테스트 비활성화 탐지)은 "08. 실행 제약과 가드레일의 역할"에서 다룬다.</a:t>
+              <a:t>수용 테스트를 바꾸지 못하게 강제하는 방법(파일 쓰기 금지, 테스트 비활성화 탐지)은 "세션 08. 실행 제약과 가드레일의 역할"에서 다룬다.</a:t>
             </a:r>
           </a:p>
         </p:txBody>
@@ -1780,7 +1780,7 @@
             <a:pPr lvl="0"/>
             <a:r>
               <a:rPr lang="ko-KR" sz="1200"/>
-              <a:t>North(2006)의 "스토리의 행위는 곧 수용 기준이다"는 "03. 요구의 구체화와 명세"의 「Given-When-Then」에서 인용했다.</a:t>
+              <a:t>North(2006)의 "스토리의 행위는 곧 수용 기준이다"는 "세션 03. 요구의 구체화와 명세"의 「Given-When-Then」에서 인용했다.</a:t>
             </a:r>
           </a:p>
         </p:txBody>
@@ -1841,7 +1841,7 @@
             <a:pPr lvl="0"/>
             <a:r>
               <a:rPr lang="ko-KR" sz="1200"/>
-              <a:t>인용 근거: Ryan Lopopolo, "Harness engineering: leveraging Codex in an agent-first world", OpenAI, 2026 영문 원문 확인. 앞 문장은 "사람은 늘 루프 안에 있지만 예전과 다른 추상 수준에서 일한다"이다("01. AI 협업의 특성과 사람의 판단 책임"의 「개발자의 일과 LLM의 일」).</a:t>
+              <a:t>인용 근거: Ryan Lopopolo, "Harness engineering: leveraging Codex in an agent-first world", OpenAI, 2026 영문 원문 확인. 앞 문장은 "사람은 늘 루프 안에 있지만 예전과 다른 추상 수준에서 일한다"이다("세션 01. AI 협업의 특성과 사람의 판단 책임"의 「개발자의 일과 LLM의 일」).</a:t>
             </a:r>
           </a:p>
           <a:p>
@@ -1909,7 +1909,7 @@
             <a:pPr lvl="0"/>
             <a:r>
               <a:rPr lang="ko-KR" sz="1200"/>
-              <a:t>첫 시도의 테스트 3개("01. AI 협업의 특성과 사람의 판단 책임")는 모두 통과했지만, 업무 규칙이 아니라 자기 코드를 확인했다. 테스트가 있다는 것만으로는 부족하다.</a:t>
+              <a:t>첫 시도의 테스트 3개("세션 01. AI 협업의 특성과 사람의 판단 책임")는 모두 통과했지만, 업무 규칙이 아니라 자기 코드를 확인했다. 테스트가 있다는 것만으로는 부족하다.</a:t>
             </a:r>
           </a:p>
           <a:p>
@@ -2120,14 +2120,14 @@
             <a:pPr lvl="0"/>
             <a:r>
               <a:rPr lang="ko-KR" sz="1200"/>
-              <a:t>이 도식은 한 주문이 시간에 따라 거치는 값이다. 주문 상태 기계는 "05. 도메인·설계 지식과 맥락 구성"에서 맥락으로 만든다.</a:t>
+              <a:t>이 도식은 한 주문이 시간에 따라 거치는 값이다. 주문 상태 기계는 "세션 05. 도메인·설계 지식과 맥락 구성"에서 맥락으로 만든다.</a:t>
             </a:r>
           </a:p>
           <a:p>
             <a:pPr lvl="0"/>
             <a:r>
               <a:rPr lang="ko-KR" sz="1200"/>
-              <a:t>첫 시도의 거절 처리는 "01. AI 협업의 특성과 사람의 판단 책임"의 「첫 시도의 결제 코드」에 있다.</a:t>
+              <a:t>첫 시도의 거절 처리는 "세션 01. AI 협업의 특성과 사람의 판단 책임"의 「첫 시도의 결제 코드」에 있다.</a:t>
             </a:r>
           </a:p>
         </p:txBody>
@@ -20867,7 +20867,7 @@
                 <a:latin typeface="맑은 고딕"/>
                 <a:ea typeface="맑은 고딕"/>
               </a:rPr>
-              <a:t> "03. 요구의 구체화와 명세"의 Given-When-Then이 수용 기준이다.</a:t>
+              <a:t> "세션 03. 요구의 구체화와 명세"의 Given-When-Then이 수용 기준이다.</a:t>
             </a:r>
           </a:p>
           <a:p>
@@ -28258,7 +28258,7 @@
                 <a:latin typeface="맑은 고딕"/>
                 <a:ea typeface="맑은 고딕"/>
               </a:rPr>
-              <a:t>("03. 요구의 구체화와 명세")</a:t>
+              <a:t>("세션 03. 요구의 구체화와 명세")</a:t>
             </a:r>
             <a:r>
               <a:rPr sz="1600" b="0">

--- a/courses/ai-native/sessions/s04.pptx
+++ b/courses/ai-native/sessions/s04.pptx
@@ -7419,7 +7419,7 @@
                           <a:ea typeface="맑은 고딕" panose="020B0503020000020004" pitchFamily="34" charset="-127"/>
                           <a:cs typeface="맑은 고딕"/>
                         </a:rPr>
-                        <a:t>주문한다 전체</a:t>
+                        <a:t>"주문한다" 전체</a:t>
                       </a:r>
                     </a:p>
                   </a:txBody>
@@ -8097,7 +8097,7 @@
                 <a:latin typeface="맑은 고딕"/>
                 <a:ea typeface="맑은 고딕"/>
               </a:rPr>
-              <a:t>. 주문한다 전체를 한 번에 맡기면 에이전트는 한꺼번에 너무 많이 하려 한다.</a:t>
+              <a:t>. "주문한다" 전체를 한 번에 맡기면 에이전트는 한꺼번에 너무 많이 하려 한다.</a:t>
             </a:r>
           </a:p>
           <a:p>
@@ -8727,7 +8727,7 @@
                 <a:latin typeface="맑은 고딕"/>
                 <a:ea typeface="맑은 고딕"/>
               </a:rPr>
-              <a:t>주문한다의 작업 단위</a:t>
+              <a:t>"주문한다"의 작업 단위</a:t>
             </a:r>
           </a:p>
         </p:txBody>
@@ -10597,7 +10597,7 @@
                 <a:latin typeface="맑은 고딕"/>
                 <a:ea typeface="맑은 고딕"/>
               </a:rPr>
-              <a:t>주문한다의 완료의 정의</a:t>
+              <a:t>"주문한다"의 완료의 정의</a:t>
             </a:r>
           </a:p>
         </p:txBody>
@@ -26005,7 +26005,7 @@
                 <a:latin typeface="맑은 고딕"/>
                 <a:ea typeface="맑은 고딕"/>
               </a:rPr>
-              <a:t>를 고르면 주문한다의 수용 기준은 4개다. 모두 같은 주문</a:t>
+              <a:t>를 고르면 "주문한다"의 수용 기준은 4개다. 모두 같은 주문</a:t>
             </a:r>
             <a:r>
               <a:rPr sz="1400" b="0">
@@ -26139,7 +26139,7 @@
                 <a:latin typeface="맑은 고딕"/>
                 <a:ea typeface="맑은 고딕"/>
               </a:rPr>
-              <a:t>주문한다의 수용 기준</a:t>
+              <a:t>"주문한다"의 수용 기준</a:t>
             </a:r>
           </a:p>
         </p:txBody>
@@ -27100,7 +27100,7 @@
                           <a:ea typeface="맑은 고딕" panose="020B0503020000020004" pitchFamily="34" charset="-127"/>
                           <a:cs typeface="맑은 고딕"/>
                         </a:rPr>
-                        <a:t>주문한다</a:t>
+                        <a:t>"주문한다"</a:t>
                       </a:r>
                     </a:p>
                   </a:txBody>

--- a/courses/ai-native/sessions/s04.pptx
+++ b/courses/ai-native/sessions/s04.pptx
@@ -5855,7 +5855,7 @@
           </p:nvPr>
         </p:nvGraphicFramePr>
         <p:xfrm>
-          <a:off x="1872806" y="4460985"/>
+          <a:off x="1872806" y="4649485"/>
           <a:ext cx="5384800" cy="3873500"/>
         </p:xfrm>
         <a:graphic>
@@ -6841,7 +6841,7 @@
         </p:nvSpPr>
         <p:spPr>
           <a:xfrm>
-            <a:off x="365760" y="4162535"/>
+            <a:off x="365760" y="4351035"/>
             <a:ext cx="8412480" cy="222250"/>
           </a:xfrm>
           <a:prstGeom prst="rect">
@@ -6941,8 +6941,8 @@
         </p:blipFill>
         <p:spPr>
           <a:xfrm>
-            <a:off x="1453706" y="2911394"/>
-            <a:ext cx="6223000" cy="912813"/>
+            <a:off x="811165" y="2911394"/>
+            <a:ext cx="7508081" cy="1101313"/>
           </a:xfrm>
           <a:prstGeom prst="rect">
             <a:avLst/>
@@ -18063,7 +18063,7 @@
                 <a:latin typeface="맑은 고딕"/>
                 <a:ea typeface="맑은 고딕"/>
               </a:rPr>
-              <a:t> 예를 실행되는 테스트로 먼저 주고, 에이전트는 TDD로 구현한다</a:t>
+              <a:t> 예를 테스트로 먼저 주고, 에이전트는 TDD로 구현한다</a:t>
             </a:r>
           </a:p>
           <a:p>
@@ -21016,8 +21016,8 @@
         </p:blipFill>
         <p:spPr>
           <a:xfrm>
-            <a:off x="1460500" y="3998976"/>
-            <a:ext cx="6223000" cy="1317625"/>
+            <a:off x="1657443" y="3998976"/>
+            <a:ext cx="5829114" cy="1234226"/>
           </a:xfrm>
           <a:prstGeom prst="rect">
             <a:avLst/>
@@ -22750,8 +22750,8 @@
         </p:blipFill>
         <p:spPr>
           <a:xfrm>
-            <a:off x="2082800" y="3073492"/>
-            <a:ext cx="4978400" cy="2571750"/>
+            <a:off x="1994892" y="3073492"/>
+            <a:ext cx="5154216" cy="2662573"/>
           </a:xfrm>
           <a:prstGeom prst="rect">
             <a:avLst/>
@@ -26748,8 +26748,8 @@
         </p:blipFill>
         <p:spPr>
           <a:xfrm>
-            <a:off x="1460500" y="3374136"/>
-            <a:ext cx="6223000" cy="706438"/>
+            <a:off x="1604609" y="3374136"/>
+            <a:ext cx="5934782" cy="673719"/>
           </a:xfrm>
           <a:prstGeom prst="rect">
             <a:avLst/>

--- a/courses/ai-native/sessions/s04.pptx
+++ b/courses/ai-native/sessions/s04.pptx
@@ -34,6 +34,7 @@
     <p:sldId id="279" r:id="javaLecture24"/>
     <p:sldId id="280" r:id="javaLecture25"/>
     <p:sldId id="281" r:id="javaLecture26"/>
+    <p:sldId id="282" r:id="javaLecture27"/>
   </p:sldIdLst>
   <p:sldSz cx="9144000" cy="6858000" type="screen4x3"/>
   <p:notesSz cx="6858000" cy="9144000"/>
@@ -719,74 +720,6 @@
 </p:notes>
 </file>
 
-<file path=ppt/notesSlides/notesSlide13.xml><?xml version="1.0" encoding="utf-8"?>
-<p:notes xmlns:a="http://schemas.openxmlformats.org/drawingml/2006/main" xmlns:r="http://schemas.openxmlformats.org/officeDocument/2006/relationships" xmlns:p="http://schemas.openxmlformats.org/presentationml/2006/main">
-  <p:cSld>
-    <p:spTree>
-      <p:nvGrpSpPr>
-        <p:cNvPr id="1" name=""/>
-        <p:cNvGrpSpPr/>
-        <p:nvPr/>
-      </p:nvGrpSpPr>
-      <p:grpSpPr>
-        <a:xfrm>
-          <a:off x="0" y="0"/>
-          <a:ext cx="0" cy="0"/>
-          <a:chOff x="0" y="0"/>
-          <a:chExt cx="0" cy="0"/>
-        </a:xfrm>
-      </p:grpSpPr>
-      <p:sp>
-        <p:nvSpPr>
-          <p:cNvPr id="2" name="슬라이드 이미지 개체 틀"/>
-          <p:cNvSpPr/>
-          <p:nvPr>
-            <p:ph type="sldImg" idx="2"/>
-          </p:nvPr>
-        </p:nvSpPr>
-        <p:spPr/>
-        <p:txBody>
-          <a:bodyPr/>
-          <a:lstStyle/>
-          <a:p/>
-        </p:txBody>
-      </p:sp>
-      <p:sp>
-        <p:nvSpPr>
-          <p:cNvPr id="3" name="슬라이드 노트 개체 틀"/>
-          <p:cNvSpPr/>
-          <p:nvPr>
-            <p:ph type="body" idx="3"/>
-          </p:nvPr>
-        </p:nvSpPr>
-        <p:spPr/>
-        <p:txBody>
-          <a:bodyPr/>
-          <a:lstStyle/>
-          <a:p>
-            <a:pPr lvl="0"/>
-            <a:r>
-              <a:rPr lang="ko-KR" sz="1200"/>
-              <a:t>인용 근거: Anthropic, "Effective harnesses for long-running agents", 2025 원문 확인. 원문은 웹 앱 전체를 한 번에 만들려다(one-shot) 맥락이 바닥나는 실패를 먼저 적는다.</a:t>
-            </a:r>
-          </a:p>
-          <a:p>
-            <a:pPr lvl="0"/>
-            <a:r>
-              <a:rPr lang="ko-KR" sz="1200"/>
-              <a:t>"작게 끝까지"는 guides/sw-engineering-principles.md의 기본 원칙이다. 작게 나누되 각 단위는 테스트까지 끝낸다.</a:t>
-            </a:r>
-          </a:p>
-        </p:txBody>
-      </p:sp>
-    </p:spTree>
-  </p:cSld>
-  <p:clrMapOvr>
-    <a:masterClrMapping/>
-  </p:clrMapOvr>
-</p:notes>
-</file>
-
 <file path=ppt/notesSlides/notesSlide14.xml><?xml version="1.0" encoding="utf-8"?>
 <p:notes xmlns:a="http://schemas.openxmlformats.org/drawingml/2006/main" xmlns:r="http://schemas.openxmlformats.org/officeDocument/2006/relationships" xmlns:p="http://schemas.openxmlformats.org/presentationml/2006/main">
   <p:cSld>
@@ -835,14 +768,14 @@
             <a:pPr lvl="0"/>
             <a:r>
               <a:rPr lang="ko-KR" sz="1200"/>
-              <a:t>업무 규칙(3가지)과 작업 단위(4가지)의 수가 다르다. 결제 거절 규칙은 ③과 ④ 두 단위로, 배송 요청 규칙은 ②와 ③ 안의 확인으로 들어간다.</a:t>
+              <a:t>인용 근거: Anthropic, "Effective harnesses for long-running agents", 2025 원문 확인. 원문은 웹 앱 전체를 한 번에 만들려다(one-shot) 맥락이 바닥나는 실패를 먼저 적는다.</a:t>
             </a:r>
           </a:p>
           <a:p>
             <a:pPr lvl="0"/>
             <a:r>
               <a:rPr lang="ko-KR" sz="1200"/>
-              <a:t>순서는 고정이 아니다. 금액 확정을 먼저 두는 이유는 다른 단위가 모두 주문 금액을 쓰기 때문이다.</a:t>
+              <a:t>"작게 끝까지"는 guides/sw-engineering-principles.md의 기본 원칙이다. 작게 나누되 각 단위는 테스트까지 끝낸다.</a:t>
             </a:r>
           </a:p>
         </p:txBody>
@@ -903,14 +836,14 @@
             <a:pPr lvl="0"/>
             <a:r>
               <a:rPr lang="ko-KR" sz="1200"/>
-              <a:t>인용 근거: Anthropic, "Effective harnesses for long-running agents", 2025 원문 확인. 원문은 JSON 목록에 기능 200여 개를 두고, 에이전트가 passes 값만 바꾸게 했다.</a:t>
+              <a:t>업무 규칙(3가지)과 작업 단위(4가지)의 수가 다르다. 결제 거절 규칙은 ③과 ④ 두 단위로, 배송 요청 규칙은 ②와 ③ 안의 확인으로 들어간다.</a:t>
             </a:r>
           </a:p>
           <a:p>
             <a:pPr lvl="0"/>
             <a:r>
               <a:rPr lang="ko-KR" sz="1200"/>
-              <a:t>파일은 code/s04/order/features.json이다. 기능 목록은 작업 상태를 저장소에 남기는 방법이며 "세션 10. 실패 대응·재시도·복구"의 작업 상태와 이어진다.</a:t>
+              <a:t>순서는 고정이 아니다. 금액 확정을 먼저 두는 이유는 다른 단위가 모두 주문 금액을 쓰기 때문이다.</a:t>
             </a:r>
           </a:p>
         </p:txBody>
@@ -971,14 +904,14 @@
             <a:pPr lvl="0"/>
             <a:r>
               <a:rPr lang="ko-KR" sz="1200"/>
-              <a:t>인용 근거: Anthropic, "Effective harnesses for long-running agents", 2025 원문 확인. 원문은 에이전트가 단위 테스트를 돌리고도 기능이 처음부터 끝까지 동작하지 않는 것을 알아채지 못했다고 적는다.</a:t>
+              <a:t>인용 근거: Anthropic, "Effective harnesses for long-running agents", 2025 원문 확인. 원문은 JSON 목록에 기능 200여 개를 두고, 에이전트가 passes 값만 바꾸게 했다.</a:t>
             </a:r>
           </a:p>
           <a:p>
             <a:pPr lvl="0"/>
             <a:r>
               <a:rPr lang="ko-KR" sz="1200"/>
-              <a:t>완료의 정의는 작업 단위를 맡기기 전에 정한다. 이 정의를 실행 전·후에 강제하는 방법은 "세션 08. 실행 제약과 가드레일의 역할"과 "세션 09. 검증 하네스·결과 점검·피드백"에서 다룬다.</a:t>
+              <a:t>파일은 code/s04/order/features.json이다. 기능 목록은 작업 상태를 저장소에 남기는 방법이며 "세션 10. 실패 대응·재시도·복구"의 작업 상태와 이어진다.</a:t>
             </a:r>
           </a:p>
         </p:txBody>
@@ -1039,14 +972,14 @@
             <a:pPr lvl="0"/>
             <a:r>
               <a:rPr lang="ko-KR" sz="1200"/>
-              <a:t>인용 근거: Kent Beck, "Augmented Coding: Beyond the Vibes", 2025 원문 확인. Beck이 에이전트를 지켜보다 개입하는 신호로 꼽은 셋 중 하나다(나머지는 반복과 요청하지 않은 기능).</a:t>
+              <a:t>인용 근거: Anthropic, "Effective harnesses for long-running agents", 2025 원문 확인. 원문은 에이전트가 단위 테스트를 돌리고도 기능이 처음부터 끝까지 동작하지 않는 것을 알아채지 못했다고 적는다.</a:t>
             </a:r>
           </a:p>
           <a:p>
             <a:pPr lvl="0"/>
             <a:r>
               <a:rPr lang="ko-KR" sz="1200"/>
-              <a:t>출력은 code/s04/demo-results/B/(수용 테스트를 준 실행)의 기록에서 테스트 이름과 요약 줄만 남겼다(트리 기호 생략). 테스트 출력에는 수용 기준의 이름이 그대로 보이고, diff에는 수용 테스트 파일이 없다.</a:t>
+              <a:t>완료의 정의는 작업 단위를 맡기기 전에 정한다. 이 정의를 실행 전·후에 강제하는 방법은 "세션 08. 실행 제약과 가드레일의 역할"과 "세션 09. 검증 하네스·결과 점검·피드백"에서 다룬다.</a:t>
             </a:r>
           </a:p>
         </p:txBody>
@@ -1107,14 +1040,14 @@
             <a:pPr lvl="0"/>
             <a:r>
               <a:rPr lang="ko-KR" sz="1200"/>
-              <a:t>2026-10-08에 Claude Code 2.1.293(비대화형, 모델 claude-opus-5-5)으로 실행했다. 허용한 명령은 테스트 실행 스크립트 하나다. 프롬프트와 결과 전문은 code/s04/demo-results에 있다(폴더 A가 테스트도 맡긴 실행, B가 수용 테스트를 준 실행).</a:t>
+              <a:t>인용 근거: Kent Beck, "Augmented Coding: Beyond the Vibes", 2025 원문 확인. Beck이 에이전트를 지켜보다 개입하는 신호로 꼽은 셋 중 하나다(나머지는 반복과 요청하지 않은 기능).</a:t>
             </a:r>
           </a:p>
           <a:p>
             <a:pPr lvl="0"/>
             <a:r>
               <a:rPr lang="ko-KR" sz="1200"/>
-              <a:t>작업 명세서는 "세션 03. 요구의 구체화와 명세"의 「주문한다의 작업 명세서」 그대로다. 업무 규칙마다 예가 있다.</a:t>
+              <a:t>출력은 code/s04/demo-results/B/(수용 테스트를 준 실행)의 기록에서 테스트 이름과 요약 줄만 남겼다(트리 기호 생략). 테스트 출력에는 수용 기준의 이름이 그대로 보이고, diff에는 수용 테스트 파일이 없다.</a:t>
             </a:r>
           </a:p>
         </p:txBody>
@@ -1175,14 +1108,14 @@
             <a:pPr lvl="0"/>
             <a:r>
               <a:rPr lang="ko-KR" sz="1200"/>
-              <a:t>테스트도 맡긴 쪽이 통과한 이유는 작업 명세서에 업무 규칙마다 예가 있었기 때문이다. 요청 한 줄만 준 "세션 01. AI 협업의 특성과 사람의 판단 책임"의 첫 시도와 비교한다.</a:t>
+              <a:t>2026-10-08에 Claude Code 2.1.293(비대화형, 모델 claude-opus-5-5)으로 실행했다. 허용한 명령은 테스트 실행 스크립트 하나다. 프롬프트와 결과 전문은 code/s04/demo-results에 있다(폴더 A가 테스트도 맡긴 실행, B가 수용 테스트를 준 실행).</a:t>
             </a:r>
           </a:p>
           <a:p>
             <a:pPr lvl="0"/>
             <a:r>
               <a:rPr lang="ko-KR" sz="1200"/>
-              <a:t>같은 시연을 다시 하면 결과는 달라질 수 있다(비결정성).</a:t>
+              <a:t>작업 명세서는 "세션 03. 요구의 구체화와 명세"의 「주문한다의 작업 명세서」 그대로다. 업무 규칙마다 예가 있다.</a:t>
             </a:r>
           </a:p>
         </p:txBody>
@@ -1311,14 +1244,14 @@
             <a:pPr lvl="0"/>
             <a:r>
               <a:rPr lang="ko-KR" sz="1200"/>
-              <a:t>에이전트가 만든 테스트 전문은 code/s04/demo-results/A/OrderServiceTest.java다. 테스트 대역의 배송지 값도 명세의 값(서울)이 아니다.</a:t>
+              <a:t>테스트도 맡긴 쪽이 통과한 이유는 작업 명세서에 업무 규칙마다 예가 있었기 때문이다. 요청 한 줄만 준 "세션 01. AI 협업의 특성과 사람의 판단 책임"의 첫 시도와 비교한다.</a:t>
             </a:r>
           </a:p>
           <a:p>
             <a:pPr lvl="0"/>
             <a:r>
               <a:rPr lang="ko-KR" sz="1200"/>
-              <a:t>수강생에게 "이 테스트를 남길까, 지울까?"를 묻고, 누가 답해야 하는지로 이끈다.</a:t>
+              <a:t>같은 시연을 다시 하면 결과는 달라질 수 있다(비결정성).</a:t>
             </a:r>
           </a:p>
         </p:txBody>
@@ -1379,21 +1312,14 @@
             <a:pPr lvl="0"/>
             <a:r>
               <a:rPr lang="ko-KR" sz="1200"/>
-              <a:t>"기대값을 고쳐 통과시킨다"는 첫 시도의 테스트가 자기 코드를 확인한 것과 같은 문제다.</a:t>
+              <a:t>에이전트가 만든 테스트 전문은 code/s04/demo-results/A/OrderServiceTest.java다. 테스트 대역의 배송지 값도 명세의 값(서울)이 아니다.</a:t>
             </a:r>
           </a:p>
           <a:p>
             <a:pPr lvl="0"/>
             <a:r>
               <a:rPr lang="ko-KR" sz="1200"/>
-              <a:t>구현을 확인하는 테스트(호출 순서·내부 메서드)는 리팩터링마다 깨지면서 업무 규칙은 확인하지 않는다.</a:t>
-            </a:r>
-          </a:p>
-          <a:p>
-            <a:pPr lvl="0"/>
-            <a:r>
-              <a:rPr lang="ko-KR" sz="1200"/>
-              <a:t>수용 테스트를 바꾸지 못하게 강제하는 방법(파일 쓰기 금지, 테스트 비활성화 탐지)은 "세션 08. 실행 제약과 가드레일의 역할"에서 다룬다.</a:t>
+              <a:t>수강생에게 "이 테스트를 남길까, 지울까?"를 묻고, 누가 답해야 하는지로 이끈다.</a:t>
             </a:r>
           </a:p>
         </p:txBody>
@@ -1454,14 +1380,21 @@
             <a:pPr lvl="0"/>
             <a:r>
               <a:rPr lang="ko-KR" sz="1200"/>
-              <a:t>정기배송 모델 패키지는 code/s01/subscription/docs/에 있다.</a:t>
+              <a:t>"기대값을 고쳐 통과시킨다"는 첫 시도의 테스트가 자기 코드를 확인한 것과 같은 문제다.</a:t>
             </a:r>
           </a:p>
           <a:p>
             <a:pPr lvl="0"/>
             <a:r>
               <a:rPr lang="ko-KR" sz="1200"/>
-              <a:t>LLM이 경계값 예(기간 1개월·12개월, 주기 1일·28일)를 많이 쓰면 점검 6으로 줄이게 한다. 업무 규칙이 그 경계를 말하는 것만 남긴다.</a:t>
+              <a:t>구현을 확인하는 테스트(호출 순서·내부 메서드)는 리팩터링마다 깨지면서 업무 규칙은 확인하지 않는다.</a:t>
+            </a:r>
+          </a:p>
+          <a:p>
+            <a:pPr lvl="0"/>
+            <a:r>
+              <a:rPr lang="ko-KR" sz="1200"/>
+              <a:t>수용 테스트를 바꾸지 못하게 강제하는 방법(파일 쓰기 금지, 테스트 비활성화 탐지)은 "세션 08. 실행 제약과 가드레일의 역할"에서 다룬다.</a:t>
             </a:r>
           </a:p>
         </p:txBody>
@@ -1522,7 +1455,14 @@
             <a:pPr lvl="0"/>
             <a:r>
               <a:rPr lang="ko-KR" sz="1200"/>
-              <a:t>지금까지 위임할 과제의 "무엇"(작업 명세서)과 "무엇으로 받아들일까"(수용 기준)를 정했다. 다음 세션은 에이전트가 알아야 할 지식, 곧 맥락을 다룬다.</a:t>
+              <a:t>정기배송 모델 패키지는 code/s01/subscription/docs/에 있다.</a:t>
+            </a:r>
+          </a:p>
+          <a:p>
+            <a:pPr lvl="0"/>
+            <a:r>
+              <a:rPr lang="ko-KR" sz="1200"/>
+              <a:t>LLM이 경계값 예(기간 1개월·12개월, 주기 1일·28일)를 많이 쓰면 점검 6으로 줄이게 한다. 업무 규칙이 그 경계를 말하는 것만 남긴다.</a:t>
             </a:r>
           </a:p>
         </p:txBody>
@@ -1583,14 +1523,7 @@
             <a:pPr lvl="0"/>
             <a:r>
               <a:rPr lang="ko-KR" sz="1200"/>
-              <a:t>5는 회차 규칙의 "만료일까지"를 보이는 예다. 업무 규칙이 말하는 경계라서 수용 기준에 넣는다.</a:t>
-            </a:r>
-          </a:p>
-          <a:p>
-            <a:pPr lvl="0"/>
-            <a:r>
-              <a:rPr lang="ko-KR" sz="1200"/>
-              <a:t>공휴일(미정)의 수용 기준은 만들지 않는다.</a:t>
+              <a:t>지금까지 위임할 과제의 "무엇"(작업 명세서)과 "무엇으로 받아들일까"(수용 기준)를 정했다. 다음 세션은 에이전트가 알아야 할 지식, 곧 맥락을 다룬다.</a:t>
             </a:r>
           </a:p>
         </p:txBody>
@@ -1651,7 +1584,14 @@
             <a:pPr lvl="0"/>
             <a:r>
               <a:rPr lang="ko-KR" sz="1200"/>
-              <a:t>회차 날짜 계산을 따로 단위로 떼어도 된다. 그때도 수용 기준 5처럼 끝을 확인할 수용 기준을 붙인다.</a:t>
+              <a:t>5는 회차 규칙의 "만료일까지"를 보이는 예다. 업무 규칙이 말하는 경계라서 수용 기준에 넣는다.</a:t>
+            </a:r>
+          </a:p>
+          <a:p>
+            <a:pPr lvl="0"/>
+            <a:r>
+              <a:rPr lang="ko-KR" sz="1200"/>
+              <a:t>공휴일(미정)의 수용 기준은 만들지 않는다.</a:t>
             </a:r>
           </a:p>
         </p:txBody>
@@ -1665,6 +1605,67 @@
 </file>
 
 <file path=ppt/notesSlides/notesSlide26.xml><?xml version="1.0" encoding="utf-8"?>
+<p:notes xmlns:a="http://schemas.openxmlformats.org/drawingml/2006/main" xmlns:r="http://schemas.openxmlformats.org/officeDocument/2006/relationships" xmlns:p="http://schemas.openxmlformats.org/presentationml/2006/main">
+  <p:cSld>
+    <p:spTree>
+      <p:nvGrpSpPr>
+        <p:cNvPr id="1" name=""/>
+        <p:cNvGrpSpPr/>
+        <p:nvPr/>
+      </p:nvGrpSpPr>
+      <p:grpSpPr>
+        <a:xfrm>
+          <a:off x="0" y="0"/>
+          <a:ext cx="0" cy="0"/>
+          <a:chOff x="0" y="0"/>
+          <a:chExt cx="0" cy="0"/>
+        </a:xfrm>
+      </p:grpSpPr>
+      <p:sp>
+        <p:nvSpPr>
+          <p:cNvPr id="2" name="슬라이드 이미지 개체 틀"/>
+          <p:cNvSpPr/>
+          <p:nvPr>
+            <p:ph type="sldImg" idx="2"/>
+          </p:nvPr>
+        </p:nvSpPr>
+        <p:spPr/>
+        <p:txBody>
+          <a:bodyPr/>
+          <a:lstStyle/>
+          <a:p/>
+        </p:txBody>
+      </p:sp>
+      <p:sp>
+        <p:nvSpPr>
+          <p:cNvPr id="3" name="슬라이드 노트 개체 틀"/>
+          <p:cNvSpPr/>
+          <p:nvPr>
+            <p:ph type="body" idx="3"/>
+          </p:nvPr>
+        </p:nvSpPr>
+        <p:spPr/>
+        <p:txBody>
+          <a:bodyPr/>
+          <a:lstStyle/>
+          <a:p>
+            <a:pPr lvl="0"/>
+            <a:r>
+              <a:rPr lang="ko-KR" sz="1200"/>
+              <a:t>회차 날짜 계산을 따로 단위로 떼어도 된다. 그때도 수용 기준 5처럼 끝을 확인할 수용 기준을 붙인다.</a:t>
+            </a:r>
+          </a:p>
+        </p:txBody>
+      </p:sp>
+    </p:spTree>
+  </p:cSld>
+  <p:clrMapOvr>
+    <a:masterClrMapping/>
+  </p:clrMapOvr>
+</p:notes>
+</file>
+
+<file path=ppt/notesSlides/notesSlide27.xml><?xml version="1.0" encoding="utf-8"?>
 <p:notes xmlns:a="http://schemas.openxmlformats.org/drawingml/2006/main" xmlns:r="http://schemas.openxmlformats.org/officeDocument/2006/relationships" xmlns:p="http://schemas.openxmlformats.org/presentationml/2006/main">
   <p:cSld>
     <p:spTree>
@@ -5695,6 +5696,533 @@
         <p:cNvPr id="1" name="">
           <a:extLst>
             <a:ext uri="{FF2B5EF4-FFF2-40B4-BE49-F238E27FC236}">
+              <a16:creationId xmlns:a16="http://schemas.microsoft.com/office/drawing/2014/main" id="{8E4F1F13-426B-086B-7D8C-9A58A0F879DB}"/>
+            </a:ext>
+          </a:extLst>
+        </p:cNvPr>
+        <p:cNvGrpSpPr/>
+        <p:nvPr/>
+      </p:nvGrpSpPr>
+      <p:grpSpPr>
+        <a:xfrm>
+          <a:off x="0" y="0"/>
+          <a:ext cx="0" cy="0"/>
+          <a:chOff x="0" y="0"/>
+          <a:chExt cx="0" cy="0"/>
+        </a:xfrm>
+      </p:grpSpPr>
+      <p:sp>
+        <p:nvSpPr>
+          <p:cNvPr id="2" name="제목 1">
+            <a:extLst>
+              <a:ext uri="{FF2B5EF4-FFF2-40B4-BE49-F238E27FC236}">
+                <a16:creationId xmlns:a16="http://schemas.microsoft.com/office/drawing/2014/main" id="{AA26A92D-924E-0575-9551-F8FD7BFD3FAD}"/>
+              </a:ext>
+            </a:extLst>
+          </p:cNvPr>
+          <p:cNvSpPr>
+            <a:spLocks noGrp="1"/>
+          </p:cNvSpPr>
+          <p:nvPr>
+            <p:ph type="title"/>
+          </p:nvPr>
+        </p:nvSpPr>
+        <p:spPr/>
+        <p:txBody>
+          <a:bodyPr/>
+          <a:lstStyle/>
+          <a:p>
+            <a:r>
+              <a:rPr sz="2400" b="1">
+                <a:solidFill>
+                  <a:srgbClr val="000000"/>
+                </a:solidFill>
+                <a:latin typeface="맑은 고딕"/>
+                <a:ea typeface="맑은 고딕"/>
+              </a:rPr>
+              <a:t>테스트 먼저와 에이전트 </a:t>
+            </a:r>
+            <a:r>
+              <a:rPr sz="2000" b="1">
+                <a:solidFill>
+                  <a:srgbClr val="000000"/>
+                </a:solidFill>
+                <a:latin typeface="맑은 고딕"/>
+                <a:ea typeface="맑은 고딕"/>
+              </a:rPr>
+              <a:t>(1/2)</a:t>
+            </a:r>
+          </a:p>
+          <a:p>
+            <a:r>
+              <a:rPr sz="1100" b="1">
+                <a:solidFill>
+                  <a:srgbClr val="000000"/>
+                </a:solidFill>
+                <a:latin typeface="맑은 고딕"/>
+                <a:ea typeface="맑은 고딕"/>
+              </a:rPr>
+              <a:t>04. 예시에서 테스트로</a:t>
+            </a:r>
+          </a:p>
+        </p:txBody>
+      </p:sp>
+      <p:sp>
+        <p:nvSpPr>
+          <p:cNvPr id="3" name="슬라이드 번호 개체 틀 2">
+            <a:extLst>
+              <a:ext uri="{FF2B5EF4-FFF2-40B4-BE49-F238E27FC236}">
+                <a16:creationId xmlns:a16="http://schemas.microsoft.com/office/drawing/2014/main" id="{12CF30EE-4DFD-8063-56B8-B8689E76DFCA}"/>
+              </a:ext>
+            </a:extLst>
+          </p:cNvPr>
+          <p:cNvSpPr>
+            <a:spLocks noGrp="1"/>
+          </p:cNvSpPr>
+          <p:nvPr>
+            <p:ph type="sldNum" sz="quarter" idx="10"/>
+          </p:nvPr>
+        </p:nvSpPr>
+        <p:spPr/>
+        <p:txBody>
+          <a:bodyPr/>
+          <a:lstStyle/>
+          <a:p>
+            <a:pPr>
+              <a:defRPr/>
+            </a:pPr>
+            <a:r>
+              <a:rPr lang="en-US" altLang="ko-KR">
+                <a:solidFill>
+                  <a:prstClr val="black"/>
+                </a:solidFill>
+              </a:rPr>
+              <a:t>- 12 -</a:t>
+            </a:r>
+          </a:p>
+        </p:txBody>
+      </p:sp>
+      <p:sp>
+        <p:nvSpPr>
+          <p:cNvPr id="5" name="텍스트 개체 틀 4">
+            <a:extLst>
+              <a:ext uri="{FF2B5EF4-FFF2-40B4-BE49-F238E27FC236}">
+                <a16:creationId xmlns:a16="http://schemas.microsoft.com/office/drawing/2014/main" id="{D66274C8-E16F-5AEB-614B-D8D32DA3E8C6}"/>
+              </a:ext>
+            </a:extLst>
+          </p:cNvPr>
+          <p:cNvSpPr>
+            <a:spLocks noGrp="1"/>
+          </p:cNvSpPr>
+          <p:nvPr>
+            <p:ph type="body" sz="quarter" idx="11"/>
+          </p:nvPr>
+        </p:nvSpPr>
+        <p:spPr/>
+        <p:txBody>
+          <a:bodyPr/>
+          <a:lstStyle/>
+          <a:p>
+            <a:r>
+              <a:rPr kumimoji="1" lang="en-US" altLang="ko-KR" sz="1400" dirty="0" err="1"/>
+              <a:t>04. 수용 기준과 검증 가능한 작업 단위</a:t>
+            </a:r>
+          </a:p>
+        </p:txBody>
+      </p:sp>
+      <p:sp>
+        <p:nvSpPr>
+          <p:cNvPr id="6" name="텍스트 개체 틀 5">
+            <a:extLst>
+              <a:ext uri="{FF2B5EF4-FFF2-40B4-BE49-F238E27FC236}">
+                <a16:creationId xmlns:a16="http://schemas.microsoft.com/office/drawing/2014/main" id="{A24E58E1-194B-A320-AEEE-24D08685BB67}"/>
+              </a:ext>
+            </a:extLst>
+          </p:cNvPr>
+          <p:cNvSpPr>
+            <a:spLocks noGrp="1"/>
+          </p:cNvSpPr>
+          <p:nvPr>
+            <p:ph type="body" sz="quarter" idx="12"/>
+          </p:nvPr>
+        </p:nvSpPr>
+        <p:spPr/>
+        <p:txBody>
+          <a:bodyPr/>
+          <a:lstStyle/>
+          <a:p>
+            <a:endParaRPr kumimoji="1" lang="ko-KR" altLang="en-US" dirty="0"/>
+          </a:p>
+        </p:txBody>
+      </p:sp>
+      <p:sp>
+        <p:nvSpPr>
+          <p:cNvPr id="7" name="텍스트 개체 틀 6">
+            <a:extLst>
+              <a:ext uri="{FF2B5EF4-FFF2-40B4-BE49-F238E27FC236}">
+                <a16:creationId xmlns:a16="http://schemas.microsoft.com/office/drawing/2014/main" id="{A219F420-613B-6234-45F6-0955A9A4505F}"/>
+              </a:ext>
+            </a:extLst>
+          </p:cNvPr>
+          <p:cNvSpPr>
+            <a:spLocks noGrp="1"/>
+          </p:cNvSpPr>
+          <p:nvPr>
+            <p:ph type="body" sz="quarter" idx="13"/>
+          </p:nvPr>
+        </p:nvSpPr>
+        <p:spPr/>
+        <p:txBody>
+          <a:bodyPr/>
+          <a:lstStyle/>
+          <a:p>
+            <a:endParaRPr kumimoji="1" lang="en-US" altLang="ko-KR" dirty="0"/>
+          </a:p>
+        </p:txBody>
+      </p:sp>
+      <p:sp>
+        <p:nvSpPr>
+          <p:cNvPr id="8" name="내용 개체 틀 7">
+            <a:extLst>
+              <a:ext uri="{FF2B5EF4-FFF2-40B4-BE49-F238E27FC236}">
+                <a16:creationId xmlns:a16="http://schemas.microsoft.com/office/drawing/2014/main" id="{BEBA2C4A-B0BF-F2E4-EA6E-614C99CBA184}"/>
+              </a:ext>
+            </a:extLst>
+          </p:cNvPr>
+          <p:cNvSpPr>
+            <a:spLocks noGrp="1"/>
+          </p:cNvSpPr>
+          <p:nvPr>
+            <p:ph idx="1"/>
+          </p:nvPr>
+        </p:nvSpPr>
+        <p:spPr>
+          <a:xfrm>
+            <a:off x="365760" y="960120"/>
+            <a:ext cx="8412480" cy="2788920"/>
+          </a:xfrm>
+        </p:spPr>
+        <p:txBody>
+          <a:bodyPr>
+            <a:normAutofit/>
+          </a:bodyPr>
+          <a:lstStyle/>
+          <a:p>
+            <a:pPr marL="0" indent="0">
+              <a:spcBef>
+                <a:spcPts val="600"/>
+              </a:spcBef>
+              <a:spcAft>
+                <a:spcPts val="600"/>
+              </a:spcAft>
+              <a:buNone/>
+            </a:pPr>
+            <a:r>
+              <a:rPr sz="1800" b="0">
+                <a:solidFill>
+                  <a:srgbClr val="000000"/>
+                </a:solidFill>
+                <a:latin typeface="맑은 고딕"/>
+                <a:ea typeface="맑은 고딕"/>
+              </a:rPr>
+              <a:t>사람이 </a:t>
+            </a:r>
+            <a:r>
+              <a:rPr sz="1800" b="1">
+                <a:solidFill>
+                  <a:srgbClr val="000000"/>
+                </a:solidFill>
+                <a:latin typeface="맑은 고딕"/>
+                <a:ea typeface="맑은 고딕"/>
+              </a:rPr>
+              <a:t>수용 테스트</a:t>
+            </a:r>
+            <a:r>
+              <a:rPr sz="1400" b="0">
+                <a:solidFill>
+                  <a:srgbClr val="000000"/>
+                </a:solidFill>
+                <a:latin typeface="맑은 고딕"/>
+                <a:ea typeface="맑은 고딕"/>
+              </a:rPr>
+              <a:t>(바깥 고리)</a:t>
+            </a:r>
+            <a:r>
+              <a:rPr sz="1800" b="0">
+                <a:solidFill>
+                  <a:srgbClr val="000000"/>
+                </a:solidFill>
+                <a:latin typeface="맑은 고딕"/>
+                <a:ea typeface="맑은 고딕"/>
+              </a:rPr>
+              <a:t>를 먼저 주면, 에이전트는 </a:t>
+            </a:r>
+            <a:r>
+              <a:rPr sz="1800" b="1">
+                <a:solidFill>
+                  <a:srgbClr val="000000"/>
+                </a:solidFill>
+                <a:latin typeface="맑은 고딕"/>
+                <a:ea typeface="맑은 고딕"/>
+              </a:rPr>
+              <a:t>Red → Green → Refactor</a:t>
+            </a:r>
+            <a:r>
+              <a:rPr sz="1800" b="0">
+                <a:solidFill>
+                  <a:srgbClr val="000000"/>
+                </a:solidFill>
+                <a:latin typeface="맑은 고딕"/>
+                <a:ea typeface="맑은 고딕"/>
+              </a:rPr>
+              <a:t>로 단위 테스트와 구현</a:t>
+            </a:r>
+            <a:r>
+              <a:rPr sz="1400" b="0">
+                <a:solidFill>
+                  <a:srgbClr val="000000"/>
+                </a:solidFill>
+                <a:latin typeface="맑은 고딕"/>
+                <a:ea typeface="맑은 고딕"/>
+              </a:rPr>
+              <a:t>(안쪽 고리)</a:t>
+            </a:r>
+            <a:r>
+              <a:rPr sz="1800" b="0">
+                <a:solidFill>
+                  <a:srgbClr val="000000"/>
+                </a:solidFill>
+                <a:latin typeface="맑은 고딕"/>
+                <a:ea typeface="맑은 고딕"/>
+              </a:rPr>
+              <a:t>을 만든다. 기대값은 바깥 고리에 고정된다.</a:t>
+            </a:r>
+          </a:p>
+          <a:p>
+            <a:pPr lvl="2" marL="723900" indent="-368300">
+              <a:spcBef>
+                <a:spcPts val="600"/>
+              </a:spcBef>
+              <a:spcAft>
+                <a:spcPts val="600"/>
+              </a:spcAft>
+              <a:buSzPct val="90000"/>
+              <a:buFont typeface="Wingdings" pitchFamily="2" charset="2"/>
+              <a:buChar char=""/>
+            </a:pPr>
+            <a:r>
+              <a:rPr sz="1800" b="0">
+                <a:solidFill>
+                  <a:srgbClr val="000000"/>
+                </a:solidFill>
+                <a:latin typeface="맑은 고딕"/>
+                <a:ea typeface="맑은 고딕"/>
+              </a:rPr>
+              <a:t>항상 </a:t>
+            </a:r>
+            <a:r>
+              <a:rPr sz="1800" b="1">
+                <a:solidFill>
+                  <a:srgbClr val="000000"/>
+                </a:solidFill>
+                <a:latin typeface="맑은 고딕"/>
+                <a:ea typeface="맑은 고딕"/>
+              </a:rPr>
+              <a:t>TDD 주기</a:t>
+            </a:r>
+            <a:r>
+              <a:rPr sz="1800" b="0">
+                <a:solidFill>
+                  <a:srgbClr val="000000"/>
+                </a:solidFill>
+                <a:latin typeface="맑은 고딕"/>
+                <a:ea typeface="맑은 고딕"/>
+              </a:rPr>
+              <a:t>를 따른다 — 빨강 → 초록 → 리팩터링이다</a:t>
+            </a:r>
+            <a:r>
+              <a:rPr sz="1000" b="0">
+                <a:solidFill>
+                  <a:srgbClr val="000000"/>
+                </a:solidFill>
+                <a:latin typeface="맑은 고딕"/>
+                <a:ea typeface="맑은 고딕"/>
+              </a:rPr>
+              <a:t>, </a:t>
+            </a:r>
+            <a:r>
+              <a:rPr sz="1000" b="0">
+                <a:solidFill>
+                  <a:srgbClr val="000000"/>
+                </a:solidFill>
+                <a:latin typeface="맑은 고딕"/>
+                <a:ea typeface="맑은 고딕"/>
+              </a:rPr>
+              <a:t>"Always follow the TDD cycle: Red → Green → Refactor", [Beck 2025]</a:t>
+            </a:r>
+          </a:p>
+          <a:p>
+            <a:pPr lvl="3" marL="1077913" indent="-354013">
+              <a:spcBef>
+                <a:spcPts val="600"/>
+              </a:spcBef>
+              <a:spcAft>
+                <a:spcPts val="600"/>
+              </a:spcAft>
+              <a:buSzPct val="90000"/>
+              <a:buFont typeface="Wingdings" pitchFamily="2" charset="2"/>
+              <a:buChar char=""/>
+            </a:pPr>
+            <a:r>
+              <a:rPr sz="1600" b="1">
+                <a:solidFill>
+                  <a:srgbClr val="000000"/>
+                </a:solidFill>
+                <a:latin typeface="맑은 고딕"/>
+                <a:ea typeface="맑은 고딕"/>
+              </a:rPr>
+              <a:t>가장 단순한 실패하는 테스트를 먼저</a:t>
+            </a:r>
+            <a:r>
+              <a:rPr sz="1600" b="0">
+                <a:solidFill>
+                  <a:srgbClr val="000000"/>
+                </a:solidFill>
+                <a:latin typeface="맑은 고딕"/>
+                <a:ea typeface="맑은 고딕"/>
+              </a:rPr>
+              <a:t> 쓴다</a:t>
+            </a:r>
+            <a:r>
+              <a:rPr sz="1000" b="0">
+                <a:solidFill>
+                  <a:srgbClr val="000000"/>
+                </a:solidFill>
+                <a:latin typeface="맑은 고딕"/>
+                <a:ea typeface="맑은 고딕"/>
+              </a:rPr>
+              <a:t>, </a:t>
+            </a:r>
+            <a:r>
+              <a:rPr sz="1000" b="0">
+                <a:solidFill>
+                  <a:srgbClr val="000000"/>
+                </a:solidFill>
+                <a:latin typeface="맑은 고딕"/>
+                <a:ea typeface="맑은 고딕"/>
+              </a:rPr>
+              <a:t>"Write the simplest failing test first"</a:t>
+            </a:r>
+            <a:r>
+              <a:rPr sz="1000" b="0">
+                <a:solidFill>
+                  <a:srgbClr val="000000"/>
+                </a:solidFill>
+                <a:latin typeface="맑은 고딕"/>
+                <a:ea typeface="맑은 고딕"/>
+              </a:rPr>
+              <a:t>, </a:t>
+            </a:r>
+            <a:r>
+              <a:rPr sz="1000" b="0">
+                <a:solidFill>
+                  <a:srgbClr val="000000"/>
+                </a:solidFill>
+                <a:latin typeface="맑은 고딕"/>
+                <a:ea typeface="맑은 고딕"/>
+              </a:rPr>
+              <a:t>[Beck 2025]</a:t>
+            </a:r>
+          </a:p>
+        </p:txBody>
+      </p:sp>
+      <p:sp>
+        <p:nvSpPr>
+          <p:cNvPr id="9" name="TextBox 12">
+            <a:extLst>
+              <a:ext uri="{FF2B5EF4-FFF2-40B4-BE49-F238E27FC236}">
+                <a16:creationId xmlns:a16="http://schemas.microsoft.com/office/drawing/2014/main" id="{654EDDB4-901F-3D48-A715-17D163E8A7AC}"/>
+              </a:ext>
+            </a:extLst>
+          </p:cNvPr>
+          <p:cNvSpPr txBox="1"/>
+          <p:nvPr/>
+        </p:nvSpPr>
+        <p:spPr>
+          <a:xfrm>
+            <a:off x="365760" y="3186268"/>
+            <a:ext cx="8412480" cy="201168"/>
+          </a:xfrm>
+          <a:prstGeom prst="rect">
+            <a:avLst/>
+          </a:prstGeom>
+          <a:noFill/>
+        </p:spPr>
+        <p:txBody>
+          <a:bodyPr wrap="square">
+            <a:spAutoFit/>
+          </a:bodyPr>
+          <a:lstStyle/>
+          <a:p>
+            <a:pPr algn="ctr"/>
+            <a:r>
+              <a:rPr sz="1400" b="1">
+                <a:solidFill>
+                  <a:srgbClr val="000000"/>
+                </a:solidFill>
+                <a:latin typeface="맑은 고딕"/>
+                <a:ea typeface="맑은 고딕"/>
+              </a:rPr>
+              <a:t>수용 테스트와 TDD의 두 고리</a:t>
+            </a:r>
+          </a:p>
+        </p:txBody>
+      </p:sp>
+      <p:pic>
+        <p:nvPicPr>
+          <p:cNvPr id="10" name="mermaid Diagram 4"/>
+          <p:cNvPicPr>
+            <a:picLocks noChangeAspect="1"/>
+          </p:cNvPicPr>
+          <p:nvPr/>
+        </p:nvPicPr>
+        <p:blipFill>
+          <a:blip r:embed="mermaidImage4"/>
+          <a:stretch>
+            <a:fillRect/>
+          </a:stretch>
+        </p:blipFill>
+        <p:spPr>
+          <a:xfrm>
+            <a:off x="1652191" y="3424012"/>
+            <a:ext cx="5839619" cy="856577"/>
+          </a:xfrm>
+          <a:prstGeom prst="rect">
+            <a:avLst/>
+          </a:prstGeom>
+        </p:spPr>
+      </p:pic>
+    </p:spTree>
+    <p:extLst>
+      <p:ext uri="{BB962C8B-B14F-4D97-AF65-F5344CB8AC3E}">
+        <p14:creationId xmlns:p14="http://schemas.microsoft.com/office/powerpoint/2010/main" val="3555436673"/>
+      </p:ext>
+    </p:extLst>
+  </p:cSld>
+  <p:clrMapOvr>
+    <a:masterClrMapping/>
+  </p:clrMapOvr>
+</p:sld>
+</file>
+
+<file path=ppt/slides/slide13.xml><?xml version="1.0" encoding="utf-8"?>
+<p:sld xmlns:a="http://schemas.openxmlformats.org/drawingml/2006/main" xmlns:r="http://schemas.openxmlformats.org/officeDocument/2006/relationships" xmlns:p="http://schemas.openxmlformats.org/presentationml/2006/main">
+  <p:cSld>
+    <p:spTree>
+      <p:nvGrpSpPr>
+        <p:cNvPr id="1" name="">
+          <a:extLst>
+            <a:ext uri="{FF2B5EF4-FFF2-40B4-BE49-F238E27FC236}">
               <a16:creationId xmlns:a16="http://schemas.microsoft.com/office/drawing/2014/main" id="{60B87152-D004-1569-E429-90A42420A65C}"/>
             </a:ext>
           </a:extLst>
@@ -5739,7 +6267,17 @@
                 <a:latin typeface="맑은 고딕"/>
                 <a:ea typeface="맑은 고딕"/>
               </a:rPr>
-              <a:t>테스트 먼저와 에이전트</a:t>
+              <a:t>테스트 먼저와 에이전트 </a:t>
+            </a:r>
+            <a:r>
+              <a:rPr sz="2000" b="1">
+                <a:solidFill>
+                  <a:srgbClr val="000000"/>
+                </a:solidFill>
+                <a:latin typeface="맑은 고딕"/>
+                <a:ea typeface="맑은 고딕"/>
+              </a:rPr>
+              <a:t>(2/2)</a:t>
             </a:r>
           </a:p>
           <a:p>
@@ -5855,7 +6393,7 @@
           </p:nvPr>
         </p:nvGraphicFramePr>
         <p:xfrm>
-          <a:off x="1872806" y="4649485"/>
+          <a:off x="1872806" y="1258570"/>
           <a:ext cx="5384800" cy="3873500"/>
         </p:xfrm>
         <a:graphic>
@@ -6593,8 +7131,8 @@
         </p:nvSpPr>
         <p:spPr>
           <a:xfrm>
-            <a:off x="365760" y="960120"/>
-            <a:ext cx="8412480" cy="1587442"/>
+            <a:off x="1033239" y="5678424"/>
+            <a:ext cx="6528540" cy="795528"/>
           </a:xfrm>
           <a:prstGeom prst="rect">
             <a:avLst/>
@@ -6607,158 +7145,7 @@
           </a:bodyPr>
           <a:lstStyle/>
           <a:p>
-            <a:pPr marL="0" indent="0">
-              <a:spcBef>
-                <a:spcPts val="600"/>
-              </a:spcBef>
-              <a:spcAft>
-                <a:spcPts val="600"/>
-              </a:spcAft>
-              <a:buNone/>
-            </a:pPr>
-            <a:r>
-              <a:rPr sz="1800" b="0">
-                <a:solidFill>
-                  <a:srgbClr val="000000"/>
-                </a:solidFill>
-                <a:latin typeface="맑은 고딕"/>
-                <a:ea typeface="맑은 고딕"/>
-              </a:rPr>
-              <a:t>사람이 </a:t>
-            </a:r>
-            <a:r>
-              <a:rPr sz="1800" b="1">
-                <a:solidFill>
-                  <a:srgbClr val="000000"/>
-                </a:solidFill>
-                <a:latin typeface="맑은 고딕"/>
-                <a:ea typeface="맑은 고딕"/>
-              </a:rPr>
-              <a:t>수용 테스트</a:t>
-            </a:r>
-            <a:r>
-              <a:rPr sz="1400" b="0">
-                <a:solidFill>
-                  <a:srgbClr val="000000"/>
-                </a:solidFill>
-                <a:latin typeface="맑은 고딕"/>
-                <a:ea typeface="맑은 고딕"/>
-              </a:rPr>
-              <a:t>(바깥 고리)</a:t>
-            </a:r>
-            <a:r>
-              <a:rPr sz="1800" b="0">
-                <a:solidFill>
-                  <a:srgbClr val="000000"/>
-                </a:solidFill>
-                <a:latin typeface="맑은 고딕"/>
-                <a:ea typeface="맑은 고딕"/>
-              </a:rPr>
-              <a:t>를 먼저 주면, 에이전트는 </a:t>
-            </a:r>
-            <a:r>
-              <a:rPr sz="1800" b="1">
-                <a:solidFill>
-                  <a:srgbClr val="000000"/>
-                </a:solidFill>
-                <a:latin typeface="맑은 고딕"/>
-                <a:ea typeface="맑은 고딕"/>
-              </a:rPr>
-              <a:t>Red → Green → Refactor</a:t>
-            </a:r>
-            <a:r>
-              <a:rPr sz="1800" b="0">
-                <a:solidFill>
-                  <a:srgbClr val="000000"/>
-                </a:solidFill>
-                <a:latin typeface="맑은 고딕"/>
-                <a:ea typeface="맑은 고딕"/>
-              </a:rPr>
-              <a:t>로 단위 테스트와 구현</a:t>
-            </a:r>
-            <a:r>
-              <a:rPr sz="1400" b="0">
-                <a:solidFill>
-                  <a:srgbClr val="000000"/>
-                </a:solidFill>
-                <a:latin typeface="맑은 고딕"/>
-                <a:ea typeface="맑은 고딕"/>
-              </a:rPr>
-              <a:t>(안쪽 고리)</a:t>
-            </a:r>
-            <a:r>
-              <a:rPr sz="1800" b="0">
-                <a:solidFill>
-                  <a:srgbClr val="000000"/>
-                </a:solidFill>
-                <a:latin typeface="맑은 고딕"/>
-                <a:ea typeface="맑은 고딕"/>
-              </a:rPr>
-              <a:t>을 만든다. 기대값은 바깥 고리에 고정된다.</a:t>
-            </a:r>
-          </a:p>
-          <a:p>
-            <a:pPr lvl="2" marL="723900" indent="-368300">
-              <a:spcBef>
-                <a:spcPts val="600"/>
-              </a:spcBef>
-              <a:spcAft>
-                <a:spcPts val="600"/>
-              </a:spcAft>
-              <a:buSzPct val="90000"/>
-              <a:buFont typeface="Wingdings" pitchFamily="2" charset="2"/>
-              <a:buChar char=""/>
-            </a:pPr>
-            <a:r>
-              <a:rPr sz="1800" b="0">
-                <a:solidFill>
-                  <a:srgbClr val="000000"/>
-                </a:solidFill>
-                <a:latin typeface="맑은 고딕"/>
-                <a:ea typeface="맑은 고딕"/>
-              </a:rPr>
-              <a:t>항상 TDD 주기를 따르고 </a:t>
-            </a:r>
-            <a:r>
-              <a:rPr sz="1800" b="1">
-                <a:solidFill>
-                  <a:srgbClr val="000000"/>
-                </a:solidFill>
-                <a:latin typeface="맑은 고딕"/>
-                <a:ea typeface="맑은 고딕"/>
-              </a:rPr>
-              <a:t>가장 단순한 실패하는 테스트를 먼저</a:t>
-            </a:r>
-            <a:r>
-              <a:rPr sz="1800" b="0">
-                <a:solidFill>
-                  <a:srgbClr val="000000"/>
-                </a:solidFill>
-                <a:latin typeface="맑은 고딕"/>
-                <a:ea typeface="맑은 고딕"/>
-              </a:rPr>
-              <a:t> 쓴다</a:t>
-            </a:r>
-            <a:r>
-              <a:rPr sz="1000" b="0">
-                <a:solidFill>
-                  <a:srgbClr val="000000"/>
-                </a:solidFill>
-                <a:latin typeface="맑은 고딕"/>
-                <a:ea typeface="맑은 고딕"/>
-              </a:rPr>
-              <a:t>, </a:t>
-            </a:r>
-            <a:r>
-              <a:rPr sz="1000" b="0">
-                <a:solidFill>
-                  <a:srgbClr val="000000"/>
-                </a:solidFill>
-                <a:latin typeface="맑은 고딕"/>
-                <a:ea typeface="맑은 고딕"/>
-              </a:rPr>
-              <a:t>"Always follow the TDD cycle: Red → Green → Refactor", "Write the simplest failing test first", [Beck 2025]</a:t>
-            </a:r>
+            <a:endParaRPr/>
           </a:p>
         </p:txBody>
       </p:sp>
@@ -6822,7 +7209,7 @@
                 <a:ea typeface="맑은 고딕" panose="020B0503020000020004" pitchFamily="34" charset="-127"/>
                 <a:cs typeface="+mn-cs"/>
               </a:rPr>
-              <a:t>- 12 -</a:t>
+              <a:t>- 13 -</a:t>
             </a:r>
           </a:p>
         </p:txBody>
@@ -6841,7 +7228,7 @@
         </p:nvSpPr>
         <p:spPr>
           <a:xfrm>
-            <a:off x="365760" y="4351035"/>
+            <a:off x="365760" y="960120"/>
             <a:ext cx="8412480" cy="222250"/>
           </a:xfrm>
           <a:prstGeom prst="rect">
@@ -6876,79 +7263,6 @@
           </a:p>
         </p:txBody>
       </p:sp>
-      <p:sp>
-        <p:nvSpPr>
-          <p:cNvPr id="15" name="TextBox 12">
-            <a:extLst>
-              <a:ext uri="{FF2B5EF4-FFF2-40B4-BE49-F238E27FC236}">
-                <a16:creationId xmlns:a16="http://schemas.microsoft.com/office/drawing/2014/main" id="{654EDDB4-901F-3D48-A715-17D163E8A7AC}"/>
-              </a:ext>
-            </a:extLst>
-          </p:cNvPr>
-          <p:cNvSpPr txBox="1"/>
-          <p:nvPr/>
-        </p:nvSpPr>
-        <p:spPr>
-          <a:xfrm>
-            <a:off x="365760" y="2673650"/>
-            <a:ext cx="8412480" cy="201168"/>
-          </a:xfrm>
-          <a:prstGeom prst="rect">
-            <a:avLst/>
-          </a:prstGeom>
-          <a:noFill/>
-        </p:spPr>
-        <p:txBody>
-          <a:bodyPr wrap="square">
-            <a:spAutoFit/>
-          </a:bodyPr>
-          <a:lstStyle/>
-          <a:p>
-            <a:pPr algn="ctr">
-              <a:spcBef>
-                <a:spcPts val="0"/>
-              </a:spcBef>
-              <a:spcAft>
-                <a:spcPts val="0"/>
-              </a:spcAft>
-            </a:pPr>
-            <a:r>
-              <a:rPr sz="1400" b="1">
-                <a:solidFill>
-                  <a:srgbClr val="000000"/>
-                </a:solidFill>
-                <a:latin typeface="맑은 고딕"/>
-                <a:ea typeface="맑은 고딕"/>
-              </a:rPr>
-              <a:t>수용 테스트와 TDD의 두 고리</a:t>
-            </a:r>
-          </a:p>
-        </p:txBody>
-      </p:sp>
-      <p:pic>
-        <p:nvPicPr>
-          <p:cNvPr id="16" name="mermaid Diagram 4"/>
-          <p:cNvPicPr>
-            <a:picLocks noChangeAspect="1"/>
-          </p:cNvPicPr>
-          <p:nvPr/>
-        </p:nvPicPr>
-        <p:blipFill>
-          <a:blip r:embed="mermaidImage4"/>
-          <a:stretch>
-            <a:fillRect/>
-          </a:stretch>
-        </p:blipFill>
-        <p:spPr>
-          <a:xfrm>
-            <a:off x="811165" y="2911394"/>
-            <a:ext cx="7508081" cy="1101313"/>
-          </a:xfrm>
-          <a:prstGeom prst="rect">
-            <a:avLst/>
-          </a:prstGeom>
-        </p:spPr>
-      </p:pic>
     </p:spTree>
     <p:extLst>
       <p:ext uri="{BB962C8B-B14F-4D97-AF65-F5344CB8AC3E}">
@@ -6962,7 +7276,7 @@
 </p:sld>
 </file>
 
-<file path=ppt/slides/slide13.xml><?xml version="1.0" encoding="utf-8"?>
+<file path=ppt/slides/slide14.xml><?xml version="1.0" encoding="utf-8"?>
 <p:sld xmlns:a="http://schemas.openxmlformats.org/drawingml/2006/main" xmlns:r="http://schemas.openxmlformats.org/officeDocument/2006/relationships" xmlns:p="http://schemas.openxmlformats.org/presentationml/2006/main">
   <p:cSld>
     <p:spTree>
@@ -8225,7 +8539,7 @@
                 <a:ea typeface="맑은 고딕" panose="020B0503020000020004" pitchFamily="34" charset="-127"/>
                 <a:cs typeface="+mn-cs"/>
               </a:rPr>
-              <a:t>- 13 -</a:t>
+              <a:t>- 14 -</a:t>
             </a:r>
           </a:p>
         </p:txBody>
@@ -8292,7 +8606,7 @@
 </p:sld>
 </file>
 
-<file path=ppt/slides/slide14.xml><?xml version="1.0" encoding="utf-8"?>
+<file path=ppt/slides/slide15.xml><?xml version="1.0" encoding="utf-8"?>
 <p:sld xmlns:a="http://schemas.openxmlformats.org/drawingml/2006/main" xmlns:r="http://schemas.openxmlformats.org/officeDocument/2006/relationships" xmlns:p="http://schemas.openxmlformats.org/presentationml/2006/main">
   <p:cSld>
     <p:spTree>
@@ -8391,7 +8705,7 @@
                   <a:prstClr val="black"/>
                 </a:solidFill>
               </a:rPr>
-              <a:t>- 14 -</a:t>
+              <a:t>- 15 -</a:t>
             </a:r>
           </a:p>
         </p:txBody>
@@ -8769,7 +9083,7 @@
 </p:sld>
 </file>
 
-<file path=ppt/slides/slide15.xml><?xml version="1.0" encoding="utf-8"?>
+<file path=ppt/slides/slide16.xml><?xml version="1.0" encoding="utf-8"?>
 <p:sld xmlns:a="http://schemas.openxmlformats.org/drawingml/2006/main" xmlns:r="http://schemas.openxmlformats.org/officeDocument/2006/relationships" xmlns:p="http://schemas.openxmlformats.org/presentationml/2006/main">
   <p:cSld>
     <p:spTree>
@@ -8868,7 +9182,7 @@
                   <a:prstClr val="black"/>
                 </a:solidFill>
               </a:rPr>
-              <a:t>- 15 -</a:t>
+              <a:t>- 16 -</a:t>
             </a:r>
           </a:p>
         </p:txBody>
@@ -9458,7 +9772,7 @@
 </p:sld>
 </file>
 
-<file path=ppt/slides/slide16.xml><?xml version="1.0" encoding="utf-8"?>
+<file path=ppt/slides/slide17.xml><?xml version="1.0" encoding="utf-8"?>
 <p:sld xmlns:a="http://schemas.openxmlformats.org/drawingml/2006/main" xmlns:r="http://schemas.openxmlformats.org/officeDocument/2006/relationships" xmlns:p="http://schemas.openxmlformats.org/presentationml/2006/main">
   <p:cSld>
     <p:spTree>
@@ -10548,7 +10862,7 @@
                 <a:ea typeface="맑은 고딕" panose="020B0503020000020004" pitchFamily="34" charset="-127"/>
                 <a:cs typeface="+mn-cs"/>
               </a:rPr>
-              <a:t>- 16 -</a:t>
+              <a:t>- 17 -</a:t>
             </a:r>
           </a:p>
         </p:txBody>
@@ -10615,7 +10929,7 @@
 </p:sld>
 </file>
 
-<file path=ppt/slides/slide17.xml><?xml version="1.0" encoding="utf-8"?>
+<file path=ppt/slides/slide18.xml><?xml version="1.0" encoding="utf-8"?>
 <p:sld xmlns:a="http://schemas.openxmlformats.org/drawingml/2006/main" xmlns:r="http://schemas.openxmlformats.org/officeDocument/2006/relationships" xmlns:p="http://schemas.openxmlformats.org/presentationml/2006/main">
   <p:cSld>
     <p:spTree>
@@ -10714,7 +11028,7 @@
                   <a:prstClr val="black"/>
                 </a:solidFill>
               </a:rPr>
-              <a:t>- 17 -</a:t>
+              <a:t>- 18 -</a:t>
             </a:r>
           </a:p>
         </p:txBody>
@@ -11154,7 +11468,7 @@
 </p:sld>
 </file>
 
-<file path=ppt/slides/slide18.xml><?xml version="1.0" encoding="utf-8"?>
+<file path=ppt/slides/slide19.xml><?xml version="1.0" encoding="utf-8"?>
 <p:sld xmlns:a="http://schemas.openxmlformats.org/drawingml/2006/main" xmlns:r="http://schemas.openxmlformats.org/officeDocument/2006/relationships" xmlns:p="http://schemas.openxmlformats.org/presentationml/2006/main">
   <p:cSld>
     <p:spTree>
@@ -12364,7 +12678,7 @@
                 <a:ea typeface="맑은 고딕" panose="020B0503020000020004" pitchFamily="34" charset="-127"/>
                 <a:cs typeface="+mn-cs"/>
               </a:rPr>
-              <a:t>- 18 -</a:t>
+              <a:t>- 19 -</a:t>
             </a:r>
           </a:p>
         </p:txBody>
@@ -12431,7 +12745,470 @@
 </p:sld>
 </file>
 
-<file path=ppt/slides/slide19.xml><?xml version="1.0" encoding="utf-8"?>
+<file path=ppt/slides/slide2.xml><?xml version="1.0" encoding="utf-8"?>
+<p:sld xmlns:a="http://schemas.openxmlformats.org/drawingml/2006/main" xmlns:r="http://schemas.openxmlformats.org/officeDocument/2006/relationships" xmlns:p="http://schemas.openxmlformats.org/presentationml/2006/main">
+  <p:cSld>
+    <p:spTree>
+      <p:nvGrpSpPr>
+        <p:cNvPr id="1" name="">
+          <a:extLst>
+            <a:ext uri="{FF2B5EF4-FFF2-40B4-BE49-F238E27FC236}">
+              <a16:creationId xmlns:a16="http://schemas.microsoft.com/office/drawing/2014/main" id="{8E4F1F13-426B-086B-7D8C-9A58A0F879DB}"/>
+            </a:ext>
+          </a:extLst>
+        </p:cNvPr>
+        <p:cNvGrpSpPr/>
+        <p:nvPr/>
+      </p:nvGrpSpPr>
+      <p:grpSpPr>
+        <a:xfrm>
+          <a:off x="0" y="0"/>
+          <a:ext cx="0" cy="0"/>
+          <a:chOff x="0" y="0"/>
+          <a:chExt cx="0" cy="0"/>
+        </a:xfrm>
+      </p:grpSpPr>
+      <p:sp>
+        <p:nvSpPr>
+          <p:cNvPr id="2" name="제목 1">
+            <a:extLst>
+              <a:ext uri="{FF2B5EF4-FFF2-40B4-BE49-F238E27FC236}">
+                <a16:creationId xmlns:a16="http://schemas.microsoft.com/office/drawing/2014/main" id="{AA26A92D-924E-0575-9551-F8FD7BFD3FAD}"/>
+              </a:ext>
+            </a:extLst>
+          </p:cNvPr>
+          <p:cNvSpPr>
+            <a:spLocks noGrp="1"/>
+          </p:cNvSpPr>
+          <p:nvPr>
+            <p:ph type="title"/>
+          </p:nvPr>
+        </p:nvSpPr>
+        <p:spPr/>
+        <p:txBody>
+          <a:bodyPr/>
+          <a:lstStyle/>
+          <a:p>
+            <a:r>
+              <a:rPr sz="2400" b="1">
+                <a:solidFill>
+                  <a:srgbClr val="000000"/>
+                </a:solidFill>
+                <a:latin typeface="맑은 고딕"/>
+                <a:ea typeface="맑은 고딕"/>
+              </a:rPr>
+              <a:t>01. 세션 목표</a:t>
+            </a:r>
+          </a:p>
+        </p:txBody>
+      </p:sp>
+      <p:sp>
+        <p:nvSpPr>
+          <p:cNvPr id="3" name="슬라이드 번호 개체 틀 2">
+            <a:extLst>
+              <a:ext uri="{FF2B5EF4-FFF2-40B4-BE49-F238E27FC236}">
+                <a16:creationId xmlns:a16="http://schemas.microsoft.com/office/drawing/2014/main" id="{12CF30EE-4DFD-8063-56B8-B8689E76DFCA}"/>
+              </a:ext>
+            </a:extLst>
+          </p:cNvPr>
+          <p:cNvSpPr>
+            <a:spLocks noGrp="1"/>
+          </p:cNvSpPr>
+          <p:nvPr>
+            <p:ph type="sldNum" sz="quarter" idx="10"/>
+          </p:nvPr>
+        </p:nvSpPr>
+        <p:spPr/>
+        <p:txBody>
+          <a:bodyPr/>
+          <a:lstStyle/>
+          <a:p>
+            <a:pPr>
+              <a:defRPr/>
+            </a:pPr>
+            <a:r>
+              <a:rPr lang="en-US" altLang="ko-KR">
+                <a:solidFill>
+                  <a:prstClr val="black"/>
+                </a:solidFill>
+              </a:rPr>
+              <a:t>- 2 -</a:t>
+            </a:r>
+          </a:p>
+        </p:txBody>
+      </p:sp>
+      <p:sp>
+        <p:nvSpPr>
+          <p:cNvPr id="5" name="텍스트 개체 틀 4">
+            <a:extLst>
+              <a:ext uri="{FF2B5EF4-FFF2-40B4-BE49-F238E27FC236}">
+                <a16:creationId xmlns:a16="http://schemas.microsoft.com/office/drawing/2014/main" id="{D66274C8-E16F-5AEB-614B-D8D32DA3E8C6}"/>
+              </a:ext>
+            </a:extLst>
+          </p:cNvPr>
+          <p:cNvSpPr>
+            <a:spLocks noGrp="1"/>
+          </p:cNvSpPr>
+          <p:nvPr>
+            <p:ph type="body" sz="quarter" idx="11"/>
+          </p:nvPr>
+        </p:nvSpPr>
+        <p:spPr/>
+        <p:txBody>
+          <a:bodyPr/>
+          <a:lstStyle/>
+          <a:p>
+            <a:r>
+              <a:rPr kumimoji="1" lang="en-US" altLang="ko-KR" sz="1400" dirty="0" err="1"/>
+              <a:t>04. 수용 기준과 검증 가능한 작업 단위</a:t>
+            </a:r>
+          </a:p>
+        </p:txBody>
+      </p:sp>
+      <p:sp>
+        <p:nvSpPr>
+          <p:cNvPr id="6" name="텍스트 개체 틀 5">
+            <a:extLst>
+              <a:ext uri="{FF2B5EF4-FFF2-40B4-BE49-F238E27FC236}">
+                <a16:creationId xmlns:a16="http://schemas.microsoft.com/office/drawing/2014/main" id="{A24E58E1-194B-A320-AEEE-24D08685BB67}"/>
+              </a:ext>
+            </a:extLst>
+          </p:cNvPr>
+          <p:cNvSpPr>
+            <a:spLocks noGrp="1"/>
+          </p:cNvSpPr>
+          <p:nvPr>
+            <p:ph type="body" sz="quarter" idx="12"/>
+          </p:nvPr>
+        </p:nvSpPr>
+        <p:spPr/>
+        <p:txBody>
+          <a:bodyPr/>
+          <a:lstStyle/>
+          <a:p>
+            <a:endParaRPr kumimoji="1" lang="ko-KR" altLang="en-US" dirty="0"/>
+          </a:p>
+        </p:txBody>
+      </p:sp>
+      <p:sp>
+        <p:nvSpPr>
+          <p:cNvPr id="7" name="텍스트 개체 틀 6">
+            <a:extLst>
+              <a:ext uri="{FF2B5EF4-FFF2-40B4-BE49-F238E27FC236}">
+                <a16:creationId xmlns:a16="http://schemas.microsoft.com/office/drawing/2014/main" id="{A219F420-613B-6234-45F6-0955A9A4505F}"/>
+              </a:ext>
+            </a:extLst>
+          </p:cNvPr>
+          <p:cNvSpPr>
+            <a:spLocks noGrp="1"/>
+          </p:cNvSpPr>
+          <p:nvPr>
+            <p:ph type="body" sz="quarter" idx="13"/>
+          </p:nvPr>
+        </p:nvSpPr>
+        <p:spPr/>
+        <p:txBody>
+          <a:bodyPr/>
+          <a:lstStyle/>
+          <a:p>
+            <a:endParaRPr kumimoji="1" lang="en-US" altLang="ko-KR" dirty="0"/>
+          </a:p>
+        </p:txBody>
+      </p:sp>
+      <p:sp>
+        <p:nvSpPr>
+          <p:cNvPr id="8" name="내용 개체 틀 7">
+            <a:extLst>
+              <a:ext uri="{FF2B5EF4-FFF2-40B4-BE49-F238E27FC236}">
+                <a16:creationId xmlns:a16="http://schemas.microsoft.com/office/drawing/2014/main" id="{BEBA2C4A-B0BF-F2E4-EA6E-614C99CBA184}"/>
+              </a:ext>
+            </a:extLst>
+          </p:cNvPr>
+          <p:cNvSpPr>
+            <a:spLocks noGrp="1"/>
+          </p:cNvSpPr>
+          <p:nvPr>
+            <p:ph idx="1"/>
+          </p:nvPr>
+        </p:nvSpPr>
+        <p:spPr/>
+        <p:txBody>
+          <a:bodyPr>
+            <a:normAutofit/>
+          </a:bodyPr>
+          <a:lstStyle/>
+          <a:p>
+            <a:pPr marL="0" indent="0">
+              <a:spcBef>
+                <a:spcPts val="600"/>
+              </a:spcBef>
+              <a:spcAft>
+                <a:spcPts val="600"/>
+              </a:spcAft>
+              <a:buNone/>
+            </a:pPr>
+            <a:r>
+              <a:rPr sz="1800" b="0">
+                <a:solidFill>
+                  <a:srgbClr val="000000"/>
+                </a:solidFill>
+                <a:latin typeface="맑은 고딕"/>
+                <a:ea typeface="맑은 고딕"/>
+              </a:rPr>
+              <a:t>작업 명세서를 </a:t>
+            </a:r>
+            <a:r>
+              <a:rPr sz="1800" b="1">
+                <a:solidFill>
+                  <a:srgbClr val="000000"/>
+                </a:solidFill>
+                <a:latin typeface="맑은 고딕"/>
+                <a:ea typeface="맑은 고딕"/>
+              </a:rPr>
+              <a:t>수용 기준과 테스트</a:t>
+            </a:r>
+            <a:r>
+              <a:rPr sz="1800" b="0">
+                <a:solidFill>
+                  <a:srgbClr val="000000"/>
+                </a:solidFill>
+                <a:latin typeface="맑은 고딕"/>
+                <a:ea typeface="맑은 고딕"/>
+              </a:rPr>
+              <a:t>로 바꾸고, 한 번에 검증할 수 있는 </a:t>
+            </a:r>
+            <a:r>
+              <a:rPr sz="1800" b="1">
+                <a:solidFill>
+                  <a:srgbClr val="000000"/>
+                </a:solidFill>
+                <a:latin typeface="맑은 고딕"/>
+                <a:ea typeface="맑은 고딕"/>
+              </a:rPr>
+              <a:t>작업 단위</a:t>
+            </a:r>
+            <a:r>
+              <a:rPr sz="1800" b="0">
+                <a:solidFill>
+                  <a:srgbClr val="000000"/>
+                </a:solidFill>
+                <a:latin typeface="맑은 고딕"/>
+                <a:ea typeface="맑은 고딕"/>
+              </a:rPr>
+              <a:t>로 나눈다.</a:t>
+            </a:r>
+          </a:p>
+          <a:p>
+            <a:pPr lvl="2" marL="723900" indent="-368300">
+              <a:spcBef>
+                <a:spcPts val="600"/>
+              </a:spcBef>
+              <a:spcAft>
+                <a:spcPts val="600"/>
+              </a:spcAft>
+              <a:buSzPct val="90000"/>
+              <a:buFont typeface="Wingdings" pitchFamily="2" charset="2"/>
+              <a:buChar char=""/>
+            </a:pPr>
+            <a:r>
+              <a:rPr sz="1800" b="1">
+                <a:solidFill>
+                  <a:srgbClr val="000000"/>
+                </a:solidFill>
+                <a:latin typeface="맑은 고딕"/>
+                <a:ea typeface="맑은 고딕"/>
+              </a:rPr>
+              <a:t>수용 기준</a:t>
+            </a:r>
+            <a:r>
+              <a:rPr sz="1800" b="0">
+                <a:solidFill>
+                  <a:srgbClr val="000000"/>
+                </a:solidFill>
+                <a:latin typeface="맑은 고딕"/>
+                <a:ea typeface="맑은 고딕"/>
+              </a:rPr>
+              <a:t>이 요구에서 코드까지의 뼈대에서 하는 역할과 사람의 일을 설명한다.</a:t>
+            </a:r>
+          </a:p>
+          <a:p>
+            <a:pPr lvl="2" marL="723900" indent="-368300">
+              <a:spcBef>
+                <a:spcPts val="600"/>
+              </a:spcBef>
+              <a:spcAft>
+                <a:spcPts val="600"/>
+              </a:spcAft>
+              <a:buSzPct val="90000"/>
+              <a:buFont typeface="Wingdings" pitchFamily="2" charset="2"/>
+              <a:buChar char=""/>
+            </a:pPr>
+            <a:r>
+              <a:rPr sz="1800" b="0">
+                <a:solidFill>
+                  <a:srgbClr val="000000"/>
+                </a:solidFill>
+                <a:latin typeface="맑은 고딕"/>
+                <a:ea typeface="맑은 고딕"/>
+              </a:rPr>
+              <a:t>작업 명세서의 예를 </a:t>
+            </a:r>
+            <a:r>
+              <a:rPr sz="1800" b="1">
+                <a:solidFill>
+                  <a:srgbClr val="000000"/>
+                </a:solidFill>
+                <a:latin typeface="맑은 고딕"/>
+                <a:ea typeface="맑은 고딕"/>
+              </a:rPr>
+              <a:t>허용·거절 예시</a:t>
+            </a:r>
+            <a:r>
+              <a:rPr sz="1800" b="0">
+                <a:solidFill>
+                  <a:srgbClr val="000000"/>
+                </a:solidFill>
+                <a:latin typeface="맑은 고딕"/>
+                <a:ea typeface="맑은 고딕"/>
+              </a:rPr>
+              <a:t>로 쓰고, 거절 뒤에 바뀌지 않아야 할 것을 밝힌다.</a:t>
+            </a:r>
+          </a:p>
+          <a:p>
+            <a:pPr lvl="2" marL="723900" indent="-368300">
+              <a:spcBef>
+                <a:spcPts val="600"/>
+              </a:spcBef>
+              <a:spcAft>
+                <a:spcPts val="600"/>
+              </a:spcAft>
+              <a:buSzPct val="90000"/>
+              <a:buFont typeface="Wingdings" pitchFamily="2" charset="2"/>
+              <a:buChar char=""/>
+            </a:pPr>
+            <a:r>
+              <a:rPr sz="1800" b="0">
+                <a:solidFill>
+                  <a:srgbClr val="000000"/>
+                </a:solidFill>
+                <a:latin typeface="맑은 고딕"/>
+                <a:ea typeface="맑은 고딕"/>
+              </a:rPr>
+              <a:t>허용·거절 예시를 실행되는 </a:t>
+            </a:r>
+            <a:r>
+              <a:rPr sz="1800" b="1">
+                <a:solidFill>
+                  <a:srgbClr val="000000"/>
+                </a:solidFill>
+                <a:latin typeface="맑은 고딕"/>
+                <a:ea typeface="맑은 고딕"/>
+              </a:rPr>
+              <a:t>수용 테스트</a:t>
+            </a:r>
+            <a:r>
+              <a:rPr sz="1800" b="0">
+                <a:solidFill>
+                  <a:srgbClr val="000000"/>
+                </a:solidFill>
+                <a:latin typeface="맑은 고딕"/>
+                <a:ea typeface="맑은 고딕"/>
+              </a:rPr>
+              <a:t>로 바꾸고, 테스트를 먼저 주고 에이전트에게 구현을 맡긴다.</a:t>
+            </a:r>
+          </a:p>
+          <a:p>
+            <a:pPr lvl="2" marL="723900" indent="-368300">
+              <a:spcBef>
+                <a:spcPts val="600"/>
+              </a:spcBef>
+              <a:spcAft>
+                <a:spcPts val="600"/>
+              </a:spcAft>
+              <a:buSzPct val="90000"/>
+              <a:buFont typeface="Wingdings" pitchFamily="2" charset="2"/>
+              <a:buChar char=""/>
+            </a:pPr>
+            <a:r>
+              <a:rPr sz="1800" b="0">
+                <a:solidFill>
+                  <a:srgbClr val="000000"/>
+                </a:solidFill>
+                <a:latin typeface="맑은 고딕"/>
+                <a:ea typeface="맑은 고딕"/>
+              </a:rPr>
+              <a:t>작업을 수용 기준으로 끝나는 </a:t>
+            </a:r>
+            <a:r>
+              <a:rPr sz="1800" b="1">
+                <a:solidFill>
+                  <a:srgbClr val="000000"/>
+                </a:solidFill>
+                <a:latin typeface="맑은 고딕"/>
+                <a:ea typeface="맑은 고딕"/>
+              </a:rPr>
+              <a:t>작업 단위</a:t>
+            </a:r>
+            <a:r>
+              <a:rPr sz="1800" b="0">
+                <a:solidFill>
+                  <a:srgbClr val="000000"/>
+                </a:solidFill>
+                <a:latin typeface="맑은 고딕"/>
+                <a:ea typeface="맑은 고딕"/>
+              </a:rPr>
+              <a:t>로 나누고, 기능 목록으로 하나씩 진행한다.</a:t>
+            </a:r>
+          </a:p>
+          <a:p>
+            <a:pPr lvl="2" marL="723900" indent="-368300">
+              <a:spcBef>
+                <a:spcPts val="600"/>
+              </a:spcBef>
+              <a:spcAft>
+                <a:spcPts val="600"/>
+              </a:spcAft>
+              <a:buSzPct val="90000"/>
+              <a:buFont typeface="Wingdings" pitchFamily="2" charset="2"/>
+              <a:buChar char=""/>
+            </a:pPr>
+            <a:r>
+              <a:rPr sz="1800" b="1">
+                <a:solidFill>
+                  <a:srgbClr val="000000"/>
+                </a:solidFill>
+                <a:latin typeface="맑은 고딕"/>
+                <a:ea typeface="맑은 고딕"/>
+              </a:rPr>
+              <a:t>완료의 정의</a:t>
+            </a:r>
+            <a:r>
+              <a:rPr sz="1800" b="0">
+                <a:solidFill>
+                  <a:srgbClr val="000000"/>
+                </a:solidFill>
+                <a:latin typeface="맑은 고딕"/>
+                <a:ea typeface="맑은 고딕"/>
+              </a:rPr>
+              <a:t>를 정하고, 에이전트의 보고가 아니라 증거로 완료를 판단한다.</a:t>
+            </a:r>
+          </a:p>
+        </p:txBody>
+      </p:sp>
+    </p:spTree>
+    <p:extLst>
+      <p:ext uri="{BB962C8B-B14F-4D97-AF65-F5344CB8AC3E}">
+        <p14:creationId xmlns:p14="http://schemas.microsoft.com/office/powerpoint/2010/main" val="3555436673"/>
+      </p:ext>
+    </p:extLst>
+  </p:cSld>
+  <p:clrMapOvr>
+    <a:masterClrMapping/>
+  </p:clrMapOvr>
+</p:sld>
+</file>
+
+<file path=ppt/slides/slide20.xml><?xml version="1.0" encoding="utf-8"?>
 <p:sld xmlns:a="http://schemas.openxmlformats.org/drawingml/2006/main" xmlns:r="http://schemas.openxmlformats.org/officeDocument/2006/relationships" xmlns:p="http://schemas.openxmlformats.org/presentationml/2006/main">
   <p:cSld>
     <p:spTree>
@@ -13977,7 +14754,7 @@
                 <a:ea typeface="맑은 고딕" panose="020B0503020000020004" pitchFamily="34" charset="-127"/>
                 <a:cs typeface="+mn-cs"/>
               </a:rPr>
-              <a:t>- 19 -</a:t>
+              <a:t>- 20 -</a:t>
             </a:r>
           </a:p>
         </p:txBody>
@@ -14044,470 +14821,7 @@
 </p:sld>
 </file>
 
-<file path=ppt/slides/slide2.xml><?xml version="1.0" encoding="utf-8"?>
-<p:sld xmlns:a="http://schemas.openxmlformats.org/drawingml/2006/main" xmlns:r="http://schemas.openxmlformats.org/officeDocument/2006/relationships" xmlns:p="http://schemas.openxmlformats.org/presentationml/2006/main">
-  <p:cSld>
-    <p:spTree>
-      <p:nvGrpSpPr>
-        <p:cNvPr id="1" name="">
-          <a:extLst>
-            <a:ext uri="{FF2B5EF4-FFF2-40B4-BE49-F238E27FC236}">
-              <a16:creationId xmlns:a16="http://schemas.microsoft.com/office/drawing/2014/main" id="{8E4F1F13-426B-086B-7D8C-9A58A0F879DB}"/>
-            </a:ext>
-          </a:extLst>
-        </p:cNvPr>
-        <p:cNvGrpSpPr/>
-        <p:nvPr/>
-      </p:nvGrpSpPr>
-      <p:grpSpPr>
-        <a:xfrm>
-          <a:off x="0" y="0"/>
-          <a:ext cx="0" cy="0"/>
-          <a:chOff x="0" y="0"/>
-          <a:chExt cx="0" cy="0"/>
-        </a:xfrm>
-      </p:grpSpPr>
-      <p:sp>
-        <p:nvSpPr>
-          <p:cNvPr id="2" name="제목 1">
-            <a:extLst>
-              <a:ext uri="{FF2B5EF4-FFF2-40B4-BE49-F238E27FC236}">
-                <a16:creationId xmlns:a16="http://schemas.microsoft.com/office/drawing/2014/main" id="{AA26A92D-924E-0575-9551-F8FD7BFD3FAD}"/>
-              </a:ext>
-            </a:extLst>
-          </p:cNvPr>
-          <p:cNvSpPr>
-            <a:spLocks noGrp="1"/>
-          </p:cNvSpPr>
-          <p:nvPr>
-            <p:ph type="title"/>
-          </p:nvPr>
-        </p:nvSpPr>
-        <p:spPr/>
-        <p:txBody>
-          <a:bodyPr/>
-          <a:lstStyle/>
-          <a:p>
-            <a:r>
-              <a:rPr sz="2400" b="1">
-                <a:solidFill>
-                  <a:srgbClr val="000000"/>
-                </a:solidFill>
-                <a:latin typeface="맑은 고딕"/>
-                <a:ea typeface="맑은 고딕"/>
-              </a:rPr>
-              <a:t>01. 세션 목표</a:t>
-            </a:r>
-          </a:p>
-        </p:txBody>
-      </p:sp>
-      <p:sp>
-        <p:nvSpPr>
-          <p:cNvPr id="3" name="슬라이드 번호 개체 틀 2">
-            <a:extLst>
-              <a:ext uri="{FF2B5EF4-FFF2-40B4-BE49-F238E27FC236}">
-                <a16:creationId xmlns:a16="http://schemas.microsoft.com/office/drawing/2014/main" id="{12CF30EE-4DFD-8063-56B8-B8689E76DFCA}"/>
-              </a:ext>
-            </a:extLst>
-          </p:cNvPr>
-          <p:cNvSpPr>
-            <a:spLocks noGrp="1"/>
-          </p:cNvSpPr>
-          <p:nvPr>
-            <p:ph type="sldNum" sz="quarter" idx="10"/>
-          </p:nvPr>
-        </p:nvSpPr>
-        <p:spPr/>
-        <p:txBody>
-          <a:bodyPr/>
-          <a:lstStyle/>
-          <a:p>
-            <a:pPr>
-              <a:defRPr/>
-            </a:pPr>
-            <a:r>
-              <a:rPr lang="en-US" altLang="ko-KR">
-                <a:solidFill>
-                  <a:prstClr val="black"/>
-                </a:solidFill>
-              </a:rPr>
-              <a:t>- 2 -</a:t>
-            </a:r>
-          </a:p>
-        </p:txBody>
-      </p:sp>
-      <p:sp>
-        <p:nvSpPr>
-          <p:cNvPr id="5" name="텍스트 개체 틀 4">
-            <a:extLst>
-              <a:ext uri="{FF2B5EF4-FFF2-40B4-BE49-F238E27FC236}">
-                <a16:creationId xmlns:a16="http://schemas.microsoft.com/office/drawing/2014/main" id="{D66274C8-E16F-5AEB-614B-D8D32DA3E8C6}"/>
-              </a:ext>
-            </a:extLst>
-          </p:cNvPr>
-          <p:cNvSpPr>
-            <a:spLocks noGrp="1"/>
-          </p:cNvSpPr>
-          <p:nvPr>
-            <p:ph type="body" sz="quarter" idx="11"/>
-          </p:nvPr>
-        </p:nvSpPr>
-        <p:spPr/>
-        <p:txBody>
-          <a:bodyPr/>
-          <a:lstStyle/>
-          <a:p>
-            <a:r>
-              <a:rPr kumimoji="1" lang="en-US" altLang="ko-KR" sz="1400" dirty="0" err="1"/>
-              <a:t>04. 수용 기준과 검증 가능한 작업 단위</a:t>
-            </a:r>
-          </a:p>
-        </p:txBody>
-      </p:sp>
-      <p:sp>
-        <p:nvSpPr>
-          <p:cNvPr id="6" name="텍스트 개체 틀 5">
-            <a:extLst>
-              <a:ext uri="{FF2B5EF4-FFF2-40B4-BE49-F238E27FC236}">
-                <a16:creationId xmlns:a16="http://schemas.microsoft.com/office/drawing/2014/main" id="{A24E58E1-194B-A320-AEEE-24D08685BB67}"/>
-              </a:ext>
-            </a:extLst>
-          </p:cNvPr>
-          <p:cNvSpPr>
-            <a:spLocks noGrp="1"/>
-          </p:cNvSpPr>
-          <p:nvPr>
-            <p:ph type="body" sz="quarter" idx="12"/>
-          </p:nvPr>
-        </p:nvSpPr>
-        <p:spPr/>
-        <p:txBody>
-          <a:bodyPr/>
-          <a:lstStyle/>
-          <a:p>
-            <a:endParaRPr kumimoji="1" lang="ko-KR" altLang="en-US" dirty="0"/>
-          </a:p>
-        </p:txBody>
-      </p:sp>
-      <p:sp>
-        <p:nvSpPr>
-          <p:cNvPr id="7" name="텍스트 개체 틀 6">
-            <a:extLst>
-              <a:ext uri="{FF2B5EF4-FFF2-40B4-BE49-F238E27FC236}">
-                <a16:creationId xmlns:a16="http://schemas.microsoft.com/office/drawing/2014/main" id="{A219F420-613B-6234-45F6-0955A9A4505F}"/>
-              </a:ext>
-            </a:extLst>
-          </p:cNvPr>
-          <p:cNvSpPr>
-            <a:spLocks noGrp="1"/>
-          </p:cNvSpPr>
-          <p:nvPr>
-            <p:ph type="body" sz="quarter" idx="13"/>
-          </p:nvPr>
-        </p:nvSpPr>
-        <p:spPr/>
-        <p:txBody>
-          <a:bodyPr/>
-          <a:lstStyle/>
-          <a:p>
-            <a:endParaRPr kumimoji="1" lang="en-US" altLang="ko-KR" dirty="0"/>
-          </a:p>
-        </p:txBody>
-      </p:sp>
-      <p:sp>
-        <p:nvSpPr>
-          <p:cNvPr id="8" name="내용 개체 틀 7">
-            <a:extLst>
-              <a:ext uri="{FF2B5EF4-FFF2-40B4-BE49-F238E27FC236}">
-                <a16:creationId xmlns:a16="http://schemas.microsoft.com/office/drawing/2014/main" id="{BEBA2C4A-B0BF-F2E4-EA6E-614C99CBA184}"/>
-              </a:ext>
-            </a:extLst>
-          </p:cNvPr>
-          <p:cNvSpPr>
-            <a:spLocks noGrp="1"/>
-          </p:cNvSpPr>
-          <p:nvPr>
-            <p:ph idx="1"/>
-          </p:nvPr>
-        </p:nvSpPr>
-        <p:spPr/>
-        <p:txBody>
-          <a:bodyPr>
-            <a:normAutofit/>
-          </a:bodyPr>
-          <a:lstStyle/>
-          <a:p>
-            <a:pPr marL="0" indent="0">
-              <a:spcBef>
-                <a:spcPts val="600"/>
-              </a:spcBef>
-              <a:spcAft>
-                <a:spcPts val="600"/>
-              </a:spcAft>
-              <a:buNone/>
-            </a:pPr>
-            <a:r>
-              <a:rPr sz="1800" b="0">
-                <a:solidFill>
-                  <a:srgbClr val="000000"/>
-                </a:solidFill>
-                <a:latin typeface="맑은 고딕"/>
-                <a:ea typeface="맑은 고딕"/>
-              </a:rPr>
-              <a:t>작업 명세서를 </a:t>
-            </a:r>
-            <a:r>
-              <a:rPr sz="1800" b="1">
-                <a:solidFill>
-                  <a:srgbClr val="000000"/>
-                </a:solidFill>
-                <a:latin typeface="맑은 고딕"/>
-                <a:ea typeface="맑은 고딕"/>
-              </a:rPr>
-              <a:t>수용 기준과 테스트</a:t>
-            </a:r>
-            <a:r>
-              <a:rPr sz="1800" b="0">
-                <a:solidFill>
-                  <a:srgbClr val="000000"/>
-                </a:solidFill>
-                <a:latin typeface="맑은 고딕"/>
-                <a:ea typeface="맑은 고딕"/>
-              </a:rPr>
-              <a:t>로 바꾸고, 한 번에 검증할 수 있는 </a:t>
-            </a:r>
-            <a:r>
-              <a:rPr sz="1800" b="1">
-                <a:solidFill>
-                  <a:srgbClr val="000000"/>
-                </a:solidFill>
-                <a:latin typeface="맑은 고딕"/>
-                <a:ea typeface="맑은 고딕"/>
-              </a:rPr>
-              <a:t>작업 단위</a:t>
-            </a:r>
-            <a:r>
-              <a:rPr sz="1800" b="0">
-                <a:solidFill>
-                  <a:srgbClr val="000000"/>
-                </a:solidFill>
-                <a:latin typeface="맑은 고딕"/>
-                <a:ea typeface="맑은 고딕"/>
-              </a:rPr>
-              <a:t>로 나눈다.</a:t>
-            </a:r>
-          </a:p>
-          <a:p>
-            <a:pPr lvl="2" marL="723900" indent="-368300">
-              <a:spcBef>
-                <a:spcPts val="600"/>
-              </a:spcBef>
-              <a:spcAft>
-                <a:spcPts val="600"/>
-              </a:spcAft>
-              <a:buSzPct val="90000"/>
-              <a:buFont typeface="Wingdings" pitchFamily="2" charset="2"/>
-              <a:buChar char=""/>
-            </a:pPr>
-            <a:r>
-              <a:rPr sz="1800" b="1">
-                <a:solidFill>
-                  <a:srgbClr val="000000"/>
-                </a:solidFill>
-                <a:latin typeface="맑은 고딕"/>
-                <a:ea typeface="맑은 고딕"/>
-              </a:rPr>
-              <a:t>수용 기준</a:t>
-            </a:r>
-            <a:r>
-              <a:rPr sz="1800" b="0">
-                <a:solidFill>
-                  <a:srgbClr val="000000"/>
-                </a:solidFill>
-                <a:latin typeface="맑은 고딕"/>
-                <a:ea typeface="맑은 고딕"/>
-              </a:rPr>
-              <a:t>이 요구에서 코드까지의 뼈대에서 하는 역할과 사람의 일을 설명한다.</a:t>
-            </a:r>
-          </a:p>
-          <a:p>
-            <a:pPr lvl="2" marL="723900" indent="-368300">
-              <a:spcBef>
-                <a:spcPts val="600"/>
-              </a:spcBef>
-              <a:spcAft>
-                <a:spcPts val="600"/>
-              </a:spcAft>
-              <a:buSzPct val="90000"/>
-              <a:buFont typeface="Wingdings" pitchFamily="2" charset="2"/>
-              <a:buChar char=""/>
-            </a:pPr>
-            <a:r>
-              <a:rPr sz="1800" b="0">
-                <a:solidFill>
-                  <a:srgbClr val="000000"/>
-                </a:solidFill>
-                <a:latin typeface="맑은 고딕"/>
-                <a:ea typeface="맑은 고딕"/>
-              </a:rPr>
-              <a:t>작업 명세서의 예를 </a:t>
-            </a:r>
-            <a:r>
-              <a:rPr sz="1800" b="1">
-                <a:solidFill>
-                  <a:srgbClr val="000000"/>
-                </a:solidFill>
-                <a:latin typeface="맑은 고딕"/>
-                <a:ea typeface="맑은 고딕"/>
-              </a:rPr>
-              <a:t>허용·거절 예시</a:t>
-            </a:r>
-            <a:r>
-              <a:rPr sz="1800" b="0">
-                <a:solidFill>
-                  <a:srgbClr val="000000"/>
-                </a:solidFill>
-                <a:latin typeface="맑은 고딕"/>
-                <a:ea typeface="맑은 고딕"/>
-              </a:rPr>
-              <a:t>로 쓰고, 거절 뒤에 바뀌지 않아야 할 것을 밝힌다.</a:t>
-            </a:r>
-          </a:p>
-          <a:p>
-            <a:pPr lvl="2" marL="723900" indent="-368300">
-              <a:spcBef>
-                <a:spcPts val="600"/>
-              </a:spcBef>
-              <a:spcAft>
-                <a:spcPts val="600"/>
-              </a:spcAft>
-              <a:buSzPct val="90000"/>
-              <a:buFont typeface="Wingdings" pitchFamily="2" charset="2"/>
-              <a:buChar char=""/>
-            </a:pPr>
-            <a:r>
-              <a:rPr sz="1800" b="0">
-                <a:solidFill>
-                  <a:srgbClr val="000000"/>
-                </a:solidFill>
-                <a:latin typeface="맑은 고딕"/>
-                <a:ea typeface="맑은 고딕"/>
-              </a:rPr>
-              <a:t>허용·거절 예시를 실행되는 </a:t>
-            </a:r>
-            <a:r>
-              <a:rPr sz="1800" b="1">
-                <a:solidFill>
-                  <a:srgbClr val="000000"/>
-                </a:solidFill>
-                <a:latin typeface="맑은 고딕"/>
-                <a:ea typeface="맑은 고딕"/>
-              </a:rPr>
-              <a:t>수용 테스트</a:t>
-            </a:r>
-            <a:r>
-              <a:rPr sz="1800" b="0">
-                <a:solidFill>
-                  <a:srgbClr val="000000"/>
-                </a:solidFill>
-                <a:latin typeface="맑은 고딕"/>
-                <a:ea typeface="맑은 고딕"/>
-              </a:rPr>
-              <a:t>로 바꾸고, 테스트를 먼저 주고 에이전트에게 구현을 맡긴다.</a:t>
-            </a:r>
-          </a:p>
-          <a:p>
-            <a:pPr lvl="2" marL="723900" indent="-368300">
-              <a:spcBef>
-                <a:spcPts val="600"/>
-              </a:spcBef>
-              <a:spcAft>
-                <a:spcPts val="600"/>
-              </a:spcAft>
-              <a:buSzPct val="90000"/>
-              <a:buFont typeface="Wingdings" pitchFamily="2" charset="2"/>
-              <a:buChar char=""/>
-            </a:pPr>
-            <a:r>
-              <a:rPr sz="1800" b="0">
-                <a:solidFill>
-                  <a:srgbClr val="000000"/>
-                </a:solidFill>
-                <a:latin typeface="맑은 고딕"/>
-                <a:ea typeface="맑은 고딕"/>
-              </a:rPr>
-              <a:t>작업을 수용 기준으로 끝나는 </a:t>
-            </a:r>
-            <a:r>
-              <a:rPr sz="1800" b="1">
-                <a:solidFill>
-                  <a:srgbClr val="000000"/>
-                </a:solidFill>
-                <a:latin typeface="맑은 고딕"/>
-                <a:ea typeface="맑은 고딕"/>
-              </a:rPr>
-              <a:t>작업 단위</a:t>
-            </a:r>
-            <a:r>
-              <a:rPr sz="1800" b="0">
-                <a:solidFill>
-                  <a:srgbClr val="000000"/>
-                </a:solidFill>
-                <a:latin typeface="맑은 고딕"/>
-                <a:ea typeface="맑은 고딕"/>
-              </a:rPr>
-              <a:t>로 나누고, 기능 목록으로 하나씩 진행한다.</a:t>
-            </a:r>
-          </a:p>
-          <a:p>
-            <a:pPr lvl="2" marL="723900" indent="-368300">
-              <a:spcBef>
-                <a:spcPts val="600"/>
-              </a:spcBef>
-              <a:spcAft>
-                <a:spcPts val="600"/>
-              </a:spcAft>
-              <a:buSzPct val="90000"/>
-              <a:buFont typeface="Wingdings" pitchFamily="2" charset="2"/>
-              <a:buChar char=""/>
-            </a:pPr>
-            <a:r>
-              <a:rPr sz="1800" b="1">
-                <a:solidFill>
-                  <a:srgbClr val="000000"/>
-                </a:solidFill>
-                <a:latin typeface="맑은 고딕"/>
-                <a:ea typeface="맑은 고딕"/>
-              </a:rPr>
-              <a:t>완료의 정의</a:t>
-            </a:r>
-            <a:r>
-              <a:rPr sz="1800" b="0">
-                <a:solidFill>
-                  <a:srgbClr val="000000"/>
-                </a:solidFill>
-                <a:latin typeface="맑은 고딕"/>
-                <a:ea typeface="맑은 고딕"/>
-              </a:rPr>
-              <a:t>를 정하고, 에이전트의 보고가 아니라 증거로 완료를 판단한다.</a:t>
-            </a:r>
-          </a:p>
-        </p:txBody>
-      </p:sp>
-    </p:spTree>
-    <p:extLst>
-      <p:ext uri="{BB962C8B-B14F-4D97-AF65-F5344CB8AC3E}">
-        <p14:creationId xmlns:p14="http://schemas.microsoft.com/office/powerpoint/2010/main" val="3555436673"/>
-      </p:ext>
-    </p:extLst>
-  </p:cSld>
-  <p:clrMapOvr>
-    <a:masterClrMapping/>
-  </p:clrMapOvr>
-</p:sld>
-</file>
-
-<file path=ppt/slides/slide20.xml><?xml version="1.0" encoding="utf-8"?>
+<file path=ppt/slides/slide21.xml><?xml version="1.0" encoding="utf-8"?>
 <p:sld xmlns:a="http://schemas.openxmlformats.org/drawingml/2006/main" xmlns:r="http://schemas.openxmlformats.org/officeDocument/2006/relationships" xmlns:p="http://schemas.openxmlformats.org/presentationml/2006/main">
   <p:cSld>
     <p:spTree>
@@ -14606,7 +14920,7 @@
                   <a:prstClr val="black"/>
                 </a:solidFill>
               </a:rPr>
-              <a:t>- 20 -</a:t>
+              <a:t>- 21 -</a:t>
             </a:r>
           </a:p>
         </p:txBody>
@@ -15209,7 +15523,7 @@
 </p:sld>
 </file>
 
-<file path=ppt/slides/slide21.xml><?xml version="1.0" encoding="utf-8"?>
+<file path=ppt/slides/slide22.xml><?xml version="1.0" encoding="utf-8"?>
 <p:sld xmlns:a="http://schemas.openxmlformats.org/drawingml/2006/main" xmlns:r="http://schemas.openxmlformats.org/officeDocument/2006/relationships" xmlns:p="http://schemas.openxmlformats.org/presentationml/2006/main">
   <p:cSld>
     <p:spTree>
@@ -16743,7 +17057,7 @@
                 <a:ea typeface="맑은 고딕" panose="020B0503020000020004" pitchFamily="34" charset="-127"/>
                 <a:cs typeface="+mn-cs"/>
               </a:rPr>
-              <a:t>- 21 -</a:t>
+              <a:t>- 22 -</a:t>
             </a:r>
           </a:p>
         </p:txBody>
@@ -16801,889 +17115,6 @@
     <p:extLst>
       <p:ext uri="{BB962C8B-B14F-4D97-AF65-F5344CB8AC3E}">
         <p14:creationId xmlns:p14="http://schemas.microsoft.com/office/powerpoint/2010/main" val="2789569477"/>
-      </p:ext>
-    </p:extLst>
-  </p:cSld>
-  <p:clrMapOvr>
-    <a:masterClrMapping/>
-  </p:clrMapOvr>
-</p:sld>
-</file>
-
-<file path=ppt/slides/slide22.xml><?xml version="1.0" encoding="utf-8"?>
-<p:sld xmlns:a="http://schemas.openxmlformats.org/drawingml/2006/main" xmlns:r="http://schemas.openxmlformats.org/officeDocument/2006/relationships" xmlns:p="http://schemas.openxmlformats.org/presentationml/2006/main">
-  <p:cSld>
-    <p:spTree>
-      <p:nvGrpSpPr>
-        <p:cNvPr id="1" name="">
-          <a:extLst>
-            <a:ext uri="{FF2B5EF4-FFF2-40B4-BE49-F238E27FC236}">
-              <a16:creationId xmlns:a16="http://schemas.microsoft.com/office/drawing/2014/main" id="{8E4F1F13-426B-086B-7D8C-9A58A0F879DB}"/>
-            </a:ext>
-          </a:extLst>
-        </p:cNvPr>
-        <p:cNvGrpSpPr/>
-        <p:nvPr/>
-      </p:nvGrpSpPr>
-      <p:grpSpPr>
-        <a:xfrm>
-          <a:off x="0" y="0"/>
-          <a:ext cx="0" cy="0"/>
-          <a:chOff x="0" y="0"/>
-          <a:chExt cx="0" cy="0"/>
-        </a:xfrm>
-      </p:grpSpPr>
-      <p:sp>
-        <p:nvSpPr>
-          <p:cNvPr id="2" name="제목 1">
-            <a:extLst>
-              <a:ext uri="{FF2B5EF4-FFF2-40B4-BE49-F238E27FC236}">
-                <a16:creationId xmlns:a16="http://schemas.microsoft.com/office/drawing/2014/main" id="{AA26A92D-924E-0575-9551-F8FD7BFD3FAD}"/>
-              </a:ext>
-            </a:extLst>
-          </p:cNvPr>
-          <p:cNvSpPr>
-            <a:spLocks noGrp="1"/>
-          </p:cNvSpPr>
-          <p:nvPr>
-            <p:ph type="title"/>
-          </p:nvPr>
-        </p:nvSpPr>
-        <p:spPr/>
-        <p:txBody>
-          <a:bodyPr/>
-          <a:lstStyle/>
-          <a:p>
-            <a:r>
-              <a:rPr sz="2400" b="1">
-                <a:solidFill>
-                  <a:srgbClr val="000000"/>
-                </a:solidFill>
-                <a:latin typeface="맑은 고딕"/>
-                <a:ea typeface="맑은 고딕"/>
-              </a:rPr>
-              <a:t>09. 실습 — 수용 기준</a:t>
-            </a:r>
-          </a:p>
-        </p:txBody>
-      </p:sp>
-      <p:sp>
-        <p:nvSpPr>
-          <p:cNvPr id="3" name="슬라이드 번호 개체 틀 2">
-            <a:extLst>
-              <a:ext uri="{FF2B5EF4-FFF2-40B4-BE49-F238E27FC236}">
-                <a16:creationId xmlns:a16="http://schemas.microsoft.com/office/drawing/2014/main" id="{12CF30EE-4DFD-8063-56B8-B8689E76DFCA}"/>
-              </a:ext>
-            </a:extLst>
-          </p:cNvPr>
-          <p:cNvSpPr>
-            <a:spLocks noGrp="1"/>
-          </p:cNvSpPr>
-          <p:nvPr>
-            <p:ph type="sldNum" sz="quarter" idx="10"/>
-          </p:nvPr>
-        </p:nvSpPr>
-        <p:spPr/>
-        <p:txBody>
-          <a:bodyPr/>
-          <a:lstStyle/>
-          <a:p>
-            <a:pPr>
-              <a:defRPr/>
-            </a:pPr>
-            <a:r>
-              <a:rPr lang="en-US" altLang="ko-KR">
-                <a:solidFill>
-                  <a:prstClr val="black"/>
-                </a:solidFill>
-              </a:rPr>
-              <a:t>- 22 -</a:t>
-            </a:r>
-          </a:p>
-        </p:txBody>
-      </p:sp>
-      <p:sp>
-        <p:nvSpPr>
-          <p:cNvPr id="5" name="텍스트 개체 틀 4">
-            <a:extLst>
-              <a:ext uri="{FF2B5EF4-FFF2-40B4-BE49-F238E27FC236}">
-                <a16:creationId xmlns:a16="http://schemas.microsoft.com/office/drawing/2014/main" id="{D66274C8-E16F-5AEB-614B-D8D32DA3E8C6}"/>
-              </a:ext>
-            </a:extLst>
-          </p:cNvPr>
-          <p:cNvSpPr>
-            <a:spLocks noGrp="1"/>
-          </p:cNvSpPr>
-          <p:nvPr>
-            <p:ph type="body" sz="quarter" idx="11"/>
-          </p:nvPr>
-        </p:nvSpPr>
-        <p:spPr/>
-        <p:txBody>
-          <a:bodyPr/>
-          <a:lstStyle/>
-          <a:p>
-            <a:r>
-              <a:rPr kumimoji="1" lang="en-US" altLang="ko-KR" sz="1400" dirty="0" err="1"/>
-              <a:t>04. 수용 기준과 검증 가능한 작업 단위</a:t>
-            </a:r>
-          </a:p>
-        </p:txBody>
-      </p:sp>
-      <p:sp>
-        <p:nvSpPr>
-          <p:cNvPr id="6" name="텍스트 개체 틀 5">
-            <a:extLst>
-              <a:ext uri="{FF2B5EF4-FFF2-40B4-BE49-F238E27FC236}">
-                <a16:creationId xmlns:a16="http://schemas.microsoft.com/office/drawing/2014/main" id="{A24E58E1-194B-A320-AEEE-24D08685BB67}"/>
-              </a:ext>
-            </a:extLst>
-          </p:cNvPr>
-          <p:cNvSpPr>
-            <a:spLocks noGrp="1"/>
-          </p:cNvSpPr>
-          <p:nvPr>
-            <p:ph type="body" sz="quarter" idx="12"/>
-          </p:nvPr>
-        </p:nvSpPr>
-        <p:spPr/>
-        <p:txBody>
-          <a:bodyPr/>
-          <a:lstStyle/>
-          <a:p>
-            <a:endParaRPr kumimoji="1" lang="ko-KR" altLang="en-US" dirty="0"/>
-          </a:p>
-        </p:txBody>
-      </p:sp>
-      <p:sp>
-        <p:nvSpPr>
-          <p:cNvPr id="7" name="텍스트 개체 틀 6">
-            <a:extLst>
-              <a:ext uri="{FF2B5EF4-FFF2-40B4-BE49-F238E27FC236}">
-                <a16:creationId xmlns:a16="http://schemas.microsoft.com/office/drawing/2014/main" id="{A219F420-613B-6234-45F6-0955A9A4505F}"/>
-              </a:ext>
-            </a:extLst>
-          </p:cNvPr>
-          <p:cNvSpPr>
-            <a:spLocks noGrp="1"/>
-          </p:cNvSpPr>
-          <p:nvPr>
-            <p:ph type="body" sz="quarter" idx="13"/>
-          </p:nvPr>
-        </p:nvSpPr>
-        <p:spPr/>
-        <p:txBody>
-          <a:bodyPr/>
-          <a:lstStyle/>
-          <a:p>
-            <a:endParaRPr kumimoji="1" lang="en-US" altLang="ko-KR" dirty="0"/>
-          </a:p>
-        </p:txBody>
-      </p:sp>
-      <p:sp>
-        <p:nvSpPr>
-          <p:cNvPr id="8" name="내용 개체 틀 7">
-            <a:extLst>
-              <a:ext uri="{FF2B5EF4-FFF2-40B4-BE49-F238E27FC236}">
-                <a16:creationId xmlns:a16="http://schemas.microsoft.com/office/drawing/2014/main" id="{BEBA2C4A-B0BF-F2E4-EA6E-614C99CBA184}"/>
-              </a:ext>
-            </a:extLst>
-          </p:cNvPr>
-          <p:cNvSpPr>
-            <a:spLocks noGrp="1"/>
-          </p:cNvSpPr>
-          <p:nvPr>
-            <p:ph idx="1"/>
-          </p:nvPr>
-        </p:nvSpPr>
-        <p:spPr>
-          <a:xfrm>
-            <a:off x="365760" y="960120"/>
-            <a:ext cx="8622792" cy="5352345"/>
-          </a:xfrm>
-        </p:spPr>
-        <p:txBody>
-          <a:bodyPr>
-            <a:normAutofit/>
-          </a:bodyPr>
-          <a:lstStyle/>
-          <a:p>
-            <a:pPr marL="0" indent="0">
-              <a:spcBef>
-                <a:spcPts val="300"/>
-              </a:spcBef>
-              <a:spcAft>
-                <a:spcPts val="300"/>
-              </a:spcAft>
-              <a:buNone/>
-            </a:pPr>
-            <a:r>
-              <a:rPr sz="1600" b="0">
-                <a:solidFill>
-                  <a:srgbClr val="000000"/>
-                </a:solidFill>
-                <a:latin typeface="맑은 고딕"/>
-                <a:ea typeface="맑은 고딕"/>
-              </a:rPr>
-              <a:t>실습 3의 작업 명세서를 LLM에 제공하여 </a:t>
-            </a:r>
-            <a:r>
-              <a:rPr sz="1600" b="1">
-                <a:solidFill>
-                  <a:srgbClr val="000000"/>
-                </a:solidFill>
-                <a:latin typeface="맑은 고딕"/>
-                <a:ea typeface="맑은 고딕"/>
-              </a:rPr>
-              <a:t>정기배송 신청과 회차 생성 구현</a:t>
-            </a:r>
-            <a:r>
-              <a:rPr sz="1600" b="0">
-                <a:solidFill>
-                  <a:srgbClr val="000000"/>
-                </a:solidFill>
-                <a:latin typeface="맑은 고딕"/>
-                <a:ea typeface="맑은 고딕"/>
-              </a:rPr>
-              <a:t>의 </a:t>
-            </a:r>
-            <a:r>
-              <a:rPr sz="1600" b="1">
-                <a:solidFill>
-                  <a:srgbClr val="000000"/>
-                </a:solidFill>
-                <a:latin typeface="맑은 고딕"/>
-                <a:ea typeface="맑은 고딕"/>
-              </a:rPr>
-              <a:t>수용 기준</a:t>
-            </a:r>
-            <a:r>
-              <a:rPr sz="1600" b="0">
-                <a:solidFill>
-                  <a:srgbClr val="000000"/>
-                </a:solidFill>
-                <a:latin typeface="맑은 고딕"/>
-                <a:ea typeface="맑은 고딕"/>
-              </a:rPr>
-              <a:t>과 </a:t>
-            </a:r>
-            <a:r>
-              <a:rPr sz="1600" b="1">
-                <a:solidFill>
-                  <a:srgbClr val="000000"/>
-                </a:solidFill>
-                <a:latin typeface="맑은 고딕"/>
-                <a:ea typeface="맑은 고딕"/>
-              </a:rPr>
-              <a:t>작업 단위</a:t>
-            </a:r>
-            <a:r>
-              <a:rPr sz="1600" b="0">
-                <a:solidFill>
-                  <a:srgbClr val="000000"/>
-                </a:solidFill>
-                <a:latin typeface="맑은 고딕"/>
-                <a:ea typeface="맑은 고딕"/>
-              </a:rPr>
-              <a:t>를 만들고, 점검 항목으로 피드백하여 완성하십시오.</a:t>
-            </a:r>
-          </a:p>
-          <a:p>
-            <a:pPr lvl="2" marL="723900" indent="-368300">
-              <a:spcBef>
-                <a:spcPts val="300"/>
-              </a:spcBef>
-              <a:spcAft>
-                <a:spcPts val="300"/>
-              </a:spcAft>
-              <a:buSzPct val="90000"/>
-              <a:buFont typeface="Wingdings" pitchFamily="2" charset="2"/>
-              <a:buChar char=""/>
-            </a:pPr>
-            <a:r>
-              <a:rPr sz="1800" b="1">
-                <a:solidFill>
-                  <a:srgbClr val="000000"/>
-                </a:solidFill>
-                <a:latin typeface="맑은 고딕"/>
-                <a:ea typeface="맑은 고딕"/>
-              </a:rPr>
-              <a:t>투입물</a:t>
-            </a:r>
-          </a:p>
-          <a:p>
-            <a:pPr lvl="3" marL="723900" indent="0">
-              <a:spcBef>
-                <a:spcPts val="300"/>
-              </a:spcBef>
-              <a:spcAft>
-                <a:spcPts val="300"/>
-              </a:spcAft>
-              <a:buNone/>
-            </a:pPr>
-            <a:r>
-              <a:rPr sz="1600" b="0">
-                <a:solidFill>
-                  <a:srgbClr val="000000"/>
-                </a:solidFill>
-                <a:latin typeface="맑은 고딕"/>
-                <a:ea typeface="맑은 고딕"/>
-              </a:rPr>
-              <a:t>실습 3의 </a:t>
-            </a:r>
-            <a:r>
-              <a:rPr sz="1600" b="1">
-                <a:solidFill>
-                  <a:srgbClr val="000000"/>
-                </a:solidFill>
-                <a:latin typeface="맑은 고딕"/>
-                <a:ea typeface="맑은 고딕"/>
-              </a:rPr>
-              <a:t>작업 명세서</a:t>
-            </a:r>
-            <a:r>
-              <a:rPr sz="1600" b="0">
-                <a:solidFill>
-                  <a:srgbClr val="000000"/>
-                </a:solidFill>
-                <a:latin typeface="맑은 고딕"/>
-                <a:ea typeface="맑은 고딕"/>
-              </a:rPr>
-              <a:t>, </a:t>
-            </a:r>
-            <a:r>
-              <a:rPr sz="1600" b="1">
-                <a:solidFill>
-                  <a:srgbClr val="000000"/>
-                </a:solidFill>
-                <a:latin typeface="맑은 고딕"/>
-                <a:ea typeface="맑은 고딕"/>
-              </a:rPr>
-              <a:t>정기배송 모델 패키지</a:t>
-            </a:r>
-          </a:p>
-          <a:p>
-            <a:pPr lvl="2" marL="723900" indent="-368300">
-              <a:spcBef>
-                <a:spcPts val="300"/>
-              </a:spcBef>
-              <a:spcAft>
-                <a:spcPts val="300"/>
-              </a:spcAft>
-              <a:buSzPct val="90000"/>
-              <a:buFont typeface="Wingdings" pitchFamily="2" charset="2"/>
-              <a:buChar char=""/>
-            </a:pPr>
-            <a:r>
-              <a:rPr sz="1800" b="1">
-                <a:solidFill>
-                  <a:srgbClr val="000000"/>
-                </a:solidFill>
-                <a:latin typeface="맑은 고딕"/>
-                <a:ea typeface="맑은 고딕"/>
-              </a:rPr>
-              <a:t>프롬프트</a:t>
-            </a:r>
-          </a:p>
-          <a:p>
-            <a:pPr lvl="3" marL="723900" indent="0">
-              <a:spcBef>
-                <a:spcPts val="300"/>
-              </a:spcBef>
-              <a:spcAft>
-                <a:spcPts val="300"/>
-              </a:spcAft>
-              <a:buNone/>
-            </a:pPr>
-            <a:r>
-              <a:rPr sz="1600" b="0">
-                <a:solidFill>
-                  <a:srgbClr val="000000"/>
-                </a:solidFill>
-                <a:latin typeface="맑은 고딕"/>
-                <a:ea typeface="맑은 고딕"/>
-              </a:rPr>
-              <a:t>"작업 명세서의 업무 규칙마다 </a:t>
-            </a:r>
-            <a:r>
-              <a:rPr sz="1600" b="1">
-                <a:solidFill>
-                  <a:srgbClr val="000000"/>
-                </a:solidFill>
-                <a:latin typeface="맑은 고딕"/>
-                <a:ea typeface="맑은 고딕"/>
-              </a:rPr>
-              <a:t>허용·거절 예시</a:t>
-            </a:r>
-            <a:r>
-              <a:rPr sz="1600" b="0">
-                <a:solidFill>
-                  <a:srgbClr val="000000"/>
-                </a:solidFill>
-                <a:latin typeface="맑은 고딕"/>
-                <a:ea typeface="맑은 고딕"/>
-              </a:rPr>
-              <a:t>를 Given-When-Then으로 써줘. 거절 예시에는 </a:t>
-            </a:r>
-            <a:r>
-              <a:rPr sz="1600" b="1">
-                <a:solidFill>
-                  <a:srgbClr val="000000"/>
-                </a:solidFill>
-                <a:latin typeface="맑은 고딕"/>
-                <a:ea typeface="맑은 고딕"/>
-              </a:rPr>
-              <a:t>바뀌지 않아야 할 것</a:t>
-            </a:r>
-            <a:r>
-              <a:rPr sz="1600" b="0">
-                <a:solidFill>
-                  <a:srgbClr val="000000"/>
-                </a:solidFill>
-                <a:latin typeface="맑은 고딕"/>
-                <a:ea typeface="맑은 고딕"/>
-              </a:rPr>
-              <a:t>도 써줘. 그리고 수용 기준 하나 이상으로 끝나는 </a:t>
-            </a:r>
-            <a:r>
-              <a:rPr sz="1600" b="1">
-                <a:solidFill>
-                  <a:srgbClr val="000000"/>
-                </a:solidFill>
-                <a:latin typeface="맑은 고딕"/>
-                <a:ea typeface="맑은 고딕"/>
-              </a:rPr>
-              <a:t>작업 단위</a:t>
-            </a:r>
-            <a:r>
-              <a:rPr sz="1600" b="0">
-                <a:solidFill>
-                  <a:srgbClr val="000000"/>
-                </a:solidFill>
-                <a:latin typeface="맑은 고딕"/>
-                <a:ea typeface="맑은 고딕"/>
-              </a:rPr>
-              <a:t>로 나눠줘. 명세에 없는 규칙은 만들지 말고 질문으로 남겨줘."</a:t>
-            </a:r>
-          </a:p>
-          <a:p>
-            <a:pPr lvl="2" marL="723900" indent="-368300">
-              <a:spcBef>
-                <a:spcPts val="300"/>
-              </a:spcBef>
-              <a:spcAft>
-                <a:spcPts val="300"/>
-              </a:spcAft>
-              <a:buSzPct val="90000"/>
-              <a:buFont typeface="Wingdings" pitchFamily="2" charset="2"/>
-              <a:buChar char=""/>
-            </a:pPr>
-            <a:r>
-              <a:rPr sz="1800" b="1">
-                <a:solidFill>
-                  <a:srgbClr val="000000"/>
-                </a:solidFill>
-                <a:latin typeface="맑은 고딕"/>
-                <a:ea typeface="맑은 고딕"/>
-              </a:rPr>
-              <a:t>점검 항목</a:t>
-            </a:r>
-          </a:p>
-          <a:p>
-            <a:pPr lvl="3" marL="947420" indent="-223520">
-              <a:spcBef>
-                <a:spcPts val="300"/>
-              </a:spcBef>
-              <a:spcAft>
-                <a:spcPts val="300"/>
-              </a:spcAft>
-              <a:buNone/>
-            </a:pPr>
-            <a:r>
-              <a:rPr sz="1600" b="0">
-                <a:solidFill>
-                  <a:srgbClr val="000000"/>
-                </a:solidFill>
-                <a:latin typeface="맑은 고딕"/>
-                <a:ea typeface="맑은 고딕"/>
-              </a:rPr>
-              <a:t>1. </a:t>
-            </a:r>
-            <a:r>
-              <a:rPr sz="1600" b="1">
-                <a:solidFill>
-                  <a:srgbClr val="000000"/>
-                </a:solidFill>
-                <a:latin typeface="맑은 고딕"/>
-                <a:ea typeface="맑은 고딕"/>
-              </a:rPr>
-              <a:t>대표 예</a:t>
-            </a:r>
-            <a:r>
-              <a:rPr sz="1600" b="0">
-                <a:solidFill>
-                  <a:srgbClr val="000000"/>
-                </a:solidFill>
-                <a:latin typeface="맑은 고딕"/>
-                <a:ea typeface="맑은 고딕"/>
-              </a:rPr>
-              <a:t> —</a:t>
-            </a:r>
-            <a:r>
-              <a:rPr sz="1400" b="0">
-                <a:solidFill>
-                  <a:srgbClr val="000000"/>
-                </a:solidFill>
-                <a:latin typeface="맑은 고딕"/>
-                <a:ea typeface="맑은 고딕"/>
-              </a:rPr>
-              <a:t> 업무 규칙</a:t>
-            </a:r>
-            <a:r>
-              <a:rPr sz="1200" b="0">
-                <a:solidFill>
-                  <a:srgbClr val="000000"/>
-                </a:solidFill>
-                <a:latin typeface="맑은 고딕"/>
-                <a:ea typeface="맑은 고딕"/>
-              </a:rPr>
-              <a:t>(회차·회차 금액·결제 거절)</a:t>
-            </a:r>
-            <a:r>
-              <a:rPr sz="1400" b="0">
-                <a:solidFill>
-                  <a:srgbClr val="000000"/>
-                </a:solidFill>
-                <a:latin typeface="맑은 고딕"/>
-                <a:ea typeface="맑은 고딕"/>
-              </a:rPr>
-              <a:t>마다 예가 있는가?</a:t>
-            </a:r>
-          </a:p>
-          <a:p>
-            <a:pPr lvl="3" marL="947420" indent="-223520">
-              <a:spcBef>
-                <a:spcPts val="300"/>
-              </a:spcBef>
-              <a:spcAft>
-                <a:spcPts val="300"/>
-              </a:spcAft>
-              <a:buNone/>
-            </a:pPr>
-            <a:r>
-              <a:rPr sz="1600" b="0">
-                <a:solidFill>
-                  <a:srgbClr val="000000"/>
-                </a:solidFill>
-                <a:latin typeface="맑은 고딕"/>
-                <a:ea typeface="맑은 고딕"/>
-              </a:rPr>
-              <a:t>2. </a:t>
-            </a:r>
-            <a:r>
-              <a:rPr sz="1600" b="1">
-                <a:solidFill>
-                  <a:srgbClr val="000000"/>
-                </a:solidFill>
-                <a:latin typeface="맑은 고딕"/>
-                <a:ea typeface="맑은 고딕"/>
-              </a:rPr>
-              <a:t>거절 예</a:t>
-            </a:r>
-            <a:r>
-              <a:rPr sz="1600" b="0">
-                <a:solidFill>
-                  <a:srgbClr val="000000"/>
-                </a:solidFill>
-                <a:latin typeface="맑은 고딕"/>
-                <a:ea typeface="맑은 고딕"/>
-              </a:rPr>
-              <a:t> —</a:t>
-            </a:r>
-            <a:r>
-              <a:rPr sz="1400" b="0">
-                <a:solidFill>
-                  <a:srgbClr val="000000"/>
-                </a:solidFill>
-                <a:latin typeface="맑은 고딕"/>
-                <a:ea typeface="맑은 고딕"/>
-              </a:rPr>
-              <a:t> 거절 뒤 그대로인 것</a:t>
-            </a:r>
-            <a:r>
-              <a:rPr sz="1200" b="0">
-                <a:solidFill>
-                  <a:srgbClr val="000000"/>
-                </a:solidFill>
-                <a:latin typeface="맑은 고딕"/>
-                <a:ea typeface="맑은 고딕"/>
-              </a:rPr>
-              <a:t>(결제 대기, 회차 0개)</a:t>
-            </a:r>
-            <a:r>
-              <a:rPr sz="1400" b="0">
-                <a:solidFill>
-                  <a:srgbClr val="000000"/>
-                </a:solidFill>
-                <a:latin typeface="맑은 고딕"/>
-                <a:ea typeface="맑은 고딕"/>
-              </a:rPr>
-              <a:t>을 밝혔는가?</a:t>
-            </a:r>
-          </a:p>
-          <a:p>
-            <a:pPr lvl="3" marL="947420" indent="-223520">
-              <a:spcBef>
-                <a:spcPts val="300"/>
-              </a:spcBef>
-              <a:spcAft>
-                <a:spcPts val="300"/>
-              </a:spcAft>
-              <a:buNone/>
-            </a:pPr>
-            <a:r>
-              <a:rPr sz="1600" b="0">
-                <a:solidFill>
-                  <a:srgbClr val="000000"/>
-                </a:solidFill>
-                <a:latin typeface="맑은 고딕"/>
-                <a:ea typeface="맑은 고딕"/>
-              </a:rPr>
-              <a:t>3. </a:t>
-            </a:r>
-            <a:r>
-              <a:rPr sz="1600" b="1">
-                <a:solidFill>
-                  <a:srgbClr val="000000"/>
-                </a:solidFill>
-                <a:latin typeface="맑은 고딕"/>
-                <a:ea typeface="맑은 고딕"/>
-              </a:rPr>
-              <a:t>구체적인 값</a:t>
-            </a:r>
-            <a:r>
-              <a:rPr sz="1600" b="0">
-                <a:solidFill>
-                  <a:srgbClr val="000000"/>
-                </a:solidFill>
-                <a:latin typeface="맑은 고딕"/>
-                <a:ea typeface="맑은 고딕"/>
-              </a:rPr>
-              <a:t> —</a:t>
-            </a:r>
-            <a:r>
-              <a:rPr sz="1400" b="0">
-                <a:solidFill>
-                  <a:srgbClr val="000000"/>
-                </a:solidFill>
-                <a:latin typeface="맑은 고딕"/>
-                <a:ea typeface="맑은 고딕"/>
-              </a:rPr>
-              <a:t> 날짜·금액·회차 수가 숫자인가? 직접 계산해 맞는가?</a:t>
-            </a:r>
-          </a:p>
-          <a:p>
-            <a:pPr lvl="3" marL="947420" indent="-223520">
-              <a:spcBef>
-                <a:spcPts val="300"/>
-              </a:spcBef>
-              <a:spcAft>
-                <a:spcPts val="300"/>
-              </a:spcAft>
-              <a:buNone/>
-            </a:pPr>
-            <a:r>
-              <a:rPr sz="1600" b="0">
-                <a:solidFill>
-                  <a:srgbClr val="000000"/>
-                </a:solidFill>
-                <a:latin typeface="맑은 고딕"/>
-                <a:ea typeface="맑은 고딕"/>
-              </a:rPr>
-              <a:t>4. </a:t>
-            </a:r>
-            <a:r>
-              <a:rPr sz="1600" b="1">
-                <a:solidFill>
-                  <a:srgbClr val="000000"/>
-                </a:solidFill>
-                <a:latin typeface="맑은 고딕"/>
-                <a:ea typeface="맑은 고딕"/>
-              </a:rPr>
-              <a:t>명세에 없는 규칙</a:t>
-            </a:r>
-            <a:r>
-              <a:rPr sz="1600" b="0">
-                <a:solidFill>
-                  <a:srgbClr val="000000"/>
-                </a:solidFill>
-                <a:latin typeface="맑은 고딕"/>
-                <a:ea typeface="맑은 고딕"/>
-              </a:rPr>
-              <a:t> —</a:t>
-            </a:r>
-            <a:r>
-              <a:rPr sz="1400" b="0">
-                <a:solidFill>
-                  <a:srgbClr val="000000"/>
-                </a:solidFill>
-                <a:latin typeface="맑은 고딕"/>
-                <a:ea typeface="맑은 고딕"/>
-              </a:rPr>
-              <a:t> LLM이 새 규칙을 기대값으로 만들지 않았는가?</a:t>
-            </a:r>
-          </a:p>
-          <a:p>
-            <a:pPr lvl="3" marL="947420" indent="-223520">
-              <a:spcBef>
-                <a:spcPts val="300"/>
-              </a:spcBef>
-              <a:spcAft>
-                <a:spcPts val="300"/>
-              </a:spcAft>
-              <a:buNone/>
-            </a:pPr>
-            <a:r>
-              <a:rPr sz="1600" b="0">
-                <a:solidFill>
-                  <a:srgbClr val="000000"/>
-                </a:solidFill>
-                <a:latin typeface="맑은 고딕"/>
-                <a:ea typeface="맑은 고딕"/>
-              </a:rPr>
-              <a:t>5. </a:t>
-            </a:r>
-            <a:r>
-              <a:rPr sz="1600" b="1">
-                <a:solidFill>
-                  <a:srgbClr val="000000"/>
-                </a:solidFill>
-                <a:latin typeface="맑은 고딕"/>
-                <a:ea typeface="맑은 고딕"/>
-              </a:rPr>
-              <a:t>작업 단위</a:t>
-            </a:r>
-            <a:r>
-              <a:rPr sz="1600" b="0">
-                <a:solidFill>
-                  <a:srgbClr val="000000"/>
-                </a:solidFill>
-                <a:latin typeface="맑은 고딕"/>
-                <a:ea typeface="맑은 고딕"/>
-              </a:rPr>
-              <a:t> —</a:t>
-            </a:r>
-            <a:r>
-              <a:rPr sz="1400" b="0">
-                <a:solidFill>
-                  <a:srgbClr val="000000"/>
-                </a:solidFill>
-                <a:latin typeface="맑은 고딕"/>
-                <a:ea typeface="맑은 고딕"/>
-              </a:rPr>
-              <a:t> 단위마다 끝을 확인하는 수용 기준이 있는가?</a:t>
-            </a:r>
-          </a:p>
-          <a:p>
-            <a:pPr lvl="3" marL="947420" indent="-223520">
-              <a:spcBef>
-                <a:spcPts val="300"/>
-              </a:spcBef>
-              <a:spcAft>
-                <a:spcPts val="300"/>
-              </a:spcAft>
-              <a:buNone/>
-            </a:pPr>
-            <a:r>
-              <a:rPr sz="1600" b="0">
-                <a:solidFill>
-                  <a:srgbClr val="000000"/>
-                </a:solidFill>
-                <a:latin typeface="맑은 고딕"/>
-                <a:ea typeface="맑은 고딕"/>
-              </a:rPr>
-              <a:t>6. </a:t>
-            </a:r>
-            <a:r>
-              <a:rPr sz="1600" b="1">
-                <a:solidFill>
-                  <a:srgbClr val="000000"/>
-                </a:solidFill>
-                <a:latin typeface="맑은 고딕"/>
-                <a:ea typeface="맑은 고딕"/>
-              </a:rPr>
-              <a:t>알맞은 개수</a:t>
-            </a:r>
-            <a:r>
-              <a:rPr sz="1600" b="0">
-                <a:solidFill>
-                  <a:srgbClr val="000000"/>
-                </a:solidFill>
-                <a:latin typeface="맑은 고딕"/>
-                <a:ea typeface="맑은 고딕"/>
-              </a:rPr>
-              <a:t> —</a:t>
-            </a:r>
-            <a:r>
-              <a:rPr sz="1400" b="0">
-                <a:solidFill>
-                  <a:srgbClr val="000000"/>
-                </a:solidFill>
-                <a:latin typeface="맑은 고딕"/>
-                <a:ea typeface="맑은 고딕"/>
-              </a:rPr>
-              <a:t> 같은 규칙의 예가 불어나지 않았는가?</a:t>
-            </a:r>
-          </a:p>
-          <a:p>
-            <a:pPr lvl="2" marL="723900" indent="-368300">
-              <a:spcBef>
-                <a:spcPts val="300"/>
-              </a:spcBef>
-              <a:spcAft>
-                <a:spcPts val="300"/>
-              </a:spcAft>
-              <a:buSzPct val="90000"/>
-              <a:buFont typeface="Wingdings" pitchFamily="2" charset="2"/>
-              <a:buChar char=""/>
-            </a:pPr>
-            <a:r>
-              <a:rPr sz="1800" b="1">
-                <a:solidFill>
-                  <a:srgbClr val="000000"/>
-                </a:solidFill>
-                <a:latin typeface="맑은 고딕"/>
-                <a:ea typeface="맑은 고딕"/>
-              </a:rPr>
-              <a:t>결과물</a:t>
-            </a:r>
-            <a:r>
-              <a:rPr sz="1800" b="0">
-                <a:solidFill>
-                  <a:srgbClr val="000000"/>
-                </a:solidFill>
-                <a:latin typeface="맑은 고딕"/>
-                <a:ea typeface="맑은 고딕"/>
-              </a:rPr>
-              <a:t> —</a:t>
-            </a:r>
-            <a:r>
-              <a:rPr sz="1600" b="0">
-                <a:solidFill>
-                  <a:srgbClr val="000000"/>
-                </a:solidFill>
-                <a:latin typeface="맑은 고딕"/>
-                <a:ea typeface="맑은 고딕"/>
-              </a:rPr>
-              <a:t> 수용 기준과 작업 단위. 실습 5의 입력이 됩니다.</a:t>
-            </a:r>
-          </a:p>
-        </p:txBody>
-      </p:sp>
-    </p:spTree>
-    <p:extLst>
-      <p:ext uri="{BB962C8B-B14F-4D97-AF65-F5344CB8AC3E}">
-        <p14:creationId xmlns:p14="http://schemas.microsoft.com/office/powerpoint/2010/main" val="3555436673"/>
       </p:ext>
     </p:extLst>
   </p:cSld>
@@ -17745,7 +17176,7 @@
                 <a:latin typeface="맑은 고딕"/>
                 <a:ea typeface="맑은 고딕"/>
               </a:rPr>
-              <a:t>10. 요약</a:t>
+              <a:t>09. 실습 — 수용 기준</a:t>
             </a:r>
           </a:p>
         </p:txBody>
@@ -17879,7 +17310,12 @@
             <p:ph idx="1"/>
           </p:nvPr>
         </p:nvSpPr>
-        <p:spPr/>
+        <p:spPr>
+          <a:xfrm>
+            <a:off x="365760" y="960120"/>
+            <a:ext cx="8622792" cy="5352345"/>
+          </a:xfrm>
+        </p:spPr>
         <p:txBody>
           <a:bodyPr>
             <a:normAutofit/>
@@ -17888,62 +17324,91 @@
           <a:p>
             <a:pPr marL="0" indent="0">
               <a:spcBef>
-                <a:spcPts val="600"/>
+                <a:spcPts val="300"/>
               </a:spcBef>
               <a:spcAft>
-                <a:spcPts val="600"/>
+                <a:spcPts val="300"/>
               </a:spcAft>
               <a:buNone/>
             </a:pPr>
             <a:r>
-              <a:rPr sz="1800" b="1">
-                <a:solidFill>
-                  <a:srgbClr val="000000"/>
-                </a:solidFill>
-                <a:latin typeface="맑은 고딕"/>
-                <a:ea typeface="맑은 고딕"/>
-              </a:rPr>
-              <a:t>수용 기준이 곧 테스트</a:t>
-            </a:r>
-            <a:r>
-              <a:rPr sz="1800" b="0">
-                <a:solidFill>
-                  <a:srgbClr val="000000"/>
-                </a:solidFill>
-                <a:latin typeface="맑은 고딕"/>
-                <a:ea typeface="맑은 고딕"/>
-              </a:rPr>
-              <a:t>이며, 검증할 수 없는 작업은 맡길 수 없다.</a:t>
-            </a:r>
-          </a:p>
-          <a:p>
-            <a:pPr marL="342900" indent="0">
+              <a:rPr sz="1600" b="0">
+                <a:solidFill>
+                  <a:srgbClr val="000000"/>
+                </a:solidFill>
+                <a:latin typeface="맑은 고딕"/>
+                <a:ea typeface="맑은 고딕"/>
+              </a:rPr>
+              <a:t>실습 3의 작업 명세서를 LLM에 제공하여 </a:t>
+            </a:r>
+            <a:r>
+              <a:rPr sz="1600" b="1">
+                <a:solidFill>
+                  <a:srgbClr val="000000"/>
+                </a:solidFill>
+                <a:latin typeface="맑은 고딕"/>
+                <a:ea typeface="맑은 고딕"/>
+              </a:rPr>
+              <a:t>정기배송 신청과 회차 생성 구현</a:t>
+            </a:r>
+            <a:r>
+              <a:rPr sz="1600" b="0">
+                <a:solidFill>
+                  <a:srgbClr val="000000"/>
+                </a:solidFill>
+                <a:latin typeface="맑은 고딕"/>
+                <a:ea typeface="맑은 고딕"/>
+              </a:rPr>
+              <a:t>의 </a:t>
+            </a:r>
+            <a:r>
+              <a:rPr sz="1600" b="1">
+                <a:solidFill>
+                  <a:srgbClr val="000000"/>
+                </a:solidFill>
+                <a:latin typeface="맑은 고딕"/>
+                <a:ea typeface="맑은 고딕"/>
+              </a:rPr>
+              <a:t>수용 기준</a:t>
+            </a:r>
+            <a:r>
+              <a:rPr sz="1600" b="0">
+                <a:solidFill>
+                  <a:srgbClr val="000000"/>
+                </a:solidFill>
+                <a:latin typeface="맑은 고딕"/>
+                <a:ea typeface="맑은 고딕"/>
+              </a:rPr>
+              <a:t>과 </a:t>
+            </a:r>
+            <a:r>
+              <a:rPr sz="1600" b="1">
+                <a:solidFill>
+                  <a:srgbClr val="000000"/>
+                </a:solidFill>
+                <a:latin typeface="맑은 고딕"/>
+                <a:ea typeface="맑은 고딕"/>
+              </a:rPr>
+              <a:t>작업 단위</a:t>
+            </a:r>
+            <a:r>
+              <a:rPr sz="1600" b="0">
+                <a:solidFill>
+                  <a:srgbClr val="000000"/>
+                </a:solidFill>
+                <a:latin typeface="맑은 고딕"/>
+                <a:ea typeface="맑은 고딕"/>
+              </a:rPr>
+              <a:t>를 만들고, 점검 항목으로 피드백하여 완성하십시오.</a:t>
+            </a:r>
+          </a:p>
+          <a:p>
+            <a:pPr lvl="2" marL="723900" indent="-368300">
               <a:spcBef>
-                <a:spcPts val="600"/>
+                <a:spcPts val="300"/>
               </a:spcBef>
               <a:spcAft>
-                <a:spcPts val="600"/>
-              </a:spcAft>
-              <a:buNone/>
-            </a:pPr>
-            <a:r>
-              <a:rPr sz="1800" b="1">
-                <a:solidFill>
-                  <a:srgbClr val="000000"/>
-                </a:solidFill>
-                <a:latin typeface="맑은 고딕"/>
-                <a:ea typeface="맑은 고딕"/>
-              </a:rPr>
-              <a:t>수용 기준과 작업 단위의 핵심</a:t>
-            </a:r>
-          </a:p>
-          <a:p>
-            <a:pPr lvl="2" marL="723900" indent="-368300">
-              <a:spcBef>
-                <a:spcPts val="600"/>
-              </a:spcBef>
-              <a:spcAft>
-                <a:spcPts val="600"/>
+                <a:spcPts val="300"/>
               </a:spcAft>
               <a:buSzPct val="90000"/>
               <a:buFont typeface="Wingdings" pitchFamily="2" charset="2"/>
@@ -17957,18 +17422,19 @@
                 <a:latin typeface="맑은 고딕"/>
                 <a:ea typeface="맑은 고딕"/>
               </a:rPr>
-              <a:t>수용 기준</a:t>
-            </a:r>
-            <a:r>
-              <a:rPr sz="1800" b="0">
-                <a:solidFill>
-                  <a:srgbClr val="000000"/>
-                </a:solidFill>
-                <a:latin typeface="맑은 고딕"/>
-                <a:ea typeface="맑은 고딕"/>
-              </a:rPr>
-              <a:t> —</a:t>
-            </a:r>
+              <a:t>투입물</a:t>
+            </a:r>
+          </a:p>
+          <a:p>
+            <a:pPr lvl="3" marL="723900" indent="0">
+              <a:spcBef>
+                <a:spcPts val="300"/>
+              </a:spcBef>
+              <a:spcAft>
+                <a:spcPts val="300"/>
+              </a:spcAft>
+              <a:buNone/>
+            </a:pPr>
             <a:r>
               <a:rPr sz="1600" b="0">
                 <a:solidFill>
@@ -17977,16 +17443,46 @@
                 <a:latin typeface="맑은 고딕"/>
                 <a:ea typeface="맑은 고딕"/>
               </a:rPr>
-              <a:t> 스토리와 코드를 잇는 고리. 기대값은 사람이 정하고 LLM은 바꾸지 않는다</a:t>
+              <a:t>실습 3의 </a:t>
+            </a:r>
+            <a:r>
+              <a:rPr sz="1600" b="1">
+                <a:solidFill>
+                  <a:srgbClr val="000000"/>
+                </a:solidFill>
+                <a:latin typeface="맑은 고딕"/>
+                <a:ea typeface="맑은 고딕"/>
+              </a:rPr>
+              <a:t>작업 명세서</a:t>
+            </a:r>
+            <a:r>
+              <a:rPr sz="1600" b="0">
+                <a:solidFill>
+                  <a:srgbClr val="000000"/>
+                </a:solidFill>
+                <a:latin typeface="맑은 고딕"/>
+                <a:ea typeface="맑은 고딕"/>
+              </a:rPr>
+              <a:t>, </a:t>
+            </a:r>
+            <a:r>
+              <a:rPr sz="1600" b="1">
+                <a:solidFill>
+                  <a:srgbClr val="000000"/>
+                </a:solidFill>
+                <a:latin typeface="맑은 고딕"/>
+                <a:ea typeface="맑은 고딕"/>
+              </a:rPr>
+              <a:t>정기배송 모델 패키지</a:t>
             </a:r>
           </a:p>
           <a:p>
             <a:pPr lvl="2" marL="723900" indent="-368300">
               <a:spcBef>
-                <a:spcPts val="600"/>
+                <a:spcPts val="300"/>
               </a:spcBef>
               <a:spcAft>
-                <a:spcPts val="600"/>
+                <a:spcPts val="300"/>
               </a:spcAft>
               <a:buSzPct val="90000"/>
               <a:buFont typeface="Wingdings" pitchFamily="2" charset="2"/>
@@ -18000,19 +17496,40 @@
                 <a:latin typeface="맑은 고딕"/>
                 <a:ea typeface="맑은 고딕"/>
               </a:rPr>
+              <a:t>프롬프트</a:t>
+            </a:r>
+          </a:p>
+          <a:p>
+            <a:pPr lvl="3" marL="723900" indent="0">
+              <a:spcBef>
+                <a:spcPts val="300"/>
+              </a:spcBef>
+              <a:spcAft>
+                <a:spcPts val="300"/>
+              </a:spcAft>
+              <a:buNone/>
+            </a:pPr>
+            <a:r>
+              <a:rPr sz="1600" b="0">
+                <a:solidFill>
+                  <a:srgbClr val="000000"/>
+                </a:solidFill>
+                <a:latin typeface="맑은 고딕"/>
+                <a:ea typeface="맑은 고딕"/>
+              </a:rPr>
+              <a:t>"작업 명세서의 업무 규칙마다 </a:t>
+            </a:r>
+            <a:r>
+              <a:rPr sz="1600" b="1">
+                <a:solidFill>
+                  <a:srgbClr val="000000"/>
+                </a:solidFill>
+                <a:latin typeface="맑은 고딕"/>
+                <a:ea typeface="맑은 고딕"/>
+              </a:rPr>
               <a:t>허용·거절 예시</a:t>
             </a:r>
             <a:r>
-              <a:rPr sz="1800" b="0">
-                <a:solidFill>
-                  <a:srgbClr val="000000"/>
-                </a:solidFill>
-                <a:latin typeface="맑은 고딕"/>
-                <a:ea typeface="맑은 고딕"/>
-              </a:rPr>
-              <a:t> —</a:t>
-            </a:r>
-            <a:r>
               <a:rPr sz="1600" b="0">
                 <a:solidFill>
                   <a:srgbClr val="000000"/>
@@ -18020,16 +17537,56 @@
                 <a:latin typeface="맑은 고딕"/>
                 <a:ea typeface="맑은 고딕"/>
               </a:rPr>
-              <a:t> 업무 규칙마다 대표 예. 거절 예시는 바뀌지 않아야 할 것을 보인다</a:t>
+              <a:t>를 Given-When-Then으로 써줘. 거절 예시에는 </a:t>
+            </a:r>
+            <a:r>
+              <a:rPr sz="1600" b="1">
+                <a:solidFill>
+                  <a:srgbClr val="000000"/>
+                </a:solidFill>
+                <a:latin typeface="맑은 고딕"/>
+                <a:ea typeface="맑은 고딕"/>
+              </a:rPr>
+              <a:t>바뀌지 않아야 할 것</a:t>
+            </a:r>
+            <a:r>
+              <a:rPr sz="1600" b="0">
+                <a:solidFill>
+                  <a:srgbClr val="000000"/>
+                </a:solidFill>
+                <a:latin typeface="맑은 고딕"/>
+                <a:ea typeface="맑은 고딕"/>
+              </a:rPr>
+              <a:t>도 써줘. 그리고 수용 기준 하나 이상으로 끝나는 </a:t>
+            </a:r>
+            <a:r>
+              <a:rPr sz="1600" b="1">
+                <a:solidFill>
+                  <a:srgbClr val="000000"/>
+                </a:solidFill>
+                <a:latin typeface="맑은 고딕"/>
+                <a:ea typeface="맑은 고딕"/>
+              </a:rPr>
+              <a:t>작업 단위</a:t>
+            </a:r>
+            <a:r>
+              <a:rPr sz="1600" b="0">
+                <a:solidFill>
+                  <a:srgbClr val="000000"/>
+                </a:solidFill>
+                <a:latin typeface="맑은 고딕"/>
+                <a:ea typeface="맑은 고딕"/>
+              </a:rPr>
+              <a:t>로 나눠줘. 명세에 없는 규칙은 만들지 말고 질문으로 남겨줘."</a:t>
             </a:r>
           </a:p>
           <a:p>
             <a:pPr lvl="2" marL="723900" indent="-368300">
               <a:spcBef>
-                <a:spcPts val="600"/>
+                <a:spcPts val="300"/>
               </a:spcBef>
               <a:spcAft>
-                <a:spcPts val="600"/>
+                <a:spcPts val="300"/>
               </a:spcAft>
               <a:buSzPct val="90000"/>
               <a:buFont typeface="Wingdings" pitchFamily="2" charset="2"/>
@@ -18043,10 +17600,41 @@
                 <a:latin typeface="맑은 고딕"/>
                 <a:ea typeface="맑은 고딕"/>
               </a:rPr>
-              <a:t>수용 테스트</a:t>
-            </a:r>
-            <a:r>
-              <a:rPr sz="1800" b="0">
+              <a:t>점검 항목</a:t>
+            </a:r>
+          </a:p>
+          <a:p>
+            <a:pPr lvl="3" marL="947420" indent="-223520">
+              <a:spcBef>
+                <a:spcPts val="300"/>
+              </a:spcBef>
+              <a:spcAft>
+                <a:spcPts val="300"/>
+              </a:spcAft>
+              <a:buNone/>
+            </a:pPr>
+            <a:r>
+              <a:rPr sz="1600" b="0">
+                <a:solidFill>
+                  <a:srgbClr val="000000"/>
+                </a:solidFill>
+                <a:latin typeface="맑은 고딕"/>
+                <a:ea typeface="맑은 고딕"/>
+              </a:rPr>
+              <a:t>1. </a:t>
+            </a:r>
+            <a:r>
+              <a:rPr sz="1600" b="1">
+                <a:solidFill>
+                  <a:srgbClr val="000000"/>
+                </a:solidFill>
+                <a:latin typeface="맑은 고딕"/>
+                <a:ea typeface="맑은 고딕"/>
+              </a:rPr>
+              <a:t>대표 예</a:t>
+            </a:r>
+            <a:r>
+              <a:rPr sz="1600" b="0">
                 <a:solidFill>
                   <a:srgbClr val="000000"/>
                 </a:solidFill>
@@ -18056,6 +17644,47 @@
               <a:t> —</a:t>
             </a:r>
             <a:r>
+              <a:rPr sz="1400" b="0">
+                <a:solidFill>
+                  <a:srgbClr val="000000"/>
+                </a:solidFill>
+                <a:latin typeface="맑은 고딕"/>
+                <a:ea typeface="맑은 고딕"/>
+              </a:rPr>
+              <a:t> 업무 규칙</a:t>
+            </a:r>
+            <a:r>
+              <a:rPr sz="1200" b="0">
+                <a:solidFill>
+                  <a:srgbClr val="000000"/>
+                </a:solidFill>
+                <a:latin typeface="맑은 고딕"/>
+                <a:ea typeface="맑은 고딕"/>
+              </a:rPr>
+              <a:t>(회차·회차 금액·결제 거절)</a:t>
+            </a:r>
+            <a:r>
+              <a:rPr sz="1400" b="0">
+                <a:solidFill>
+                  <a:srgbClr val="000000"/>
+                </a:solidFill>
+                <a:latin typeface="맑은 고딕"/>
+                <a:ea typeface="맑은 고딕"/>
+              </a:rPr>
+              <a:t>마다 예가 있는가?</a:t>
+            </a:r>
+          </a:p>
+          <a:p>
+            <a:pPr lvl="3" marL="947420" indent="-223520">
+              <a:spcBef>
+                <a:spcPts val="300"/>
+              </a:spcBef>
+              <a:spcAft>
+                <a:spcPts val="300"/>
+              </a:spcAft>
+              <a:buNone/>
+            </a:pPr>
+            <a:r>
               <a:rPr sz="1600" b="0">
                 <a:solidFill>
                   <a:srgbClr val="000000"/>
@@ -18063,16 +17692,270 @@
                 <a:latin typeface="맑은 고딕"/>
                 <a:ea typeface="맑은 고딕"/>
               </a:rPr>
-              <a:t> 예를 테스트로 먼저 주고, 에이전트는 TDD로 구현한다</a:t>
+              <a:t>2. </a:t>
+            </a:r>
+            <a:r>
+              <a:rPr sz="1600" b="1">
+                <a:solidFill>
+                  <a:srgbClr val="000000"/>
+                </a:solidFill>
+                <a:latin typeface="맑은 고딕"/>
+                <a:ea typeface="맑은 고딕"/>
+              </a:rPr>
+              <a:t>거절 예</a:t>
+            </a:r>
+            <a:r>
+              <a:rPr sz="1600" b="0">
+                <a:solidFill>
+                  <a:srgbClr val="000000"/>
+                </a:solidFill>
+                <a:latin typeface="맑은 고딕"/>
+                <a:ea typeface="맑은 고딕"/>
+              </a:rPr>
+              <a:t> —</a:t>
+            </a:r>
+            <a:r>
+              <a:rPr sz="1400" b="0">
+                <a:solidFill>
+                  <a:srgbClr val="000000"/>
+                </a:solidFill>
+                <a:latin typeface="맑은 고딕"/>
+                <a:ea typeface="맑은 고딕"/>
+              </a:rPr>
+              <a:t> 거절 뒤 그대로인 것</a:t>
+            </a:r>
+            <a:r>
+              <a:rPr sz="1200" b="0">
+                <a:solidFill>
+                  <a:srgbClr val="000000"/>
+                </a:solidFill>
+                <a:latin typeface="맑은 고딕"/>
+                <a:ea typeface="맑은 고딕"/>
+              </a:rPr>
+              <a:t>(결제 대기, 회차 0개)</a:t>
+            </a:r>
+            <a:r>
+              <a:rPr sz="1400" b="0">
+                <a:solidFill>
+                  <a:srgbClr val="000000"/>
+                </a:solidFill>
+                <a:latin typeface="맑은 고딕"/>
+                <a:ea typeface="맑은 고딕"/>
+              </a:rPr>
+              <a:t>을 밝혔는가?</a:t>
+            </a:r>
+          </a:p>
+          <a:p>
+            <a:pPr lvl="3" marL="947420" indent="-223520">
+              <a:spcBef>
+                <a:spcPts val="300"/>
+              </a:spcBef>
+              <a:spcAft>
+                <a:spcPts val="300"/>
+              </a:spcAft>
+              <a:buNone/>
+            </a:pPr>
+            <a:r>
+              <a:rPr sz="1600" b="0">
+                <a:solidFill>
+                  <a:srgbClr val="000000"/>
+                </a:solidFill>
+                <a:latin typeface="맑은 고딕"/>
+                <a:ea typeface="맑은 고딕"/>
+              </a:rPr>
+              <a:t>3. </a:t>
+            </a:r>
+            <a:r>
+              <a:rPr sz="1600" b="1">
+                <a:solidFill>
+                  <a:srgbClr val="000000"/>
+                </a:solidFill>
+                <a:latin typeface="맑은 고딕"/>
+                <a:ea typeface="맑은 고딕"/>
+              </a:rPr>
+              <a:t>구체적인 값</a:t>
+            </a:r>
+            <a:r>
+              <a:rPr sz="1600" b="0">
+                <a:solidFill>
+                  <a:srgbClr val="000000"/>
+                </a:solidFill>
+                <a:latin typeface="맑은 고딕"/>
+                <a:ea typeface="맑은 고딕"/>
+              </a:rPr>
+              <a:t> —</a:t>
+            </a:r>
+            <a:r>
+              <a:rPr sz="1400" b="0">
+                <a:solidFill>
+                  <a:srgbClr val="000000"/>
+                </a:solidFill>
+                <a:latin typeface="맑은 고딕"/>
+                <a:ea typeface="맑은 고딕"/>
+              </a:rPr>
+              <a:t> 날짜·금액·회차 수가 숫자인가? 직접 계산해 맞는가?</a:t>
+            </a:r>
+          </a:p>
+          <a:p>
+            <a:pPr lvl="3" marL="947420" indent="-223520">
+              <a:spcBef>
+                <a:spcPts val="300"/>
+              </a:spcBef>
+              <a:spcAft>
+                <a:spcPts val="300"/>
+              </a:spcAft>
+              <a:buNone/>
+            </a:pPr>
+            <a:r>
+              <a:rPr sz="1600" b="0">
+                <a:solidFill>
+                  <a:srgbClr val="000000"/>
+                </a:solidFill>
+                <a:latin typeface="맑은 고딕"/>
+                <a:ea typeface="맑은 고딕"/>
+              </a:rPr>
+              <a:t>4. </a:t>
+            </a:r>
+            <a:r>
+              <a:rPr sz="1600" b="1">
+                <a:solidFill>
+                  <a:srgbClr val="000000"/>
+                </a:solidFill>
+                <a:latin typeface="맑은 고딕"/>
+                <a:ea typeface="맑은 고딕"/>
+              </a:rPr>
+              <a:t>명세에 없는 규칙</a:t>
+            </a:r>
+            <a:r>
+              <a:rPr sz="1600" b="0">
+                <a:solidFill>
+                  <a:srgbClr val="000000"/>
+                </a:solidFill>
+                <a:latin typeface="맑은 고딕"/>
+                <a:ea typeface="맑은 고딕"/>
+              </a:rPr>
+              <a:t> —</a:t>
+            </a:r>
+            <a:r>
+              <a:rPr sz="1400" b="0">
+                <a:solidFill>
+                  <a:srgbClr val="000000"/>
+                </a:solidFill>
+                <a:latin typeface="맑은 고딕"/>
+                <a:ea typeface="맑은 고딕"/>
+              </a:rPr>
+              <a:t> LLM이 새 규칙을 기대값으로 만들지 않았는가?</a:t>
+            </a:r>
+          </a:p>
+          <a:p>
+            <a:pPr lvl="3" marL="947420" indent="-223520">
+              <a:spcBef>
+                <a:spcPts val="300"/>
+              </a:spcBef>
+              <a:spcAft>
+                <a:spcPts val="300"/>
+              </a:spcAft>
+              <a:buNone/>
+            </a:pPr>
+            <a:r>
+              <a:rPr sz="1600" b="0">
+                <a:solidFill>
+                  <a:srgbClr val="000000"/>
+                </a:solidFill>
+                <a:latin typeface="맑은 고딕"/>
+                <a:ea typeface="맑은 고딕"/>
+              </a:rPr>
+              <a:t>5. </a:t>
+            </a:r>
+            <a:r>
+              <a:rPr sz="1600" b="1">
+                <a:solidFill>
+                  <a:srgbClr val="000000"/>
+                </a:solidFill>
+                <a:latin typeface="맑은 고딕"/>
+                <a:ea typeface="맑은 고딕"/>
+              </a:rPr>
+              <a:t>작업 단위</a:t>
+            </a:r>
+            <a:r>
+              <a:rPr sz="1600" b="0">
+                <a:solidFill>
+                  <a:srgbClr val="000000"/>
+                </a:solidFill>
+                <a:latin typeface="맑은 고딕"/>
+                <a:ea typeface="맑은 고딕"/>
+              </a:rPr>
+              <a:t> —</a:t>
+            </a:r>
+            <a:r>
+              <a:rPr sz="1400" b="0">
+                <a:solidFill>
+                  <a:srgbClr val="000000"/>
+                </a:solidFill>
+                <a:latin typeface="맑은 고딕"/>
+                <a:ea typeface="맑은 고딕"/>
+              </a:rPr>
+              <a:t> 단위마다 끝을 확인하는 수용 기준이 있는가?</a:t>
+            </a:r>
+          </a:p>
+          <a:p>
+            <a:pPr lvl="3" marL="947420" indent="-223520">
+              <a:spcBef>
+                <a:spcPts val="300"/>
+              </a:spcBef>
+              <a:spcAft>
+                <a:spcPts val="300"/>
+              </a:spcAft>
+              <a:buNone/>
+            </a:pPr>
+            <a:r>
+              <a:rPr sz="1600" b="0">
+                <a:solidFill>
+                  <a:srgbClr val="000000"/>
+                </a:solidFill>
+                <a:latin typeface="맑은 고딕"/>
+                <a:ea typeface="맑은 고딕"/>
+              </a:rPr>
+              <a:t>6. </a:t>
+            </a:r>
+            <a:r>
+              <a:rPr sz="1600" b="1">
+                <a:solidFill>
+                  <a:srgbClr val="000000"/>
+                </a:solidFill>
+                <a:latin typeface="맑은 고딕"/>
+                <a:ea typeface="맑은 고딕"/>
+              </a:rPr>
+              <a:t>알맞은 개수</a:t>
+            </a:r>
+            <a:r>
+              <a:rPr sz="1600" b="0">
+                <a:solidFill>
+                  <a:srgbClr val="000000"/>
+                </a:solidFill>
+                <a:latin typeface="맑은 고딕"/>
+                <a:ea typeface="맑은 고딕"/>
+              </a:rPr>
+              <a:t> —</a:t>
+            </a:r>
+            <a:r>
+              <a:rPr sz="1400" b="0">
+                <a:solidFill>
+                  <a:srgbClr val="000000"/>
+                </a:solidFill>
+                <a:latin typeface="맑은 고딕"/>
+                <a:ea typeface="맑은 고딕"/>
+              </a:rPr>
+              <a:t> 같은 규칙의 예가 불어나지 않았는가?</a:t>
             </a:r>
           </a:p>
           <a:p>
             <a:pPr lvl="2" marL="723900" indent="-368300">
               <a:spcBef>
-                <a:spcPts val="600"/>
+                <a:spcPts val="300"/>
               </a:spcBef>
               <a:spcAft>
-                <a:spcPts val="600"/>
+                <a:spcPts val="300"/>
               </a:spcAft>
               <a:buSzPct val="90000"/>
               <a:buFont typeface="Wingdings" pitchFamily="2" charset="2"/>
@@ -18086,7 +17969,7 @@
                 <a:latin typeface="맑은 고딕"/>
                 <a:ea typeface="맑은 고딕"/>
               </a:rPr>
-              <a:t>작업 단위</a:t>
+              <a:t>결과물</a:t>
             </a:r>
             <a:r>
               <a:rPr sz="1800" b="0">
@@ -18106,167 +17989,7 @@
                 <a:latin typeface="맑은 고딕"/>
                 <a:ea typeface="맑은 고딕"/>
               </a:rPr>
-              <a:t> 수용 기준으로 끝나는 크기로 나누고, 기능 목록으로 하나씩 진행한다</a:t>
-            </a:r>
-          </a:p>
-          <a:p>
-            <a:pPr lvl="2" marL="723900" indent="-368300">
-              <a:spcBef>
-                <a:spcPts val="600"/>
-              </a:spcBef>
-              <a:spcAft>
-                <a:spcPts val="600"/>
-              </a:spcAft>
-              <a:buSzPct val="90000"/>
-              <a:buFont typeface="Wingdings" pitchFamily="2" charset="2"/>
-              <a:buChar char=""/>
-            </a:pPr>
-            <a:r>
-              <a:rPr sz="1800" b="1">
-                <a:solidFill>
-                  <a:srgbClr val="000000"/>
-                </a:solidFill>
-                <a:latin typeface="맑은 고딕"/>
-                <a:ea typeface="맑은 고딕"/>
-              </a:rPr>
-              <a:t>완료</a:t>
-            </a:r>
-            <a:r>
-              <a:rPr sz="1800" b="0">
-                <a:solidFill>
-                  <a:srgbClr val="000000"/>
-                </a:solidFill>
-                <a:latin typeface="맑은 고딕"/>
-                <a:ea typeface="맑은 고딕"/>
-              </a:rPr>
-              <a:t> —</a:t>
-            </a:r>
-            <a:r>
-              <a:rPr sz="1600" b="0">
-                <a:solidFill>
-                  <a:srgbClr val="000000"/>
-                </a:solidFill>
-                <a:latin typeface="맑은 고딕"/>
-                <a:ea typeface="맑은 고딕"/>
-              </a:rPr>
-              <a:t> 보고가 아니라 테스트 출력과 diff로 판단한다</a:t>
-            </a:r>
-          </a:p>
-          <a:p>
-            <a:pPr lvl="2" marL="723900" indent="-368300">
-              <a:spcBef>
-                <a:spcPts val="600"/>
-              </a:spcBef>
-              <a:spcAft>
-                <a:spcPts val="600"/>
-              </a:spcAft>
-              <a:buSzPct val="90000"/>
-              <a:buFont typeface="Wingdings" pitchFamily="2" charset="2"/>
-              <a:buChar char=""/>
-            </a:pPr>
-            <a:r>
-              <a:rPr sz="1800" b="1">
-                <a:solidFill>
-                  <a:srgbClr val="000000"/>
-                </a:solidFill>
-                <a:latin typeface="맑은 고딕"/>
-                <a:ea typeface="맑은 고딕"/>
-              </a:rPr>
-              <a:t>시연</a:t>
-            </a:r>
-            <a:r>
-              <a:rPr sz="1800" b="0">
-                <a:solidFill>
-                  <a:srgbClr val="000000"/>
-                </a:solidFill>
-                <a:latin typeface="맑은 고딕"/>
-                <a:ea typeface="맑은 고딕"/>
-              </a:rPr>
-              <a:t> —</a:t>
-            </a:r>
-            <a:r>
-              <a:rPr sz="1600" b="0">
-                <a:solidFill>
-                  <a:srgbClr val="000000"/>
-                </a:solidFill>
-                <a:latin typeface="맑은 고딕"/>
-                <a:ea typeface="맑은 고딕"/>
-              </a:rPr>
-              <a:t> 둘 다 통과했지만, "테스트도 짜줘"는 명세에 없는 규칙을 테스트로 굳혔다</a:t>
-            </a:r>
-          </a:p>
-          <a:p>
-            <a:pPr marL="342900" indent="0">
-              <a:spcBef>
-                <a:spcPts val="600"/>
-              </a:spcBef>
-              <a:spcAft>
-                <a:spcPts val="600"/>
-              </a:spcAft>
-              <a:buNone/>
-            </a:pPr>
-            <a:r>
-              <a:rPr sz="1800" b="1">
-                <a:solidFill>
-                  <a:srgbClr val="000000"/>
-                </a:solidFill>
-                <a:latin typeface="맑은 고딕"/>
-                <a:ea typeface="맑은 고딕"/>
-              </a:rPr>
-              <a:t>다음 세션</a:t>
-            </a:r>
-          </a:p>
-          <a:p>
-            <a:pPr lvl="2" marL="723900" indent="-368300">
-              <a:spcBef>
-                <a:spcPts val="600"/>
-              </a:spcBef>
-              <a:spcAft>
-                <a:spcPts val="600"/>
-              </a:spcAft>
-              <a:buSzPct val="90000"/>
-              <a:buFont typeface="Wingdings" pitchFamily="2" charset="2"/>
-              <a:buChar char=""/>
-            </a:pPr>
-            <a:r>
-              <a:rPr sz="1800" b="0">
-                <a:solidFill>
-                  <a:srgbClr val="000000"/>
-                </a:solidFill>
-                <a:latin typeface="맑은 고딕"/>
-                <a:ea typeface="맑은 고딕"/>
-              </a:rPr>
-              <a:t>"</a:t>
-            </a:r>
-            <a:r>
-              <a:rPr sz="1800" b="1">
-                <a:solidFill>
-                  <a:srgbClr val="000000"/>
-                </a:solidFill>
-                <a:latin typeface="맑은 고딕"/>
-                <a:ea typeface="맑은 고딕"/>
-              </a:rPr>
-              <a:t>05. 도메인·설계 지식과 맥락 구성</a:t>
-            </a:r>
-            <a:r>
-              <a:rPr sz="1800" b="0">
-                <a:solidFill>
-                  <a:srgbClr val="000000"/>
-                </a:solidFill>
-                <a:latin typeface="맑은 고딕"/>
-                <a:ea typeface="맑은 고딕"/>
-              </a:rPr>
-              <a:t>" —</a:t>
-            </a:r>
-            <a:r>
-              <a:rPr sz="1600" b="0">
-                <a:solidFill>
-                  <a:srgbClr val="000000"/>
-                </a:solidFill>
-                <a:latin typeface="맑은 고딕"/>
-                <a:ea typeface="맑은 고딕"/>
-              </a:rPr>
-              <a:t> 과제의 판단을 바꾸는 도메인·설계 지식을 골라 맥락으로 구성한다.</a:t>
+              <a:t> 수용 기준과 작업 단위. 실습 5의 입력이 됩니다.</a:t>
             </a:r>
           </a:p>
         </p:txBody>
@@ -18336,29 +18059,7 @@
                 <a:latin typeface="맑은 고딕"/>
                 <a:ea typeface="맑은 고딕"/>
               </a:rPr>
-              <a:t>수용 기준 </a:t>
-            </a:r>
-            <a:r>
-              <a:rPr sz="1800" b="1">
-                <a:solidFill>
-                  <a:srgbClr val="000000"/>
-                </a:solidFill>
-                <a:latin typeface="맑은 고딕"/>
-                <a:ea typeface="맑은 고딕"/>
-              </a:rPr>
-              <a:t>(안)</a:t>
-            </a:r>
-          </a:p>
-          <a:p>
-            <a:r>
-              <a:rPr sz="1100" b="1">
-                <a:solidFill>
-                  <a:srgbClr val="000000"/>
-                </a:solidFill>
-                <a:latin typeface="맑은 고딕"/>
-                <a:ea typeface="맑은 고딕"/>
-              </a:rPr>
-              <a:t>별첨. 실습 답</a:t>
+              <a:t>10. 요약</a:t>
             </a:r>
           </a:p>
         </p:txBody>
@@ -18420,8 +18121,8 @@
           <a:lstStyle/>
           <a:p>
             <a:r>
-              <a:rPr kumimoji="1" lang="en-US" altLang="ko-KR" sz="1250" dirty="0" err="1"/>
-              <a:t>별첨: 04. 수용 기준과 검증 가능한 작업 단위</a:t>
+              <a:rPr kumimoji="1" lang="en-US" altLang="ko-KR" sz="1400" dirty="0" err="1"/>
+              <a:t>04. 수용 기준과 검증 가능한 작업 단위</a:t>
             </a:r>
           </a:p>
         </p:txBody>
@@ -18492,82 +18193,88 @@
             <p:ph idx="1"/>
           </p:nvPr>
         </p:nvSpPr>
-        <p:spPr>
-          <a:xfrm>
-            <a:off x="233172" y="1414318"/>
-            <a:ext cx="4338828" cy="4898147"/>
-          </a:xfrm>
-        </p:spPr>
+        <p:spPr/>
         <p:txBody>
           <a:bodyPr>
             <a:normAutofit/>
           </a:bodyPr>
           <a:lstStyle/>
           <a:p>
-            <a:pPr lvl="2" marL="228600" indent="0">
+            <a:pPr marL="0" indent="0">
               <a:spcBef>
-                <a:spcPts val="300"/>
+                <a:spcPts val="600"/>
               </a:spcBef>
               <a:spcAft>
-                <a:spcPts val="300"/>
+                <a:spcPts val="600"/>
               </a:spcAft>
               <a:buNone/>
             </a:pPr>
             <a:r>
-              <a:rPr sz="1400" b="0">
-                <a:solidFill>
-                  <a:srgbClr val="000000"/>
-                </a:solidFill>
-                <a:latin typeface="맑은 고딕"/>
-                <a:ea typeface="맑은 고딕"/>
-              </a:rPr>
-              <a:t>1. </a:t>
-            </a:r>
-            <a:r>
-              <a:rPr sz="1400" b="1">
-                <a:solidFill>
-                  <a:srgbClr val="000000"/>
-                </a:solidFill>
-                <a:latin typeface="맑은 고딕"/>
-                <a:ea typeface="맑은 고딕"/>
-              </a:rPr>
-              <a:t>가격 변경</a:t>
-            </a:r>
-            <a:r>
-              <a:rPr sz="1000" b="0">
-                <a:solidFill>
-                  <a:srgbClr val="000000"/>
-                </a:solidFill>
-                <a:latin typeface="맑은 고딕"/>
-                <a:ea typeface="맑은 고딕"/>
-              </a:rPr>
-              <a:t>(회차 금액)</a:t>
-            </a:r>
-          </a:p>
-          <a:p>
-            <a:pPr lvl="3" marL="457200" indent="-182880">
+              <a:rPr sz="1800" b="1">
+                <a:solidFill>
+                  <a:srgbClr val="000000"/>
+                </a:solidFill>
+                <a:latin typeface="맑은 고딕"/>
+                <a:ea typeface="맑은 고딕"/>
+              </a:rPr>
+              <a:t>수용 기준이 곧 테스트</a:t>
+            </a:r>
+            <a:r>
+              <a:rPr sz="1800" b="0">
+                <a:solidFill>
+                  <a:srgbClr val="000000"/>
+                </a:solidFill>
+                <a:latin typeface="맑은 고딕"/>
+                <a:ea typeface="맑은 고딕"/>
+              </a:rPr>
+              <a:t>이며, 검증할 수 없는 작업은 맡길 수 없다.</a:t>
+            </a:r>
+          </a:p>
+          <a:p>
+            <a:pPr marL="342900" indent="0">
               <a:spcBef>
-                <a:spcPts val="300"/>
+                <a:spcPts val="600"/>
               </a:spcBef>
               <a:spcAft>
-                <a:spcPts val="300"/>
+                <a:spcPts val="600"/>
+              </a:spcAft>
+              <a:buNone/>
+            </a:pPr>
+            <a:r>
+              <a:rPr sz="1800" b="1">
+                <a:solidFill>
+                  <a:srgbClr val="000000"/>
+                </a:solidFill>
+                <a:latin typeface="맑은 고딕"/>
+                <a:ea typeface="맑은 고딕"/>
+              </a:rPr>
+              <a:t>수용 기준과 작업 단위의 핵심</a:t>
+            </a:r>
+          </a:p>
+          <a:p>
+            <a:pPr lvl="2" marL="723900" indent="-368300">
+              <a:spcBef>
+                <a:spcPts val="600"/>
+              </a:spcBef>
+              <a:spcAft>
+                <a:spcPts val="600"/>
               </a:spcAft>
               <a:buSzPct val="90000"/>
               <a:buFont typeface="Wingdings" pitchFamily="2" charset="2"/>
-              <a:buChar char=""/>
+              <a:buChar char=""/>
             </a:pPr>
             <a:r>
-              <a:rPr sz="1200" b="1">
-                <a:solidFill>
-                  <a:srgbClr val="000000"/>
-                </a:solidFill>
-                <a:latin typeface="맑은 고딕"/>
-                <a:ea typeface="맑은 고딕"/>
-              </a:rPr>
-              <a:t>Given</a:t>
-            </a:r>
-            <a:r>
-              <a:rPr sz="1200" b="0">
+              <a:rPr sz="1800" b="1">
+                <a:solidFill>
+                  <a:srgbClr val="000000"/>
+                </a:solidFill>
+                <a:latin typeface="맑은 고딕"/>
+                <a:ea typeface="맑은 고딕"/>
+              </a:rPr>
+              <a:t>수용 기준</a:t>
+            </a:r>
+            <a:r>
+              <a:rPr sz="1800" b="0">
                 <a:solidFill>
                   <a:srgbClr val="000000"/>
                 </a:solidFill>
@@ -18577,40 +18284,40 @@
               <a:t> —</a:t>
             </a:r>
             <a:r>
-              <a:rPr sz="1000" b="0">
-                <a:solidFill>
-                  <a:srgbClr val="000000"/>
-                </a:solidFill>
-                <a:latin typeface="맑은 고딕"/>
-                <a:ea typeface="맑은 고딕"/>
-              </a:rPr>
-              <a:t> 신청 뒤 휴지 가격이 12,000원이 됐다</a:t>
-            </a:r>
-          </a:p>
-          <a:p>
-            <a:pPr lvl="3" marL="457200" indent="-182880">
+              <a:rPr sz="1600" b="0">
+                <a:solidFill>
+                  <a:srgbClr val="000000"/>
+                </a:solidFill>
+                <a:latin typeface="맑은 고딕"/>
+                <a:ea typeface="맑은 고딕"/>
+              </a:rPr>
+              <a:t> 스토리와 코드를 잇는 고리. 기대값은 사람이 정하고 LLM은 바꾸지 않는다</a:t>
+            </a:r>
+          </a:p>
+          <a:p>
+            <a:pPr lvl="2" marL="723900" indent="-368300">
               <a:spcBef>
-                <a:spcPts val="300"/>
+                <a:spcPts val="600"/>
               </a:spcBef>
               <a:spcAft>
-                <a:spcPts val="300"/>
+                <a:spcPts val="600"/>
               </a:spcAft>
               <a:buSzPct val="90000"/>
               <a:buFont typeface="Wingdings" pitchFamily="2" charset="2"/>
-              <a:buChar char=""/>
+              <a:buChar char=""/>
             </a:pPr>
             <a:r>
-              <a:rPr sz="1200" b="1">
-                <a:solidFill>
-                  <a:srgbClr val="000000"/>
-                </a:solidFill>
-                <a:latin typeface="맑은 고딕"/>
-                <a:ea typeface="맑은 고딕"/>
-              </a:rPr>
-              <a:t>Then</a:t>
-            </a:r>
-            <a:r>
-              <a:rPr sz="1200" b="0">
+              <a:rPr sz="1800" b="1">
+                <a:solidFill>
+                  <a:srgbClr val="000000"/>
+                </a:solidFill>
+                <a:latin typeface="맑은 고딕"/>
+                <a:ea typeface="맑은 고딕"/>
+              </a:rPr>
+              <a:t>허용·거절 예시</a:t>
+            </a:r>
+            <a:r>
+              <a:rPr sz="1800" b="0">
                 <a:solidFill>
                   <a:srgbClr val="000000"/>
                 </a:solidFill>
@@ -18620,661 +18327,260 @@
               <a:t> —</a:t>
             </a:r>
             <a:r>
-              <a:rPr sz="1000" b="0">
-                <a:solidFill>
-                  <a:srgbClr val="000000"/>
-                </a:solidFill>
-                <a:latin typeface="맑은 고딕"/>
-                <a:ea typeface="맑은 고딕"/>
-              </a:rPr>
-              <a:t> 70,000원의 승인 요청, 회차 금액 10,000원</a:t>
-            </a:r>
-          </a:p>
-          <a:p>
-            <a:pPr lvl="2" marL="228600" indent="0">
+              <a:rPr sz="1600" b="0">
+                <a:solidFill>
+                  <a:srgbClr val="000000"/>
+                </a:solidFill>
+                <a:latin typeface="맑은 고딕"/>
+                <a:ea typeface="맑은 고딕"/>
+              </a:rPr>
+              <a:t> 업무 규칙마다 대표 예. 거절 예시는 바뀌지 않아야 할 것을 보인다</a:t>
+            </a:r>
+          </a:p>
+          <a:p>
+            <a:pPr lvl="2" marL="723900" indent="-368300">
               <a:spcBef>
-                <a:spcPts val="300"/>
+                <a:spcPts val="600"/>
               </a:spcBef>
               <a:spcAft>
-                <a:spcPts val="300"/>
+                <a:spcPts val="600"/>
+              </a:spcAft>
+              <a:buSzPct val="90000"/>
+              <a:buFont typeface="Wingdings" pitchFamily="2" charset="2"/>
+              <a:buChar char=""/>
+            </a:pPr>
+            <a:r>
+              <a:rPr sz="1800" b="1">
+                <a:solidFill>
+                  <a:srgbClr val="000000"/>
+                </a:solidFill>
+                <a:latin typeface="맑은 고딕"/>
+                <a:ea typeface="맑은 고딕"/>
+              </a:rPr>
+              <a:t>수용 테스트</a:t>
+            </a:r>
+            <a:r>
+              <a:rPr sz="1800" b="0">
+                <a:solidFill>
+                  <a:srgbClr val="000000"/>
+                </a:solidFill>
+                <a:latin typeface="맑은 고딕"/>
+                <a:ea typeface="맑은 고딕"/>
+              </a:rPr>
+              <a:t> —</a:t>
+            </a:r>
+            <a:r>
+              <a:rPr sz="1600" b="0">
+                <a:solidFill>
+                  <a:srgbClr val="000000"/>
+                </a:solidFill>
+                <a:latin typeface="맑은 고딕"/>
+                <a:ea typeface="맑은 고딕"/>
+              </a:rPr>
+              <a:t> 예를 테스트로 먼저 주고, 에이전트는 TDD로 구현한다</a:t>
+            </a:r>
+          </a:p>
+          <a:p>
+            <a:pPr lvl="2" marL="723900" indent="-368300">
+              <a:spcBef>
+                <a:spcPts val="600"/>
+              </a:spcBef>
+              <a:spcAft>
+                <a:spcPts val="600"/>
+              </a:spcAft>
+              <a:buSzPct val="90000"/>
+              <a:buFont typeface="Wingdings" pitchFamily="2" charset="2"/>
+              <a:buChar char=""/>
+            </a:pPr>
+            <a:r>
+              <a:rPr sz="1800" b="1">
+                <a:solidFill>
+                  <a:srgbClr val="000000"/>
+                </a:solidFill>
+                <a:latin typeface="맑은 고딕"/>
+                <a:ea typeface="맑은 고딕"/>
+              </a:rPr>
+              <a:t>작업 단위</a:t>
+            </a:r>
+            <a:r>
+              <a:rPr sz="1800" b="0">
+                <a:solidFill>
+                  <a:srgbClr val="000000"/>
+                </a:solidFill>
+                <a:latin typeface="맑은 고딕"/>
+                <a:ea typeface="맑은 고딕"/>
+              </a:rPr>
+              <a:t> —</a:t>
+            </a:r>
+            <a:r>
+              <a:rPr sz="1600" b="0">
+                <a:solidFill>
+                  <a:srgbClr val="000000"/>
+                </a:solidFill>
+                <a:latin typeface="맑은 고딕"/>
+                <a:ea typeface="맑은 고딕"/>
+              </a:rPr>
+              <a:t> 수용 기준으로 끝나는 크기로 나누고, 기능 목록으로 하나씩 진행한다</a:t>
+            </a:r>
+          </a:p>
+          <a:p>
+            <a:pPr lvl="2" marL="723900" indent="-368300">
+              <a:spcBef>
+                <a:spcPts val="600"/>
+              </a:spcBef>
+              <a:spcAft>
+                <a:spcPts val="600"/>
+              </a:spcAft>
+              <a:buSzPct val="90000"/>
+              <a:buFont typeface="Wingdings" pitchFamily="2" charset="2"/>
+              <a:buChar char=""/>
+            </a:pPr>
+            <a:r>
+              <a:rPr sz="1800" b="1">
+                <a:solidFill>
+                  <a:srgbClr val="000000"/>
+                </a:solidFill>
+                <a:latin typeface="맑은 고딕"/>
+                <a:ea typeface="맑은 고딕"/>
+              </a:rPr>
+              <a:t>완료</a:t>
+            </a:r>
+            <a:r>
+              <a:rPr sz="1800" b="0">
+                <a:solidFill>
+                  <a:srgbClr val="000000"/>
+                </a:solidFill>
+                <a:latin typeface="맑은 고딕"/>
+                <a:ea typeface="맑은 고딕"/>
+              </a:rPr>
+              <a:t> —</a:t>
+            </a:r>
+            <a:r>
+              <a:rPr sz="1600" b="0">
+                <a:solidFill>
+                  <a:srgbClr val="000000"/>
+                </a:solidFill>
+                <a:latin typeface="맑은 고딕"/>
+                <a:ea typeface="맑은 고딕"/>
+              </a:rPr>
+              <a:t> 보고가 아니라 테스트 출력과 diff로 판단한다</a:t>
+            </a:r>
+          </a:p>
+          <a:p>
+            <a:pPr lvl="2" marL="723900" indent="-368300">
+              <a:spcBef>
+                <a:spcPts val="600"/>
+              </a:spcBef>
+              <a:spcAft>
+                <a:spcPts val="600"/>
+              </a:spcAft>
+              <a:buSzPct val="90000"/>
+              <a:buFont typeface="Wingdings" pitchFamily="2" charset="2"/>
+              <a:buChar char=""/>
+            </a:pPr>
+            <a:r>
+              <a:rPr sz="1800" b="1">
+                <a:solidFill>
+                  <a:srgbClr val="000000"/>
+                </a:solidFill>
+                <a:latin typeface="맑은 고딕"/>
+                <a:ea typeface="맑은 고딕"/>
+              </a:rPr>
+              <a:t>시연</a:t>
+            </a:r>
+            <a:r>
+              <a:rPr sz="1800" b="0">
+                <a:solidFill>
+                  <a:srgbClr val="000000"/>
+                </a:solidFill>
+                <a:latin typeface="맑은 고딕"/>
+                <a:ea typeface="맑은 고딕"/>
+              </a:rPr>
+              <a:t> —</a:t>
+            </a:r>
+            <a:r>
+              <a:rPr sz="1600" b="0">
+                <a:solidFill>
+                  <a:srgbClr val="000000"/>
+                </a:solidFill>
+                <a:latin typeface="맑은 고딕"/>
+                <a:ea typeface="맑은 고딕"/>
+              </a:rPr>
+              <a:t> 둘 다 통과했지만, "테스트도 짜줘"는 명세에 없는 규칙을 테스트로 굳혔다</a:t>
+            </a:r>
+          </a:p>
+          <a:p>
+            <a:pPr marL="342900" indent="0">
+              <a:spcBef>
+                <a:spcPts val="600"/>
+              </a:spcBef>
+              <a:spcAft>
+                <a:spcPts val="600"/>
               </a:spcAft>
               <a:buNone/>
             </a:pPr>
             <a:r>
-              <a:rPr sz="1400" b="0">
-                <a:solidFill>
-                  <a:srgbClr val="000000"/>
-                </a:solidFill>
-                <a:latin typeface="맑은 고딕"/>
-                <a:ea typeface="맑은 고딕"/>
-              </a:rPr>
-              <a:t>2. </a:t>
-            </a:r>
-            <a:r>
-              <a:rPr sz="1400" b="1">
-                <a:solidFill>
-                  <a:srgbClr val="000000"/>
-                </a:solidFill>
-                <a:latin typeface="맑은 고딕"/>
-                <a:ea typeface="맑은 고딕"/>
-              </a:rPr>
-              <a:t>승인</a:t>
-            </a:r>
-            <a:r>
-              <a:rPr sz="1000" b="0">
-                <a:solidFill>
-                  <a:srgbClr val="000000"/>
-                </a:solidFill>
-                <a:latin typeface="맑은 고딕"/>
-                <a:ea typeface="맑은 고딕"/>
-              </a:rPr>
-              <a:t>(회차)</a:t>
-            </a:r>
-          </a:p>
-          <a:p>
-            <a:pPr lvl="3" marL="457200" indent="-182880">
+              <a:rPr sz="1800" b="1">
+                <a:solidFill>
+                  <a:srgbClr val="000000"/>
+                </a:solidFill>
+                <a:latin typeface="맑은 고딕"/>
+                <a:ea typeface="맑은 고딕"/>
+              </a:rPr>
+              <a:t>다음 세션</a:t>
+            </a:r>
+          </a:p>
+          <a:p>
+            <a:pPr lvl="2" marL="723900" indent="-368300">
               <a:spcBef>
-                <a:spcPts val="300"/>
+                <a:spcPts val="600"/>
               </a:spcBef>
               <a:spcAft>
-                <a:spcPts val="300"/>
+                <a:spcPts val="600"/>
               </a:spcAft>
               <a:buSzPct val="90000"/>
               <a:buFont typeface="Wingdings" pitchFamily="2" charset="2"/>
-              <a:buChar char=""/>
+              <a:buChar char=""/>
             </a:pPr>
             <a:r>
-              <a:rPr sz="1200" b="1">
-                <a:solidFill>
-                  <a:srgbClr val="000000"/>
-                </a:solidFill>
-                <a:latin typeface="맑은 고딕"/>
-                <a:ea typeface="맑은 고딕"/>
-              </a:rPr>
-              <a:t>When</a:t>
-            </a:r>
-            <a:r>
-              <a:rPr sz="1200" b="0">
-                <a:solidFill>
-                  <a:srgbClr val="000000"/>
-                </a:solidFill>
-                <a:latin typeface="맑은 고딕"/>
-                <a:ea typeface="맑은 고딕"/>
-              </a:rPr>
-              <a:t> —</a:t>
-            </a:r>
-            <a:r>
-              <a:rPr sz="1000" b="0">
-                <a:solidFill>
-                  <a:srgbClr val="000000"/>
-                </a:solidFill>
-                <a:latin typeface="맑은 고딕"/>
-                <a:ea typeface="맑은 고딕"/>
-              </a:rPr>
-              <a:t> 결제가 승인된다</a:t>
-            </a:r>
-          </a:p>
-          <a:p>
-            <a:pPr lvl="3" marL="457200" indent="-182880">
-              <a:spcBef>
-                <a:spcPts val="300"/>
-              </a:spcBef>
-              <a:spcAft>
-                <a:spcPts val="300"/>
-              </a:spcAft>
-              <a:buSzPct val="90000"/>
-              <a:buFont typeface="Wingdings" pitchFamily="2" charset="2"/>
-              <a:buChar char=""/>
-            </a:pPr>
-            <a:r>
-              <a:rPr sz="1200" b="1">
-                <a:solidFill>
-                  <a:srgbClr val="000000"/>
-                </a:solidFill>
-                <a:latin typeface="맑은 고딕"/>
-                <a:ea typeface="맑은 고딕"/>
-              </a:rPr>
-              <a:t>Then</a:t>
-            </a:r>
-            <a:r>
-              <a:rPr sz="1200" b="0">
-                <a:solidFill>
-                  <a:srgbClr val="000000"/>
-                </a:solidFill>
-                <a:latin typeface="맑은 고딕"/>
-                <a:ea typeface="맑은 고딕"/>
-              </a:rPr>
-              <a:t> —</a:t>
-            </a:r>
-            <a:r>
-              <a:rPr sz="1000" b="0">
-                <a:solidFill>
-                  <a:srgbClr val="000000"/>
-                </a:solidFill>
-                <a:latin typeface="맑은 고딕"/>
-                <a:ea typeface="맑은 고딕"/>
-              </a:rPr>
-              <a:t> 확정, 예정 회차 7개</a:t>
-            </a:r>
-            <a:r>
-              <a:rPr sz="800" b="0">
-                <a:solidFill>
-                  <a:srgbClr val="000000"/>
-                </a:solidFill>
-                <a:latin typeface="맑은 고딕"/>
-                <a:ea typeface="맑은 고딕"/>
-              </a:rPr>
-              <a:t>(11/3, 11/17, 12/1, 12/15, 12/29, 1/12, 1/26)</a:t>
-            </a:r>
-            <a:r>
-              <a:rPr sz="1000" b="0">
-                <a:solidFill>
-                  <a:srgbClr val="000000"/>
-                </a:solidFill>
-                <a:latin typeface="맑은 고딕"/>
-                <a:ea typeface="맑은 고딕"/>
-              </a:rPr>
-              <a:t>, 70,000원의 승인 요청</a:t>
-            </a:r>
-          </a:p>
-        </p:txBody>
-      </p:sp>
-      <p:sp>
-        <p:nvSpPr>
-          <p:cNvPr id="9" name="내용 개체 틀 7">
-            <a:extLst>
-              <a:ext uri="{FF2B5EF4-FFF2-40B4-BE49-F238E27FC236}">
-                <a16:creationId xmlns:a16="http://schemas.microsoft.com/office/drawing/2014/main" id="{BEBA2C4A-B0BF-F2E4-EA6E-614C99CBA184}"/>
-              </a:ext>
-            </a:extLst>
-          </p:cNvPr>
-          <p:cNvSpPr>
-            <a:spLocks noGrp="1"/>
-          </p:cNvSpPr>
-          <p:nvPr>
-            <p:ph idx="1"/>
-          </p:nvPr>
-        </p:nvSpPr>
-        <p:spPr>
-          <a:xfrm>
-            <a:off x="233172" y="960120"/>
-            <a:ext cx="8778240" cy="454198"/>
-          </a:xfrm>
-        </p:spPr>
-        <p:txBody>
-          <a:bodyPr>
-            <a:normAutofit/>
-          </a:bodyPr>
-          <a:lstStyle/>
-          <a:p>
-            <a:pPr marL="0" indent="0">
-              <a:spcBef>
-                <a:spcPts val="300"/>
-              </a:spcBef>
-              <a:spcAft>
-                <a:spcPts val="300"/>
-              </a:spcAft>
-              <a:buNone/>
-            </a:pPr>
-            <a:r>
-              <a:rPr sz="1400" b="1">
-                <a:solidFill>
-                  <a:srgbClr val="000000"/>
-                </a:solidFill>
-                <a:latin typeface="맑은 고딕"/>
-                <a:ea typeface="맑은 고딕"/>
-              </a:rPr>
-              <a:t>같은 신청</a:t>
-            </a:r>
-            <a:r>
-              <a:rPr sz="1000" b="0">
-                <a:solidFill>
-                  <a:srgbClr val="000000"/>
-                </a:solidFill>
-                <a:latin typeface="맑은 고딕"/>
-                <a:ea typeface="맑은 고딕"/>
-              </a:rPr>
-              <a:t>(휴지 1묶음 10,000원, 첫 배송일 11월 3일, 2주 주기, 기간 3개월, 일시불 70,000원)</a:t>
-            </a:r>
-            <a:r>
-              <a:rPr sz="1400" b="0">
-                <a:solidFill>
-                  <a:srgbClr val="000000"/>
-                </a:solidFill>
-                <a:latin typeface="맑은 고딕"/>
-                <a:ea typeface="맑은 고딕"/>
-              </a:rPr>
-              <a:t>에서 시작한다.</a:t>
-            </a:r>
-          </a:p>
-        </p:txBody>
-      </p:sp>
-      <p:sp>
-        <p:nvSpPr>
-          <p:cNvPr id="10" name="내용 개체 틀 7">
-            <a:extLst>
-              <a:ext uri="{FF2B5EF4-FFF2-40B4-BE49-F238E27FC236}">
-                <a16:creationId xmlns:a16="http://schemas.microsoft.com/office/drawing/2014/main" id="{BEBA2C4A-B0BF-F2E4-EA6E-614C99CBA184}"/>
-              </a:ext>
-            </a:extLst>
-          </p:cNvPr>
-          <p:cNvSpPr>
-            <a:spLocks noGrp="1"/>
-          </p:cNvSpPr>
-          <p:nvPr>
-            <p:ph idx="1"/>
-          </p:nvPr>
-        </p:nvSpPr>
-        <p:spPr>
-          <a:xfrm>
-            <a:off x="4572000" y="1414318"/>
-            <a:ext cx="4439412" cy="4898147"/>
-          </a:xfrm>
-        </p:spPr>
-        <p:txBody>
-          <a:bodyPr>
-            <a:normAutofit/>
-          </a:bodyPr>
-          <a:lstStyle/>
-          <a:p>
-            <a:pPr lvl="2" marL="228600" indent="0">
-              <a:spcBef>
-                <a:spcPts val="300"/>
-              </a:spcBef>
-              <a:spcAft>
-                <a:spcPts val="300"/>
-              </a:spcAft>
-              <a:buNone/>
-            </a:pPr>
-            <a:r>
-              <a:rPr sz="1400" b="0">
-                <a:solidFill>
-                  <a:srgbClr val="000000"/>
-                </a:solidFill>
-                <a:latin typeface="맑은 고딕"/>
-                <a:ea typeface="맑은 고딕"/>
-              </a:rPr>
-              <a:t>3. </a:t>
-            </a:r>
-            <a:r>
-              <a:rPr sz="1400" b="1">
-                <a:solidFill>
-                  <a:srgbClr val="000000"/>
-                </a:solidFill>
-                <a:latin typeface="맑은 고딕"/>
-                <a:ea typeface="맑은 고딕"/>
-              </a:rPr>
-              <a:t>거절</a:t>
-            </a:r>
-            <a:r>
-              <a:rPr sz="1000" b="0">
-                <a:solidFill>
-                  <a:srgbClr val="000000"/>
-                </a:solidFill>
-                <a:latin typeface="맑은 고딕"/>
-                <a:ea typeface="맑은 고딕"/>
-              </a:rPr>
-              <a:t>(결제 거절)</a:t>
-            </a:r>
-          </a:p>
-          <a:p>
-            <a:pPr lvl="3" marL="457200" indent="-182880">
-              <a:spcBef>
-                <a:spcPts val="300"/>
-              </a:spcBef>
-              <a:spcAft>
-                <a:spcPts val="300"/>
-              </a:spcAft>
-              <a:buSzPct val="90000"/>
-              <a:buFont typeface="Wingdings" pitchFamily="2" charset="2"/>
-              <a:buChar char=""/>
-            </a:pPr>
-            <a:r>
-              <a:rPr sz="1200" b="1">
-                <a:solidFill>
-                  <a:srgbClr val="000000"/>
-                </a:solidFill>
-                <a:latin typeface="맑은 고딕"/>
-                <a:ea typeface="맑은 고딕"/>
-              </a:rPr>
-              <a:t>When</a:t>
-            </a:r>
-            <a:r>
-              <a:rPr sz="1200" b="0">
-                <a:solidFill>
-                  <a:srgbClr val="000000"/>
-                </a:solidFill>
-                <a:latin typeface="맑은 고딕"/>
-                <a:ea typeface="맑은 고딕"/>
-              </a:rPr>
-              <a:t> —</a:t>
-            </a:r>
-            <a:r>
-              <a:rPr sz="1000" b="0">
-                <a:solidFill>
-                  <a:srgbClr val="000000"/>
-                </a:solidFill>
-                <a:latin typeface="맑은 고딕"/>
-                <a:ea typeface="맑은 고딕"/>
-              </a:rPr>
-              <a:t> 결제가 거절된다</a:t>
-            </a:r>
-          </a:p>
-          <a:p>
-            <a:pPr lvl="3" marL="457200" indent="-182880">
-              <a:spcBef>
-                <a:spcPts val="300"/>
-              </a:spcBef>
-              <a:spcAft>
-                <a:spcPts val="300"/>
-              </a:spcAft>
-              <a:buSzPct val="90000"/>
-              <a:buFont typeface="Wingdings" pitchFamily="2" charset="2"/>
-              <a:buChar char=""/>
-            </a:pPr>
-            <a:r>
-              <a:rPr sz="1200" b="1">
-                <a:solidFill>
-                  <a:srgbClr val="000000"/>
-                </a:solidFill>
-                <a:latin typeface="맑은 고딕"/>
-                <a:ea typeface="맑은 고딕"/>
-              </a:rPr>
-              <a:t>그대로인 것</a:t>
-            </a:r>
-            <a:r>
-              <a:rPr sz="1200" b="0">
-                <a:solidFill>
-                  <a:srgbClr val="000000"/>
-                </a:solidFill>
-                <a:latin typeface="맑은 고딕"/>
-                <a:ea typeface="맑은 고딕"/>
-              </a:rPr>
-              <a:t> —</a:t>
-            </a:r>
-            <a:r>
-              <a:rPr sz="1000" b="0">
-                <a:solidFill>
-                  <a:srgbClr val="000000"/>
-                </a:solidFill>
-                <a:latin typeface="맑은 고딕"/>
-                <a:ea typeface="맑은 고딕"/>
-              </a:rPr>
-              <a:t> 결제 대기, 회차 0개, 회차 금액 10,000원</a:t>
-            </a:r>
-          </a:p>
-          <a:p>
-            <a:pPr lvl="2" marL="228600" indent="0">
-              <a:spcBef>
-                <a:spcPts val="300"/>
-              </a:spcBef>
-              <a:spcAft>
-                <a:spcPts val="300"/>
-              </a:spcAft>
-              <a:buNone/>
-            </a:pPr>
-            <a:r>
-              <a:rPr sz="1400" b="0">
-                <a:solidFill>
-                  <a:srgbClr val="000000"/>
-                </a:solidFill>
-                <a:latin typeface="맑은 고딕"/>
-                <a:ea typeface="맑은 고딕"/>
-              </a:rPr>
-              <a:t>4. </a:t>
-            </a:r>
-            <a:r>
-              <a:rPr sz="1400" b="1">
-                <a:solidFill>
-                  <a:srgbClr val="000000"/>
-                </a:solidFill>
-                <a:latin typeface="맑은 고딕"/>
-                <a:ea typeface="맑은 고딕"/>
-              </a:rPr>
-              <a:t>재결제</a:t>
-            </a:r>
-            <a:r>
-              <a:rPr sz="1000" b="0">
-                <a:solidFill>
-                  <a:srgbClr val="000000"/>
-                </a:solidFill>
-                <a:latin typeface="맑은 고딕"/>
-                <a:ea typeface="맑은 고딕"/>
-              </a:rPr>
-              <a:t>(결제 거절)</a:t>
-            </a:r>
-          </a:p>
-          <a:p>
-            <a:pPr lvl="3" marL="457200" indent="-182880">
-              <a:spcBef>
-                <a:spcPts val="300"/>
-              </a:spcBef>
-              <a:spcAft>
-                <a:spcPts val="300"/>
-              </a:spcAft>
-              <a:buSzPct val="90000"/>
-              <a:buFont typeface="Wingdings" pitchFamily="2" charset="2"/>
-              <a:buChar char=""/>
-            </a:pPr>
-            <a:r>
-              <a:rPr sz="1200" b="1">
-                <a:solidFill>
-                  <a:srgbClr val="000000"/>
-                </a:solidFill>
-                <a:latin typeface="맑은 고딕"/>
-                <a:ea typeface="맑은 고딕"/>
-              </a:rPr>
-              <a:t>Given</a:t>
-            </a:r>
-            <a:r>
-              <a:rPr sz="1200" b="0">
-                <a:solidFill>
-                  <a:srgbClr val="000000"/>
-                </a:solidFill>
-                <a:latin typeface="맑은 고딕"/>
-                <a:ea typeface="맑은 고딕"/>
-              </a:rPr>
-              <a:t> —</a:t>
-            </a:r>
-            <a:r>
-              <a:rPr sz="1000" b="0">
-                <a:solidFill>
-                  <a:srgbClr val="000000"/>
-                </a:solidFill>
-                <a:latin typeface="맑은 고딕"/>
-                <a:ea typeface="맑은 고딕"/>
-              </a:rPr>
-              <a:t> 첫 결제 수단이 거절됐다</a:t>
-            </a:r>
-          </a:p>
-          <a:p>
-            <a:pPr lvl="3" marL="457200" indent="-182880">
-              <a:spcBef>
-                <a:spcPts val="300"/>
-              </a:spcBef>
-              <a:spcAft>
-                <a:spcPts val="300"/>
-              </a:spcAft>
-              <a:buSzPct val="90000"/>
-              <a:buFont typeface="Wingdings" pitchFamily="2" charset="2"/>
-              <a:buChar char=""/>
-            </a:pPr>
-            <a:r>
-              <a:rPr sz="1200" b="1">
-                <a:solidFill>
-                  <a:srgbClr val="000000"/>
-                </a:solidFill>
-                <a:latin typeface="맑은 고딕"/>
-                <a:ea typeface="맑은 고딕"/>
-              </a:rPr>
-              <a:t>When</a:t>
-            </a:r>
-            <a:r>
-              <a:rPr sz="1200" b="0">
-                <a:solidFill>
-                  <a:srgbClr val="000000"/>
-                </a:solidFill>
-                <a:latin typeface="맑은 고딕"/>
-                <a:ea typeface="맑은 고딕"/>
-              </a:rPr>
-              <a:t> —</a:t>
-            </a:r>
-            <a:r>
-              <a:rPr sz="1000" b="0">
-                <a:solidFill>
-                  <a:srgbClr val="000000"/>
-                </a:solidFill>
-                <a:latin typeface="맑은 고딕"/>
-                <a:ea typeface="맑은 고딕"/>
-              </a:rPr>
-              <a:t> 다른 결제 수단으로 결제해 승인된다</a:t>
-            </a:r>
-          </a:p>
-          <a:p>
-            <a:pPr lvl="3" marL="457200" indent="-182880">
-              <a:spcBef>
-                <a:spcPts val="300"/>
-              </a:spcBef>
-              <a:spcAft>
-                <a:spcPts val="300"/>
-              </a:spcAft>
-              <a:buSzPct val="90000"/>
-              <a:buFont typeface="Wingdings" pitchFamily="2" charset="2"/>
-              <a:buChar char=""/>
-            </a:pPr>
-            <a:r>
-              <a:rPr sz="1200" b="1">
-                <a:solidFill>
-                  <a:srgbClr val="000000"/>
-                </a:solidFill>
-                <a:latin typeface="맑은 고딕"/>
-                <a:ea typeface="맑은 고딕"/>
-              </a:rPr>
-              <a:t>Then</a:t>
-            </a:r>
-            <a:r>
-              <a:rPr sz="1200" b="0">
-                <a:solidFill>
-                  <a:srgbClr val="000000"/>
-                </a:solidFill>
-                <a:latin typeface="맑은 고딕"/>
-                <a:ea typeface="맑은 고딕"/>
-              </a:rPr>
-              <a:t> —</a:t>
-            </a:r>
-            <a:r>
-              <a:rPr sz="1000" b="0">
-                <a:solidFill>
-                  <a:srgbClr val="000000"/>
-                </a:solidFill>
-                <a:latin typeface="맑은 고딕"/>
-                <a:ea typeface="맑은 고딕"/>
-              </a:rPr>
-              <a:t> 확정, 예정 회차 7개</a:t>
-            </a:r>
-          </a:p>
-          <a:p>
-            <a:pPr lvl="2" marL="228600" indent="0">
-              <a:spcBef>
-                <a:spcPts val="300"/>
-              </a:spcBef>
-              <a:spcAft>
-                <a:spcPts val="300"/>
-              </a:spcAft>
-              <a:buNone/>
-            </a:pPr>
-            <a:r>
-              <a:rPr sz="1400" b="0">
-                <a:solidFill>
-                  <a:srgbClr val="000000"/>
-                </a:solidFill>
-                <a:latin typeface="맑은 고딕"/>
-                <a:ea typeface="맑은 고딕"/>
-              </a:rPr>
-              <a:t>5. </a:t>
-            </a:r>
-            <a:r>
-              <a:rPr sz="1400" b="1">
-                <a:solidFill>
-                  <a:srgbClr val="000000"/>
-                </a:solidFill>
-                <a:latin typeface="맑은 고딕"/>
-                <a:ea typeface="맑은 고딕"/>
-              </a:rPr>
-              <a:t>만료일</a:t>
-            </a:r>
-            <a:r>
-              <a:rPr sz="1000" b="0">
-                <a:solidFill>
-                  <a:srgbClr val="000000"/>
-                </a:solidFill>
-                <a:latin typeface="맑은 고딕"/>
-                <a:ea typeface="맑은 고딕"/>
-              </a:rPr>
-              <a:t>(회차)</a:t>
-            </a:r>
-          </a:p>
-          <a:p>
-            <a:pPr lvl="3" marL="457200" indent="-182880">
-              <a:spcBef>
-                <a:spcPts val="300"/>
-              </a:spcBef>
-              <a:spcAft>
-                <a:spcPts val="300"/>
-              </a:spcAft>
-              <a:buSzPct val="90000"/>
-              <a:buFont typeface="Wingdings" pitchFamily="2" charset="2"/>
-              <a:buChar char=""/>
-            </a:pPr>
-            <a:r>
-              <a:rPr sz="1200" b="1">
-                <a:solidFill>
-                  <a:srgbClr val="000000"/>
-                </a:solidFill>
-                <a:latin typeface="맑은 고딕"/>
-                <a:ea typeface="맑은 고딕"/>
-              </a:rPr>
-              <a:t>Then</a:t>
-            </a:r>
-            <a:r>
-              <a:rPr sz="1200" b="0">
-                <a:solidFill>
-                  <a:srgbClr val="000000"/>
-                </a:solidFill>
-                <a:latin typeface="맑은 고딕"/>
-                <a:ea typeface="맑은 고딕"/>
-              </a:rPr>
-              <a:t> —</a:t>
-            </a:r>
-            <a:r>
-              <a:rPr sz="1000" b="0">
-                <a:solidFill>
-                  <a:srgbClr val="000000"/>
-                </a:solidFill>
-                <a:latin typeface="맑은 고딕"/>
-                <a:ea typeface="맑은 고딕"/>
-              </a:rPr>
-              <a:t> 마지막 회차는 1/26이다. 2/9는 만료일</a:t>
-            </a:r>
-            <a:r>
-              <a:rPr sz="800" b="0">
-                <a:solidFill>
-                  <a:srgbClr val="000000"/>
-                </a:solidFill>
-                <a:latin typeface="맑은 고딕"/>
-                <a:ea typeface="맑은 고딕"/>
-              </a:rPr>
-              <a:t>(2/2)</a:t>
-            </a:r>
-            <a:r>
-              <a:rPr sz="1000" b="0">
-                <a:solidFill>
-                  <a:srgbClr val="000000"/>
-                </a:solidFill>
-                <a:latin typeface="맑은 고딕"/>
-                <a:ea typeface="맑은 고딕"/>
-              </a:rPr>
-              <a:t> 뒤라 만들지 않는다</a:t>
+              <a:rPr sz="1800" b="0">
+                <a:solidFill>
+                  <a:srgbClr val="000000"/>
+                </a:solidFill>
+                <a:latin typeface="맑은 고딕"/>
+                <a:ea typeface="맑은 고딕"/>
+              </a:rPr>
+              <a:t>"</a:t>
+            </a:r>
+            <a:r>
+              <a:rPr sz="1800" b="1">
+                <a:solidFill>
+                  <a:srgbClr val="000000"/>
+                </a:solidFill>
+                <a:latin typeface="맑은 고딕"/>
+                <a:ea typeface="맑은 고딕"/>
+              </a:rPr>
+              <a:t>05. 도메인·설계 지식과 맥락 구성</a:t>
+            </a:r>
+            <a:r>
+              <a:rPr sz="1800" b="0">
+                <a:solidFill>
+                  <a:srgbClr val="000000"/>
+                </a:solidFill>
+                <a:latin typeface="맑은 고딕"/>
+                <a:ea typeface="맑은 고딕"/>
+              </a:rPr>
+              <a:t>" —</a:t>
+            </a:r>
+            <a:r>
+              <a:rPr sz="1600" b="0">
+                <a:solidFill>
+                  <a:srgbClr val="000000"/>
+                </a:solidFill>
+                <a:latin typeface="맑은 고딕"/>
+                <a:ea typeface="맑은 고딕"/>
+              </a:rPr>
+              <a:t> 과제의 판단을 바꾸는 도메인·설계 지식을 골라 맥락으로 구성한다.</a:t>
             </a:r>
           </a:p>
         </p:txBody>
@@ -19344,7 +18650,7 @@
                 <a:latin typeface="맑은 고딕"/>
                 <a:ea typeface="맑은 고딕"/>
               </a:rPr>
-              <a:t>작업 단위 </a:t>
+              <a:t>수용 기준 </a:t>
             </a:r>
             <a:r>
               <a:rPr sz="1800" b="1">
@@ -19512,7 +18818,48 @@
           </a:bodyPr>
           <a:lstStyle/>
           <a:p>
-            <a:pPr lvl="2" marL="228600" indent="-182880">
+            <a:pPr lvl="2" marL="228600" indent="0">
+              <a:spcBef>
+                <a:spcPts val="300"/>
+              </a:spcBef>
+              <a:spcAft>
+                <a:spcPts val="300"/>
+              </a:spcAft>
+              <a:buNone/>
+            </a:pPr>
+            <a:r>
+              <a:rPr sz="1400" b="0">
+                <a:solidFill>
+                  <a:srgbClr val="000000"/>
+                </a:solidFill>
+                <a:latin typeface="맑은 고딕"/>
+                <a:ea typeface="맑은 고딕"/>
+              </a:rPr>
+              <a:t>1. </a:t>
+            </a:r>
+            <a:r>
+              <a:rPr sz="1400" b="1">
+                <a:solidFill>
+                  <a:srgbClr val="000000"/>
+                </a:solidFill>
+                <a:latin typeface="맑은 고딕"/>
+                <a:ea typeface="맑은 고딕"/>
+              </a:rPr>
+              <a:t>가격 변경</a:t>
+            </a:r>
+            <a:r>
+              <a:rPr sz="1000" b="0">
+                <a:solidFill>
+                  <a:srgbClr val="000000"/>
+                </a:solidFill>
+                <a:latin typeface="맑은 고딕"/>
+                <a:ea typeface="맑은 고딕"/>
+              </a:rPr>
+              <a:t>(회차 금액)</a:t>
+            </a:r>
+          </a:p>
+          <a:p>
+            <a:pPr lvl="3" marL="457200" indent="-182880">
               <a:spcBef>
                 <a:spcPts val="300"/>
               </a:spcBef>
@@ -19521,20 +18868,20 @@
               </a:spcAft>
               <a:buSzPct val="90000"/>
               <a:buFont typeface="Wingdings" pitchFamily="2" charset="2"/>
-              <a:buChar char=""/>
+              <a:buChar char=""/>
             </a:pPr>
             <a:r>
-              <a:rPr sz="1400" b="1">
-                <a:solidFill>
-                  <a:srgbClr val="000000"/>
-                </a:solidFill>
-                <a:latin typeface="맑은 고딕"/>
-                <a:ea typeface="맑은 고딕"/>
-              </a:rPr>
-              <a:t>회차 금액 확정</a:t>
-            </a:r>
-            <a:r>
-              <a:rPr sz="1400" b="0">
+              <a:rPr sz="1200" b="1">
+                <a:solidFill>
+                  <a:srgbClr val="000000"/>
+                </a:solidFill>
+                <a:latin typeface="맑은 고딕"/>
+                <a:ea typeface="맑은 고딕"/>
+              </a:rPr>
+              <a:t>Given</a:t>
+            </a:r>
+            <a:r>
+              <a:rPr sz="1200" b="0">
                 <a:solidFill>
                   <a:srgbClr val="000000"/>
                 </a:solidFill>
@@ -19544,16 +18891,6 @@
               <a:t> —</a:t>
             </a:r>
             <a:r>
-              <a:rPr sz="1200" b="0">
-                <a:solidFill>
-                  <a:srgbClr val="000000"/>
-                </a:solidFill>
-                <a:latin typeface="맑은 고딕"/>
-                <a:ea typeface="맑은 고딕"/>
-              </a:rPr>
-              <a:t> 수용 기준 1</a:t>
-            </a:r>
-            <a:r>
               <a:rPr sz="1000" b="0">
                 <a:solidFill>
                   <a:srgbClr val="000000"/>
@@ -19561,11 +18898,11 @@
                 <a:latin typeface="맑은 고딕"/>
                 <a:ea typeface="맑은 고딕"/>
               </a:rPr>
-              <a:t>(가격 변경)</a:t>
-            </a:r>
-          </a:p>
-          <a:p>
-            <a:pPr lvl="2" marL="228600" indent="-182880">
+              <a:t> 신청 뒤 휴지 가격이 12,000원이 됐다</a:t>
+            </a:r>
+          </a:p>
+          <a:p>
+            <a:pPr lvl="3" marL="457200" indent="-182880">
               <a:spcBef>
                 <a:spcPts val="300"/>
               </a:spcBef>
@@ -19574,9 +18911,60 @@
               </a:spcAft>
               <a:buSzPct val="90000"/>
               <a:buFont typeface="Wingdings" pitchFamily="2" charset="2"/>
-              <a:buChar char=""/>
+              <a:buChar char=""/>
             </a:pPr>
             <a:r>
+              <a:rPr sz="1200" b="1">
+                <a:solidFill>
+                  <a:srgbClr val="000000"/>
+                </a:solidFill>
+                <a:latin typeface="맑은 고딕"/>
+                <a:ea typeface="맑은 고딕"/>
+              </a:rPr>
+              <a:t>Then</a:t>
+            </a:r>
+            <a:r>
+              <a:rPr sz="1200" b="0">
+                <a:solidFill>
+                  <a:srgbClr val="000000"/>
+                </a:solidFill>
+                <a:latin typeface="맑은 고딕"/>
+                <a:ea typeface="맑은 고딕"/>
+              </a:rPr>
+              <a:t> —</a:t>
+            </a:r>
+            <a:r>
+              <a:rPr sz="1000" b="0">
+                <a:solidFill>
+                  <a:srgbClr val="000000"/>
+                </a:solidFill>
+                <a:latin typeface="맑은 고딕"/>
+                <a:ea typeface="맑은 고딕"/>
+              </a:rPr>
+              <a:t> 70,000원의 승인 요청, 회차 금액 10,000원</a:t>
+            </a:r>
+          </a:p>
+          <a:p>
+            <a:pPr lvl="2" marL="228600" indent="0">
+              <a:spcBef>
+                <a:spcPts val="300"/>
+              </a:spcBef>
+              <a:spcAft>
+                <a:spcPts val="300"/>
+              </a:spcAft>
+              <a:buNone/>
+            </a:pPr>
+            <a:r>
+              <a:rPr sz="1400" b="0">
+                <a:solidFill>
+                  <a:srgbClr val="000000"/>
+                </a:solidFill>
+                <a:latin typeface="맑은 고딕"/>
+                <a:ea typeface="맑은 고딕"/>
+              </a:rPr>
+              <a:t>2. </a:t>
+            </a:r>
+            <a:r>
               <a:rPr sz="1400" b="1">
                 <a:solidFill>
                   <a:srgbClr val="000000"/>
@@ -19584,27 +18972,7 @@
                 <a:latin typeface="맑은 고딕"/>
                 <a:ea typeface="맑은 고딕"/>
               </a:rPr>
-              <a:t>승인과 회차 생성</a:t>
-            </a:r>
-            <a:r>
-              <a:rPr sz="1400" b="0">
-                <a:solidFill>
-                  <a:srgbClr val="000000"/>
-                </a:solidFill>
-                <a:latin typeface="맑은 고딕"/>
-                <a:ea typeface="맑은 고딕"/>
-              </a:rPr>
-              <a:t> —</a:t>
-            </a:r>
-            <a:r>
-              <a:rPr sz="1200" b="0">
-                <a:solidFill>
-                  <a:srgbClr val="000000"/>
-                </a:solidFill>
-                <a:latin typeface="맑은 고딕"/>
-                <a:ea typeface="맑은 고딕"/>
-              </a:rPr>
-              <a:t> 수용 기준 2</a:t>
+              <a:t>승인</a:t>
             </a:r>
             <a:r>
               <a:rPr sz="1000" b="0">
@@ -19614,31 +18982,11 @@
                 <a:latin typeface="맑은 고딕"/>
                 <a:ea typeface="맑은 고딕"/>
               </a:rPr>
-              <a:t>(승인)</a:t>
-            </a:r>
-            <a:r>
-              <a:rPr sz="1200" b="0">
-                <a:solidFill>
-                  <a:srgbClr val="000000"/>
-                </a:solidFill>
-                <a:latin typeface="맑은 고딕"/>
-                <a:ea typeface="맑은 고딕"/>
-              </a:rPr>
-              <a:t>와 5</a:t>
-            </a:r>
-            <a:r>
-              <a:rPr sz="1000" b="0">
-                <a:solidFill>
-                  <a:srgbClr val="000000"/>
-                </a:solidFill>
-                <a:latin typeface="맑은 고딕"/>
-                <a:ea typeface="맑은 고딕"/>
-              </a:rPr>
-              <a:t>(만료일)</a:t>
-            </a:r>
-          </a:p>
-          <a:p>
-            <a:pPr lvl="2" marL="228600" indent="-182880">
+              <a:t>(회차)</a:t>
+            </a:r>
+          </a:p>
+          <a:p>
+            <a:pPr lvl="3" marL="457200" indent="-182880">
               <a:spcBef>
                 <a:spcPts val="300"/>
               </a:spcBef>
@@ -19647,20 +18995,20 @@
               </a:spcAft>
               <a:buSzPct val="90000"/>
               <a:buFont typeface="Wingdings" pitchFamily="2" charset="2"/>
-              <a:buChar char=""/>
+              <a:buChar char=""/>
             </a:pPr>
             <a:r>
-              <a:rPr sz="1400" b="1">
-                <a:solidFill>
-                  <a:srgbClr val="000000"/>
-                </a:solidFill>
-                <a:latin typeface="맑은 고딕"/>
-                <a:ea typeface="맑은 고딕"/>
-              </a:rPr>
-              <a:t>거절</a:t>
-            </a:r>
-            <a:r>
-              <a:rPr sz="1400" b="0">
+              <a:rPr sz="1200" b="1">
+                <a:solidFill>
+                  <a:srgbClr val="000000"/>
+                </a:solidFill>
+                <a:latin typeface="맑은 고딕"/>
+                <a:ea typeface="맑은 고딕"/>
+              </a:rPr>
+              <a:t>When</a:t>
+            </a:r>
+            <a:r>
+              <a:rPr sz="1200" b="0">
                 <a:solidFill>
                   <a:srgbClr val="000000"/>
                 </a:solidFill>
@@ -19670,6 +19018,39 @@
               <a:t> —</a:t>
             </a:r>
             <a:r>
+              <a:rPr sz="1000" b="0">
+                <a:solidFill>
+                  <a:srgbClr val="000000"/>
+                </a:solidFill>
+                <a:latin typeface="맑은 고딕"/>
+                <a:ea typeface="맑은 고딕"/>
+              </a:rPr>
+              <a:t> 결제가 승인된다</a:t>
+            </a:r>
+          </a:p>
+          <a:p>
+            <a:pPr lvl="3" marL="457200" indent="-182880">
+              <a:spcBef>
+                <a:spcPts val="300"/>
+              </a:spcBef>
+              <a:spcAft>
+                <a:spcPts val="300"/>
+              </a:spcAft>
+              <a:buSzPct val="90000"/>
+              <a:buFont typeface="Wingdings" pitchFamily="2" charset="2"/>
+              <a:buChar char=""/>
+            </a:pPr>
+            <a:r>
+              <a:rPr sz="1200" b="1">
+                <a:solidFill>
+                  <a:srgbClr val="000000"/>
+                </a:solidFill>
+                <a:latin typeface="맑은 고딕"/>
+                <a:ea typeface="맑은 고딕"/>
+              </a:rPr>
+              <a:t>Then</a:t>
+            </a:r>
+            <a:r>
               <a:rPr sz="1200" b="0">
                 <a:solidFill>
                   <a:srgbClr val="000000"/>
@@ -19677,7 +19058,7 @@
                 <a:latin typeface="맑은 고딕"/>
                 <a:ea typeface="맑은 고딕"/>
               </a:rPr>
-              <a:t> 수용 기준 3</a:t>
+              <a:t> —</a:t>
             </a:r>
             <a:r>
               <a:rPr sz="1000" b="0">
@@ -19687,7 +19068,27 @@
                 <a:latin typeface="맑은 고딕"/>
                 <a:ea typeface="맑은 고딕"/>
               </a:rPr>
-              <a:t>(거절)</a:t>
+              <a:t> 확정, 예정 회차 7개</a:t>
+            </a:r>
+            <a:r>
+              <a:rPr sz="800" b="0">
+                <a:solidFill>
+                  <a:srgbClr val="000000"/>
+                </a:solidFill>
+                <a:latin typeface="맑은 고딕"/>
+                <a:ea typeface="맑은 고딕"/>
+              </a:rPr>
+              <a:t>(11/3, 11/17, 12/1, 12/15, 12/29, 1/12, 1/26)</a:t>
+            </a:r>
+            <a:r>
+              <a:rPr sz="1000" b="0">
+                <a:solidFill>
+                  <a:srgbClr val="000000"/>
+                </a:solidFill>
+                <a:latin typeface="맑은 고딕"/>
+                <a:ea typeface="맑은 고딕"/>
+              </a:rPr>
+              <a:t>, 70,000원의 승인 요청</a:t>
             </a:r>
           </a:p>
         </p:txBody>
@@ -19730,6 +19131,26 @@
               <a:buNone/>
             </a:pPr>
             <a:r>
+              <a:rPr sz="1400" b="1">
+                <a:solidFill>
+                  <a:srgbClr val="000000"/>
+                </a:solidFill>
+                <a:latin typeface="맑은 고딕"/>
+                <a:ea typeface="맑은 고딕"/>
+              </a:rPr>
+              <a:t>같은 신청</a:t>
+            </a:r>
+            <a:r>
+              <a:rPr sz="1000" b="0">
+                <a:solidFill>
+                  <a:srgbClr val="000000"/>
+                </a:solidFill>
+                <a:latin typeface="맑은 고딕"/>
+                <a:ea typeface="맑은 고딕"/>
+              </a:rPr>
+              <a:t>(휴지 1묶음 10,000원, 첫 배송일 11월 3일, 2주 주기, 기간 3개월, 일시불 70,000원)</a:t>
+            </a:r>
+            <a:r>
               <a:rPr sz="1400" b="0">
                 <a:solidFill>
                   <a:srgbClr val="000000"/>
@@ -19737,27 +19158,7 @@
                 <a:latin typeface="맑은 고딕"/>
                 <a:ea typeface="맑은 고딕"/>
               </a:rPr>
-              <a:t>작업 단위는 </a:t>
-            </a:r>
-            <a:r>
-              <a:rPr sz="1400" b="1">
-                <a:solidFill>
-                  <a:srgbClr val="000000"/>
-                </a:solidFill>
-                <a:latin typeface="맑은 고딕"/>
-                <a:ea typeface="맑은 고딕"/>
-              </a:rPr>
-              <a:t>수용 기준으로 끝난다</a:t>
-            </a:r>
-            <a:r>
-              <a:rPr sz="1400" b="0">
-                <a:solidFill>
-                  <a:srgbClr val="000000"/>
-                </a:solidFill>
-                <a:latin typeface="맑은 고딕"/>
-                <a:ea typeface="맑은 고딕"/>
-              </a:rPr>
-              <a:t>. 회차 금액을 먼저 두는 것은 결제 금액이 모두 그 값을 쓰기 때문이다.</a:t>
+              <a:t>에서 시작한다.</a:t>
             </a:r>
           </a:p>
         </p:txBody>
@@ -19790,7 +19191,48 @@
           </a:bodyPr>
           <a:lstStyle/>
           <a:p>
-            <a:pPr lvl="2" marL="228600" indent="-182880">
+            <a:pPr lvl="2" marL="228600" indent="0">
+              <a:spcBef>
+                <a:spcPts val="300"/>
+              </a:spcBef>
+              <a:spcAft>
+                <a:spcPts val="300"/>
+              </a:spcAft>
+              <a:buNone/>
+            </a:pPr>
+            <a:r>
+              <a:rPr sz="1400" b="0">
+                <a:solidFill>
+                  <a:srgbClr val="000000"/>
+                </a:solidFill>
+                <a:latin typeface="맑은 고딕"/>
+                <a:ea typeface="맑은 고딕"/>
+              </a:rPr>
+              <a:t>3. </a:t>
+            </a:r>
+            <a:r>
+              <a:rPr sz="1400" b="1">
+                <a:solidFill>
+                  <a:srgbClr val="000000"/>
+                </a:solidFill>
+                <a:latin typeface="맑은 고딕"/>
+                <a:ea typeface="맑은 고딕"/>
+              </a:rPr>
+              <a:t>거절</a:t>
+            </a:r>
+            <a:r>
+              <a:rPr sz="1000" b="0">
+                <a:solidFill>
+                  <a:srgbClr val="000000"/>
+                </a:solidFill>
+                <a:latin typeface="맑은 고딕"/>
+                <a:ea typeface="맑은 고딕"/>
+              </a:rPr>
+              <a:t>(결제 거절)</a:t>
+            </a:r>
+          </a:p>
+          <a:p>
+            <a:pPr lvl="3" marL="457200" indent="-182880">
               <a:spcBef>
                 <a:spcPts val="300"/>
               </a:spcBef>
@@ -19799,20 +19241,20 @@
               </a:spcAft>
               <a:buSzPct val="90000"/>
               <a:buFont typeface="Wingdings" pitchFamily="2" charset="2"/>
-              <a:buChar char=""/>
+              <a:buChar char=""/>
             </a:pPr>
             <a:r>
-              <a:rPr sz="1400" b="1">
-                <a:solidFill>
-                  <a:srgbClr val="000000"/>
-                </a:solidFill>
-                <a:latin typeface="맑은 고딕"/>
-                <a:ea typeface="맑은 고딕"/>
-              </a:rPr>
-              <a:t>재결제</a:t>
-            </a:r>
-            <a:r>
-              <a:rPr sz="1400" b="0">
+              <a:rPr sz="1200" b="1">
+                <a:solidFill>
+                  <a:srgbClr val="000000"/>
+                </a:solidFill>
+                <a:latin typeface="맑은 고딕"/>
+                <a:ea typeface="맑은 고딕"/>
+              </a:rPr>
+              <a:t>When</a:t>
+            </a:r>
+            <a:r>
+              <a:rPr sz="1200" b="0">
                 <a:solidFill>
                   <a:srgbClr val="000000"/>
                 </a:solidFill>
@@ -19822,16 +19264,6 @@
               <a:t> —</a:t>
             </a:r>
             <a:r>
-              <a:rPr sz="1200" b="0">
-                <a:solidFill>
-                  <a:srgbClr val="000000"/>
-                </a:solidFill>
-                <a:latin typeface="맑은 고딕"/>
-                <a:ea typeface="맑은 고딕"/>
-              </a:rPr>
-              <a:t> 수용 기준 4</a:t>
-            </a:r>
-            <a:r>
               <a:rPr sz="1000" b="0">
                 <a:solidFill>
                   <a:srgbClr val="000000"/>
@@ -19839,11 +19271,11 @@
                 <a:latin typeface="맑은 고딕"/>
                 <a:ea typeface="맑은 고딕"/>
               </a:rPr>
-              <a:t>(재결제)</a:t>
-            </a:r>
-          </a:p>
-          <a:p>
-            <a:pPr lvl="2" marL="228600" indent="-182880">
+              <a:t> 결제가 거절된다</a:t>
+            </a:r>
+          </a:p>
+          <a:p>
+            <a:pPr lvl="3" marL="457200" indent="-182880">
               <a:spcBef>
                 <a:spcPts val="300"/>
               </a:spcBef>
@@ -19852,9 +19284,60 @@
               </a:spcAft>
               <a:buSzPct val="90000"/>
               <a:buFont typeface="Wingdings" pitchFamily="2" charset="2"/>
-              <a:buChar char=""/>
+              <a:buChar char=""/>
             </a:pPr>
             <a:r>
+              <a:rPr sz="1200" b="1">
+                <a:solidFill>
+                  <a:srgbClr val="000000"/>
+                </a:solidFill>
+                <a:latin typeface="맑은 고딕"/>
+                <a:ea typeface="맑은 고딕"/>
+              </a:rPr>
+              <a:t>그대로인 것</a:t>
+            </a:r>
+            <a:r>
+              <a:rPr sz="1200" b="0">
+                <a:solidFill>
+                  <a:srgbClr val="000000"/>
+                </a:solidFill>
+                <a:latin typeface="맑은 고딕"/>
+                <a:ea typeface="맑은 고딕"/>
+              </a:rPr>
+              <a:t> —</a:t>
+            </a:r>
+            <a:r>
+              <a:rPr sz="1000" b="0">
+                <a:solidFill>
+                  <a:srgbClr val="000000"/>
+                </a:solidFill>
+                <a:latin typeface="맑은 고딕"/>
+                <a:ea typeface="맑은 고딕"/>
+              </a:rPr>
+              <a:t> 결제 대기, 회차 0개, 회차 금액 10,000원</a:t>
+            </a:r>
+          </a:p>
+          <a:p>
+            <a:pPr lvl="2" marL="228600" indent="0">
+              <a:spcBef>
+                <a:spcPts val="300"/>
+              </a:spcBef>
+              <a:spcAft>
+                <a:spcPts val="300"/>
+              </a:spcAft>
+              <a:buNone/>
+            </a:pPr>
+            <a:r>
+              <a:rPr sz="1400" b="0">
+                <a:solidFill>
+                  <a:srgbClr val="000000"/>
+                </a:solidFill>
+                <a:latin typeface="맑은 고딕"/>
+                <a:ea typeface="맑은 고딕"/>
+              </a:rPr>
+              <a:t>4. </a:t>
+            </a:r>
+            <a:r>
               <a:rPr sz="1400" b="1">
                 <a:solidFill>
                   <a:srgbClr val="000000"/>
@@ -19862,51 +19345,21 @@
                 <a:latin typeface="맑은 고딕"/>
                 <a:ea typeface="맑은 고딕"/>
               </a:rPr>
-              <a:t>기능 목록</a:t>
-            </a:r>
-            <a:r>
-              <a:rPr sz="1400" b="0">
-                <a:solidFill>
-                  <a:srgbClr val="000000"/>
-                </a:solidFill>
-                <a:latin typeface="맑은 고딕"/>
-                <a:ea typeface="맑은 고딕"/>
-              </a:rPr>
-              <a:t> —</a:t>
-            </a:r>
-            <a:r>
-              <a:rPr sz="1200" b="0">
-                <a:solidFill>
-                  <a:srgbClr val="000000"/>
-                </a:solidFill>
-                <a:latin typeface="맑은 고딕"/>
-                <a:ea typeface="맑은 고딕"/>
-              </a:rPr>
-              <a:t> 4개 단위를 </a:t>
-            </a:r>
-            <a:r>
-              <a:rPr sz="1200" b="0">
-                <a:solidFill>
-                  <a:srgbClr val="000000"/>
-                </a:solidFill>
-                <a:latin typeface="맑은 고딕"/>
-                <a:ea typeface="맑은 고딕"/>
-              </a:rPr>
-              <a:t>passes: false</a:t>
-            </a:r>
-            <a:r>
-              <a:rPr sz="1200" b="0">
-                <a:solidFill>
-                  <a:srgbClr val="000000"/>
-                </a:solidFill>
-                <a:latin typeface="맑은 고딕"/>
-                <a:ea typeface="맑은 고딕"/>
-              </a:rPr>
-              <a:t>로 저장소에 둔다</a:t>
-            </a:r>
-          </a:p>
-          <a:p>
-            <a:pPr lvl="2" marL="228600" indent="-182880">
+              <a:t>재결제</a:t>
+            </a:r>
+            <a:r>
+              <a:rPr sz="1000" b="0">
+                <a:solidFill>
+                  <a:srgbClr val="000000"/>
+                </a:solidFill>
+                <a:latin typeface="맑은 고딕"/>
+                <a:ea typeface="맑은 고딕"/>
+              </a:rPr>
+              <a:t>(결제 거절)</a:t>
+            </a:r>
+          </a:p>
+          <a:p>
+            <a:pPr lvl="3" marL="457200" indent="-182880">
               <a:spcBef>
                 <a:spcPts val="300"/>
               </a:spcBef>
@@ -19915,9 +19368,146 @@
               </a:spcAft>
               <a:buSzPct val="90000"/>
               <a:buFont typeface="Wingdings" pitchFamily="2" charset="2"/>
-              <a:buChar char=""/>
+              <a:buChar char=""/>
             </a:pPr>
             <a:r>
+              <a:rPr sz="1200" b="1">
+                <a:solidFill>
+                  <a:srgbClr val="000000"/>
+                </a:solidFill>
+                <a:latin typeface="맑은 고딕"/>
+                <a:ea typeface="맑은 고딕"/>
+              </a:rPr>
+              <a:t>Given</a:t>
+            </a:r>
+            <a:r>
+              <a:rPr sz="1200" b="0">
+                <a:solidFill>
+                  <a:srgbClr val="000000"/>
+                </a:solidFill>
+                <a:latin typeface="맑은 고딕"/>
+                <a:ea typeface="맑은 고딕"/>
+              </a:rPr>
+              <a:t> —</a:t>
+            </a:r>
+            <a:r>
+              <a:rPr sz="1000" b="0">
+                <a:solidFill>
+                  <a:srgbClr val="000000"/>
+                </a:solidFill>
+                <a:latin typeface="맑은 고딕"/>
+                <a:ea typeface="맑은 고딕"/>
+              </a:rPr>
+              <a:t> 첫 결제 수단이 거절됐다</a:t>
+            </a:r>
+          </a:p>
+          <a:p>
+            <a:pPr lvl="3" marL="457200" indent="-182880">
+              <a:spcBef>
+                <a:spcPts val="300"/>
+              </a:spcBef>
+              <a:spcAft>
+                <a:spcPts val="300"/>
+              </a:spcAft>
+              <a:buSzPct val="90000"/>
+              <a:buFont typeface="Wingdings" pitchFamily="2" charset="2"/>
+              <a:buChar char=""/>
+            </a:pPr>
+            <a:r>
+              <a:rPr sz="1200" b="1">
+                <a:solidFill>
+                  <a:srgbClr val="000000"/>
+                </a:solidFill>
+                <a:latin typeface="맑은 고딕"/>
+                <a:ea typeface="맑은 고딕"/>
+              </a:rPr>
+              <a:t>When</a:t>
+            </a:r>
+            <a:r>
+              <a:rPr sz="1200" b="0">
+                <a:solidFill>
+                  <a:srgbClr val="000000"/>
+                </a:solidFill>
+                <a:latin typeface="맑은 고딕"/>
+                <a:ea typeface="맑은 고딕"/>
+              </a:rPr>
+              <a:t> —</a:t>
+            </a:r>
+            <a:r>
+              <a:rPr sz="1000" b="0">
+                <a:solidFill>
+                  <a:srgbClr val="000000"/>
+                </a:solidFill>
+                <a:latin typeface="맑은 고딕"/>
+                <a:ea typeface="맑은 고딕"/>
+              </a:rPr>
+              <a:t> 다른 결제 수단으로 결제해 승인된다</a:t>
+            </a:r>
+          </a:p>
+          <a:p>
+            <a:pPr lvl="3" marL="457200" indent="-182880">
+              <a:spcBef>
+                <a:spcPts val="300"/>
+              </a:spcBef>
+              <a:spcAft>
+                <a:spcPts val="300"/>
+              </a:spcAft>
+              <a:buSzPct val="90000"/>
+              <a:buFont typeface="Wingdings" pitchFamily="2" charset="2"/>
+              <a:buChar char=""/>
+            </a:pPr>
+            <a:r>
+              <a:rPr sz="1200" b="1">
+                <a:solidFill>
+                  <a:srgbClr val="000000"/>
+                </a:solidFill>
+                <a:latin typeface="맑은 고딕"/>
+                <a:ea typeface="맑은 고딕"/>
+              </a:rPr>
+              <a:t>Then</a:t>
+            </a:r>
+            <a:r>
+              <a:rPr sz="1200" b="0">
+                <a:solidFill>
+                  <a:srgbClr val="000000"/>
+                </a:solidFill>
+                <a:latin typeface="맑은 고딕"/>
+                <a:ea typeface="맑은 고딕"/>
+              </a:rPr>
+              <a:t> —</a:t>
+            </a:r>
+            <a:r>
+              <a:rPr sz="1000" b="0">
+                <a:solidFill>
+                  <a:srgbClr val="000000"/>
+                </a:solidFill>
+                <a:latin typeface="맑은 고딕"/>
+                <a:ea typeface="맑은 고딕"/>
+              </a:rPr>
+              <a:t> 확정, 예정 회차 7개</a:t>
+            </a:r>
+          </a:p>
+          <a:p>
+            <a:pPr lvl="2" marL="228600" indent="0">
+              <a:spcBef>
+                <a:spcPts val="300"/>
+              </a:spcBef>
+              <a:spcAft>
+                <a:spcPts val="300"/>
+              </a:spcAft>
+              <a:buNone/>
+            </a:pPr>
+            <a:r>
+              <a:rPr sz="1400" b="0">
+                <a:solidFill>
+                  <a:srgbClr val="000000"/>
+                </a:solidFill>
+                <a:latin typeface="맑은 고딕"/>
+                <a:ea typeface="맑은 고딕"/>
+              </a:rPr>
+              <a:t>5. </a:t>
+            </a:r>
+            <a:r>
               <a:rPr sz="1400" b="1">
                 <a:solidFill>
                   <a:srgbClr val="000000"/>
@@ -19925,10 +19515,43 @@
                 <a:latin typeface="맑은 고딕"/>
                 <a:ea typeface="맑은 고딕"/>
               </a:rPr>
-              <a:t>완료의 정의</a:t>
-            </a:r>
-            <a:r>
-              <a:rPr sz="1400" b="0">
+              <a:t>만료일</a:t>
+            </a:r>
+            <a:r>
+              <a:rPr sz="1000" b="0">
+                <a:solidFill>
+                  <a:srgbClr val="000000"/>
+                </a:solidFill>
+                <a:latin typeface="맑은 고딕"/>
+                <a:ea typeface="맑은 고딕"/>
+              </a:rPr>
+              <a:t>(회차)</a:t>
+            </a:r>
+          </a:p>
+          <a:p>
+            <a:pPr lvl="3" marL="457200" indent="-182880">
+              <a:spcBef>
+                <a:spcPts val="300"/>
+              </a:spcBef>
+              <a:spcAft>
+                <a:spcPts val="300"/>
+              </a:spcAft>
+              <a:buSzPct val="90000"/>
+              <a:buFont typeface="Wingdings" pitchFamily="2" charset="2"/>
+              <a:buChar char=""/>
+            </a:pPr>
+            <a:r>
+              <a:rPr sz="1200" b="1">
+                <a:solidFill>
+                  <a:srgbClr val="000000"/>
+                </a:solidFill>
+                <a:latin typeface="맑은 고딕"/>
+                <a:ea typeface="맑은 고딕"/>
+              </a:rPr>
+              <a:t>Then</a:t>
+            </a:r>
+            <a:r>
+              <a:rPr sz="1200" b="0">
                 <a:solidFill>
                   <a:srgbClr val="000000"/>
                 </a:solidFill>
@@ -19938,14 +19561,34 @@
               <a:t> —</a:t>
             </a:r>
             <a:r>
-              <a:rPr sz="1200" b="0">
-                <a:solidFill>
-                  <a:srgbClr val="000000"/>
-                </a:solidFill>
-                <a:latin typeface="맑은 고딕"/>
-                <a:ea typeface="맑은 고딕"/>
-              </a:rPr>
-              <a:t> 수용 테스트 5개 통과, 테스트 파일의 변경 없음, 공휴일은 정하지 않음</a:t>
+              <a:rPr sz="1000" b="0">
+                <a:solidFill>
+                  <a:srgbClr val="000000"/>
+                </a:solidFill>
+                <a:latin typeface="맑은 고딕"/>
+                <a:ea typeface="맑은 고딕"/>
+              </a:rPr>
+              <a:t> 마지막 회차는 1/26이다. 2/9는 만료일</a:t>
+            </a:r>
+            <a:r>
+              <a:rPr sz="800" b="0">
+                <a:solidFill>
+                  <a:srgbClr val="000000"/>
+                </a:solidFill>
+                <a:latin typeface="맑은 고딕"/>
+                <a:ea typeface="맑은 고딕"/>
+              </a:rPr>
+              <a:t>(2/2)</a:t>
+            </a:r>
+            <a:r>
+              <a:rPr sz="1000" b="0">
+                <a:solidFill>
+                  <a:srgbClr val="000000"/>
+                </a:solidFill>
+                <a:latin typeface="맑은 고딕"/>
+                <a:ea typeface="맑은 고딕"/>
+              </a:rPr>
+              <a:t> 뒤라 만들지 않는다</a:t>
             </a:r>
           </a:p>
         </p:txBody>
@@ -20015,7 +19658,7 @@
                 <a:latin typeface="맑은 고딕"/>
                 <a:ea typeface="맑은 고딕"/>
               </a:rPr>
-              <a:t>보완 </a:t>
+              <a:t>작업 단위 </a:t>
             </a:r>
             <a:r>
               <a:rPr sz="1800" b="1">
@@ -20073,6 +19716,677 @@
                 </a:solidFill>
               </a:rPr>
               <a:t>- 26 -</a:t>
+            </a:r>
+          </a:p>
+        </p:txBody>
+      </p:sp>
+      <p:sp>
+        <p:nvSpPr>
+          <p:cNvPr id="5" name="텍스트 개체 틀 4">
+            <a:extLst>
+              <a:ext uri="{FF2B5EF4-FFF2-40B4-BE49-F238E27FC236}">
+                <a16:creationId xmlns:a16="http://schemas.microsoft.com/office/drawing/2014/main" id="{D66274C8-E16F-5AEB-614B-D8D32DA3E8C6}"/>
+              </a:ext>
+            </a:extLst>
+          </p:cNvPr>
+          <p:cNvSpPr>
+            <a:spLocks noGrp="1"/>
+          </p:cNvSpPr>
+          <p:nvPr>
+            <p:ph type="body" sz="quarter" idx="11"/>
+          </p:nvPr>
+        </p:nvSpPr>
+        <p:spPr/>
+        <p:txBody>
+          <a:bodyPr/>
+          <a:lstStyle/>
+          <a:p>
+            <a:r>
+              <a:rPr kumimoji="1" lang="en-US" altLang="ko-KR" sz="1250" dirty="0" err="1"/>
+              <a:t>별첨: 04. 수용 기준과 검증 가능한 작업 단위</a:t>
+            </a:r>
+          </a:p>
+        </p:txBody>
+      </p:sp>
+      <p:sp>
+        <p:nvSpPr>
+          <p:cNvPr id="6" name="텍스트 개체 틀 5">
+            <a:extLst>
+              <a:ext uri="{FF2B5EF4-FFF2-40B4-BE49-F238E27FC236}">
+                <a16:creationId xmlns:a16="http://schemas.microsoft.com/office/drawing/2014/main" id="{A24E58E1-194B-A320-AEEE-24D08685BB67}"/>
+              </a:ext>
+            </a:extLst>
+          </p:cNvPr>
+          <p:cNvSpPr>
+            <a:spLocks noGrp="1"/>
+          </p:cNvSpPr>
+          <p:nvPr>
+            <p:ph type="body" sz="quarter" idx="12"/>
+          </p:nvPr>
+        </p:nvSpPr>
+        <p:spPr/>
+        <p:txBody>
+          <a:bodyPr/>
+          <a:lstStyle/>
+          <a:p>
+            <a:endParaRPr kumimoji="1" lang="ko-KR" altLang="en-US" dirty="0"/>
+          </a:p>
+        </p:txBody>
+      </p:sp>
+      <p:sp>
+        <p:nvSpPr>
+          <p:cNvPr id="7" name="텍스트 개체 틀 6">
+            <a:extLst>
+              <a:ext uri="{FF2B5EF4-FFF2-40B4-BE49-F238E27FC236}">
+                <a16:creationId xmlns:a16="http://schemas.microsoft.com/office/drawing/2014/main" id="{A219F420-613B-6234-45F6-0955A9A4505F}"/>
+              </a:ext>
+            </a:extLst>
+          </p:cNvPr>
+          <p:cNvSpPr>
+            <a:spLocks noGrp="1"/>
+          </p:cNvSpPr>
+          <p:nvPr>
+            <p:ph type="body" sz="quarter" idx="13"/>
+          </p:nvPr>
+        </p:nvSpPr>
+        <p:spPr/>
+        <p:txBody>
+          <a:bodyPr/>
+          <a:lstStyle/>
+          <a:p>
+            <a:endParaRPr kumimoji="1" lang="en-US" altLang="ko-KR" dirty="0"/>
+          </a:p>
+        </p:txBody>
+      </p:sp>
+      <p:sp>
+        <p:nvSpPr>
+          <p:cNvPr id="8" name="내용 개체 틀 7">
+            <a:extLst>
+              <a:ext uri="{FF2B5EF4-FFF2-40B4-BE49-F238E27FC236}">
+                <a16:creationId xmlns:a16="http://schemas.microsoft.com/office/drawing/2014/main" id="{BEBA2C4A-B0BF-F2E4-EA6E-614C99CBA184}"/>
+              </a:ext>
+            </a:extLst>
+          </p:cNvPr>
+          <p:cNvSpPr>
+            <a:spLocks noGrp="1"/>
+          </p:cNvSpPr>
+          <p:nvPr>
+            <p:ph idx="1"/>
+          </p:nvPr>
+        </p:nvSpPr>
+        <p:spPr>
+          <a:xfrm>
+            <a:off x="233172" y="1414318"/>
+            <a:ext cx="4338828" cy="4898147"/>
+          </a:xfrm>
+        </p:spPr>
+        <p:txBody>
+          <a:bodyPr>
+            <a:normAutofit/>
+          </a:bodyPr>
+          <a:lstStyle/>
+          <a:p>
+            <a:pPr lvl="2" marL="228600" indent="-182880">
+              <a:spcBef>
+                <a:spcPts val="300"/>
+              </a:spcBef>
+              <a:spcAft>
+                <a:spcPts val="300"/>
+              </a:spcAft>
+              <a:buSzPct val="90000"/>
+              <a:buFont typeface="Wingdings" pitchFamily="2" charset="2"/>
+              <a:buChar char=""/>
+            </a:pPr>
+            <a:r>
+              <a:rPr sz="1400" b="1">
+                <a:solidFill>
+                  <a:srgbClr val="000000"/>
+                </a:solidFill>
+                <a:latin typeface="맑은 고딕"/>
+                <a:ea typeface="맑은 고딕"/>
+              </a:rPr>
+              <a:t>회차 금액 확정</a:t>
+            </a:r>
+            <a:r>
+              <a:rPr sz="1400" b="0">
+                <a:solidFill>
+                  <a:srgbClr val="000000"/>
+                </a:solidFill>
+                <a:latin typeface="맑은 고딕"/>
+                <a:ea typeface="맑은 고딕"/>
+              </a:rPr>
+              <a:t> —</a:t>
+            </a:r>
+            <a:r>
+              <a:rPr sz="1200" b="0">
+                <a:solidFill>
+                  <a:srgbClr val="000000"/>
+                </a:solidFill>
+                <a:latin typeface="맑은 고딕"/>
+                <a:ea typeface="맑은 고딕"/>
+              </a:rPr>
+              <a:t> 수용 기준 1</a:t>
+            </a:r>
+            <a:r>
+              <a:rPr sz="1000" b="0">
+                <a:solidFill>
+                  <a:srgbClr val="000000"/>
+                </a:solidFill>
+                <a:latin typeface="맑은 고딕"/>
+                <a:ea typeface="맑은 고딕"/>
+              </a:rPr>
+              <a:t>(가격 변경)</a:t>
+            </a:r>
+          </a:p>
+          <a:p>
+            <a:pPr lvl="2" marL="228600" indent="-182880">
+              <a:spcBef>
+                <a:spcPts val="300"/>
+              </a:spcBef>
+              <a:spcAft>
+                <a:spcPts val="300"/>
+              </a:spcAft>
+              <a:buSzPct val="90000"/>
+              <a:buFont typeface="Wingdings" pitchFamily="2" charset="2"/>
+              <a:buChar char=""/>
+            </a:pPr>
+            <a:r>
+              <a:rPr sz="1400" b="1">
+                <a:solidFill>
+                  <a:srgbClr val="000000"/>
+                </a:solidFill>
+                <a:latin typeface="맑은 고딕"/>
+                <a:ea typeface="맑은 고딕"/>
+              </a:rPr>
+              <a:t>승인과 회차 생성</a:t>
+            </a:r>
+            <a:r>
+              <a:rPr sz="1400" b="0">
+                <a:solidFill>
+                  <a:srgbClr val="000000"/>
+                </a:solidFill>
+                <a:latin typeface="맑은 고딕"/>
+                <a:ea typeface="맑은 고딕"/>
+              </a:rPr>
+              <a:t> —</a:t>
+            </a:r>
+            <a:r>
+              <a:rPr sz="1200" b="0">
+                <a:solidFill>
+                  <a:srgbClr val="000000"/>
+                </a:solidFill>
+                <a:latin typeface="맑은 고딕"/>
+                <a:ea typeface="맑은 고딕"/>
+              </a:rPr>
+              <a:t> 수용 기준 2</a:t>
+            </a:r>
+            <a:r>
+              <a:rPr sz="1000" b="0">
+                <a:solidFill>
+                  <a:srgbClr val="000000"/>
+                </a:solidFill>
+                <a:latin typeface="맑은 고딕"/>
+                <a:ea typeface="맑은 고딕"/>
+              </a:rPr>
+              <a:t>(승인)</a:t>
+            </a:r>
+            <a:r>
+              <a:rPr sz="1200" b="0">
+                <a:solidFill>
+                  <a:srgbClr val="000000"/>
+                </a:solidFill>
+                <a:latin typeface="맑은 고딕"/>
+                <a:ea typeface="맑은 고딕"/>
+              </a:rPr>
+              <a:t>와 5</a:t>
+            </a:r>
+            <a:r>
+              <a:rPr sz="1000" b="0">
+                <a:solidFill>
+                  <a:srgbClr val="000000"/>
+                </a:solidFill>
+                <a:latin typeface="맑은 고딕"/>
+                <a:ea typeface="맑은 고딕"/>
+              </a:rPr>
+              <a:t>(만료일)</a:t>
+            </a:r>
+          </a:p>
+          <a:p>
+            <a:pPr lvl="2" marL="228600" indent="-182880">
+              <a:spcBef>
+                <a:spcPts val="300"/>
+              </a:spcBef>
+              <a:spcAft>
+                <a:spcPts val="300"/>
+              </a:spcAft>
+              <a:buSzPct val="90000"/>
+              <a:buFont typeface="Wingdings" pitchFamily="2" charset="2"/>
+              <a:buChar char=""/>
+            </a:pPr>
+            <a:r>
+              <a:rPr sz="1400" b="1">
+                <a:solidFill>
+                  <a:srgbClr val="000000"/>
+                </a:solidFill>
+                <a:latin typeface="맑은 고딕"/>
+                <a:ea typeface="맑은 고딕"/>
+              </a:rPr>
+              <a:t>거절</a:t>
+            </a:r>
+            <a:r>
+              <a:rPr sz="1400" b="0">
+                <a:solidFill>
+                  <a:srgbClr val="000000"/>
+                </a:solidFill>
+                <a:latin typeface="맑은 고딕"/>
+                <a:ea typeface="맑은 고딕"/>
+              </a:rPr>
+              <a:t> —</a:t>
+            </a:r>
+            <a:r>
+              <a:rPr sz="1200" b="0">
+                <a:solidFill>
+                  <a:srgbClr val="000000"/>
+                </a:solidFill>
+                <a:latin typeface="맑은 고딕"/>
+                <a:ea typeface="맑은 고딕"/>
+              </a:rPr>
+              <a:t> 수용 기준 3</a:t>
+            </a:r>
+            <a:r>
+              <a:rPr sz="1000" b="0">
+                <a:solidFill>
+                  <a:srgbClr val="000000"/>
+                </a:solidFill>
+                <a:latin typeface="맑은 고딕"/>
+                <a:ea typeface="맑은 고딕"/>
+              </a:rPr>
+              <a:t>(거절)</a:t>
+            </a:r>
+          </a:p>
+        </p:txBody>
+      </p:sp>
+      <p:sp>
+        <p:nvSpPr>
+          <p:cNvPr id="9" name="내용 개체 틀 7">
+            <a:extLst>
+              <a:ext uri="{FF2B5EF4-FFF2-40B4-BE49-F238E27FC236}">
+                <a16:creationId xmlns:a16="http://schemas.microsoft.com/office/drawing/2014/main" id="{BEBA2C4A-B0BF-F2E4-EA6E-614C99CBA184}"/>
+              </a:ext>
+            </a:extLst>
+          </p:cNvPr>
+          <p:cNvSpPr>
+            <a:spLocks noGrp="1"/>
+          </p:cNvSpPr>
+          <p:nvPr>
+            <p:ph idx="1"/>
+          </p:nvPr>
+        </p:nvSpPr>
+        <p:spPr>
+          <a:xfrm>
+            <a:off x="233172" y="960120"/>
+            <a:ext cx="8778240" cy="454198"/>
+          </a:xfrm>
+        </p:spPr>
+        <p:txBody>
+          <a:bodyPr>
+            <a:normAutofit/>
+          </a:bodyPr>
+          <a:lstStyle/>
+          <a:p>
+            <a:pPr marL="0" indent="0">
+              <a:spcBef>
+                <a:spcPts val="300"/>
+              </a:spcBef>
+              <a:spcAft>
+                <a:spcPts val="300"/>
+              </a:spcAft>
+              <a:buNone/>
+            </a:pPr>
+            <a:r>
+              <a:rPr sz="1400" b="0">
+                <a:solidFill>
+                  <a:srgbClr val="000000"/>
+                </a:solidFill>
+                <a:latin typeface="맑은 고딕"/>
+                <a:ea typeface="맑은 고딕"/>
+              </a:rPr>
+              <a:t>작업 단위는 </a:t>
+            </a:r>
+            <a:r>
+              <a:rPr sz="1400" b="1">
+                <a:solidFill>
+                  <a:srgbClr val="000000"/>
+                </a:solidFill>
+                <a:latin typeface="맑은 고딕"/>
+                <a:ea typeface="맑은 고딕"/>
+              </a:rPr>
+              <a:t>수용 기준으로 끝난다</a:t>
+            </a:r>
+            <a:r>
+              <a:rPr sz="1400" b="0">
+                <a:solidFill>
+                  <a:srgbClr val="000000"/>
+                </a:solidFill>
+                <a:latin typeface="맑은 고딕"/>
+                <a:ea typeface="맑은 고딕"/>
+              </a:rPr>
+              <a:t>. 회차 금액을 먼저 두는 것은 결제 금액이 모두 그 값을 쓰기 때문이다.</a:t>
+            </a:r>
+          </a:p>
+        </p:txBody>
+      </p:sp>
+      <p:sp>
+        <p:nvSpPr>
+          <p:cNvPr id="10" name="내용 개체 틀 7">
+            <a:extLst>
+              <a:ext uri="{FF2B5EF4-FFF2-40B4-BE49-F238E27FC236}">
+                <a16:creationId xmlns:a16="http://schemas.microsoft.com/office/drawing/2014/main" id="{BEBA2C4A-B0BF-F2E4-EA6E-614C99CBA184}"/>
+              </a:ext>
+            </a:extLst>
+          </p:cNvPr>
+          <p:cNvSpPr>
+            <a:spLocks noGrp="1"/>
+          </p:cNvSpPr>
+          <p:nvPr>
+            <p:ph idx="1"/>
+          </p:nvPr>
+        </p:nvSpPr>
+        <p:spPr>
+          <a:xfrm>
+            <a:off x="4572000" y="1414318"/>
+            <a:ext cx="4439412" cy="4898147"/>
+          </a:xfrm>
+        </p:spPr>
+        <p:txBody>
+          <a:bodyPr>
+            <a:normAutofit/>
+          </a:bodyPr>
+          <a:lstStyle/>
+          <a:p>
+            <a:pPr lvl="2" marL="228600" indent="-182880">
+              <a:spcBef>
+                <a:spcPts val="300"/>
+              </a:spcBef>
+              <a:spcAft>
+                <a:spcPts val="300"/>
+              </a:spcAft>
+              <a:buSzPct val="90000"/>
+              <a:buFont typeface="Wingdings" pitchFamily="2" charset="2"/>
+              <a:buChar char=""/>
+            </a:pPr>
+            <a:r>
+              <a:rPr sz="1400" b="1">
+                <a:solidFill>
+                  <a:srgbClr val="000000"/>
+                </a:solidFill>
+                <a:latin typeface="맑은 고딕"/>
+                <a:ea typeface="맑은 고딕"/>
+              </a:rPr>
+              <a:t>재결제</a:t>
+            </a:r>
+            <a:r>
+              <a:rPr sz="1400" b="0">
+                <a:solidFill>
+                  <a:srgbClr val="000000"/>
+                </a:solidFill>
+                <a:latin typeface="맑은 고딕"/>
+                <a:ea typeface="맑은 고딕"/>
+              </a:rPr>
+              <a:t> —</a:t>
+            </a:r>
+            <a:r>
+              <a:rPr sz="1200" b="0">
+                <a:solidFill>
+                  <a:srgbClr val="000000"/>
+                </a:solidFill>
+                <a:latin typeface="맑은 고딕"/>
+                <a:ea typeface="맑은 고딕"/>
+              </a:rPr>
+              <a:t> 수용 기준 4</a:t>
+            </a:r>
+            <a:r>
+              <a:rPr sz="1000" b="0">
+                <a:solidFill>
+                  <a:srgbClr val="000000"/>
+                </a:solidFill>
+                <a:latin typeface="맑은 고딕"/>
+                <a:ea typeface="맑은 고딕"/>
+              </a:rPr>
+              <a:t>(재결제)</a:t>
+            </a:r>
+          </a:p>
+          <a:p>
+            <a:pPr lvl="2" marL="228600" indent="-182880">
+              <a:spcBef>
+                <a:spcPts val="300"/>
+              </a:spcBef>
+              <a:spcAft>
+                <a:spcPts val="300"/>
+              </a:spcAft>
+              <a:buSzPct val="90000"/>
+              <a:buFont typeface="Wingdings" pitchFamily="2" charset="2"/>
+              <a:buChar char=""/>
+            </a:pPr>
+            <a:r>
+              <a:rPr sz="1400" b="1">
+                <a:solidFill>
+                  <a:srgbClr val="000000"/>
+                </a:solidFill>
+                <a:latin typeface="맑은 고딕"/>
+                <a:ea typeface="맑은 고딕"/>
+              </a:rPr>
+              <a:t>기능 목록</a:t>
+            </a:r>
+            <a:r>
+              <a:rPr sz="1400" b="0">
+                <a:solidFill>
+                  <a:srgbClr val="000000"/>
+                </a:solidFill>
+                <a:latin typeface="맑은 고딕"/>
+                <a:ea typeface="맑은 고딕"/>
+              </a:rPr>
+              <a:t> —</a:t>
+            </a:r>
+            <a:r>
+              <a:rPr sz="1200" b="0">
+                <a:solidFill>
+                  <a:srgbClr val="000000"/>
+                </a:solidFill>
+                <a:latin typeface="맑은 고딕"/>
+                <a:ea typeface="맑은 고딕"/>
+              </a:rPr>
+              <a:t> 4개 단위를 </a:t>
+            </a:r>
+            <a:r>
+              <a:rPr sz="1200" b="0">
+                <a:solidFill>
+                  <a:srgbClr val="000000"/>
+                </a:solidFill>
+                <a:latin typeface="맑은 고딕"/>
+                <a:ea typeface="맑은 고딕"/>
+              </a:rPr>
+              <a:t>passes: false</a:t>
+            </a:r>
+            <a:r>
+              <a:rPr sz="1200" b="0">
+                <a:solidFill>
+                  <a:srgbClr val="000000"/>
+                </a:solidFill>
+                <a:latin typeface="맑은 고딕"/>
+                <a:ea typeface="맑은 고딕"/>
+              </a:rPr>
+              <a:t>로 저장소에 둔다</a:t>
+            </a:r>
+          </a:p>
+          <a:p>
+            <a:pPr lvl="2" marL="228600" indent="-182880">
+              <a:spcBef>
+                <a:spcPts val="300"/>
+              </a:spcBef>
+              <a:spcAft>
+                <a:spcPts val="300"/>
+              </a:spcAft>
+              <a:buSzPct val="90000"/>
+              <a:buFont typeface="Wingdings" pitchFamily="2" charset="2"/>
+              <a:buChar char=""/>
+            </a:pPr>
+            <a:r>
+              <a:rPr sz="1400" b="1">
+                <a:solidFill>
+                  <a:srgbClr val="000000"/>
+                </a:solidFill>
+                <a:latin typeface="맑은 고딕"/>
+                <a:ea typeface="맑은 고딕"/>
+              </a:rPr>
+              <a:t>완료의 정의</a:t>
+            </a:r>
+            <a:r>
+              <a:rPr sz="1400" b="0">
+                <a:solidFill>
+                  <a:srgbClr val="000000"/>
+                </a:solidFill>
+                <a:latin typeface="맑은 고딕"/>
+                <a:ea typeface="맑은 고딕"/>
+              </a:rPr>
+              <a:t> —</a:t>
+            </a:r>
+            <a:r>
+              <a:rPr sz="1200" b="0">
+                <a:solidFill>
+                  <a:srgbClr val="000000"/>
+                </a:solidFill>
+                <a:latin typeface="맑은 고딕"/>
+                <a:ea typeface="맑은 고딕"/>
+              </a:rPr>
+              <a:t> 수용 테스트 5개 통과, 테스트 파일의 변경 없음, 공휴일은 정하지 않음</a:t>
+            </a:r>
+          </a:p>
+        </p:txBody>
+      </p:sp>
+    </p:spTree>
+    <p:extLst>
+      <p:ext uri="{BB962C8B-B14F-4D97-AF65-F5344CB8AC3E}">
+        <p14:creationId xmlns:p14="http://schemas.microsoft.com/office/powerpoint/2010/main" val="3555436673"/>
+      </p:ext>
+    </p:extLst>
+  </p:cSld>
+  <p:clrMapOvr>
+    <a:masterClrMapping/>
+  </p:clrMapOvr>
+</p:sld>
+</file>
+
+<file path=ppt/slides/slide27.xml><?xml version="1.0" encoding="utf-8"?>
+<p:sld xmlns:a="http://schemas.openxmlformats.org/drawingml/2006/main" xmlns:r="http://schemas.openxmlformats.org/officeDocument/2006/relationships" xmlns:p="http://schemas.openxmlformats.org/presentationml/2006/main">
+  <p:cSld>
+    <p:spTree>
+      <p:nvGrpSpPr>
+        <p:cNvPr id="1" name="">
+          <a:extLst>
+            <a:ext uri="{FF2B5EF4-FFF2-40B4-BE49-F238E27FC236}">
+              <a16:creationId xmlns:a16="http://schemas.microsoft.com/office/drawing/2014/main" id="{8E4F1F13-426B-086B-7D8C-9A58A0F879DB}"/>
+            </a:ext>
+          </a:extLst>
+        </p:cNvPr>
+        <p:cNvGrpSpPr/>
+        <p:nvPr/>
+      </p:nvGrpSpPr>
+      <p:grpSpPr>
+        <a:xfrm>
+          <a:off x="0" y="0"/>
+          <a:ext cx="0" cy="0"/>
+          <a:chOff x="0" y="0"/>
+          <a:chExt cx="0" cy="0"/>
+        </a:xfrm>
+      </p:grpSpPr>
+      <p:sp>
+        <p:nvSpPr>
+          <p:cNvPr id="2" name="제목 1">
+            <a:extLst>
+              <a:ext uri="{FF2B5EF4-FFF2-40B4-BE49-F238E27FC236}">
+                <a16:creationId xmlns:a16="http://schemas.microsoft.com/office/drawing/2014/main" id="{AA26A92D-924E-0575-9551-F8FD7BFD3FAD}"/>
+              </a:ext>
+            </a:extLst>
+          </p:cNvPr>
+          <p:cNvSpPr>
+            <a:spLocks noGrp="1"/>
+          </p:cNvSpPr>
+          <p:nvPr>
+            <p:ph type="title"/>
+          </p:nvPr>
+        </p:nvSpPr>
+        <p:spPr/>
+        <p:txBody>
+          <a:bodyPr/>
+          <a:lstStyle/>
+          <a:p>
+            <a:r>
+              <a:rPr sz="2400" b="1">
+                <a:solidFill>
+                  <a:srgbClr val="000000"/>
+                </a:solidFill>
+                <a:latin typeface="맑은 고딕"/>
+                <a:ea typeface="맑은 고딕"/>
+              </a:rPr>
+              <a:t>보완 </a:t>
+            </a:r>
+            <a:r>
+              <a:rPr sz="1800" b="1">
+                <a:solidFill>
+                  <a:srgbClr val="000000"/>
+                </a:solidFill>
+                <a:latin typeface="맑은 고딕"/>
+                <a:ea typeface="맑은 고딕"/>
+              </a:rPr>
+              <a:t>(안)</a:t>
+            </a:r>
+          </a:p>
+          <a:p>
+            <a:r>
+              <a:rPr sz="1100" b="1">
+                <a:solidFill>
+                  <a:srgbClr val="000000"/>
+                </a:solidFill>
+                <a:latin typeface="맑은 고딕"/>
+                <a:ea typeface="맑은 고딕"/>
+              </a:rPr>
+              <a:t>별첨. 실습 답</a:t>
+            </a:r>
+          </a:p>
+        </p:txBody>
+      </p:sp>
+      <p:sp>
+        <p:nvSpPr>
+          <p:cNvPr id="3" name="슬라이드 번호 개체 틀 2">
+            <a:extLst>
+              <a:ext uri="{FF2B5EF4-FFF2-40B4-BE49-F238E27FC236}">
+                <a16:creationId xmlns:a16="http://schemas.microsoft.com/office/drawing/2014/main" id="{12CF30EE-4DFD-8063-56B8-B8689E76DFCA}"/>
+              </a:ext>
+            </a:extLst>
+          </p:cNvPr>
+          <p:cNvSpPr>
+            <a:spLocks noGrp="1"/>
+          </p:cNvSpPr>
+          <p:nvPr>
+            <p:ph type="sldNum" sz="quarter" idx="10"/>
+          </p:nvPr>
+        </p:nvSpPr>
+        <p:spPr/>
+        <p:txBody>
+          <a:bodyPr/>
+          <a:lstStyle/>
+          <a:p>
+            <a:pPr>
+              <a:defRPr/>
+            </a:pPr>
+            <a:r>
+              <a:rPr lang="en-US" altLang="ko-KR">
+                <a:solidFill>
+                  <a:prstClr val="black"/>
+                </a:solidFill>
+              </a:rPr>
+              <a:t>- 27 -</a:t>
             </a:r>
           </a:p>
         </p:txBody>

--- a/courses/ai-native/sessions/s04.pptx
+++ b/courses/ai-native/sessions/s04.pptx
@@ -4271,7 +4271,27 @@
                 <a:latin typeface="맑은 고딕"/>
                 <a:ea typeface="맑은 고딕"/>
               </a:rPr>
-              <a:t>"implement the behaviour described by each documented example, starting with an automated test to guide the development of the code", [Cucumber]</a:t>
+              <a:t>"implement the behaviour described by each documented example, starting with an automated test to guide the development of the code"</a:t>
+            </a:r>
+            <a:r>
+              <a:rPr sz="1000" b="0">
+                <a:solidFill>
+                  <a:srgbClr val="000000"/>
+                </a:solidFill>
+                <a:latin typeface="맑은 고딕"/>
+                <a:ea typeface="맑은 고딕"/>
+              </a:rPr>
+              <a:t>, </a:t>
+            </a:r>
+            <a:r>
+              <a:rPr sz="1000" b="0">
+                <a:solidFill>
+                  <a:srgbClr val="000000"/>
+                </a:solidFill>
+                <a:latin typeface="맑은 고딕"/>
+                <a:ea typeface="맑은 고딕"/>
+              </a:rPr>
+              <a:t>[Cucumber]</a:t>
             </a:r>
           </a:p>
         </p:txBody>
@@ -4750,8 +4770,8 @@
         </p:nvSpPr>
         <p:spPr>
           <a:xfrm>
-            <a:off x="365760" y="1842998"/>
-            <a:ext cx="8412480" cy="4389120"/>
+            <a:off x="365760" y="2100036"/>
+            <a:ext cx="4114800" cy="4127500"/>
           </a:xfrm>
           <a:prstGeom prst="rect">
             <a:avLst/>
@@ -4766,7 +4786,7 @@
           <a:p>
             <a:pPr marL="0" indent="0" algn="l">
               <a:lnSpc>
-                <a:spcPts val="960"/>
+                <a:spcPts val="1150"/>
               </a:lnSpc>
               <a:spcBef>
                 <a:spcPts val="0"/>
@@ -4777,7 +4797,7 @@
               <a:buNone/>
             </a:pPr>
             <a:r>
-              <a:rPr sz="800" b="0">
+              <a:rPr sz="1000" b="0">
                 <a:solidFill>
                   <a:srgbClr val="000000"/>
                 </a:solidFill>
@@ -4787,7 +4807,7 @@
               <a:t>class </a:t>
             </a:r>
             <a:r>
-              <a:rPr sz="800" b="1">
+              <a:rPr sz="1000" b="1">
                 <a:solidFill>
                   <a:srgbClr val="000000"/>
                 </a:solidFill>
@@ -4797,7 +4817,7 @@
               <a:t>PayAcceptanceTest</a:t>
             </a:r>
             <a:r>
-              <a:rPr sz="800" b="0">
+              <a:rPr sz="1000" b="0">
                 <a:solidFill>
                   <a:srgbClr val="000000"/>
                 </a:solidFill>
@@ -4810,7 +4830,7 @@
           <a:p>
             <a:pPr marL="0" indent="0" algn="l">
               <a:lnSpc>
-                <a:spcPts val="960"/>
+                <a:spcPts val="1150"/>
               </a:lnSpc>
               <a:spcBef>
                 <a:spcPts val="0"/>
@@ -4821,7 +4841,7 @@
               <a:buNone/>
             </a:pPr>
             <a:r>
-              <a:rPr sz="800" b="0">
+              <a:rPr sz="1000" b="0">
                 <a:solidFill>
                   <a:srgbClr val="000000"/>
                 </a:solidFill>
@@ -4834,7 +4854,7 @@
           <a:p>
             <a:pPr marL="0" indent="0" algn="l">
               <a:lnSpc>
-                <a:spcPts val="960"/>
+                <a:spcPts val="1150"/>
               </a:lnSpc>
               <a:spcBef>
                 <a:spcPts val="0"/>
@@ -4845,7 +4865,7 @@
               <a:buNone/>
             </a:pPr>
             <a:r>
-              <a:rPr sz="800" b="0">
+              <a:rPr sz="1000" b="0">
                 <a:solidFill>
                   <a:srgbClr val="000000"/>
                 </a:solidFill>
@@ -4858,7 +4878,7 @@
           <a:p>
             <a:pPr marL="0" indent="0" algn="l">
               <a:lnSpc>
-                <a:spcPts val="960"/>
+                <a:spcPts val="1150"/>
               </a:lnSpc>
               <a:spcBef>
                 <a:spcPts val="0"/>
@@ -4869,7 +4889,7 @@
               <a:buNone/>
             </a:pPr>
             <a:r>
-              <a:rPr sz="800" b="0">
+              <a:rPr sz="1000" b="0">
                 <a:solidFill>
                   <a:srgbClr val="000000"/>
                 </a:solidFill>
@@ -4882,7 +4902,7 @@
           <a:p>
             <a:pPr marL="0" indent="0" algn="l">
               <a:lnSpc>
-                <a:spcPts val="960"/>
+                <a:spcPts val="1150"/>
               </a:lnSpc>
               <a:spcBef>
                 <a:spcPts val="0"/>
@@ -4893,7 +4913,7 @@
               <a:buNone/>
             </a:pPr>
             <a:r>
-              <a:rPr sz="800" b="0">
+              <a:rPr sz="1000" b="0">
                 <a:solidFill>
                   <a:srgbClr val="000000"/>
                 </a:solidFill>
@@ -4906,7 +4926,7 @@
           <a:p>
             <a:pPr marL="0" indent="0" algn="l">
               <a:lnSpc>
-                <a:spcPts val="960"/>
+                <a:spcPts val="1150"/>
               </a:lnSpc>
               <a:spcBef>
                 <a:spcPts val="0"/>
@@ -4917,7 +4937,7 @@
               <a:buNone/>
             </a:pPr>
             <a:r>
-              <a:rPr sz="800" b="0">
+              <a:rPr sz="1000" b="0">
                 <a:solidFill>
                   <a:srgbClr val="000000"/>
                 </a:solidFill>
@@ -4930,7 +4950,7 @@
           <a:p>
             <a:pPr marL="0" indent="0" algn="l">
               <a:lnSpc>
-                <a:spcPts val="960"/>
+                <a:spcPts val="1150"/>
               </a:lnSpc>
               <a:spcBef>
                 <a:spcPts val="0"/>
@@ -4941,7 +4961,7 @@
               <a:buNone/>
             </a:pPr>
             <a:r>
-              <a:rPr sz="800" b="0">
+              <a:rPr sz="1000" b="0">
                 <a:solidFill>
                   <a:srgbClr val="000000"/>
                 </a:solidFill>
@@ -4954,7 +4974,7 @@
           <a:p>
             <a:pPr marL="0" indent="0" algn="l">
               <a:lnSpc>
-                <a:spcPts val="960"/>
+                <a:spcPts val="1150"/>
               </a:lnSpc>
               <a:spcBef>
                 <a:spcPts val="0"/>
@@ -4965,7 +4985,7 @@
               <a:buNone/>
             </a:pPr>
             <a:r>
-              <a:rPr sz="800" b="0">
+              <a:rPr sz="1000" b="0">
                 <a:solidFill>
                   <a:srgbClr val="000000"/>
                 </a:solidFill>
@@ -4978,7 +4998,7 @@
           <a:p>
             <a:pPr marL="0" indent="0" algn="l">
               <a:lnSpc>
-                <a:spcPts val="960"/>
+                <a:spcPts val="1150"/>
               </a:lnSpc>
               <a:spcBef>
                 <a:spcPts val="0"/>
@@ -4992,7 +5012,7 @@
           <a:p>
             <a:pPr marL="0" indent="0" algn="l">
               <a:lnSpc>
-                <a:spcPts val="960"/>
+                <a:spcPts val="1150"/>
               </a:lnSpc>
               <a:spcBef>
                 <a:spcPts val="0"/>
@@ -5003,7 +5023,7 @@
               <a:buNone/>
             </a:pPr>
             <a:r>
-              <a:rPr sz="800" b="0">
+              <a:rPr sz="1000" b="0">
                 <a:solidFill>
                   <a:srgbClr val="000000"/>
                 </a:solidFill>
@@ -5016,7 +5036,7 @@
           <a:p>
             <a:pPr marL="0" indent="0" algn="l">
               <a:lnSpc>
-                <a:spcPts val="960"/>
+                <a:spcPts val="1150"/>
               </a:lnSpc>
               <a:spcBef>
                 <a:spcPts val="0"/>
@@ -5030,7 +5050,7 @@
           <a:p>
             <a:pPr marL="0" indent="0" algn="l">
               <a:lnSpc>
-                <a:spcPts val="960"/>
+                <a:spcPts val="1150"/>
               </a:lnSpc>
               <a:spcBef>
                 <a:spcPts val="0"/>
@@ -5041,7 +5061,7 @@
               <a:buNone/>
             </a:pPr>
             <a:r>
-              <a:rPr sz="800" b="0">
+              <a:rPr sz="1000" b="0">
                 <a:solidFill>
                   <a:srgbClr val="000000"/>
                 </a:solidFill>
@@ -5054,7 +5074,7 @@
           <a:p>
             <a:pPr marL="0" indent="0" algn="l">
               <a:lnSpc>
-                <a:spcPts val="960"/>
+                <a:spcPts val="1150"/>
               </a:lnSpc>
               <a:spcBef>
                 <a:spcPts val="0"/>
@@ -5065,7 +5085,7 @@
               <a:buNone/>
             </a:pPr>
             <a:r>
-              <a:rPr sz="800" b="0">
+              <a:rPr sz="1000" b="0">
                 <a:solidFill>
                   <a:srgbClr val="000000"/>
                 </a:solidFill>
@@ -5075,7 +5095,7 @@
               <a:t>    void </a:t>
             </a:r>
             <a:r>
-              <a:rPr sz="800" b="1">
+              <a:rPr sz="1000" b="1">
                 <a:solidFill>
                   <a:srgbClr val="000000"/>
                 </a:solidFill>
@@ -5085,7 +5105,7 @@
               <a:t>rejected</a:t>
             </a:r>
             <a:r>
-              <a:rPr sz="800" b="0">
+              <a:rPr sz="1000" b="0">
                 <a:solidFill>
                   <a:srgbClr val="000000"/>
                 </a:solidFill>
@@ -5098,7 +5118,7 @@
           <a:p>
             <a:pPr marL="0" indent="0" algn="l">
               <a:lnSpc>
-                <a:spcPts val="960"/>
+                <a:spcPts val="1150"/>
               </a:lnSpc>
               <a:spcBef>
                 <a:spcPts val="0"/>
@@ -5109,7 +5129,7 @@
               <a:buNone/>
             </a:pPr>
             <a:r>
-              <a:rPr sz="800" b="0">
+              <a:rPr sz="1000" b="0">
                 <a:solidFill>
                   <a:srgbClr val="000000"/>
                 </a:solidFill>
@@ -5122,7 +5142,7 @@
           <a:p>
             <a:pPr marL="0" indent="0" algn="l">
               <a:lnSpc>
-                <a:spcPts val="960"/>
+                <a:spcPts val="1150"/>
               </a:lnSpc>
               <a:spcBef>
                 <a:spcPts val="0"/>
@@ -5136,7 +5156,7 @@
           <a:p>
             <a:pPr marL="0" indent="0" algn="l">
               <a:lnSpc>
-                <a:spcPts val="960"/>
+                <a:spcPts val="1150"/>
               </a:lnSpc>
               <a:spcBef>
                 <a:spcPts val="0"/>
@@ -5147,7 +5167,7 @@
               <a:buNone/>
             </a:pPr>
             <a:r>
-              <a:rPr sz="800" b="0">
+              <a:rPr sz="1000" b="0">
                 <a:solidFill>
                   <a:srgbClr val="000000"/>
                 </a:solidFill>
@@ -5160,7 +5180,7 @@
           <a:p>
             <a:pPr marL="0" indent="0" algn="l">
               <a:lnSpc>
-                <a:spcPts val="960"/>
+                <a:spcPts val="1150"/>
               </a:lnSpc>
               <a:spcBef>
                 <a:spcPts val="0"/>
@@ -5170,418 +5190,6 @@
               </a:spcAft>
               <a:buNone/>
             </a:pPr>
-          </a:p>
-          <a:p>
-            <a:pPr marL="0" indent="0" algn="l">
-              <a:lnSpc>
-                <a:spcPts val="960"/>
-              </a:lnSpc>
-              <a:spcBef>
-                <a:spcPts val="0"/>
-              </a:spcBef>
-              <a:spcAft>
-                <a:spcPts val="0"/>
-              </a:spcAft>
-              <a:buNone/>
-            </a:pPr>
-            <a:r>
-              <a:rPr sz="800" b="0">
-                <a:solidFill>
-                  <a:srgbClr val="000000"/>
-                </a:solidFill>
-                <a:latin typeface="Consolas"/>
-                <a:ea typeface="맑은 고딕"/>
-              </a:rPr>
-              <a:t>        assertEquals(OrderStatus.PENDING_PAYMENT, order.status());</a:t>
-            </a:r>
-          </a:p>
-          <a:p>
-            <a:pPr marL="0" indent="0" algn="l">
-              <a:lnSpc>
-                <a:spcPts val="960"/>
-              </a:lnSpc>
-              <a:spcBef>
-                <a:spcPts val="0"/>
-              </a:spcBef>
-              <a:spcAft>
-                <a:spcPts val="0"/>
-              </a:spcAft>
-              <a:buNone/>
-            </a:pPr>
-            <a:r>
-              <a:rPr sz="800" b="0">
-                <a:solidFill>
-                  <a:srgbClr val="000000"/>
-                </a:solidFill>
-                <a:latin typeface="Consolas"/>
-                <a:ea typeface="맑은 고딕"/>
-              </a:rPr>
-              <a:t>        assertEquals(new Money(2_000), order.totalAmount());</a:t>
-            </a:r>
-          </a:p>
-          <a:p>
-            <a:pPr marL="0" indent="0" algn="l">
-              <a:lnSpc>
-                <a:spcPts val="960"/>
-              </a:lnSpc>
-              <a:spcBef>
-                <a:spcPts val="0"/>
-              </a:spcBef>
-              <a:spcAft>
-                <a:spcPts val="0"/>
-              </a:spcAft>
-              <a:buNone/>
-            </a:pPr>
-            <a:r>
-              <a:rPr sz="800" b="0">
-                <a:solidFill>
-                  <a:srgbClr val="000000"/>
-                </a:solidFill>
-                <a:latin typeface="Consolas"/>
-                <a:ea typeface="맑은 고딕"/>
-              </a:rPr>
-              <a:t>        assertEquals(0, delivery.requests);</a:t>
-            </a:r>
-          </a:p>
-          <a:p>
-            <a:pPr marL="0" indent="0" algn="l">
-              <a:lnSpc>
-                <a:spcPts val="960"/>
-              </a:lnSpc>
-              <a:spcBef>
-                <a:spcPts val="0"/>
-              </a:spcBef>
-              <a:spcAft>
-                <a:spcPts val="0"/>
-              </a:spcAft>
-              <a:buNone/>
-            </a:pPr>
-            <a:r>
-              <a:rPr sz="800" b="0">
-                <a:solidFill>
-                  <a:srgbClr val="000000"/>
-                </a:solidFill>
-                <a:latin typeface="Consolas"/>
-                <a:ea typeface="맑은 고딕"/>
-              </a:rPr>
-              <a:t>    }</a:t>
-            </a:r>
-          </a:p>
-          <a:p>
-            <a:pPr marL="0" indent="0" algn="l">
-              <a:lnSpc>
-                <a:spcPts val="960"/>
-              </a:lnSpc>
-              <a:spcBef>
-                <a:spcPts val="0"/>
-              </a:spcBef>
-              <a:spcAft>
-                <a:spcPts val="0"/>
-              </a:spcAft>
-              <a:buNone/>
-            </a:pPr>
-          </a:p>
-          <a:p>
-            <a:pPr marL="0" indent="0" algn="l">
-              <a:lnSpc>
-                <a:spcPts val="960"/>
-              </a:lnSpc>
-              <a:spcBef>
-                <a:spcPts val="0"/>
-              </a:spcBef>
-              <a:spcAft>
-                <a:spcPts val="0"/>
-              </a:spcAft>
-              <a:buNone/>
-            </a:pPr>
-            <a:r>
-              <a:rPr sz="800" b="0">
-                <a:solidFill>
-                  <a:srgbClr val="000000"/>
-                </a:solidFill>
-                <a:latin typeface="Consolas"/>
-                <a:ea typeface="맑은 고딕"/>
-              </a:rPr>
-              <a:t>    @Test @DisplayName("거절 뒤 다른 카드로 승인되면 결제완료다")</a:t>
-            </a:r>
-          </a:p>
-          <a:p>
-            <a:pPr marL="0" indent="0" algn="l">
-              <a:lnSpc>
-                <a:spcPts val="960"/>
-              </a:lnSpc>
-              <a:spcBef>
-                <a:spcPts val="0"/>
-              </a:spcBef>
-              <a:spcAft>
-                <a:spcPts val="0"/>
-              </a:spcAft>
-              <a:buNone/>
-            </a:pPr>
-            <a:r>
-              <a:rPr sz="800" b="0">
-                <a:solidFill>
-                  <a:srgbClr val="000000"/>
-                </a:solidFill>
-                <a:latin typeface="Consolas"/>
-                <a:ea typeface="맑은 고딕"/>
-              </a:rPr>
-              <a:t>    void </a:t>
-            </a:r>
-            <a:r>
-              <a:rPr sz="800" b="1">
-                <a:solidFill>
-                  <a:srgbClr val="000000"/>
-                </a:solidFill>
-                <a:latin typeface="Consolas"/>
-                <a:ea typeface="맑은 고딕"/>
-              </a:rPr>
-              <a:t>paidWithAnotherCard</a:t>
-            </a:r>
-            <a:r>
-              <a:rPr sz="800" b="0">
-                <a:solidFill>
-                  <a:srgbClr val="000000"/>
-                </a:solidFill>
-                <a:latin typeface="Consolas"/>
-                <a:ea typeface="맑은 고딕"/>
-              </a:rPr>
-              <a:t>() {</a:t>
-            </a:r>
-          </a:p>
-          <a:p>
-            <a:pPr marL="0" indent="0" algn="l">
-              <a:lnSpc>
-                <a:spcPts val="960"/>
-              </a:lnSpc>
-              <a:spcBef>
-                <a:spcPts val="0"/>
-              </a:spcBef>
-              <a:spcAft>
-                <a:spcPts val="0"/>
-              </a:spcAft>
-              <a:buNone/>
-            </a:pPr>
-            <a:r>
-              <a:rPr sz="800" b="0">
-                <a:solidFill>
-                  <a:srgbClr val="000000"/>
-                </a:solidFill>
-                <a:latin typeface="Consolas"/>
-                <a:ea typeface="맑은 고딕"/>
-              </a:rPr>
-              <a:t>        payment.reject("카드 X");</a:t>
-            </a:r>
-          </a:p>
-          <a:p>
-            <a:pPr marL="0" indent="0" algn="l">
-              <a:lnSpc>
-                <a:spcPts val="960"/>
-              </a:lnSpc>
-              <a:spcBef>
-                <a:spcPts val="0"/>
-              </a:spcBef>
-              <a:spcAft>
-                <a:spcPts val="0"/>
-              </a:spcAft>
-              <a:buNone/>
-            </a:pPr>
-          </a:p>
-          <a:p>
-            <a:pPr marL="0" indent="0" algn="l">
-              <a:lnSpc>
-                <a:spcPts val="960"/>
-              </a:lnSpc>
-              <a:spcBef>
-                <a:spcPts val="0"/>
-              </a:spcBef>
-              <a:spcAft>
-                <a:spcPts val="0"/>
-              </a:spcAft>
-              <a:buNone/>
-            </a:pPr>
-            <a:r>
-              <a:rPr sz="800" b="0">
-                <a:solidFill>
-                  <a:srgbClr val="000000"/>
-                </a:solidFill>
-                <a:latin typeface="Consolas"/>
-                <a:ea typeface="맑은 고딕"/>
-              </a:rPr>
-              <a:t>        service.pay(order.number(), new PaymentMethod("카드 X"));</a:t>
-            </a:r>
-          </a:p>
-          <a:p>
-            <a:pPr marL="0" indent="0" algn="l">
-              <a:lnSpc>
-                <a:spcPts val="960"/>
-              </a:lnSpc>
-              <a:spcBef>
-                <a:spcPts val="0"/>
-              </a:spcBef>
-              <a:spcAft>
-                <a:spcPts val="0"/>
-              </a:spcAft>
-              <a:buNone/>
-            </a:pPr>
-            <a:r>
-              <a:rPr sz="800" b="0">
-                <a:solidFill>
-                  <a:srgbClr val="000000"/>
-                </a:solidFill>
-                <a:latin typeface="Consolas"/>
-                <a:ea typeface="맑은 고딕"/>
-              </a:rPr>
-              <a:t>        service.pay(order.number(), new PaymentMethod("카드 Y"));</a:t>
-            </a:r>
-          </a:p>
-          <a:p>
-            <a:pPr marL="0" indent="0" algn="l">
-              <a:lnSpc>
-                <a:spcPts val="960"/>
-              </a:lnSpc>
-              <a:spcBef>
-                <a:spcPts val="0"/>
-              </a:spcBef>
-              <a:spcAft>
-                <a:spcPts val="0"/>
-              </a:spcAft>
-              <a:buNone/>
-            </a:pPr>
-          </a:p>
-          <a:p>
-            <a:pPr marL="0" indent="0" algn="l">
-              <a:lnSpc>
-                <a:spcPts val="960"/>
-              </a:lnSpc>
-              <a:spcBef>
-                <a:spcPts val="0"/>
-              </a:spcBef>
-              <a:spcAft>
-                <a:spcPts val="0"/>
-              </a:spcAft>
-              <a:buNone/>
-            </a:pPr>
-            <a:r>
-              <a:rPr sz="800" b="0">
-                <a:solidFill>
-                  <a:srgbClr val="000000"/>
-                </a:solidFill>
-                <a:latin typeface="Consolas"/>
-                <a:ea typeface="맑은 고딕"/>
-              </a:rPr>
-              <a:t>        assertEquals(OrderStatus.PAID, order.status());</a:t>
-            </a:r>
-          </a:p>
-          <a:p>
-            <a:pPr marL="0" indent="0" algn="l">
-              <a:lnSpc>
-                <a:spcPts val="960"/>
-              </a:lnSpc>
-              <a:spcBef>
-                <a:spcPts val="0"/>
-              </a:spcBef>
-              <a:spcAft>
-                <a:spcPts val="0"/>
-              </a:spcAft>
-              <a:buNone/>
-            </a:pPr>
-            <a:r>
-              <a:rPr sz="800" b="0">
-                <a:solidFill>
-                  <a:srgbClr val="000000"/>
-                </a:solidFill>
-                <a:latin typeface="Consolas"/>
-                <a:ea typeface="맑은 고딕"/>
-              </a:rPr>
-              <a:t>        assertEquals(1, delivery.requests);</a:t>
-            </a:r>
-          </a:p>
-          <a:p>
-            <a:pPr marL="0" indent="0" algn="l">
-              <a:lnSpc>
-                <a:spcPts val="960"/>
-              </a:lnSpc>
-              <a:spcBef>
-                <a:spcPts val="0"/>
-              </a:spcBef>
-              <a:spcAft>
-                <a:spcPts val="0"/>
-              </a:spcAft>
-              <a:buNone/>
-            </a:pPr>
-            <a:r>
-              <a:rPr sz="800" b="0">
-                <a:solidFill>
-                  <a:srgbClr val="000000"/>
-                </a:solidFill>
-                <a:latin typeface="Consolas"/>
-                <a:ea typeface="맑은 고딕"/>
-              </a:rPr>
-              <a:t>    }</a:t>
-            </a:r>
-          </a:p>
-          <a:p>
-            <a:pPr marL="0" indent="0" algn="l">
-              <a:lnSpc>
-                <a:spcPts val="960"/>
-              </a:lnSpc>
-              <a:spcBef>
-                <a:spcPts val="0"/>
-              </a:spcBef>
-              <a:spcAft>
-                <a:spcPts val="0"/>
-              </a:spcAft>
-              <a:buNone/>
-            </a:pPr>
-          </a:p>
-          <a:p>
-            <a:pPr marL="0" indent="0" algn="l">
-              <a:lnSpc>
-                <a:spcPts val="960"/>
-              </a:lnSpc>
-              <a:spcBef>
-                <a:spcPts val="0"/>
-              </a:spcBef>
-              <a:spcAft>
-                <a:spcPts val="0"/>
-              </a:spcAft>
-              <a:buNone/>
-            </a:pPr>
-            <a:r>
-              <a:rPr sz="800" b="0">
-                <a:solidFill>
-                  <a:srgbClr val="000000"/>
-                </a:solidFill>
-                <a:latin typeface="Consolas"/>
-                <a:ea typeface="맑은 고딕"/>
-              </a:rPr>
-              <a:t>    // ... 테스트 대역 생략</a:t>
-            </a:r>
-          </a:p>
-          <a:p>
-            <a:pPr marL="0" indent="0" algn="l">
-              <a:lnSpc>
-                <a:spcPts val="960"/>
-              </a:lnSpc>
-              <a:spcBef>
-                <a:spcPts val="0"/>
-              </a:spcBef>
-              <a:spcAft>
-                <a:spcPts val="0"/>
-              </a:spcAft>
-              <a:buNone/>
-            </a:pPr>
-            <a:r>
-              <a:rPr sz="800" b="0">
-                <a:solidFill>
-                  <a:srgbClr val="000000"/>
-                </a:solidFill>
-                <a:latin typeface="Consolas"/>
-                <a:ea typeface="맑은 고딕"/>
-              </a:rPr>
-              <a:t>}</a:t>
-            </a:r>
           </a:p>
         </p:txBody>
       </p:sp>
@@ -5604,7 +5212,7 @@
         <p:spPr>
           <a:xfrm>
             <a:off x="365760" y="960120"/>
-            <a:ext cx="8412480" cy="781278"/>
+            <a:ext cx="8412480" cy="1038316"/>
           </a:xfrm>
         </p:spPr>
         <p:txBody>
@@ -5640,7 +5248,7 @@
                 <a:latin typeface="맑은 고딕"/>
                 <a:ea typeface="맑은 고딕"/>
               </a:rPr>
-              <a:t>결과만</a:t>
+              <a:t>업무 규칙대로 된 결과만</a:t>
             </a:r>
             <a:r>
               <a:rPr sz="1800" b="0">
@@ -5670,7 +5278,448 @@
                 <a:latin typeface="맑은 고딕"/>
                 <a:ea typeface="맑은 고딕"/>
               </a:rPr>
-              <a:t>으로 바꾸고 호출 순서 같은 구현 방식은 확인하지 않는다.</a:t>
+              <a:t>으로 바꾸고, 호출 순서 같은 구현 방식은 확인하지 않는다.</a:t>
+            </a:r>
+          </a:p>
+        </p:txBody>
+      </p:sp>
+      <p:sp>
+        <p:nvSpPr>
+          <p:cNvPr id="33" name="Integrated content 31">
+            <a:extLst>
+              <a:ext uri="{FF2B5EF4-FFF2-40B4-BE49-F238E27FC236}">
+                <a16:creationId xmlns:a16="http://schemas.microsoft.com/office/drawing/2014/main" id="{8E264927-DE01-A85F-AD3D-A49DD8EAC71A}"/>
+              </a:ext>
+            </a:extLst>
+          </p:cNvPr>
+          <p:cNvSpPr txBox="1"/>
+          <p:nvPr/>
+        </p:nvSpPr>
+        <p:spPr>
+          <a:xfrm>
+            <a:off x="4663440" y="2100036"/>
+            <a:ext cx="4114800" cy="3962400"/>
+          </a:xfrm>
+          <a:prstGeom prst="rect">
+            <a:avLst/>
+          </a:prstGeom>
+          <a:noFill/>
+        </p:spPr>
+        <p:txBody>
+          <a:bodyPr wrap="square" lIns="91440" tIns="0" rIns="91440" bIns="0" anchor="t">
+            <a:noAutofit/>
+          </a:bodyPr>
+          <a:lstStyle/>
+          <a:p>
+            <a:pPr marL="0" indent="0" algn="l">
+              <a:lnSpc>
+                <a:spcPts val="1150"/>
+              </a:lnSpc>
+              <a:spcBef>
+                <a:spcPts val="0"/>
+              </a:spcBef>
+              <a:spcAft>
+                <a:spcPts val="0"/>
+              </a:spcAft>
+              <a:buNone/>
+            </a:pPr>
+            <a:r>
+              <a:rPr sz="1000" b="0">
+                <a:solidFill>
+                  <a:srgbClr val="000000"/>
+                </a:solidFill>
+                <a:latin typeface="Consolas"/>
+                <a:ea typeface="맑은 고딕"/>
+              </a:rPr>
+              <a:t>        assertEquals(OrderStatus.PENDING_PAYMENT, order.status());</a:t>
+            </a:r>
+          </a:p>
+          <a:p>
+            <a:pPr marL="0" indent="0" algn="l">
+              <a:lnSpc>
+                <a:spcPts val="1150"/>
+              </a:lnSpc>
+              <a:spcBef>
+                <a:spcPts val="0"/>
+              </a:spcBef>
+              <a:spcAft>
+                <a:spcPts val="0"/>
+              </a:spcAft>
+              <a:buNone/>
+            </a:pPr>
+            <a:r>
+              <a:rPr sz="1000" b="0">
+                <a:solidFill>
+                  <a:srgbClr val="000000"/>
+                </a:solidFill>
+                <a:latin typeface="Consolas"/>
+                <a:ea typeface="맑은 고딕"/>
+              </a:rPr>
+              <a:t>        assertEquals(new Money(2_000), order.totalAmount());</a:t>
+            </a:r>
+          </a:p>
+          <a:p>
+            <a:pPr marL="0" indent="0" algn="l">
+              <a:lnSpc>
+                <a:spcPts val="1150"/>
+              </a:lnSpc>
+              <a:spcBef>
+                <a:spcPts val="0"/>
+              </a:spcBef>
+              <a:spcAft>
+                <a:spcPts val="0"/>
+              </a:spcAft>
+              <a:buNone/>
+            </a:pPr>
+            <a:r>
+              <a:rPr sz="1000" b="0">
+                <a:solidFill>
+                  <a:srgbClr val="000000"/>
+                </a:solidFill>
+                <a:latin typeface="Consolas"/>
+                <a:ea typeface="맑은 고딕"/>
+              </a:rPr>
+              <a:t>        assertEquals(0, delivery.requests);</a:t>
+            </a:r>
+          </a:p>
+          <a:p>
+            <a:pPr marL="0" indent="0" algn="l">
+              <a:lnSpc>
+                <a:spcPts val="1150"/>
+              </a:lnSpc>
+              <a:spcBef>
+                <a:spcPts val="0"/>
+              </a:spcBef>
+              <a:spcAft>
+                <a:spcPts val="0"/>
+              </a:spcAft>
+              <a:buNone/>
+            </a:pPr>
+            <a:r>
+              <a:rPr sz="1000" b="0">
+                <a:solidFill>
+                  <a:srgbClr val="000000"/>
+                </a:solidFill>
+                <a:latin typeface="Consolas"/>
+                <a:ea typeface="맑은 고딕"/>
+              </a:rPr>
+              <a:t>    }</a:t>
+            </a:r>
+          </a:p>
+          <a:p>
+            <a:pPr marL="0" indent="0" algn="l">
+              <a:lnSpc>
+                <a:spcPts val="1150"/>
+              </a:lnSpc>
+              <a:spcBef>
+                <a:spcPts val="0"/>
+              </a:spcBef>
+              <a:spcAft>
+                <a:spcPts val="0"/>
+              </a:spcAft>
+              <a:buNone/>
+            </a:pPr>
+          </a:p>
+          <a:p>
+            <a:pPr marL="0" indent="0" algn="l">
+              <a:lnSpc>
+                <a:spcPts val="1150"/>
+              </a:lnSpc>
+              <a:spcBef>
+                <a:spcPts val="0"/>
+              </a:spcBef>
+              <a:spcAft>
+                <a:spcPts val="0"/>
+              </a:spcAft>
+              <a:buNone/>
+            </a:pPr>
+            <a:r>
+              <a:rPr sz="1000" b="0">
+                <a:solidFill>
+                  <a:srgbClr val="000000"/>
+                </a:solidFill>
+                <a:latin typeface="Consolas"/>
+                <a:ea typeface="맑은 고딕"/>
+              </a:rPr>
+              <a:t>    @Test @DisplayName("거절 뒤 다른 카드로 승인되면 결제완료다")</a:t>
+            </a:r>
+          </a:p>
+          <a:p>
+            <a:pPr marL="0" indent="0" algn="l">
+              <a:lnSpc>
+                <a:spcPts val="1150"/>
+              </a:lnSpc>
+              <a:spcBef>
+                <a:spcPts val="0"/>
+              </a:spcBef>
+              <a:spcAft>
+                <a:spcPts val="0"/>
+              </a:spcAft>
+              <a:buNone/>
+            </a:pPr>
+            <a:r>
+              <a:rPr sz="1000" b="0">
+                <a:solidFill>
+                  <a:srgbClr val="000000"/>
+                </a:solidFill>
+                <a:latin typeface="Consolas"/>
+                <a:ea typeface="맑은 고딕"/>
+              </a:rPr>
+              <a:t>    void </a:t>
+            </a:r>
+            <a:r>
+              <a:rPr sz="1000" b="1">
+                <a:solidFill>
+                  <a:srgbClr val="000000"/>
+                </a:solidFill>
+                <a:latin typeface="Consolas"/>
+                <a:ea typeface="맑은 고딕"/>
+              </a:rPr>
+              <a:t>paidWithAnotherCard</a:t>
+            </a:r>
+            <a:r>
+              <a:rPr sz="1000" b="0">
+                <a:solidFill>
+                  <a:srgbClr val="000000"/>
+                </a:solidFill>
+                <a:latin typeface="Consolas"/>
+                <a:ea typeface="맑은 고딕"/>
+              </a:rPr>
+              <a:t>() {</a:t>
+            </a:r>
+          </a:p>
+          <a:p>
+            <a:pPr marL="0" indent="0" algn="l">
+              <a:lnSpc>
+                <a:spcPts val="1150"/>
+              </a:lnSpc>
+              <a:spcBef>
+                <a:spcPts val="0"/>
+              </a:spcBef>
+              <a:spcAft>
+                <a:spcPts val="0"/>
+              </a:spcAft>
+              <a:buNone/>
+            </a:pPr>
+            <a:r>
+              <a:rPr sz="1000" b="0">
+                <a:solidFill>
+                  <a:srgbClr val="000000"/>
+                </a:solidFill>
+                <a:latin typeface="Consolas"/>
+                <a:ea typeface="맑은 고딕"/>
+              </a:rPr>
+              <a:t>        payment.reject("카드 X");</a:t>
+            </a:r>
+          </a:p>
+          <a:p>
+            <a:pPr marL="0" indent="0" algn="l">
+              <a:lnSpc>
+                <a:spcPts val="1150"/>
+              </a:lnSpc>
+              <a:spcBef>
+                <a:spcPts val="0"/>
+              </a:spcBef>
+              <a:spcAft>
+                <a:spcPts val="0"/>
+              </a:spcAft>
+              <a:buNone/>
+            </a:pPr>
+          </a:p>
+          <a:p>
+            <a:pPr marL="0" indent="0" algn="l">
+              <a:lnSpc>
+                <a:spcPts val="1150"/>
+              </a:lnSpc>
+              <a:spcBef>
+                <a:spcPts val="0"/>
+              </a:spcBef>
+              <a:spcAft>
+                <a:spcPts val="0"/>
+              </a:spcAft>
+              <a:buNone/>
+            </a:pPr>
+            <a:r>
+              <a:rPr sz="1000" b="0">
+                <a:solidFill>
+                  <a:srgbClr val="000000"/>
+                </a:solidFill>
+                <a:latin typeface="Consolas"/>
+                <a:ea typeface="맑은 고딕"/>
+              </a:rPr>
+              <a:t>        service.pay(order.number(), new PaymentMethod("카드 X"));</a:t>
+            </a:r>
+          </a:p>
+          <a:p>
+            <a:pPr marL="0" indent="0" algn="l">
+              <a:lnSpc>
+                <a:spcPts val="1150"/>
+              </a:lnSpc>
+              <a:spcBef>
+                <a:spcPts val="0"/>
+              </a:spcBef>
+              <a:spcAft>
+                <a:spcPts val="0"/>
+              </a:spcAft>
+              <a:buNone/>
+            </a:pPr>
+            <a:r>
+              <a:rPr sz="1000" b="0">
+                <a:solidFill>
+                  <a:srgbClr val="000000"/>
+                </a:solidFill>
+                <a:latin typeface="Consolas"/>
+                <a:ea typeface="맑은 고딕"/>
+              </a:rPr>
+              <a:t>        service.pay(order.number(), new PaymentMethod("카드 Y"));</a:t>
+            </a:r>
+          </a:p>
+          <a:p>
+            <a:pPr marL="0" indent="0" algn="l">
+              <a:lnSpc>
+                <a:spcPts val="1150"/>
+              </a:lnSpc>
+              <a:spcBef>
+                <a:spcPts val="0"/>
+              </a:spcBef>
+              <a:spcAft>
+                <a:spcPts val="0"/>
+              </a:spcAft>
+              <a:buNone/>
+            </a:pPr>
+          </a:p>
+          <a:p>
+            <a:pPr marL="0" indent="0" algn="l">
+              <a:lnSpc>
+                <a:spcPts val="1150"/>
+              </a:lnSpc>
+              <a:spcBef>
+                <a:spcPts val="0"/>
+              </a:spcBef>
+              <a:spcAft>
+                <a:spcPts val="0"/>
+              </a:spcAft>
+              <a:buNone/>
+            </a:pPr>
+            <a:r>
+              <a:rPr sz="1000" b="0">
+                <a:solidFill>
+                  <a:srgbClr val="000000"/>
+                </a:solidFill>
+                <a:latin typeface="Consolas"/>
+                <a:ea typeface="맑은 고딕"/>
+              </a:rPr>
+              <a:t>        assertEquals(OrderStatus.PAID, order.status());</a:t>
+            </a:r>
+          </a:p>
+          <a:p>
+            <a:pPr marL="0" indent="0" algn="l">
+              <a:lnSpc>
+                <a:spcPts val="1150"/>
+              </a:lnSpc>
+              <a:spcBef>
+                <a:spcPts val="0"/>
+              </a:spcBef>
+              <a:spcAft>
+                <a:spcPts val="0"/>
+              </a:spcAft>
+              <a:buNone/>
+            </a:pPr>
+            <a:r>
+              <a:rPr sz="1000" b="0">
+                <a:solidFill>
+                  <a:srgbClr val="000000"/>
+                </a:solidFill>
+                <a:latin typeface="Consolas"/>
+                <a:ea typeface="맑은 고딕"/>
+              </a:rPr>
+              <a:t>        assertEquals(1, delivery.requests);</a:t>
+            </a:r>
+          </a:p>
+          <a:p>
+            <a:pPr marL="0" indent="0" algn="l">
+              <a:lnSpc>
+                <a:spcPts val="1150"/>
+              </a:lnSpc>
+              <a:spcBef>
+                <a:spcPts val="0"/>
+              </a:spcBef>
+              <a:spcAft>
+                <a:spcPts val="0"/>
+              </a:spcAft>
+              <a:buNone/>
+            </a:pPr>
+            <a:r>
+              <a:rPr sz="1000" b="0">
+                <a:solidFill>
+                  <a:srgbClr val="000000"/>
+                </a:solidFill>
+                <a:latin typeface="Consolas"/>
+                <a:ea typeface="맑은 고딕"/>
+              </a:rPr>
+              <a:t>    }</a:t>
+            </a:r>
+          </a:p>
+          <a:p>
+            <a:pPr marL="0" indent="0" algn="l">
+              <a:lnSpc>
+                <a:spcPts val="1150"/>
+              </a:lnSpc>
+              <a:spcBef>
+                <a:spcPts val="0"/>
+              </a:spcBef>
+              <a:spcAft>
+                <a:spcPts val="0"/>
+              </a:spcAft>
+              <a:buNone/>
+            </a:pPr>
+          </a:p>
+          <a:p>
+            <a:pPr marL="0" indent="0" algn="l">
+              <a:lnSpc>
+                <a:spcPts val="1150"/>
+              </a:lnSpc>
+              <a:spcBef>
+                <a:spcPts val="0"/>
+              </a:spcBef>
+              <a:spcAft>
+                <a:spcPts val="0"/>
+              </a:spcAft>
+              <a:buNone/>
+            </a:pPr>
+            <a:r>
+              <a:rPr sz="1000" b="0">
+                <a:solidFill>
+                  <a:srgbClr val="000000"/>
+                </a:solidFill>
+                <a:latin typeface="Consolas"/>
+                <a:ea typeface="맑은 고딕"/>
+              </a:rPr>
+              <a:t>    // ... 테스트 대역 생략</a:t>
+            </a:r>
+          </a:p>
+          <a:p>
+            <a:pPr marL="0" indent="0" algn="l">
+              <a:lnSpc>
+                <a:spcPts val="1150"/>
+              </a:lnSpc>
+              <a:spcBef>
+                <a:spcPts val="0"/>
+              </a:spcBef>
+              <a:spcAft>
+                <a:spcPts val="0"/>
+              </a:spcAft>
+              <a:buNone/>
+            </a:pPr>
+            <a:r>
+              <a:rPr sz="1000" b="0">
+                <a:solidFill>
+                  <a:srgbClr val="000000"/>
+                </a:solidFill>
+                <a:latin typeface="Consolas"/>
+                <a:ea typeface="맑은 고딕"/>
+              </a:rPr>
+              <a:t>}</a:t>
             </a:r>
           </a:p>
         </p:txBody>
@@ -6058,7 +6107,27 @@
                 <a:latin typeface="맑은 고딕"/>
                 <a:ea typeface="맑은 고딕"/>
               </a:rPr>
-              <a:t>"Always follow the TDD cycle: Red → Green → Refactor", [Beck 2025]</a:t>
+              <a:t>"Always follow the TDD cycle: Red → Green → Refactor"</a:t>
+            </a:r>
+            <a:r>
+              <a:rPr sz="1000" b="0">
+                <a:solidFill>
+                  <a:srgbClr val="000000"/>
+                </a:solidFill>
+                <a:latin typeface="맑은 고딕"/>
+                <a:ea typeface="맑은 고딕"/>
+              </a:rPr>
+              <a:t>, </a:t>
+            </a:r>
+            <a:r>
+              <a:rPr sz="1000" b="0">
+                <a:solidFill>
+                  <a:srgbClr val="000000"/>
+                </a:solidFill>
+                <a:latin typeface="맑은 고딕"/>
+                <a:ea typeface="맑은 고딕"/>
+              </a:rPr>
+              <a:t>[Beck 2025]</a:t>
             </a:r>
           </a:p>
           <a:p>
@@ -8391,7 +8460,7 @@
                 <a:latin typeface="맑은 고딕"/>
                 <a:ea typeface="맑은 고딕"/>
               </a:rPr>
-              <a:t>는 한 번에 검증할 수 있는 크기로, 그 단위의 </a:t>
+              <a:t>는 한 번에 검증할 수 있는 크기이며, 그 단위의 </a:t>
             </a:r>
             <a:r>
               <a:rPr sz="1800" b="1">
@@ -8401,7 +8470,7 @@
                 <a:latin typeface="맑은 고딕"/>
                 <a:ea typeface="맑은 고딕"/>
               </a:rPr>
-              <a:t>수용 기준이 통과하면 끝난다</a:t>
+              <a:t>수용 기준이 통과하면 끝난 것으로 본다</a:t>
             </a:r>
             <a:r>
               <a:rPr sz="1800" b="0">
@@ -8411,7 +8480,7 @@
                 <a:latin typeface="맑은 고딕"/>
                 <a:ea typeface="맑은 고딕"/>
               </a:rPr>
-              <a:t>. "주문한다" 전체를 한 번에 맡기면 에이전트는 한꺼번에 너무 많이 하려 한다.</a:t>
+              <a:t>. "주문한다" 전체를 한 번에 맡기면 에이전트는 한꺼번에 너무 많은 것을 바꾸려 한다.</a:t>
             </a:r>
           </a:p>
           <a:p>
@@ -8474,7 +8543,27 @@
                 <a:latin typeface="맑은 고딕"/>
                 <a:ea typeface="맑은 고딕"/>
               </a:rPr>
-              <a:t>"…asked to work on only one feature at a time. This incremental approach turned out to be critical to addressing the agent’s tendency to do too much at once", [Anthropic 2025d]</a:t>
+              <a:t>"…asked to work on only one feature at a time. This incremental approach turned out to be critical to addressing the agent’s tendency to do too much at once"</a:t>
+            </a:r>
+            <a:r>
+              <a:rPr sz="1000" b="0">
+                <a:solidFill>
+                  <a:srgbClr val="000000"/>
+                </a:solidFill>
+                <a:latin typeface="맑은 고딕"/>
+                <a:ea typeface="맑은 고딕"/>
+              </a:rPr>
+              <a:t>, </a:t>
+            </a:r>
+            <a:r>
+              <a:rPr sz="1000" b="0">
+                <a:solidFill>
+                  <a:srgbClr val="000000"/>
+                </a:solidFill>
+                <a:latin typeface="맑은 고딕"/>
+                <a:ea typeface="맑은 고딕"/>
+              </a:rPr>
+              <a:t>[Anthropic 2025d]</a:t>
             </a:r>
           </a:p>
         </p:txBody>
@@ -8833,7 +8922,7 @@
                 <a:latin typeface="맑은 고딕"/>
                 <a:ea typeface="맑은 고딕"/>
               </a:rPr>
-              <a:t>스토리는 업무 규칙으로 나눴지만, 스토리 안의 작업 단위는 </a:t>
+              <a:t>유저 스토리는 업무 규칙으로 나누었지만, 스토리 안의 작업 단위는 </a:t>
             </a:r>
             <a:r>
               <a:rPr sz="1800" b="1">
@@ -8853,7 +8942,7 @@
                 <a:latin typeface="맑은 고딕"/>
                 <a:ea typeface="맑은 고딕"/>
               </a:rPr>
-              <a:t>으로 자른다. 그래야 단위마다 끝을 확인하는 테스트가 있다.</a:t>
+              <a:t>으로 자른다. 그래야 단위마다 끝을 확인할 테스트가 생긴다.</a:t>
             </a:r>
           </a:p>
           <a:p>
@@ -9662,7 +9751,27 @@
                 <a:latin typeface="맑은 고딕"/>
                 <a:ea typeface="맑은 고딕"/>
               </a:rPr>
-              <a:t>"These features were all initially marked as “failing” so that later coding agents would have a clear outline of what full functionality looked like", [Anthropic 2025d]</a:t>
+              <a:t>"These features were all initially marked as “failing” so that later coding agents would have a clear outline of what full functionality looked like"</a:t>
+            </a:r>
+            <a:r>
+              <a:rPr sz="1000" b="0">
+                <a:solidFill>
+                  <a:srgbClr val="000000"/>
+                </a:solidFill>
+                <a:latin typeface="맑은 고딕"/>
+                <a:ea typeface="맑은 고딕"/>
+              </a:rPr>
+              <a:t>, </a:t>
+            </a:r>
+            <a:r>
+              <a:rPr sz="1000" b="0">
+                <a:solidFill>
+                  <a:srgbClr val="000000"/>
+                </a:solidFill>
+                <a:latin typeface="맑은 고딕"/>
+                <a:ea typeface="맑은 고딕"/>
+              </a:rPr>
+              <a:t>[Anthropic 2025d]</a:t>
             </a:r>
           </a:p>
         </p:txBody>
@@ -10704,7 +10813,7 @@
                 <a:latin typeface="맑은 고딕"/>
                 <a:ea typeface="맑은 고딕"/>
               </a:rPr>
-              <a:t>제대로 시험하지 않고 완료라고 표시</a:t>
+              <a:t>제대로 시험하지 않고도 완료라고 보고</a:t>
             </a:r>
             <a:r>
               <a:rPr sz="1800" b="0">
@@ -10714,7 +10823,7 @@
                 <a:latin typeface="맑은 고딕"/>
                 <a:ea typeface="맑은 고딕"/>
               </a:rPr>
-              <a:t>하곤 한다. 완료는 미리 정한 </a:t>
+              <a:t>하곤 한다. 완료는 미리 정해 둔 </a:t>
             </a:r>
             <a:r>
               <a:rPr sz="1800" b="1">
@@ -10734,7 +10843,7 @@
                 <a:latin typeface="맑은 고딕"/>
                 <a:ea typeface="맑은 고딕"/>
               </a:rPr>
-              <a:t>와 그 증거로 판단한다.</a:t>
+              <a:t>와 그것을 보이는 증거로 판단한다.</a:t>
             </a:r>
           </a:p>
           <a:p>
@@ -10797,7 +10906,27 @@
                 <a:latin typeface="맑은 고딕"/>
                 <a:ea typeface="맑은 고딕"/>
               </a:rPr>
-              <a:t>"Claude’s tendency to mark a feature as complete without proper testing", [Anthropic 2025d]</a:t>
+              <a:t>"Claude’s tendency to mark a feature as complete without proper testing"</a:t>
+            </a:r>
+            <a:r>
+              <a:rPr sz="1000" b="0">
+                <a:solidFill>
+                  <a:srgbClr val="000000"/>
+                </a:solidFill>
+                <a:latin typeface="맑은 고딕"/>
+                <a:ea typeface="맑은 고딕"/>
+              </a:rPr>
+              <a:t>, </a:t>
+            </a:r>
+            <a:r>
+              <a:rPr sz="1000" b="0">
+                <a:solidFill>
+                  <a:srgbClr val="000000"/>
+                </a:solidFill>
+                <a:latin typeface="맑은 고딕"/>
+                <a:ea typeface="맑은 고딕"/>
+              </a:rPr>
+              <a:t>[Anthropic 2025d]</a:t>
             </a:r>
           </a:p>
         </p:txBody>
@@ -11377,7 +11506,7 @@
                 <a:latin typeface="맑은 고딕"/>
                 <a:ea typeface="맑은 고딕"/>
               </a:rPr>
-              <a:t>에이전트의 보고가 아니라 </a:t>
+              <a:t>완료는 에이전트의 보고가 아니라 </a:t>
             </a:r>
             <a:r>
               <a:rPr sz="1800" b="1">
@@ -11397,7 +11526,7 @@
                 <a:latin typeface="맑은 고딕"/>
                 <a:ea typeface="맑은 고딕"/>
               </a:rPr>
-              <a:t>를 본다. 수용 테스트를 준 시연의 기록에서 수용 기준 4개가 통과했고, 바뀐 파일은 구현 하나다.</a:t>
+              <a:t>로 확인한다. 수용 테스트를 준 시연의 기록을 보면 수용 기준 넷이 통과했고 바뀐 파일은 구현 하나뿐이다.</a:t>
             </a:r>
           </a:p>
           <a:p>
@@ -11450,7 +11579,27 @@
                 <a:latin typeface="맑은 고딕"/>
                 <a:ea typeface="맑은 고딕"/>
               </a:rPr>
-              <a:t>"Any indication that the genie was cheating, for example by disabling or deleting tests", [Beck 2025]</a:t>
+              <a:t>"Any indication that the genie was cheating, for example by disabling or deleting tests"</a:t>
+            </a:r>
+            <a:r>
+              <a:rPr sz="1000" b="0">
+                <a:solidFill>
+                  <a:srgbClr val="000000"/>
+                </a:solidFill>
+                <a:latin typeface="맑은 고딕"/>
+                <a:ea typeface="맑은 고딕"/>
+              </a:rPr>
+              <a:t>, </a:t>
+            </a:r>
+            <a:r>
+              <a:rPr sz="1000" b="0">
+                <a:solidFill>
+                  <a:srgbClr val="000000"/>
+                </a:solidFill>
+                <a:latin typeface="맑은 고딕"/>
+                <a:ea typeface="맑은 고딕"/>
+              </a:rPr>
+              <a:t>[Beck 2025]</a:t>
             </a:r>
           </a:p>
         </p:txBody>
@@ -12583,7 +12732,7 @@
                 <a:latin typeface="맑은 고딕"/>
                 <a:ea typeface="맑은 고딕"/>
               </a:rPr>
-              <a:t>두 번</a:t>
+              <a:t>두 가지 방식</a:t>
             </a:r>
             <a:r>
               <a:rPr sz="1800" b="0">
@@ -12593,17 +12742,17 @@
                 <a:latin typeface="맑은 고딕"/>
                 <a:ea typeface="맑은 고딕"/>
               </a:rPr>
-              <a:t> 맡겼다</a:t>
-            </a:r>
-            <a:r>
-              <a:rPr sz="1400" b="0">
-                <a:solidFill>
-                  <a:srgbClr val="000000"/>
-                </a:solidFill>
-                <a:latin typeface="맑은 고딕"/>
-                <a:ea typeface="맑은 고딕"/>
-              </a:rPr>
-              <a:t>(실제 실행)</a:t>
+              <a:t>으로 맡겨 실제로 실행했다. 한 번은 "테스트도 짜줘"라고 해서 </a:t>
+            </a:r>
+            <a:r>
+              <a:rPr sz="1800" b="1">
+                <a:solidFill>
+                  <a:srgbClr val="000000"/>
+                </a:solidFill>
+                <a:latin typeface="맑은 고딕"/>
+                <a:ea typeface="맑은 고딕"/>
+              </a:rPr>
+              <a:t>기준까지 맡겼고</a:t>
             </a:r>
             <a:r>
               <a:rPr sz="1800" b="0">
@@ -12613,7 +12762,27 @@
                 <a:latin typeface="맑은 고딕"/>
                 <a:ea typeface="맑은 고딕"/>
               </a:rPr>
-              <a:t>. 한 번은 "테스트도 짜줘"로 기준까지 맡기고, 한 번은 사람이 쓴 수용 테스트를 주고 구현만 맡겼다.</a:t>
+              <a:t>, 한 번은 사람이 쓴 수용 테스트를 주고 </a:t>
+            </a:r>
+            <a:r>
+              <a:rPr sz="1800" b="1">
+                <a:solidFill>
+                  <a:srgbClr val="000000"/>
+                </a:solidFill>
+                <a:latin typeface="맑은 고딕"/>
+                <a:ea typeface="맑은 고딕"/>
+              </a:rPr>
+              <a:t>구현만 맡겼다</a:t>
+            </a:r>
+            <a:r>
+              <a:rPr sz="1800" b="0">
+                <a:solidFill>
+                  <a:srgbClr val="000000"/>
+                </a:solidFill>
+                <a:latin typeface="맑은 고딕"/>
+                <a:ea typeface="맑은 고딕"/>
+              </a:rPr>
+              <a:t>.</a:t>
             </a:r>
           </a:p>
         </p:txBody>
@@ -14649,7 +14818,7 @@
                 <a:latin typeface="맑은 고딕"/>
                 <a:ea typeface="맑은 고딕"/>
               </a:rPr>
-              <a:t>둘 다 사람의 수용 테스트 4개를 </a:t>
+              <a:t>두 결과 모두 사람이 쓴 수용 테스트 넷을 </a:t>
             </a:r>
             <a:r>
               <a:rPr sz="1800" b="1">
@@ -14669,7 +14838,7 @@
                 <a:latin typeface="맑은 고딕"/>
                 <a:ea typeface="맑은 고딕"/>
               </a:rPr>
-              <a:t>. 차이는 </a:t>
+              <a:t>. 달랐던 것은 </a:t>
             </a:r>
             <a:r>
               <a:rPr sz="1800" b="1">
@@ -14679,7 +14848,7 @@
                 <a:latin typeface="맑은 고딕"/>
                 <a:ea typeface="맑은 고딕"/>
               </a:rPr>
-              <a:t>기대값의 주인</a:t>
+              <a:t>기대값을 누가 정했는가</a:t>
             </a:r>
             <a:r>
               <a:rPr sz="1800" b="0">
@@ -14689,7 +14858,7 @@
                 <a:latin typeface="맑은 고딕"/>
                 <a:ea typeface="맑은 고딕"/>
               </a:rPr>
-              <a:t>과 사람이 확인할 양이다.</a:t>
+              <a:t>와 사람이 확인해야 할 양이다.</a:t>
             </a:r>
           </a:p>
         </p:txBody>
@@ -15017,8 +15186,8 @@
         </p:nvSpPr>
         <p:spPr>
           <a:xfrm>
-            <a:off x="365760" y="1842998"/>
-            <a:ext cx="8412480" cy="1816100"/>
+            <a:off x="365760" y="2100036"/>
+            <a:ext cx="8412480" cy="1508760"/>
           </a:xfrm>
           <a:prstGeom prst="rect">
             <a:avLst/>
@@ -15033,7 +15202,7 @@
           <a:p>
             <a:pPr marL="0" indent="0" algn="l">
               <a:lnSpc>
-                <a:spcPts val="1150"/>
+                <a:spcPts val="1080"/>
               </a:lnSpc>
               <a:spcBef>
                 <a:spcPts val="0"/>
@@ -15044,7 +15213,7 @@
               <a:buNone/>
             </a:pPr>
             <a:r>
-              <a:rPr sz="1000" b="0">
+              <a:rPr sz="900" b="0">
                 <a:solidFill>
                   <a:srgbClr val="000000"/>
                 </a:solidFill>
@@ -15057,7 +15226,7 @@
           <a:p>
             <a:pPr marL="0" indent="0" algn="l">
               <a:lnSpc>
-                <a:spcPts val="1150"/>
+                <a:spcPts val="1080"/>
               </a:lnSpc>
               <a:spcBef>
                 <a:spcPts val="0"/>
@@ -15068,7 +15237,7 @@
               <a:buNone/>
             </a:pPr>
             <a:r>
-              <a:rPr sz="1000" b="0">
+              <a:rPr sz="900" b="0">
                 <a:solidFill>
                   <a:srgbClr val="000000"/>
                 </a:solidFill>
@@ -15081,7 +15250,7 @@
           <a:p>
             <a:pPr marL="0" indent="0" algn="l">
               <a:lnSpc>
-                <a:spcPts val="1150"/>
+                <a:spcPts val="1080"/>
               </a:lnSpc>
               <a:spcBef>
                 <a:spcPts val="0"/>
@@ -15092,7 +15261,7 @@
               <a:buNone/>
             </a:pPr>
             <a:r>
-              <a:rPr sz="1000" b="0">
+              <a:rPr sz="900" b="0">
                 <a:solidFill>
                   <a:srgbClr val="000000"/>
                 </a:solidFill>
@@ -15102,7 +15271,7 @@
               <a:t>    void </a:t>
             </a:r>
             <a:r>
-              <a:rPr sz="1000" b="1">
+              <a:rPr sz="900" b="1">
                 <a:solidFill>
                   <a:srgbClr val="000000"/>
                 </a:solidFill>
@@ -15112,7 +15281,7 @@
               <a:t>paidOrderIsNotChargedAgain</a:t>
             </a:r>
             <a:r>
-              <a:rPr sz="1000" b="0">
+              <a:rPr sz="900" b="0">
                 <a:solidFill>
                   <a:srgbClr val="000000"/>
                 </a:solidFill>
@@ -15125,7 +15294,7 @@
           <a:p>
             <a:pPr marL="0" indent="0" algn="l">
               <a:lnSpc>
-                <a:spcPts val="1150"/>
+                <a:spcPts val="1080"/>
               </a:lnSpc>
               <a:spcBef>
                 <a:spcPts val="0"/>
@@ -15136,7 +15305,7 @@
               <a:buNone/>
             </a:pPr>
             <a:r>
-              <a:rPr sz="1000" b="0">
+              <a:rPr sz="900" b="0">
                 <a:solidFill>
                   <a:srgbClr val="000000"/>
                 </a:solidFill>
@@ -15149,7 +15318,7 @@
           <a:p>
             <a:pPr marL="0" indent="0" algn="l">
               <a:lnSpc>
-                <a:spcPts val="1150"/>
+                <a:spcPts val="1080"/>
               </a:lnSpc>
               <a:spcBef>
                 <a:spcPts val="0"/>
@@ -15160,7 +15329,7 @@
               <a:buNone/>
             </a:pPr>
             <a:r>
-              <a:rPr sz="1000" b="0">
+              <a:rPr sz="900" b="0">
                 <a:solidFill>
                   <a:srgbClr val="000000"/>
                 </a:solidFill>
@@ -15173,7 +15342,7 @@
           <a:p>
             <a:pPr marL="0" indent="0" algn="l">
               <a:lnSpc>
-                <a:spcPts val="1150"/>
+                <a:spcPts val="1080"/>
               </a:lnSpc>
               <a:spcBef>
                 <a:spcPts val="0"/>
@@ -15187,7 +15356,7 @@
           <a:p>
             <a:pPr marL="0" indent="0" algn="l">
               <a:lnSpc>
-                <a:spcPts val="1150"/>
+                <a:spcPts val="1080"/>
               </a:lnSpc>
               <a:spcBef>
                 <a:spcPts val="0"/>
@@ -15198,7 +15367,7 @@
               <a:buNone/>
             </a:pPr>
             <a:r>
-              <a:rPr sz="1000" b="0">
+              <a:rPr sz="900" b="0">
                 <a:solidFill>
                   <a:srgbClr val="000000"/>
                 </a:solidFill>
@@ -15211,7 +15380,7 @@
           <a:p>
             <a:pPr marL="0" indent="0" algn="l">
               <a:lnSpc>
-                <a:spcPts val="1150"/>
+                <a:spcPts val="1080"/>
               </a:lnSpc>
               <a:spcBef>
                 <a:spcPts val="0"/>
@@ -15222,7 +15391,7 @@
               <a:buNone/>
             </a:pPr>
             <a:r>
-              <a:rPr sz="1000" b="0">
+              <a:rPr sz="900" b="0">
                 <a:solidFill>
                   <a:srgbClr val="000000"/>
                 </a:solidFill>
@@ -15235,7 +15404,7 @@
           <a:p>
             <a:pPr marL="0" indent="0" algn="l">
               <a:lnSpc>
-                <a:spcPts val="1150"/>
+                <a:spcPts val="1080"/>
               </a:lnSpc>
               <a:spcBef>
                 <a:spcPts val="0"/>
@@ -15246,7 +15415,7 @@
               <a:buNone/>
             </a:pPr>
             <a:r>
-              <a:rPr sz="1000" b="0">
+              <a:rPr sz="900" b="0">
                 <a:solidFill>
                   <a:srgbClr val="000000"/>
                 </a:solidFill>
@@ -15259,7 +15428,7 @@
           <a:p>
             <a:pPr marL="0" indent="0" algn="l">
               <a:lnSpc>
-                <a:spcPts val="1150"/>
+                <a:spcPts val="1080"/>
               </a:lnSpc>
               <a:spcBef>
                 <a:spcPts val="0"/>
@@ -15270,7 +15439,7 @@
               <a:buNone/>
             </a:pPr>
             <a:r>
-              <a:rPr sz="1000" b="0">
+              <a:rPr sz="900" b="0">
                 <a:solidFill>
                   <a:srgbClr val="000000"/>
                 </a:solidFill>
@@ -15301,7 +15470,7 @@
         <p:spPr>
           <a:xfrm>
             <a:off x="365760" y="960120"/>
-            <a:ext cx="8412480" cy="781278"/>
+            <a:ext cx="8412480" cy="1038316"/>
           </a:xfrm>
         </p:spPr>
         <p:txBody>
@@ -15327,7 +15496,7 @@
                 <a:latin typeface="맑은 고딕"/>
                 <a:ea typeface="맑은 고딕"/>
               </a:rPr>
-              <a:t>테스트도 맡긴 에이전트는 명세에 없는 규칙을 스스로 정해 </a:t>
+              <a:t>테스트까지 맡긴 쪽에서는 에이전트가 명세에 없는 규칙을 스스로 정해 </a:t>
             </a:r>
             <a:r>
               <a:rPr sz="1800" b="1">
@@ -15337,7 +15506,7 @@
                 <a:latin typeface="맑은 고딕"/>
                 <a:ea typeface="맑은 고딕"/>
               </a:rPr>
-              <a:t>테스트로 굳혔다</a:t>
+              <a:t>테스트에 적어 넣었다</a:t>
             </a:r>
             <a:r>
               <a:rPr sz="1800" b="0">
@@ -15347,7 +15516,7 @@
                 <a:latin typeface="맑은 고딕"/>
                 <a:ea typeface="맑은 고딕"/>
               </a:rPr>
-              <a:t>. 테스트가 된 규칙은 요구처럼 보인다.</a:t>
+              <a:t>. 테스트가 된 규칙은 사람이 정한 요구처럼 보인다.</a:t>
             </a:r>
           </a:p>
         </p:txBody>
@@ -15366,7 +15535,7 @@
         </p:nvSpPr>
         <p:spPr>
           <a:xfrm>
-            <a:off x="365760" y="3887698"/>
+            <a:off x="365760" y="3837396"/>
             <a:ext cx="8412480" cy="2346871"/>
           </a:xfrm>
           <a:prstGeom prst="rect">
@@ -16962,7 +17131,7 @@
                 <a:latin typeface="맑은 고딕"/>
                 <a:ea typeface="맑은 고딕"/>
               </a:rPr>
-              <a:t>추측이 기준</a:t>
+              <a:t>추측이 기준으로 굳거나</a:t>
             </a:r>
             <a:r>
               <a:rPr sz="1800" b="0">
@@ -16972,7 +17141,7 @@
                 <a:latin typeface="맑은 고딕"/>
                 <a:ea typeface="맑은 고딕"/>
               </a:rPr>
-              <a:t>이 되거나, 완료가 </a:t>
+              <a:t>, 완료가 확인되지 않은 </a:t>
             </a:r>
             <a:r>
               <a:rPr sz="1800" b="1">
@@ -18227,7 +18396,7 @@
                 <a:latin typeface="맑은 고딕"/>
                 <a:ea typeface="맑은 고딕"/>
               </a:rPr>
-              <a:t>이며, 검증할 수 없는 작업은 맡길 수 없다.</a:t>
+              <a:t>이며, 검증할 수 없는 작업은 에이전트에게 맡길 수 없다.</a:t>
             </a:r>
           </a:p>
           <a:p>
@@ -18291,7 +18460,7 @@
                 <a:latin typeface="맑은 고딕"/>
                 <a:ea typeface="맑은 고딕"/>
               </a:rPr>
-              <a:t> 스토리와 코드를 잇는 고리. 기대값은 사람이 정하고 LLM은 바꾸지 않는다</a:t>
+              <a:t> 스토리와 코드를 잇는다. 기대값은 사람이 정한다</a:t>
             </a:r>
           </a:p>
           <a:p>
@@ -18463,7 +18632,7 @@
                 <a:latin typeface="맑은 고딕"/>
                 <a:ea typeface="맑은 고딕"/>
               </a:rPr>
-              <a:t> 보고가 아니라 테스트 출력과 diff로 판단한다</a:t>
+              <a:t> 보고가 아니라 테스트 출력과 diff로 본다</a:t>
             </a:r>
           </a:p>
           <a:p>
@@ -21118,7 +21287,7 @@
                 <a:latin typeface="맑은 고딕"/>
                 <a:ea typeface="맑은 고딕"/>
               </a:rPr>
-              <a:t>은 결과를 받아들일 조건을 구체적인 예로 쓴 것이다. 요구 → 유저 스토리 → 코드·테스트의 뼈대에서 </a:t>
+              <a:t>은 결과를 받아들일 조건을 구체적인 예로 적은 것이다. 요구에서 코드까지 가는 길에서 </a:t>
             </a:r>
             <a:r>
               <a:rPr sz="1800" b="1">
@@ -21128,7 +21297,7 @@
                 <a:latin typeface="맑은 고딕"/>
                 <a:ea typeface="맑은 고딕"/>
               </a:rPr>
-              <a:t>스토리와 코드를 잇는 고리</a:t>
+              <a:t>유저 스토리와 코드를 잇는 자리</a:t>
             </a:r>
             <a:r>
               <a:rPr sz="1800" b="0">
@@ -21138,7 +21307,7 @@
                 <a:latin typeface="맑은 고딕"/>
                 <a:ea typeface="맑은 고딕"/>
               </a:rPr>
-              <a:t>다.</a:t>
+              <a:t>에 있다.</a:t>
             </a:r>
           </a:p>
           <a:p>
@@ -21204,7 +21373,7 @@
                 <a:latin typeface="맑은 고딕"/>
                 <a:ea typeface="맑은 고딕"/>
               </a:rPr>
-              <a:t>수용 기준이 없는 스토리는 명세가 아니다</a:t>
+              <a:t>수용 기준이 없으면 명세가 아니다</a:t>
             </a:r>
             <a:r>
               <a:rPr sz="1800" b="0">
@@ -21224,7 +21393,7 @@
                 <a:latin typeface="맑은 고딕"/>
                 <a:ea typeface="맑은 고딕"/>
               </a:rPr>
-              <a:t> 받아들일 조건이 없으면 LLM이 그 조건까지 추측한다.</a:t>
+              <a:t> 받아들일 조건을 적지 않으면 LLM이 그 조건까지 스스로 정한다.</a:t>
             </a:r>
           </a:p>
           <a:p>
@@ -21519,7 +21688,7 @@
           </p:nvPr>
         </p:nvGraphicFramePr>
         <p:xfrm>
-          <a:off x="1579436" y="2898948"/>
+          <a:off x="1579436" y="3173268"/>
           <a:ext cx="5971540" cy="3873500"/>
         </p:xfrm>
         <a:graphic>
@@ -22426,7 +22595,7 @@
         <p:spPr>
           <a:xfrm>
             <a:off x="365760" y="960120"/>
-            <a:ext cx="8412480" cy="1587442"/>
+            <a:ext cx="8412480" cy="1844479"/>
           </a:xfrm>
           <a:prstGeom prst="rect">
             <a:avLst/>
@@ -22466,7 +22635,7 @@
                 <a:latin typeface="맑은 고딕"/>
                 <a:ea typeface="맑은 고딕"/>
               </a:rPr>
-              <a:t>기대값</a:t>
+              <a:t>테스트의 기대값</a:t>
             </a:r>
             <a:r>
               <a:rPr sz="1800" b="0">
@@ -22476,7 +22645,7 @@
                 <a:latin typeface="맑은 고딕"/>
                 <a:ea typeface="맑은 고딕"/>
               </a:rPr>
-              <a:t>으로 옮기는 일은 사람이 한다. LLM은 초안을 쓰고 빠진 경우를 질문하지만, 기대값을 정하지 않는다.</a:t>
+              <a:t>으로 옮기는 일은 사람이 한다. LLM은 초안을 쓰고 빠진 경우를 질문할 수 있지만, 기대값 자체를 정하지는 않는다.</a:t>
             </a:r>
           </a:p>
           <a:p>
@@ -22539,7 +22708,27 @@
                 <a:latin typeface="맑은 고딕"/>
                 <a:ea typeface="맑은 고딕"/>
               </a:rPr>
-              <a:t>"We prioritize work, translate user feedback into acceptance criteria, and validate outcomes.", [Lopopolo 2026]</a:t>
+              <a:t>"We prioritize work, translate user feedback into acceptance criteria, and validate outcomes."</a:t>
+            </a:r>
+            <a:r>
+              <a:rPr sz="1000" b="0">
+                <a:solidFill>
+                  <a:srgbClr val="000000"/>
+                </a:solidFill>
+                <a:latin typeface="맑은 고딕"/>
+                <a:ea typeface="맑은 고딕"/>
+              </a:rPr>
+              <a:t>, </a:t>
+            </a:r>
+            <a:r>
+              <a:rPr sz="1000" b="0">
+                <a:solidFill>
+                  <a:srgbClr val="000000"/>
+                </a:solidFill>
+                <a:latin typeface="맑은 고딕"/>
+                <a:ea typeface="맑은 고딕"/>
+              </a:rPr>
+              <a:t>[Lopopolo 2026]</a:t>
             </a:r>
           </a:p>
         </p:txBody>
@@ -22623,7 +22812,7 @@
         </p:nvSpPr>
         <p:spPr>
           <a:xfrm>
-            <a:off x="365760" y="2600498"/>
+            <a:off x="365760" y="2874818"/>
             <a:ext cx="8412480" cy="222250"/>
           </a:xfrm>
           <a:prstGeom prst="rect">
@@ -22908,7 +23097,7 @@
                 <a:latin typeface="맑은 고딕"/>
                 <a:ea typeface="맑은 고딕"/>
               </a:rPr>
-              <a:t>스스로 확인하고 고친다</a:t>
+              <a:t>스스로 확인하고 고칠 수 있다</a:t>
             </a:r>
             <a:r>
               <a:rPr sz="1800" b="0">
@@ -22918,7 +23107,7 @@
                 <a:latin typeface="맑은 고딕"/>
                 <a:ea typeface="맑은 고딕"/>
               </a:rPr>
-              <a:t>. 없으면 "완료"는 확인되지 않은 </a:t>
+              <a:t>. 테스트가 없으면 에이전트가 말하는 완료는 확인되지 않은 </a:t>
             </a:r>
             <a:r>
               <a:rPr sz="1800" b="1">
@@ -22938,7 +23127,7 @@
                 <a:latin typeface="맑은 고딕"/>
                 <a:ea typeface="맑은 고딕"/>
               </a:rPr>
-              <a:t>이다.</a:t>
+              <a:t>일 뿐이다.</a:t>
             </a:r>
           </a:p>
           <a:p>
@@ -23001,7 +23190,27 @@
                 <a:latin typeface="맑은 고딕"/>
                 <a:ea typeface="맑은 고딕"/>
               </a:rPr>
-              <a:t>"If your project has a robust, comprehensive and stable test suite agentic coding tools can fly with it. Without tests? Your agent might claim something works without having actually tested it at all", [Willison 2025b]</a:t>
+              <a:t>"If your project has a robust, comprehensive and stable test suite agentic coding tools can fly with it. Without tests? Your agent might claim something works without having actually tested it at all"</a:t>
+            </a:r>
+            <a:r>
+              <a:rPr sz="1000" b="0">
+                <a:solidFill>
+                  <a:srgbClr val="000000"/>
+                </a:solidFill>
+                <a:latin typeface="맑은 고딕"/>
+                <a:ea typeface="맑은 고딕"/>
+              </a:rPr>
+              <a:t>, </a:t>
+            </a:r>
+            <a:r>
+              <a:rPr sz="1000" b="0">
+                <a:solidFill>
+                  <a:srgbClr val="000000"/>
+                </a:solidFill>
+                <a:latin typeface="맑은 고딕"/>
+                <a:ea typeface="맑은 고딕"/>
+              </a:rPr>
+              <a:t>[Willison 2025b]</a:t>
             </a:r>
           </a:p>
         </p:txBody>
@@ -24574,7 +24783,7 @@
                 <a:latin typeface="맑은 고딕"/>
                 <a:ea typeface="맑은 고딕"/>
               </a:rPr>
-              <a:t>그대로인 것이 거절 예시의 핵심이다</a:t>
+              <a:t>바뀌지 않아야 할 것이 거절 예시의 핵심이다</a:t>
             </a:r>
             <a:r>
               <a:rPr sz="1800" b="0">
@@ -24594,7 +24803,7 @@
                 <a:latin typeface="맑은 고딕"/>
                 <a:ea typeface="맑은 고딕"/>
               </a:rPr>
-              <a:t> 작업 명세서의 예에는 잘 드러나지 않는다.</a:t>
+              <a:t> 작업 명세서의 예만으로는 잘 드러나지 않는다.</a:t>
             </a:r>
           </a:p>
         </p:txBody>
@@ -26299,7 +26508,7 @@
                 <a:latin typeface="맑은 고딕"/>
                 <a:ea typeface="맑은 고딕"/>
               </a:rPr>
-              <a:t>업무 규칙 3가지의 </a:t>
+              <a:t>업무 규칙 세 가지에서 </a:t>
             </a:r>
             <a:r>
               <a:rPr sz="1800" b="1">
@@ -26319,7 +26528,7 @@
                 <a:latin typeface="맑은 고딕"/>
                 <a:ea typeface="맑은 고딕"/>
               </a:rPr>
-              <a:t>를 고르면 "주문한다"의 수용 기준은 4개다. 모두 같은 주문</a:t>
+              <a:t>를 고르면 "주문한다"의 수용 기준은 넷이 된다. 넷 모두 같은 주문</a:t>
             </a:r>
             <a:r>
               <a:rPr sz="1400" b="0">
@@ -26893,7 +27102,7 @@
                 <a:latin typeface="맑은 고딕"/>
                 <a:ea typeface="맑은 고딕"/>
               </a:rPr>
-              <a:t>거절 예시의 Then은 "</a:t>
+              <a:t>거절 예시의 Then에는 </a:t>
             </a:r>
             <a:r>
               <a:rPr sz="1800" b="1">
@@ -26903,7 +27112,7 @@
                 <a:latin typeface="맑은 고딕"/>
                 <a:ea typeface="맑은 고딕"/>
               </a:rPr>
-              <a:t>바뀌지 않은 것</a:t>
+              <a:t>바뀌지 않아야 할 것</a:t>
             </a:r>
             <a:r>
               <a:rPr sz="1800" b="0">
@@ -26913,7 +27122,7 @@
                 <a:latin typeface="맑은 고딕"/>
                 <a:ea typeface="맑은 고딕"/>
               </a:rPr>
-              <a:t>"이다. 첫 시도는 거절된 주문을 취소됨으로 바꿔 다시 결제할 수 없게 했다.</a:t>
+              <a:t>을 적는다. 첫 시도의 코드는 거절된 주문을 취소됨으로 바꿔 다시 결제할 수 없게 만들었다.</a:t>
             </a:r>
           </a:p>
           <a:p>
@@ -26979,7 +27188,7 @@
                 <a:latin typeface="맑은 고딕"/>
                 <a:ea typeface="맑은 고딕"/>
               </a:rPr>
-              <a:t>바뀌지 않은 것도 확인한다</a:t>
+              <a:t>바뀌지 않은 것까지 확인한다</a:t>
             </a:r>
             <a:r>
               <a:rPr sz="1800" b="0">
@@ -26999,7 +27208,7 @@
                 <a:latin typeface="맑은 고딕"/>
                 <a:ea typeface="맑은 고딕"/>
               </a:rPr>
-              <a:t> "결제대기인가?"만 보면 금액이 바뀌거나 배송이 나간 것을 놓친다.</a:t>
+              <a:t> 상태가 결제대기인지만 보면 금액이 달라지거나 배송 요청이 나간 것을 놓친다.</a:t>
             </a:r>
           </a:p>
         </p:txBody>
@@ -28366,7 +28575,7 @@
                 <a:latin typeface="맑은 고딕"/>
                 <a:ea typeface="맑은 고딕"/>
               </a:rPr>
-              <a:t>많다고 좋지 않다</a:t>
+              <a:t>많을수록 좋은 것이 아니다</a:t>
             </a:r>
             <a:r>
               <a:rPr sz="1800" b="0">
@@ -28376,7 +28585,7 @@
                 <a:latin typeface="맑은 고딕"/>
                 <a:ea typeface="맑은 고딕"/>
               </a:rPr>
-              <a:t>. 규칙마다 대표 예를 두고, 리뷰할 수 있는 크기로 둔다.</a:t>
+              <a:t>. 업무 규칙마다 대표 예를 하나씩 두고, 사람이 리뷰할 수 있는 양으로 유지한다.</a:t>
             </a:r>
           </a:p>
         </p:txBody>

--- a/courses/ai-native/sessions/s04.pptx
+++ b/courses/ai-native/sessions/s04.pptx
@@ -30,6 +30,7 @@
     <p:sldId id="275" r:id="javaLecture20"/>
     <p:sldId id="276" r:id="javaLecture21"/>
     <p:sldId id="277" r:id="javaLecture22"/>
+    <p:sldId id="278" r:id="javaLecture23"/>
   </p:sldIdLst>
   <p:sldSz cx="9144000" cy="6858000" type="screen4x3"/>
   <p:notesSz cx="6858000" cy="9144000"/>
@@ -1042,14 +1043,35 @@
             <a:pPr lvl="0"/>
             <a:r>
               <a:rPr lang="ko-KR" sz="1200"/>
-              <a:t>첫 기능 "신청한다"를 범위로 한다. 배송지 변경·해지·환불의 새 정책을 만들지 않는다.</a:t>
+              <a:t>수강생이 만든 실습 2의 요구사항 정의서와 실습 3의 도메인 모델을 첫 프롬프트에 붙인다. 실제 강사 예시 입력은 code/s04/exercise-conversation/input-s02.md와 input-s03.md다.</a:t>
             </a:r>
           </a:p>
           <a:p>
             <a:pPr lvl="0"/>
             <a:r>
               <a:rPr lang="ko-KR" sz="1200"/>
-              <a:t>실제 외부 API 문서는 주어지지 않았다. 답안은 업무 연동 계약과 규격 미제공의 담당·보류 결정을 완성한 샘플이며 가상의 URL을 추가하지 않는다.</a:t>
+              <a:t>②~④는 기본 문구만 입력하지 않는다. [앞선 질문에 대한 답]과 [추가 질문·수정 요청]을 함께 작성한다.</a:t>
+            </a:r>
+          </a:p>
+          <a:p>
+            <a:pPr lvl="0"/>
+            <a:r>
+              <a:rPr lang="ko-KR" sz="1200"/>
+              <a:t>실제 입력·응답은 code/s04/exercise-conversation/에 보존한다. ①~③은 Codex로 먼저 실행했고, 같은 프롬프트를 Claude Code로 다시 실행해 ①~⑤를 한 대화로 완성했다. 채택본은 claude-response-*다.</a:t>
+            </a:r>
+          </a:p>
+          <a:p>
+            <a:pPr lvl="0"/>
+            <a:r>
+              <a:rPr lang="ko-KR" sz="1200"/>
+              <a:t>실습 3에서 정한 신청 상태와 전이를 그대로 쓴다. 첫 결제 처리 권한을 새 업무 상태로 만들지 않게 ④에서 되돌린다.</a:t>
+            </a:r>
+          </a:p>
+          <a:p>
+            <a:pPr lvl="0"/>
+            <a:r>
+              <a:rPr lang="ko-KR" sz="1200"/>
+              <a:t>앞 실습에서 발견해 되돌린 것 — 요청 이름(결제 승인·배송 요청)을 용어집과 맞추고, 결제 거절과 통신 오류를 구분해 "확정할 수 없는 응답을 실패로 바꾸지 않는다"를 요구사항의 결제 결과 조건에 더했다. 독립 서비스 분리안은 채택하지 않았고, 실제 API 문서가 없다는 사실은 미결로 남겼다.</a:t>
             </a:r>
           </a:p>
         </p:txBody>
@@ -1171,14 +1193,14 @@
             <a:pPr lvl="0"/>
             <a:r>
               <a:rPr lang="ko-KR" sz="1200"/>
-              <a:t>점검 항목 1~3의 완성 아키텍처다. 각 패키지의 존재 이유와 허용 방향을 답안 자체에서 설명한다.</a:t>
+              <a:t>실습 4의 ⑤로 받은 최종 MD의 1절이다. 전문은 code/s04/exercise-conversation/정기배송-최초신청-아키텍처.md다.</a:t>
             </a:r>
           </a:p>
           <a:p>
             <a:pPr lvl="0"/>
             <a:r>
               <a:rPr lang="ko-KR" sz="1200"/>
-              <a:t>product→payment는 앞 강의 코드의 금액 타입 재사용과 같다. 실행 전달 방식이나 독립 서비스 배포를 새로 가정하지 않았다.</a:t>
+              <a:t>수강생의 답은 패키지 이름과 개수가 다를 수 있다. 업무가 구현을 모르는지와 포트의 소유자가 누구인지를 본다.</a:t>
             </a:r>
           </a:p>
         </p:txBody>
@@ -1307,14 +1329,14 @@
             <a:pPr lvl="0"/>
             <a:r>
               <a:rPr lang="ko-KR" sz="1200"/>
-              <a:t>점검 항목 2·3·6을 반영한 구조 결정문이다. 검증하라는 지시 대신 대역과 관찰 결과를 명시했다.</a:t>
+              <a:t>최종 MD의 2절 원본 그대로다. 노드 라벨만 슬라이드 폭에 맞게 줄였다.</a:t>
             </a:r>
           </a:p>
           <a:p>
             <a:pPr lvl="0"/>
             <a:r>
               <a:rPr lang="ko-KR" sz="1200"/>
-              <a:t>이것은 정기배송 설계 답안이다. 정기배송 코드를 실행했다는 결과 보고가 아니다. 정적 검사 구현의 실행 예는 강의의 주문 코드를 쓴다.</a:t>
+              <a:t>수강생에게 묻는다: 화살표를 호출 순서로 읽으면 어느 규칙이 깨지는가?</a:t>
             </a:r>
           </a:p>
         </p:txBody>
@@ -1375,14 +1397,7 @@
             <a:pPr lvl="0"/>
             <a:r>
               <a:rPr lang="ko-KR" sz="1200"/>
-              <a:t>점검 항목 4·5를 충족하는 완성 답안이다. 알고 있는 계약을 실제 값으로 적고, 제공되지 않은 규격은 이유·담당·확인 시점·차단 범위를 기록했다.</a:t>
-            </a:r>
-          </a:p>
-          <a:p>
-            <a:pPr lvl="0"/>
-            <a:r>
-              <a:rPr lang="ko-KR" sz="1200"/>
-              <a:t>“매뉴얼을 확인하라”는 과제 설명과 달리 제출할 계약과 보류 결정 자체다. 새로운 API 주소·인증 정책을 만들어 정답으로 제시하지 않는다.</a:t>
+              <a:t>최종 MD의 3절이다. 금지 목록의 둘째 줄이 포트를 둔 이유를 가장 잘 보여 준다.</a:t>
             </a:r>
           </a:p>
         </p:txBody>
@@ -1443,7 +1458,82 @@
             <a:pPr lvl="0"/>
             <a:r>
               <a:rPr lang="ko-KR" sz="1200"/>
-              <a:t>완료된 보완 기록의 샘플이다. 앞 정의서를 수정하는 방법이나 수강생의 다음 할 일을 다시 설명하지 않는다.</a:t>
+              <a:t>최종 MD의 4절을 줄였다. 계약별 요청·결과의 전체 항목은 전문에 있다.</a:t>
+            </a:r>
+          </a:p>
+          <a:p>
+            <a:pPr lvl="0"/>
+            <a:r>
+              <a:rPr lang="ko-KR" sz="1200"/>
+              <a:t>조건부 전이는 "조회한 뒤 결제한다"로는 동시 재전송의 중복 청구를 막지 못한다는 ④의 지적에서 나왔다.</a:t>
+            </a:r>
+          </a:p>
+        </p:txBody>
+      </p:sp>
+    </p:spTree>
+  </p:cSld>
+  <p:clrMapOvr>
+    <a:masterClrMapping/>
+  </p:clrMapOvr>
+</p:notes>
+</file>
+
+<file path=ppt/notesSlides/notesSlide23.xml><?xml version="1.0" encoding="utf-8"?>
+<p:notes xmlns:a="http://schemas.openxmlformats.org/drawingml/2006/main" xmlns:r="http://schemas.openxmlformats.org/officeDocument/2006/relationships" xmlns:p="http://schemas.openxmlformats.org/presentationml/2006/main">
+  <p:cSld>
+    <p:spTree>
+      <p:nvGrpSpPr>
+        <p:cNvPr id="1" name=""/>
+        <p:cNvGrpSpPr/>
+        <p:nvPr/>
+      </p:nvGrpSpPr>
+      <p:grpSpPr>
+        <a:xfrm>
+          <a:off x="0" y="0"/>
+          <a:ext cx="0" cy="0"/>
+          <a:chOff x="0" y="0"/>
+          <a:chExt cx="0" cy="0"/>
+        </a:xfrm>
+      </p:grpSpPr>
+      <p:sp>
+        <p:nvSpPr>
+          <p:cNvPr id="2" name="슬라이드 이미지 개체 틀"/>
+          <p:cNvSpPr/>
+          <p:nvPr>
+            <p:ph type="sldImg" idx="2"/>
+          </p:nvPr>
+        </p:nvSpPr>
+        <p:spPr/>
+        <p:txBody>
+          <a:bodyPr/>
+          <a:lstStyle/>
+          <a:p/>
+        </p:txBody>
+      </p:sp>
+      <p:sp>
+        <p:nvSpPr>
+          <p:cNvPr id="3" name="슬라이드 노트 개체 틀"/>
+          <p:cNvSpPr/>
+          <p:nvPr>
+            <p:ph type="body" idx="3"/>
+          </p:nvPr>
+        </p:nvSpPr>
+        <p:spPr/>
+        <p:txBody>
+          <a:bodyPr/>
+          <a:lstStyle/>
+          <a:p>
+            <a:pPr lvl="0"/>
+            <a:r>
+              <a:rPr lang="ko-KR" sz="1200"/>
+              <a:t>최종 MD의 5·6절이다. 미결은 제목과 한 줄 이유만 남기고 줄였다.</a:t>
+            </a:r>
+          </a:p>
+          <a:p>
+            <a:pPr lvl="0"/>
+            <a:r>
+              <a:rPr lang="ko-KR" sz="1200"/>
+              <a:t>미결을 남긴 것이 감점이 아니라는 점을 짚는다. 확인할 사람과 영향이 적혀 있으면 다음 작업을 시작할 수 있다.</a:t>
             </a:r>
           </a:p>
         </p:txBody>
@@ -3361,7 +3451,7 @@
                 <a:latin typeface="맑은 고딕"/>
                 <a:ea typeface="맑은 고딕"/>
               </a:rPr>
-              <a:t> 의존 규칙</a:t>
+              <a:t> 아키텍처</a:t>
             </a:r>
           </a:p>
           <a:p>
@@ -11370,7 +11460,7 @@
                 <a:latin typeface="맑은 고딕"/>
                 <a:ea typeface="맑은 고딕"/>
               </a:rPr>
-              <a:t>09. 실습 — 의존 규칙</a:t>
+              <a:t>09. 실습 — 아키텍처</a:t>
             </a:r>
           </a:p>
         </p:txBody>
@@ -11526,34 +11616,24 @@
               <a:buNone/>
             </a:pPr>
             <a:r>
-              <a:rPr sz="1600" b="0">
-                <a:solidFill>
-                  <a:srgbClr val="000000"/>
-                </a:solidFill>
-                <a:latin typeface="맑은 고딕"/>
-                <a:ea typeface="맑은 고딕"/>
-              </a:rPr>
-              <a:t>실습 3의 도메인 모델을 LLM에 주고 </a:t>
-            </a:r>
-            <a:r>
-              <a:rPr sz="1600" b="1">
-                <a:solidFill>
-                  <a:srgbClr val="000000"/>
-                </a:solidFill>
-                <a:latin typeface="맑은 고딕"/>
-                <a:ea typeface="맑은 고딕"/>
-              </a:rPr>
-              <a:t>패키지 경계와 의존 규칙, 외부 연동 규격</a:t>
-            </a:r>
-            <a:r>
-              <a:rPr sz="1600" b="0">
-                <a:solidFill>
-                  <a:srgbClr val="000000"/>
-                </a:solidFill>
-                <a:latin typeface="맑은 고딕"/>
-                <a:ea typeface="맑은 고딕"/>
-              </a:rPr>
-              <a:t>을 작성한 뒤 위반과 추측을 고친다.</a:t>
+              <a:rPr sz="1200" b="1">
+                <a:solidFill>
+                  <a:srgbClr val="000000"/>
+                </a:solidFill>
+                <a:latin typeface="맑은 고딕"/>
+                <a:ea typeface="맑은 고딕"/>
+              </a:rPr>
+              <a:t>①로 시작해 답·질문·수정 요청을 주고받는다.</a:t>
+            </a:r>
+            <a:r>
+              <a:rPr sz="1200" b="0">
+                <a:solidFill>
+                  <a:srgbClr val="000000"/>
+                </a:solidFill>
+                <a:latin typeface="맑은 고딕"/>
+                <a:ea typeface="맑은 고딕"/>
+              </a:rPr>
+              <a:t> ②~④는 보완 예시다. ⑤로 MD를 만들고 필요하면 보완·재생성한다.</a:t>
             </a:r>
           </a:p>
           <a:p>
@@ -11569,65 +11649,374 @@
               <a:buChar char=""/>
             </a:pPr>
             <a:r>
-              <a:rPr sz="1600" b="1">
-                <a:solidFill>
-                  <a:srgbClr val="000000"/>
-                </a:solidFill>
-                <a:latin typeface="맑은 고딕"/>
-                <a:ea typeface="맑은 고딕"/>
-              </a:rPr>
-              <a:t>투입물</a:t>
-            </a:r>
-          </a:p>
-          <a:p>
-            <a:pPr lvl="2" marL="342900" indent="0">
+              <a:rPr sz="1200" b="1">
+                <a:solidFill>
+                  <a:srgbClr val="000000"/>
+                </a:solidFill>
+                <a:latin typeface="맑은 고딕"/>
+                <a:ea typeface="맑은 고딕"/>
+              </a:rPr>
+              <a:t>프롬프트 —</a:t>
+            </a:r>
+            <a:r>
+              <a:rPr sz="1000" b="1">
+                <a:solidFill>
+                  <a:srgbClr val="000000"/>
+                </a:solidFill>
+                <a:latin typeface="맑은 고딕"/>
+                <a:ea typeface="맑은 고딕"/>
+              </a:rPr>
+              <a:t> 요청사항 포함</a:t>
+            </a:r>
+          </a:p>
+          <a:p>
+            <a:pPr lvl="3" marL="981075" indent="-268288">
               <a:spcBef>
                 <a:spcPts val="300"/>
               </a:spcBef>
               <a:spcAft>
                 <a:spcPts val="300"/>
               </a:spcAft>
-              <a:buNone/>
+              <a:buFont typeface="+mj-ea"/>
+              <a:buAutoNum type="circleNumDbPlain" startAt="1"/>
             </a:pPr>
             <a:r>
-              <a:rPr sz="1600" b="0">
-                <a:solidFill>
-                  <a:srgbClr val="000000"/>
-                </a:solidFill>
-                <a:latin typeface="맑은 고딕"/>
-                <a:ea typeface="맑은 고딕"/>
-              </a:rPr>
-              <a:t>실습 2의 </a:t>
-            </a:r>
-            <a:r>
-              <a:rPr sz="1600" b="1">
-                <a:solidFill>
-                  <a:srgbClr val="000000"/>
-                </a:solidFill>
-                <a:latin typeface="맑은 고딕"/>
-                <a:ea typeface="맑은 고딕"/>
-              </a:rPr>
-              <a:t>요구사항 정의서</a:t>
-            </a:r>
-            <a:r>
-              <a:rPr sz="1600" b="0">
-                <a:solidFill>
-                  <a:srgbClr val="000000"/>
-                </a:solidFill>
-                <a:latin typeface="맑은 고딕"/>
-                <a:ea typeface="맑은 고딕"/>
-              </a:rPr>
-              <a:t>와 실습 3의 </a:t>
-            </a:r>
-            <a:r>
-              <a:rPr sz="1600" b="1">
-                <a:solidFill>
-                  <a:srgbClr val="000000"/>
-                </a:solidFill>
-                <a:latin typeface="맑은 고딕"/>
-                <a:ea typeface="맑은 고딕"/>
-              </a:rPr>
-              <a:t>정기배송 도메인 모델</a:t>
+              <a:rPr sz="1000" b="0">
+                <a:solidFill>
+                  <a:srgbClr val="000000"/>
+                </a:solidFill>
+                <a:latin typeface="맑은 고딕"/>
+                <a:ea typeface="맑은 고딕"/>
+              </a:rPr>
+              <a:t>“첨부한 실습 2의 요구사항 정의서와 실습 3의 도메인 모델을 바탕으로 </a:t>
+            </a:r>
+            <a:r>
+              <a:rPr sz="1000" b="1">
+                <a:solidFill>
+                  <a:srgbClr val="000000"/>
+                </a:solidFill>
+                <a:latin typeface="맑은 고딕"/>
+                <a:ea typeface="맑은 고딕"/>
+              </a:rPr>
+              <a:t>기존 쇼핑몰에 정기배송 최초 신청 기능을 추가할 구조</a:t>
+            </a:r>
+            <a:r>
+              <a:rPr sz="1000" b="0">
+                <a:solidFill>
+                  <a:srgbClr val="000000"/>
+                </a:solidFill>
+                <a:latin typeface="맑은 고딕"/>
+                <a:ea typeface="맑은 고딕"/>
+              </a:rPr>
+              <a:t>를 제안해라. 필요한 책임과 기존 기능과의 경계를 간단히 설명하고, 구조를 정하기 위해 내가 결정해야 할 사항은 질문해라. 신청 이후 운영과 구현 코드는 제외해라.”</a:t>
+            </a:r>
+          </a:p>
+          <a:p>
+            <a:pPr lvl="3" marL="981075" indent="-268288">
+              <a:spcBef>
+                <a:spcPts val="300"/>
+              </a:spcBef>
+              <a:spcAft>
+                <a:spcPts val="300"/>
+              </a:spcAft>
+              <a:buFont typeface="+mj-ea"/>
+              <a:buAutoNum type="circleNumDbPlain" startAt="2"/>
+            </a:pPr>
+            <a:r>
+              <a:rPr sz="1000" b="0">
+                <a:solidFill>
+                  <a:srgbClr val="000000"/>
+                </a:solidFill>
+                <a:latin typeface="맑은 고딕"/>
+                <a:ea typeface="맑은 고딕"/>
+              </a:rPr>
+              <a:t>“아래 답과 수정 요청을 반영해라. </a:t>
+            </a:r>
+            <a:r>
+              <a:rPr sz="1000" b="1">
+                <a:solidFill>
+                  <a:srgbClr val="000000"/>
+                </a:solidFill>
+                <a:latin typeface="맑은 고딕"/>
+                <a:ea typeface="맑은 고딕"/>
+              </a:rPr>
+              <a:t>아키텍처 선택과 패키지의 책임·의존 방향</a:t>
+            </a:r>
+            <a:r>
+              <a:rPr sz="1000" b="0">
+                <a:solidFill>
+                  <a:srgbClr val="000000"/>
+                </a:solidFill>
+                <a:latin typeface="맑은 고딕"/>
+                <a:ea typeface="맑은 고딕"/>
+              </a:rPr>
+              <a:t>을 정하고 </a:t>
+            </a:r>
+            <a:r>
+              <a:rPr sz="1000" b="1">
+                <a:solidFill>
+                  <a:srgbClr val="000000"/>
+                </a:solidFill>
+                <a:latin typeface="맑은 고딕"/>
+                <a:ea typeface="맑은 고딕"/>
+              </a:rPr>
+              <a:t>패키지 다이어그램</a:t>
+            </a:r>
+            <a:r>
+              <a:rPr sz="1000" b="0">
+                <a:solidFill>
+                  <a:srgbClr val="000000"/>
+                </a:solidFill>
+                <a:latin typeface="맑은 고딕"/>
+                <a:ea typeface="맑은 고딕"/>
+              </a:rPr>
+              <a:t>을 대화창에 보여줘라. 화살표가 호출 순서인지 코드 의존인지 명확히 하고 불필요한 분리는 피하라.”</a:t>
+            </a:r>
+          </a:p>
+          <a:p>
+            <a:pPr lvl="3" marL="981075" indent="-268288">
+              <a:spcBef>
+                <a:spcPts val="300"/>
+              </a:spcBef>
+              <a:spcAft>
+                <a:spcPts val="300"/>
+              </a:spcAft>
+              <a:buFont typeface="+mj-ea"/>
+              <a:buAutoNum type="circleNumDbPlain" startAt="3"/>
+            </a:pPr>
+            <a:r>
+              <a:rPr sz="1000" b="0">
+                <a:solidFill>
+                  <a:srgbClr val="000000"/>
+                </a:solidFill>
+                <a:latin typeface="맑은 고딕"/>
+                <a:ea typeface="맑은 고딕"/>
+              </a:rPr>
+              <a:t>“아래 답과 수정 요청을 반영해라. 기존 쇼핑몰·결제·저장 기능과 연결할 때 필요한 </a:t>
+            </a:r>
+            <a:r>
+              <a:rPr sz="1000" b="1">
+                <a:solidFill>
+                  <a:srgbClr val="000000"/>
+                </a:solidFill>
+                <a:latin typeface="맑은 고딕"/>
+                <a:ea typeface="맑은 고딕"/>
+              </a:rPr>
+              <a:t>요청·결과와 책임</a:t>
+            </a:r>
+            <a:r>
+              <a:rPr sz="1000" b="0">
+                <a:solidFill>
+                  <a:srgbClr val="000000"/>
+                </a:solidFill>
+                <a:latin typeface="맑은 고딕"/>
+                <a:ea typeface="맑은 고딕"/>
+              </a:rPr>
+              <a:t>을 정리해라. 제공자의 실제 API 정보는 만들지 말고, 업무에 필요한 </a:t>
+            </a:r>
+            <a:r>
+              <a:rPr sz="1000" b="1">
+                <a:solidFill>
+                  <a:srgbClr val="000000"/>
+                </a:solidFill>
+                <a:latin typeface="맑은 고딕"/>
+                <a:ea typeface="맑은 고딕"/>
+              </a:rPr>
+              <a:t>계약</a:t>
+            </a:r>
+            <a:r>
+              <a:rPr sz="1000" b="0">
+                <a:solidFill>
+                  <a:srgbClr val="000000"/>
+                </a:solidFill>
+                <a:latin typeface="맑은 고딕"/>
+                <a:ea typeface="맑은 고딕"/>
+              </a:rPr>
+              <a:t>과 구현 전에 확인할 </a:t>
+            </a:r>
+            <a:r>
+              <a:rPr sz="1000" b="1">
+                <a:solidFill>
+                  <a:srgbClr val="000000"/>
+                </a:solidFill>
+                <a:latin typeface="맑은 고딕"/>
+                <a:ea typeface="맑은 고딕"/>
+              </a:rPr>
+              <a:t>규격</a:t>
+            </a:r>
+            <a:r>
+              <a:rPr sz="1000" b="0">
+                <a:solidFill>
+                  <a:srgbClr val="000000"/>
+                </a:solidFill>
+                <a:latin typeface="맑은 고딕"/>
+                <a:ea typeface="맑은 고딕"/>
+              </a:rPr>
+              <a:t>을 구분해라.”</a:t>
+            </a:r>
+          </a:p>
+          <a:p>
+            <a:pPr lvl="3" marL="981075" indent="-268288">
+              <a:spcBef>
+                <a:spcPts val="300"/>
+              </a:spcBef>
+              <a:spcAft>
+                <a:spcPts val="300"/>
+              </a:spcAft>
+              <a:buFont typeface="+mj-ea"/>
+              <a:buAutoNum type="circleNumDbPlain" startAt="4"/>
+            </a:pPr>
+            <a:r>
+              <a:rPr sz="1000" b="0">
+                <a:solidFill>
+                  <a:srgbClr val="000000"/>
+                </a:solidFill>
+                <a:latin typeface="맑은 고딕"/>
+                <a:ea typeface="맑은 고딕"/>
+              </a:rPr>
+              <a:t>“아래 답과 수정 요청을 반영해라. 요구사항의 대표 수용 기준과 도메인 모델로 </a:t>
+            </a:r>
+            <a:r>
+              <a:rPr sz="1000" b="1">
+                <a:solidFill>
+                  <a:srgbClr val="000000"/>
+                </a:solidFill>
+                <a:latin typeface="맑은 고딕"/>
+                <a:ea typeface="맑은 고딕"/>
+              </a:rPr>
+              <a:t>책임·의존 규칙·연계 계약의 일관성</a:t>
+            </a:r>
+            <a:r>
+              <a:rPr sz="1000" b="0">
+                <a:solidFill>
+                  <a:srgbClr val="000000"/>
+                </a:solidFill>
+                <a:latin typeface="맑은 고딕"/>
+                <a:ea typeface="맑은 고딕"/>
+              </a:rPr>
+              <a:t>을 검토해라. 실제 외부 시스템 없이 업무 결과를 확인할 수 있는지도 설명해라. 바뀐 다이어그램은 다시 보여줘라.”</a:t>
+            </a:r>
+          </a:p>
+          <a:p>
+            <a:pPr lvl="3" marL="981075" indent="-268288">
+              <a:spcBef>
+                <a:spcPts val="300"/>
+              </a:spcBef>
+              <a:spcAft>
+                <a:spcPts val="300"/>
+              </a:spcAft>
+              <a:buFont typeface="+mj-ea"/>
+              <a:buAutoNum type="circleNumDbPlain" startAt="5"/>
+            </a:pPr>
+            <a:r>
+              <a:rPr sz="1000" b="0">
+                <a:solidFill>
+                  <a:srgbClr val="000000"/>
+                </a:solidFill>
+                <a:latin typeface="맑은 고딕"/>
+                <a:ea typeface="맑은 고딕"/>
+              </a:rPr>
+              <a:t>“지금까지 합의한 아키텍처를 다음 실습에 사용할 </a:t>
+            </a:r>
+            <a:r>
+              <a:rPr sz="1000" b="1">
+                <a:solidFill>
+                  <a:srgbClr val="000000"/>
+                </a:solidFill>
+                <a:latin typeface="맑은 고딕"/>
+                <a:ea typeface="맑은 고딕"/>
+              </a:rPr>
+              <a:t>Markdown 파일</a:t>
+            </a:r>
+            <a:r>
+              <a:rPr sz="1000" b="0">
+                <a:solidFill>
+                  <a:srgbClr val="000000"/>
+                </a:solidFill>
+                <a:latin typeface="맑은 고딕"/>
+                <a:ea typeface="맑은 고딕"/>
+              </a:rPr>
+              <a:t>로 생성해라. 수강생이 함께 읽고 실습 5의 투입물로 쓸 </a:t>
+            </a:r>
+            <a:r>
+              <a:rPr sz="1000" b="1">
+                <a:solidFill>
+                  <a:srgbClr val="000000"/>
+                </a:solidFill>
+                <a:latin typeface="맑은 고딕"/>
+                <a:ea typeface="맑은 고딕"/>
+              </a:rPr>
+              <a:t>핵심만</a:t>
+            </a:r>
+            <a:r>
+              <a:rPr sz="1000" b="0">
+                <a:solidFill>
+                  <a:srgbClr val="000000"/>
+                </a:solidFill>
+                <a:latin typeface="맑은 고딕"/>
+                <a:ea typeface="맑은 고딕"/>
+              </a:rPr>
+              <a:t> 담고 </a:t>
+            </a:r>
+            <a:r>
+              <a:rPr sz="1000" b="1">
+                <a:solidFill>
+                  <a:srgbClr val="000000"/>
+                </a:solidFill>
+                <a:latin typeface="맑은 고딕"/>
+                <a:ea typeface="맑은 고딕"/>
+              </a:rPr>
+              <a:t>슬라이드 다섯 장 안</a:t>
+            </a:r>
+            <a:r>
+              <a:rPr sz="1000" b="0">
+                <a:solidFill>
+                  <a:srgbClr val="000000"/>
+                </a:solidFill>
+                <a:latin typeface="맑은 고딕"/>
+                <a:ea typeface="맑은 고딕"/>
+              </a:rPr>
+              <a:t>에 들어가게 줄여라. 아키텍처 선택과 이유, 패키지와 책임, </a:t>
+            </a:r>
+            <a:r>
+              <a:rPr sz="1000" b="1">
+                <a:solidFill>
+                  <a:srgbClr val="000000"/>
+                </a:solidFill>
+                <a:latin typeface="맑은 고딕"/>
+                <a:ea typeface="맑은 고딕"/>
+              </a:rPr>
+              <a:t>허용·금지 의존 규칙</a:t>
+            </a:r>
+            <a:r>
+              <a:rPr sz="1000" b="0">
+                <a:solidFill>
+                  <a:srgbClr val="000000"/>
+                </a:solidFill>
+                <a:latin typeface="맑은 고딕"/>
+                <a:ea typeface="맑은 고딕"/>
+              </a:rPr>
+              <a:t>, 세 연계 계약의 목적과 담당 경계, 실제 외부 시스템 없이 확인하는 </a:t>
+            </a:r>
+            <a:r>
+              <a:rPr sz="1000" b="1">
+                <a:solidFill>
+                  <a:srgbClr val="000000"/>
+                </a:solidFill>
+                <a:latin typeface="맑은 고딕"/>
+                <a:ea typeface="맑은 고딕"/>
+              </a:rPr>
+              <a:t>검증 방향</a:t>
+            </a:r>
+            <a:r>
+              <a:rPr sz="1000" b="0">
+                <a:solidFill>
+                  <a:srgbClr val="000000"/>
+                </a:solidFill>
+                <a:latin typeface="맑은 고딕"/>
+                <a:ea typeface="맑은 고딕"/>
+              </a:rPr>
+              <a:t>을 포함해라. 패키지 다이어그램은 대화창에서 본 최종본을 Mermaid 원본 그대로 하나만 넣어라. 앞 산출물의 업무 규칙·날짜·금액 조건은 반복하지 말고 참조해라. 남은 미결 사항은 제목과 한 줄 이유로 모아라.”</a:t>
             </a:r>
           </a:p>
           <a:p>
@@ -11643,35 +12032,326 @@
               <a:buChar char=""/>
             </a:pPr>
             <a:r>
-              <a:rPr sz="1600" b="1">
-                <a:solidFill>
-                  <a:srgbClr val="000000"/>
-                </a:solidFill>
-                <a:latin typeface="맑은 고딕"/>
-                <a:ea typeface="맑은 고딕"/>
-              </a:rPr>
-              <a:t>프롬프트</a:t>
-            </a:r>
-          </a:p>
-          <a:p>
-            <a:pPr lvl="2" marL="342900" indent="0">
+              <a:rPr sz="1200" b="1">
+                <a:solidFill>
+                  <a:srgbClr val="000000"/>
+                </a:solidFill>
+                <a:latin typeface="맑은 고딕"/>
+                <a:ea typeface="맑은 고딕"/>
+              </a:rPr>
+              <a:t>점검 항목</a:t>
+            </a:r>
+          </a:p>
+          <a:p>
+            <a:pPr lvl="3" marL="1028700" indent="-304800">
               <a:spcBef>
                 <a:spcPts val="300"/>
               </a:spcBef>
               <a:spcAft>
                 <a:spcPts val="300"/>
               </a:spcAft>
-              <a:buNone/>
+              <a:buFont typeface="+mj-lt"/>
+              <a:buAutoNum type="arabicPeriod" startAt="1"/>
             </a:pPr>
             <a:r>
-              <a:rPr sz="1600" b="0">
-                <a:solidFill>
-                  <a:srgbClr val="000000"/>
-                </a:solidFill>
-                <a:latin typeface="맑은 고딕"/>
-                <a:ea typeface="맑은 고딕"/>
-              </a:rPr>
-              <a:t>“정기배송 신청의 업무·연동·영속 경계를 나누고 의존 규칙과 외부 연동 규격을 작성하라. 화살표의 뜻을 밝히고 제공되지 않은 외부 API 정보는 확인 질문으로 남겨라.”</a:t>
+              <a:rPr sz="1000" b="0">
+                <a:solidFill>
+                  <a:srgbClr val="000000"/>
+                </a:solidFill>
+                <a:latin typeface="맑은 고딕"/>
+                <a:ea typeface="맑은 고딕"/>
+              </a:rPr>
+              <a:t/>
+            </a:r>
+            <a:r>
+              <a:rPr sz="1000" b="1">
+                <a:solidFill>
+                  <a:srgbClr val="000000"/>
+                </a:solidFill>
+                <a:latin typeface="맑은 고딕"/>
+                <a:ea typeface="맑은 고딕"/>
+              </a:rPr>
+              <a:t>경계</a:t>
+            </a:r>
+            <a:r>
+              <a:rPr sz="1000" b="0">
+                <a:solidFill>
+                  <a:srgbClr val="000000"/>
+                </a:solidFill>
+                <a:latin typeface="맑은 고딕"/>
+                <a:ea typeface="맑은 고딕"/>
+              </a:rPr>
+              <a:t> —</a:t>
+            </a:r>
+            <a:r>
+              <a:rPr sz="800" b="0">
+                <a:solidFill>
+                  <a:srgbClr val="000000"/>
+                </a:solidFill>
+                <a:latin typeface="맑은 고딕"/>
+                <a:ea typeface="맑은 고딕"/>
+              </a:rPr>
+              <a:t> 기존 쇼핑몰 기능을 다시 만들지 않고 연계 대상으로만 두었는가?</a:t>
+            </a:r>
+          </a:p>
+          <a:p>
+            <a:pPr lvl="3" marL="1028700" indent="-304800">
+              <a:spcBef>
+                <a:spcPts val="300"/>
+              </a:spcBef>
+              <a:spcAft>
+                <a:spcPts val="300"/>
+              </a:spcAft>
+              <a:buFont typeface="+mj-lt"/>
+              <a:buAutoNum type="arabicPeriod" startAt="2"/>
+            </a:pPr>
+            <a:r>
+              <a:rPr sz="1000" b="0">
+                <a:solidFill>
+                  <a:srgbClr val="000000"/>
+                </a:solidFill>
+                <a:latin typeface="맑은 고딕"/>
+                <a:ea typeface="맑은 고딕"/>
+              </a:rPr>
+              <a:t/>
+            </a:r>
+            <a:r>
+              <a:rPr sz="1000" b="1">
+                <a:solidFill>
+                  <a:srgbClr val="000000"/>
+                </a:solidFill>
+                <a:latin typeface="맑은 고딕"/>
+                <a:ea typeface="맑은 고딕"/>
+              </a:rPr>
+              <a:t>의존</a:t>
+            </a:r>
+            <a:r>
+              <a:rPr sz="1000" b="0">
+                <a:solidFill>
+                  <a:srgbClr val="000000"/>
+                </a:solidFill>
+                <a:latin typeface="맑은 고딕"/>
+                <a:ea typeface="맑은 고딕"/>
+              </a:rPr>
+              <a:t> —</a:t>
+            </a:r>
+            <a:r>
+              <a:rPr sz="800" b="0">
+                <a:solidFill>
+                  <a:srgbClr val="000000"/>
+                </a:solidFill>
+                <a:latin typeface="맑은 고딕"/>
+                <a:ea typeface="맑은 고딕"/>
+              </a:rPr>
+              <a:t> 업무가 저장·연계 구현을 직접 알지 않으며, 화살표의 뜻이 코드 의존으로 분명한가?</a:t>
+            </a:r>
+          </a:p>
+          <a:p>
+            <a:pPr lvl="3" marL="1028700" indent="-304800">
+              <a:spcBef>
+                <a:spcPts val="300"/>
+              </a:spcBef>
+              <a:spcAft>
+                <a:spcPts val="300"/>
+              </a:spcAft>
+              <a:buFont typeface="+mj-lt"/>
+              <a:buAutoNum type="arabicPeriod" startAt="3"/>
+            </a:pPr>
+            <a:r>
+              <a:rPr sz="1000" b="0">
+                <a:solidFill>
+                  <a:srgbClr val="000000"/>
+                </a:solidFill>
+                <a:latin typeface="맑은 고딕"/>
+                <a:ea typeface="맑은 고딕"/>
+              </a:rPr>
+              <a:t/>
+            </a:r>
+            <a:r>
+              <a:rPr sz="1000" b="1">
+                <a:solidFill>
+                  <a:srgbClr val="000000"/>
+                </a:solidFill>
+                <a:latin typeface="맑은 고딕"/>
+                <a:ea typeface="맑은 고딕"/>
+              </a:rPr>
+              <a:t>계약</a:t>
+            </a:r>
+            <a:r>
+              <a:rPr sz="1000" b="0">
+                <a:solidFill>
+                  <a:srgbClr val="000000"/>
+                </a:solidFill>
+                <a:latin typeface="맑은 고딕"/>
+                <a:ea typeface="맑은 고딕"/>
+              </a:rPr>
+              <a:t> —</a:t>
+            </a:r>
+            <a:r>
+              <a:rPr sz="800" b="0">
+                <a:solidFill>
+                  <a:srgbClr val="000000"/>
+                </a:solidFill>
+                <a:latin typeface="맑은 고딕"/>
+                <a:ea typeface="맑은 고딕"/>
+              </a:rPr>
+              <a:t> 연계마다 요청·결과와 담당 경계가 업무 용어로 설명되는가?</a:t>
+            </a:r>
+          </a:p>
+          <a:p>
+            <a:pPr lvl="3" marL="1028700" indent="-304800">
+              <a:spcBef>
+                <a:spcPts val="300"/>
+              </a:spcBef>
+              <a:spcAft>
+                <a:spcPts val="300"/>
+              </a:spcAft>
+              <a:buFont typeface="+mj-lt"/>
+              <a:buAutoNum type="arabicPeriod" startAt="4"/>
+            </a:pPr>
+            <a:r>
+              <a:rPr sz="1000" b="0">
+                <a:solidFill>
+                  <a:srgbClr val="000000"/>
+                </a:solidFill>
+                <a:latin typeface="맑은 고딕"/>
+                <a:ea typeface="맑은 고딕"/>
+              </a:rPr>
+              <a:t/>
+            </a:r>
+            <a:r>
+              <a:rPr sz="1000" b="1">
+                <a:solidFill>
+                  <a:srgbClr val="000000"/>
+                </a:solidFill>
+                <a:latin typeface="맑은 고딕"/>
+                <a:ea typeface="맑은 고딕"/>
+              </a:rPr>
+              <a:t>추측</a:t>
+            </a:r>
+            <a:r>
+              <a:rPr sz="1000" b="0">
+                <a:solidFill>
+                  <a:srgbClr val="000000"/>
+                </a:solidFill>
+                <a:latin typeface="맑은 고딕"/>
+                <a:ea typeface="맑은 고딕"/>
+              </a:rPr>
+              <a:t> —</a:t>
+            </a:r>
+            <a:r>
+              <a:rPr sz="800" b="0">
+                <a:solidFill>
+                  <a:srgbClr val="000000"/>
+                </a:solidFill>
+                <a:latin typeface="맑은 고딕"/>
+                <a:ea typeface="맑은 고딕"/>
+              </a:rPr>
+              <a:t> 제공되지 않은 API 주소·인증·기존 내부 구조를 지어내지 않았는가?</a:t>
+            </a:r>
+          </a:p>
+          <a:p>
+            <a:pPr lvl="3" marL="1028700" indent="-304800">
+              <a:spcBef>
+                <a:spcPts val="300"/>
+              </a:spcBef>
+              <a:spcAft>
+                <a:spcPts val="300"/>
+              </a:spcAft>
+              <a:buFont typeface="+mj-lt"/>
+              <a:buAutoNum type="arabicPeriod" startAt="5"/>
+            </a:pPr>
+            <a:r>
+              <a:rPr sz="1000" b="0">
+                <a:solidFill>
+                  <a:srgbClr val="000000"/>
+                </a:solidFill>
+                <a:latin typeface="맑은 고딕"/>
+                <a:ea typeface="맑은 고딕"/>
+              </a:rPr>
+              <a:t/>
+            </a:r>
+            <a:r>
+              <a:rPr sz="1000" b="1">
+                <a:solidFill>
+                  <a:srgbClr val="000000"/>
+                </a:solidFill>
+                <a:latin typeface="맑은 고딕"/>
+                <a:ea typeface="맑은 고딕"/>
+              </a:rPr>
+              <a:t>검증</a:t>
+            </a:r>
+            <a:r>
+              <a:rPr sz="1000" b="0">
+                <a:solidFill>
+                  <a:srgbClr val="000000"/>
+                </a:solidFill>
+                <a:latin typeface="맑은 고딕"/>
+                <a:ea typeface="맑은 고딕"/>
+              </a:rPr>
+              <a:t> —</a:t>
+            </a:r>
+            <a:r>
+              <a:rPr sz="800" b="0">
+                <a:solidFill>
+                  <a:srgbClr val="000000"/>
+                </a:solidFill>
+                <a:latin typeface="맑은 고딕"/>
+                <a:ea typeface="맑은 고딕"/>
+              </a:rPr>
+              <a:t> 실제 외부 호출 없이 대표 수용 기준을 확인할 방법이 있는가?</a:t>
+            </a:r>
+          </a:p>
+          <a:p>
+            <a:pPr lvl="3" marL="1028700" indent="-304800">
+              <a:spcBef>
+                <a:spcPts val="300"/>
+              </a:spcBef>
+              <a:spcAft>
+                <a:spcPts val="300"/>
+              </a:spcAft>
+              <a:buFont typeface="+mj-lt"/>
+              <a:buAutoNum type="arabicPeriod" startAt="6"/>
+            </a:pPr>
+            <a:r>
+              <a:rPr sz="1000" b="0">
+                <a:solidFill>
+                  <a:srgbClr val="000000"/>
+                </a:solidFill>
+                <a:latin typeface="맑은 고딕"/>
+                <a:ea typeface="맑은 고딕"/>
+              </a:rPr>
+              <a:t/>
+            </a:r>
+            <a:r>
+              <a:rPr sz="1000" b="1">
+                <a:solidFill>
+                  <a:srgbClr val="000000"/>
+                </a:solidFill>
+                <a:latin typeface="맑은 고딕"/>
+                <a:ea typeface="맑은 고딕"/>
+              </a:rPr>
+              <a:t>범위</a:t>
+            </a:r>
+            <a:r>
+              <a:rPr sz="1000" b="0">
+                <a:solidFill>
+                  <a:srgbClr val="000000"/>
+                </a:solidFill>
+                <a:latin typeface="맑은 고딕"/>
+                <a:ea typeface="맑은 고딕"/>
+              </a:rPr>
+              <a:t> —</a:t>
+            </a:r>
+            <a:r>
+              <a:rPr sz="800" b="0">
+                <a:solidFill>
+                  <a:srgbClr val="000000"/>
+                </a:solidFill>
+                <a:latin typeface="맑은 고딕"/>
+                <a:ea typeface="맑은 고딕"/>
+              </a:rPr>
+              <a:t> 신청 이후 운영·구현 코드·성능 보장을 더하지 않았는가?</a:t>
             </a:r>
           </a:p>
           <a:p>
@@ -11687,18 +12367,18 @@
               <a:buChar char=""/>
             </a:pPr>
             <a:r>
-              <a:rPr sz="1600" b="1">
-                <a:solidFill>
-                  <a:srgbClr val="000000"/>
-                </a:solidFill>
-                <a:latin typeface="맑은 고딕"/>
-                <a:ea typeface="맑은 고딕"/>
-              </a:rPr>
-              <a:t>점검 항목</a:t>
-            </a:r>
-          </a:p>
-          <a:p>
-            <a:pPr lvl="2" marL="607060" indent="-251460">
+              <a:rPr sz="1200" b="1">
+                <a:solidFill>
+                  <a:srgbClr val="000000"/>
+                </a:solidFill>
+                <a:latin typeface="맑은 고딕"/>
+                <a:ea typeface="맑은 고딕"/>
+              </a:rPr>
+              <a:t>결과물</a:t>
+            </a:r>
+          </a:p>
+          <a:p>
+            <a:pPr lvl="3" marL="723900" indent="0">
               <a:spcBef>
                 <a:spcPts val="300"/>
               </a:spcBef>
@@ -11708,353 +12388,24 @@
               <a:buNone/>
             </a:pPr>
             <a:r>
-              <a:rPr sz="1600" b="0">
-                <a:solidFill>
-                  <a:srgbClr val="000000"/>
-                </a:solidFill>
-                <a:latin typeface="맑은 고딕"/>
-                <a:ea typeface="맑은 고딕"/>
-              </a:rPr>
-              <a:t>1. </a:t>
-            </a:r>
-            <a:r>
-              <a:rPr sz="1600" b="1">
-                <a:solidFill>
-                  <a:srgbClr val="000000"/>
-                </a:solidFill>
-                <a:latin typeface="맑은 고딕"/>
-                <a:ea typeface="맑은 고딕"/>
-              </a:rPr>
-              <a:t>책임</a:t>
-            </a:r>
-            <a:r>
-              <a:rPr sz="1600" b="0">
-                <a:solidFill>
-                  <a:srgbClr val="000000"/>
-                </a:solidFill>
-                <a:latin typeface="맑은 고딕"/>
-                <a:ea typeface="맑은 고딕"/>
-              </a:rPr>
-              <a:t> —</a:t>
-            </a:r>
-            <a:r>
-              <a:rPr sz="1400" b="0">
-                <a:solidFill>
-                  <a:srgbClr val="000000"/>
-                </a:solidFill>
-                <a:latin typeface="맑은 고딕"/>
-                <a:ea typeface="맑은 고딕"/>
-              </a:rPr>
-              <a:t> 경계를 나눈 이유가 업무와 외부 기술의 변경에서 설명되는가?</a:t>
-            </a:r>
-          </a:p>
-          <a:p>
-            <a:pPr lvl="2" marL="607060" indent="-251460">
-              <a:spcBef>
-                <a:spcPts val="300"/>
-              </a:spcBef>
-              <a:spcAft>
-                <a:spcPts val="300"/>
-              </a:spcAft>
-              <a:buNone/>
-            </a:pPr>
-            <a:r>
-              <a:rPr sz="1600" b="0">
-                <a:solidFill>
-                  <a:srgbClr val="000000"/>
-                </a:solidFill>
-                <a:latin typeface="맑은 고딕"/>
-                <a:ea typeface="맑은 고딕"/>
-              </a:rPr>
-              <a:t>2. </a:t>
-            </a:r>
-            <a:r>
-              <a:rPr sz="1600" b="1">
-                <a:solidFill>
-                  <a:srgbClr val="000000"/>
-                </a:solidFill>
-                <a:latin typeface="맑은 고딕"/>
-                <a:ea typeface="맑은 고딕"/>
-              </a:rPr>
-              <a:t>의존</a:t>
-            </a:r>
-            <a:r>
-              <a:rPr sz="1600" b="0">
-                <a:solidFill>
-                  <a:srgbClr val="000000"/>
-                </a:solidFill>
-                <a:latin typeface="맑은 고딕"/>
-                <a:ea typeface="맑은 고딕"/>
-              </a:rPr>
-              <a:t> —</a:t>
-            </a:r>
-            <a:r>
-              <a:rPr sz="1400" b="0">
-                <a:solidFill>
-                  <a:srgbClr val="000000"/>
-                </a:solidFill>
-                <a:latin typeface="맑은 고딕"/>
-                <a:ea typeface="맑은 고딕"/>
-              </a:rPr>
-              <a:t> 업무가 연동·영속 구현을 직접 알고 있지 않은가?</a:t>
-            </a:r>
-          </a:p>
-          <a:p>
-            <a:pPr lvl="2" marL="607060" indent="-251460">
-              <a:spcBef>
-                <a:spcPts val="300"/>
-              </a:spcBef>
-              <a:spcAft>
-                <a:spcPts val="300"/>
-              </a:spcAft>
-              <a:buNone/>
-            </a:pPr>
-            <a:r>
-              <a:rPr sz="1600" b="0">
-                <a:solidFill>
-                  <a:srgbClr val="000000"/>
-                </a:solidFill>
-                <a:latin typeface="맑은 고딕"/>
-                <a:ea typeface="맑은 고딕"/>
-              </a:rPr>
-              <a:t>3. </a:t>
-            </a:r>
-            <a:r>
-              <a:rPr sz="1600" b="1">
-                <a:solidFill>
-                  <a:srgbClr val="000000"/>
-                </a:solidFill>
-                <a:latin typeface="맑은 고딕"/>
-                <a:ea typeface="맑은 고딕"/>
-              </a:rPr>
-              <a:t>순환</a:t>
-            </a:r>
-            <a:r>
-              <a:rPr sz="1600" b="0">
-                <a:solidFill>
-                  <a:srgbClr val="000000"/>
-                </a:solidFill>
-                <a:latin typeface="맑은 고딕"/>
-                <a:ea typeface="맑은 고딕"/>
-              </a:rPr>
-              <a:t> —</a:t>
-            </a:r>
-            <a:r>
-              <a:rPr sz="1400" b="0">
-                <a:solidFill>
-                  <a:srgbClr val="000000"/>
-                </a:solidFill>
-                <a:latin typeface="맑은 고딕"/>
-                <a:ea typeface="맑은 고딕"/>
-              </a:rPr>
-              <a:t> 패키지를 따라가면 출발점으로 돌아오는 의존이 없는가?</a:t>
-            </a:r>
-          </a:p>
-          <a:p>
-            <a:pPr lvl="2" marL="607060" indent="-251460">
-              <a:spcBef>
-                <a:spcPts val="300"/>
-              </a:spcBef>
-              <a:spcAft>
-                <a:spcPts val="300"/>
-              </a:spcAft>
-              <a:buNone/>
-            </a:pPr>
-            <a:r>
-              <a:rPr sz="1600" b="0">
-                <a:solidFill>
-                  <a:srgbClr val="000000"/>
-                </a:solidFill>
-                <a:latin typeface="맑은 고딕"/>
-                <a:ea typeface="맑은 고딕"/>
-              </a:rPr>
-              <a:t>4. </a:t>
-            </a:r>
-            <a:r>
-              <a:rPr sz="1600" b="1">
-                <a:solidFill>
-                  <a:srgbClr val="000000"/>
-                </a:solidFill>
-                <a:latin typeface="맑은 고딕"/>
-                <a:ea typeface="맑은 고딕"/>
-              </a:rPr>
-              <a:t>연동</a:t>
-            </a:r>
-            <a:r>
-              <a:rPr sz="1600" b="0">
-                <a:solidFill>
-                  <a:srgbClr val="000000"/>
-                </a:solidFill>
-                <a:latin typeface="맑은 고딕"/>
-                <a:ea typeface="맑은 고딕"/>
-              </a:rPr>
-              <a:t> —</a:t>
-            </a:r>
-            <a:r>
-              <a:rPr sz="1400" b="0">
-                <a:solidFill>
-                  <a:srgbClr val="000000"/>
-                </a:solidFill>
-                <a:latin typeface="맑은 고딕"/>
-                <a:ea typeface="맑은 고딕"/>
-              </a:rPr>
-              <a:t> 상품·결제·배송의 요청과 결과를 업무 용어로 설명하는가?</a:t>
-            </a:r>
-          </a:p>
-          <a:p>
-            <a:pPr lvl="2" marL="607060" indent="-251460">
-              <a:spcBef>
-                <a:spcPts val="300"/>
-              </a:spcBef>
-              <a:spcAft>
-                <a:spcPts val="300"/>
-              </a:spcAft>
-              <a:buNone/>
-            </a:pPr>
-            <a:r>
-              <a:rPr sz="1600" b="0">
-                <a:solidFill>
-                  <a:srgbClr val="000000"/>
-                </a:solidFill>
-                <a:latin typeface="맑은 고딕"/>
-                <a:ea typeface="맑은 고딕"/>
-              </a:rPr>
-              <a:t>5. </a:t>
-            </a:r>
-            <a:r>
-              <a:rPr sz="1600" b="1">
-                <a:solidFill>
-                  <a:srgbClr val="000000"/>
-                </a:solidFill>
-                <a:latin typeface="맑은 고딕"/>
-                <a:ea typeface="맑은 고딕"/>
-              </a:rPr>
-              <a:t>추측</a:t>
-            </a:r>
-            <a:r>
-              <a:rPr sz="1600" b="0">
-                <a:solidFill>
-                  <a:srgbClr val="000000"/>
-                </a:solidFill>
-                <a:latin typeface="맑은 고딕"/>
-                <a:ea typeface="맑은 고딕"/>
-              </a:rPr>
-              <a:t> —</a:t>
-            </a:r>
-            <a:r>
-              <a:rPr sz="1400" b="0">
-                <a:solidFill>
-                  <a:srgbClr val="000000"/>
-                </a:solidFill>
-                <a:latin typeface="맑은 고딕"/>
-                <a:ea typeface="맑은 고딕"/>
-              </a:rPr>
-              <a:t> 제공되지 않은 API 주소·인증·실패 정책을 만들지 않았는가?</a:t>
-            </a:r>
-          </a:p>
-          <a:p>
-            <a:pPr lvl="2" marL="607060" indent="-251460">
-              <a:spcBef>
-                <a:spcPts val="300"/>
-              </a:spcBef>
-              <a:spcAft>
-                <a:spcPts val="300"/>
-              </a:spcAft>
-              <a:buNone/>
-            </a:pPr>
-            <a:r>
-              <a:rPr sz="1600" b="0">
-                <a:solidFill>
-                  <a:srgbClr val="000000"/>
-                </a:solidFill>
-                <a:latin typeface="맑은 고딕"/>
-                <a:ea typeface="맑은 고딕"/>
-              </a:rPr>
-              <a:t>6. </a:t>
-            </a:r>
-            <a:r>
-              <a:rPr sz="1600" b="1">
-                <a:solidFill>
-                  <a:srgbClr val="000000"/>
-                </a:solidFill>
-                <a:latin typeface="맑은 고딕"/>
-                <a:ea typeface="맑은 고딕"/>
-              </a:rPr>
-              <a:t>검증</a:t>
-            </a:r>
-            <a:r>
-              <a:rPr sz="1600" b="0">
-                <a:solidFill>
-                  <a:srgbClr val="000000"/>
-                </a:solidFill>
-                <a:latin typeface="맑은 고딕"/>
-                <a:ea typeface="맑은 고딕"/>
-              </a:rPr>
-              <a:t> —</a:t>
-            </a:r>
-            <a:r>
-              <a:rPr sz="1400" b="0">
-                <a:solidFill>
-                  <a:srgbClr val="000000"/>
-                </a:solidFill>
-                <a:latin typeface="맑은 고딕"/>
-                <a:ea typeface="맑은 고딕"/>
-              </a:rPr>
-              <a:t> 실제 외부 시스템 없이 승인·거절과 회차 생성을 검사할 수 있는가?</a:t>
-            </a:r>
-          </a:p>
-          <a:p>
-            <a:pPr lvl="2" marL="723900" indent="-368300">
-              <a:spcBef>
-                <a:spcPts val="300"/>
-              </a:spcBef>
-              <a:spcAft>
-                <a:spcPts val="300"/>
-              </a:spcAft>
-              <a:buSzPct val="90000"/>
-              <a:buFont typeface="Wingdings" pitchFamily="2" charset="2"/>
-              <a:buChar char=""/>
-            </a:pPr>
-            <a:r>
-              <a:rPr sz="1600" b="1">
-                <a:solidFill>
-                  <a:srgbClr val="000000"/>
-                </a:solidFill>
-                <a:latin typeface="맑은 고딕"/>
-                <a:ea typeface="맑은 고딕"/>
-              </a:rPr>
-              <a:t>결과물</a:t>
-            </a:r>
-          </a:p>
-          <a:p>
-            <a:pPr lvl="2" marL="342900" indent="0">
-              <a:spcBef>
-                <a:spcPts val="300"/>
-              </a:spcBef>
-              <a:spcAft>
-                <a:spcPts val="300"/>
-              </a:spcAft>
-              <a:buNone/>
-            </a:pPr>
-            <a:r>
-              <a:rPr sz="1600" b="1">
-                <a:solidFill>
-                  <a:srgbClr val="000000"/>
-                </a:solidFill>
-                <a:latin typeface="맑은 고딕"/>
-                <a:ea typeface="맑은 고딕"/>
-              </a:rPr>
-              <a:t>패키지 경계·의존 규칙·외부 연동 규격</a:t>
-            </a:r>
-            <a:r>
-              <a:rPr sz="1600" b="0">
-                <a:solidFill>
-                  <a:srgbClr val="000000"/>
-                </a:solidFill>
-                <a:latin typeface="맑은 고딕"/>
-                <a:ea typeface="맑은 고딕"/>
-              </a:rPr>
-              <a:t>. 실습 5의 작업 명세와 이후 맥락 구성에 쓴다.</a:t>
+              <a:rPr sz="1000" b="1">
+                <a:solidFill>
+                  <a:srgbClr val="000000"/>
+                </a:solidFill>
+                <a:latin typeface="맑은 고딕"/>
+                <a:ea typeface="맑은 고딕"/>
+              </a:rPr>
+              <a:t>아키텍처 선택과 이유·패키지 다이어그램 원본·의존 규칙·연계 계약을 담은 최종 MD 파일</a:t>
+            </a:r>
+            <a:r>
+              <a:rPr sz="1000" b="0">
+                <a:solidFill>
+                  <a:srgbClr val="000000"/>
+                </a:solidFill>
+                <a:latin typeface="맑은 고딕"/>
+                <a:ea typeface="맑은 고딕"/>
+              </a:rPr>
+              <a:t>. 마지막 합의를 확인하고 실습 5에 첨부한다.</a:t>
             </a:r>
           </a:p>
         </p:txBody>
@@ -12527,7 +12878,7 @@
         <p:cNvPr id="1" name="">
           <a:extLst>
             <a:ext uri="{FF2B5EF4-FFF2-40B4-BE49-F238E27FC236}">
-              <a16:creationId xmlns:a16="http://schemas.microsoft.com/office/drawing/2014/main" id="{8E4F1F13-426B-086B-7D8C-9A58A0F879DB}"/>
+              <a16:creationId xmlns:a16="http://schemas.microsoft.com/office/drawing/2014/main" id="{60B87152-D004-1569-E429-90A42420A65C}"/>
             </a:ext>
           </a:extLst>
         </p:cNvPr>
@@ -12547,7 +12898,7 @@
           <p:cNvPr id="2" name="제목 1">
             <a:extLst>
               <a:ext uri="{FF2B5EF4-FFF2-40B4-BE49-F238E27FC236}">
-                <a16:creationId xmlns:a16="http://schemas.microsoft.com/office/drawing/2014/main" id="{AA26A92D-924E-0575-9551-F8FD7BFD3FAD}"/>
+                <a16:creationId xmlns:a16="http://schemas.microsoft.com/office/drawing/2014/main" id="{F2E2AB02-3ADE-69B8-887E-7981AD15EF24}"/>
               </a:ext>
             </a:extLst>
           </p:cNvPr>
@@ -12571,17 +12922,7 @@
                 <a:latin typeface="맑은 고딕"/>
                 <a:ea typeface="맑은 고딕"/>
               </a:rPr>
-              <a:t>패키지 경계 </a:t>
-            </a:r>
-            <a:r>
-              <a:rPr sz="1800" b="1">
-                <a:solidFill>
-                  <a:srgbClr val="000000"/>
-                </a:solidFill>
-                <a:latin typeface="맑은 고딕"/>
-                <a:ea typeface="맑은 고딕"/>
-              </a:rPr>
-              <a:t>(안)</a:t>
+              <a:t>정기배송 최초 신청 아키텍처</a:t>
             </a:r>
           </a:p>
           <a:p>
@@ -12594,41 +12935,6 @@
                 <a:ea typeface="맑은 고딕"/>
               </a:rPr>
               <a:t>별첨. 실습 답</a:t>
-            </a:r>
-          </a:p>
-        </p:txBody>
-      </p:sp>
-      <p:sp>
-        <p:nvSpPr>
-          <p:cNvPr id="3" name="슬라이드 번호 개체 틀 2">
-            <a:extLst>
-              <a:ext uri="{FF2B5EF4-FFF2-40B4-BE49-F238E27FC236}">
-                <a16:creationId xmlns:a16="http://schemas.microsoft.com/office/drawing/2014/main" id="{12CF30EE-4DFD-8063-56B8-B8689E76DFCA}"/>
-              </a:ext>
-            </a:extLst>
-          </p:cNvPr>
-          <p:cNvSpPr>
-            <a:spLocks noGrp="1"/>
-          </p:cNvSpPr>
-          <p:nvPr>
-            <p:ph type="sldNum" sz="quarter" idx="10"/>
-          </p:nvPr>
-        </p:nvSpPr>
-        <p:spPr/>
-        <p:txBody>
-          <a:bodyPr/>
-          <a:lstStyle/>
-          <a:p>
-            <a:pPr>
-              <a:defRPr/>
-            </a:pPr>
-            <a:r>
-              <a:rPr lang="en-US" altLang="ko-KR">
-                <a:solidFill>
-                  <a:prstClr val="black"/>
-                </a:solidFill>
-              </a:rPr>
-              <a:t>- 19 -</a:t>
             </a:r>
           </a:p>
         </p:txBody>
@@ -12638,7 +12944,7 @@
           <p:cNvPr id="5" name="텍스트 개체 틀 4">
             <a:extLst>
               <a:ext uri="{FF2B5EF4-FFF2-40B4-BE49-F238E27FC236}">
-                <a16:creationId xmlns:a16="http://schemas.microsoft.com/office/drawing/2014/main" id="{D66274C8-E16F-5AEB-614B-D8D32DA3E8C6}"/>
+                <a16:creationId xmlns:a16="http://schemas.microsoft.com/office/drawing/2014/main" id="{F0895985-68EF-30BA-2165-4B3D90ECD41C}"/>
               </a:ext>
             </a:extLst>
           </p:cNvPr>
@@ -12666,7 +12972,7 @@
           <p:cNvPr id="6" name="텍스트 개체 틀 5">
             <a:extLst>
               <a:ext uri="{FF2B5EF4-FFF2-40B4-BE49-F238E27FC236}">
-                <a16:creationId xmlns:a16="http://schemas.microsoft.com/office/drawing/2014/main" id="{A24E58E1-194B-A320-AEEE-24D08685BB67}"/>
+                <a16:creationId xmlns:a16="http://schemas.microsoft.com/office/drawing/2014/main" id="{D985C1FD-84C4-10F9-372D-6A84E1680E07}"/>
               </a:ext>
             </a:extLst>
           </p:cNvPr>
@@ -12691,7 +12997,7 @@
           <p:cNvPr id="7" name="텍스트 개체 틀 6">
             <a:extLst>
               <a:ext uri="{FF2B5EF4-FFF2-40B4-BE49-F238E27FC236}">
-                <a16:creationId xmlns:a16="http://schemas.microsoft.com/office/drawing/2014/main" id="{A219F420-613B-6234-45F6-0955A9A4505F}"/>
+                <a16:creationId xmlns:a16="http://schemas.microsoft.com/office/drawing/2014/main" id="{E26A8878-48FF-5E3A-5D05-0F900C22011B}"/>
               </a:ext>
             </a:extLst>
           </p:cNvPr>
@@ -12707,126 +13013,926 @@
           <a:bodyPr/>
           <a:lstStyle/>
           <a:p>
-            <a:endParaRPr kumimoji="1" lang="en-US" altLang="ko-KR" dirty="0"/>
+            <a:endParaRPr lang="en-US" altLang="ko-KR" dirty="0"/>
           </a:p>
         </p:txBody>
       </p:sp>
-      <p:sp>
-        <p:nvSpPr>
-          <p:cNvPr id="8" name="내용 개체 틀 7">
+      <p:graphicFrame>
+        <p:nvGraphicFramePr>
+          <p:cNvPr id="11" name="표 10">
             <a:extLst>
               <a:ext uri="{FF2B5EF4-FFF2-40B4-BE49-F238E27FC236}">
-                <a16:creationId xmlns:a16="http://schemas.microsoft.com/office/drawing/2014/main" id="{BEBA2C4A-B0BF-F2E4-EA6E-614C99CBA184}"/>
+                <a16:creationId xmlns:a16="http://schemas.microsoft.com/office/drawing/2014/main" id="{93753AB9-526C-CE2D-446D-7615D9B6D6D2}"/>
               </a:ext>
             </a:extLst>
           </p:cNvPr>
-          <p:cNvSpPr>
-            <a:spLocks noGrp="1"/>
-          </p:cNvSpPr>
+          <p:cNvGraphicFramePr>
+            <a:graphicFrameLocks noGrp="1"/>
+          </p:cNvGraphicFramePr>
           <p:nvPr>
-            <p:ph idx="1"/>
+            <p:extLst>
+              <p:ext uri="{D42A27DB-BD31-4B8C-83A1-F6EECF244321}">
+                <p14:modId xmlns:p14="http://schemas.microsoft.com/office/powerpoint/2010/main" val="1761827855"/>
+              </p:ext>
+            </p:extLst>
           </p:nvPr>
-        </p:nvSpPr>
-        <p:spPr>
-          <a:xfrm>
-            <a:off x="365760" y="960120"/>
-            <a:ext cx="8412480" cy="2514600"/>
-          </a:xfrm>
-        </p:spPr>
-        <p:txBody>
-          <a:bodyPr>
-            <a:normAutofit/>
-          </a:bodyPr>
-          <a:lstStyle/>
-          <a:p>
-            <a:pPr marL="0" indent="0">
-              <a:spcBef>
-                <a:spcPts val="300"/>
-              </a:spcBef>
-              <a:spcAft>
-                <a:spcPts val="300"/>
-              </a:spcAft>
-              <a:buNone/>
-            </a:pPr>
-            <a:r>
-              <a:rPr sz="1400" b="0">
-                <a:solidFill>
-                  <a:srgbClr val="000000"/>
-                </a:solidFill>
-                <a:latin typeface="맑은 고딕"/>
-                <a:ea typeface="맑은 고딕"/>
-              </a:rPr>
-              <a:t>정기배송 업무는 </a:t>
-            </a:r>
-            <a:r>
-              <a:rPr sz="1400" b="1">
-                <a:solidFill>
-                  <a:srgbClr val="000000"/>
-                </a:solidFill>
-                <a:latin typeface="맑은 고딕"/>
-                <a:ea typeface="맑은 고딕"/>
-              </a:rPr>
-              <a:t>약정·금액·상태·회차 생성</a:t>
-            </a:r>
-            <a:r>
-              <a:rPr sz="1400" b="0">
-                <a:solidFill>
-                  <a:srgbClr val="000000"/>
-                </a:solidFill>
-                <a:latin typeface="맑은 고딕"/>
-                <a:ea typeface="맑은 고딕"/>
-              </a:rPr>
-              <a:t>을 맡고, 연동·영속 구현은 외부 기술을 맡는다. 하나의 배포 단위 안에서 다음 의존 방향을 사용한다.</a:t>
-            </a:r>
-          </a:p>
-          <a:p>
-            <a:pPr lvl="2" marL="228600" indent="-182880">
-              <a:spcBef>
-                <a:spcPts val="300"/>
-              </a:spcBef>
-              <a:spcAft>
-                <a:spcPts val="300"/>
-              </a:spcAft>
-              <a:buSzPct val="90000"/>
-              <a:buFont typeface="Wingdings" pitchFamily="2" charset="2"/>
-              <a:buChar char=""/>
-            </a:pPr>
-            <a:r>
-              <a:rPr sz="1400" b="1">
-                <a:solidFill>
-                  <a:srgbClr val="000000"/>
-                </a:solidFill>
-                <a:latin typeface="맑은 고딕"/>
-                <a:ea typeface="맑은 고딕"/>
-              </a:rPr>
-              <a:t>책임 배치</a:t>
-            </a:r>
-            <a:r>
-              <a:rPr sz="1400" b="0">
-                <a:solidFill>
-                  <a:srgbClr val="000000"/>
-                </a:solidFill>
-                <a:latin typeface="맑은 고딕"/>
-                <a:ea typeface="맑은 고딕"/>
-              </a:rPr>
-              <a:t> —</a:t>
-            </a:r>
-            <a:r>
-              <a:rPr sz="1200" b="0">
-                <a:solidFill>
-                  <a:srgbClr val="000000"/>
-                </a:solidFill>
-                <a:latin typeface="맑은 고딕"/>
-                <a:ea typeface="맑은 고딕"/>
-              </a:rPr>
-              <a:t> subscription은 신청 확정·회차 생성, 연동은 인증·외부 형식 변환, persistence는 저장·조회를 맡는다. 화살표는 호출 순서가 아니라 코드의 의존이다.</a:t>
-            </a:r>
-          </a:p>
-        </p:txBody>
-      </p:sp>
+        </p:nvGraphicFramePr>
+        <p:xfrm>
+          <a:off x="412306" y="4184650"/>
+          <a:ext cx="8305800" cy="3873500"/>
+        </p:xfrm>
+        <a:graphic>
+          <a:graphicData uri="http://schemas.openxmlformats.org/drawingml/2006/table">
+            <a:tbl>
+              <a:tblPr/>
+              <a:tblGrid>
+                <a:gridCol w="1109431"/>
+                <a:gridCol w="4823612"/>
+                <a:gridCol w="2372758"/>
+              </a:tblGrid>
+              <a:tr h="288000">
+                <a:tc>
+                  <a:txBody>
+                    <a:bodyPr/>
+                    <a:lstStyle/>
+                    <a:p>
+                      <a:pPr algn="ctr" fontAlgn="ctr">
+                        <a:buNone/>
+                      </a:pPr>
+                      <a:r>
+                        <a:rPr lang="ko-KR" altLang="en-US" sz="1000" b="1" i="0" u="none" strike="noStrike" dirty="0">
+                          <a:solidFill>
+                            <a:schemeClr val="bg1"/>
+                          </a:solidFill>
+                          <a:effectLst/>
+                          <a:latin typeface="맑은 고딕" panose="020B0503020000020004" pitchFamily="34" charset="-127"/>
+                          <a:ea typeface="맑은 고딕" panose="020B0503020000020004" pitchFamily="34" charset="-127"/>
+                          <a:cs typeface="맑은 고딕"/>
+                        </a:rPr>
+                        <a:t>패키지</a:t>
+                      </a:r>
+                    </a:p>
+                  </a:txBody>
+                  <a:tcPr marL="6750" marR="6750" marT="6750" marB="0" anchor="ctr">
+                    <a:lnL>
+                      <a:noFill/>
+                    </a:lnL>
+                    <a:lnR w="9525" cap="flat" cmpd="sng" algn="ctr">
+                      <a:solidFill>
+                        <a:schemeClr val="bg1">
+                          <a:lumMod val="50000"/>
+                        </a:schemeClr>
+                      </a:solidFill>
+                      <a:prstDash val="solid"/>
+                      <a:round/>
+                      <a:headEnd type="none" w="med" len="med"/>
+                      <a:tailEnd type="none" w="med" len="med"/>
+                    </a:lnR>
+                    <a:lnT w="9525" cap="flat" cmpd="sng" algn="ctr">
+                      <a:solidFill>
+                        <a:schemeClr val="tx1"/>
+                      </a:solidFill>
+                      <a:prstDash val="solid"/>
+                      <a:round/>
+                      <a:headEnd type="none" w="med" len="med"/>
+                      <a:tailEnd type="none" w="med" len="med"/>
+                    </a:lnT>
+                    <a:lnB w="9525" cap="flat" cmpd="sng" algn="ctr">
+                      <a:solidFill>
+                        <a:schemeClr val="bg1">
+                          <a:lumMod val="50000"/>
+                        </a:schemeClr>
+                      </a:solidFill>
+                      <a:prstDash val="solid"/>
+                      <a:round/>
+                      <a:headEnd type="none" w="med" len="med"/>
+                      <a:tailEnd type="none" w="med" len="med"/>
+                    </a:lnB>
+                    <a:solidFill>
+                      <a:srgbClr val="002060"/>
+                    </a:solidFill>
+                  </a:tcPr>
+                </a:tc>
+                <a:tc>
+                  <a:txBody>
+                    <a:bodyPr/>
+                    <a:lstStyle/>
+                    <a:p>
+                      <a:pPr algn="ctr" fontAlgn="ctr">
+                        <a:buNone/>
+                      </a:pPr>
+                      <a:r>
+                        <a:rPr lang="ko-KR" altLang="en-US" sz="1000" b="1" i="0" u="none" strike="noStrike" dirty="0">
+                          <a:solidFill>
+                            <a:schemeClr val="bg1"/>
+                          </a:solidFill>
+                          <a:effectLst/>
+                          <a:latin typeface="맑은 고딕" panose="020B0503020000020004" pitchFamily="34" charset="-127"/>
+                          <a:ea typeface="맑은 고딕" panose="020B0503020000020004" pitchFamily="34" charset="-127"/>
+                          <a:cs typeface="맑은 고딕"/>
+                        </a:rPr>
+                        <a:t>책임</a:t>
+                      </a:r>
+                    </a:p>
+                  </a:txBody>
+                  <a:tcPr marL="6750" marR="6750" marT="6750" marB="0" anchor="ctr">
+                    <a:lnL w="9525" cap="flat" cmpd="sng" algn="ctr">
+                      <a:solidFill>
+                        <a:schemeClr val="bg1">
+                          <a:lumMod val="50000"/>
+                        </a:schemeClr>
+                      </a:solidFill>
+                      <a:prstDash val="solid"/>
+                      <a:round/>
+                      <a:headEnd type="none" w="med" len="med"/>
+                      <a:tailEnd type="none" w="med" len="med"/>
+                    </a:lnL>
+                    <a:lnR w="9525" cap="flat" cmpd="sng" algn="ctr">
+                      <a:solidFill>
+                        <a:schemeClr val="bg1">
+                          <a:lumMod val="50000"/>
+                        </a:schemeClr>
+                      </a:solidFill>
+                      <a:prstDash val="solid"/>
+                      <a:round/>
+                      <a:headEnd type="none" w="med" len="med"/>
+                      <a:tailEnd type="none" w="med" len="med"/>
+                    </a:lnR>
+                    <a:lnT w="9525" cap="flat" cmpd="sng" algn="ctr">
+                      <a:solidFill>
+                        <a:schemeClr val="tx1"/>
+                      </a:solidFill>
+                      <a:prstDash val="solid"/>
+                      <a:round/>
+                      <a:headEnd type="none" w="med" len="med"/>
+                      <a:tailEnd type="none" w="med" len="med"/>
+                    </a:lnT>
+                    <a:lnB w="9525" cap="flat" cmpd="sng" algn="ctr">
+                      <a:solidFill>
+                        <a:schemeClr val="bg1">
+                          <a:lumMod val="50000"/>
+                        </a:schemeClr>
+                      </a:solidFill>
+                      <a:prstDash val="solid"/>
+                      <a:round/>
+                      <a:headEnd type="none" w="med" len="med"/>
+                      <a:tailEnd type="none" w="med" len="med"/>
+                    </a:lnB>
+                    <a:solidFill>
+                      <a:srgbClr val="002060"/>
+                    </a:solidFill>
+                  </a:tcPr>
+                </a:tc>
+                <a:tc>
+                  <a:txBody>
+                    <a:bodyPr/>
+                    <a:lstStyle/>
+                    <a:p>
+                      <a:pPr algn="ctr" fontAlgn="ctr">
+                        <a:buNone/>
+                      </a:pPr>
+                      <a:r>
+                        <a:rPr lang="ko-KR" altLang="en-US" sz="1000" b="1" i="0" u="none" strike="noStrike" dirty="0" err="1">
+                          <a:solidFill>
+                            <a:schemeClr val="bg1"/>
+                          </a:solidFill>
+                          <a:effectLst/>
+                          <a:latin typeface="맑은 고딕" panose="020B0503020000020004" pitchFamily="34" charset="-127"/>
+                          <a:ea typeface="맑은 고딕" panose="020B0503020000020004" pitchFamily="34" charset="-127"/>
+                          <a:cs typeface="맑은 고딕"/>
+                        </a:rPr>
+                        <a:t>두지 않는 것</a:t>
+                      </a:r>
+                    </a:p>
+                  </a:txBody>
+                  <a:tcPr marL="6750" marR="6750" marT="6750" marB="0" anchor="ctr">
+                    <a:lnL w="9525" cap="flat" cmpd="sng" algn="ctr">
+                      <a:solidFill>
+                        <a:schemeClr val="bg1">
+                          <a:lumMod val="50000"/>
+                        </a:schemeClr>
+                      </a:solidFill>
+                      <a:prstDash val="solid"/>
+                      <a:round/>
+                      <a:headEnd type="none" w="med" len="med"/>
+                      <a:tailEnd type="none" w="med" len="med"/>
+                    </a:lnL>
+                    <a:lnR w="9525" cap="flat" cmpd="sng" algn="ctr">
+                      <a:solidFill>
+                        <a:schemeClr val="bg1">
+                          <a:lumMod val="50000"/>
+                        </a:schemeClr>
+                      </a:solidFill>
+                      <a:prstDash val="solid"/>
+                      <a:round/>
+                      <a:headEnd type="none" w="med" len="med"/>
+                      <a:tailEnd type="none" w="med" len="med"/>
+                    </a:lnR>
+                    <a:lnT w="9525" cap="flat" cmpd="sng" algn="ctr">
+                      <a:solidFill>
+                        <a:schemeClr val="tx1"/>
+                      </a:solidFill>
+                      <a:prstDash val="solid"/>
+                      <a:round/>
+                      <a:headEnd type="none" w="med" len="med"/>
+                      <a:tailEnd type="none" w="med" len="med"/>
+                    </a:lnT>
+                    <a:lnB w="9525" cap="flat" cmpd="sng" algn="ctr">
+                      <a:solidFill>
+                        <a:schemeClr val="bg1">
+                          <a:lumMod val="50000"/>
+                        </a:schemeClr>
+                      </a:solidFill>
+                      <a:prstDash val="solid"/>
+                      <a:round/>
+                      <a:headEnd type="none" w="med" len="med"/>
+                      <a:tailEnd type="none" w="med" len="med"/>
+                    </a:lnB>
+                    <a:solidFill>
+                      <a:srgbClr val="002060"/>
+                    </a:solidFill>
+                  </a:tcPr>
+                </a:tc>
+              </a:tr>
+              <a:tr h="288000">
+                <a:tc>
+                  <a:txBody>
+                    <a:bodyPr/>
+                    <a:lstStyle/>
+                    <a:p>
+                      <a:pPr algn="l" fontAlgn="ctr">
+                        <a:buNone/>
+                      </a:pPr>
+                      <a:r>
+                        <a:rPr lang="en" sz="1000" b="1" i="0" u="none" strike="noStrike" dirty="0">
+                          <a:solidFill>
+                            <a:schemeClr val="tx1"/>
+                          </a:solidFill>
+                          <a:effectLst/>
+                          <a:latin typeface="맑은 고딕" panose="020B0503020000020004" pitchFamily="34" charset="-127"/>
+                          <a:ea typeface="맑은 고딕" panose="020B0503020000020004" pitchFamily="34" charset="-127"/>
+                          <a:cs typeface="맑은 고딕"/>
+                        </a:rPr>
+                        <a:t>신청 업무</a:t>
+                      </a:r>
+                    </a:p>
+                  </a:txBody>
+                  <a:tcPr marL="81005" marR="6750" marT="6750" marB="0" anchor="ctr">
+                    <a:lnL>
+                      <a:noFill/>
+                    </a:lnL>
+                    <a:lnR>
+                      <a:noFill/>
+                    </a:lnR>
+                    <a:lnT w="9525" cap="flat" cmpd="sng" algn="ctr">
+                      <a:solidFill>
+                        <a:schemeClr val="bg1">
+                          <a:lumMod val="50000"/>
+                        </a:schemeClr>
+                      </a:solidFill>
+                      <a:prstDash val="solid"/>
+                      <a:round/>
+                      <a:headEnd type="none" w="med" len="med"/>
+                      <a:tailEnd type="none" w="med" len="med"/>
+                    </a:lnT>
+                    <a:lnB w="9525" cap="flat" cmpd="sng" algn="ctr">
+                      <a:solidFill>
+                        <a:schemeClr val="bg1">
+                          <a:lumMod val="50000"/>
+                        </a:schemeClr>
+                      </a:solidFill>
+                      <a:prstDash val="solid"/>
+                      <a:round/>
+                      <a:headEnd type="none" w="med" len="med"/>
+                      <a:tailEnd type="none" w="med" len="med"/>
+                    </a:lnB>
+                    <a:noFill/>
+                  </a:tcPr>
+                </a:tc>
+                <a:tc>
+                  <a:txBody>
+                    <a:bodyPr/>
+                    <a:lstStyle/>
+                    <a:p>
+                      <a:pPr algn="l" fontAlgn="ctr">
+                        <a:buNone/>
+                      </a:pPr>
+                      <a:r>
+                        <a:rPr lang="ko-KR" altLang="en-US" sz="1000" b="0" i="0" u="none" strike="noStrike" dirty="0">
+                          <a:solidFill>
+                            <a:srgbClr val="000000"/>
+                          </a:solidFill>
+                          <a:effectLst/>
+                          <a:latin typeface="맑은 고딕" panose="020B0503020000020004" pitchFamily="34" charset="-127"/>
+                          <a:ea typeface="맑은 고딕" panose="020B0503020000020004" pitchFamily="34" charset="-127"/>
+                          <a:cs typeface="맑은 고딕"/>
+                        </a:rPr>
+                        <a:t>최초 신청 흐름을 조정하고 네 포트를 소유한다. 본인 신청만 다룬다</a:t>
+                      </a:r>
+                    </a:p>
+                  </a:txBody>
+                  <a:tcPr marL="81005" marR="6750" marT="6750" marB="0" anchor="ctr">
+                    <a:lnL>
+                      <a:noFill/>
+                    </a:lnL>
+                    <a:lnR>
+                      <a:noFill/>
+                    </a:lnR>
+                    <a:lnT w="9525" cap="flat" cmpd="sng" algn="ctr">
+                      <a:solidFill>
+                        <a:schemeClr val="bg1">
+                          <a:lumMod val="50000"/>
+                        </a:schemeClr>
+                      </a:solidFill>
+                      <a:prstDash val="solid"/>
+                      <a:round/>
+                      <a:headEnd type="none" w="med" len="med"/>
+                      <a:tailEnd type="none" w="med" len="med"/>
+                    </a:lnT>
+                    <a:lnB w="9525" cap="flat" cmpd="sng" algn="ctr">
+                      <a:solidFill>
+                        <a:schemeClr val="bg1">
+                          <a:lumMod val="50000"/>
+                        </a:schemeClr>
+                      </a:solidFill>
+                      <a:prstDash val="solid"/>
+                      <a:round/>
+                      <a:headEnd type="none" w="med" len="med"/>
+                      <a:tailEnd type="none" w="med" len="med"/>
+                    </a:lnB>
+                    <a:solidFill>
+                      <a:srgbClr val="FFFFFF"/>
+                    </a:solidFill>
+                  </a:tcPr>
+                </a:tc>
+                <a:tc>
+                  <a:txBody>
+                    <a:bodyPr/>
+                    <a:lstStyle/>
+                    <a:p>
+                      <a:pPr algn="l" fontAlgn="ctr">
+                        <a:buNone/>
+                      </a:pPr>
+                      <a:r>
+                        <a:rPr lang="ko-KR" altLang="en-US" sz="1000" b="0" i="0" u="none" strike="noStrike" dirty="0">
+                          <a:solidFill>
+                            <a:srgbClr val="000000"/>
+                          </a:solidFill>
+                          <a:effectLst/>
+                          <a:latin typeface="맑은 고딕" panose="020B0503020000020004" pitchFamily="34" charset="-127"/>
+                          <a:ea typeface="맑은 고딕" panose="020B0503020000020004" pitchFamily="34" charset="-127"/>
+                          <a:cs typeface="맑은 고딕"/>
+                        </a:rPr>
+                        <a:t>저장·연계 구현, 기존 정책의 계산</a:t>
+                      </a:r>
+                    </a:p>
+                  </a:txBody>
+                  <a:tcPr marL="81005" marR="6750" marT="6750" marB="0" anchor="ctr">
+                    <a:lnL>
+                      <a:noFill/>
+                    </a:lnL>
+                    <a:lnR>
+                      <a:noFill/>
+                    </a:lnR>
+                    <a:lnT w="9525" cap="flat" cmpd="sng" algn="ctr">
+                      <a:solidFill>
+                        <a:schemeClr val="bg1">
+                          <a:lumMod val="50000"/>
+                        </a:schemeClr>
+                      </a:solidFill>
+                      <a:prstDash val="solid"/>
+                      <a:round/>
+                      <a:headEnd type="none" w="med" len="med"/>
+                      <a:tailEnd type="none" w="med" len="med"/>
+                    </a:lnT>
+                    <a:lnB w="9525" cap="flat" cmpd="sng" algn="ctr">
+                      <a:solidFill>
+                        <a:schemeClr val="bg1">
+                          <a:lumMod val="50000"/>
+                        </a:schemeClr>
+                      </a:solidFill>
+                      <a:prstDash val="solid"/>
+                      <a:round/>
+                      <a:headEnd type="none" w="med" len="med"/>
+                      <a:tailEnd type="none" w="med" len="med"/>
+                    </a:lnB>
+                    <a:solidFill>
+                      <a:srgbClr val="FFFFFF"/>
+                    </a:solidFill>
+                  </a:tcPr>
+                </a:tc>
+              </a:tr>
+              <a:tr h="288000">
+                <a:tc>
+                  <a:txBody>
+                    <a:bodyPr/>
+                    <a:lstStyle/>
+                    <a:p>
+                      <a:pPr algn="l" fontAlgn="ctr">
+                        <a:buNone/>
+                      </a:pPr>
+                      <a:r>
+                        <a:rPr lang="en" sz="1000" b="1" i="0" u="none" strike="noStrike" dirty="0">
+                          <a:solidFill>
+                            <a:schemeClr val="tx1"/>
+                          </a:solidFill>
+                          <a:effectLst/>
+                          <a:latin typeface="맑은 고딕" panose="020B0503020000020004" pitchFamily="34" charset="-127"/>
+                          <a:ea typeface="맑은 고딕" panose="020B0503020000020004" pitchFamily="34" charset="-127"/>
+                          <a:cs typeface="맑은 고딕"/>
+                        </a:rPr>
+                        <a:t>정기배송 규칙</a:t>
+                      </a:r>
+                    </a:p>
+                  </a:txBody>
+                  <a:tcPr marL="81005" marR="6750" marT="6750" marB="0" anchor="ctr">
+                    <a:lnL>
+                      <a:noFill/>
+                    </a:lnL>
+                    <a:lnR>
+                      <a:noFill/>
+                    </a:lnR>
+                    <a:lnT w="9525" cap="flat" cmpd="sng" algn="ctr">
+                      <a:solidFill>
+                        <a:schemeClr val="bg1">
+                          <a:lumMod val="50000"/>
+                        </a:schemeClr>
+                      </a:solidFill>
+                      <a:prstDash val="solid"/>
+                      <a:round/>
+                      <a:headEnd type="none" w="med" len="med"/>
+                      <a:tailEnd type="none" w="med" len="med"/>
+                    </a:lnT>
+                    <a:lnB w="9525" cap="flat" cmpd="sng" algn="ctr">
+                      <a:solidFill>
+                        <a:schemeClr val="bg1">
+                          <a:lumMod val="50000"/>
+                        </a:schemeClr>
+                      </a:solidFill>
+                      <a:prstDash val="solid"/>
+                      <a:round/>
+                      <a:headEnd type="none" w="med" len="med"/>
+                      <a:tailEnd type="none" w="med" len="med"/>
+                    </a:lnB>
+                    <a:noFill/>
+                  </a:tcPr>
+                </a:tc>
+                <a:tc>
+                  <a:txBody>
+                    <a:bodyPr/>
+                    <a:lstStyle/>
+                    <a:p>
+                      <a:pPr algn="l" fontAlgn="ctr">
+                        <a:buNone/>
+                      </a:pPr>
+                      <a:r>
+                        <a:rPr lang="ko-KR" altLang="en-US" sz="1000" b="0" i="0" u="none" strike="noStrike" dirty="0">
+                          <a:solidFill>
+                            <a:srgbClr val="000000"/>
+                          </a:solidFill>
+                          <a:effectLst/>
+                          <a:latin typeface="맑은 고딕" panose="020B0503020000020004" pitchFamily="34" charset="-127"/>
+                          <a:ea typeface="맑은 고딕" panose="020B0503020000020004" pitchFamily="34" charset="-127"/>
+                          <a:cs typeface="맑은 고딕"/>
+                        </a:rPr>
+                        <a:t>신청·배송회차·첫 결제·계약. 일정 계산, 첫 배송일 하한, 상태 전이 허용</a:t>
+                      </a:r>
+                    </a:p>
+                  </a:txBody>
+                  <a:tcPr marL="81005" marR="6750" marT="6750" marB="0" anchor="ctr">
+                    <a:lnL>
+                      <a:noFill/>
+                    </a:lnL>
+                    <a:lnR>
+                      <a:noFill/>
+                    </a:lnR>
+                    <a:lnT w="9525" cap="flat" cmpd="sng" algn="ctr">
+                      <a:solidFill>
+                        <a:schemeClr val="bg1">
+                          <a:lumMod val="50000"/>
+                        </a:schemeClr>
+                      </a:solidFill>
+                      <a:prstDash val="solid"/>
+                      <a:round/>
+                      <a:headEnd type="none" w="med" len="med"/>
+                      <a:tailEnd type="none" w="med" len="med"/>
+                    </a:lnT>
+                    <a:lnB w="9525" cap="flat" cmpd="sng" algn="ctr">
+                      <a:solidFill>
+                        <a:schemeClr val="bg1">
+                          <a:lumMod val="50000"/>
+                        </a:schemeClr>
+                      </a:solidFill>
+                      <a:prstDash val="solid"/>
+                      <a:round/>
+                      <a:headEnd type="none" w="med" len="med"/>
+                      <a:tailEnd type="none" w="med" len="med"/>
+                    </a:lnB>
+                    <a:solidFill>
+                      <a:srgbClr val="FFFFFF"/>
+                    </a:solidFill>
+                  </a:tcPr>
+                </a:tc>
+                <a:tc>
+                  <a:txBody>
+                    <a:bodyPr/>
+                    <a:lstStyle/>
+                    <a:p>
+                      <a:pPr algn="l" fontAlgn="ctr">
+                        <a:buNone/>
+                      </a:pPr>
+                      <a:r>
+                        <a:rPr lang="ko-KR" altLang="en-US" sz="1000" b="0" i="0" u="none" strike="noStrike" dirty="0">
+                          <a:solidFill>
+                            <a:srgbClr val="000000"/>
+                          </a:solidFill>
+                          <a:effectLst/>
+                          <a:latin typeface="맑은 고딕" panose="020B0503020000020004" pitchFamily="34" charset="-127"/>
+                          <a:ea typeface="맑은 고딕" panose="020B0503020000020004" pitchFamily="34" charset="-127"/>
+                          <a:cs typeface="맑은 고딕"/>
+                        </a:rPr>
+                        <a:t>다른 패키지에 대한 의존</a:t>
+                      </a:r>
+                    </a:p>
+                  </a:txBody>
+                  <a:tcPr marL="81005" marR="6750" marT="6750" marB="0" anchor="ctr">
+                    <a:lnL>
+                      <a:noFill/>
+                    </a:lnL>
+                    <a:lnR>
+                      <a:noFill/>
+                    </a:lnR>
+                    <a:lnT w="9525" cap="flat" cmpd="sng" algn="ctr">
+                      <a:solidFill>
+                        <a:schemeClr val="bg1">
+                          <a:lumMod val="50000"/>
+                        </a:schemeClr>
+                      </a:solidFill>
+                      <a:prstDash val="solid"/>
+                      <a:round/>
+                      <a:headEnd type="none" w="med" len="med"/>
+                      <a:tailEnd type="none" w="med" len="med"/>
+                    </a:lnT>
+                    <a:lnB w="9525" cap="flat" cmpd="sng" algn="ctr">
+                      <a:solidFill>
+                        <a:schemeClr val="bg1">
+                          <a:lumMod val="50000"/>
+                        </a:schemeClr>
+                      </a:solidFill>
+                      <a:prstDash val="solid"/>
+                      <a:round/>
+                      <a:headEnd type="none" w="med" len="med"/>
+                      <a:tailEnd type="none" w="med" len="med"/>
+                    </a:lnB>
+                    <a:solidFill>
+                      <a:srgbClr val="FFFFFF"/>
+                    </a:solidFill>
+                  </a:tcPr>
+                </a:tc>
+              </a:tr>
+              <a:tr h="288000">
+                <a:tc>
+                  <a:txBody>
+                    <a:bodyPr/>
+                    <a:lstStyle/>
+                    <a:p>
+                      <a:pPr algn="l" fontAlgn="ctr">
+                        <a:buNone/>
+                      </a:pPr>
+                      <a:r>
+                        <a:rPr lang="en" sz="1000" b="1" i="0" u="none" strike="noStrike" dirty="0">
+                          <a:solidFill>
+                            <a:schemeClr val="tx1"/>
+                          </a:solidFill>
+                          <a:effectLst/>
+                          <a:latin typeface="맑은 고딕" panose="020B0503020000020004" pitchFamily="34" charset="-127"/>
+                          <a:ea typeface="맑은 고딕" panose="020B0503020000020004" pitchFamily="34" charset="-127"/>
+                          <a:cs typeface="맑은 고딕"/>
+                        </a:rPr>
+                        <a:t>쇼핑몰 연계</a:t>
+                      </a:r>
+                    </a:p>
+                  </a:txBody>
+                  <a:tcPr marL="81005" marR="6750" marT="6750" marB="0" anchor="ctr">
+                    <a:lnL>
+                      <a:noFill/>
+                    </a:lnL>
+                    <a:lnR>
+                      <a:noFill/>
+                    </a:lnR>
+                    <a:lnT w="9525" cap="flat" cmpd="sng" algn="ctr">
+                      <a:solidFill>
+                        <a:schemeClr val="bg1">
+                          <a:lumMod val="50000"/>
+                        </a:schemeClr>
+                      </a:solidFill>
+                      <a:prstDash val="solid"/>
+                      <a:round/>
+                      <a:headEnd type="none" w="med" len="med"/>
+                      <a:tailEnd type="none" w="med" len="med"/>
+                    </a:lnT>
+                    <a:lnB w="9525" cap="flat" cmpd="sng" algn="ctr">
+                      <a:solidFill>
+                        <a:schemeClr val="bg1">
+                          <a:lumMod val="50000"/>
+                        </a:schemeClr>
+                      </a:solidFill>
+                      <a:prstDash val="solid"/>
+                      <a:round/>
+                      <a:headEnd type="none" w="med" len="med"/>
+                      <a:tailEnd type="none" w="med" len="med"/>
+                    </a:lnB>
+                    <a:noFill/>
+                  </a:tcPr>
+                </a:tc>
+                <a:tc>
+                  <a:txBody>
+                    <a:bodyPr/>
+                    <a:lstStyle/>
+                    <a:p>
+                      <a:pPr algn="l" fontAlgn="ctr">
+                        <a:buNone/>
+                      </a:pPr>
+                      <a:r>
+                        <a:rPr lang="ko-KR" altLang="en-US" sz="1000" b="0" i="0" u="none" strike="noStrike" dirty="0">
+                          <a:solidFill>
+                            <a:srgbClr val="000000"/>
+                          </a:solidFill>
+                          <a:effectLst/>
+                          <a:latin typeface="맑은 고딕" panose="020B0503020000020004" pitchFamily="34" charset="-127"/>
+                          <a:ea typeface="맑은 고딕" panose="020B0503020000020004" pitchFamily="34" charset="-127"/>
+                          <a:cs typeface="맑은 고딕"/>
+                        </a:rPr>
+                        <a:t>선택 확인·금액 산정·첫 결제 포트의 구현. 응답을 업무 결과로 바꾼다</a:t>
+                      </a:r>
+                    </a:p>
+                  </a:txBody>
+                  <a:tcPr marL="81005" marR="6750" marT="6750" marB="0" anchor="ctr">
+                    <a:lnL>
+                      <a:noFill/>
+                    </a:lnL>
+                    <a:lnR>
+                      <a:noFill/>
+                    </a:lnR>
+                    <a:lnT w="9525" cap="flat" cmpd="sng" algn="ctr">
+                      <a:solidFill>
+                        <a:schemeClr val="bg1">
+                          <a:lumMod val="50000"/>
+                        </a:schemeClr>
+                      </a:solidFill>
+                      <a:prstDash val="solid"/>
+                      <a:round/>
+                      <a:headEnd type="none" w="med" len="med"/>
+                      <a:tailEnd type="none" w="med" len="med"/>
+                    </a:lnT>
+                    <a:lnB w="9525" cap="flat" cmpd="sng" algn="ctr">
+                      <a:solidFill>
+                        <a:schemeClr val="bg1">
+                          <a:lumMod val="50000"/>
+                        </a:schemeClr>
+                      </a:solidFill>
+                      <a:prstDash val="solid"/>
+                      <a:round/>
+                      <a:headEnd type="none" w="med" len="med"/>
+                      <a:tailEnd type="none" w="med" len="med"/>
+                    </a:lnB>
+                    <a:solidFill>
+                      <a:srgbClr val="FFFFFF"/>
+                    </a:solidFill>
+                  </a:tcPr>
+                </a:tc>
+                <a:tc>
+                  <a:txBody>
+                    <a:bodyPr/>
+                    <a:lstStyle/>
+                    <a:p>
+                      <a:pPr algn="l" fontAlgn="ctr">
+                        <a:buNone/>
+                      </a:pPr>
+                      <a:r>
+                        <a:rPr lang="ko-KR" altLang="en-US" sz="1000" b="0" i="0" u="none" strike="noStrike" dirty="0">
+                          <a:solidFill>
+                            <a:srgbClr val="000000"/>
+                          </a:solidFill>
+                          <a:effectLst/>
+                          <a:latin typeface="맑은 고딕" panose="020B0503020000020004" pitchFamily="34" charset="-127"/>
+                          <a:ea typeface="맑은 고딕" panose="020B0503020000020004" pitchFamily="34" charset="-127"/>
+                          <a:cs typeface="맑은 고딕"/>
+                        </a:rPr>
+                        <a:t>상태 전이, 계약 성립 판단</a:t>
+                      </a:r>
+                    </a:p>
+                  </a:txBody>
+                  <a:tcPr marL="81005" marR="6750" marT="6750" marB="0" anchor="ctr">
+                    <a:lnL>
+                      <a:noFill/>
+                    </a:lnL>
+                    <a:lnR>
+                      <a:noFill/>
+                    </a:lnR>
+                    <a:lnT w="9525" cap="flat" cmpd="sng" algn="ctr">
+                      <a:solidFill>
+                        <a:schemeClr val="bg1">
+                          <a:lumMod val="50000"/>
+                        </a:schemeClr>
+                      </a:solidFill>
+                      <a:prstDash val="solid"/>
+                      <a:round/>
+                      <a:headEnd type="none" w="med" len="med"/>
+                      <a:tailEnd type="none" w="med" len="med"/>
+                    </a:lnT>
+                    <a:lnB w="9525" cap="flat" cmpd="sng" algn="ctr">
+                      <a:solidFill>
+                        <a:schemeClr val="bg1">
+                          <a:lumMod val="50000"/>
+                        </a:schemeClr>
+                      </a:solidFill>
+                      <a:prstDash val="solid"/>
+                      <a:round/>
+                      <a:headEnd type="none" w="med" len="med"/>
+                      <a:tailEnd type="none" w="med" len="med"/>
+                    </a:lnB>
+                    <a:solidFill>
+                      <a:srgbClr val="FFFFFF"/>
+                    </a:solidFill>
+                  </a:tcPr>
+                </a:tc>
+              </a:tr>
+              <a:tr h="288000">
+                <a:tc>
+                  <a:txBody>
+                    <a:bodyPr/>
+                    <a:lstStyle/>
+                    <a:p>
+                      <a:pPr algn="l" fontAlgn="ctr">
+                        <a:buNone/>
+                      </a:pPr>
+                      <a:r>
+                        <a:rPr lang="en" sz="1000" b="1" i="0" u="none" strike="noStrike" dirty="0">
+                          <a:solidFill>
+                            <a:schemeClr val="tx1"/>
+                          </a:solidFill>
+                          <a:effectLst/>
+                          <a:latin typeface="맑은 고딕" panose="020B0503020000020004" pitchFamily="34" charset="-127"/>
+                          <a:ea typeface="맑은 고딕" panose="020B0503020000020004" pitchFamily="34" charset="-127"/>
+                          <a:cs typeface="맑은 고딕"/>
+                        </a:rPr>
+                        <a:t>신청 저장</a:t>
+                      </a:r>
+                    </a:p>
+                  </a:txBody>
+                  <a:tcPr marL="81005" marR="6750" marT="6750" marB="0" anchor="ctr">
+                    <a:lnL>
+                      <a:noFill/>
+                    </a:lnL>
+                    <a:lnR>
+                      <a:noFill/>
+                    </a:lnR>
+                    <a:lnT w="9525" cap="flat" cmpd="sng" algn="ctr">
+                      <a:solidFill>
+                        <a:schemeClr val="bg1">
+                          <a:lumMod val="50000"/>
+                        </a:schemeClr>
+                      </a:solidFill>
+                      <a:prstDash val="solid"/>
+                      <a:round/>
+                      <a:headEnd type="none" w="med" len="med"/>
+                      <a:tailEnd type="none" w="med" len="med"/>
+                    </a:lnT>
+                    <a:lnB w="9525" cap="flat" cmpd="sng" algn="ctr">
+                      <a:solidFill>
+                        <a:schemeClr val="bg1">
+                          <a:lumMod val="50000"/>
+                        </a:schemeClr>
+                      </a:solidFill>
+                      <a:prstDash val="solid"/>
+                      <a:round/>
+                      <a:headEnd type="none" w="med" len="med"/>
+                      <a:tailEnd type="none" w="med" len="med"/>
+                    </a:lnB>
+                    <a:noFill/>
+                  </a:tcPr>
+                </a:tc>
+                <a:tc>
+                  <a:txBody>
+                    <a:bodyPr/>
+                    <a:lstStyle/>
+                    <a:p>
+                      <a:pPr algn="l" fontAlgn="ctr">
+                        <a:buNone/>
+                      </a:pPr>
+                      <a:r>
+                        <a:rPr lang="ko-KR" altLang="en-US" sz="1000" b="0" i="0" u="none" strike="noStrike" dirty="0">
+                          <a:solidFill>
+                            <a:srgbClr val="000000"/>
+                          </a:solidFill>
+                          <a:effectLst/>
+                          <a:latin typeface="맑은 고딕" panose="020B0503020000020004" pitchFamily="34" charset="-127"/>
+                          <a:ea typeface="맑은 고딕" panose="020B0503020000020004" pitchFamily="34" charset="-127"/>
+                          <a:cs typeface="맑은 고딕"/>
+                        </a:rPr>
+                        <a:t>신청 저장 포트의 구현. 조건부 전이의 원자성과 성공의 한 단위 반영</a:t>
+                      </a:r>
+                    </a:p>
+                  </a:txBody>
+                  <a:tcPr marL="81005" marR="6750" marT="6750" marB="0" anchor="ctr">
+                    <a:lnL>
+                      <a:noFill/>
+                    </a:lnL>
+                    <a:lnR>
+                      <a:noFill/>
+                    </a:lnR>
+                    <a:lnT w="9525" cap="flat" cmpd="sng" algn="ctr">
+                      <a:solidFill>
+                        <a:schemeClr val="bg1">
+                          <a:lumMod val="50000"/>
+                        </a:schemeClr>
+                      </a:solidFill>
+                      <a:prstDash val="solid"/>
+                      <a:round/>
+                      <a:headEnd type="none" w="med" len="med"/>
+                      <a:tailEnd type="none" w="med" len="med"/>
+                    </a:lnT>
+                    <a:lnB w="9525" cap="flat" cmpd="sng" algn="ctr">
+                      <a:solidFill>
+                        <a:schemeClr val="bg1">
+                          <a:lumMod val="50000"/>
+                        </a:schemeClr>
+                      </a:solidFill>
+                      <a:prstDash val="solid"/>
+                      <a:round/>
+                      <a:headEnd type="none" w="med" len="med"/>
+                      <a:tailEnd type="none" w="med" len="med"/>
+                    </a:lnB>
+                    <a:solidFill>
+                      <a:srgbClr val="FFFFFF"/>
+                    </a:solidFill>
+                  </a:tcPr>
+                </a:tc>
+                <a:tc>
+                  <a:txBody>
+                    <a:bodyPr/>
+                    <a:lstStyle/>
+                    <a:p>
+                      <a:pPr algn="l" fontAlgn="ctr">
+                        <a:buNone/>
+                      </a:pPr>
+                      <a:r>
+                        <a:rPr lang="ko-KR" altLang="en-US" sz="1000" b="0" i="0" u="none" strike="noStrike" dirty="0">
+                          <a:solidFill>
+                            <a:srgbClr val="000000"/>
+                          </a:solidFill>
+                          <a:effectLst/>
+                          <a:latin typeface="맑은 고딕" panose="020B0503020000020004" pitchFamily="34" charset="-127"/>
+                          <a:ea typeface="맑은 고딕" panose="020B0503020000020004" pitchFamily="34" charset="-127"/>
+                          <a:cs typeface="맑은 고딕"/>
+                        </a:rPr>
+                        <a:t>전이를 허용할지 판단하는 일</a:t>
+                      </a:r>
+                    </a:p>
+                  </a:txBody>
+                  <a:tcPr marL="81005" marR="6750" marT="6750" marB="0" anchor="ctr">
+                    <a:lnL>
+                      <a:noFill/>
+                    </a:lnL>
+                    <a:lnR>
+                      <a:noFill/>
+                    </a:lnR>
+                    <a:lnT w="9525" cap="flat" cmpd="sng" algn="ctr">
+                      <a:solidFill>
+                        <a:schemeClr val="bg1">
+                          <a:lumMod val="50000"/>
+                        </a:schemeClr>
+                      </a:solidFill>
+                      <a:prstDash val="solid"/>
+                      <a:round/>
+                      <a:headEnd type="none" w="med" len="med"/>
+                      <a:tailEnd type="none" w="med" len="med"/>
+                    </a:lnT>
+                    <a:lnB w="9525" cap="flat" cmpd="sng" algn="ctr">
+                      <a:solidFill>
+                        <a:schemeClr val="bg1">
+                          <a:lumMod val="50000"/>
+                        </a:schemeClr>
+                      </a:solidFill>
+                      <a:prstDash val="solid"/>
+                      <a:round/>
+                      <a:headEnd type="none" w="med" len="med"/>
+                      <a:tailEnd type="none" w="med" len="med"/>
+                    </a:lnB>
+                    <a:solidFill>
+                      <a:srgbClr val="FFFFFF"/>
+                    </a:solidFill>
+                  </a:tcPr>
+                </a:tc>
+              </a:tr>
+            </a:tbl>
+          </a:graphicData>
+        </a:graphic>
+      </p:graphicFrame>
       <p:sp>
         <p:nvSpPr>
-          <p:cNvPr id="9" name="TextBox 12">
+          <p:cNvPr id="13" name="TextBox 12">
             <a:extLst>
               <a:ext uri="{FF2B5EF4-FFF2-40B4-BE49-F238E27FC236}">
                 <a16:creationId xmlns:a16="http://schemas.microsoft.com/office/drawing/2014/main" id="{654EDDB4-901F-3D48-A715-17D163E8A7AC}"/>
@@ -12838,8 +13944,8 @@
         </p:nvSpPr>
         <p:spPr>
           <a:xfrm>
-            <a:off x="365760" y="2125355"/>
-            <a:ext cx="8412480" cy="201168"/>
+            <a:off x="365760" y="960120"/>
+            <a:ext cx="8412480" cy="2860947"/>
           </a:xfrm>
           <a:prstGeom prst="rect">
             <a:avLst/>
@@ -12852,48 +13958,292 @@
           </a:bodyPr>
           <a:lstStyle/>
           <a:p>
-            <a:pPr algn="ctr"/>
-            <a:r>
-              <a:rPr sz="1400" b="1">
-                <a:solidFill>
-                  <a:srgbClr val="000000"/>
-                </a:solidFill>
-                <a:latin typeface="맑은 고딕"/>
-                <a:ea typeface="맑은 고딕"/>
-              </a:rPr>
-              <a:t>정기배송 아키텍처 답안</a:t>
+            <a:pPr marL="0" indent="0">
+              <a:spcBef>
+                <a:spcPts val="600"/>
+              </a:spcBef>
+              <a:spcAft>
+                <a:spcPts val="600"/>
+              </a:spcAft>
+              <a:buNone/>
+            </a:pPr>
+            <a:r>
+              <a:rPr sz="1800" b="0">
+                <a:solidFill>
+                  <a:srgbClr val="000000"/>
+                </a:solidFill>
+                <a:latin typeface="맑은 고딕"/>
+                <a:ea typeface="맑은 고딕"/>
+              </a:rPr>
+              <a:t>업무 규칙과 날짜·금액 조건, 상태 전이는 실습 2의 요구사항 정의서와 실습 3의 도메인 모델을 따른다. 이 문서는 </a:t>
+            </a:r>
+            <a:r>
+              <a:rPr sz="1800" b="1">
+                <a:solidFill>
+                  <a:srgbClr val="000000"/>
+                </a:solidFill>
+                <a:latin typeface="맑은 고딕"/>
+                <a:ea typeface="맑은 고딕"/>
+              </a:rPr>
+              <a:t>그 규칙을 어느 패키지가 맡고 패키지끼리 어떻게 의존하는지</a:t>
+            </a:r>
+            <a:r>
+              <a:rPr sz="1800" b="0">
+                <a:solidFill>
+                  <a:srgbClr val="000000"/>
+                </a:solidFill>
+                <a:latin typeface="맑은 고딕"/>
+                <a:ea typeface="맑은 고딕"/>
+              </a:rPr>
+              <a:t>만 정한다.</a:t>
+            </a:r>
+          </a:p>
+          <a:p>
+            <a:pPr lvl="2" marL="723900" indent="-368300">
+              <a:spcBef>
+                <a:spcPts val="600"/>
+              </a:spcBef>
+              <a:spcAft>
+                <a:spcPts val="600"/>
+              </a:spcAft>
+              <a:buSzPct val="90000"/>
+              <a:buFont typeface="Wingdings" pitchFamily="2" charset="2"/>
+              <a:buChar char=""/>
+            </a:pPr>
+            <a:r>
+              <a:rPr sz="1800" b="1">
+                <a:solidFill>
+                  <a:srgbClr val="000000"/>
+                </a:solidFill>
+                <a:latin typeface="맑은 고딕"/>
+                <a:ea typeface="맑은 고딕"/>
+              </a:rPr>
+              <a:t>선택</a:t>
+            </a:r>
+            <a:r>
+              <a:rPr sz="1800" b="0">
+                <a:solidFill>
+                  <a:srgbClr val="000000"/>
+                </a:solidFill>
+                <a:latin typeface="맑은 고딕"/>
+                <a:ea typeface="맑은 고딕"/>
+              </a:rPr>
+              <a:t> —</a:t>
+            </a:r>
+            <a:r>
+              <a:rPr sz="1600" b="0">
+                <a:solidFill>
+                  <a:srgbClr val="000000"/>
+                </a:solidFill>
+                <a:latin typeface="맑은 고딕"/>
+                <a:ea typeface="맑은 고딕"/>
+              </a:rPr>
+              <a:t> 정기배송 모듈을 기존 쇼핑몰과 </a:t>
+            </a:r>
+            <a:r>
+              <a:rPr sz="1600" b="1">
+                <a:solidFill>
+                  <a:srgbClr val="000000"/>
+                </a:solidFill>
+                <a:latin typeface="맑은 고딕"/>
+                <a:ea typeface="맑은 고딕"/>
+              </a:rPr>
+              <a:t>같은 배포 단위</a:t>
+            </a:r>
+            <a:r>
+              <a:rPr sz="1600" b="0">
+                <a:solidFill>
+                  <a:srgbClr val="000000"/>
+                </a:solidFill>
+                <a:latin typeface="맑은 고딕"/>
+                <a:ea typeface="맑은 고딕"/>
+              </a:rPr>
+              <a:t>에 두고, </a:t>
+            </a:r>
+            <a:r>
+              <a:rPr sz="1600" b="1">
+                <a:solidFill>
+                  <a:srgbClr val="000000"/>
+                </a:solidFill>
+                <a:latin typeface="맑은 고딕"/>
+                <a:ea typeface="맑은 고딕"/>
+              </a:rPr>
+              <a:t>포트로 의존 방향을 뒤집는다</a:t>
+            </a:r>
+            <a:r>
+              <a:rPr sz="1600" b="0">
+                <a:solidFill>
+                  <a:srgbClr val="000000"/>
+                </a:solidFill>
+                <a:latin typeface="맑은 고딕"/>
+                <a:ea typeface="맑은 고딕"/>
+              </a:rPr>
+              <a:t>.</a:t>
+            </a:r>
+          </a:p>
+          <a:p>
+            <a:pPr lvl="2" marL="723900" indent="-368300">
+              <a:spcBef>
+                <a:spcPts val="600"/>
+              </a:spcBef>
+              <a:spcAft>
+                <a:spcPts val="600"/>
+              </a:spcAft>
+              <a:buSzPct val="90000"/>
+              <a:buFont typeface="Wingdings" pitchFamily="2" charset="2"/>
+              <a:buChar char=""/>
+            </a:pPr>
+            <a:r>
+              <a:rPr sz="1800" b="1">
+                <a:solidFill>
+                  <a:srgbClr val="000000"/>
+                </a:solidFill>
+                <a:latin typeface="맑은 고딕"/>
+                <a:ea typeface="맑은 고딕"/>
+              </a:rPr>
+              <a:t>이유</a:t>
+            </a:r>
+            <a:r>
+              <a:rPr sz="1800" b="0">
+                <a:solidFill>
+                  <a:srgbClr val="000000"/>
+                </a:solidFill>
+                <a:latin typeface="맑은 고딕"/>
+                <a:ea typeface="맑은 고딕"/>
+              </a:rPr>
+              <a:t> —</a:t>
+            </a:r>
+            <a:r>
+              <a:rPr sz="1600" b="0">
+                <a:solidFill>
+                  <a:srgbClr val="000000"/>
+                </a:solidFill>
+                <a:latin typeface="맑은 고딕"/>
+                <a:ea typeface="맑은 고딕"/>
+              </a:rPr>
+              <a:t> 범위가 최초 신청 하나라 별도 서비스나 새 인프라를 둘 근거가 없다. 업무 흐름과 규칙이 결제·저장·기존 쇼핑몰의 구현 방식에 묶이지 않는다. 포트를 대역으로 바꾸면 실제 외부 시스템 없이 업무 결과를 확인할 수 있다.</a:t>
             </a:r>
           </a:p>
         </p:txBody>
       </p:sp>
-      <p:pic>
-        <p:nvPicPr>
-          <p:cNvPr id="10" name="plantuml Diagram 6"/>
-          <p:cNvPicPr>
-            <a:picLocks noChangeAspect="1"/>
-          </p:cNvPicPr>
-          <p:nvPr/>
-        </p:nvPicPr>
-        <p:blipFill>
-          <a:blip r:embed="plantumlImage6"/>
-          <a:stretch>
-            <a:fillRect/>
-          </a:stretch>
-        </p:blipFill>
+      <p:sp>
+        <p:nvSpPr>
+          <p:cNvPr id="8" name="슬라이드 번호 개체 틀 2">
+            <a:extLst>
+              <a:ext uri="{FF2B5EF4-FFF2-40B4-BE49-F238E27FC236}">
+                <a16:creationId xmlns:a16="http://schemas.microsoft.com/office/drawing/2014/main" id="{741B75C6-7ED3-AA4C-41B6-F69C599EA447}"/>
+              </a:ext>
+            </a:extLst>
+          </p:cNvPr>
+          <p:cNvSpPr>
+            <a:spLocks noGrp="1"/>
+          </p:cNvSpPr>
+          <p:nvPr>
+            <p:ph type="sldNum" sz="quarter" idx="10"/>
+          </p:nvPr>
+        </p:nvSpPr>
         <p:spPr>
           <a:xfrm>
-            <a:off x="1193067" y="2363099"/>
-            <a:ext cx="6757865" cy="2083288"/>
+            <a:off x="3508472" y="6449625"/>
+            <a:ext cx="2133600" cy="238277"/>
+          </a:xfrm>
+        </p:spPr>
+        <p:txBody>
+          <a:bodyPr>
+            <a:normAutofit/>
+          </a:bodyPr>
+          <a:lstStyle/>
+          <a:p>
+            <a:pPr marL="0" marR="0" lvl="0" indent="0" algn="ctr" defTabSz="457200" rtl="0" eaLnBrk="1" fontAlgn="auto" latinLnBrk="0" hangingPunct="1">
+              <a:lnSpc>
+                <a:spcPct val="100000"/>
+              </a:lnSpc>
+              <a:spcBef>
+                <a:spcPts val="0"/>
+              </a:spcBef>
+              <a:spcAft>
+                <a:spcPts val="600"/>
+              </a:spcAft>
+              <a:buClrTx/>
+              <a:buSzTx/>
+              <a:buFontTx/>
+              <a:buNone/>
+              <a:tabLst/>
+              <a:defRPr/>
+            </a:pPr>
+            <a:r>
+              <a:rPr kumimoji="0" lang="en-US" altLang="ko-KR" sz="800" b="0" i="0" u="none" strike="noStrike" kern="1200" cap="none" spc="0" normalizeH="0" baseline="0" noProof="0">
+                <a:ln>
+                  <a:noFill/>
+                </a:ln>
+                <a:solidFill>
+                  <a:prstClr val="black"/>
+                </a:solidFill>
+                <a:effectLst/>
+                <a:uLnTx/>
+                <a:uFillTx/>
+                <a:latin typeface="맑은 고딕" panose="020B0503020000020004" pitchFamily="34" charset="-127"/>
+                <a:ea typeface="맑은 고딕" panose="020B0503020000020004" pitchFamily="34" charset="-127"/>
+                <a:cs typeface="+mn-cs"/>
+              </a:rPr>
+              <a:t>- 19 -</a:t>
+            </a:r>
+          </a:p>
+        </p:txBody>
+      </p:sp>
+      <p:sp>
+        <p:nvSpPr>
+          <p:cNvPr id="14" name="TextBox 12">
+            <a:extLst>
+              <a:ext uri="{FF2B5EF4-FFF2-40B4-BE49-F238E27FC236}">
+                <a16:creationId xmlns:a16="http://schemas.microsoft.com/office/drawing/2014/main" id="{654EDDB4-901F-3D48-A715-17D163E8A7AC}"/>
+              </a:ext>
+            </a:extLst>
+          </p:cNvPr>
+          <p:cNvSpPr txBox="1"/>
+          <p:nvPr/>
+        </p:nvSpPr>
+        <p:spPr>
+          <a:xfrm>
+            <a:off x="365760" y="3886200"/>
+            <a:ext cx="8412480" cy="222250"/>
           </a:xfrm>
           <a:prstGeom prst="rect">
             <a:avLst/>
           </a:prstGeom>
+          <a:noFill/>
         </p:spPr>
-      </p:pic>
+        <p:txBody>
+          <a:bodyPr wrap="square" tIns="0" bIns="0">
+            <a:spAutoFit/>
+          </a:bodyPr>
+          <a:lstStyle/>
+          <a:p>
+            <a:pPr algn="ctr">
+              <a:spcBef>
+                <a:spcPts val="0"/>
+              </a:spcBef>
+              <a:spcAft>
+                <a:spcPts val="0"/>
+              </a:spcAft>
+            </a:pPr>
+            <a:r>
+              <a:rPr sz="1400" b="1">
+                <a:solidFill>
+                  <a:srgbClr val="000000"/>
+                </a:solidFill>
+                <a:latin typeface="맑은 고딕"/>
+                <a:ea typeface="맑은 고딕"/>
+              </a:rPr>
+              <a:t>패키지와 책임</a:t>
+            </a:r>
+          </a:p>
+        </p:txBody>
+      </p:sp>
     </p:spTree>
     <p:extLst>
       <p:ext uri="{BB962C8B-B14F-4D97-AF65-F5344CB8AC3E}">
-        <p14:creationId xmlns:p14="http://schemas.microsoft.com/office/powerpoint/2010/main" val="3555436673"/>
+        <p14:creationId xmlns:p14="http://schemas.microsoft.com/office/powerpoint/2010/main" val="2789569477"/>
       </p:ext>
     </p:extLst>
   </p:cSld>
@@ -13358,17 +14708,7 @@
                 <a:latin typeface="맑은 고딕"/>
                 <a:ea typeface="맑은 고딕"/>
               </a:rPr>
-              <a:t>의존 규칙 </a:t>
-            </a:r>
-            <a:r>
-              <a:rPr sz="1800" b="1">
-                <a:solidFill>
-                  <a:srgbClr val="000000"/>
-                </a:solidFill>
-                <a:latin typeface="맑은 고딕"/>
-                <a:ea typeface="맑은 고딕"/>
-              </a:rPr>
-              <a:t>(안)</a:t>
+              <a:t>패키지 다이어그램</a:t>
             </a:r>
           </a:p>
           <a:p>
@@ -13516,8 +14856,8 @@
         </p:nvSpPr>
         <p:spPr>
           <a:xfrm>
-            <a:off x="233172" y="1616364"/>
-            <a:ext cx="4338828" cy="4696101"/>
+            <a:off x="365760" y="960120"/>
+            <a:ext cx="8412480" cy="2514600"/>
           </a:xfrm>
         </p:spPr>
         <p:txBody>
@@ -13526,184 +14866,100 @@
           </a:bodyPr>
           <a:lstStyle/>
           <a:p>
-            <a:pPr lvl="2" marL="228600" indent="-182880">
+            <a:pPr marL="0" indent="0">
               <a:spcBef>
-                <a:spcPts val="300"/>
+                <a:spcPts val="600"/>
               </a:spcBef>
               <a:spcAft>
-                <a:spcPts val="300"/>
+                <a:spcPts val="600"/>
+              </a:spcAft>
+              <a:buNone/>
+            </a:pPr>
+            <a:r>
+              <a:rPr sz="1800" b="0">
+                <a:solidFill>
+                  <a:srgbClr val="000000"/>
+                </a:solidFill>
+                <a:latin typeface="맑은 고딕"/>
+                <a:ea typeface="맑은 고딕"/>
+              </a:rPr>
+              <a:t>화살표는 </a:t>
+            </a:r>
+            <a:r>
+              <a:rPr sz="1800" b="1">
+                <a:solidFill>
+                  <a:srgbClr val="000000"/>
+                </a:solidFill>
+                <a:latin typeface="맑은 고딕"/>
+                <a:ea typeface="맑은 고딕"/>
+              </a:rPr>
+              <a:t>코드 의존</a:t>
+            </a:r>
+            <a:r>
+              <a:rPr sz="1800" b="0">
+                <a:solidFill>
+                  <a:srgbClr val="000000"/>
+                </a:solidFill>
+                <a:latin typeface="맑은 고딕"/>
+                <a:ea typeface="맑은 고딕"/>
+              </a:rPr>
+              <a:t>이다 —</a:t>
+            </a:r>
+            <a:r>
+              <a:rPr sz="1600" b="0">
+                <a:solidFill>
+                  <a:srgbClr val="000000"/>
+                </a:solidFill>
+                <a:latin typeface="맑은 고딕"/>
+                <a:ea typeface="맑은 고딕"/>
+              </a:rPr>
+              <a:t> A의 코드가 B의 타입이나 인터페이스를 참조하며 호출 순서가 아니다. </a:t>
+            </a:r>
+            <a:r>
+              <a:rPr sz="1600" b="1">
+                <a:solidFill>
+                  <a:srgbClr val="000000"/>
+                </a:solidFill>
+                <a:latin typeface="맑은 고딕"/>
+                <a:ea typeface="맑은 고딕"/>
+              </a:rPr>
+              <a:t>점선</a:t>
+            </a:r>
+            <a:r>
+              <a:rPr sz="1600" b="0">
+                <a:solidFill>
+                  <a:srgbClr val="000000"/>
+                </a:solidFill>
+                <a:latin typeface="맑은 고딕"/>
+                <a:ea typeface="맑은 고딕"/>
+              </a:rPr>
+              <a:t>은 신청 업무가 소유한 포트의 이름과, 단일 API인지 정하지 않은 기존 쇼핑몰을 가리킨다.</a:t>
+            </a:r>
+          </a:p>
+          <a:p>
+            <a:pPr lvl="2" marL="723900" indent="-368300">
+              <a:spcBef>
+                <a:spcPts val="600"/>
+              </a:spcBef>
+              <a:spcAft>
+                <a:spcPts val="600"/>
               </a:spcAft>
               <a:buSzPct val="90000"/>
               <a:buFont typeface="Wingdings" pitchFamily="2" charset="2"/>
               <a:buChar char=""/>
             </a:pPr>
             <a:r>
-              <a:rPr sz="1400" b="1">
-                <a:solidFill>
-                  <a:srgbClr val="000000"/>
-                </a:solidFill>
-                <a:latin typeface="맑은 고딕"/>
-                <a:ea typeface="맑은 고딕"/>
-              </a:rPr>
-              <a:t>허용한 의존</a:t>
-            </a:r>
-          </a:p>
-          <a:p>
-            <a:pPr lvl="2" marL="228600" indent="-182880">
-              <a:spcBef>
-                <a:spcPts val="300"/>
-              </a:spcBef>
-              <a:spcAft>
-                <a:spcPts val="300"/>
-              </a:spcAft>
-              <a:buSzPct val="90000"/>
-              <a:buFont typeface="Wingdings" pitchFamily="2" charset="2"/>
-              <a:buChar char=""/>
-            </a:pPr>
-            <a:r>
-              <a:rPr sz="1400" b="1">
-                <a:solidFill>
-                  <a:srgbClr val="000000"/>
-                </a:solidFill>
-                <a:latin typeface="맑은 고딕"/>
-                <a:ea typeface="맑은 고딕"/>
-              </a:rPr>
-              <a:t>subscription</a:t>
-            </a:r>
-            <a:r>
-              <a:rPr sz="1400" b="0">
-                <a:solidFill>
-                  <a:srgbClr val="000000"/>
-                </a:solidFill>
-                <a:latin typeface="맑은 고딕"/>
-                <a:ea typeface="맑은 고딕"/>
-              </a:rPr>
-              <a:t> → payment·delivery·product의 업무 인터페이스.</a:t>
-            </a:r>
-          </a:p>
-          <a:p>
-            <a:pPr lvl="2" marL="228600" indent="-182880">
-              <a:spcBef>
-                <a:spcPts val="300"/>
-              </a:spcBef>
-              <a:spcAft>
-                <a:spcPts val="300"/>
-              </a:spcAft>
-              <a:buSzPct val="90000"/>
-              <a:buFont typeface="Wingdings" pitchFamily="2" charset="2"/>
-              <a:buChar char=""/>
-            </a:pPr>
-            <a:r>
-              <a:rPr sz="1400" b="1">
-                <a:solidFill>
-                  <a:srgbClr val="000000"/>
-                </a:solidFill>
-                <a:latin typeface="맑은 고딕"/>
-                <a:ea typeface="맑은 고딕"/>
-              </a:rPr>
-              <a:t>paymentadapter / deliveryadapter / productadapter</a:t>
-            </a:r>
-            <a:r>
-              <a:rPr sz="1400" b="0">
-                <a:solidFill>
-                  <a:srgbClr val="000000"/>
-                </a:solidFill>
-                <a:latin typeface="맑은 고딕"/>
-                <a:ea typeface="맑은 고딕"/>
-              </a:rPr>
-              <a:t> → 해당 업무 인터페이스.</a:t>
-            </a:r>
-          </a:p>
-          <a:p>
-            <a:pPr lvl="2" marL="228600" indent="-182880">
-              <a:spcBef>
-                <a:spcPts val="300"/>
-              </a:spcBef>
-              <a:spcAft>
-                <a:spcPts val="300"/>
-              </a:spcAft>
-              <a:buSzPct val="90000"/>
-              <a:buFont typeface="Wingdings" pitchFamily="2" charset="2"/>
-              <a:buChar char=""/>
-            </a:pPr>
-            <a:r>
-              <a:rPr sz="1400" b="1">
-                <a:solidFill>
-                  <a:srgbClr val="000000"/>
-                </a:solidFill>
-                <a:latin typeface="맑은 고딕"/>
-                <a:ea typeface="맑은 고딕"/>
-              </a:rPr>
-              <a:t>persistence</a:t>
-            </a:r>
-            <a:r>
-              <a:rPr sz="1400" b="0">
-                <a:solidFill>
-                  <a:srgbClr val="000000"/>
-                </a:solidFill>
-                <a:latin typeface="맑은 고딕"/>
-                <a:ea typeface="맑은 고딕"/>
-              </a:rPr>
-              <a:t> → subscription의 저장소 인터페이스.</a:t>
-            </a:r>
-          </a:p>
-          <a:p>
-            <a:pPr lvl="2" marL="228600" indent="-182880">
-              <a:spcBef>
-                <a:spcPts val="300"/>
-              </a:spcBef>
-              <a:spcAft>
-                <a:spcPts val="300"/>
-              </a:spcAft>
-              <a:buSzPct val="90000"/>
-              <a:buFont typeface="Wingdings" pitchFamily="2" charset="2"/>
-              <a:buChar char=""/>
-            </a:pPr>
-            <a:r>
-              <a:rPr sz="1400" b="1">
-                <a:solidFill>
-                  <a:srgbClr val="000000"/>
-                </a:solidFill>
-                <a:latin typeface="맑은 고딕"/>
-                <a:ea typeface="맑은 고딕"/>
-              </a:rPr>
-              <a:t>product</a:t>
-            </a:r>
-            <a:r>
-              <a:rPr sz="1400" b="0">
-                <a:solidFill>
-                  <a:srgbClr val="000000"/>
-                </a:solidFill>
-                <a:latin typeface="맑은 고딕"/>
-                <a:ea typeface="맑은 고딕"/>
-              </a:rPr>
-              <a:t> → payment의 금액 타입.</a:t>
-            </a:r>
-          </a:p>
-          <a:p>
-            <a:pPr lvl="2" marL="228600" indent="-182880">
-              <a:spcBef>
-                <a:spcPts val="300"/>
-              </a:spcBef>
-              <a:spcAft>
-                <a:spcPts val="300"/>
-              </a:spcAft>
-              <a:buSzPct val="90000"/>
-              <a:buFont typeface="Wingdings" pitchFamily="2" charset="2"/>
-              <a:buChar char=""/>
-            </a:pPr>
-            <a:r>
-              <a:rPr sz="1400" b="1">
-                <a:solidFill>
-                  <a:srgbClr val="000000"/>
-                </a:solidFill>
-                <a:latin typeface="맑은 고딕"/>
-                <a:ea typeface="맑은 고딕"/>
-              </a:rPr>
-              <a:t>조립 코드</a:t>
-            </a:r>
-            <a:r>
-              <a:rPr sz="1400" b="0">
+              <a:rPr sz="1800" b="1">
+                <a:solidFill>
+                  <a:srgbClr val="000000"/>
+                </a:solidFill>
+                <a:latin typeface="맑은 고딕"/>
+                <a:ea typeface="맑은 고딕"/>
+              </a:rPr>
+              <a:t>실행 호출과 코드 의존은 반대다</a:t>
+            </a:r>
+            <a:r>
+              <a:rPr sz="1800" b="0">
                 <a:solidFill>
                   <a:srgbClr val="000000"/>
                 </a:solidFill>
@@ -13713,131 +14969,47 @@
               <a:t> —</a:t>
             </a:r>
             <a:r>
-              <a:rPr sz="1200" b="0">
-                <a:solidFill>
-                  <a:srgbClr val="000000"/>
-                </a:solidFill>
-                <a:latin typeface="맑은 고딕"/>
-                <a:ea typeface="맑은 고딕"/>
-              </a:rPr>
-              <a:t> 업무 밖에서 구현체를 골라 주입한다.</a:t>
-            </a:r>
-          </a:p>
-          <a:p>
-            <a:pPr lvl="2" marL="228600" indent="-182880">
-              <a:spcBef>
-                <a:spcPts val="300"/>
-              </a:spcBef>
-              <a:spcAft>
-                <a:spcPts val="300"/>
-              </a:spcAft>
-              <a:buSzPct val="90000"/>
-              <a:buFont typeface="Wingdings" pitchFamily="2" charset="2"/>
-              <a:buChar char=""/>
-            </a:pPr>
-            <a:r>
-              <a:rPr sz="1400" b="1">
-                <a:solidFill>
-                  <a:srgbClr val="000000"/>
-                </a:solidFill>
-                <a:latin typeface="맑은 고딕"/>
-                <a:ea typeface="맑은 고딕"/>
-              </a:rPr>
-              <a:t>금지한 의존</a:t>
-            </a:r>
-          </a:p>
-          <a:p>
-            <a:pPr lvl="2" marL="228600" indent="-182880">
-              <a:spcBef>
-                <a:spcPts val="300"/>
-              </a:spcBef>
-              <a:spcAft>
-                <a:spcPts val="300"/>
-              </a:spcAft>
-              <a:buSzPct val="90000"/>
-              <a:buFont typeface="Wingdings" pitchFamily="2" charset="2"/>
-              <a:buChar char=""/>
-            </a:pPr>
-            <a:r>
-              <a:rPr sz="1400" b="1">
-                <a:solidFill>
-                  <a:srgbClr val="000000"/>
-                </a:solidFill>
-                <a:latin typeface="맑은 고딕"/>
-                <a:ea typeface="맑은 고딕"/>
-              </a:rPr>
-              <a:t>업무 → 구현</a:t>
-            </a:r>
-            <a:r>
-              <a:rPr sz="1400" b="0">
-                <a:solidFill>
-                  <a:srgbClr val="000000"/>
-                </a:solidFill>
-                <a:latin typeface="맑은 고딕"/>
-                <a:ea typeface="맑은 고딕"/>
-              </a:rPr>
-              <a:t> —</a:t>
-            </a:r>
-            <a:r>
-              <a:rPr sz="1200" b="0">
-                <a:solidFill>
-                  <a:srgbClr val="000000"/>
-                </a:solidFill>
-                <a:latin typeface="맑은 고딕"/>
-                <a:ea typeface="맑은 고딕"/>
-              </a:rPr>
-              <a:t> subscription·payment·delivery·product에서 연동 패키지 또는 persistence를 참조할 수 없다.</a:t>
+              <a:rPr sz="1600" b="0">
+                <a:solidFill>
+                  <a:srgbClr val="000000"/>
+                </a:solidFill>
+                <a:latin typeface="맑은 고딕"/>
+                <a:ea typeface="맑은 고딕"/>
+              </a:rPr>
+              <a:t> 실행 중에는 신청 업무가 포트로 연계와 저장을 호출하지만, 코드에서는 연계와 저장이 신청 업무의 포트를 구현한다.</a:t>
             </a:r>
           </a:p>
         </p:txBody>
       </p:sp>
       <p:sp>
         <p:nvSpPr>
-          <p:cNvPr id="9" name="내용 개체 틀 7">
+          <p:cNvPr id="9" name="TextBox 12">
             <a:extLst>
               <a:ext uri="{FF2B5EF4-FFF2-40B4-BE49-F238E27FC236}">
-                <a16:creationId xmlns:a16="http://schemas.microsoft.com/office/drawing/2014/main" id="{BEBA2C4A-B0BF-F2E4-EA6E-614C99CBA184}"/>
+                <a16:creationId xmlns:a16="http://schemas.microsoft.com/office/drawing/2014/main" id="{654EDDB4-901F-3D48-A715-17D163E8A7AC}"/>
               </a:ext>
             </a:extLst>
           </p:cNvPr>
-          <p:cNvSpPr>
-            <a:spLocks noGrp="1"/>
-          </p:cNvSpPr>
-          <p:nvPr>
-            <p:ph idx="1"/>
-          </p:nvPr>
+          <p:cNvSpPr txBox="1"/>
+          <p:nvPr/>
         </p:nvSpPr>
         <p:spPr>
           <a:xfrm>
-            <a:off x="233172" y="960120"/>
-            <a:ext cx="8778240" cy="656244"/>
+            <a:off x="365760" y="3060192"/>
+            <a:ext cx="8412480" cy="201168"/>
           </a:xfrm>
+          <a:prstGeom prst="rect">
+            <a:avLst/>
+          </a:prstGeom>
+          <a:noFill/>
         </p:spPr>
         <p:txBody>
-          <a:bodyPr>
-            <a:normAutofit/>
+          <a:bodyPr wrap="square">
+            <a:spAutoFit/>
           </a:bodyPr>
           <a:lstStyle/>
           <a:p>
-            <a:pPr marL="0" indent="0">
-              <a:spcBef>
-                <a:spcPts val="300"/>
-              </a:spcBef>
-              <a:spcAft>
-                <a:spcPts val="300"/>
-              </a:spcAft>
-              <a:buNone/>
-            </a:pPr>
-            <a:r>
-              <a:rPr sz="1400" b="0">
-                <a:solidFill>
-                  <a:srgbClr val="000000"/>
-                </a:solidFill>
-                <a:latin typeface="맑은 고딕"/>
-                <a:ea typeface="맑은 고딕"/>
-              </a:rPr>
-              <a:t>업무 패키지는 </a:t>
-            </a:r>
+            <a:pPr algn="ctr"/>
             <a:r>
               <a:rPr sz="1400" b="1">
                 <a:solidFill>
@@ -13846,288 +15018,35 @@
                 <a:latin typeface="맑은 고딕"/>
                 <a:ea typeface="맑은 고딕"/>
               </a:rPr>
-              <a:t>인터페이스로 외부를 알고 구현에는 의존하지 않는다</a:t>
-            </a:r>
-            <a:r>
-              <a:rPr sz="1400" b="0">
-                <a:solidFill>
-                  <a:srgbClr val="000000"/>
-                </a:solidFill>
-                <a:latin typeface="맑은 고딕"/>
-                <a:ea typeface="맑은 고딕"/>
-              </a:rPr>
-              <a:t>. 승인·거절과 생성 회차는 외부 시스템 없이 검사하는 구조로 결정했다.</a:t>
+              <a:t>정기배송 모듈의 패키지 의존</a:t>
             </a:r>
           </a:p>
         </p:txBody>
       </p:sp>
-      <p:sp>
-        <p:nvSpPr>
-          <p:cNvPr id="10" name="내용 개체 틀 7">
-            <a:extLst>
-              <a:ext uri="{FF2B5EF4-FFF2-40B4-BE49-F238E27FC236}">
-                <a16:creationId xmlns:a16="http://schemas.microsoft.com/office/drawing/2014/main" id="{BEBA2C4A-B0BF-F2E4-EA6E-614C99CBA184}"/>
-              </a:ext>
-            </a:extLst>
-          </p:cNvPr>
-          <p:cNvSpPr>
-            <a:spLocks noGrp="1"/>
-          </p:cNvSpPr>
-          <p:nvPr>
-            <p:ph idx="1"/>
-          </p:nvPr>
-        </p:nvSpPr>
+      <p:pic>
+        <p:nvPicPr>
+          <p:cNvPr id="10" name="mermaid Diagram 3"/>
+          <p:cNvPicPr>
+            <a:picLocks noChangeAspect="1"/>
+          </p:cNvPicPr>
+          <p:nvPr/>
+        </p:nvPicPr>
+        <p:blipFill>
+          <a:blip r:embed="mermaidImage3"/>
+          <a:stretch>
+            <a:fillRect/>
+          </a:stretch>
+        </p:blipFill>
         <p:spPr>
           <a:xfrm>
-            <a:off x="4572000" y="1616364"/>
-            <a:ext cx="4439412" cy="4696101"/>
+            <a:off x="2160588" y="3297936"/>
+            <a:ext cx="4822825" cy="2626717"/>
           </a:xfrm>
+          <a:prstGeom prst="rect">
+            <a:avLst/>
+          </a:prstGeom>
         </p:spPr>
-        <p:txBody>
-          <a:bodyPr>
-            <a:normAutofit/>
-          </a:bodyPr>
-          <a:lstStyle/>
-          <a:p>
-            <a:pPr lvl="2" marL="228600" indent="-182880">
-              <a:spcBef>
-                <a:spcPts val="300"/>
-              </a:spcBef>
-              <a:spcAft>
-                <a:spcPts val="300"/>
-              </a:spcAft>
-              <a:buSzPct val="90000"/>
-              <a:buFont typeface="Wingdings" pitchFamily="2" charset="2"/>
-              <a:buChar char=""/>
-            </a:pPr>
-            <a:r>
-              <a:rPr sz="1400" b="1">
-                <a:solidFill>
-                  <a:srgbClr val="000000"/>
-                </a:solidFill>
-                <a:latin typeface="맑은 고딕"/>
-                <a:ea typeface="맑은 고딕"/>
-              </a:rPr>
-              <a:t>순환</a:t>
-            </a:r>
-            <a:r>
-              <a:rPr sz="1400" b="0">
-                <a:solidFill>
-                  <a:srgbClr val="000000"/>
-                </a:solidFill>
-                <a:latin typeface="맑은 고딕"/>
-                <a:ea typeface="맑은 고딕"/>
-              </a:rPr>
-              <a:t> —</a:t>
-            </a:r>
-            <a:r>
-              <a:rPr sz="1200" b="0">
-                <a:solidFill>
-                  <a:srgbClr val="000000"/>
-                </a:solidFill>
-                <a:latin typeface="맑은 고딕"/>
-                <a:ea typeface="맑은 고딕"/>
-              </a:rPr>
-              <a:t> 패키지 의존 경로가 출발점으로 돌아올 수 없다. subscription → payment → subscription도 금지다.</a:t>
-            </a:r>
-          </a:p>
-          <a:p>
-            <a:pPr lvl="2" marL="228600" indent="-182880">
-              <a:spcBef>
-                <a:spcPts val="300"/>
-              </a:spcBef>
-              <a:spcAft>
-                <a:spcPts val="300"/>
-              </a:spcAft>
-              <a:buSzPct val="90000"/>
-              <a:buFont typeface="Wingdings" pitchFamily="2" charset="2"/>
-              <a:buChar char=""/>
-            </a:pPr>
-            <a:r>
-              <a:rPr sz="1400" b="1">
-                <a:solidFill>
-                  <a:srgbClr val="000000"/>
-                </a:solidFill>
-                <a:latin typeface="맑은 고딕"/>
-                <a:ea typeface="맑은 고딕"/>
-              </a:rPr>
-              <a:t>검증 구조</a:t>
-            </a:r>
-          </a:p>
-          <a:p>
-            <a:pPr lvl="2" marL="228600" indent="-182880">
-              <a:spcBef>
-                <a:spcPts val="300"/>
-              </a:spcBef>
-              <a:spcAft>
-                <a:spcPts val="300"/>
-              </a:spcAft>
-              <a:buSzPct val="90000"/>
-              <a:buFont typeface="Wingdings" pitchFamily="2" charset="2"/>
-              <a:buChar char=""/>
-            </a:pPr>
-            <a:r>
-              <a:rPr sz="1400" b="1">
-                <a:solidFill>
-                  <a:srgbClr val="000000"/>
-                </a:solidFill>
-                <a:latin typeface="맑은 고딕"/>
-                <a:ea typeface="맑은 고딕"/>
-              </a:rPr>
-              <a:t>결제 포트</a:t>
-            </a:r>
-            <a:r>
-              <a:rPr sz="1400" b="0">
-                <a:solidFill>
-                  <a:srgbClr val="000000"/>
-                </a:solidFill>
-                <a:latin typeface="맑은 고딕"/>
-                <a:ea typeface="맑은 고딕"/>
-              </a:rPr>
-              <a:t> —</a:t>
-            </a:r>
-            <a:r>
-              <a:rPr sz="1200" b="0">
-                <a:solidFill>
-                  <a:srgbClr val="000000"/>
-                </a:solidFill>
-                <a:latin typeface="맑은 고딕"/>
-                <a:ea typeface="맑은 고딕"/>
-              </a:rPr>
-              <a:t> 테스트 대역이 카드 X 거절·카드 Y 승인을 반환한다.</a:t>
-            </a:r>
-          </a:p>
-          <a:p>
-            <a:pPr lvl="2" marL="228600" indent="-182880">
-              <a:spcBef>
-                <a:spcPts val="300"/>
-              </a:spcBef>
-              <a:spcAft>
-                <a:spcPts val="300"/>
-              </a:spcAft>
-              <a:buSzPct val="90000"/>
-              <a:buFont typeface="Wingdings" pitchFamily="2" charset="2"/>
-              <a:buChar char=""/>
-            </a:pPr>
-            <a:r>
-              <a:rPr sz="1400" b="1">
-                <a:solidFill>
-                  <a:srgbClr val="000000"/>
-                </a:solidFill>
-                <a:latin typeface="맑은 고딕"/>
-                <a:ea typeface="맑은 고딕"/>
-              </a:rPr>
-              <a:t>저장소 포트</a:t>
-            </a:r>
-            <a:r>
-              <a:rPr sz="1400" b="0">
-                <a:solidFill>
-                  <a:srgbClr val="000000"/>
-                </a:solidFill>
-                <a:latin typeface="맑은 고딕"/>
-                <a:ea typeface="맑은 고딕"/>
-              </a:rPr>
-              <a:t> —</a:t>
-            </a:r>
-            <a:r>
-              <a:rPr sz="1200" b="0">
-                <a:solidFill>
-                  <a:srgbClr val="000000"/>
-                </a:solidFill>
-                <a:latin typeface="맑은 고딕"/>
-                <a:ea typeface="맑은 고딕"/>
-              </a:rPr>
-              <a:t> 메모리 대역에서 같은 신청과 생성 회차를 관찰한다.</a:t>
-            </a:r>
-          </a:p>
-          <a:p>
-            <a:pPr lvl="2" marL="228600" indent="-182880">
-              <a:spcBef>
-                <a:spcPts val="300"/>
-              </a:spcBef>
-              <a:spcAft>
-                <a:spcPts val="300"/>
-              </a:spcAft>
-              <a:buSzPct val="90000"/>
-              <a:buFont typeface="Wingdings" pitchFamily="2" charset="2"/>
-              <a:buChar char=""/>
-            </a:pPr>
-            <a:r>
-              <a:rPr sz="1400" b="1">
-                <a:solidFill>
-                  <a:srgbClr val="000000"/>
-                </a:solidFill>
-                <a:latin typeface="맑은 고딕"/>
-                <a:ea typeface="맑은 고딕"/>
-              </a:rPr>
-              <a:t>예상 결과</a:t>
-            </a:r>
-            <a:r>
-              <a:rPr sz="1400" b="0">
-                <a:solidFill>
-                  <a:srgbClr val="000000"/>
-                </a:solidFill>
-                <a:latin typeface="맑은 고딕"/>
-                <a:ea typeface="맑은 고딕"/>
-              </a:rPr>
-              <a:t> —</a:t>
-            </a:r>
-            <a:r>
-              <a:rPr sz="1200" b="0">
-                <a:solidFill>
-                  <a:srgbClr val="000000"/>
-                </a:solidFill>
-                <a:latin typeface="맑은 고딕"/>
-                <a:ea typeface="맑은 고딕"/>
-              </a:rPr>
-              <a:t> 거절은 결제 대기·회차 0개, 재결제 승인은 확정·예정 회차 7개다.</a:t>
-            </a:r>
-          </a:p>
-          <a:p>
-            <a:pPr lvl="2" marL="228600" indent="-182880">
-              <a:spcBef>
-                <a:spcPts val="300"/>
-              </a:spcBef>
-              <a:spcAft>
-                <a:spcPts val="300"/>
-              </a:spcAft>
-              <a:buSzPct val="90000"/>
-              <a:buFont typeface="Wingdings" pitchFamily="2" charset="2"/>
-              <a:buChar char=""/>
-            </a:pPr>
-            <a:r>
-              <a:rPr sz="1400" b="1">
-                <a:solidFill>
-                  <a:srgbClr val="000000"/>
-                </a:solidFill>
-                <a:latin typeface="맑은 고딕"/>
-                <a:ea typeface="맑은 고딕"/>
-              </a:rPr>
-              <a:t>구조 검사</a:t>
-            </a:r>
-            <a:r>
-              <a:rPr sz="1400" b="0">
-                <a:solidFill>
-                  <a:srgbClr val="000000"/>
-                </a:solidFill>
-                <a:latin typeface="맑은 고딕"/>
-                <a:ea typeface="맑은 고딕"/>
-              </a:rPr>
-              <a:t> —</a:t>
-            </a:r>
-            <a:r>
-              <a:rPr sz="1200" b="0">
-                <a:solidFill>
-                  <a:srgbClr val="000000"/>
-                </a:solidFill>
-                <a:latin typeface="맑은 고딕"/>
-                <a:ea typeface="맑은 고딕"/>
-              </a:rPr>
-              <a:t> 컴파일된 클래스의 금지 의존과 순환을 판정한다. 위반 시 패키지 경로를 출력하고 실패한다.</a:t>
-            </a:r>
-          </a:p>
-        </p:txBody>
-      </p:sp>
+      </p:pic>
     </p:spTree>
     <p:extLst>
       <p:ext uri="{BB962C8B-B14F-4D97-AF65-F5344CB8AC3E}">
@@ -14193,17 +15112,7 @@
                 <a:latin typeface="맑은 고딕"/>
                 <a:ea typeface="맑은 고딕"/>
               </a:rPr>
-              <a:t>외부 연동 규격 </a:t>
-            </a:r>
-            <a:r>
-              <a:rPr sz="1800" b="1">
-                <a:solidFill>
-                  <a:srgbClr val="000000"/>
-                </a:solidFill>
-                <a:latin typeface="맑은 고딕"/>
-                <a:ea typeface="맑은 고딕"/>
-              </a:rPr>
-              <a:t>(안)</a:t>
+              <a:t>의존 규칙</a:t>
             </a:r>
           </a:p>
           <a:p>
@@ -14351,8 +15260,8 @@
         </p:nvSpPr>
         <p:spPr>
           <a:xfrm>
-            <a:off x="233172" y="1616364"/>
-            <a:ext cx="4338828" cy="4696101"/>
+            <a:off x="233172" y="1414318"/>
+            <a:ext cx="4338828" cy="4898147"/>
           </a:xfrm>
         </p:spPr>
         <p:txBody>
@@ -14380,7 +15289,149 @@
                 <a:latin typeface="맑은 고딕"/>
                 <a:ea typeface="맑은 고딕"/>
               </a:rPr>
-              <a:t>상품 조회 계약</a:t>
+              <a:t>허용</a:t>
+            </a:r>
+            <a:r>
+              <a:rPr sz="1400" b="0">
+                <a:solidFill>
+                  <a:srgbClr val="000000"/>
+                </a:solidFill>
+                <a:latin typeface="맑은 고딕"/>
+                <a:ea typeface="맑은 고딕"/>
+              </a:rPr>
+              <a:t> —</a:t>
+            </a:r>
+            <a:r>
+              <a:rPr sz="1200" b="0">
+                <a:solidFill>
+                  <a:srgbClr val="000000"/>
+                </a:solidFill>
+                <a:latin typeface="맑은 고딕"/>
+                <a:ea typeface="맑은 고딕"/>
+              </a:rPr>
+              <a:t> 도식에 있는 의존만</a:t>
+            </a:r>
+          </a:p>
+          <a:p>
+            <a:pPr lvl="3" marL="457200" indent="-182880">
+              <a:spcBef>
+                <a:spcPts val="300"/>
+              </a:spcBef>
+              <a:spcAft>
+                <a:spcPts val="300"/>
+              </a:spcAft>
+              <a:buSzPct val="90000"/>
+              <a:buFont typeface="Wingdings" pitchFamily="2" charset="2"/>
+              <a:buChar char=""/>
+            </a:pPr>
+            <a:r>
+              <a:rPr sz="1200" b="0">
+                <a:solidFill>
+                  <a:srgbClr val="000000"/>
+                </a:solidFill>
+                <a:latin typeface="맑은 고딕"/>
+                <a:ea typeface="맑은 고딕"/>
+              </a:rPr>
+              <a:t>기존 요청 진입부 → 신청 업무</a:t>
+            </a:r>
+          </a:p>
+          <a:p>
+            <a:pPr lvl="3" marL="457200" indent="-182880">
+              <a:spcBef>
+                <a:spcPts val="300"/>
+              </a:spcBef>
+              <a:spcAft>
+                <a:spcPts val="300"/>
+              </a:spcAft>
+              <a:buSzPct val="90000"/>
+              <a:buFont typeface="Wingdings" pitchFamily="2" charset="2"/>
+              <a:buChar char=""/>
+            </a:pPr>
+            <a:r>
+              <a:rPr sz="1200" b="0">
+                <a:solidFill>
+                  <a:srgbClr val="000000"/>
+                </a:solidFill>
+                <a:latin typeface="맑은 고딕"/>
+                <a:ea typeface="맑은 고딕"/>
+              </a:rPr>
+              <a:t>신청 업무 → 정기배송 규칙</a:t>
+            </a:r>
+          </a:p>
+          <a:p>
+            <a:pPr lvl="3" marL="457200" indent="-182880">
+              <a:spcBef>
+                <a:spcPts val="300"/>
+              </a:spcBef>
+              <a:spcAft>
+                <a:spcPts val="300"/>
+              </a:spcAft>
+              <a:buSzPct val="90000"/>
+              <a:buFont typeface="Wingdings" pitchFamily="2" charset="2"/>
+              <a:buChar char=""/>
+            </a:pPr>
+            <a:r>
+              <a:rPr sz="1200" b="1">
+                <a:solidFill>
+                  <a:srgbClr val="000000"/>
+                </a:solidFill>
+                <a:latin typeface="맑은 고딕"/>
+                <a:ea typeface="맑은 고딕"/>
+              </a:rPr>
+              <a:t>쇼핑몰 연계·신청 저장</a:t>
+            </a:r>
+            <a:r>
+              <a:rPr sz="1200" b="0">
+                <a:solidFill>
+                  <a:srgbClr val="000000"/>
+                </a:solidFill>
+                <a:latin typeface="맑은 고딕"/>
+                <a:ea typeface="맑은 고딕"/>
+              </a:rPr>
+              <a:t> → 신청 업무의 포트, 정기배송 규칙, 각자 필요한 기존 기능</a:t>
+            </a:r>
+          </a:p>
+          <a:p>
+            <a:pPr lvl="3" marL="457200" indent="-182880">
+              <a:spcBef>
+                <a:spcPts val="300"/>
+              </a:spcBef>
+              <a:spcAft>
+                <a:spcPts val="300"/>
+              </a:spcAft>
+              <a:buSzPct val="90000"/>
+              <a:buFont typeface="Wingdings" pitchFamily="2" charset="2"/>
+              <a:buChar char=""/>
+            </a:pPr>
+            <a:r>
+              <a:rPr sz="1200" b="1">
+                <a:solidFill>
+                  <a:srgbClr val="000000"/>
+                </a:solidFill>
+                <a:latin typeface="맑은 고딕"/>
+                <a:ea typeface="맑은 고딕"/>
+              </a:rPr>
+              <a:t>기존 구성 코드</a:t>
+            </a:r>
+            <a:r>
+              <a:rPr sz="1200" b="0">
+                <a:solidFill>
+                  <a:srgbClr val="000000"/>
+                </a:solidFill>
+                <a:latin typeface="맑은 고딕"/>
+                <a:ea typeface="맑은 고딕"/>
+              </a:rPr>
+              <a:t> → 세 패키지</a:t>
+            </a:r>
+            <a:r>
+              <a:rPr sz="800" b="0">
+                <a:solidFill>
+                  <a:srgbClr val="000000"/>
+                </a:solidFill>
+                <a:latin typeface="맑은 고딕"/>
+                <a:ea typeface="맑은 고딕"/>
+              </a:rPr>
+              <a:t>(구현 객체를 만들어 연결할 때만)</a:t>
             </a:r>
           </a:p>
           <a:p>
@@ -14403,31 +15454,11 @@
                 <a:latin typeface="맑은 고딕"/>
                 <a:ea typeface="맑은 고딕"/>
               </a:rPr>
-              <a:t>입력</a:t>
-            </a:r>
-            <a:r>
-              <a:rPr sz="1400" b="0">
-                <a:solidFill>
-                  <a:srgbClr val="000000"/>
-                </a:solidFill>
-                <a:latin typeface="맑은 고딕"/>
-                <a:ea typeface="맑은 고딕"/>
-              </a:rPr>
-              <a:t> —</a:t>
-            </a:r>
-            <a:r>
-              <a:rPr sz="1200" b="0">
-                <a:solidFill>
-                  <a:srgbClr val="000000"/>
-                </a:solidFill>
-                <a:latin typeface="맑은 고딕"/>
-                <a:ea typeface="맑은 고딕"/>
-              </a:rPr>
-              <a:t> 신청할 상품의 식별 정보.</a:t>
-            </a:r>
-          </a:p>
-          <a:p>
-            <a:pPr lvl="2" marL="228600" indent="-182880">
+              <a:t>금지</a:t>
+            </a:r>
+          </a:p>
+          <a:p>
+            <a:pPr lvl="3" marL="457200" indent="-182880">
               <a:spcBef>
                 <a:spcPts val="300"/>
               </a:spcBef>
@@ -14436,29 +15467,9 @@
               </a:spcAft>
               <a:buSzPct val="90000"/>
               <a:buFont typeface="Wingdings" pitchFamily="2" charset="2"/>
-              <a:buChar char=""/>
+              <a:buChar char=""/>
             </a:pPr>
             <a:r>
-              <a:rPr sz="1400" b="1">
-                <a:solidFill>
-                  <a:srgbClr val="000000"/>
-                </a:solidFill>
-                <a:latin typeface="맑은 고딕"/>
-                <a:ea typeface="맑은 고딕"/>
-              </a:rPr>
-              <a:t>결과</a:t>
-            </a:r>
-            <a:r>
-              <a:rPr sz="1400" b="0">
-                <a:solidFill>
-                  <a:srgbClr val="000000"/>
-                </a:solidFill>
-                <a:latin typeface="맑은 고딕"/>
-                <a:ea typeface="맑은 고딕"/>
-              </a:rPr>
-              <a:t> —</a:t>
-            </a:r>
-            <a:r>
               <a:rPr sz="1200" b="0">
                 <a:solidFill>
                   <a:srgbClr val="000000"/>
@@ -14466,11 +15477,11 @@
                 <a:latin typeface="맑은 고딕"/>
                 <a:ea typeface="맑은 고딕"/>
               </a:rPr>
-              <a:t> 상품 정보와 현재 판매가.</a:t>
-            </a:r>
-          </a:p>
-          <a:p>
-            <a:pPr lvl="2" marL="228600" indent="-182880">
+              <a:t>정기배송 규칙에서 다른 패키지로 향하는 의존</a:t>
+            </a:r>
+          </a:p>
+          <a:p>
+            <a:pPr lvl="3" marL="457200" indent="-182880">
               <a:spcBef>
                 <a:spcPts val="300"/>
               </a:spcBef>
@@ -14479,27 +15490,17 @@
               </a:spcAft>
               <a:buSzPct val="90000"/>
               <a:buFont typeface="Wingdings" pitchFamily="2" charset="2"/>
-              <a:buChar char=""/>
+              <a:buChar char=""/>
             </a:pPr>
             <a:r>
-              <a:rPr sz="1400" b="1">
-                <a:solidFill>
-                  <a:srgbClr val="000000"/>
-                </a:solidFill>
-                <a:latin typeface="맑은 고딕"/>
-                <a:ea typeface="맑은 고딕"/>
-              </a:rPr>
-              <a:t>업무 적용</a:t>
-            </a:r>
-            <a:r>
-              <a:rPr sz="1400" b="0">
-                <a:solidFill>
-                  <a:srgbClr val="000000"/>
-                </a:solidFill>
-                <a:latin typeface="맑은 고딕"/>
-                <a:ea typeface="맑은 고딕"/>
-              </a:rPr>
-              <a:t> —</a:t>
+              <a:rPr sz="1200" b="1">
+                <a:solidFill>
+                  <a:srgbClr val="000000"/>
+                </a:solidFill>
+                <a:latin typeface="맑은 고딕"/>
+                <a:ea typeface="맑은 고딕"/>
+              </a:rPr>
+              <a:t>신청 업무</a:t>
             </a:r>
             <a:r>
               <a:rPr sz="1200" b="0">
@@ -14509,11 +15510,11 @@
                 <a:latin typeface="맑은 고딕"/>
                 <a:ea typeface="맑은 고딕"/>
               </a:rPr>
-              <a:t> 신청할 때의 판매가를 항목 단가로 확정한다. 휴지 1묶음의 회차 금액은 10,000원이다.</a:t>
-            </a:r>
-          </a:p>
-          <a:p>
-            <a:pPr lvl="2" marL="228600" indent="-182880">
+              <a:t>에서 쇼핑몰 연계·신청 저장·기존 쇼핑몰 구현으로 향하는 의존</a:t>
+            </a:r>
+          </a:p>
+          <a:p>
+            <a:pPr lvl="3" marL="457200" indent="-182880">
               <a:spcBef>
                 <a:spcPts val="300"/>
               </a:spcBef>
@@ -14522,21 +15523,21 @@
               </a:spcAft>
               <a:buSzPct val="90000"/>
               <a:buFont typeface="Wingdings" pitchFamily="2" charset="2"/>
-              <a:buChar char=""/>
+              <a:buChar char=""/>
             </a:pPr>
             <a:r>
-              <a:rPr sz="1400" b="1">
-                <a:solidFill>
-                  <a:srgbClr val="000000"/>
-                </a:solidFill>
-                <a:latin typeface="맑은 고딕"/>
-                <a:ea typeface="맑은 고딕"/>
-              </a:rPr>
-              <a:t>결제 승인 계약</a:t>
-            </a:r>
-          </a:p>
-          <a:p>
-            <a:pPr lvl="2" marL="228600" indent="-182880">
+              <a:rPr sz="1200" b="0">
+                <a:solidFill>
+                  <a:srgbClr val="000000"/>
+                </a:solidFill>
+                <a:latin typeface="맑은 고딕"/>
+                <a:ea typeface="맑은 고딕"/>
+              </a:rPr>
+              <a:t>쇼핑몰 연계와 신청 저장 사이의 의존</a:t>
+            </a:r>
+          </a:p>
+          <a:p>
+            <a:pPr lvl="3" marL="457200" indent="-182880">
               <a:spcBef>
                 <a:spcPts val="300"/>
               </a:spcBef>
@@ -14545,27 +15546,17 @@
               </a:spcAft>
               <a:buSzPct val="90000"/>
               <a:buFont typeface="Wingdings" pitchFamily="2" charset="2"/>
-              <a:buChar char=""/>
+              <a:buChar char=""/>
             </a:pPr>
             <a:r>
-              <a:rPr sz="1400" b="1">
-                <a:solidFill>
-                  <a:srgbClr val="000000"/>
-                </a:solidFill>
-                <a:latin typeface="맑은 고딕"/>
-                <a:ea typeface="맑은 고딕"/>
-              </a:rPr>
-              <a:t>입력</a:t>
-            </a:r>
-            <a:r>
-              <a:rPr sz="1400" b="0">
-                <a:solidFill>
-                  <a:srgbClr val="000000"/>
-                </a:solidFill>
-                <a:latin typeface="맑은 고딕"/>
-                <a:ea typeface="맑은 고딕"/>
-              </a:rPr>
-              <a:t> —</a:t>
+              <a:rPr sz="1200" b="1">
+                <a:solidFill>
+                  <a:srgbClr val="000000"/>
+                </a:solidFill>
+                <a:latin typeface="맑은 고딕"/>
+                <a:ea typeface="맑은 고딕"/>
+              </a:rPr>
+              <a:t>기존 쇼핑몰</a:t>
             </a:r>
             <a:r>
               <a:rPr sz="1200" b="0">
@@ -14575,11 +15566,21 @@
                 <a:latin typeface="맑은 고딕"/>
                 <a:ea typeface="맑은 고딕"/>
               </a:rPr>
-              <a:t> 같은 신청의 식별 정보, 일시불 금액 70,000원, 고객이 선택한 결제 수단.</a:t>
-            </a:r>
-          </a:p>
-          <a:p>
-            <a:pPr lvl="2" marL="228600" indent="-182880">
+              <a:t>에서 정기배송 내부로 향하는 의존</a:t>
+            </a:r>
+            <a:r>
+              <a:rPr sz="800" b="0">
+                <a:solidFill>
+                  <a:srgbClr val="000000"/>
+                </a:solidFill>
+                <a:latin typeface="맑은 고딕"/>
+                <a:ea typeface="맑은 고딕"/>
+              </a:rPr>
+              <a:t>(진입부와 구성 코드는 예외)</a:t>
+            </a:r>
+          </a:p>
+          <a:p>
+            <a:pPr lvl="3" marL="457200" indent="-182880">
               <a:spcBef>
                 <a:spcPts val="300"/>
               </a:spcBef>
@@ -14588,29 +15589,9 @@
               </a:spcAft>
               <a:buSzPct val="90000"/>
               <a:buFont typeface="Wingdings" pitchFamily="2" charset="2"/>
-              <a:buChar char=""/>
+              <a:buChar char=""/>
             </a:pPr>
             <a:r>
-              <a:rPr sz="1400" b="1">
-                <a:solidFill>
-                  <a:srgbClr val="000000"/>
-                </a:solidFill>
-                <a:latin typeface="맑은 고딕"/>
-                <a:ea typeface="맑은 고딕"/>
-              </a:rPr>
-              <a:t>승인 결과</a:t>
-            </a:r>
-            <a:r>
-              <a:rPr sz="1400" b="0">
-                <a:solidFill>
-                  <a:srgbClr val="000000"/>
-                </a:solidFill>
-                <a:latin typeface="맑은 고딕"/>
-                <a:ea typeface="맑은 고딕"/>
-              </a:rPr>
-              <a:t> —</a:t>
-            </a:r>
-            <a:r>
               <a:rPr sz="1200" b="0">
                 <a:solidFill>
                   <a:srgbClr val="000000"/>
@@ -14618,93 +15599,7 @@
                 <a:latin typeface="맑은 고딕"/>
                 <a:ea typeface="맑은 고딕"/>
               </a:rPr>
-              <a:t> 정기배송 확정, 예정 회차 7개 생성.</a:t>
-            </a:r>
-          </a:p>
-          <a:p>
-            <a:pPr lvl="2" marL="228600" indent="-182880">
-              <a:spcBef>
-                <a:spcPts val="300"/>
-              </a:spcBef>
-              <a:spcAft>
-                <a:spcPts val="300"/>
-              </a:spcAft>
-              <a:buSzPct val="90000"/>
-              <a:buFont typeface="Wingdings" pitchFamily="2" charset="2"/>
-              <a:buChar char=""/>
-            </a:pPr>
-            <a:r>
-              <a:rPr sz="1400" b="1">
-                <a:solidFill>
-                  <a:srgbClr val="000000"/>
-                </a:solidFill>
-                <a:latin typeface="맑은 고딕"/>
-                <a:ea typeface="맑은 고딕"/>
-              </a:rPr>
-              <a:t>거절 결과</a:t>
-            </a:r>
-            <a:r>
-              <a:rPr sz="1400" b="0">
-                <a:solidFill>
-                  <a:srgbClr val="000000"/>
-                </a:solidFill>
-                <a:latin typeface="맑은 고딕"/>
-                <a:ea typeface="맑은 고딕"/>
-              </a:rPr>
-              <a:t> —</a:t>
-            </a:r>
-            <a:r>
-              <a:rPr sz="1200" b="0">
-                <a:solidFill>
-                  <a:srgbClr val="000000"/>
-                </a:solidFill>
-                <a:latin typeface="맑은 고딕"/>
-                <a:ea typeface="맑은 고딕"/>
-              </a:rPr>
-              <a:t> 결제 대기 유지, 회차 0개. 다른 결제 수단으로 같은 신청을 재결제한다.</a:t>
-            </a:r>
-          </a:p>
-          <a:p>
-            <a:pPr lvl="2" marL="228600" indent="-182880">
-              <a:spcBef>
-                <a:spcPts val="300"/>
-              </a:spcBef>
-              <a:spcAft>
-                <a:spcPts val="300"/>
-              </a:spcAft>
-              <a:buSzPct val="90000"/>
-              <a:buFont typeface="Wingdings" pitchFamily="2" charset="2"/>
-              <a:buChar char=""/>
-            </a:pPr>
-            <a:r>
-              <a:rPr sz="1400" b="1">
-                <a:solidFill>
-                  <a:srgbClr val="000000"/>
-                </a:solidFill>
-                <a:latin typeface="맑은 고딕"/>
-                <a:ea typeface="맑은 고딕"/>
-              </a:rPr>
-              <a:t>통신 오류</a:t>
-            </a:r>
-            <a:r>
-              <a:rPr sz="1400" b="0">
-                <a:solidFill>
-                  <a:srgbClr val="000000"/>
-                </a:solidFill>
-                <a:latin typeface="맑은 고딕"/>
-                <a:ea typeface="맑은 고딕"/>
-              </a:rPr>
-              <a:t> —</a:t>
-            </a:r>
-            <a:r>
-              <a:rPr sz="1200" b="0">
-                <a:solidFill>
-                  <a:srgbClr val="000000"/>
-                </a:solidFill>
-                <a:latin typeface="맑은 고딕"/>
-                <a:ea typeface="맑은 고딕"/>
-              </a:rPr>
-              <a:t> 거절로 변환하지 않는다. 업무 처리는 미정으로 분리했다.</a:t>
+              <a:t>모든 순환</a:t>
             </a:r>
           </a:p>
         </p:txBody>
@@ -14728,7 +15623,7 @@
         <p:spPr>
           <a:xfrm>
             <a:off x="233172" y="960120"/>
-            <a:ext cx="8778240" cy="656244"/>
+            <a:ext cx="8778240" cy="454198"/>
           </a:xfrm>
         </p:spPr>
         <p:txBody>
@@ -14754,7 +15649,7 @@
                 <a:latin typeface="맑은 고딕"/>
                 <a:ea typeface="맑은 고딕"/>
               </a:rPr>
-              <a:t>정기배송의 </a:t>
+              <a:t>도식에 있는 의존만 허용한다. 어기면 업무 결과가 맞아도 </a:t>
             </a:r>
             <a:r>
               <a:rPr sz="1400" b="1">
@@ -14764,7 +15659,7 @@
                 <a:latin typeface="맑은 고딕"/>
                 <a:ea typeface="맑은 고딕"/>
               </a:rPr>
-              <a:t>업무 연동 계약</a:t>
+              <a:t>구조 검토를 통과하지 못한다</a:t>
             </a:r>
             <a:r>
               <a:rPr sz="1400" b="0">
@@ -14774,340 +15669,7 @@
                 <a:latin typeface="맑은 고딕"/>
                 <a:ea typeface="맑은 고딕"/>
               </a:rPr>
-              <a:t>을 다음과 같이 정했다. 실제 제공자의 API 문서는 미제공 상태이므로 주소·인증·오류 코드는 아직 확정하지 않았으며 실제 연동 구현은 보류한다.</a:t>
-            </a:r>
-          </a:p>
-        </p:txBody>
-      </p:sp>
-      <p:sp>
-        <p:nvSpPr>
-          <p:cNvPr id="10" name="내용 개체 틀 7">
-            <a:extLst>
-              <a:ext uri="{FF2B5EF4-FFF2-40B4-BE49-F238E27FC236}">
-                <a16:creationId xmlns:a16="http://schemas.microsoft.com/office/drawing/2014/main" id="{BEBA2C4A-B0BF-F2E4-EA6E-614C99CBA184}"/>
-              </a:ext>
-            </a:extLst>
-          </p:cNvPr>
-          <p:cNvSpPr>
-            <a:spLocks noGrp="1"/>
-          </p:cNvSpPr>
-          <p:nvPr>
-            <p:ph idx="1"/>
-          </p:nvPr>
-        </p:nvSpPr>
-        <p:spPr>
-          <a:xfrm>
-            <a:off x="4572000" y="1616364"/>
-            <a:ext cx="4439412" cy="4696101"/>
-          </a:xfrm>
-        </p:spPr>
-        <p:txBody>
-          <a:bodyPr>
-            <a:normAutofit/>
-          </a:bodyPr>
-          <a:lstStyle/>
-          <a:p>
-            <a:pPr lvl="2" marL="228600" indent="-182880">
-              <a:spcBef>
-                <a:spcPts val="300"/>
-              </a:spcBef>
-              <a:spcAft>
-                <a:spcPts val="300"/>
-              </a:spcAft>
-              <a:buSzPct val="90000"/>
-              <a:buFont typeface="Wingdings" pitchFamily="2" charset="2"/>
-              <a:buChar char=""/>
-            </a:pPr>
-            <a:r>
-              <a:rPr sz="1400" b="1">
-                <a:solidFill>
-                  <a:srgbClr val="000000"/>
-                </a:solidFill>
-                <a:latin typeface="맑은 고딕"/>
-                <a:ea typeface="맑은 고딕"/>
-              </a:rPr>
-              <a:t>배송 계약</a:t>
-            </a:r>
-          </a:p>
-          <a:p>
-            <a:pPr lvl="2" marL="228600" indent="-182880">
-              <a:spcBef>
-                <a:spcPts val="300"/>
-              </a:spcBef>
-              <a:spcAft>
-                <a:spcPts val="300"/>
-              </a:spcAft>
-              <a:buSzPct val="90000"/>
-              <a:buFont typeface="Wingdings" pitchFamily="2" charset="2"/>
-              <a:buChar char=""/>
-            </a:pPr>
-            <a:r>
-              <a:rPr sz="1400" b="1">
-                <a:solidFill>
-                  <a:srgbClr val="000000"/>
-                </a:solidFill>
-                <a:latin typeface="맑은 고딕"/>
-                <a:ea typeface="맑은 고딕"/>
-              </a:rPr>
-              <a:t>입력</a:t>
-            </a:r>
-            <a:r>
-              <a:rPr sz="1400" b="0">
-                <a:solidFill>
-                  <a:srgbClr val="000000"/>
-                </a:solidFill>
-                <a:latin typeface="맑은 고딕"/>
-                <a:ea typeface="맑은 고딕"/>
-              </a:rPr>
-              <a:t> —</a:t>
-            </a:r>
-            <a:r>
-              <a:rPr sz="1200" b="0">
-                <a:solidFill>
-                  <a:srgbClr val="000000"/>
-                </a:solidFill>
-                <a:latin typeface="맑은 고딕"/>
-                <a:ea typeface="맑은 고딕"/>
-              </a:rPr>
-              <a:t> 회차 식별 정보·상품·수량·배송지·배송 예정일.</a:t>
-            </a:r>
-          </a:p>
-          <a:p>
-            <a:pPr lvl="2" marL="228600" indent="-182880">
-              <a:spcBef>
-                <a:spcPts val="300"/>
-              </a:spcBef>
-              <a:spcAft>
-                <a:spcPts val="300"/>
-              </a:spcAft>
-              <a:buSzPct val="90000"/>
-              <a:buFont typeface="Wingdings" pitchFamily="2" charset="2"/>
-              <a:buChar char=""/>
-            </a:pPr>
-            <a:r>
-              <a:rPr sz="1400" b="1">
-                <a:solidFill>
-                  <a:srgbClr val="000000"/>
-                </a:solidFill>
-                <a:latin typeface="맑은 고딕"/>
-                <a:ea typeface="맑은 고딕"/>
-              </a:rPr>
-              <a:t>요청 시점</a:t>
-            </a:r>
-            <a:r>
-              <a:rPr sz="1400" b="0">
-                <a:solidFill>
-                  <a:srgbClr val="000000"/>
-                </a:solidFill>
-                <a:latin typeface="맑은 고딕"/>
-                <a:ea typeface="맑은 고딕"/>
-              </a:rPr>
-              <a:t> —</a:t>
-            </a:r>
-            <a:r>
-              <a:rPr sz="1200" b="0">
-                <a:solidFill>
-                  <a:srgbClr val="000000"/>
-                </a:solidFill>
-                <a:latin typeface="맑은 고딕"/>
-                <a:ea typeface="맑은 고딕"/>
-              </a:rPr>
-              <a:t> 회차의 예정일 24시간 전.</a:t>
-            </a:r>
-          </a:p>
-          <a:p>
-            <a:pPr lvl="2" marL="228600" indent="-182880">
-              <a:spcBef>
-                <a:spcPts val="300"/>
-              </a:spcBef>
-              <a:spcAft>
-                <a:spcPts val="300"/>
-              </a:spcAft>
-              <a:buSzPct val="90000"/>
-              <a:buFont typeface="Wingdings" pitchFamily="2" charset="2"/>
-              <a:buChar char=""/>
-            </a:pPr>
-            <a:r>
-              <a:rPr sz="1400" b="1">
-                <a:solidFill>
-                  <a:srgbClr val="000000"/>
-                </a:solidFill>
-                <a:latin typeface="맑은 고딕"/>
-                <a:ea typeface="맑은 고딕"/>
-              </a:rPr>
-              <a:t>결과·통보</a:t>
-            </a:r>
-            <a:r>
-              <a:rPr sz="1400" b="0">
-                <a:solidFill>
-                  <a:srgbClr val="000000"/>
-                </a:solidFill>
-                <a:latin typeface="맑은 고딕"/>
-                <a:ea typeface="맑은 고딕"/>
-              </a:rPr>
-              <a:t> —</a:t>
-            </a:r>
-            <a:r>
-              <a:rPr sz="1200" b="0">
-                <a:solidFill>
-                  <a:srgbClr val="000000"/>
-                </a:solidFill>
-                <a:latin typeface="맑은 고딕"/>
-                <a:ea typeface="맑은 고딕"/>
-              </a:rPr>
-              <a:t> 배송 요청됨 이후 시작 통보로 배송중, 완료 통보로 배송됨.</a:t>
-            </a:r>
-          </a:p>
-          <a:p>
-            <a:pPr lvl="2" marL="228600" indent="-182880">
-              <a:spcBef>
-                <a:spcPts val="300"/>
-              </a:spcBef>
-              <a:spcAft>
-                <a:spcPts val="300"/>
-              </a:spcAft>
-              <a:buSzPct val="90000"/>
-              <a:buFont typeface="Wingdings" pitchFamily="2" charset="2"/>
-              <a:buChar char=""/>
-            </a:pPr>
-            <a:r>
-              <a:rPr sz="1400" b="1">
-                <a:solidFill>
-                  <a:srgbClr val="000000"/>
-                </a:solidFill>
-                <a:latin typeface="맑은 고딕"/>
-                <a:ea typeface="맑은 고딕"/>
-              </a:rPr>
-              <a:t>확정 보류 기록</a:t>
-            </a:r>
-          </a:p>
-          <a:p>
-            <a:pPr lvl="2" marL="228600" indent="-182880">
-              <a:spcBef>
-                <a:spcPts val="300"/>
-              </a:spcBef>
-              <a:spcAft>
-                <a:spcPts val="300"/>
-              </a:spcAft>
-              <a:buSzPct val="90000"/>
-              <a:buFont typeface="Wingdings" pitchFamily="2" charset="2"/>
-              <a:buChar char=""/>
-            </a:pPr>
-            <a:r>
-              <a:rPr sz="1400" b="1">
-                <a:solidFill>
-                  <a:srgbClr val="000000"/>
-                </a:solidFill>
-                <a:latin typeface="맑은 고딕"/>
-                <a:ea typeface="맑은 고딕"/>
-              </a:rPr>
-              <a:t>제공 규격 담당</a:t>
-            </a:r>
-            <a:r>
-              <a:rPr sz="1400" b="0">
-                <a:solidFill>
-                  <a:srgbClr val="000000"/>
-                </a:solidFill>
-                <a:latin typeface="맑은 고딕"/>
-                <a:ea typeface="맑은 고딕"/>
-              </a:rPr>
-              <a:t> —</a:t>
-            </a:r>
-            <a:r>
-              <a:rPr sz="1200" b="0">
-                <a:solidFill>
-                  <a:srgbClr val="000000"/>
-                </a:solidFill>
-                <a:latin typeface="맑은 고딕"/>
-                <a:ea typeface="맑은 고딕"/>
-              </a:rPr>
-              <a:t> 연동 담당자. API 버전·요청 및 응답 형식·인증·오류 식별 규격을 실제 연동 구현 전에 확정한다.</a:t>
-            </a:r>
-          </a:p>
-          <a:p>
-            <a:pPr lvl="2" marL="228600" indent="-182880">
-              <a:spcBef>
-                <a:spcPts val="300"/>
-              </a:spcBef>
-              <a:spcAft>
-                <a:spcPts val="300"/>
-              </a:spcAft>
-              <a:buSzPct val="90000"/>
-              <a:buFont typeface="Wingdings" pitchFamily="2" charset="2"/>
-              <a:buChar char=""/>
-            </a:pPr>
-            <a:r>
-              <a:rPr sz="1400" b="1">
-                <a:solidFill>
-                  <a:srgbClr val="000000"/>
-                </a:solidFill>
-                <a:latin typeface="맑은 고딕"/>
-                <a:ea typeface="맑은 고딕"/>
-              </a:rPr>
-              <a:t>업무 정책 담당</a:t>
-            </a:r>
-            <a:r>
-              <a:rPr sz="1400" b="0">
-                <a:solidFill>
-                  <a:srgbClr val="000000"/>
-                </a:solidFill>
-                <a:latin typeface="맑은 고딕"/>
-                <a:ea typeface="맑은 고딕"/>
-              </a:rPr>
-              <a:t> —</a:t>
-            </a:r>
-            <a:r>
-              <a:rPr sz="1200" b="0">
-                <a:solidFill>
-                  <a:srgbClr val="000000"/>
-                </a:solidFill>
-                <a:latin typeface="맑은 고딕"/>
-                <a:ea typeface="맑은 고딕"/>
-              </a:rPr>
-              <a:t> 업무 담당자. 통신 오류·중복 결과·배송 접수 실패 처리를 실제 연동 구현 전에 확정한다.</a:t>
-            </a:r>
-          </a:p>
-          <a:p>
-            <a:pPr lvl="2" marL="228600" indent="-182880">
-              <a:spcBef>
-                <a:spcPts val="300"/>
-              </a:spcBef>
-              <a:spcAft>
-                <a:spcPts val="300"/>
-              </a:spcAft>
-              <a:buSzPct val="90000"/>
-              <a:buFont typeface="Wingdings" pitchFamily="2" charset="2"/>
-              <a:buChar char=""/>
-            </a:pPr>
-            <a:r>
-              <a:rPr sz="1400" b="1">
-                <a:solidFill>
-                  <a:srgbClr val="000000"/>
-                </a:solidFill>
-                <a:latin typeface="맑은 고딕"/>
-                <a:ea typeface="맑은 고딕"/>
-              </a:rPr>
-              <a:t>현재 허용 범위</a:t>
-            </a:r>
-            <a:r>
-              <a:rPr sz="1400" b="0">
-                <a:solidFill>
-                  <a:srgbClr val="000000"/>
-                </a:solidFill>
-                <a:latin typeface="맑은 고딕"/>
-                <a:ea typeface="맑은 고딕"/>
-              </a:rPr>
-              <a:t> —</a:t>
-            </a:r>
-            <a:r>
-              <a:rPr sz="1200" b="0">
-                <a:solidFill>
-                  <a:srgbClr val="000000"/>
-                </a:solidFill>
-                <a:latin typeface="맑은 고딕"/>
-                <a:ea typeface="맑은 고딕"/>
-              </a:rPr>
-              <a:t> 대역을 사용하는 승인·거절 검증. 실제 결제·배송 호출은 포함하지 않는다.</a:t>
+              <a:t>.</a:t>
             </a:r>
           </a:p>
         </p:txBody>
@@ -15177,17 +15739,7 @@
                 <a:latin typeface="맑은 고딕"/>
                 <a:ea typeface="맑은 고딕"/>
               </a:rPr>
-              <a:t>보완 </a:t>
-            </a:r>
-            <a:r>
-              <a:rPr sz="1800" b="1">
-                <a:solidFill>
-                  <a:srgbClr val="000000"/>
-                </a:solidFill>
-                <a:latin typeface="맑은 고딕"/>
-                <a:ea typeface="맑은 고딕"/>
-              </a:rPr>
-              <a:t>(안)</a:t>
+              <a:t>연계 계약</a:t>
             </a:r>
           </a:p>
           <a:p>
@@ -15364,7 +15916,17 @@
                 <a:latin typeface="맑은 고딕"/>
                 <a:ea typeface="맑은 고딕"/>
               </a:rPr>
-              <a:t>용어집에 연결한 요청</a:t>
+              <a:t>쇼핑몰 확인</a:t>
+            </a:r>
+            <a:r>
+              <a:rPr sz="1000" b="0">
+                <a:solidFill>
+                  <a:srgbClr val="000000"/>
+                </a:solidFill>
+                <a:latin typeface="맑은 고딕"/>
+                <a:ea typeface="맑은 고딕"/>
+              </a:rPr>
+              <a:t>(선택 확인·금액 산정 포트)</a:t>
             </a:r>
           </a:p>
           <a:p>
@@ -15380,6 +15942,16 @@
               <a:buChar char=""/>
             </a:pPr>
             <a:r>
+              <a:rPr sz="1200" b="0">
+                <a:solidFill>
+                  <a:srgbClr val="000000"/>
+                </a:solidFill>
+                <a:latin typeface="맑은 고딕"/>
+                <a:ea typeface="맑은 고딕"/>
+              </a:rPr>
+              <a:t>선택 대상의 </a:t>
+            </a:r>
+            <a:r>
               <a:rPr sz="1200" b="1">
                 <a:solidFill>
                   <a:srgbClr val="000000"/>
@@ -15387,7 +15959,7 @@
                 <a:latin typeface="맑은 고딕"/>
                 <a:ea typeface="맑은 고딕"/>
               </a:rPr>
-              <a:t>결제 승인 요청</a:t>
+              <a:t>유효성·소유 관계</a:t>
             </a:r>
             <a:r>
               <a:rPr sz="1200" b="0">
@@ -15397,17 +15969,27 @@
                 <a:latin typeface="맑은 고딕"/>
                 <a:ea typeface="맑은 고딕"/>
               </a:rPr>
-              <a:t> —</a:t>
-            </a:r>
-            <a:r>
-              <a:rPr sz="1000" b="0">
-                <a:solidFill>
-                  <a:srgbClr val="000000"/>
-                </a:solidFill>
-                <a:latin typeface="맑은 고딕"/>
-                <a:ea typeface="맑은 고딕"/>
-              </a:rPr>
-              <a:t> 확정된 일시불 금액으로 승인·거절을 받는 요청.</a:t>
+              <a:t>와 배송 달력 허용 여부를 판정하고, 기존 정책으로 </a:t>
+            </a:r>
+            <a:r>
+              <a:rPr sz="1200" b="1">
+                <a:solidFill>
+                  <a:srgbClr val="000000"/>
+                </a:solidFill>
+                <a:latin typeface="맑은 고딕"/>
+                <a:ea typeface="맑은 고딕"/>
+              </a:rPr>
+              <a:t>회차별 최종 금액</a:t>
+            </a:r>
+            <a:r>
+              <a:rPr sz="1200" b="0">
+                <a:solidFill>
+                  <a:srgbClr val="000000"/>
+                </a:solidFill>
+                <a:latin typeface="맑은 고딕"/>
+                <a:ea typeface="맑은 고딕"/>
+              </a:rPr>
+              <a:t>을 산정한다.</a:t>
             </a:r>
           </a:p>
           <a:p>
@@ -15430,7 +16012,7 @@
                 <a:latin typeface="맑은 고딕"/>
                 <a:ea typeface="맑은 고딕"/>
               </a:rPr>
-              <a:t>배송 요청</a:t>
+              <a:t>판정과 산정</a:t>
             </a:r>
             <a:r>
               <a:rPr sz="1200" b="0">
@@ -15440,17 +16022,27 @@
                 <a:latin typeface="맑은 고딕"/>
                 <a:ea typeface="맑은 고딕"/>
               </a:rPr>
-              <a:t> —</a:t>
-            </a:r>
-            <a:r>
-              <a:rPr sz="1000" b="0">
-                <a:solidFill>
-                  <a:srgbClr val="000000"/>
-                </a:solidFill>
-                <a:latin typeface="맑은 고딕"/>
-                <a:ea typeface="맑은 고딕"/>
-              </a:rPr>
-              <a:t> 특정 회차의 상품·수량·배송지·예정일을 전달하는 요청.</a:t>
+              <a:t>은 기존 쇼핑몰이, </a:t>
+            </a:r>
+            <a:r>
+              <a:rPr sz="1200" b="1">
+                <a:solidFill>
+                  <a:srgbClr val="000000"/>
+                </a:solidFill>
+                <a:latin typeface="맑은 고딕"/>
+                <a:ea typeface="맑은 고딕"/>
+              </a:rPr>
+              <a:t>3일 하한과 진행 여부</a:t>
+            </a:r>
+            <a:r>
+              <a:rPr sz="1200" b="0">
+                <a:solidFill>
+                  <a:srgbClr val="000000"/>
+                </a:solidFill>
+                <a:latin typeface="맑은 고딕"/>
+                <a:ea typeface="맑은 고딕"/>
+              </a:rPr>
+              <a:t>는 정기배송 규칙과 신청 업무가 정한다. 금액은 고지할 때 한 번만 부른다.</a:t>
             </a:r>
           </a:p>
           <a:p>
@@ -15473,7 +16065,17 @@
                 <a:latin typeface="맑은 고딕"/>
                 <a:ea typeface="맑은 고딕"/>
               </a:rPr>
-              <a:t>정의서·모델에 반영한 문장</a:t>
+              <a:t>첫 결제</a:t>
+            </a:r>
+            <a:r>
+              <a:rPr sz="1000" b="0">
+                <a:solidFill>
+                  <a:srgbClr val="000000"/>
+                </a:solidFill>
+                <a:latin typeface="맑은 고딕"/>
+                <a:ea typeface="맑은 고딕"/>
+              </a:rPr>
+              <a:t>(첫 결제 포트)</a:t>
             </a:r>
           </a:p>
           <a:p>
@@ -15489,6 +16091,16 @@
               <a:buChar char=""/>
             </a:pPr>
             <a:r>
+              <a:rPr sz="1200" b="0">
+                <a:solidFill>
+                  <a:srgbClr val="000000"/>
+                </a:solidFill>
+                <a:latin typeface="맑은 고딕"/>
+                <a:ea typeface="맑은 고딕"/>
+              </a:rPr>
+              <a:t>첫 회차 결제를 요청하고, 결과 확인은 </a:t>
+            </a:r>
+            <a:r>
               <a:rPr sz="1200" b="1">
                 <a:solidFill>
                   <a:srgbClr val="000000"/>
@@ -15496,7 +16108,7 @@
                 <a:latin typeface="맑은 고딕"/>
                 <a:ea typeface="맑은 고딕"/>
               </a:rPr>
-              <a:t>결과 구분</a:t>
+              <a:t>새 청구 없이</a:t>
             </a:r>
             <a:r>
               <a:rPr sz="1200" b="0">
@@ -15506,9 +16118,158 @@
                 <a:latin typeface="맑은 고딕"/>
                 <a:ea typeface="맑은 고딕"/>
               </a:rPr>
+              <a:t> 기존 요청만 확인한다.</a:t>
+            </a:r>
+          </a:p>
+          <a:p>
+            <a:pPr lvl="3" marL="457200" indent="-182880">
+              <a:spcBef>
+                <a:spcPts val="300"/>
+              </a:spcBef>
+              <a:spcAft>
+                <a:spcPts val="300"/>
+              </a:spcAft>
+              <a:buSzPct val="90000"/>
+              <a:buFont typeface="Wingdings" pitchFamily="2" charset="2"/>
+              <a:buChar char=""/>
+            </a:pPr>
+            <a:r>
+              <a:rPr sz="1200" b="0">
+                <a:solidFill>
+                  <a:srgbClr val="000000"/>
+                </a:solidFill>
+                <a:latin typeface="맑은 고딕"/>
+                <a:ea typeface="맑은 고딕"/>
+              </a:rPr>
+              <a:t>쇼핑몰 연계가 응답을 </a:t>
+            </a:r>
+            <a:r>
+              <a:rPr sz="1200" b="1">
+                <a:solidFill>
+                  <a:srgbClr val="000000"/>
+                </a:solidFill>
+                <a:latin typeface="맑은 고딕"/>
+                <a:ea typeface="맑은 고딕"/>
+              </a:rPr>
+              <a:t>성공 확정·실패 확정·결과 확인 불가</a:t>
+            </a:r>
+            <a:r>
+              <a:rPr sz="1200" b="0">
+                <a:solidFill>
+                  <a:srgbClr val="000000"/>
+                </a:solidFill>
+                <a:latin typeface="맑은 고딕"/>
+                <a:ea typeface="맑은 고딕"/>
+              </a:rPr>
+              <a:t>로 바꾼다. 확정할 수 없는 응답을 실패로 바꾸지 않는다.</a:t>
+            </a:r>
+          </a:p>
+          <a:p>
+            <a:pPr lvl="2" marL="228600" indent="-182880">
+              <a:spcBef>
+                <a:spcPts val="300"/>
+              </a:spcBef>
+              <a:spcAft>
+                <a:spcPts val="300"/>
+              </a:spcAft>
+              <a:buSzPct val="90000"/>
+              <a:buFont typeface="Wingdings" pitchFamily="2" charset="2"/>
+              <a:buChar char=""/>
+            </a:pPr>
+            <a:r>
+              <a:rPr sz="1400" b="1">
+                <a:solidFill>
+                  <a:srgbClr val="000000"/>
+                </a:solidFill>
+                <a:latin typeface="맑은 고딕"/>
+                <a:ea typeface="맑은 고딕"/>
+              </a:rPr>
+              <a:t>신청 저장</a:t>
+            </a:r>
+            <a:r>
+              <a:rPr sz="1000" b="0">
+                <a:solidFill>
+                  <a:srgbClr val="000000"/>
+                </a:solidFill>
+                <a:latin typeface="맑은 고딕"/>
+                <a:ea typeface="맑은 고딕"/>
+              </a:rPr>
+              <a:t>(신청 저장 포트)</a:t>
+            </a:r>
+            <a:r>
+              <a:rPr sz="1400" b="0">
+                <a:solidFill>
+                  <a:srgbClr val="000000"/>
+                </a:solidFill>
+                <a:latin typeface="맑은 고딕"/>
+                <a:ea typeface="맑은 고딕"/>
+              </a:rPr>
               <a:t> —</a:t>
             </a:r>
             <a:r>
+              <a:rPr sz="1200" b="0">
+                <a:solidFill>
+                  <a:srgbClr val="000000"/>
+                </a:solidFill>
+                <a:latin typeface="맑은 고딕"/>
+                <a:ea typeface="맑은 고딕"/>
+              </a:rPr>
+              <a:t> 두 </a:t>
+            </a:r>
+            <a:r>
+              <a:rPr sz="1200" b="1">
+                <a:solidFill>
+                  <a:srgbClr val="000000"/>
+                </a:solidFill>
+                <a:latin typeface="맑은 고딕"/>
+                <a:ea typeface="맑은 고딕"/>
+              </a:rPr>
+              <a:t>조건부 전이</a:t>
+            </a:r>
+            <a:r>
+              <a:rPr sz="1200" b="0">
+                <a:solidFill>
+                  <a:srgbClr val="000000"/>
+                </a:solidFill>
+                <a:latin typeface="맑은 고딕"/>
+                <a:ea typeface="맑은 고딕"/>
+              </a:rPr>
+              <a:t>를 제공하며 새 업무 상태를 만들지 않는다.</a:t>
+            </a:r>
+          </a:p>
+          <a:p>
+            <a:pPr lvl="3" marL="457200" indent="-182880">
+              <a:spcBef>
+                <a:spcPts val="300"/>
+              </a:spcBef>
+              <a:spcAft>
+                <a:spcPts val="300"/>
+              </a:spcAft>
+              <a:buSzPct val="90000"/>
+              <a:buFont typeface="Wingdings" pitchFamily="2" charset="2"/>
+              <a:buChar char=""/>
+            </a:pPr>
+            <a:r>
+              <a:rPr sz="1200" b="1">
+                <a:solidFill>
+                  <a:srgbClr val="000000"/>
+                </a:solidFill>
+                <a:latin typeface="맑은 고딕"/>
+                <a:ea typeface="맑은 고딕"/>
+              </a:rPr>
+              <a:t>결제 시작</a:t>
+            </a:r>
+            <a:r>
+              <a:rPr sz="1200" b="0">
+                <a:solidFill>
+                  <a:srgbClr val="000000"/>
+                </a:solidFill>
+                <a:latin typeface="맑은 고딕"/>
+                <a:ea typeface="맑은 고딕"/>
+              </a:rPr>
+              <a:t> —</a:t>
+            </a:r>
+            <a:r>
               <a:rPr sz="1000" b="0">
                 <a:solidFill>
                   <a:srgbClr val="000000"/>
@@ -15516,7 +16277,213 @@
                 <a:latin typeface="맑은 고딕"/>
                 <a:ea typeface="맑은 고딕"/>
               </a:rPr>
-              <a:t> “결제 거절은 결제 대기를 유지한다. 통신 오류는 거절로 정의하지 않으며 별도 정책이 필요하다.”</a:t>
+              <a:t> </a:t>
+            </a:r>
+            <a:r>
+              <a:rPr sz="1000" b="0">
+                <a:solidFill>
+                  <a:srgbClr val="000000"/>
+                </a:solidFill>
+                <a:latin typeface="맑은 고딕"/>
+                <a:ea typeface="맑은 고딕"/>
+              </a:rPr>
+              <a:t>신청준비</a:t>
+            </a:r>
+            <a:r>
+              <a:rPr sz="1000" b="0">
+                <a:solidFill>
+                  <a:srgbClr val="000000"/>
+                </a:solidFill>
+                <a:latin typeface="맑은 고딕"/>
+                <a:ea typeface="맑은 고딕"/>
+              </a:rPr>
+              <a:t>일 때만 </a:t>
+            </a:r>
+            <a:r>
+              <a:rPr sz="1000" b="0">
+                <a:solidFill>
+                  <a:srgbClr val="000000"/>
+                </a:solidFill>
+                <a:latin typeface="맑은 고딕"/>
+                <a:ea typeface="맑은 고딕"/>
+              </a:rPr>
+              <a:t>첫결제결과확인중</a:t>
+            </a:r>
+            <a:r>
+              <a:rPr sz="1000" b="0">
+                <a:solidFill>
+                  <a:srgbClr val="000000"/>
+                </a:solidFill>
+                <a:latin typeface="맑은 고딕"/>
+                <a:ea typeface="맑은 고딕"/>
+              </a:rPr>
+              <a:t>으로 전이하고, 동시에 들어온 요청 중 성공한 하나만 결제를 요청한다.</a:t>
+            </a:r>
+          </a:p>
+          <a:p>
+            <a:pPr lvl="3" marL="457200" indent="-182880">
+              <a:spcBef>
+                <a:spcPts val="300"/>
+              </a:spcBef>
+              <a:spcAft>
+                <a:spcPts val="300"/>
+              </a:spcAft>
+              <a:buSzPct val="90000"/>
+              <a:buFont typeface="Wingdings" pitchFamily="2" charset="2"/>
+              <a:buChar char=""/>
+            </a:pPr>
+            <a:r>
+              <a:rPr sz="1200" b="1">
+                <a:solidFill>
+                  <a:srgbClr val="000000"/>
+                </a:solidFill>
+                <a:latin typeface="맑은 고딕"/>
+                <a:ea typeface="맑은 고딕"/>
+              </a:rPr>
+              <a:t>결과 반영</a:t>
+            </a:r>
+            <a:r>
+              <a:rPr sz="1200" b="0">
+                <a:solidFill>
+                  <a:srgbClr val="000000"/>
+                </a:solidFill>
+                <a:latin typeface="맑은 고딕"/>
+                <a:ea typeface="맑은 고딕"/>
+              </a:rPr>
+              <a:t> —</a:t>
+            </a:r>
+            <a:r>
+              <a:rPr sz="1000" b="0">
+                <a:solidFill>
+                  <a:srgbClr val="000000"/>
+                </a:solidFill>
+                <a:latin typeface="맑은 고딕"/>
+                <a:ea typeface="맑은 고딕"/>
+              </a:rPr>
+              <a:t> </a:t>
+            </a:r>
+            <a:r>
+              <a:rPr sz="1000" b="0">
+                <a:solidFill>
+                  <a:srgbClr val="000000"/>
+                </a:solidFill>
+                <a:latin typeface="맑은 고딕"/>
+                <a:ea typeface="맑은 고딕"/>
+              </a:rPr>
+              <a:t>첫결제결과확인중</a:t>
+            </a:r>
+            <a:r>
+              <a:rPr sz="1000" b="0">
+                <a:solidFill>
+                  <a:srgbClr val="000000"/>
+                </a:solidFill>
+                <a:latin typeface="맑은 고딕"/>
+                <a:ea typeface="맑은 고딕"/>
+              </a:rPr>
+              <a:t>·</a:t>
+            </a:r>
+            <a:r>
+              <a:rPr sz="1000" b="0">
+                <a:solidFill>
+                  <a:srgbClr val="000000"/>
+                </a:solidFill>
+                <a:latin typeface="맑은 고딕"/>
+                <a:ea typeface="맑은 고딕"/>
+              </a:rPr>
+              <a:t>결과확인필요</a:t>
+            </a:r>
+            <a:r>
+              <a:rPr sz="1000" b="0">
+                <a:solidFill>
+                  <a:srgbClr val="000000"/>
+                </a:solidFill>
+                <a:latin typeface="맑은 고딕"/>
+                <a:ea typeface="맑은 고딕"/>
+              </a:rPr>
+              <a:t>일 때만 반영하고, 성공이면 결제 결과·계약 1건·</a:t>
+            </a:r>
+            <a:r>
+              <a:rPr sz="1000" b="0">
+                <a:solidFill>
+                  <a:srgbClr val="000000"/>
+                </a:solidFill>
+                <a:latin typeface="맑은 고딕"/>
+                <a:ea typeface="맑은 고딕"/>
+              </a:rPr>
+              <a:t>신청완료</a:t>
+            </a:r>
+            <a:r>
+              <a:rPr sz="1000" b="0">
+                <a:solidFill>
+                  <a:srgbClr val="000000"/>
+                </a:solidFill>
+                <a:latin typeface="맑은 고딕"/>
+                <a:ea typeface="맑은 고딕"/>
+              </a:rPr>
+              <a:t>를 </a:t>
+            </a:r>
+            <a:r>
+              <a:rPr sz="1000" b="1">
+                <a:solidFill>
+                  <a:srgbClr val="000000"/>
+                </a:solidFill>
+                <a:latin typeface="맑은 고딕"/>
+                <a:ea typeface="맑은 고딕"/>
+              </a:rPr>
+              <a:t>한 단위</a:t>
+            </a:r>
+            <a:r>
+              <a:rPr sz="1000" b="0">
+                <a:solidFill>
+                  <a:srgbClr val="000000"/>
+                </a:solidFill>
+                <a:latin typeface="맑은 고딕"/>
+                <a:ea typeface="맑은 고딕"/>
+              </a:rPr>
+              <a:t>로 기록한다.</a:t>
+            </a:r>
+          </a:p>
+          <a:p>
+            <a:pPr lvl="3" marL="457200" indent="-182880">
+              <a:spcBef>
+                <a:spcPts val="300"/>
+              </a:spcBef>
+              <a:spcAft>
+                <a:spcPts val="300"/>
+              </a:spcAft>
+              <a:buSzPct val="90000"/>
+              <a:buFont typeface="Wingdings" pitchFamily="2" charset="2"/>
+              <a:buChar char=""/>
+            </a:pPr>
+            <a:r>
+              <a:rPr sz="1200" b="1">
+                <a:solidFill>
+                  <a:srgbClr val="000000"/>
+                </a:solidFill>
+                <a:latin typeface="맑은 고딕"/>
+                <a:ea typeface="맑은 고딕"/>
+              </a:rPr>
+              <a:t>반복 전달은 안내만</a:t>
+            </a:r>
+            <a:r>
+              <a:rPr sz="1200" b="0">
+                <a:solidFill>
+                  <a:srgbClr val="000000"/>
+                </a:solidFill>
+                <a:latin typeface="맑은 고딕"/>
+                <a:ea typeface="맑은 고딕"/>
+              </a:rPr>
+              <a:t> —</a:t>
+            </a:r>
+            <a:r>
+              <a:rPr sz="1000" b="0">
+                <a:solidFill>
+                  <a:srgbClr val="000000"/>
+                </a:solidFill>
+                <a:latin typeface="맑은 고딕"/>
+                <a:ea typeface="맑은 고딕"/>
+              </a:rPr>
+              <a:t> 상태가 바뀌는 것은 결과 확인 반영을 거칠 때뿐이며 상태 머신에 정의된 전이다.</a:t>
             </a:r>
           </a:p>
         </p:txBody>
@@ -15566,7 +16533,7 @@
                 <a:latin typeface="맑은 고딕"/>
                 <a:ea typeface="맑은 고딕"/>
               </a:rPr>
-              <a:t>모델의 업무 의미를 유지하면서 </a:t>
+              <a:t>세 계약은 업무 목적으로 나눈 </a:t>
             </a:r>
             <a:r>
               <a:rPr sz="1400" b="1">
@@ -15576,7 +16543,7 @@
                 <a:latin typeface="맑은 고딕"/>
                 <a:ea typeface="맑은 고딕"/>
               </a:rPr>
-              <a:t>요청 이름과 실패 결과의 경계</a:t>
+              <a:t>논리적 묶음</a:t>
             </a:r>
             <a:r>
               <a:rPr sz="1400" b="0">
@@ -15586,7 +16553,7 @@
                 <a:latin typeface="맑은 고딕"/>
                 <a:ea typeface="맑은 고딕"/>
               </a:rPr>
-              <a:t>를 아키텍처에 반영했다.</a:t>
+              <a:t>이다. 기존 쇼핑몰이 각각을 단일 API로 제공한다고 가정하지 않는다.</a:t>
             </a:r>
           </a:p>
         </p:txBody>
@@ -15638,30 +16605,17 @@
                 <a:latin typeface="맑은 고딕"/>
                 <a:ea typeface="맑은 고딕"/>
               </a:rPr>
-              <a:t>※ 현행화 기준</a:t>
-            </a:r>
-          </a:p>
-          <a:p>
-            <a:pPr lvl="3" marL="457200" indent="-182880">
-              <a:spcBef>
-                <a:spcPts val="300"/>
-              </a:spcBef>
-              <a:spcAft>
-                <a:spcPts val="300"/>
-              </a:spcAft>
-              <a:buSzPct val="90000"/>
-              <a:buFont typeface="Wingdings" pitchFamily="2" charset="2"/>
-              <a:buChar char=""/>
-            </a:pPr>
-            <a:r>
-              <a:rPr sz="1200" b="1">
-                <a:solidFill>
-                  <a:srgbClr val="000000"/>
-                </a:solidFill>
-                <a:latin typeface="맑은 고딕"/>
-                <a:ea typeface="맑은 고딕"/>
-              </a:rPr>
-              <a:t>반영</a:t>
+              <a:t>연결 전에 확인할 규격</a:t>
+            </a:r>
+            <a:r>
+              <a:rPr sz="1400" b="0">
+                <a:solidFill>
+                  <a:srgbClr val="000000"/>
+                </a:solidFill>
+                <a:latin typeface="맑은 고딕"/>
+                <a:ea typeface="맑은 고딕"/>
+              </a:rPr>
+              <a:t> —</a:t>
             </a:r>
             <a:r>
               <a:rPr sz="1200" b="0">
@@ -15671,60 +16625,7 @@
                 <a:latin typeface="맑은 고딕"/>
                 <a:ea typeface="맑은 고딕"/>
               </a:rPr>
-              <a:t> —</a:t>
-            </a:r>
-            <a:r>
-              <a:rPr sz="1000" b="0">
-                <a:solidFill>
-                  <a:srgbClr val="000000"/>
-                </a:solidFill>
-                <a:latin typeface="맑은 고딕"/>
-                <a:ea typeface="맑은 고딕"/>
-              </a:rPr>
-              <a:t> 위 요청 용어, 의존 규칙, 실제 연동 구현의 보류 조건을 다음 작업의 입력으로 남겼다.</a:t>
-            </a:r>
-          </a:p>
-          <a:p>
-            <a:pPr lvl="3" marL="457200" indent="-182880">
-              <a:spcBef>
-                <a:spcPts val="300"/>
-              </a:spcBef>
-              <a:spcAft>
-                <a:spcPts val="300"/>
-              </a:spcAft>
-              <a:buSzPct val="90000"/>
-              <a:buFont typeface="Wingdings" pitchFamily="2" charset="2"/>
-              <a:buChar char=""/>
-            </a:pPr>
-            <a:r>
-              <a:rPr sz="1200" b="1">
-                <a:solidFill>
-                  <a:srgbClr val="000000"/>
-                </a:solidFill>
-                <a:latin typeface="맑은 고딕"/>
-                <a:ea typeface="맑은 고딕"/>
-              </a:rPr>
-              <a:t>기록만</a:t>
-            </a:r>
-            <a:r>
-              <a:rPr sz="1200" b="0">
-                <a:solidFill>
-                  <a:srgbClr val="000000"/>
-                </a:solidFill>
-                <a:latin typeface="맑은 고딕"/>
-                <a:ea typeface="맑은 고딕"/>
-              </a:rPr>
-              <a:t> —</a:t>
-            </a:r>
-            <a:r>
-              <a:rPr sz="1000" b="0">
-                <a:solidFill>
-                  <a:srgbClr val="000000"/>
-                </a:solidFill>
-                <a:latin typeface="맑은 고딕"/>
-                <a:ea typeface="맑은 고딕"/>
-              </a:rPr>
-              <a:t> 독립 서비스 분리안은 채택하지 않았다. 실제 API 문서가 없다는 사실과 담당·확인 시점을 보류 기록으로 남겼다.</a:t>
+              <a:t> 업무상 부적합과 기술 오류의 구분 · 중복 승인을 막는 수단과 새 청구 없는 조회 · 조건부 전이의 원자성. 셋이 입증되기 전에는 연동을 완료로 보지 않는다.</a:t>
             </a:r>
           </a:p>
         </p:txBody>
@@ -15733,6 +16634,1489 @@
     <p:extLst>
       <p:ext uri="{BB962C8B-B14F-4D97-AF65-F5344CB8AC3E}">
         <p14:creationId xmlns:p14="http://schemas.microsoft.com/office/powerpoint/2010/main" val="3555436673"/>
+      </p:ext>
+    </p:extLst>
+  </p:cSld>
+  <p:clrMapOvr>
+    <a:masterClrMapping/>
+  </p:clrMapOvr>
+</p:sld>
+</file>
+
+<file path=ppt/slides/slide23.xml><?xml version="1.0" encoding="utf-8"?>
+<p:sld xmlns:a="http://schemas.openxmlformats.org/drawingml/2006/main" xmlns:r="http://schemas.openxmlformats.org/officeDocument/2006/relationships" xmlns:p="http://schemas.openxmlformats.org/presentationml/2006/main">
+  <p:cSld>
+    <p:spTree>
+      <p:nvGrpSpPr>
+        <p:cNvPr id="1" name="">
+          <a:extLst>
+            <a:ext uri="{FF2B5EF4-FFF2-40B4-BE49-F238E27FC236}">
+              <a16:creationId xmlns:a16="http://schemas.microsoft.com/office/drawing/2014/main" id="{60B87152-D004-1569-E429-90A42420A65C}"/>
+            </a:ext>
+          </a:extLst>
+        </p:cNvPr>
+        <p:cNvGrpSpPr/>
+        <p:nvPr/>
+      </p:nvGrpSpPr>
+      <p:grpSpPr>
+        <a:xfrm>
+          <a:off x="0" y="0"/>
+          <a:ext cx="0" cy="0"/>
+          <a:chOff x="0" y="0"/>
+          <a:chExt cx="0" cy="0"/>
+        </a:xfrm>
+      </p:grpSpPr>
+      <p:sp>
+        <p:nvSpPr>
+          <p:cNvPr id="2" name="제목 1">
+            <a:extLst>
+              <a:ext uri="{FF2B5EF4-FFF2-40B4-BE49-F238E27FC236}">
+                <a16:creationId xmlns:a16="http://schemas.microsoft.com/office/drawing/2014/main" id="{F2E2AB02-3ADE-69B8-887E-7981AD15EF24}"/>
+              </a:ext>
+            </a:extLst>
+          </p:cNvPr>
+          <p:cNvSpPr>
+            <a:spLocks noGrp="1"/>
+          </p:cNvSpPr>
+          <p:nvPr>
+            <p:ph type="title"/>
+          </p:nvPr>
+        </p:nvSpPr>
+        <p:spPr/>
+        <p:txBody>
+          <a:bodyPr/>
+          <a:lstStyle/>
+          <a:p>
+            <a:r>
+              <a:rPr sz="2400" b="1">
+                <a:solidFill>
+                  <a:srgbClr val="000000"/>
+                </a:solidFill>
+                <a:latin typeface="맑은 고딕"/>
+                <a:ea typeface="맑은 고딕"/>
+              </a:rPr>
+              <a:t>검증 방향과 미결</a:t>
+            </a:r>
+          </a:p>
+          <a:p>
+            <a:r>
+              <a:rPr sz="1100" b="1">
+                <a:solidFill>
+                  <a:srgbClr val="000000"/>
+                </a:solidFill>
+                <a:latin typeface="맑은 고딕"/>
+                <a:ea typeface="맑은 고딕"/>
+              </a:rPr>
+              <a:t>별첨. 실습 답</a:t>
+            </a:r>
+          </a:p>
+        </p:txBody>
+      </p:sp>
+      <p:sp>
+        <p:nvSpPr>
+          <p:cNvPr id="5" name="텍스트 개체 틀 4">
+            <a:extLst>
+              <a:ext uri="{FF2B5EF4-FFF2-40B4-BE49-F238E27FC236}">
+                <a16:creationId xmlns:a16="http://schemas.microsoft.com/office/drawing/2014/main" id="{F0895985-68EF-30BA-2165-4B3D90ECD41C}"/>
+              </a:ext>
+            </a:extLst>
+          </p:cNvPr>
+          <p:cNvSpPr>
+            <a:spLocks noGrp="1"/>
+          </p:cNvSpPr>
+          <p:nvPr>
+            <p:ph type="body" sz="quarter" idx="11"/>
+          </p:nvPr>
+        </p:nvSpPr>
+        <p:spPr/>
+        <p:txBody>
+          <a:bodyPr/>
+          <a:lstStyle/>
+          <a:p>
+            <a:r>
+              <a:rPr kumimoji="1" lang="en-US" altLang="ko-KR" sz="1400" dirty="0" err="1"/>
+              <a:t>별첨: 04. 아키텍처</a:t>
+            </a:r>
+          </a:p>
+        </p:txBody>
+      </p:sp>
+      <p:sp>
+        <p:nvSpPr>
+          <p:cNvPr id="6" name="텍스트 개체 틀 5">
+            <a:extLst>
+              <a:ext uri="{FF2B5EF4-FFF2-40B4-BE49-F238E27FC236}">
+                <a16:creationId xmlns:a16="http://schemas.microsoft.com/office/drawing/2014/main" id="{D985C1FD-84C4-10F9-372D-6A84E1680E07}"/>
+              </a:ext>
+            </a:extLst>
+          </p:cNvPr>
+          <p:cNvSpPr>
+            <a:spLocks noGrp="1"/>
+          </p:cNvSpPr>
+          <p:nvPr>
+            <p:ph type="body" sz="quarter" idx="12"/>
+          </p:nvPr>
+        </p:nvSpPr>
+        <p:spPr/>
+        <p:txBody>
+          <a:bodyPr/>
+          <a:lstStyle/>
+          <a:p>
+            <a:endParaRPr kumimoji="1" lang="ko-KR" altLang="en-US" dirty="0"/>
+          </a:p>
+        </p:txBody>
+      </p:sp>
+      <p:sp>
+        <p:nvSpPr>
+          <p:cNvPr id="7" name="텍스트 개체 틀 6">
+            <a:extLst>
+              <a:ext uri="{FF2B5EF4-FFF2-40B4-BE49-F238E27FC236}">
+                <a16:creationId xmlns:a16="http://schemas.microsoft.com/office/drawing/2014/main" id="{E26A8878-48FF-5E3A-5D05-0F900C22011B}"/>
+              </a:ext>
+            </a:extLst>
+          </p:cNvPr>
+          <p:cNvSpPr>
+            <a:spLocks noGrp="1"/>
+          </p:cNvSpPr>
+          <p:nvPr>
+            <p:ph type="body" sz="quarter" idx="13"/>
+          </p:nvPr>
+        </p:nvSpPr>
+        <p:spPr/>
+        <p:txBody>
+          <a:bodyPr/>
+          <a:lstStyle/>
+          <a:p>
+            <a:endParaRPr lang="en-US" altLang="ko-KR" dirty="0"/>
+          </a:p>
+        </p:txBody>
+      </p:sp>
+      <p:graphicFrame>
+        <p:nvGraphicFramePr>
+          <p:cNvPr id="11" name="표 10">
+            <a:extLst>
+              <a:ext uri="{FF2B5EF4-FFF2-40B4-BE49-F238E27FC236}">
+                <a16:creationId xmlns:a16="http://schemas.microsoft.com/office/drawing/2014/main" id="{93753AB9-526C-CE2D-446D-7615D9B6D6D2}"/>
+              </a:ext>
+            </a:extLst>
+          </p:cNvPr>
+          <p:cNvGraphicFramePr>
+            <a:graphicFrameLocks noGrp="1"/>
+          </p:cNvGraphicFramePr>
+          <p:nvPr>
+            <p:extLst>
+              <p:ext uri="{D42A27DB-BD31-4B8C-83A1-F6EECF244321}">
+                <p14:modId xmlns:p14="http://schemas.microsoft.com/office/powerpoint/2010/main" val="1761827855"/>
+              </p:ext>
+            </p:extLst>
+          </p:nvPr>
+        </p:nvGraphicFramePr>
+        <p:xfrm>
+          <a:off x="1189546" y="2112010"/>
+          <a:ext cx="6751320" cy="3873500"/>
+        </p:xfrm>
+        <a:graphic>
+          <a:graphicData uri="http://schemas.openxmlformats.org/drawingml/2006/table">
+            <a:tbl>
+              <a:tblPr/>
+              <a:tblGrid>
+                <a:gridCol w="947420"/>
+                <a:gridCol w="1590040"/>
+                <a:gridCol w="2260600"/>
+                <a:gridCol w="1953260"/>
+              </a:tblGrid>
+              <a:tr h="288000">
+                <a:tc>
+                  <a:txBody>
+                    <a:bodyPr/>
+                    <a:lstStyle/>
+                    <a:p>
+                      <a:pPr algn="ctr" fontAlgn="ctr">
+                        <a:buNone/>
+                      </a:pPr>
+                      <a:r>
+                        <a:rPr lang="ko-KR" altLang="en-US" sz="1000" b="1" i="0" u="none" strike="noStrike" dirty="0">
+                          <a:solidFill>
+                            <a:schemeClr val="bg1"/>
+                          </a:solidFill>
+                          <a:effectLst/>
+                          <a:latin typeface="맑은 고딕" panose="020B0503020000020004" pitchFamily="34" charset="-127"/>
+                          <a:ea typeface="맑은 고딕" panose="020B0503020000020004" pitchFamily="34" charset="-127"/>
+                          <a:cs typeface="맑은 고딕"/>
+                        </a:rPr>
+                        <a:t>방향</a:t>
+                      </a:r>
+                    </a:p>
+                  </a:txBody>
+                  <a:tcPr marL="6750" marR="6750" marT="6750" marB="0" anchor="ctr">
+                    <a:lnL>
+                      <a:noFill/>
+                    </a:lnL>
+                    <a:lnR w="9525" cap="flat" cmpd="sng" algn="ctr">
+                      <a:solidFill>
+                        <a:schemeClr val="bg1">
+                          <a:lumMod val="50000"/>
+                        </a:schemeClr>
+                      </a:solidFill>
+                      <a:prstDash val="solid"/>
+                      <a:round/>
+                      <a:headEnd type="none" w="med" len="med"/>
+                      <a:tailEnd type="none" w="med" len="med"/>
+                    </a:lnR>
+                    <a:lnT w="9525" cap="flat" cmpd="sng" algn="ctr">
+                      <a:solidFill>
+                        <a:schemeClr val="tx1"/>
+                      </a:solidFill>
+                      <a:prstDash val="solid"/>
+                      <a:round/>
+                      <a:headEnd type="none" w="med" len="med"/>
+                      <a:tailEnd type="none" w="med" len="med"/>
+                    </a:lnT>
+                    <a:lnB w="9525" cap="flat" cmpd="sng" algn="ctr">
+                      <a:solidFill>
+                        <a:schemeClr val="bg1">
+                          <a:lumMod val="50000"/>
+                        </a:schemeClr>
+                      </a:solidFill>
+                      <a:prstDash val="solid"/>
+                      <a:round/>
+                      <a:headEnd type="none" w="med" len="med"/>
+                      <a:tailEnd type="none" w="med" len="med"/>
+                    </a:lnB>
+                    <a:solidFill>
+                      <a:srgbClr val="002060"/>
+                    </a:solidFill>
+                  </a:tcPr>
+                </a:tc>
+                <a:tc>
+                  <a:txBody>
+                    <a:bodyPr/>
+                    <a:lstStyle/>
+                    <a:p>
+                      <a:pPr algn="ctr" fontAlgn="ctr">
+                        <a:buNone/>
+                      </a:pPr>
+                      <a:r>
+                        <a:rPr lang="ko-KR" altLang="en-US" sz="1000" b="1" i="0" u="none" strike="noStrike" dirty="0">
+                          <a:solidFill>
+                            <a:schemeClr val="bg1"/>
+                          </a:solidFill>
+                          <a:effectLst/>
+                          <a:latin typeface="맑은 고딕" panose="020B0503020000020004" pitchFamily="34" charset="-127"/>
+                          <a:ea typeface="맑은 고딕" panose="020B0503020000020004" pitchFamily="34" charset="-127"/>
+                          <a:cs typeface="맑은 고딕"/>
+                        </a:rPr>
+                        <a:t>방법</a:t>
+                      </a:r>
+                    </a:p>
+                  </a:txBody>
+                  <a:tcPr marL="6750" marR="6750" marT="6750" marB="0" anchor="ctr">
+                    <a:lnL w="9525" cap="flat" cmpd="sng" algn="ctr">
+                      <a:solidFill>
+                        <a:schemeClr val="bg1">
+                          <a:lumMod val="50000"/>
+                        </a:schemeClr>
+                      </a:solidFill>
+                      <a:prstDash val="solid"/>
+                      <a:round/>
+                      <a:headEnd type="none" w="med" len="med"/>
+                      <a:tailEnd type="none" w="med" len="med"/>
+                    </a:lnL>
+                    <a:lnR w="9525" cap="flat" cmpd="sng" algn="ctr">
+                      <a:solidFill>
+                        <a:schemeClr val="bg1">
+                          <a:lumMod val="50000"/>
+                        </a:schemeClr>
+                      </a:solidFill>
+                      <a:prstDash val="solid"/>
+                      <a:round/>
+                      <a:headEnd type="none" w="med" len="med"/>
+                      <a:tailEnd type="none" w="med" len="med"/>
+                    </a:lnR>
+                    <a:lnT w="9525" cap="flat" cmpd="sng" algn="ctr">
+                      <a:solidFill>
+                        <a:schemeClr val="tx1"/>
+                      </a:solidFill>
+                      <a:prstDash val="solid"/>
+                      <a:round/>
+                      <a:headEnd type="none" w="med" len="med"/>
+                      <a:tailEnd type="none" w="med" len="med"/>
+                    </a:lnT>
+                    <a:lnB w="9525" cap="flat" cmpd="sng" algn="ctr">
+                      <a:solidFill>
+                        <a:schemeClr val="bg1">
+                          <a:lumMod val="50000"/>
+                        </a:schemeClr>
+                      </a:solidFill>
+                      <a:prstDash val="solid"/>
+                      <a:round/>
+                      <a:headEnd type="none" w="med" len="med"/>
+                      <a:tailEnd type="none" w="med" len="med"/>
+                    </a:lnB>
+                    <a:solidFill>
+                      <a:srgbClr val="002060"/>
+                    </a:solidFill>
+                  </a:tcPr>
+                </a:tc>
+                <a:tc>
+                  <a:txBody>
+                    <a:bodyPr/>
+                    <a:lstStyle/>
+                    <a:p>
+                      <a:pPr algn="ctr" fontAlgn="ctr">
+                        <a:buNone/>
+                      </a:pPr>
+                      <a:r>
+                        <a:rPr lang="ko-KR" altLang="en-US" sz="1000" b="1" i="0" u="none" strike="noStrike" dirty="0" err="1">
+                          <a:solidFill>
+                            <a:schemeClr val="bg1"/>
+                          </a:solidFill>
+                          <a:effectLst/>
+                          <a:latin typeface="맑은 고딕" panose="020B0503020000020004" pitchFamily="34" charset="-127"/>
+                          <a:ea typeface="맑은 고딕" panose="020B0503020000020004" pitchFamily="34" charset="-127"/>
+                          <a:cs typeface="맑은 고딕"/>
+                        </a:rPr>
+                        <a:t>입증하는 것</a:t>
+                      </a:r>
+                    </a:p>
+                  </a:txBody>
+                  <a:tcPr marL="6750" marR="6750" marT="6750" marB="0" anchor="ctr">
+                    <a:lnL w="9525" cap="flat" cmpd="sng" algn="ctr">
+                      <a:solidFill>
+                        <a:schemeClr val="bg1">
+                          <a:lumMod val="50000"/>
+                        </a:schemeClr>
+                      </a:solidFill>
+                      <a:prstDash val="solid"/>
+                      <a:round/>
+                      <a:headEnd type="none" w="med" len="med"/>
+                      <a:tailEnd type="none" w="med" len="med"/>
+                    </a:lnL>
+                    <a:lnR w="9525" cap="flat" cmpd="sng" algn="ctr">
+                      <a:solidFill>
+                        <a:schemeClr val="bg1">
+                          <a:lumMod val="50000"/>
+                        </a:schemeClr>
+                      </a:solidFill>
+                      <a:prstDash val="solid"/>
+                      <a:round/>
+                      <a:headEnd type="none" w="med" len="med"/>
+                      <a:tailEnd type="none" w="med" len="med"/>
+                    </a:lnR>
+                    <a:lnT w="9525" cap="flat" cmpd="sng" algn="ctr">
+                      <a:solidFill>
+                        <a:schemeClr val="tx1"/>
+                      </a:solidFill>
+                      <a:prstDash val="solid"/>
+                      <a:round/>
+                      <a:headEnd type="none" w="med" len="med"/>
+                      <a:tailEnd type="none" w="med" len="med"/>
+                    </a:lnT>
+                    <a:lnB w="9525" cap="flat" cmpd="sng" algn="ctr">
+                      <a:solidFill>
+                        <a:schemeClr val="bg1">
+                          <a:lumMod val="50000"/>
+                        </a:schemeClr>
+                      </a:solidFill>
+                      <a:prstDash val="solid"/>
+                      <a:round/>
+                      <a:headEnd type="none" w="med" len="med"/>
+                      <a:tailEnd type="none" w="med" len="med"/>
+                    </a:lnB>
+                    <a:solidFill>
+                      <a:srgbClr val="002060"/>
+                    </a:solidFill>
+                  </a:tcPr>
+                </a:tc>
+                <a:tc>
+                  <a:txBody>
+                    <a:bodyPr/>
+                    <a:lstStyle/>
+                    <a:p>
+                      <a:pPr algn="ctr" fontAlgn="ctr">
+                        <a:buNone/>
+                      </a:pPr>
+                      <a:r>
+                        <a:rPr lang="ko-KR" altLang="en-US" sz="1000" b="1" i="0" u="none" strike="noStrike" dirty="0" err="1">
+                          <a:solidFill>
+                            <a:schemeClr val="bg1"/>
+                          </a:solidFill>
+                          <a:effectLst/>
+                          <a:latin typeface="맑은 고딕" panose="020B0503020000020004" pitchFamily="34" charset="-127"/>
+                          <a:ea typeface="맑은 고딕" panose="020B0503020000020004" pitchFamily="34" charset="-127"/>
+                          <a:cs typeface="맑은 고딕"/>
+                        </a:rPr>
+                        <a:t>입증하지 못하는 것</a:t>
+                      </a:r>
+                    </a:p>
+                  </a:txBody>
+                  <a:tcPr marL="6750" marR="6750" marT="6750" marB="0" anchor="ctr">
+                    <a:lnL w="9525" cap="flat" cmpd="sng" algn="ctr">
+                      <a:solidFill>
+                        <a:schemeClr val="bg1">
+                          <a:lumMod val="50000"/>
+                        </a:schemeClr>
+                      </a:solidFill>
+                      <a:prstDash val="solid"/>
+                      <a:round/>
+                      <a:headEnd type="none" w="med" len="med"/>
+                      <a:tailEnd type="none" w="med" len="med"/>
+                    </a:lnL>
+                    <a:lnR w="9525" cap="flat" cmpd="sng" algn="ctr">
+                      <a:solidFill>
+                        <a:schemeClr val="bg1">
+                          <a:lumMod val="50000"/>
+                        </a:schemeClr>
+                      </a:solidFill>
+                      <a:prstDash val="solid"/>
+                      <a:round/>
+                      <a:headEnd type="none" w="med" len="med"/>
+                      <a:tailEnd type="none" w="med" len="med"/>
+                    </a:lnR>
+                    <a:lnT w="9525" cap="flat" cmpd="sng" algn="ctr">
+                      <a:solidFill>
+                        <a:schemeClr val="tx1"/>
+                      </a:solidFill>
+                      <a:prstDash val="solid"/>
+                      <a:round/>
+                      <a:headEnd type="none" w="med" len="med"/>
+                      <a:tailEnd type="none" w="med" len="med"/>
+                    </a:lnT>
+                    <a:lnB w="9525" cap="flat" cmpd="sng" algn="ctr">
+                      <a:solidFill>
+                        <a:schemeClr val="bg1">
+                          <a:lumMod val="50000"/>
+                        </a:schemeClr>
+                      </a:solidFill>
+                      <a:prstDash val="solid"/>
+                      <a:round/>
+                      <a:headEnd type="none" w="med" len="med"/>
+                      <a:tailEnd type="none" w="med" len="med"/>
+                    </a:lnB>
+                    <a:solidFill>
+                      <a:srgbClr val="002060"/>
+                    </a:solidFill>
+                  </a:tcPr>
+                </a:tc>
+              </a:tr>
+              <a:tr h="288000">
+                <a:tc>
+                  <a:txBody>
+                    <a:bodyPr/>
+                    <a:lstStyle/>
+                    <a:p>
+                      <a:pPr algn="l" fontAlgn="ctr">
+                        <a:buNone/>
+                      </a:pPr>
+                      <a:r>
+                        <a:rPr lang="en" sz="1000" b="1" i="0" u="none" strike="noStrike" dirty="0">
+                          <a:solidFill>
+                            <a:schemeClr val="tx1"/>
+                          </a:solidFill>
+                          <a:effectLst/>
+                          <a:latin typeface="맑은 고딕" panose="020B0503020000020004" pitchFamily="34" charset="-127"/>
+                          <a:ea typeface="맑은 고딕" panose="020B0503020000020004" pitchFamily="34" charset="-127"/>
+                          <a:cs typeface="맑은 고딕"/>
+                        </a:rPr>
+                        <a:t>업무 결과</a:t>
+                      </a:r>
+                    </a:p>
+                  </a:txBody>
+                  <a:tcPr marL="81005" marR="6750" marT="6750" marB="0" anchor="ctr">
+                    <a:lnL>
+                      <a:noFill/>
+                    </a:lnL>
+                    <a:lnR>
+                      <a:noFill/>
+                    </a:lnR>
+                    <a:lnT w="9525" cap="flat" cmpd="sng" algn="ctr">
+                      <a:solidFill>
+                        <a:schemeClr val="bg1">
+                          <a:lumMod val="50000"/>
+                        </a:schemeClr>
+                      </a:solidFill>
+                      <a:prstDash val="solid"/>
+                      <a:round/>
+                      <a:headEnd type="none" w="med" len="med"/>
+                      <a:tailEnd type="none" w="med" len="med"/>
+                    </a:lnT>
+                    <a:lnB w="9525" cap="flat" cmpd="sng" algn="ctr">
+                      <a:solidFill>
+                        <a:schemeClr val="bg1">
+                          <a:lumMod val="50000"/>
+                        </a:schemeClr>
+                      </a:solidFill>
+                      <a:prstDash val="solid"/>
+                      <a:round/>
+                      <a:headEnd type="none" w="med" len="med"/>
+                      <a:tailEnd type="none" w="med" len="med"/>
+                    </a:lnB>
+                    <a:noFill/>
+                  </a:tcPr>
+                </a:tc>
+                <a:tc>
+                  <a:txBody>
+                    <a:bodyPr/>
+                    <a:lstStyle/>
+                    <a:p>
+                      <a:pPr algn="l" fontAlgn="ctr">
+                        <a:buNone/>
+                      </a:pPr>
+                      <a:r>
+                        <a:rPr lang="ko-KR" altLang="en-US" sz="1000" b="0" i="0" u="none" strike="noStrike" dirty="0">
+                          <a:solidFill>
+                            <a:srgbClr val="000000"/>
+                          </a:solidFill>
+                          <a:effectLst/>
+                          <a:latin typeface="맑은 고딕" panose="020B0503020000020004" pitchFamily="34" charset="-127"/>
+                          <a:ea typeface="맑은 고딕" panose="020B0503020000020004" pitchFamily="34" charset="-127"/>
+                          <a:cs typeface="맑은 고딕"/>
+                        </a:rPr>
+                        <a:t>네 포트만 대역</a:t>
+                      </a:r>
+                    </a:p>
+                  </a:txBody>
+                  <a:tcPr marL="81005" marR="6750" marT="6750" marB="0" anchor="ctr">
+                    <a:lnL>
+                      <a:noFill/>
+                    </a:lnL>
+                    <a:lnR>
+                      <a:noFill/>
+                    </a:lnR>
+                    <a:lnT w="9525" cap="flat" cmpd="sng" algn="ctr">
+                      <a:solidFill>
+                        <a:schemeClr val="bg1">
+                          <a:lumMod val="50000"/>
+                        </a:schemeClr>
+                      </a:solidFill>
+                      <a:prstDash val="solid"/>
+                      <a:round/>
+                      <a:headEnd type="none" w="med" len="med"/>
+                      <a:tailEnd type="none" w="med" len="med"/>
+                    </a:lnT>
+                    <a:lnB w="9525" cap="flat" cmpd="sng" algn="ctr">
+                      <a:solidFill>
+                        <a:schemeClr val="bg1">
+                          <a:lumMod val="50000"/>
+                        </a:schemeClr>
+                      </a:solidFill>
+                      <a:prstDash val="solid"/>
+                      <a:round/>
+                      <a:headEnd type="none" w="med" len="med"/>
+                      <a:tailEnd type="none" w="med" len="med"/>
+                    </a:lnB>
+                    <a:solidFill>
+                      <a:srgbClr val="FFFFFF"/>
+                    </a:solidFill>
+                  </a:tcPr>
+                </a:tc>
+                <a:tc>
+                  <a:txBody>
+                    <a:bodyPr/>
+                    <a:lstStyle/>
+                    <a:p>
+                      <a:pPr algn="l" fontAlgn="ctr">
+                        <a:buNone/>
+                      </a:pPr>
+                      <a:r>
+                        <a:rPr lang="ko-KR" altLang="en-US" sz="1000" b="0" i="0" u="none" strike="noStrike" dirty="0">
+                          <a:solidFill>
+                            <a:srgbClr val="000000"/>
+                          </a:solidFill>
+                          <a:effectLst/>
+                          <a:latin typeface="맑은 고딕" panose="020B0503020000020004" pitchFamily="34" charset="-127"/>
+                          <a:ea typeface="맑은 고딕" panose="020B0503020000020004" pitchFamily="34" charset="-127"/>
+                          <a:cs typeface="맑은 고딕"/>
+                        </a:rPr>
+                        <a:t>상태·계약 수·결제 요청 횟수</a:t>
+                      </a:r>
+                    </a:p>
+                  </a:txBody>
+                  <a:tcPr marL="81005" marR="6750" marT="6750" marB="0" anchor="ctr">
+                    <a:lnL>
+                      <a:noFill/>
+                    </a:lnL>
+                    <a:lnR>
+                      <a:noFill/>
+                    </a:lnR>
+                    <a:lnT w="9525" cap="flat" cmpd="sng" algn="ctr">
+                      <a:solidFill>
+                        <a:schemeClr val="bg1">
+                          <a:lumMod val="50000"/>
+                        </a:schemeClr>
+                      </a:solidFill>
+                      <a:prstDash val="solid"/>
+                      <a:round/>
+                      <a:headEnd type="none" w="med" len="med"/>
+                      <a:tailEnd type="none" w="med" len="med"/>
+                    </a:lnT>
+                    <a:lnB w="9525" cap="flat" cmpd="sng" algn="ctr">
+                      <a:solidFill>
+                        <a:schemeClr val="bg1">
+                          <a:lumMod val="50000"/>
+                        </a:schemeClr>
+                      </a:solidFill>
+                      <a:prstDash val="solid"/>
+                      <a:round/>
+                      <a:headEnd type="none" w="med" len="med"/>
+                      <a:tailEnd type="none" w="med" len="med"/>
+                    </a:lnB>
+                    <a:solidFill>
+                      <a:srgbClr val="FFFFFF"/>
+                    </a:solidFill>
+                  </a:tcPr>
+                </a:tc>
+                <a:tc>
+                  <a:txBody>
+                    <a:bodyPr/>
+                    <a:lstStyle/>
+                    <a:p>
+                      <a:pPr algn="l" fontAlgn="ctr">
+                        <a:buNone/>
+                      </a:pPr>
+                      <a:r>
+                        <a:rPr lang="ko-KR" altLang="en-US" sz="1000" b="0" i="0" u="none" strike="noStrike" dirty="0">
+                          <a:solidFill>
+                            <a:srgbClr val="000000"/>
+                          </a:solidFill>
+                          <a:effectLst/>
+                          <a:latin typeface="맑은 고딕" panose="020B0503020000020004" pitchFamily="34" charset="-127"/>
+                          <a:ea typeface="맑은 고딕" panose="020B0503020000020004" pitchFamily="34" charset="-127"/>
+                          <a:cs typeface="맑은 고딕"/>
+                        </a:rPr>
+                        <a:t>저장과 결제의 실제 동작</a:t>
+                      </a:r>
+                    </a:p>
+                  </a:txBody>
+                  <a:tcPr marL="81005" marR="6750" marT="6750" marB="0" anchor="ctr">
+                    <a:lnL>
+                      <a:noFill/>
+                    </a:lnL>
+                    <a:lnR>
+                      <a:noFill/>
+                    </a:lnR>
+                    <a:lnT w="9525" cap="flat" cmpd="sng" algn="ctr">
+                      <a:solidFill>
+                        <a:schemeClr val="bg1">
+                          <a:lumMod val="50000"/>
+                        </a:schemeClr>
+                      </a:solidFill>
+                      <a:prstDash val="solid"/>
+                      <a:round/>
+                      <a:headEnd type="none" w="med" len="med"/>
+                      <a:tailEnd type="none" w="med" len="med"/>
+                    </a:lnT>
+                    <a:lnB w="9525" cap="flat" cmpd="sng" algn="ctr">
+                      <a:solidFill>
+                        <a:schemeClr val="bg1">
+                          <a:lumMod val="50000"/>
+                        </a:schemeClr>
+                      </a:solidFill>
+                      <a:prstDash val="solid"/>
+                      <a:round/>
+                      <a:headEnd type="none" w="med" len="med"/>
+                      <a:tailEnd type="none" w="med" len="med"/>
+                    </a:lnB>
+                    <a:solidFill>
+                      <a:srgbClr val="FFFFFF"/>
+                    </a:solidFill>
+                  </a:tcPr>
+                </a:tc>
+              </a:tr>
+              <a:tr h="288000">
+                <a:tc>
+                  <a:txBody>
+                    <a:bodyPr/>
+                    <a:lstStyle/>
+                    <a:p>
+                      <a:pPr algn="l" fontAlgn="ctr">
+                        <a:buNone/>
+                      </a:pPr>
+                      <a:r>
+                        <a:rPr lang="en" sz="1000" b="1" i="0" u="none" strike="noStrike" dirty="0">
+                          <a:solidFill>
+                            <a:schemeClr val="tx1"/>
+                          </a:solidFill>
+                          <a:effectLst/>
+                          <a:latin typeface="맑은 고딕" panose="020B0503020000020004" pitchFamily="34" charset="-127"/>
+                          <a:ea typeface="맑은 고딕" panose="020B0503020000020004" pitchFamily="34" charset="-127"/>
+                          <a:cs typeface="맑은 고딕"/>
+                        </a:rPr>
+                        <a:t>구조</a:t>
+                      </a:r>
+                    </a:p>
+                  </a:txBody>
+                  <a:tcPr marL="81005" marR="6750" marT="6750" marB="0" anchor="ctr">
+                    <a:lnL>
+                      <a:noFill/>
+                    </a:lnL>
+                    <a:lnR>
+                      <a:noFill/>
+                    </a:lnR>
+                    <a:lnT w="9525" cap="flat" cmpd="sng" algn="ctr">
+                      <a:solidFill>
+                        <a:schemeClr val="bg1">
+                          <a:lumMod val="50000"/>
+                        </a:schemeClr>
+                      </a:solidFill>
+                      <a:prstDash val="solid"/>
+                      <a:round/>
+                      <a:headEnd type="none" w="med" len="med"/>
+                      <a:tailEnd type="none" w="med" len="med"/>
+                    </a:lnT>
+                    <a:lnB w="9525" cap="flat" cmpd="sng" algn="ctr">
+                      <a:solidFill>
+                        <a:schemeClr val="bg1">
+                          <a:lumMod val="50000"/>
+                        </a:schemeClr>
+                      </a:solidFill>
+                      <a:prstDash val="solid"/>
+                      <a:round/>
+                      <a:headEnd type="none" w="med" len="med"/>
+                      <a:tailEnd type="none" w="med" len="med"/>
+                    </a:lnB>
+                    <a:noFill/>
+                  </a:tcPr>
+                </a:tc>
+                <a:tc>
+                  <a:txBody>
+                    <a:bodyPr/>
+                    <a:lstStyle/>
+                    <a:p>
+                      <a:pPr algn="l" fontAlgn="ctr">
+                        <a:buNone/>
+                      </a:pPr>
+                      <a:r>
+                        <a:rPr lang="ko-KR" altLang="en-US" sz="1000" b="0" i="0" u="none" strike="noStrike" dirty="0">
+                          <a:solidFill>
+                            <a:srgbClr val="000000"/>
+                          </a:solidFill>
+                          <a:effectLst/>
+                          <a:latin typeface="맑은 고딕" panose="020B0503020000020004" pitchFamily="34" charset="-127"/>
+                          <a:ea typeface="맑은 고딕" panose="020B0503020000020004" pitchFamily="34" charset="-127"/>
+                          <a:cs typeface="맑은 고딕"/>
+                        </a:rPr>
+                        <a:t>정적 의존 검사</a:t>
+                      </a:r>
+                    </a:p>
+                  </a:txBody>
+                  <a:tcPr marL="81005" marR="6750" marT="6750" marB="0" anchor="ctr">
+                    <a:lnL>
+                      <a:noFill/>
+                    </a:lnL>
+                    <a:lnR>
+                      <a:noFill/>
+                    </a:lnR>
+                    <a:lnT w="9525" cap="flat" cmpd="sng" algn="ctr">
+                      <a:solidFill>
+                        <a:schemeClr val="bg1">
+                          <a:lumMod val="50000"/>
+                        </a:schemeClr>
+                      </a:solidFill>
+                      <a:prstDash val="solid"/>
+                      <a:round/>
+                      <a:headEnd type="none" w="med" len="med"/>
+                      <a:tailEnd type="none" w="med" len="med"/>
+                    </a:lnT>
+                    <a:lnB w="9525" cap="flat" cmpd="sng" algn="ctr">
+                      <a:solidFill>
+                        <a:schemeClr val="bg1">
+                          <a:lumMod val="50000"/>
+                        </a:schemeClr>
+                      </a:solidFill>
+                      <a:prstDash val="solid"/>
+                      <a:round/>
+                      <a:headEnd type="none" w="med" len="med"/>
+                      <a:tailEnd type="none" w="med" len="med"/>
+                    </a:lnB>
+                    <a:solidFill>
+                      <a:srgbClr val="FFFFFF"/>
+                    </a:solidFill>
+                  </a:tcPr>
+                </a:tc>
+                <a:tc>
+                  <a:txBody>
+                    <a:bodyPr/>
+                    <a:lstStyle/>
+                    <a:p>
+                      <a:pPr algn="l" fontAlgn="ctr">
+                        <a:buNone/>
+                      </a:pPr>
+                      <a:r>
+                        <a:rPr lang="ko-KR" altLang="en-US" sz="1000" b="0" i="0" u="none" strike="noStrike" dirty="0">
+                          <a:solidFill>
+                            <a:srgbClr val="000000"/>
+                          </a:solidFill>
+                          <a:effectLst/>
+                          <a:latin typeface="맑은 고딕" panose="020B0503020000020004" pitchFamily="34" charset="-127"/>
+                          <a:ea typeface="맑은 고딕" panose="020B0503020000020004" pitchFamily="34" charset="-127"/>
+                          <a:cs typeface="맑은 고딕"/>
+                        </a:rPr>
+                        <a:t>허용·금지 의존과 순환</a:t>
+                      </a:r>
+                    </a:p>
+                  </a:txBody>
+                  <a:tcPr marL="81005" marR="6750" marT="6750" marB="0" anchor="ctr">
+                    <a:lnL>
+                      <a:noFill/>
+                    </a:lnL>
+                    <a:lnR>
+                      <a:noFill/>
+                    </a:lnR>
+                    <a:lnT w="9525" cap="flat" cmpd="sng" algn="ctr">
+                      <a:solidFill>
+                        <a:schemeClr val="bg1">
+                          <a:lumMod val="50000"/>
+                        </a:schemeClr>
+                      </a:solidFill>
+                      <a:prstDash val="solid"/>
+                      <a:round/>
+                      <a:headEnd type="none" w="med" len="med"/>
+                      <a:tailEnd type="none" w="med" len="med"/>
+                    </a:lnT>
+                    <a:lnB w="9525" cap="flat" cmpd="sng" algn="ctr">
+                      <a:solidFill>
+                        <a:schemeClr val="bg1">
+                          <a:lumMod val="50000"/>
+                        </a:schemeClr>
+                      </a:solidFill>
+                      <a:prstDash val="solid"/>
+                      <a:round/>
+                      <a:headEnd type="none" w="med" len="med"/>
+                      <a:tailEnd type="none" w="med" len="med"/>
+                    </a:lnB>
+                    <a:solidFill>
+                      <a:srgbClr val="FFFFFF"/>
+                    </a:solidFill>
+                  </a:tcPr>
+                </a:tc>
+                <a:tc>
+                  <a:txBody>
+                    <a:bodyPr/>
+                    <a:lstStyle/>
+                    <a:p>
+                      <a:pPr algn="l" fontAlgn="ctr">
+                        <a:buNone/>
+                      </a:pPr>
+                      <a:r>
+                        <a:rPr lang="ko-KR" altLang="en-US" sz="1000" b="0" i="0" u="none" strike="noStrike" dirty="0">
+                          <a:solidFill>
+                            <a:srgbClr val="000000"/>
+                          </a:solidFill>
+                          <a:effectLst/>
+                          <a:latin typeface="맑은 고딕" panose="020B0503020000020004" pitchFamily="34" charset="-127"/>
+                          <a:ea typeface="맑은 고딕" panose="020B0503020000020004" pitchFamily="34" charset="-127"/>
+                          <a:cs typeface="맑은 고딕"/>
+                        </a:rPr>
+                        <a:t>업무 결과</a:t>
+                      </a:r>
+                    </a:p>
+                  </a:txBody>
+                  <a:tcPr marL="81005" marR="6750" marT="6750" marB="0" anchor="ctr">
+                    <a:lnL>
+                      <a:noFill/>
+                    </a:lnL>
+                    <a:lnR>
+                      <a:noFill/>
+                    </a:lnR>
+                    <a:lnT w="9525" cap="flat" cmpd="sng" algn="ctr">
+                      <a:solidFill>
+                        <a:schemeClr val="bg1">
+                          <a:lumMod val="50000"/>
+                        </a:schemeClr>
+                      </a:solidFill>
+                      <a:prstDash val="solid"/>
+                      <a:round/>
+                      <a:headEnd type="none" w="med" len="med"/>
+                      <a:tailEnd type="none" w="med" len="med"/>
+                    </a:lnT>
+                    <a:lnB w="9525" cap="flat" cmpd="sng" algn="ctr">
+                      <a:solidFill>
+                        <a:schemeClr val="bg1">
+                          <a:lumMod val="50000"/>
+                        </a:schemeClr>
+                      </a:solidFill>
+                      <a:prstDash val="solid"/>
+                      <a:round/>
+                      <a:headEnd type="none" w="med" len="med"/>
+                      <a:tailEnd type="none" w="med" len="med"/>
+                    </a:lnB>
+                    <a:solidFill>
+                      <a:srgbClr val="FFFFFF"/>
+                    </a:solidFill>
+                  </a:tcPr>
+                </a:tc>
+              </a:tr>
+              <a:tr h="288000">
+                <a:tc>
+                  <a:txBody>
+                    <a:bodyPr/>
+                    <a:lstStyle/>
+                    <a:p>
+                      <a:pPr algn="l" fontAlgn="ctr">
+                        <a:buNone/>
+                      </a:pPr>
+                      <a:r>
+                        <a:rPr lang="en" sz="1000" b="1" i="0" u="none" strike="noStrike" dirty="0">
+                          <a:solidFill>
+                            <a:schemeClr val="tx1"/>
+                          </a:solidFill>
+                          <a:effectLst/>
+                          <a:latin typeface="맑은 고딕" panose="020B0503020000020004" pitchFamily="34" charset="-127"/>
+                          <a:ea typeface="맑은 고딕" panose="020B0503020000020004" pitchFamily="34" charset="-127"/>
+                          <a:cs typeface="맑은 고딕"/>
+                        </a:rPr>
+                        <a:t>성능</a:t>
+                      </a:r>
+                    </a:p>
+                  </a:txBody>
+                  <a:tcPr marL="81005" marR="6750" marT="6750" marB="0" anchor="ctr">
+                    <a:lnL>
+                      <a:noFill/>
+                    </a:lnL>
+                    <a:lnR>
+                      <a:noFill/>
+                    </a:lnR>
+                    <a:lnT w="9525" cap="flat" cmpd="sng" algn="ctr">
+                      <a:solidFill>
+                        <a:schemeClr val="bg1">
+                          <a:lumMod val="50000"/>
+                        </a:schemeClr>
+                      </a:solidFill>
+                      <a:prstDash val="solid"/>
+                      <a:round/>
+                      <a:headEnd type="none" w="med" len="med"/>
+                      <a:tailEnd type="none" w="med" len="med"/>
+                    </a:lnT>
+                    <a:lnB w="9525" cap="flat" cmpd="sng" algn="ctr">
+                      <a:solidFill>
+                        <a:schemeClr val="bg1">
+                          <a:lumMod val="50000"/>
+                        </a:schemeClr>
+                      </a:solidFill>
+                      <a:prstDash val="solid"/>
+                      <a:round/>
+                      <a:headEnd type="none" w="med" len="med"/>
+                      <a:tailEnd type="none" w="med" len="med"/>
+                    </a:lnB>
+                    <a:noFill/>
+                  </a:tcPr>
+                </a:tc>
+                <a:tc>
+                  <a:txBody>
+                    <a:bodyPr/>
+                    <a:lstStyle/>
+                    <a:p>
+                      <a:pPr algn="l" fontAlgn="ctr">
+                        <a:buNone/>
+                      </a:pPr>
+                      <a:r>
+                        <a:rPr lang="ko-KR" altLang="en-US" sz="1000" b="0" i="0" u="none" strike="noStrike" dirty="0">
+                          <a:solidFill>
+                            <a:srgbClr val="000000"/>
+                          </a:solidFill>
+                          <a:effectLst/>
+                          <a:latin typeface="맑은 고딕" panose="020B0503020000020004" pitchFamily="34" charset="-127"/>
+                          <a:ea typeface="맑은 고딕" panose="020B0503020000020004" pitchFamily="34" charset="-127"/>
+                          <a:cs typeface="맑은 고딕"/>
+                        </a:rPr>
+                        <a:t>연계 환경에서 실측</a:t>
+                      </a:r>
+                    </a:p>
+                  </a:txBody>
+                  <a:tcPr marL="81005" marR="6750" marT="6750" marB="0" anchor="ctr">
+                    <a:lnL>
+                      <a:noFill/>
+                    </a:lnL>
+                    <a:lnR>
+                      <a:noFill/>
+                    </a:lnR>
+                    <a:lnT w="9525" cap="flat" cmpd="sng" algn="ctr">
+                      <a:solidFill>
+                        <a:schemeClr val="bg1">
+                          <a:lumMod val="50000"/>
+                        </a:schemeClr>
+                      </a:solidFill>
+                      <a:prstDash val="solid"/>
+                      <a:round/>
+                      <a:headEnd type="none" w="med" len="med"/>
+                      <a:tailEnd type="none" w="med" len="med"/>
+                    </a:lnT>
+                    <a:lnB w="9525" cap="flat" cmpd="sng" algn="ctr">
+                      <a:solidFill>
+                        <a:schemeClr val="bg1">
+                          <a:lumMod val="50000"/>
+                        </a:schemeClr>
+                      </a:solidFill>
+                      <a:prstDash val="solid"/>
+                      <a:round/>
+                      <a:headEnd type="none" w="med" len="med"/>
+                      <a:tailEnd type="none" w="med" len="med"/>
+                    </a:lnB>
+                    <a:solidFill>
+                      <a:srgbClr val="FFFFFF"/>
+                    </a:solidFill>
+                  </a:tcPr>
+                </a:tc>
+                <a:tc>
+                  <a:txBody>
+                    <a:bodyPr/>
+                    <a:lstStyle/>
+                    <a:p>
+                      <a:pPr algn="l" fontAlgn="ctr">
+                        <a:buNone/>
+                      </a:pPr>
+                      <a:r>
+                        <a:rPr lang="ko-KR" altLang="en-US" sz="1000" b="0" i="0" u="none" strike="noStrike" dirty="0">
+                          <a:solidFill>
+                            <a:srgbClr val="000000"/>
+                          </a:solidFill>
+                          <a:effectLst/>
+                          <a:latin typeface="맑은 고딕" panose="020B0503020000020004" pitchFamily="34" charset="-127"/>
+                          <a:ea typeface="맑은 고딕" panose="020B0503020000020004" pitchFamily="34" charset="-127"/>
+                          <a:cs typeface="맑은 고딕"/>
+                        </a:rPr>
+                        <a:t>품질 요구사항 충족 여부</a:t>
+                      </a:r>
+                    </a:p>
+                  </a:txBody>
+                  <a:tcPr marL="81005" marR="6750" marT="6750" marB="0" anchor="ctr">
+                    <a:lnL>
+                      <a:noFill/>
+                    </a:lnL>
+                    <a:lnR>
+                      <a:noFill/>
+                    </a:lnR>
+                    <a:lnT w="9525" cap="flat" cmpd="sng" algn="ctr">
+                      <a:solidFill>
+                        <a:schemeClr val="bg1">
+                          <a:lumMod val="50000"/>
+                        </a:schemeClr>
+                      </a:solidFill>
+                      <a:prstDash val="solid"/>
+                      <a:round/>
+                      <a:headEnd type="none" w="med" len="med"/>
+                      <a:tailEnd type="none" w="med" len="med"/>
+                    </a:lnT>
+                    <a:lnB w="9525" cap="flat" cmpd="sng" algn="ctr">
+                      <a:solidFill>
+                        <a:schemeClr val="bg1">
+                          <a:lumMod val="50000"/>
+                        </a:schemeClr>
+                      </a:solidFill>
+                      <a:prstDash val="solid"/>
+                      <a:round/>
+                      <a:headEnd type="none" w="med" len="med"/>
+                      <a:tailEnd type="none" w="med" len="med"/>
+                    </a:lnB>
+                    <a:solidFill>
+                      <a:srgbClr val="FFFFFF"/>
+                    </a:solidFill>
+                  </a:tcPr>
+                </a:tc>
+                <a:tc>
+                  <a:txBody>
+                    <a:bodyPr/>
+                    <a:lstStyle/>
+                    <a:p>
+                      <a:pPr algn="l" fontAlgn="ctr">
+                        <a:buNone/>
+                      </a:pPr>
+                      <a:r>
+                        <a:rPr lang="ko-KR" altLang="en-US" sz="1000" b="0" i="0" u="none" strike="noStrike" dirty="0">
+                          <a:solidFill>
+                            <a:srgbClr val="000000"/>
+                          </a:solidFill>
+                          <a:effectLst/>
+                          <a:latin typeface="맑은 고딕" panose="020B0503020000020004" pitchFamily="34" charset="-127"/>
+                          <a:ea typeface="맑은 고딕" panose="020B0503020000020004" pitchFamily="34" charset="-127"/>
+                          <a:cs typeface="맑은 고딕"/>
+                        </a:rPr>
+                        <a:t>대역으로는 못 본다</a:t>
+                      </a:r>
+                    </a:p>
+                  </a:txBody>
+                  <a:tcPr marL="81005" marR="6750" marT="6750" marB="0" anchor="ctr">
+                    <a:lnL>
+                      <a:noFill/>
+                    </a:lnL>
+                    <a:lnR>
+                      <a:noFill/>
+                    </a:lnR>
+                    <a:lnT w="9525" cap="flat" cmpd="sng" algn="ctr">
+                      <a:solidFill>
+                        <a:schemeClr val="bg1">
+                          <a:lumMod val="50000"/>
+                        </a:schemeClr>
+                      </a:solidFill>
+                      <a:prstDash val="solid"/>
+                      <a:round/>
+                      <a:headEnd type="none" w="med" len="med"/>
+                      <a:tailEnd type="none" w="med" len="med"/>
+                    </a:lnT>
+                    <a:lnB w="9525" cap="flat" cmpd="sng" algn="ctr">
+                      <a:solidFill>
+                        <a:schemeClr val="bg1">
+                          <a:lumMod val="50000"/>
+                        </a:schemeClr>
+                      </a:solidFill>
+                      <a:prstDash val="solid"/>
+                      <a:round/>
+                      <a:headEnd type="none" w="med" len="med"/>
+                      <a:tailEnd type="none" w="med" len="med"/>
+                    </a:lnB>
+                    <a:solidFill>
+                      <a:srgbClr val="FFFFFF"/>
+                    </a:solidFill>
+                  </a:tcPr>
+                </a:tc>
+              </a:tr>
+            </a:tbl>
+          </a:graphicData>
+        </a:graphic>
+      </p:graphicFrame>
+      <p:sp>
+        <p:nvSpPr>
+          <p:cNvPr id="13" name="TextBox 12">
+            <a:extLst>
+              <a:ext uri="{FF2B5EF4-FFF2-40B4-BE49-F238E27FC236}">
+                <a16:creationId xmlns:a16="http://schemas.microsoft.com/office/drawing/2014/main" id="{654EDDB4-901F-3D48-A715-17D163E8A7AC}"/>
+              </a:ext>
+            </a:extLst>
+          </p:cNvPr>
+          <p:cNvSpPr txBox="1"/>
+          <p:nvPr/>
+        </p:nvSpPr>
+        <p:spPr>
+          <a:xfrm>
+            <a:off x="365760" y="960120"/>
+            <a:ext cx="8412480" cy="781278"/>
+          </a:xfrm>
+          <a:prstGeom prst="rect">
+            <a:avLst/>
+          </a:prstGeom>
+          <a:noFill/>
+        </p:spPr>
+        <p:txBody>
+          <a:bodyPr wrap="square">
+            <a:spAutoFit/>
+          </a:bodyPr>
+          <a:lstStyle/>
+          <a:p>
+            <a:pPr marL="0" indent="0">
+              <a:spcBef>
+                <a:spcPts val="600"/>
+              </a:spcBef>
+              <a:spcAft>
+                <a:spcPts val="600"/>
+              </a:spcAft>
+              <a:buNone/>
+            </a:pPr>
+            <a:r>
+              <a:rPr sz="1800" b="0">
+                <a:solidFill>
+                  <a:srgbClr val="000000"/>
+                </a:solidFill>
+                <a:latin typeface="맑은 고딕"/>
+                <a:ea typeface="맑은 고딕"/>
+              </a:rPr>
+              <a:t>실제 외부 시스템 없이 </a:t>
+            </a:r>
+            <a:r>
+              <a:rPr sz="1800" b="1">
+                <a:solidFill>
+                  <a:srgbClr val="000000"/>
+                </a:solidFill>
+                <a:latin typeface="맑은 고딕"/>
+                <a:ea typeface="맑은 고딕"/>
+              </a:rPr>
+              <a:t>네 포트만 대역으로 바꿔</a:t>
+            </a:r>
+            <a:r>
+              <a:rPr sz="1800" b="0">
+                <a:solidFill>
+                  <a:srgbClr val="000000"/>
+                </a:solidFill>
+                <a:latin typeface="맑은 고딕"/>
+                <a:ea typeface="맑은 고딕"/>
+              </a:rPr>
+              <a:t> 업무 결과를 확인한다. 구조와 성능은 따로 본다.</a:t>
+            </a:r>
+          </a:p>
+        </p:txBody>
+      </p:sp>
+      <p:sp>
+        <p:nvSpPr>
+          <p:cNvPr id="8" name="슬라이드 번호 개체 틀 2">
+            <a:extLst>
+              <a:ext uri="{FF2B5EF4-FFF2-40B4-BE49-F238E27FC236}">
+                <a16:creationId xmlns:a16="http://schemas.microsoft.com/office/drawing/2014/main" id="{741B75C6-7ED3-AA4C-41B6-F69C599EA447}"/>
+              </a:ext>
+            </a:extLst>
+          </p:cNvPr>
+          <p:cNvSpPr>
+            <a:spLocks noGrp="1"/>
+          </p:cNvSpPr>
+          <p:nvPr>
+            <p:ph type="sldNum" sz="quarter" idx="10"/>
+          </p:nvPr>
+        </p:nvSpPr>
+        <p:spPr>
+          <a:xfrm>
+            <a:off x="3508472" y="6449625"/>
+            <a:ext cx="2133600" cy="238277"/>
+          </a:xfrm>
+        </p:spPr>
+        <p:txBody>
+          <a:bodyPr>
+            <a:normAutofit/>
+          </a:bodyPr>
+          <a:lstStyle/>
+          <a:p>
+            <a:pPr marL="0" marR="0" lvl="0" indent="0" algn="ctr" defTabSz="457200" rtl="0" eaLnBrk="1" fontAlgn="auto" latinLnBrk="0" hangingPunct="1">
+              <a:lnSpc>
+                <a:spcPct val="100000"/>
+              </a:lnSpc>
+              <a:spcBef>
+                <a:spcPts val="0"/>
+              </a:spcBef>
+              <a:spcAft>
+                <a:spcPts val="600"/>
+              </a:spcAft>
+              <a:buClrTx/>
+              <a:buSzTx/>
+              <a:buFontTx/>
+              <a:buNone/>
+              <a:tabLst/>
+              <a:defRPr/>
+            </a:pPr>
+            <a:r>
+              <a:rPr kumimoji="0" lang="en-US" altLang="ko-KR" sz="800" b="0" i="0" u="none" strike="noStrike" kern="1200" cap="none" spc="0" normalizeH="0" baseline="0" noProof="0">
+                <a:ln>
+                  <a:noFill/>
+                </a:ln>
+                <a:solidFill>
+                  <a:prstClr val="black"/>
+                </a:solidFill>
+                <a:effectLst/>
+                <a:uLnTx/>
+                <a:uFillTx/>
+                <a:latin typeface="맑은 고딕" panose="020B0503020000020004" pitchFamily="34" charset="-127"/>
+                <a:ea typeface="맑은 고딕" panose="020B0503020000020004" pitchFamily="34" charset="-127"/>
+                <a:cs typeface="+mn-cs"/>
+              </a:rPr>
+              <a:t>- 23 -</a:t>
+            </a:r>
+          </a:p>
+        </p:txBody>
+      </p:sp>
+      <p:sp>
+        <p:nvSpPr>
+          <p:cNvPr id="14" name="TextBox 12">
+            <a:extLst>
+              <a:ext uri="{FF2B5EF4-FFF2-40B4-BE49-F238E27FC236}">
+                <a16:creationId xmlns:a16="http://schemas.microsoft.com/office/drawing/2014/main" id="{654EDDB4-901F-3D48-A715-17D163E8A7AC}"/>
+              </a:ext>
+            </a:extLst>
+          </p:cNvPr>
+          <p:cNvSpPr txBox="1"/>
+          <p:nvPr/>
+        </p:nvSpPr>
+        <p:spPr>
+          <a:xfrm>
+            <a:off x="365760" y="1813560"/>
+            <a:ext cx="8412480" cy="222250"/>
+          </a:xfrm>
+          <a:prstGeom prst="rect">
+            <a:avLst/>
+          </a:prstGeom>
+          <a:noFill/>
+        </p:spPr>
+        <p:txBody>
+          <a:bodyPr wrap="square" tIns="0" bIns="0">
+            <a:spAutoFit/>
+          </a:bodyPr>
+          <a:lstStyle/>
+          <a:p>
+            <a:pPr algn="ctr">
+              <a:spcBef>
+                <a:spcPts val="0"/>
+              </a:spcBef>
+              <a:spcAft>
+                <a:spcPts val="0"/>
+              </a:spcAft>
+            </a:pPr>
+            <a:r>
+              <a:rPr sz="1400" b="1">
+                <a:solidFill>
+                  <a:srgbClr val="000000"/>
+                </a:solidFill>
+                <a:latin typeface="맑은 고딕"/>
+                <a:ea typeface="맑은 고딕"/>
+              </a:rPr>
+              <a:t>세 방향의 검증</a:t>
+            </a:r>
+          </a:p>
+        </p:txBody>
+      </p:sp>
+      <p:sp>
+        <p:nvSpPr>
+          <p:cNvPr id="15" name="TextBox 12">
+            <a:extLst>
+              <a:ext uri="{FF2B5EF4-FFF2-40B4-BE49-F238E27FC236}">
+                <a16:creationId xmlns:a16="http://schemas.microsoft.com/office/drawing/2014/main" id="{654EDDB4-901F-3D48-A715-17D163E8A7AC}"/>
+              </a:ext>
+            </a:extLst>
+          </p:cNvPr>
+          <p:cNvSpPr txBox="1"/>
+          <p:nvPr/>
+        </p:nvSpPr>
+        <p:spPr>
+          <a:xfrm>
+            <a:off x="365760" y="3492610"/>
+            <a:ext cx="8412480" cy="1949631"/>
+          </a:xfrm>
+          <a:prstGeom prst="rect">
+            <a:avLst/>
+          </a:prstGeom>
+          <a:noFill/>
+        </p:spPr>
+        <p:txBody>
+          <a:bodyPr wrap="square">
+            <a:spAutoFit/>
+          </a:bodyPr>
+          <a:lstStyle/>
+          <a:p>
+            <a:pPr lvl="2" marL="723900" indent="-368300">
+              <a:spcBef>
+                <a:spcPts val="600"/>
+              </a:spcBef>
+              <a:spcAft>
+                <a:spcPts val="600"/>
+              </a:spcAft>
+              <a:buSzPct val="90000"/>
+              <a:buFont typeface="Wingdings" pitchFamily="2" charset="2"/>
+              <a:buChar char=""/>
+            </a:pPr>
+            <a:r>
+              <a:rPr sz="1800" b="1">
+                <a:solidFill>
+                  <a:srgbClr val="000000"/>
+                </a:solidFill>
+                <a:latin typeface="맑은 고딕"/>
+                <a:ea typeface="맑은 고딕"/>
+              </a:rPr>
+              <a:t>대표 예</a:t>
+            </a:r>
+            <a:r>
+              <a:rPr sz="1800" b="0">
+                <a:solidFill>
+                  <a:srgbClr val="000000"/>
+                </a:solidFill>
+                <a:latin typeface="맑은 고딕"/>
+                <a:ea typeface="맑은 고딕"/>
+              </a:rPr>
+              <a:t> —</a:t>
+            </a:r>
+            <a:r>
+              <a:rPr sz="1600" b="0">
+                <a:solidFill>
+                  <a:srgbClr val="000000"/>
+                </a:solidFill>
+                <a:latin typeface="맑은 고딕"/>
+                <a:ea typeface="맑은 고딕"/>
+              </a:rPr>
+              <a:t> 결제 대역이 결과 확인 불가를 돌려주면 신청은 </a:t>
+            </a:r>
+            <a:r>
+              <a:rPr sz="1600" b="0">
+                <a:solidFill>
+                  <a:srgbClr val="000000"/>
+                </a:solidFill>
+                <a:latin typeface="맑은 고딕"/>
+                <a:ea typeface="맑은 고딕"/>
+              </a:rPr>
+              <a:t>결과확인필요</a:t>
+            </a:r>
+            <a:r>
+              <a:rPr sz="1600" b="0">
+                <a:solidFill>
+                  <a:srgbClr val="000000"/>
+                </a:solidFill>
+                <a:latin typeface="맑은 고딕"/>
+                <a:ea typeface="맑은 고딕"/>
+              </a:rPr>
+              <a:t>가 되고 계약은 생기지 않는다. 같은 신청을 다시 보내도 결제 요청은 1회 그대로다.</a:t>
+            </a:r>
+          </a:p>
+          <a:p>
+            <a:pPr lvl="2" marL="723900" indent="-368300">
+              <a:spcBef>
+                <a:spcPts val="600"/>
+              </a:spcBef>
+              <a:spcAft>
+                <a:spcPts val="600"/>
+              </a:spcAft>
+              <a:buSzPct val="90000"/>
+              <a:buFont typeface="Wingdings" pitchFamily="2" charset="2"/>
+              <a:buChar char=""/>
+            </a:pPr>
+            <a:r>
+              <a:rPr sz="1800" b="1">
+                <a:solidFill>
+                  <a:srgbClr val="000000"/>
+                </a:solidFill>
+                <a:latin typeface="맑은 고딕"/>
+                <a:ea typeface="맑은 고딕"/>
+              </a:rPr>
+              <a:t>미결</a:t>
+            </a:r>
+            <a:r>
+              <a:rPr sz="1800" b="0">
+                <a:solidFill>
+                  <a:srgbClr val="000000"/>
+                </a:solidFill>
+                <a:latin typeface="맑은 고딕"/>
+                <a:ea typeface="맑은 고딕"/>
+              </a:rPr>
+              <a:t> —</a:t>
+            </a:r>
+            <a:r>
+              <a:rPr sz="1600" b="0">
+                <a:solidFill>
+                  <a:srgbClr val="000000"/>
+                </a:solidFill>
+                <a:latin typeface="맑은 고딕"/>
+                <a:ea typeface="맑은 고딕"/>
+              </a:rPr>
+              <a:t> 결과 확인을 시작하는 주체와 시점 · 첫 회차와 일반 주문의 연결 · 신청 식별자 전달과 DB 제약 · </a:t>
+            </a:r>
+            <a:r>
+              <a:rPr sz="1600" b="0">
+                <a:solidFill>
+                  <a:srgbClr val="000000"/>
+                </a:solidFill>
+                <a:latin typeface="맑은 고딕"/>
+                <a:ea typeface="맑은 고딕"/>
+              </a:rPr>
+              <a:t>신청준비</a:t>
+            </a:r>
+            <a:r>
+              <a:rPr sz="1600" b="0">
+                <a:solidFill>
+                  <a:srgbClr val="000000"/>
+                </a:solidFill>
+                <a:latin typeface="맑은 고딕"/>
+                <a:ea typeface="맑은 고딕"/>
+              </a:rPr>
+              <a:t>의 유효기간 · 결제 제공자의 멱등·조회·오류 규격 · 의존 검사 도구 · 성능 실측</a:t>
+            </a:r>
+          </a:p>
+        </p:txBody>
+      </p:sp>
+    </p:spTree>
+    <p:extLst>
+      <p:ext uri="{BB962C8B-B14F-4D97-AF65-F5344CB8AC3E}">
+        <p14:creationId xmlns:p14="http://schemas.microsoft.com/office/powerpoint/2010/main" val="2789569477"/>
       </p:ext>
     </p:extLst>
   </p:cSld>

--- a/courses/ai-native/sessions/s04.pptx
+++ b/courses/ai-native/sessions/s04.pptx
@@ -1506,6 +1506,13 @@
             <a:pPr lvl="0"/>
             <a:r>
               <a:rPr lang="ko-KR" sz="1200"/>
+              <a:t>인용 근거: [Gao 외 2025] 원문 확인. 구문이 맞는다는 것이 업무 의미가 맞는다는 뜻은 아니므로, 판정의 근거는 도식의 문법이 아니라 용어·관계·조건의 목록이다.</a:t>
+            </a:r>
+          </a:p>
+          <a:p>
+            <a:pPr lvl="0"/>
+            <a:r>
+              <a:rPr lang="ko-KR" sz="1200"/>
               <a:t>Member·할인율·재고 예약은 검토할 가상의 제안이며 실제 실행한 초안이 생성했다고 주장하지 않는다.</a:t>
             </a:r>
           </a:p>
@@ -2413,190 +2420,14 @@
             <a:pPr lvl="0"/>
             <a:r>
               <a:rPr lang="ko-KR" sz="1200"/>
-              <a:t>실제 최종 응답의 문서 제목·도입 문장과 1절 전문이다. 원본은 code/s04/exercise-conversation/order/주문한다-정적모델.md다. 제목 단계와 목록 들여쓰기만 Session Source 형식으로 변환했다.</a:t>
-            </a:r>
-          </a:p>
-        </p:txBody>
-      </p:sp>
-    </p:spTree>
-  </p:cSld>
-  <p:clrMapOvr>
-    <a:masterClrMapping/>
-  </p:clrMapOvr>
-</p:notes>
-</file>
-
-<file path=ppt/notesSlides/notesSlide34.xml><?xml version="1.0" encoding="utf-8"?>
-<p:notes xmlns:a="http://schemas.openxmlformats.org/drawingml/2006/main" xmlns:r="http://schemas.openxmlformats.org/officeDocument/2006/relationships" xmlns:p="http://schemas.openxmlformats.org/presentationml/2006/main">
-  <p:cSld>
-    <p:spTree>
-      <p:nvGrpSpPr>
-        <p:cNvPr id="1" name=""/>
-        <p:cNvGrpSpPr/>
-        <p:nvPr/>
-      </p:nvGrpSpPr>
-      <p:grpSpPr>
-        <a:xfrm>
-          <a:off x="0" y="0"/>
-          <a:ext cx="0" cy="0"/>
-          <a:chOff x="0" y="0"/>
-          <a:chExt cx="0" cy="0"/>
-        </a:xfrm>
-      </p:grpSpPr>
-      <p:sp>
-        <p:nvSpPr>
-          <p:cNvPr id="2" name="슬라이드 이미지 개체 틀"/>
-          <p:cNvSpPr/>
-          <p:nvPr>
-            <p:ph type="sldImg" idx="2"/>
-          </p:nvPr>
-        </p:nvSpPr>
-        <p:spPr/>
-        <p:txBody>
-          <a:bodyPr/>
-          <a:lstStyle/>
-          <a:p/>
-        </p:txBody>
-      </p:sp>
-      <p:sp>
-        <p:nvSpPr>
-          <p:cNvPr id="3" name="슬라이드 노트 개체 틀"/>
-          <p:cNvSpPr/>
-          <p:nvPr>
-            <p:ph type="body" idx="3"/>
-          </p:nvPr>
-        </p:nvSpPr>
-        <p:spPr/>
-        <p:txBody>
-          <a:bodyPr/>
-          <a:lstStyle/>
+              <a:t>실제 최종 응답의 전문이다. 원본은 code/s04/exercise-conversation/order/주문한다-정적모델.md이며 문장·도식·표·원래 강조를 편집하지 않았다. 제목 단계와 목록 들여쓰기만 Session Source 형식으로 변환했다.</a:t>
+            </a:r>
+          </a:p>
           <a:p>
             <a:pPr lvl="0"/>
             <a:r>
               <a:rPr lang="ko-KR" sz="1200"/>
-              <a:t>실제 최종 응답의 2절 전문이다. 앞 별첨부터 마지막 별첨까지 합하면 원본 응답 전체다. 원본은 code/s04/exercise-conversation/order/주문한다-정적모델.md이며 문장·모델 요소·표·원래 강조를 보존했다. 사용자 배치 요청으로 Mermaid에 direction LR 한 줄만 추가해 클래스를 가로로 배치했다. 도식은 위, 설명은 아래에 둔다.</a:t>
-            </a:r>
-          </a:p>
-        </p:txBody>
-      </p:sp>
-    </p:spTree>
-  </p:cSld>
-  <p:clrMapOvr>
-    <a:masterClrMapping/>
-  </p:clrMapOvr>
-</p:notes>
-</file>
-
-<file path=ppt/notesSlides/notesSlide35.xml><?xml version="1.0" encoding="utf-8"?>
-<p:notes xmlns:a="http://schemas.openxmlformats.org/drawingml/2006/main" xmlns:r="http://schemas.openxmlformats.org/officeDocument/2006/relationships" xmlns:p="http://schemas.openxmlformats.org/presentationml/2006/main">
-  <p:cSld>
-    <p:spTree>
-      <p:nvGrpSpPr>
-        <p:cNvPr id="1" name=""/>
-        <p:cNvGrpSpPr/>
-        <p:nvPr/>
-      </p:nvGrpSpPr>
-      <p:grpSpPr>
-        <a:xfrm>
-          <a:off x="0" y="0"/>
-          <a:ext cx="0" cy="0"/>
-          <a:chOff x="0" y="0"/>
-          <a:chExt cx="0" cy="0"/>
-        </a:xfrm>
-      </p:grpSpPr>
-      <p:sp>
-        <p:nvSpPr>
-          <p:cNvPr id="2" name="슬라이드 이미지 개체 틀"/>
-          <p:cNvSpPr/>
-          <p:nvPr>
-            <p:ph type="sldImg" idx="2"/>
-          </p:nvPr>
-        </p:nvSpPr>
-        <p:spPr/>
-        <p:txBody>
-          <a:bodyPr/>
-          <a:lstStyle/>
-          <a:p/>
-        </p:txBody>
-      </p:sp>
-      <p:sp>
-        <p:nvSpPr>
-          <p:cNvPr id="3" name="슬라이드 노트 개체 틀"/>
-          <p:cNvSpPr/>
-          <p:nvPr>
-            <p:ph type="body" idx="3"/>
-          </p:nvPr>
-        </p:nvSpPr>
-        <p:spPr/>
-        <p:txBody>
-          <a:bodyPr/>
-          <a:lstStyle/>
-          <a:p>
-            <a:pPr lvl="0"/>
-            <a:r>
-              <a:rPr lang="ko-KR" sz="1200"/>
-              <a:t>실제 최종 응답의 3절 전문이다. 앞 별첨부터 마지막 별첨까지 합하면 원본 응답 전체다. 원본은 code/s04/exercise-conversation/order/주문한다-정적모델.md이며 문장·도식·표·원래 강조를 편집하지 않았다.</a:t>
-            </a:r>
-          </a:p>
-        </p:txBody>
-      </p:sp>
-    </p:spTree>
-  </p:cSld>
-  <p:clrMapOvr>
-    <a:masterClrMapping/>
-  </p:clrMapOvr>
-</p:notes>
-</file>
-
-<file path=ppt/notesSlides/notesSlide36.xml><?xml version="1.0" encoding="utf-8"?>
-<p:notes xmlns:a="http://schemas.openxmlformats.org/drawingml/2006/main" xmlns:r="http://schemas.openxmlformats.org/officeDocument/2006/relationships" xmlns:p="http://schemas.openxmlformats.org/presentationml/2006/main">
-  <p:cSld>
-    <p:spTree>
-      <p:nvGrpSpPr>
-        <p:cNvPr id="1" name=""/>
-        <p:cNvGrpSpPr/>
-        <p:nvPr/>
-      </p:nvGrpSpPr>
-      <p:grpSpPr>
-        <a:xfrm>
-          <a:off x="0" y="0"/>
-          <a:ext cx="0" cy="0"/>
-          <a:chOff x="0" y="0"/>
-          <a:chExt cx="0" cy="0"/>
-        </a:xfrm>
-      </p:grpSpPr>
-      <p:sp>
-        <p:nvSpPr>
-          <p:cNvPr id="2" name="슬라이드 이미지 개체 틀"/>
-          <p:cNvSpPr/>
-          <p:nvPr>
-            <p:ph type="sldImg" idx="2"/>
-          </p:nvPr>
-        </p:nvSpPr>
-        <p:spPr/>
-        <p:txBody>
-          <a:bodyPr/>
-          <a:lstStyle/>
-          <a:p/>
-        </p:txBody>
-      </p:sp>
-      <p:sp>
-        <p:nvSpPr>
-          <p:cNvPr id="3" name="슬라이드 노트 개체 틀"/>
-          <p:cNvSpPr/>
-          <p:nvPr>
-            <p:ph type="body" idx="3"/>
-          </p:nvPr>
-        </p:nvSpPr>
-        <p:spPr/>
-        <p:txBody>
-          <a:bodyPr/>
-          <a:lstStyle/>
-          <a:p>
-            <a:pPr lvl="0"/>
-            <a:r>
-              <a:rPr lang="ko-KR" sz="1200"/>
-              <a:t>실제 최종 응답의 4절 전문이다. 앞 별첨부터 마지막 별첨까지 합하면 원본 응답 전체다. 원본은 code/s04/exercise-conversation/order/주문한다-정적모델.md이며 문장·도식·표·원래 강조를 편집하지 않았다.</a:t>
+              <a:t>사용자 배치 요청으로 Mermaid에 direction LR 한 줄만 추가해 클래스를 가로로 배치했다. 도식은 위, 설명은 아래에 둔다.</a:t>
             </a:r>
           </a:p>
         </p:txBody>
@@ -17380,6 +17211,109 @@
               <a:buChar char=""/>
             </a:pPr>
             <a:r>
+              <a:rPr sz="1800" b="0">
+                <a:solidFill>
+                  <a:srgbClr val="000000"/>
+                </a:solidFill>
+                <a:latin typeface="맑은 고딕"/>
+                <a:ea typeface="맑은 고딕"/>
+              </a:rPr>
+              <a:t>LLM은 구문이 맞는 UML을 만들 수 있지만 </a:t>
+            </a:r>
+            <a:r>
+              <a:rPr sz="1800" b="1">
+                <a:solidFill>
+                  <a:srgbClr val="000000"/>
+                </a:solidFill>
+                <a:latin typeface="맑은 고딕"/>
+                <a:ea typeface="맑은 고딕"/>
+              </a:rPr>
+              <a:t>의미의 품질</a:t>
+            </a:r>
+            <a:r>
+              <a:rPr sz="1800" b="0">
+                <a:solidFill>
+                  <a:srgbClr val="000000"/>
+                </a:solidFill>
+                <a:latin typeface="맑은 고딕"/>
+                <a:ea typeface="맑은 고딕"/>
+              </a:rPr>
+              <a:t>에서 어려움을 겪고, 특히 다이어그램의 </a:t>
+            </a:r>
+            <a:r>
+              <a:rPr sz="1800" b="1">
+                <a:solidFill>
+                  <a:srgbClr val="000000"/>
+                </a:solidFill>
+                <a:latin typeface="맑은 고딕"/>
+                <a:ea typeface="맑은 고딕"/>
+              </a:rPr>
+              <a:t>규모가 커지면</a:t>
+            </a:r>
+            <a:r>
+              <a:rPr sz="1800" b="0">
+                <a:solidFill>
+                  <a:srgbClr val="000000"/>
+                </a:solidFill>
+                <a:latin typeface="맑은 고딕"/>
+                <a:ea typeface="맑은 고딕"/>
+              </a:rPr>
+              <a:t> 자연어와 잘 맞지 않는다</a:t>
+            </a:r>
+            <a:r>
+              <a:rPr sz="1000" b="0">
+                <a:solidFill>
+                  <a:srgbClr val="000000"/>
+                </a:solidFill>
+                <a:latin typeface="맑은 고딕"/>
+                <a:ea typeface="맑은 고딕"/>
+              </a:rPr>
+              <a:t>, </a:t>
+            </a:r>
+            <a:r>
+              <a:rPr sz="1000" b="0">
+                <a:solidFill>
+                  <a:srgbClr val="000000"/>
+                </a:solidFill>
+                <a:latin typeface="맑은 고딕"/>
+                <a:ea typeface="맑은 고딕"/>
+              </a:rPr>
+              <a:t>"Although LLMs can generate syntactically correct UML code, they are struggling with semantic quality and tend to align poorly with natural languages, especially when the diagram scale is large."</a:t>
+            </a:r>
+            <a:r>
+              <a:rPr sz="1000" b="0">
+                <a:solidFill>
+                  <a:srgbClr val="000000"/>
+                </a:solidFill>
+                <a:latin typeface="맑은 고딕"/>
+                <a:ea typeface="맑은 고딕"/>
+              </a:rPr>
+              <a:t>, </a:t>
+            </a:r>
+            <a:r>
+              <a:rPr sz="1000" b="0">
+                <a:solidFill>
+                  <a:srgbClr val="000000"/>
+                </a:solidFill>
+                <a:latin typeface="맑은 고딕"/>
+                <a:ea typeface="맑은 고딕"/>
+              </a:rPr>
+              <a:t>[Gao 외 2025]</a:t>
+            </a:r>
+          </a:p>
+          <a:p>
+            <a:pPr lvl="2" marL="723900" indent="-368300">
+              <a:spcBef>
+                <a:spcPts val="600"/>
+              </a:spcBef>
+              <a:spcAft>
+                <a:spcPts val="600"/>
+              </a:spcAft>
+              <a:buSzPct val="90000"/>
+              <a:buFont typeface="Wingdings" pitchFamily="2" charset="2"/>
+              <a:buChar char=""/>
+            </a:pPr>
+            <a:r>
               <a:rPr sz="1800" b="1">
                 <a:solidFill>
                   <a:srgbClr val="000000"/>
@@ -29048,7 +28982,17 @@
                 <a:latin typeface="맑은 고딕"/>
                 <a:ea typeface="맑은 고딕"/>
               </a:rPr>
-              <a:t>“주문한다” 정적 업무 모델</a:t>
+              <a:t>“주문한다” 정적 업무 모델 </a:t>
+            </a:r>
+            <a:r>
+              <a:rPr sz="2000" b="1">
+                <a:solidFill>
+                  <a:srgbClr val="000000"/>
+                </a:solidFill>
+                <a:latin typeface="맑은 고딕"/>
+                <a:ea typeface="맑은 고딕"/>
+              </a:rPr>
+              <a:t>(1/4)</a:t>
             </a:r>
           </a:p>
           <a:p>
@@ -29196,8 +29140,8 @@
         </p:nvSpPr>
         <p:spPr>
           <a:xfrm>
-            <a:off x="233172" y="1580444"/>
-            <a:ext cx="4338828" cy="4732021"/>
+            <a:off x="365760" y="960120"/>
+            <a:ext cx="8412480" cy="4086428"/>
           </a:xfrm>
         </p:spPr>
         <p:txBody>
@@ -29205,6 +29149,27 @@
             <a:normAutofit/>
           </a:bodyPr>
           <a:lstStyle/>
+          <a:p>
+            <a:pPr marL="182880" indent="0">
+              <a:spcBef>
+                <a:spcPts val="300"/>
+              </a:spcBef>
+              <a:spcAft>
+                <a:spcPts val="300"/>
+              </a:spcAft>
+              <a:buNone/>
+            </a:pPr>
+            <a:r>
+              <a:rPr sz="1000" b="0">
+                <a:solidFill>
+                  <a:srgbClr val="000000"/>
+                </a:solidFill>
+                <a:latin typeface="맑은 고딕"/>
+                <a:ea typeface="맑은 고딕"/>
+              </a:rPr>
+              <a:t>이 정적 모델은 주문·주문 항목·상품의 관계와, 주문 생성 시점의 판매가를 단가로 확정하여 각 항목의 확정 단가에 수량을 곱한 금액의 합계로 주문 금액을 유지하는 조건을 명시한다.</a:t>
+            </a:r>
+          </a:p>
           <a:p>
             <a:pPr marL="322580" indent="-139700">
               <a:spcBef>
@@ -29741,85 +29706,6 @@
               <a:t>: 주문 식별 값</a:t>
             </a:r>
           </a:p>
-        </p:txBody>
-      </p:sp>
-      <p:sp>
-        <p:nvSpPr>
-          <p:cNvPr id="9" name="내용 개체 틀 7">
-            <a:extLst>
-              <a:ext uri="{FF2B5EF4-FFF2-40B4-BE49-F238E27FC236}">
-                <a16:creationId xmlns:a16="http://schemas.microsoft.com/office/drawing/2014/main" id="{BEBA2C4A-B0BF-F2E4-EA6E-614C99CBA184}"/>
-              </a:ext>
-            </a:extLst>
-          </p:cNvPr>
-          <p:cNvSpPr>
-            <a:spLocks noGrp="1"/>
-          </p:cNvSpPr>
-          <p:nvPr>
-            <p:ph idx="1"/>
-          </p:nvPr>
-        </p:nvSpPr>
-        <p:spPr>
-          <a:xfrm>
-            <a:off x="233172" y="960120"/>
-            <a:ext cx="8778240" cy="620324"/>
-          </a:xfrm>
-        </p:spPr>
-        <p:txBody>
-          <a:bodyPr>
-            <a:normAutofit/>
-          </a:bodyPr>
-          <a:lstStyle/>
-          <a:p>
-            <a:pPr marL="182880" indent="0">
-              <a:spcBef>
-                <a:spcPts val="300"/>
-              </a:spcBef>
-              <a:spcAft>
-                <a:spcPts val="300"/>
-              </a:spcAft>
-              <a:buNone/>
-            </a:pPr>
-            <a:r>
-              <a:rPr sz="1000" b="0">
-                <a:solidFill>
-                  <a:srgbClr val="000000"/>
-                </a:solidFill>
-                <a:latin typeface="맑은 고딕"/>
-                <a:ea typeface="맑은 고딕"/>
-              </a:rPr>
-              <a:t>이 정적 모델은 주문·주문 항목·상품의 관계와, 주문 생성 시점의 판매가를 단가로 확정하여 각 항목의 확정 단가에 수량을 곱한 금액의 합계로 주문 금액을 유지하는 조건을 명시한다.</a:t>
-            </a:r>
-          </a:p>
-        </p:txBody>
-      </p:sp>
-      <p:sp>
-        <p:nvSpPr>
-          <p:cNvPr id="10" name="내용 개체 틀 7">
-            <a:extLst>
-              <a:ext uri="{FF2B5EF4-FFF2-40B4-BE49-F238E27FC236}">
-                <a16:creationId xmlns:a16="http://schemas.microsoft.com/office/drawing/2014/main" id="{BEBA2C4A-B0BF-F2E4-EA6E-614C99CBA184}"/>
-              </a:ext>
-            </a:extLst>
-          </p:cNvPr>
-          <p:cNvSpPr>
-            <a:spLocks noGrp="1"/>
-          </p:cNvSpPr>
-          <p:nvPr>
-            <p:ph idx="1"/>
-          </p:nvPr>
-        </p:nvSpPr>
-        <p:spPr>
-          <a:xfrm>
-            <a:off x="4572000" y="1580444"/>
-            <a:ext cx="4439412" cy="4732021"/>
-          </a:xfrm>
-        </p:spPr>
-        <p:txBody>
-          <a:bodyPr>
-            <a:normAutofit/>
-          </a:bodyPr>
-          <a:lstStyle/>
           <a:p>
             <a:pPr lvl="2" marL="411480" indent="-137160">
               <a:spcBef>
@@ -29993,7 +29879,17 @@
                 <a:latin typeface="맑은 고딕"/>
                 <a:ea typeface="맑은 고딕"/>
               </a:rPr>
-              <a:t>2. 클래스 도식과 관계</a:t>
+              <a:t>“주문한다” 정적 업무 모델 </a:t>
+            </a:r>
+            <a:r>
+              <a:rPr sz="2000" b="1">
+                <a:solidFill>
+                  <a:srgbClr val="000000"/>
+                </a:solidFill>
+                <a:latin typeface="맑은 고딕"/>
+                <a:ea typeface="맑은 고딕"/>
+              </a:rPr>
+              <a:t>(2/4)</a:t>
             </a:r>
           </a:p>
           <a:p>
@@ -30145,38 +30041,8 @@
             <a:normAutofit/>
           </a:bodyPr>
           <a:lstStyle/>
-          <a:p/>
-        </p:txBody>
-      </p:sp>
-      <p:sp>
-        <p:nvSpPr>
-          <p:cNvPr id="9" name="내용 개체 틀 7">
-            <a:extLst>
-              <a:ext uri="{FF2B5EF4-FFF2-40B4-BE49-F238E27FC236}">
-                <a16:creationId xmlns:a16="http://schemas.microsoft.com/office/drawing/2014/main" id="{BEBA2C4A-B0BF-F2E4-EA6E-614C99CBA184}"/>
-              </a:ext>
-            </a:extLst>
-          </p:cNvPr>
-          <p:cNvSpPr>
-            <a:spLocks noGrp="1"/>
-          </p:cNvSpPr>
-          <p:nvPr>
-            <p:ph idx="1"/>
-          </p:nvPr>
-        </p:nvSpPr>
-        <p:spPr>
-          <a:xfrm>
-            <a:off x="365760" y="960120"/>
-            <a:ext cx="8412480" cy="261056"/>
-          </a:xfrm>
-        </p:spPr>
-        <p:txBody>
-          <a:bodyPr>
-            <a:normAutofit/>
-          </a:bodyPr>
-          <a:lstStyle/>
-          <a:p>
-            <a:pPr marL="182880" indent="0">
+          <a:p>
+            <a:pPr marL="322580" indent="-139700">
               <a:spcBef>
                 <a:spcPts val="300"/>
               </a:spcBef>
@@ -30186,6 +30052,29 @@
               <a:buNone/>
             </a:pPr>
             <a:r>
+              <a:rPr sz="1000" b="1">
+                <a:solidFill>
+                  <a:srgbClr val="000000"/>
+                </a:solidFill>
+                <a:latin typeface="맑은 고딕"/>
+                <a:ea typeface="맑은 고딕"/>
+              </a:rPr>
+              <a:t>2. 클래스 도식과 관계</a:t>
+            </a:r>
+          </a:p>
+          <a:p>
+            <a:pPr lvl="2" marL="411480" indent="-137160">
+              <a:spcBef>
+                <a:spcPts val="300"/>
+              </a:spcBef>
+              <a:spcAft>
+                <a:spcPts val="300"/>
+              </a:spcAft>
+              <a:buSzPct val="90000"/>
+              <a:buFont typeface="Wingdings" pitchFamily="2" charset="2"/>
+              <a:buChar char=""/>
+            </a:pPr>
+            <a:r>
               <a:rPr sz="1000" b="0">
                 <a:solidFill>
                   <a:srgbClr val="000000"/>
@@ -30196,35 +30085,6 @@
               <a:t>관계선은 업무상 관계와 개수만 나타내며 연관 방향이나 저장 방식을 정하지 않는다.</a:t>
             </a:r>
           </a:p>
-        </p:txBody>
-      </p:sp>
-      <p:sp>
-        <p:nvSpPr>
-          <p:cNvPr id="10" name="내용 개체 틀 7">
-            <a:extLst>
-              <a:ext uri="{FF2B5EF4-FFF2-40B4-BE49-F238E27FC236}">
-                <a16:creationId xmlns:a16="http://schemas.microsoft.com/office/drawing/2014/main" id="{BEBA2C4A-B0BF-F2E4-EA6E-614C99CBA184}"/>
-              </a:ext>
-            </a:extLst>
-          </p:cNvPr>
-          <p:cNvSpPr>
-            <a:spLocks noGrp="1"/>
-          </p:cNvSpPr>
-          <p:nvPr>
-            <p:ph idx="1"/>
-          </p:nvPr>
-        </p:nvSpPr>
-        <p:spPr>
-          <a:xfrm>
-            <a:off x="365760" y="3331646"/>
-            <a:ext cx="8412480" cy="1044222"/>
-          </a:xfrm>
-        </p:spPr>
-        <p:txBody>
-          <a:bodyPr>
-            <a:normAutofit/>
-          </a:bodyPr>
-          <a:lstStyle/>
           <a:p>
             <a:pPr lvl="2" marL="551180" indent="-139700">
               <a:spcBef>
@@ -30469,11 +30329,244 @@
               <a:t>과 관계를 맺을 수 있다.</a:t>
             </a:r>
           </a:p>
+          <a:p>
+            <a:pPr marL="322580" indent="-139700">
+              <a:spcBef>
+                <a:spcPts val="300"/>
+              </a:spcBef>
+              <a:spcAft>
+                <a:spcPts val="300"/>
+              </a:spcAft>
+              <a:buNone/>
+            </a:pPr>
+            <a:r>
+              <a:rPr sz="1000" b="1">
+                <a:solidFill>
+                  <a:srgbClr val="000000"/>
+                </a:solidFill>
+                <a:latin typeface="맑은 고딕"/>
+                <a:ea typeface="맑은 고딕"/>
+              </a:rPr>
+              <a:t>3. 조건과 대표 예</a:t>
+            </a:r>
+          </a:p>
+          <a:p>
+            <a:pPr lvl="2" marL="411480" indent="-137160">
+              <a:spcBef>
+                <a:spcPts val="300"/>
+              </a:spcBef>
+              <a:spcAft>
+                <a:spcPts val="300"/>
+              </a:spcAft>
+              <a:buSzPct val="90000"/>
+              <a:buFont typeface="Wingdings" pitchFamily="2" charset="2"/>
+              <a:buChar char=""/>
+            </a:pPr>
+            <a:r>
+              <a:rPr sz="1000" b="0">
+                <a:solidFill>
+                  <a:srgbClr val="000000"/>
+                </a:solidFill>
+                <a:latin typeface="맑은 고딕"/>
+                <a:ea typeface="맑은 고딕"/>
+              </a:rPr>
+              <a:t>salePrice</a:t>
+            </a:r>
+            <a:r>
+              <a:rPr sz="1000" b="0">
+                <a:solidFill>
+                  <a:srgbClr val="000000"/>
+                </a:solidFill>
+                <a:latin typeface="맑은 고딕"/>
+                <a:ea typeface="맑은 고딕"/>
+              </a:rPr>
+              <a:t>, </a:t>
+            </a:r>
+            <a:r>
+              <a:rPr sz="1000" b="0">
+                <a:solidFill>
+                  <a:srgbClr val="000000"/>
+                </a:solidFill>
+                <a:latin typeface="맑은 고딕"/>
+                <a:ea typeface="맑은 고딕"/>
+              </a:rPr>
+              <a:t>unitPrice</a:t>
+            </a:r>
+            <a:r>
+              <a:rPr sz="1000" b="0">
+                <a:solidFill>
+                  <a:srgbClr val="000000"/>
+                </a:solidFill>
+                <a:latin typeface="맑은 고딕"/>
+                <a:ea typeface="맑은 고딕"/>
+              </a:rPr>
+              <a:t>, </a:t>
+            </a:r>
+            <a:r>
+              <a:rPr sz="1000" b="0">
+                <a:solidFill>
+                  <a:srgbClr val="000000"/>
+                </a:solidFill>
+                <a:latin typeface="맑은 고딕"/>
+                <a:ea typeface="맑은 고딕"/>
+              </a:rPr>
+              <a:t>totalAmount</a:t>
+            </a:r>
+            <a:r>
+              <a:rPr sz="1000" b="0">
+                <a:solidFill>
+                  <a:srgbClr val="000000"/>
+                </a:solidFill>
+                <a:latin typeface="맑은 고딕"/>
+                <a:ea typeface="맑은 고딕"/>
+              </a:rPr>
+              <a:t>는 원 단위의 0 이상 정수다.</a:t>
+            </a:r>
+          </a:p>
+          <a:p>
+            <a:pPr lvl="2" marL="411480" indent="-137160">
+              <a:spcBef>
+                <a:spcPts val="300"/>
+              </a:spcBef>
+              <a:spcAft>
+                <a:spcPts val="300"/>
+              </a:spcAft>
+              <a:buSzPct val="90000"/>
+              <a:buFont typeface="Wingdings" pitchFamily="2" charset="2"/>
+              <a:buChar char=""/>
+            </a:pPr>
+            <a:r>
+              <a:rPr sz="1000" b="0">
+                <a:solidFill>
+                  <a:srgbClr val="000000"/>
+                </a:solidFill>
+                <a:latin typeface="맑은 고딕"/>
+                <a:ea typeface="맑은 고딕"/>
+              </a:rPr>
+              <a:t>quantity</a:t>
+            </a:r>
+            <a:r>
+              <a:rPr sz="1000" b="0">
+                <a:solidFill>
+                  <a:srgbClr val="000000"/>
+                </a:solidFill>
+                <a:latin typeface="맑은 고딕"/>
+                <a:ea typeface="맑은 고딕"/>
+              </a:rPr>
+              <a:t>는 1 이상의 정수다.</a:t>
+            </a:r>
+          </a:p>
+          <a:p>
+            <a:pPr lvl="2" marL="411480" indent="-137160">
+              <a:spcBef>
+                <a:spcPts val="300"/>
+              </a:spcBef>
+              <a:spcAft>
+                <a:spcPts val="300"/>
+              </a:spcAft>
+              <a:buSzPct val="90000"/>
+              <a:buFont typeface="Wingdings" pitchFamily="2" charset="2"/>
+              <a:buChar char=""/>
+            </a:pPr>
+            <a:r>
+              <a:rPr sz="1000" b="0">
+                <a:solidFill>
+                  <a:srgbClr val="000000"/>
+                </a:solidFill>
+                <a:latin typeface="맑은 고딕"/>
+                <a:ea typeface="맑은 고딕"/>
+              </a:rPr>
+              <a:t>하나의 </a:t>
+            </a:r>
+            <a:r>
+              <a:rPr sz="1000" b="0">
+                <a:solidFill>
+                  <a:srgbClr val="000000"/>
+                </a:solidFill>
+                <a:latin typeface="맑은 고딕"/>
+                <a:ea typeface="맑은 고딕"/>
+              </a:rPr>
+              <a:t>Order</a:t>
+            </a:r>
+            <a:r>
+              <a:rPr sz="1000" b="0">
+                <a:solidFill>
+                  <a:srgbClr val="000000"/>
+                </a:solidFill>
+                <a:latin typeface="맑은 고딕"/>
+                <a:ea typeface="맑은 고딕"/>
+              </a:rPr>
+              <a:t>에는 </a:t>
+            </a:r>
+            <a:r>
+              <a:rPr sz="1000" b="0">
+                <a:solidFill>
+                  <a:srgbClr val="000000"/>
+                </a:solidFill>
+                <a:latin typeface="맑은 고딕"/>
+                <a:ea typeface="맑은 고딕"/>
+              </a:rPr>
+              <a:t>OrderItem</a:t>
+            </a:r>
+            <a:r>
+              <a:rPr sz="1000" b="0">
+                <a:solidFill>
+                  <a:srgbClr val="000000"/>
+                </a:solidFill>
+                <a:latin typeface="맑은 고딕"/>
+                <a:ea typeface="맑은 고딕"/>
+              </a:rPr>
+              <a:t>이 1개 이상 있고 </a:t>
+            </a:r>
+            <a:r>
+              <a:rPr sz="1000" b="0">
+                <a:solidFill>
+                  <a:srgbClr val="000000"/>
+                </a:solidFill>
+                <a:latin typeface="맑은 고딕"/>
+                <a:ea typeface="맑은 고딕"/>
+              </a:rPr>
+              <a:t>shippingAddress</a:t>
+            </a:r>
+            <a:r>
+              <a:rPr sz="1000" b="0">
+                <a:solidFill>
+                  <a:srgbClr val="000000"/>
+                </a:solidFill>
+                <a:latin typeface="맑은 고딕"/>
+                <a:ea typeface="맑은 고딕"/>
+              </a:rPr>
+              <a:t>가 존재한다.</a:t>
+            </a:r>
+          </a:p>
+          <a:p>
+            <a:pPr lvl="2" marL="411480" indent="-137160">
+              <a:spcBef>
+                <a:spcPts val="300"/>
+              </a:spcBef>
+              <a:spcAft>
+                <a:spcPts val="300"/>
+              </a:spcAft>
+              <a:buSzPct val="90000"/>
+              <a:buFont typeface="Wingdings" pitchFamily="2" charset="2"/>
+              <a:buChar char=""/>
+            </a:pPr>
+            <a:r>
+              <a:rPr sz="1000" b="0">
+                <a:solidFill>
+                  <a:srgbClr val="000000"/>
+                </a:solidFill>
+                <a:latin typeface="맑은 고딕"/>
+                <a:ea typeface="맑은 고딕"/>
+              </a:rPr>
+              <a:t>유효한 주문에서는 다음 합계 등식이 항상 성립한다.</a:t>
+            </a:r>
+          </a:p>
         </p:txBody>
       </p:sp>
       <p:pic>
         <p:nvPicPr>
-          <p:cNvPr id="11" name="mermaid Diagram 2"/>
+          <p:cNvPr id="9" name="mermaid Diagram 2"/>
           <p:cNvPicPr>
             <a:picLocks noChangeAspect="1"/>
           </p:cNvPicPr>
@@ -30487,8 +30580,8 @@
         </p:blipFill>
         <p:spPr>
           <a:xfrm>
-            <a:off x="737195" y="1449776"/>
-            <a:ext cx="7669609" cy="1653270"/>
+            <a:off x="1504156" y="3445565"/>
+            <a:ext cx="6135688" cy="1322616"/>
           </a:xfrm>
           <a:prstGeom prst="rect">
             <a:avLst/>
@@ -30560,7 +30653,17 @@
                 <a:latin typeface="맑은 고딕"/>
                 <a:ea typeface="맑은 고딕"/>
               </a:rPr>
-              <a:t>3. 조건과 대표 예</a:t>
+              <a:t>“주문한다” 정적 업무 모델 </a:t>
+            </a:r>
+            <a:r>
+              <a:rPr sz="2000" b="1">
+                <a:solidFill>
+                  <a:srgbClr val="000000"/>
+                </a:solidFill>
+                <a:latin typeface="맑은 고딕"/>
+                <a:ea typeface="맑은 고딕"/>
+              </a:rPr>
+              <a:t>(3/4)</a:t>
             </a:r>
           </a:p>
           <a:p>
@@ -30704,8 +30807,8 @@
         </p:nvSpPr>
         <p:spPr>
           <a:xfrm>
-            <a:off x="365760" y="2001520"/>
-            <a:ext cx="8412480" cy="330200"/>
+            <a:off x="365760" y="960120"/>
+            <a:ext cx="8412480" cy="495300"/>
           </a:xfrm>
           <a:prstGeom prst="rect">
             <a:avLst/>
@@ -30769,29 +30872,29 @@
       </p:sp>
       <p:sp>
         <p:nvSpPr>
-          <p:cNvPr id="32" name="내용 개체 틀 7">
+          <p:cNvPr id="32" name="TextBox 12">
             <a:extLst>
               <a:ext uri="{FF2B5EF4-FFF2-40B4-BE49-F238E27FC236}">
-                <a16:creationId xmlns:a16="http://schemas.microsoft.com/office/drawing/2014/main" id="{BEBA2C4A-B0BF-F2E4-EA6E-614C99CBA184}"/>
+                <a16:creationId xmlns:a16="http://schemas.microsoft.com/office/drawing/2014/main" id="{654EDDB4-901F-3D48-A715-17D163E8A7AC}"/>
               </a:ext>
             </a:extLst>
           </p:cNvPr>
-          <p:cNvSpPr>
-            <a:spLocks noGrp="1"/>
-          </p:cNvSpPr>
-          <p:nvPr>
-            <p:ph idx="1"/>
-          </p:nvPr>
+          <p:cNvSpPr txBox="1"/>
+          <p:nvPr/>
         </p:nvSpPr>
         <p:spPr>
           <a:xfrm>
-            <a:off x="365760" y="960120"/>
-            <a:ext cx="8412480" cy="939800"/>
+            <a:off x="365760" y="1684020"/>
+            <a:ext cx="8412480" cy="1044222"/>
           </a:xfrm>
+          <a:prstGeom prst="rect">
+            <a:avLst/>
+          </a:prstGeom>
+          <a:noFill/>
         </p:spPr>
         <p:txBody>
-          <a:bodyPr tIns="0" bIns="0">
-            <a:normAutofit/>
+          <a:bodyPr wrap="square">
+            <a:spAutoFit/>
           </a:bodyPr>
           <a:lstStyle/>
           <a:p>
@@ -30814,7 +30917,7 @@
                 <a:latin typeface="맑은 고딕"/>
                 <a:ea typeface="맑은 고딕"/>
               </a:rPr>
-              <a:t>salePrice</a:t>
+              <a:t>unitPrice</a:t>
             </a:r>
             <a:r>
               <a:rPr sz="1000" b="0">
@@ -30824,7 +30927,7 @@
                 <a:latin typeface="맑은 고딕"/>
                 <a:ea typeface="맑은 고딕"/>
               </a:rPr>
-              <a:t>, </a:t>
+              <a:t>는 장바구니에 담은 시점이 아니라 </a:t>
             </a:r>
             <a:r>
               <a:rPr sz="1000" b="0">
@@ -30834,7 +30937,7 @@
                 <a:latin typeface="맑은 고딕"/>
                 <a:ea typeface="맑은 고딕"/>
               </a:rPr>
-              <a:t>unitPrice</a:t>
+              <a:t>Order</a:t>
             </a:r>
             <a:r>
               <a:rPr sz="1000" b="0">
@@ -30844,7 +30947,7 @@
                 <a:latin typeface="맑은 고딕"/>
                 <a:ea typeface="맑은 고딕"/>
               </a:rPr>
-              <a:t>, </a:t>
+              <a:t> 생성 시점의 해당 </a:t>
             </a:r>
             <a:r>
               <a:rPr sz="1000" b="0">
@@ -30854,7 +30957,7 @@
                 <a:latin typeface="맑은 고딕"/>
                 <a:ea typeface="맑은 고딕"/>
               </a:rPr>
-              <a:t>totalAmount</a:t>
+              <a:t>Product.salePrice</a:t>
             </a:r>
             <a:r>
               <a:rPr sz="1000" b="0">
@@ -30864,7 +30967,7 @@
                 <a:latin typeface="맑은 고딕"/>
                 <a:ea typeface="맑은 고딕"/>
               </a:rPr>
-              <a:t>는 원 단위의 0 이상 정수다.</a:t>
+              <a:t>로 확정된다.</a:t>
             </a:r>
           </a:p>
           <a:p>
@@ -30887,7 +30990,7 @@
                 <a:latin typeface="맑은 고딕"/>
                 <a:ea typeface="맑은 고딕"/>
               </a:rPr>
-              <a:t>quantity</a:t>
+              <a:t>생성 이후 현재 </a:t>
             </a:r>
             <a:r>
               <a:rPr sz="1000" b="0">
@@ -30897,7 +31000,57 @@
                 <a:latin typeface="맑은 고딕"/>
                 <a:ea typeface="맑은 고딕"/>
               </a:rPr>
-              <a:t>는 1 이상의 정수다.</a:t>
+              <a:t>salePrice</a:t>
+            </a:r>
+            <a:r>
+              <a:rPr sz="1000" b="0">
+                <a:solidFill>
+                  <a:srgbClr val="000000"/>
+                </a:solidFill>
+                <a:latin typeface="맑은 고딕"/>
+                <a:ea typeface="맑은 고딕"/>
+              </a:rPr>
+              <a:t>가 변경되어도 기존 </a:t>
+            </a:r>
+            <a:r>
+              <a:rPr sz="1000" b="0">
+                <a:solidFill>
+                  <a:srgbClr val="000000"/>
+                </a:solidFill>
+                <a:latin typeface="맑은 고딕"/>
+                <a:ea typeface="맑은 고딕"/>
+              </a:rPr>
+              <a:t>unitPrice</a:t>
+            </a:r>
+            <a:r>
+              <a:rPr sz="1000" b="0">
+                <a:solidFill>
+                  <a:srgbClr val="000000"/>
+                </a:solidFill>
+                <a:latin typeface="맑은 고딕"/>
+                <a:ea typeface="맑은 고딕"/>
+              </a:rPr>
+              <a:t>와 </a:t>
+            </a:r>
+            <a:r>
+              <a:rPr sz="1000" b="0">
+                <a:solidFill>
+                  <a:srgbClr val="000000"/>
+                </a:solidFill>
+                <a:latin typeface="맑은 고딕"/>
+                <a:ea typeface="맑은 고딕"/>
+              </a:rPr>
+              <a:t>totalAmount</a:t>
+            </a:r>
+            <a:r>
+              <a:rPr sz="1000" b="0">
+                <a:solidFill>
+                  <a:srgbClr val="000000"/>
+                </a:solidFill>
+                <a:latin typeface="맑은 고딕"/>
+                <a:ea typeface="맑은 고딕"/>
+              </a:rPr>
+              <a:t>는 변하지 않는다.</a:t>
             </a:r>
           </a:p>
           <a:p>
@@ -30920,297 +31073,6 @@
                 <a:latin typeface="맑은 고딕"/>
                 <a:ea typeface="맑은 고딕"/>
               </a:rPr>
-              <a:t>하나의 </a:t>
-            </a:r>
-            <a:r>
-              <a:rPr sz="1000" b="0">
-                <a:solidFill>
-                  <a:srgbClr val="000000"/>
-                </a:solidFill>
-                <a:latin typeface="맑은 고딕"/>
-                <a:ea typeface="맑은 고딕"/>
-              </a:rPr>
-              <a:t>Order</a:t>
-            </a:r>
-            <a:r>
-              <a:rPr sz="1000" b="0">
-                <a:solidFill>
-                  <a:srgbClr val="000000"/>
-                </a:solidFill>
-                <a:latin typeface="맑은 고딕"/>
-                <a:ea typeface="맑은 고딕"/>
-              </a:rPr>
-              <a:t>에는 </a:t>
-            </a:r>
-            <a:r>
-              <a:rPr sz="1000" b="0">
-                <a:solidFill>
-                  <a:srgbClr val="000000"/>
-                </a:solidFill>
-                <a:latin typeface="맑은 고딕"/>
-                <a:ea typeface="맑은 고딕"/>
-              </a:rPr>
-              <a:t>OrderItem</a:t>
-            </a:r>
-            <a:r>
-              <a:rPr sz="1000" b="0">
-                <a:solidFill>
-                  <a:srgbClr val="000000"/>
-                </a:solidFill>
-                <a:latin typeface="맑은 고딕"/>
-                <a:ea typeface="맑은 고딕"/>
-              </a:rPr>
-              <a:t>이 1개 이상 있고 </a:t>
-            </a:r>
-            <a:r>
-              <a:rPr sz="1000" b="0">
-                <a:solidFill>
-                  <a:srgbClr val="000000"/>
-                </a:solidFill>
-                <a:latin typeface="맑은 고딕"/>
-                <a:ea typeface="맑은 고딕"/>
-              </a:rPr>
-              <a:t>shippingAddress</a:t>
-            </a:r>
-            <a:r>
-              <a:rPr sz="1000" b="0">
-                <a:solidFill>
-                  <a:srgbClr val="000000"/>
-                </a:solidFill>
-                <a:latin typeface="맑은 고딕"/>
-                <a:ea typeface="맑은 고딕"/>
-              </a:rPr>
-              <a:t>가 존재한다.</a:t>
-            </a:r>
-          </a:p>
-          <a:p>
-            <a:pPr lvl="2" marL="411480" indent="-137160">
-              <a:spcBef>
-                <a:spcPts val="300"/>
-              </a:spcBef>
-              <a:spcAft>
-                <a:spcPts val="300"/>
-              </a:spcAft>
-              <a:buSzPct val="90000"/>
-              <a:buFont typeface="Wingdings" pitchFamily="2" charset="2"/>
-              <a:buChar char=""/>
-            </a:pPr>
-            <a:r>
-              <a:rPr sz="1000" b="0">
-                <a:solidFill>
-                  <a:srgbClr val="000000"/>
-                </a:solidFill>
-                <a:latin typeface="맑은 고딕"/>
-                <a:ea typeface="맑은 고딕"/>
-              </a:rPr>
-              <a:t>유효한 주문에서는 다음 합계 등식이 항상 성립한다.</a:t>
-            </a:r>
-          </a:p>
-        </p:txBody>
-      </p:sp>
-      <p:sp>
-        <p:nvSpPr>
-          <p:cNvPr id="33" name="내용 개체 틀 7">
-            <a:extLst>
-              <a:ext uri="{FF2B5EF4-FFF2-40B4-BE49-F238E27FC236}">
-                <a16:creationId xmlns:a16="http://schemas.microsoft.com/office/drawing/2014/main" id="{BEBA2C4A-B0BF-F2E4-EA6E-614C99CBA184}"/>
-              </a:ext>
-            </a:extLst>
-          </p:cNvPr>
-          <p:cNvSpPr>
-            <a:spLocks noGrp="1"/>
-          </p:cNvSpPr>
-          <p:nvPr>
-            <p:ph idx="1"/>
-          </p:nvPr>
-        </p:nvSpPr>
-        <p:spPr>
-          <a:xfrm>
-            <a:off x="365760" y="2433320"/>
-            <a:ext cx="8412480" cy="939800"/>
-          </a:xfrm>
-        </p:spPr>
-        <p:txBody>
-          <a:bodyPr tIns="0" bIns="0">
-            <a:normAutofit/>
-          </a:bodyPr>
-          <a:lstStyle/>
-          <a:p>
-            <a:pPr lvl="2" marL="411480" indent="-137160">
-              <a:spcBef>
-                <a:spcPts val="300"/>
-              </a:spcBef>
-              <a:spcAft>
-                <a:spcPts val="300"/>
-              </a:spcAft>
-              <a:buSzPct val="90000"/>
-              <a:buFont typeface="Wingdings" pitchFamily="2" charset="2"/>
-              <a:buChar char=""/>
-            </a:pPr>
-            <a:r>
-              <a:rPr sz="1000" b="0">
-                <a:solidFill>
-                  <a:srgbClr val="000000"/>
-                </a:solidFill>
-                <a:latin typeface="맑은 고딕"/>
-                <a:ea typeface="맑은 고딕"/>
-              </a:rPr>
-              <a:t>unitPrice</a:t>
-            </a:r>
-            <a:r>
-              <a:rPr sz="1000" b="0">
-                <a:solidFill>
-                  <a:srgbClr val="000000"/>
-                </a:solidFill>
-                <a:latin typeface="맑은 고딕"/>
-                <a:ea typeface="맑은 고딕"/>
-              </a:rPr>
-              <a:t>는 장바구니에 담은 시점이 아니라 </a:t>
-            </a:r>
-            <a:r>
-              <a:rPr sz="1000" b="0">
-                <a:solidFill>
-                  <a:srgbClr val="000000"/>
-                </a:solidFill>
-                <a:latin typeface="맑은 고딕"/>
-                <a:ea typeface="맑은 고딕"/>
-              </a:rPr>
-              <a:t>Order</a:t>
-            </a:r>
-            <a:r>
-              <a:rPr sz="1000" b="0">
-                <a:solidFill>
-                  <a:srgbClr val="000000"/>
-                </a:solidFill>
-                <a:latin typeface="맑은 고딕"/>
-                <a:ea typeface="맑은 고딕"/>
-              </a:rPr>
-              <a:t> 생성 시점의 해당 </a:t>
-            </a:r>
-            <a:r>
-              <a:rPr sz="1000" b="0">
-                <a:solidFill>
-                  <a:srgbClr val="000000"/>
-                </a:solidFill>
-                <a:latin typeface="맑은 고딕"/>
-                <a:ea typeface="맑은 고딕"/>
-              </a:rPr>
-              <a:t>Product.salePrice</a:t>
-            </a:r>
-            <a:r>
-              <a:rPr sz="1000" b="0">
-                <a:solidFill>
-                  <a:srgbClr val="000000"/>
-                </a:solidFill>
-                <a:latin typeface="맑은 고딕"/>
-                <a:ea typeface="맑은 고딕"/>
-              </a:rPr>
-              <a:t>로 확정된다.</a:t>
-            </a:r>
-          </a:p>
-          <a:p>
-            <a:pPr lvl="2" marL="411480" indent="-137160">
-              <a:spcBef>
-                <a:spcPts val="300"/>
-              </a:spcBef>
-              <a:spcAft>
-                <a:spcPts val="300"/>
-              </a:spcAft>
-              <a:buSzPct val="90000"/>
-              <a:buFont typeface="Wingdings" pitchFamily="2" charset="2"/>
-              <a:buChar char=""/>
-            </a:pPr>
-            <a:r>
-              <a:rPr sz="1000" b="0">
-                <a:solidFill>
-                  <a:srgbClr val="000000"/>
-                </a:solidFill>
-                <a:latin typeface="맑은 고딕"/>
-                <a:ea typeface="맑은 고딕"/>
-              </a:rPr>
-              <a:t>생성 이후 현재 </a:t>
-            </a:r>
-            <a:r>
-              <a:rPr sz="1000" b="0">
-                <a:solidFill>
-                  <a:srgbClr val="000000"/>
-                </a:solidFill>
-                <a:latin typeface="맑은 고딕"/>
-                <a:ea typeface="맑은 고딕"/>
-              </a:rPr>
-              <a:t>salePrice</a:t>
-            </a:r>
-            <a:r>
-              <a:rPr sz="1000" b="0">
-                <a:solidFill>
-                  <a:srgbClr val="000000"/>
-                </a:solidFill>
-                <a:latin typeface="맑은 고딕"/>
-                <a:ea typeface="맑은 고딕"/>
-              </a:rPr>
-              <a:t>가 변경되어도 기존 </a:t>
-            </a:r>
-            <a:r>
-              <a:rPr sz="1000" b="0">
-                <a:solidFill>
-                  <a:srgbClr val="000000"/>
-                </a:solidFill>
-                <a:latin typeface="맑은 고딕"/>
-                <a:ea typeface="맑은 고딕"/>
-              </a:rPr>
-              <a:t>unitPrice</a:t>
-            </a:r>
-            <a:r>
-              <a:rPr sz="1000" b="0">
-                <a:solidFill>
-                  <a:srgbClr val="000000"/>
-                </a:solidFill>
-                <a:latin typeface="맑은 고딕"/>
-                <a:ea typeface="맑은 고딕"/>
-              </a:rPr>
-              <a:t>와 </a:t>
-            </a:r>
-            <a:r>
-              <a:rPr sz="1000" b="0">
-                <a:solidFill>
-                  <a:srgbClr val="000000"/>
-                </a:solidFill>
-                <a:latin typeface="맑은 고딕"/>
-                <a:ea typeface="맑은 고딕"/>
-              </a:rPr>
-              <a:t>totalAmount</a:t>
-            </a:r>
-            <a:r>
-              <a:rPr sz="1000" b="0">
-                <a:solidFill>
-                  <a:srgbClr val="000000"/>
-                </a:solidFill>
-                <a:latin typeface="맑은 고딕"/>
-                <a:ea typeface="맑은 고딕"/>
-              </a:rPr>
-              <a:t>는 변하지 않는다.</a:t>
-            </a:r>
-          </a:p>
-          <a:p>
-            <a:pPr lvl="2" marL="411480" indent="-137160">
-              <a:spcBef>
-                <a:spcPts val="300"/>
-              </a:spcBef>
-              <a:spcAft>
-                <a:spcPts val="300"/>
-              </a:spcAft>
-              <a:buSzPct val="90000"/>
-              <a:buFont typeface="Wingdings" pitchFamily="2" charset="2"/>
-              <a:buChar char=""/>
-            </a:pPr>
-            <a:r>
-              <a:rPr sz="1000" b="0">
-                <a:solidFill>
-                  <a:srgbClr val="000000"/>
-                </a:solidFill>
-                <a:latin typeface="맑은 고딕"/>
-                <a:ea typeface="맑은 고딕"/>
-              </a:rPr>
               <a:t>PENDING_PAYMENT</a:t>
             </a:r>
             <a:r>
@@ -31309,7 +31171,7 @@
       </p:sp>
       <p:graphicFrame>
         <p:nvGraphicFramePr>
-          <p:cNvPr id="34" name="표 10">
+          <p:cNvPr id="33" name="표 10">
             <a:extLst>
               <a:ext uri="{FF2B5EF4-FFF2-40B4-BE49-F238E27FC236}">
                 <a16:creationId xmlns:a16="http://schemas.microsoft.com/office/drawing/2014/main" id="{93753AB9-526C-CE2D-446D-7615D9B6D6D2}"/>
@@ -31328,7 +31190,7 @@
           </p:nvPr>
         </p:nvGraphicFramePr>
         <p:xfrm>
-          <a:off x="2222056" y="3474720"/>
+          <a:off x="2222056" y="2956842"/>
           <a:ext cx="4686300" cy="3873500"/>
         </p:xfrm>
         <a:graphic>
@@ -32724,96 +32586,6 @@
           </a:graphicData>
         </a:graphic>
       </p:graphicFrame>
-      <p:sp>
-        <p:nvSpPr>
-          <p:cNvPr id="35" name="내용 개체 틀 7">
-            <a:extLst>
-              <a:ext uri="{FF2B5EF4-FFF2-40B4-BE49-F238E27FC236}">
-                <a16:creationId xmlns:a16="http://schemas.microsoft.com/office/drawing/2014/main" id="{BEBA2C4A-B0BF-F2E4-EA6E-614C99CBA184}"/>
-              </a:ext>
-            </a:extLst>
-          </p:cNvPr>
-          <p:cNvSpPr>
-            <a:spLocks noGrp="1"/>
-          </p:cNvSpPr>
-          <p:nvPr>
-            <p:ph idx="1"/>
-          </p:nvPr>
-        </p:nvSpPr>
-        <p:spPr>
-          <a:xfrm>
-            <a:off x="365760" y="5880320"/>
-            <a:ext cx="8412480" cy="393700"/>
-          </a:xfrm>
-        </p:spPr>
-        <p:txBody>
-          <a:bodyPr tIns="0" bIns="0">
-            <a:normAutofit/>
-          </a:bodyPr>
-          <a:lstStyle/>
-          <a:p>
-            <a:pPr marL="182880" indent="0">
-              <a:spcBef>
-                <a:spcPts val="300"/>
-              </a:spcBef>
-              <a:spcAft>
-                <a:spcPts val="300"/>
-              </a:spcAft>
-              <a:buNone/>
-            </a:pPr>
-            <a:r>
-              <a:rPr sz="1000" b="0">
-                <a:solidFill>
-                  <a:srgbClr val="000000"/>
-                </a:solidFill>
-                <a:latin typeface="맑은 고딕"/>
-                <a:ea typeface="맑은 고딕"/>
-              </a:rPr>
-              <a:t>생성 시점에는 </a:t>
-            </a:r>
-            <a:r>
-              <a:rPr sz="1000" b="0">
-                <a:solidFill>
-                  <a:srgbClr val="000000"/>
-                </a:solidFill>
-                <a:latin typeface="맑은 고딕"/>
-                <a:ea typeface="맑은 고딕"/>
-              </a:rPr>
-              <a:t>unitPrice = salePrice = 1,000원</a:t>
-            </a:r>
-            <a:r>
-              <a:rPr sz="1000" b="0">
-                <a:solidFill>
-                  <a:srgbClr val="000000"/>
-                </a:solidFill>
-                <a:latin typeface="맑은 고딕"/>
-                <a:ea typeface="맑은 고딕"/>
-              </a:rPr>
-              <a:t>이고, </a:t>
-            </a:r>
-            <a:r>
-              <a:rPr sz="1000" b="0">
-                <a:solidFill>
-                  <a:srgbClr val="000000"/>
-                </a:solidFill>
-                <a:latin typeface="맑은 고딕"/>
-                <a:ea typeface="맑은 고딕"/>
-              </a:rPr>
-              <a:t>totalAmount = 1,000원 × 2 = 2,000원</a:t>
-            </a:r>
-            <a:r>
-              <a:rPr sz="1000" b="0">
-                <a:solidFill>
-                  <a:srgbClr val="000000"/>
-                </a:solidFill>
-                <a:latin typeface="맑은 고딕"/>
-                <a:ea typeface="맑은 고딕"/>
-              </a:rPr>
-              <a:t>이다. 이후 현재 판매가가 1,200원으로 바뀌어도 기존 주문은 확정 단가 1,000원과 총액 2,000원을 유지한다.</a:t>
-            </a:r>
-          </a:p>
-        </p:txBody>
-      </p:sp>
     </p:spTree>
     <p:extLst>
       <p:ext uri="{BB962C8B-B14F-4D97-AF65-F5344CB8AC3E}">
@@ -32879,7 +32651,17 @@
                 <a:latin typeface="맑은 고딕"/>
                 <a:ea typeface="맑은 고딕"/>
               </a:rPr>
-              <a:t>4. 정하지 않은 항목과 기존 업무 미정</a:t>
+              <a:t>“주문한다” 정적 업무 모델 </a:t>
+            </a:r>
+            <a:r>
+              <a:rPr sz="2000" b="1">
+                <a:solidFill>
+                  <a:srgbClr val="000000"/>
+                </a:solidFill>
+                <a:latin typeface="맑은 고딕"/>
+                <a:ea typeface="맑은 고딕"/>
+              </a:rPr>
+              <a:t>(4/4)</a:t>
             </a:r>
           </a:p>
           <a:p>
@@ -33025,12 +32807,7 @@
             <p:ph idx="1"/>
           </p:nvPr>
         </p:nvSpPr>
-        <p:spPr>
-          <a:xfrm>
-            <a:off x="233172" y="1580444"/>
-            <a:ext cx="4338828" cy="4732021"/>
-          </a:xfrm>
-        </p:spPr>
+        <p:spPr/>
         <p:txBody>
           <a:bodyPr>
             <a:normAutofit/>
@@ -33056,7 +32833,68 @@
                 <a:latin typeface="맑은 고딕"/>
                 <a:ea typeface="맑은 고딕"/>
               </a:rPr>
-              <a:t>정적 모델에서 다음 사항은 정하지 않는다.</a:t>
+              <a:t>생성 시점에는 </a:t>
+            </a:r>
+            <a:r>
+              <a:rPr sz="1000" b="0">
+                <a:solidFill>
+                  <a:srgbClr val="000000"/>
+                </a:solidFill>
+                <a:latin typeface="맑은 고딕"/>
+                <a:ea typeface="맑은 고딕"/>
+              </a:rPr>
+              <a:t>unitPrice = salePrice = 1,000원</a:t>
+            </a:r>
+            <a:r>
+              <a:rPr sz="1000" b="0">
+                <a:solidFill>
+                  <a:srgbClr val="000000"/>
+                </a:solidFill>
+                <a:latin typeface="맑은 고딕"/>
+                <a:ea typeface="맑은 고딕"/>
+              </a:rPr>
+              <a:t>이고, </a:t>
+            </a:r>
+            <a:r>
+              <a:rPr sz="1000" b="0">
+                <a:solidFill>
+                  <a:srgbClr val="000000"/>
+                </a:solidFill>
+                <a:latin typeface="맑은 고딕"/>
+                <a:ea typeface="맑은 고딕"/>
+              </a:rPr>
+              <a:t>totalAmount = 1,000원 × 2 = 2,000원</a:t>
+            </a:r>
+            <a:r>
+              <a:rPr sz="1000" b="0">
+                <a:solidFill>
+                  <a:srgbClr val="000000"/>
+                </a:solidFill>
+                <a:latin typeface="맑은 고딕"/>
+                <a:ea typeface="맑은 고딕"/>
+              </a:rPr>
+              <a:t>이다. 이후 현재 판매가가 1,200원으로 바뀌어도 기존 주문은 확정 단가 1,000원과 총액 2,000원을 유지한다.</a:t>
+            </a:r>
+          </a:p>
+          <a:p>
+            <a:pPr marL="322580" indent="-139700">
+              <a:spcBef>
+                <a:spcPts val="300"/>
+              </a:spcBef>
+              <a:spcAft>
+                <a:spcPts val="300"/>
+              </a:spcAft>
+              <a:buNone/>
+            </a:pPr>
+            <a:r>
+              <a:rPr sz="1000" b="1">
+                <a:solidFill>
+                  <a:srgbClr val="000000"/>
+                </a:solidFill>
+                <a:latin typeface="맑은 고딕"/>
+                <a:ea typeface="맑은 고딕"/>
+              </a:rPr>
+              <a:t>4. 정하지 않은 항목과 기존 업무 미정</a:t>
             </a:r>
           </a:p>
           <a:p>
@@ -33079,37 +32917,7 @@
                 <a:latin typeface="맑은 고딕"/>
                 <a:ea typeface="맑은 고딕"/>
               </a:rPr>
-              <a:t>OrderNumber</a:t>
-            </a:r>
-            <a:r>
-              <a:rPr sz="1000" b="0">
-                <a:solidFill>
-                  <a:srgbClr val="000000"/>
-                </a:solidFill>
-                <a:latin typeface="맑은 고딕"/>
-                <a:ea typeface="맑은 고딕"/>
-              </a:rPr>
-              <a:t>와 </a:t>
-            </a:r>
-            <a:r>
-              <a:rPr sz="1000" b="0">
-                <a:solidFill>
-                  <a:srgbClr val="000000"/>
-                </a:solidFill>
-                <a:latin typeface="맑은 고딕"/>
-                <a:ea typeface="맑은 고딕"/>
-              </a:rPr>
-              <a:t>ProductNumber</a:t>
-            </a:r>
-            <a:r>
-              <a:rPr sz="1000" b="0">
-                <a:solidFill>
-                  <a:srgbClr val="000000"/>
-                </a:solidFill>
-                <a:latin typeface="맑은 고딕"/>
-                <a:ea typeface="맑은 고딕"/>
-              </a:rPr>
-              <a:t>의 형식 및 생성 규칙</a:t>
+              <a:t>본인 주문에 대해서만 조회 또는 변경 요청의 권한을 인정하며 다른 고객의 주문 요청은 거절한다. 주문자와 수령인은 같은 사람으로 본다. 다만 회원·비회원 여부와 주문 주체, 본인 확인, 주문자 및 수령인을 나타낼 구체 타입이나 식별 정보는 정하지 않는다.</a:t>
             </a:r>
           </a:p>
           <a:p>
@@ -33132,17 +32940,7 @@
                 <a:latin typeface="맑은 고딕"/>
                 <a:ea typeface="맑은 고딕"/>
               </a:rPr>
-              <a:t>Address</a:t>
-            </a:r>
-            <a:r>
-              <a:rPr sz="1000" b="0">
-                <a:solidFill>
-                  <a:srgbClr val="000000"/>
-                </a:solidFill>
-                <a:latin typeface="맑은 고딕"/>
-                <a:ea typeface="맑은 고딕"/>
-              </a:rPr>
-              <a:t>의 세부 항목</a:t>
+              <a:t>정적 모델에서 다음 사항은 정하지 않는다.</a:t>
             </a:r>
           </a:p>
           <a:p>
@@ -33165,7 +32963,7 @@
                 <a:latin typeface="맑은 고딕"/>
                 <a:ea typeface="맑은 고딕"/>
               </a:rPr>
-              <a:t>Quantity</a:t>
+              <a:t>OrderNumber</a:t>
             </a:r>
             <a:r>
               <a:rPr sz="1000" b="0">
@@ -33175,7 +32973,27 @@
                 <a:latin typeface="맑은 고딕"/>
                 <a:ea typeface="맑은 고딕"/>
               </a:rPr>
-              <a:t>의 구체적인 상한</a:t>
+              <a:t>와 </a:t>
+            </a:r>
+            <a:r>
+              <a:rPr sz="1000" b="0">
+                <a:solidFill>
+                  <a:srgbClr val="000000"/>
+                </a:solidFill>
+                <a:latin typeface="맑은 고딕"/>
+                <a:ea typeface="맑은 고딕"/>
+              </a:rPr>
+              <a:t>ProductNumber</a:t>
+            </a:r>
+            <a:r>
+              <a:rPr sz="1000" b="0">
+                <a:solidFill>
+                  <a:srgbClr val="000000"/>
+                </a:solidFill>
+                <a:latin typeface="맑은 고딕"/>
+                <a:ea typeface="맑은 고딕"/>
+              </a:rPr>
+              <a:t>의 형식 및 생성 규칙</a:t>
             </a:r>
           </a:p>
           <a:p>
@@ -33198,7 +33016,17 @@
                 <a:latin typeface="맑은 고딕"/>
                 <a:ea typeface="맑은 고딕"/>
               </a:rPr>
-              <a:t>동일 상품 주문 항목의 병합 여부와 중복 허용 여부</a:t>
+              <a:t>Address</a:t>
+            </a:r>
+            <a:r>
+              <a:rPr sz="1000" b="0">
+                <a:solidFill>
+                  <a:srgbClr val="000000"/>
+                </a:solidFill>
+                <a:latin typeface="맑은 고딕"/>
+                <a:ea typeface="맑은 고딕"/>
+              </a:rPr>
+              <a:t>의 세부 항목</a:t>
             </a:r>
           </a:p>
           <a:p>
@@ -33221,7 +33049,17 @@
                 <a:latin typeface="맑은 고딕"/>
                 <a:ea typeface="맑은 고딕"/>
               </a:rPr>
-              <a:t>결제 이력과 승인 결과의 보존 구조</a:t>
+              <a:t>Quantity</a:t>
+            </a:r>
+            <a:r>
+              <a:rPr sz="1000" b="0">
+                <a:solidFill>
+                  <a:srgbClr val="000000"/>
+                </a:solidFill>
+                <a:latin typeface="맑은 고딕"/>
+                <a:ea typeface="맑은 고딕"/>
+              </a:rPr>
+              <a:t>의 구체적인 상한</a:t>
             </a:r>
           </a:p>
           <a:p>
@@ -33244,17 +33082,7 @@
                 <a:latin typeface="맑은 고딕"/>
                 <a:ea typeface="맑은 고딕"/>
               </a:rPr>
-              <a:t>현재 확인된 값 이외의 </a:t>
-            </a:r>
-            <a:r>
-              <a:rPr sz="1000" b="0">
-                <a:solidFill>
-                  <a:srgbClr val="000000"/>
-                </a:solidFill>
-                <a:latin typeface="맑은 고딕"/>
-                <a:ea typeface="맑은 고딕"/>
-              </a:rPr>
-              <a:t>OrderStatus</a:t>
+              <a:t>동일 상품 주문 항목의 병합 여부와 중복 허용 여부</a:t>
             </a:r>
           </a:p>
           <a:p>
@@ -33277,7 +33105,7 @@
                 <a:latin typeface="맑은 고딕"/>
                 <a:ea typeface="맑은 고딕"/>
               </a:rPr>
-              <a:t>기존 업무 미정은 다음과 같다.</a:t>
+              <a:t>결제 이력과 승인 결과의 보존 구조</a:t>
             </a:r>
           </a:p>
           <a:p>
@@ -33300,7 +33128,17 @@
                 <a:latin typeface="맑은 고딕"/>
                 <a:ea typeface="맑은 고딕"/>
               </a:rPr>
-              <a:t>결제대기 기한과 만료 정책</a:t>
+              <a:t>현재 확인된 값 이외의 </a:t>
+            </a:r>
+            <a:r>
+              <a:rPr sz="1000" b="0">
+                <a:solidFill>
+                  <a:srgbClr val="000000"/>
+                </a:solidFill>
+                <a:latin typeface="맑은 고딕"/>
+                <a:ea typeface="맑은 고딕"/>
+              </a:rPr>
+              <a:t>OrderStatus</a:t>
             </a:r>
           </a:p>
           <a:p>
@@ -33323,7 +33161,7 @@
                 <a:latin typeface="맑은 고딕"/>
                 <a:ea typeface="맑은 고딕"/>
               </a:rPr>
-              <a:t>결제 응답을 확정할 수 없을 때의 처리와 재결제 허용 여부</a:t>
+              <a:t>기존 업무 미정은 다음과 같다.</a:t>
             </a:r>
           </a:p>
           <a:p>
@@ -33346,7 +33184,7 @@
                 <a:latin typeface="맑은 고딕"/>
                 <a:ea typeface="맑은 고딕"/>
               </a:rPr>
-              <a:t>재고 판단 시점과 승인 전 재고 부족 처리</a:t>
+              <a:t>결제대기 기한과 만료 정책</a:t>
             </a:r>
           </a:p>
           <a:p>
@@ -33369,7 +33207,7 @@
                 <a:latin typeface="맑은 고딕"/>
                 <a:ea typeface="맑은 고딕"/>
               </a:rPr>
-              <a:t>카드 승인 뒤 재고 부족 처리</a:t>
+              <a:t>결제 응답을 확정할 수 없을 때의 처리와 재결제 허용 여부</a:t>
             </a:r>
           </a:p>
           <a:p>
@@ -33392,7 +33230,7 @@
                 <a:latin typeface="맑은 고딕"/>
                 <a:ea typeface="맑은 고딕"/>
               </a:rPr>
-              <a:t>배송 요청 실패 처리와 재요청 기준</a:t>
+              <a:t>재고 판단 시점과 승인 전 재고 부족 처리</a:t>
             </a:r>
           </a:p>
           <a:p>
@@ -33415,7 +33253,7 @@
                 <a:latin typeface="맑은 고딕"/>
                 <a:ea typeface="맑은 고딕"/>
               </a:rPr>
-              <a:t>주문 결과의 별도 통지 여부와 담당 시스템</a:t>
+              <a:t>카드 승인 뒤 재고 부족 처리</a:t>
             </a:r>
           </a:p>
           <a:p>
@@ -33438,47 +33276,20 @@
                 <a:latin typeface="맑은 고딕"/>
                 <a:ea typeface="맑은 고딕"/>
               </a:rPr>
-              <a:t>이 미정 사항으로부터 허용 또는 금지 정책, 새로운 개념이나 상태를 도출하지 않는다.</a:t>
-            </a:r>
-          </a:p>
-        </p:txBody>
-      </p:sp>
-      <p:sp>
-        <p:nvSpPr>
-          <p:cNvPr id="9" name="내용 개체 틀 7">
-            <a:extLst>
-              <a:ext uri="{FF2B5EF4-FFF2-40B4-BE49-F238E27FC236}">
-                <a16:creationId xmlns:a16="http://schemas.microsoft.com/office/drawing/2014/main" id="{BEBA2C4A-B0BF-F2E4-EA6E-614C99CBA184}"/>
-              </a:ext>
-            </a:extLst>
-          </p:cNvPr>
-          <p:cNvSpPr>
-            <a:spLocks noGrp="1"/>
-          </p:cNvSpPr>
-          <p:nvPr>
-            <p:ph idx="1"/>
-          </p:nvPr>
-        </p:nvSpPr>
-        <p:spPr>
-          <a:xfrm>
-            <a:off x="233172" y="960120"/>
-            <a:ext cx="8778240" cy="620324"/>
-          </a:xfrm>
-        </p:spPr>
-        <p:txBody>
-          <a:bodyPr>
-            <a:normAutofit/>
-          </a:bodyPr>
-          <a:lstStyle/>
-          <a:p>
-            <a:pPr marL="182880" indent="0">
+              <a:t>배송 요청 실패 처리와 재요청 기준</a:t>
+            </a:r>
+          </a:p>
+          <a:p>
+            <a:pPr lvl="2" marL="411480" indent="-137160">
               <a:spcBef>
                 <a:spcPts val="300"/>
               </a:spcBef>
               <a:spcAft>
                 <a:spcPts val="300"/>
               </a:spcAft>
-              <a:buNone/>
+              <a:buSzPct val="90000"/>
+              <a:buFont typeface="Wingdings" pitchFamily="2" charset="2"/>
+              <a:buChar char=""/>
             </a:pPr>
             <a:r>
               <a:rPr sz="1000" b="0">
@@ -33488,7 +33299,30 @@
                 <a:latin typeface="맑은 고딕"/>
                 <a:ea typeface="맑은 고딕"/>
               </a:rPr>
-              <a:t>본인 주문에 대해서만 조회 또는 변경 요청의 권한을 인정하며 다른 고객의 주문 요청은 거절한다. 주문자와 수령인은 같은 사람으로 본다. 다만 회원·비회원 여부와 주문 주체, 본인 확인, 주문자 및 수령인을 나타낼 구체 타입이나 식별 정보는 정하지 않는다.</a:t>
+              <a:t>주문 결과의 별도 통지 여부와 담당 시스템</a:t>
+            </a:r>
+          </a:p>
+          <a:p>
+            <a:pPr lvl="2" marL="411480" indent="-137160">
+              <a:spcBef>
+                <a:spcPts val="300"/>
+              </a:spcBef>
+              <a:spcAft>
+                <a:spcPts val="300"/>
+              </a:spcAft>
+              <a:buSzPct val="90000"/>
+              <a:buFont typeface="Wingdings" pitchFamily="2" charset="2"/>
+              <a:buChar char=""/>
+            </a:pPr>
+            <a:r>
+              <a:rPr sz="1000" b="0">
+                <a:solidFill>
+                  <a:srgbClr val="000000"/>
+                </a:solidFill>
+                <a:latin typeface="맑은 고딕"/>
+                <a:ea typeface="맑은 고딕"/>
+              </a:rPr>
+              <a:t>이 미정 사항으로부터 허용 또는 금지 정책, 새로운 개념이나 상태를 도출하지 않는다.</a:t>
             </a:r>
           </a:p>
         </p:txBody>

--- a/courses/ai-native/sessions/s04.pptx
+++ b/courses/ai-native/sessions/s04.pptx
@@ -1670,7 +1670,7 @@
             <a:pPr lvl="0"/>
             <a:r>
               <a:rPr lang="ko-KR" sz="1200"/>
-              <a:t>기존 code/s04/order와 architecture는 전면 보완 전 자료다. 이 원고의 발췌 원본은 static-model로 명시해 구별한다.</a:t>
+              <a:t>이 원고의 발췌 원본은 static-model 하나다. 전면 보완 전의 자료는 남겨 두지 않는다.</a:t>
             </a:r>
           </a:p>
           <a:p>
@@ -2352,7 +2352,7 @@
             <a:pPr lvl="0"/>
             <a:r>
               <a:rPr lang="ko-KR" sz="1200"/>
-              <a:t>모델에서 보완된 내용은 판매가와 구별한 단가, 관계의 개수, 총액·값의 조건이다. 실제 실습의 새로운 합의는 요구사항 정의서에도 되돌린다.</a:t>
+              <a:t>모델에서 보완된 것 — 판매가와 구별한 단가, 관계의 개수, 총액·값의 조건이다. 실제 실습의 새로운 합의는 요구사항 정의서에도 되돌린다.</a:t>
             </a:r>
           </a:p>
           <a:p>
@@ -2430,6 +2430,423 @@
               <a:t>사용자 배치 요청으로 Mermaid에 direction LR 한 줄만 추가해 클래스를 가로로 배치했다. 도식은 위, 설명은 아래에 둔다.</a:t>
             </a:r>
           </a:p>
+          <a:p>
+            <a:pPr lvl="0"/>
+            <a:r>
+              <a:rPr lang="ko-KR" sz="1200"/>
+              <a:t>실제로 실행한 프롬프트 — 아래가 이 별첨을 만든 입력 그대로다. 본문 실습의 ①~⑤는 수강생용 문구이고, 실제 실행은 앞 응답을 읽고 답한 내용이 붙어 길다. 원본은 code/s04/exercise-conversation/order/prompt-NN.txt다.</a:t>
+            </a:r>
+          </a:p>
+          <a:p>
+            <a:pPr lvl="1"/>
+            <a:r>
+              <a:rPr lang="ko-KR" sz="1200"/>
+              <a:t>1. 실제 프롬프트 1</a:t>
+            </a:r>
+          </a:p>
+          <a:p>
+            <a:pPr lvl="0">
+              <a:buNone/>
+            </a:pPr>
+            <a:r>
+              <a:rPr lang="ko-KR" sz="1200"/>
+              <a:t>    실습 3의 요구사항 정의서를 읽고 "주문한다"의 정적 모델 초안을 제안해라. 용어집·개념과 관계·속성·불변 조건을 담고, 클래스 다이어그램과 같은 내용을 읽을 수 있는 목록을 함께 보여라. 근거 없는 개념·정책은 확정하지 말고 질문해라. 설계·구현·상태 전이는 만들지 마라. 용어의 영문 이름은 Order, OrderItem, Product, Money, Quantity, Address, OrderNumber, ProductNumber, OrderStatus, unitPrice, salePrice, totalAmount, shippingAddress를 사용해라. 요구사항에서 이미 정한 이름은 유지해라.</a:t>
+            </a:r>
+          </a:p>
+          <a:p>
+            <a:pPr lvl="0">
+              <a:buNone/>
+            </a:pPr>
+            <a:r>
+              <a:rPr lang="ko-KR" sz="1200"/>
+              <a:t>    [실습 3의 실제 최종 MD] # “주문한다” 요구사항 정의서</a:t>
+            </a:r>
+          </a:p>
+          <a:p>
+            <a:pPr lvl="0">
+              <a:buNone/>
+            </a:pPr>
+            <a:r>
+              <a:rPr lang="ko-KR" sz="1200"/>
+              <a:t>    고객이 장바구니의 상품과 수량을 바탕으로 배송지를 지정하고, 카드 승인을 받아 주문을 성립시킨 뒤 그 결과를 확인할 때까지의 요구사항과 수용 기준을 정의한다.</a:t>
+            </a:r>
+          </a:p>
+          <a:p>
+            <a:pPr lvl="0">
+              <a:buNone/>
+            </a:pPr>
+            <a:r>
+              <a:rPr lang="ko-KR" sz="1200"/>
+              <a:t>    ## 목적과 범위</a:t>
+            </a:r>
+          </a:p>
+          <a:p>
+            <a:pPr lvl="2"/>
+            <a:r>
+              <a:rPr lang="ko-KR" sz="1200"/>
+              <a:t>상품 조회와 장바구니 구성은 전제다.</a:t>
+            </a:r>
+          </a:p>
+          <a:p>
+            <a:pPr lvl="2"/>
+            <a:r>
+              <a:rPr lang="ko-KR" sz="1200"/>
+              <a:t>상세 범위는 공통 흐름 3~5단계인 배송지 지정, 결제, 주문 결과 확인이다.</a:t>
+            </a:r>
+          </a:p>
+          <a:p>
+            <a:pPr lvl="2"/>
+            <a:r>
+              <a:rPr lang="ko-KR" sz="1200"/>
+              <a:t>상품·결제·배송 시스템은 외부 시스템으로 연계하며 내부 기능은 재구현하지 않는다.</a:t>
+            </a:r>
+          </a:p>
+          <a:p>
+            <a:pPr lvl="0">
+              <a:buNone/>
+            </a:pPr>
+            <a:r>
+              <a:rPr lang="ko-KR" sz="1200"/>
+              <a:t>    ## 사용자 이야기</a:t>
+            </a:r>
+          </a:p>
+          <a:p>
+            <a:pPr lvl="0">
+              <a:buNone/>
+            </a:pPr>
+            <a:r>
+              <a:rPr lang="ko-KR" sz="1200"/>
+              <a:t>    고객으로서 장바구니의 상품과 수량을 기준으로 배송지를 지정하고 카드 승인을 받아 주문을 성립시킨 뒤 그 결과를 확인하고 싶다.</a:t>
+            </a:r>
+          </a:p>
+          <a:p>
+            <a:pPr lvl="0">
+              <a:buNone/>
+            </a:pPr>
+            <a:r>
+              <a:rPr lang="ko-KR" sz="1200"/>
+              <a:t>    ## 핵심 기능과 업무 규칙</a:t>
+            </a:r>
+          </a:p>
+          <a:p>
+            <a:pPr lvl="2"/>
+            <a:r>
+              <a:rPr lang="ko-KR" sz="1200"/>
+              <a:t>배송지를 지정하면 주문 생성 시점의 판매가로 주문 금액을 확정하고 결제대기 주문을 생성한다.</a:t>
+            </a:r>
+          </a:p>
+          <a:p>
+            <a:pPr lvl="2"/>
+            <a:r>
+              <a:rPr lang="ko-KR" sz="1200"/>
+              <a:t>주문자와 수령인은 같은 사람으로 본다.</a:t>
+            </a:r>
+          </a:p>
+          <a:p>
+            <a:pPr lvl="2"/>
+            <a:r>
+              <a:rPr lang="ko-KR" sz="1200"/>
+              <a:t>주문 금액은 각 주문 항목의 주문 생성 시점 판매가에 수량을 곱하여 합한 금액이다.</a:t>
+            </a:r>
+          </a:p>
+          <a:p>
+            <a:pPr lvl="2"/>
+            <a:r>
+              <a:rPr lang="ko-KR" sz="1200"/>
+              <a:t>주문 생성 뒤 판매가가 변경되어도 주문 금액과 카드 승인 요청 금액은 바뀌지 않는다.</a:t>
+            </a:r>
+          </a:p>
+          <a:p>
+            <a:pPr lvl="2"/>
+            <a:r>
+              <a:rPr lang="ko-KR" sz="1200"/>
+              <a:t>결제대기 주문의 상품·수량·배송지는 변경할 수 없다. 변경하려면 새 주문을 생성한다.</a:t>
+            </a:r>
+          </a:p>
+          <a:p>
+            <a:pPr lvl="2"/>
+            <a:r>
+              <a:rPr lang="ko-KR" sz="1200"/>
+              <a:t>결제 수단은 카드만 허용한다.</a:t>
+            </a:r>
+          </a:p>
+          <a:p>
+            <a:pPr lvl="2"/>
+            <a:r>
+              <a:rPr lang="ko-KR" sz="1200"/>
+              <a:t>카드 승인이 거절되면 같은 주문을 결제대기로 유지하며 다른 카드로 재결제할 수 있다.</a:t>
+            </a:r>
+          </a:p>
+          <a:p>
+            <a:pPr lvl="2"/>
+            <a:r>
+              <a:rPr lang="ko-KR" sz="1200"/>
+              <a:t>카드 승인이 완료되면 같은 주문이 성립하고 상태가 결제완료가 된다.</a:t>
+            </a:r>
+          </a:p>
+          <a:p>
+            <a:pPr lvl="2"/>
+            <a:r>
+              <a:rPr lang="ko-KR" sz="1200"/>
+              <a:t>배송 요청은 카드 승인 완료 뒤 해당 주문의 확정된 배송지로 보낸다.</a:t>
+            </a:r>
+          </a:p>
+          <a:p>
+            <a:pPr lvl="2"/>
+            <a:r>
+              <a:rPr lang="ko-KR" sz="1200"/>
+              <a:t>주문 쪽에서 재고를 별도로 확보하지 않고 상품 시스템의 판단을 따른다.</a:t>
+            </a:r>
+          </a:p>
+          <a:p>
+            <a:pPr lvl="2"/>
+            <a:r>
+              <a:rPr lang="ko-KR" sz="1200"/>
+              <a:t>결제 응답을 확정할 수 없으면 승인 또는 거절로 간주하지 않는다.</a:t>
+            </a:r>
+          </a:p>
+          <a:p>
+            <a:pPr lvl="2"/>
+            <a:r>
+              <a:rPr lang="ko-KR" sz="1200"/>
+              <a:t>본인 주문에 대해서만 조회 또는 변경 요청의 권한을 인정한다. 권한이 있더라도 실제 변경 가능 여부에는 주문 상태와 업무 규칙을 적용한다.</a:t>
+            </a:r>
+          </a:p>
+          <a:p>
+            <a:pPr lvl="2"/>
+            <a:r>
+              <a:rPr lang="ko-KR" sz="1200"/>
+              <a:t>다른 고객의 주문에 대한 조회·변경 요청은 거절한다.</a:t>
+            </a:r>
+          </a:p>
+          <a:p>
+            <a:pPr lvl="0">
+              <a:buNone/>
+            </a:pPr>
+            <a:r>
+              <a:rPr lang="ko-KR" sz="1200"/>
+              <a:t>    ## 기본 용어집</a:t>
+            </a:r>
+          </a:p>
+          <a:p>
+            <a:pPr lvl="2"/>
+            <a:r>
+              <a:rPr lang="ko-KR" sz="1200"/>
+              <a:t>주문(Order): 배송지가 지정되어 생성된 거래 기록</a:t>
+            </a:r>
+          </a:p>
+          <a:p>
+            <a:pPr lvl="2"/>
+            <a:r>
+              <a:rPr lang="ko-KR" sz="1200"/>
+              <a:t>주문 항목(OrderItem): 주문에 포함된 상품, 수량 및 주문 생성 시점의 판매가</a:t>
+            </a:r>
+          </a:p>
+          <a:p>
+            <a:pPr lvl="2"/>
+            <a:r>
+              <a:rPr lang="ko-KR" sz="1200"/>
+              <a:t>판매가(salePrice): 상품 시스템이 제공하는 상품 가격</a:t>
+            </a:r>
+          </a:p>
+          <a:p>
+            <a:pPr lvl="2"/>
+            <a:r>
+              <a:rPr lang="ko-KR" sz="1200"/>
+              <a:t>주문 금액(totalAmount): 각 주문 항목의 주문 생성 시점 판매가에 수량을 곱하여 합한 금액</a:t>
+            </a:r>
+          </a:p>
+          <a:p>
+            <a:pPr lvl="2"/>
+            <a:r>
+              <a:rPr lang="ko-KR" sz="1200"/>
+              <a:t>주문 생성: 배송지 지정에 따라 주문이 기록되고 결제대기가 되는 것</a:t>
+            </a:r>
+          </a:p>
+          <a:p>
+            <a:pPr lvl="2"/>
+            <a:r>
+              <a:rPr lang="ko-KR" sz="1200"/>
+              <a:t>결제대기(PENDING_PAYMENT): 주문은 생성됐지만 카드 승인이 완료되지 않은 상태</a:t>
+            </a:r>
+          </a:p>
+          <a:p>
+            <a:pPr lvl="2"/>
+            <a:r>
+              <a:rPr lang="ko-KR" sz="1200"/>
+              <a:t>주문 성립: 카드 승인이 완료되어 같은 주문이 결제완료가 되는 것</a:t>
+            </a:r>
+          </a:p>
+          <a:p>
+            <a:pPr lvl="2"/>
+            <a:r>
+              <a:rPr lang="ko-KR" sz="1200"/>
+              <a:t>결제완료(PAID): 카드 승인이 완료되어 주문이 성립한 상태</a:t>
+            </a:r>
+          </a:p>
+          <a:p>
+            <a:pPr lvl="2"/>
+            <a:r>
+              <a:rPr lang="ko-KR" sz="1200"/>
+              <a:t>주문 결과 확인: 카드 승인 응답에 따른 주문 상태와 결과를 확인하는 것</a:t>
+            </a:r>
+          </a:p>
+          <a:p>
+            <a:pPr lvl="0">
+              <a:buNone/>
+            </a:pPr>
+            <a:r>
+              <a:rPr lang="ko-KR" sz="1200"/>
+              <a:t>    ## 공통 흐름</a:t>
+            </a:r>
+          </a:p>
+          <a:p>
+            <a:pPr lvl="2"/>
+            <a:r>
+              <a:rPr lang="ko-KR" sz="1200"/>
+              <a:t>1. 상품 조회 — 전제: 고객이 상품을 조회한다.</a:t>
+            </a:r>
+          </a:p>
+          <a:p>
+            <a:pPr lvl="0">
+              <a:buNone/>
+            </a:pPr>
+            <a:r>
+              <a:rPr lang="ko-KR" sz="1200"/>
+              <a:t>    ⟨이하 생략 — 앞 실습의 최종 MD 전문이 이어진다. 전문은 원본 파일에 있다⟩</a:t>
+            </a:r>
+          </a:p>
+          <a:p>
+            <a:pPr lvl="1"/>
+            <a:r>
+              <a:rPr lang="ko-KR" sz="1200"/>
+              <a:t>2. 실제 프롬프트 2</a:t>
+            </a:r>
+          </a:p>
+          <a:p>
+            <a:pPr lvl="0">
+              <a:buNone/>
+            </a:pPr>
+            <a:r>
+              <a:rPr lang="ko-KR" sz="1200"/>
+              <a:t>    [앞선 질문에 대한 답]</a:t>
+            </a:r>
+          </a:p>
+          <a:p>
+            <a:pPr lvl="2"/>
+            <a:r>
+              <a:rPr lang="ko-KR" sz="1200"/>
+              <a:t>상품의 현재 판매가는 salePrice, 주문 생성 시 확정한 단가는 unitPrice로 합의한다. 요구사항 정의서의 "주문 생성 시점 판매가"가 단가의 뜻이다.</a:t>
+            </a:r>
+          </a:p>
+          <a:p>
+            <a:pPr lvl="2"/>
+            <a:r>
+              <a:rPr lang="ko-KR" sz="1200"/>
+              <a:t>이 실습의 금액은 원 단위 정수이고 0 이상이다. 수량은 1 이상의 정수이고 생성되는 주문에는 항목이 1개 이상 있어야 한다. 구체적인 상한은 정하지 않는다.</a:t>
+            </a:r>
+          </a:p>
+          <a:p>
+            <a:pPr lvl="2"/>
+            <a:r>
+              <a:rPr lang="ko-KR" sz="1200"/>
+              <a:t>Address는 배송지 값으로 두고 세부 항목·식별자 형식·중복 상품 항목 병합 규칙은 이번에 정하지 않는다. 본인 주문 확인은 필요한 요구로 유지하되 회원/비회원 여부나 Customer·Member 같은 구체 타입을 확정하지 않는다.</a:t>
+            </a:r>
+          </a:p>
+          <a:p>
+            <a:pPr lvl="2"/>
+            <a:r>
+              <a:rPr lang="ko-KR" sz="1200"/>
+              <a:t>결제 이력의 보존 구조와 결제 응답 미확정·승인 뒤 재고 부족·배송 요청 실패 정책은 원래 미정으로 유지한다. 상태 전이는 뒤 실습의 대상이며 현재 상태 목록이 시스템의 가능한 상태 전부라고 단정하지 마라.</a:t>
+            </a:r>
+          </a:p>
+          <a:p>
+            <a:pPr lvl="0">
+              <a:buNone/>
+            </a:pPr>
+            <a:r>
+              <a:rPr lang="ko-KR" sz="1200"/>
+              <a:t>    [추가 질문·수정 요청] 근거 없는 개념·속성을 걸러내고 분석 모델에 서비스·저장소·외래 키·컬렉션 같은 구현 결정을 넣지 마라. 도식의 화살표가 참조 방향을 확정하지 않도록 주문·주문 항목·상품의 관계를 중심으로 정리해라. 값 개념은 속성 타입으로 쓰되 모든 타입을 선으로 잇는 중복은 줄여라. 초안에서 수정한 판단과 그 근거를 설명해라.</a:t>
+            </a:r>
+          </a:p>
+          <a:p>
+            <a:pPr lvl="1"/>
+            <a:r>
+              <a:rPr lang="ko-KR" sz="1200"/>
+              <a:t>3. 실제 프롬프트 3</a:t>
+            </a:r>
+          </a:p>
+          <a:p>
+            <a:pPr lvl="0">
+              <a:buNone/>
+            </a:pPr>
+            <a:r>
+              <a:rPr lang="ko-KR" sz="1200"/>
+              <a:t>    [앞선 질문에 대한 답]</a:t>
+            </a:r>
+          </a:p>
+          <a:p>
+            <a:pPr lvl="2"/>
+            <a:r>
+              <a:rPr lang="ko-KR" sz="1200"/>
+              <a:t>단가 확정은 항목을 장바구니에 넣을 때가 아니라 주문을 생성할 때다. 생성 후의 현재 판매가와 계속 같아야 한다는 뜻이 아니다.</a:t>
+            </a:r>
+          </a:p>
+          <a:p>
+            <a:pPr lvl="2"/>
+            <a:r>
+              <a:rPr lang="ko-KR" sz="1200"/>
+              <a:t>펜 2개, 생성 시 판매가 1,000원, 총액 2,000원, 배송지 서울을 대표 예로 쓴다. 판매가가 나중에 1,200원이 되어도 기존 단가 1,000원·총액 2,000원이다.</a:t>
+            </a:r>
+          </a:p>
+          <a:p>
+            <a:pPr lvl="2"/>
+            <a:r>
+              <a:rPr lang="ko-KR" sz="1200"/>
+              <a:t>회원/비회원과 결제 이력 구조, 식별자 형식, 주소 세부항목, 중복 항목 병합, 수량 상한은 이번 정적 모델에서 정하지 않는다. 원래 업무 미정은 유지한다.</a:t>
+            </a:r>
+          </a:p>
+          <a:p>
+            <a:pPr lvl="0">
+              <a:buNone/>
+            </a:pPr>
+            <a:r>
+              <a:rPr lang="ko-KR" sz="1200"/>
+              <a:t>    [추가 질문·수정 요청] 관계의 개수·값의 범위·불변 조건을 이 주문에 대입해 확인해라. 항상 성립하는 합계 등식, 생성 때의 조건, 변경 전후를 비교할 조건을 구별해라. 상태 전이·연동 절차를 끼워 넣지 마라. Money·Quantity·Address 같은 값은 속성 타입과 목록으로 충분하다. 클래스 도식에는 주문·항목·상품 세 개념과 관계만 담고 &lt;&lt;value&gt;&gt; 같은 분류를 쓰지 마라. 질문과 판단은 간결하게 설명해라.</a:t>
+            </a:r>
+          </a:p>
+          <a:p>
+            <a:pPr lvl="1"/>
+            <a:r>
+              <a:rPr lang="ko-KR" sz="1200"/>
+              <a:t>4. 실제 프롬프트 4</a:t>
+            </a:r>
+          </a:p>
+          <a:p>
+            <a:pPr lvl="0">
+              <a:buNone/>
+            </a:pPr>
+            <a:r>
+              <a:rPr lang="ko-KR" sz="1200"/>
+              <a:t>    [앞선 질문에 대한 답] 대표 주문의 값과 생성 시점·변경 전후 조건 구별에 동의한다. 추가 업무 정책은 정하지 않는다. [추가 질문·수정 요청] 도식과 목록의 이름·관계·조건을 대조해라. "중복 항목 병합을 정하지 않았으므로 여러 개 존재하는 것을 금지하지 않는다"는 표현은 허용 정책을 정한 것으로 읽힌다. 단순히 병합·중복 항목 허용 여부가 미정이라고 적고 임의의 허용·금지를 도출하지 마라. 본인 확인 요구도 누락하지 말되 구체 타입을 발명하지 마라. 최종 문서는 간결한 업무 모델로 남길 것이다. 다음 네 부분으로 정리할 구성을 제시해라: 1 용어와 속성, 2 세 개념의 클래스 도식과 관계 목록, 3 값·계산·생성 시점·변경 전후 조건과 대표 예, 4 이번에 정하지 않은 항목과 기존 업무 미정. 반복되는 속성 설명과 수정 이력은 빼고 확인에 필요한 의미를 보존해라. 새 코드·설계·상태 전이는 만들지 마라.</a:t>
+            </a:r>
+          </a:p>
+          <a:p>
+            <a:pPr lvl="1"/>
+            <a:r>
+              <a:rPr lang="ko-KR" sz="1200"/>
+              <a:t>5. 실제 프롬프트 5</a:t>
+            </a:r>
+          </a:p>
+          <a:p>
+            <a:pPr lvl="0">
+              <a:buNone/>
+            </a:pPr>
+            <a:r>
+              <a:rPr lang="ko-KR" sz="1200"/>
+              <a:t>    합의한 정적 모델을 간결한 Markdown 파일로 생성해라. 용어·관계·속성·조건·클래스 도식 원본과 대표 예를 보존하고 새 정책·설계는 추가하지 마라. 앞 최종 문서의 본문·네 부분 구성은 적합하다. 다만 첫 문장 "확정 단가와 수량의 합계"는 단가와 수량을 더한 것으로 읽힌다. "각 항목의 확정 단가에 수량을 곱한 금액의 합계"로 명확히 고쳐라. 첫 문장은 주제인 정적 모델이 주문·항목·상품의 관계와 가격 확정 조건을 명시한다는 내용으로 적고, 첫 문장 외에는 앞서 합의한 본문을 유지해라. 생성 안내 없이 완성된 Markdown 본문 전체를 출력해라.</a:t>
+            </a:r>
+          </a:p>
         </p:txBody>
       </p:sp>
     </p:spTree>
@@ -2563,7 +2980,7 @@
             <a:pPr lvl="0"/>
             <a:r>
               <a:rPr lang="ko-KR" sz="1200"/>
-              <a:t>Peter Pin-Shan Chen, The Entity-Relationship Model — Toward a Unified View of Data, 1976 원문에서 개체와 관계로 현실을 보는 관점을 확인했다. https://www.csc.lsu.edu/~chen/pdf/erd-5-pages.pdf</a:t>
+              <a:t>[Chen 1976] 원문에서 개체와 관계로 현실을 보는 관점을 확인했다. 서지는 별첨에 있다.</a:t>
             </a:r>
           </a:p>
           <a:p>
@@ -4290,7 +4707,7 @@
                 <a:latin typeface="맑은 고딕"/>
                 <a:ea typeface="맑은 고딕"/>
               </a:rPr>
-              <a:t>12. 실습 —</a:t>
+              <a:t>12. 실습 4 —</a:t>
             </a:r>
             <a:r>
               <a:rPr sz="1400" b="0">
@@ -27662,7 +28079,7 @@
                 <a:latin typeface="맑은 고딕"/>
                 <a:ea typeface="맑은 고딕"/>
               </a:rPr>
-              <a:t>12. 실습 — 정적 모델</a:t>
+              <a:t>12. 실습 4 — 정적 모델</a:t>
             </a:r>
           </a:p>
         </p:txBody>
@@ -27798,8 +28215,8 @@
         </p:nvSpPr>
         <p:spPr>
           <a:xfrm>
-            <a:off x="365760" y="960120"/>
-            <a:ext cx="8412480" cy="5257800"/>
+            <a:off x="365760" y="1441450"/>
+            <a:ext cx="4069080" cy="4776470"/>
           </a:xfrm>
         </p:spPr>
         <p:txBody>
@@ -27807,57 +28224,6 @@
             <a:normAutofit/>
           </a:bodyPr>
           <a:lstStyle/>
-          <a:p>
-            <a:pPr marL="0" indent="0">
-              <a:spcBef>
-                <a:spcPts val="300"/>
-              </a:spcBef>
-              <a:spcAft>
-                <a:spcPts val="300"/>
-              </a:spcAft>
-              <a:buNone/>
-            </a:pPr>
-            <a:r>
-              <a:rPr sz="1400" b="1">
-                <a:solidFill>
-                  <a:srgbClr val="000000"/>
-                </a:solidFill>
-                <a:latin typeface="맑은 고딕"/>
-                <a:ea typeface="맑은 고딕"/>
-              </a:rPr>
-              <a:t>실습 3의 요구사항 정의서</a:t>
-            </a:r>
-            <a:r>
-              <a:rPr sz="1400" b="0">
-                <a:solidFill>
-                  <a:srgbClr val="000000"/>
-                </a:solidFill>
-                <a:latin typeface="맑은 고딕"/>
-                <a:ea typeface="맑은 고딕"/>
-              </a:rPr>
-              <a:t>로 도메인 모델의 정적 구조를 만들고, ②~④에 </a:t>
-            </a:r>
-            <a:r>
-              <a:rPr sz="1400" b="1">
-                <a:solidFill>
-                  <a:srgbClr val="000000"/>
-                </a:solidFill>
-                <a:latin typeface="맑은 고딕"/>
-                <a:ea typeface="맑은 고딕"/>
-              </a:rPr>
-              <a:t>질문의 답과 수정 요청</a:t>
-            </a:r>
-            <a:r>
-              <a:rPr sz="1400" b="0">
-                <a:solidFill>
-                  <a:srgbClr val="000000"/>
-                </a:solidFill>
-                <a:latin typeface="맑은 고딕"/>
-                <a:ea typeface="맑은 고딕"/>
-              </a:rPr>
-              <a:t>을 적어 완성한다.</a:t>
-            </a:r>
-          </a:p>
           <a:p>
             <a:pPr lvl="2" marL="723900" indent="-368300">
               <a:spcBef>
@@ -27878,29 +28244,18 @@
                 <a:latin typeface="맑은 고딕"/>
                 <a:ea typeface="맑은 고딕"/>
               </a:rPr>
-              <a:t>프롬프트 —</a:t>
-            </a:r>
-            <a:r>
-              <a:rPr sz="1200" b="1">
-                <a:solidFill>
-                  <a:srgbClr val="000000"/>
-                </a:solidFill>
-                <a:latin typeface="맑은 고딕"/>
-                <a:ea typeface="맑은 고딕"/>
-              </a:rPr>
-              <a:t> 요청사항 포함</a:t>
-            </a:r>
-          </a:p>
-          <a:p>
-            <a:pPr lvl="3" marL="981075" indent="-268288">
+              <a:t>투입물</a:t>
+            </a:r>
+          </a:p>
+          <a:p>
+            <a:pPr lvl="3" marL="723900" indent="0">
               <a:spcBef>
                 <a:spcPts val="300"/>
               </a:spcBef>
               <a:spcAft>
                 <a:spcPts val="300"/>
               </a:spcAft>
-              <a:buFont typeface="+mj-ea"/>
-              <a:buAutoNum type="circleNumDbPlain" startAt="1"/>
+              <a:buNone/>
             </a:pPr>
             <a:r>
               <a:rPr sz="1200" b="0">
@@ -27910,7 +28265,7 @@
                 <a:latin typeface="맑은 고딕"/>
                 <a:ea typeface="맑은 고딕"/>
               </a:rPr>
-              <a:t>"실습 3의 요구사항 정의서로 </a:t>
+              <a:t>실습 3의 </a:t>
             </a:r>
             <a:r>
               <a:rPr sz="1200" b="1">
@@ -27920,7 +28275,7 @@
                 <a:latin typeface="맑은 고딕"/>
                 <a:ea typeface="맑은 고딕"/>
               </a:rPr>
-              <a:t>도메인 모델의 정적 구조</a:t>
+              <a:t>요구사항 정의서</a:t>
             </a:r>
             <a:r>
               <a:rPr sz="1200" b="0">
@@ -27930,20 +28285,8 @@
                 <a:latin typeface="맑은 고딕"/>
                 <a:ea typeface="맑은 고딕"/>
               </a:rPr>
-              <a:t>를 제안해라. 용어·개념·관계·속성·조건을 담고 클래스 다이어그램과 같은 뜻의 목록을 보여 주고 없는 정책은 질문해라. 설계·구현·상태 전이는 만들지 마라."</a:t>
-            </a:r>
-          </a:p>
-          <a:p>
-            <a:pPr lvl="3" marL="981075" indent="-268288">
-              <a:spcBef>
-                <a:spcPts val="300"/>
-              </a:spcBef>
-              <a:spcAft>
-                <a:spcPts val="300"/>
-              </a:spcAft>
-              <a:buFont typeface="+mj-ea"/>
-              <a:buAutoNum type="circleNumDbPlain" startAt="2"/>
-            </a:pPr>
+              <a:t>(</a:t>
+            </a:r>
             <a:r>
               <a:rPr sz="1200" b="0">
                 <a:solidFill>
@@ -27952,17 +28295,7 @@
                 <a:latin typeface="맑은 고딕"/>
                 <a:ea typeface="맑은 고딕"/>
               </a:rPr>
-              <a:t>"[앞선 질문에 대한 답]과 [추가 질문·수정 요청]을 적는다. </a:t>
-            </a:r>
-            <a:r>
-              <a:rPr sz="1200" b="1">
-                <a:solidFill>
-                  <a:srgbClr val="000000"/>
-                </a:solidFill>
-                <a:latin typeface="맑은 고딕"/>
-                <a:ea typeface="맑은 고딕"/>
-              </a:rPr>
-              <a:t>근거 없는 개념·속성</a:t>
+              <a:t>주문한다-요구사항-정의서.md</a:t>
             </a:r>
             <a:r>
               <a:rPr sz="1200" b="0">
@@ -27972,133 +28305,7 @@
                 <a:latin typeface="맑은 고딕"/>
                 <a:ea typeface="맑은 고딕"/>
               </a:rPr>
-              <a:t>을 걸러내고 현재 판매가와 확정 단가를 구별해라."</a:t>
-            </a:r>
-          </a:p>
-          <a:p>
-            <a:pPr lvl="3" marL="981075" indent="-268288">
-              <a:spcBef>
-                <a:spcPts val="300"/>
-              </a:spcBef>
-              <a:spcAft>
-                <a:spcPts val="300"/>
-              </a:spcAft>
-              <a:buFont typeface="+mj-ea"/>
-              <a:buAutoNum type="circleNumDbPlain" startAt="3"/>
-            </a:pPr>
-            <a:r>
-              <a:rPr sz="1200" b="0">
-                <a:solidFill>
-                  <a:srgbClr val="000000"/>
-                </a:solidFill>
-                <a:latin typeface="맑은 고딕"/>
-                <a:ea typeface="맑은 고딕"/>
-              </a:rPr>
-              <a:t>"[앞선 질문에 대한 답]과 [추가 질문·수정 요청]을 적는다. </a:t>
-            </a:r>
-            <a:r>
-              <a:rPr sz="1200" b="1">
-                <a:solidFill>
-                  <a:srgbClr val="000000"/>
-                </a:solidFill>
-                <a:latin typeface="맑은 고딕"/>
-                <a:ea typeface="맑은 고딕"/>
-              </a:rPr>
-              <a:t>관계의 개수·값의 범위·불변 조건</a:t>
-            </a:r>
-            <a:r>
-              <a:rPr sz="1200" b="0">
-                <a:solidFill>
-                  <a:srgbClr val="000000"/>
-                </a:solidFill>
-                <a:latin typeface="맑은 고딕"/>
-                <a:ea typeface="맑은 고딕"/>
-              </a:rPr>
-              <a:t>을 구체적인 주문에 대입해 확인하고 생성 시점과 변경 뒤의 조건을 구별해라."</a:t>
-            </a:r>
-          </a:p>
-          <a:p>
-            <a:pPr lvl="3" marL="981075" indent="-268288">
-              <a:spcBef>
-                <a:spcPts val="300"/>
-              </a:spcBef>
-              <a:spcAft>
-                <a:spcPts val="300"/>
-              </a:spcAft>
-              <a:buFont typeface="+mj-ea"/>
-              <a:buAutoNum type="circleNumDbPlain" startAt="4"/>
-            </a:pPr>
-            <a:r>
-              <a:rPr sz="1200" b="0">
-                <a:solidFill>
-                  <a:srgbClr val="000000"/>
-                </a:solidFill>
-                <a:latin typeface="맑은 고딕"/>
-                <a:ea typeface="맑은 고딕"/>
-              </a:rPr>
-              <a:t>"[앞선 질문에 대한 답]과 [추가 질문·수정 요청]을 적는다. </a:t>
-            </a:r>
-            <a:r>
-              <a:rPr sz="1200" b="1">
-                <a:solidFill>
-                  <a:srgbClr val="000000"/>
-                </a:solidFill>
-                <a:latin typeface="맑은 고딕"/>
-                <a:ea typeface="맑은 고딕"/>
-              </a:rPr>
-              <a:t>도식과 목록의 이름·관계·조건</a:t>
-            </a:r>
-            <a:r>
-              <a:rPr sz="1200" b="0">
-                <a:solidFill>
-                  <a:srgbClr val="000000"/>
-                </a:solidFill>
-                <a:latin typeface="맑은 고딕"/>
-                <a:ea typeface="맑은 고딕"/>
-              </a:rPr>
-              <a:t>을 대조하고 필요한 미정만 이유와 함께 남겨라."</a:t>
-            </a:r>
-          </a:p>
-          <a:p>
-            <a:pPr lvl="3" marL="981075" indent="-268288">
-              <a:spcBef>
-                <a:spcPts val="300"/>
-              </a:spcBef>
-              <a:spcAft>
-                <a:spcPts val="300"/>
-              </a:spcAft>
-              <a:buFont typeface="+mj-ea"/>
-              <a:buAutoNum type="circleNumDbPlain" startAt="5"/>
-            </a:pPr>
-            <a:r>
-              <a:rPr sz="1200" b="0">
-                <a:solidFill>
-                  <a:srgbClr val="000000"/>
-                </a:solidFill>
-                <a:latin typeface="맑은 고딕"/>
-                <a:ea typeface="맑은 고딕"/>
-              </a:rPr>
-              <a:t>"합의한 </a:t>
-            </a:r>
-            <a:r>
-              <a:rPr sz="1200" b="1">
-                <a:solidFill>
-                  <a:srgbClr val="000000"/>
-                </a:solidFill>
-                <a:latin typeface="맑은 고딕"/>
-                <a:ea typeface="맑은 고딕"/>
-              </a:rPr>
-              <a:t>도메인 모델의 정적 관점을 Markdown 파일</a:t>
-            </a:r>
-            <a:r>
-              <a:rPr sz="1200" b="0">
-                <a:solidFill>
-                  <a:srgbClr val="000000"/>
-                </a:solidFill>
-                <a:latin typeface="맑은 고딕"/>
-                <a:ea typeface="맑은 고딕"/>
-              </a:rPr>
-              <a:t>로 생성해라. 용어·관계·속성·조건·클래스 다이어그램 원본과 대표 예를 보존하고 새 정책·설계는 추가하지 마라."</a:t>
+              <a:t>)</a:t>
             </a:r>
           </a:p>
           <a:p>
@@ -28121,19 +28328,29 @@
                 <a:latin typeface="맑은 고딕"/>
                 <a:ea typeface="맑은 고딕"/>
               </a:rPr>
-              <a:t>점검 항목</a:t>
-            </a:r>
-          </a:p>
-          <a:p>
-            <a:pPr lvl="3" marL="1028700" indent="-304800">
+              <a:t>프롬프트 —</a:t>
+            </a:r>
+            <a:r>
+              <a:rPr sz="1200" b="1">
+                <a:solidFill>
+                  <a:srgbClr val="000000"/>
+                </a:solidFill>
+                <a:latin typeface="맑은 고딕"/>
+                <a:ea typeface="맑은 고딕"/>
+              </a:rPr>
+              <a:t> 요청사항 포함</a:t>
+            </a:r>
+          </a:p>
+          <a:p>
+            <a:pPr lvl="3" marL="981075" indent="-268288">
               <a:spcBef>
                 <a:spcPts val="300"/>
               </a:spcBef>
               <a:spcAft>
                 <a:spcPts val="300"/>
               </a:spcAft>
-              <a:buFont typeface="+mj-lt"/>
-              <a:buAutoNum type="arabicPeriod" startAt="1"/>
+              <a:buFont typeface="+mj-ea"/>
+              <a:buAutoNum type="circleNumDbPlain" startAt="1"/>
             </a:pPr>
             <a:r>
               <a:rPr sz="1200" b="0">
@@ -28143,7 +28360,7 @@
                 <a:latin typeface="맑은 고딕"/>
                 <a:ea typeface="맑은 고딕"/>
               </a:rPr>
-              <a:t/>
+              <a:t>"실습 3의 요구사항 정의서로 </a:t>
             </a:r>
             <a:r>
               <a:rPr sz="1200" b="1">
@@ -28153,7 +28370,7 @@
                 <a:latin typeface="맑은 고딕"/>
                 <a:ea typeface="맑은 고딕"/>
               </a:rPr>
-              <a:t>근거</a:t>
+              <a:t>도메인 모델의 정적 구조</a:t>
             </a:r>
             <a:r>
               <a:rPr sz="1200" b="0">
@@ -28163,29 +28380,19 @@
                 <a:latin typeface="맑은 고딕"/>
                 <a:ea typeface="맑은 고딕"/>
               </a:rPr>
-              <a:t> —</a:t>
-            </a:r>
-            <a:r>
-              <a:rPr sz="1000" b="0">
-                <a:solidFill>
-                  <a:srgbClr val="000000"/>
-                </a:solidFill>
-                <a:latin typeface="맑은 고딕"/>
-                <a:ea typeface="맑은 고딕"/>
-              </a:rPr>
-              <a:t> 요구에 없는 개념·속성을 확정했는가?</a:t>
-            </a:r>
-          </a:p>
-          <a:p>
-            <a:pPr lvl="3" marL="1028700" indent="-304800">
+              <a:t>를 제안해라. 용어·개념·관계·속성·조건을 담고 클래스 다이어그램과 같은 뜻의 목록을 보여 주고 없는 정책은 질문해라. 설계·구현·상태 전이는 만들지 마라."</a:t>
+            </a:r>
+          </a:p>
+          <a:p>
+            <a:pPr lvl="3" marL="981075" indent="-268288">
               <a:spcBef>
                 <a:spcPts val="300"/>
               </a:spcBef>
               <a:spcAft>
                 <a:spcPts val="300"/>
               </a:spcAft>
-              <a:buFont typeface="+mj-lt"/>
-              <a:buAutoNum type="arabicPeriod" startAt="2"/>
+              <a:buFont typeface="+mj-ea"/>
+              <a:buAutoNum type="circleNumDbPlain" startAt="2"/>
             </a:pPr>
             <a:r>
               <a:rPr sz="1200" b="0">
@@ -28195,7 +28402,7 @@
                 <a:latin typeface="맑은 고딕"/>
                 <a:ea typeface="맑은 고딕"/>
               </a:rPr>
-              <a:t/>
+              <a:t>"[앞선 질문에 대한 답]과 [추가 질문·수정 요청]을 적는다. </a:t>
             </a:r>
             <a:r>
               <a:rPr sz="1200" b="1">
@@ -28205,7 +28412,7 @@
                 <a:latin typeface="맑은 고딕"/>
                 <a:ea typeface="맑은 고딕"/>
               </a:rPr>
-              <a:t>의미</a:t>
+              <a:t>근거 없는 개념·속성</a:t>
             </a:r>
             <a:r>
               <a:rPr sz="1200" b="0">
@@ -28215,29 +28422,19 @@
                 <a:latin typeface="맑은 고딕"/>
                 <a:ea typeface="맑은 고딕"/>
               </a:rPr>
-              <a:t> —</a:t>
-            </a:r>
-            <a:r>
-              <a:rPr sz="1000" b="0">
-                <a:solidFill>
-                  <a:srgbClr val="000000"/>
-                </a:solidFill>
-                <a:latin typeface="맑은 고딕"/>
-                <a:ea typeface="맑은 고딕"/>
-              </a:rPr>
-              <a:t> 판매가와 단가의 시점이 구별되는가?</a:t>
-            </a:r>
-          </a:p>
-          <a:p>
-            <a:pPr lvl="3" marL="1028700" indent="-304800">
+              <a:t>을 걸러내고 현재 판매가와 확정 단가를 구별해라."</a:t>
+            </a:r>
+          </a:p>
+          <a:p>
+            <a:pPr lvl="3" marL="981075" indent="-268288">
               <a:spcBef>
                 <a:spcPts val="300"/>
               </a:spcBef>
               <a:spcAft>
                 <a:spcPts val="300"/>
               </a:spcAft>
-              <a:buFont typeface="+mj-lt"/>
-              <a:buAutoNum type="arabicPeriod" startAt="3"/>
+              <a:buFont typeface="+mj-ea"/>
+              <a:buAutoNum type="circleNumDbPlain" startAt="3"/>
             </a:pPr>
             <a:r>
               <a:rPr sz="1200" b="0">
@@ -28247,7 +28444,7 @@
                 <a:latin typeface="맑은 고딕"/>
                 <a:ea typeface="맑은 고딕"/>
               </a:rPr>
-              <a:t/>
+              <a:t>"[앞선 질문에 대한 답]과 [추가 질문·수정 요청]을 적는다. </a:t>
             </a:r>
             <a:r>
               <a:rPr sz="1200" b="1">
@@ -28257,7 +28454,7 @@
                 <a:latin typeface="맑은 고딕"/>
                 <a:ea typeface="맑은 고딕"/>
               </a:rPr>
-              <a:t>관계</a:t>
+              <a:t>관계의 개수·값의 범위·불변 조건</a:t>
             </a:r>
             <a:r>
               <a:rPr sz="1200" b="0">
@@ -28267,29 +28464,19 @@
                 <a:latin typeface="맑은 고딕"/>
                 <a:ea typeface="맑은 고딕"/>
               </a:rPr>
-              <a:t> —</a:t>
-            </a:r>
-            <a:r>
-              <a:rPr sz="1000" b="0">
-                <a:solidFill>
-                  <a:srgbClr val="000000"/>
-                </a:solidFill>
-                <a:latin typeface="맑은 고딕"/>
-                <a:ea typeface="맑은 고딕"/>
-              </a:rPr>
-              <a:t> 도식과 목록의 대상·개수가 같은가?</a:t>
-            </a:r>
-          </a:p>
-          <a:p>
-            <a:pPr lvl="3" marL="1028700" indent="-304800">
+              <a:t>을 구체적인 주문에 대입해 확인하고 생성 시점과 변경 뒤의 조건을 구별해라."</a:t>
+            </a:r>
+          </a:p>
+          <a:p>
+            <a:pPr lvl="3" marL="981075" indent="-268288">
               <a:spcBef>
                 <a:spcPts val="300"/>
               </a:spcBef>
               <a:spcAft>
                 <a:spcPts val="300"/>
               </a:spcAft>
-              <a:buFont typeface="+mj-lt"/>
-              <a:buAutoNum type="arabicPeriod" startAt="4"/>
+              <a:buFont typeface="+mj-ea"/>
+              <a:buAutoNum type="circleNumDbPlain" startAt="4"/>
             </a:pPr>
             <a:r>
               <a:rPr sz="1200" b="0">
@@ -28299,7 +28486,7 @@
                 <a:latin typeface="맑은 고딕"/>
                 <a:ea typeface="맑은 고딕"/>
               </a:rPr>
-              <a:t/>
+              <a:t>"[앞선 질문에 대한 답]과 [추가 질문·수정 요청]을 적는다. </a:t>
             </a:r>
             <a:r>
               <a:rPr sz="1200" b="1">
@@ -28309,7 +28496,7 @@
                 <a:latin typeface="맑은 고딕"/>
                 <a:ea typeface="맑은 고딕"/>
               </a:rPr>
-              <a:t>조건</a:t>
+              <a:t>도식과 목록의 이름·관계·조건</a:t>
             </a:r>
             <a:r>
               <a:rPr sz="1200" b="0">
@@ -28319,31 +28506,120 @@
                 <a:latin typeface="맑은 고딕"/>
                 <a:ea typeface="맑은 고딕"/>
               </a:rPr>
-              <a:t> —</a:t>
-            </a:r>
-            <a:r>
-              <a:rPr sz="1000" b="0">
-                <a:solidFill>
-                  <a:srgbClr val="000000"/>
-                </a:solidFill>
-                <a:latin typeface="맑은 고딕"/>
-                <a:ea typeface="맑은 고딕"/>
-              </a:rPr>
-              <a:t> 합계·값의 범위·변경 전후를 예로 확인했는가?</a:t>
-            </a:r>
-          </a:p>
-          <a:p>
-            <a:pPr lvl="3" marL="1028700" indent="-304800">
+              <a:t>을 대조하고 필요한 미정만 이유와 함께 남겨라."</a:t>
+            </a:r>
+          </a:p>
+        </p:txBody>
+      </p:sp>
+      <p:sp>
+        <p:nvSpPr>
+          <p:cNvPr id="9" name="내용 개체 틀 7">
+            <a:extLst>
+              <a:ext uri="{FF2B5EF4-FFF2-40B4-BE49-F238E27FC236}">
+                <a16:creationId xmlns:a16="http://schemas.microsoft.com/office/drawing/2014/main" id="{BEBA2C4A-B0BF-F2E4-EA6E-614C99CBA184}"/>
+              </a:ext>
+            </a:extLst>
+          </p:cNvPr>
+          <p:cNvSpPr>
+            <a:spLocks noGrp="1"/>
+          </p:cNvSpPr>
+          <p:nvPr>
+            <p:ph idx="1"/>
+          </p:nvPr>
+        </p:nvSpPr>
+        <p:spPr>
+          <a:xfrm>
+            <a:off x="365760" y="960120"/>
+            <a:ext cx="8412480" cy="481330"/>
+          </a:xfrm>
+        </p:spPr>
+        <p:txBody>
+          <a:bodyPr>
+            <a:normAutofit/>
+          </a:bodyPr>
+          <a:lstStyle/>
+          <a:p>
+            <a:pPr marL="0" indent="0">
               <a:spcBef>
                 <a:spcPts val="300"/>
               </a:spcBef>
               <a:spcAft>
                 <a:spcPts val="300"/>
               </a:spcAft>
-              <a:buFont typeface="+mj-lt"/>
-              <a:buAutoNum type="arabicPeriod" startAt="5"/>
+              <a:buNone/>
             </a:pPr>
             <a:r>
+              <a:rPr sz="1400" b="0">
+                <a:solidFill>
+                  <a:srgbClr val="000000"/>
+                </a:solidFill>
+                <a:latin typeface="맑은 고딕"/>
+                <a:ea typeface="맑은 고딕"/>
+              </a:rPr>
+              <a:t>②~④에 </a:t>
+            </a:r>
+            <a:r>
+              <a:rPr sz="1400" b="1">
+                <a:solidFill>
+                  <a:srgbClr val="000000"/>
+                </a:solidFill>
+                <a:latin typeface="맑은 고딕"/>
+                <a:ea typeface="맑은 고딕"/>
+              </a:rPr>
+              <a:t>질문의 답과 수정 요청</a:t>
+            </a:r>
+            <a:r>
+              <a:rPr sz="1400" b="0">
+                <a:solidFill>
+                  <a:srgbClr val="000000"/>
+                </a:solidFill>
+                <a:latin typeface="맑은 고딕"/>
+                <a:ea typeface="맑은 고딕"/>
+              </a:rPr>
+              <a:t>을 적어 도메인 모델의 정적 구조를 완성한다.</a:t>
+            </a:r>
+          </a:p>
+        </p:txBody>
+      </p:sp>
+      <p:sp>
+        <p:nvSpPr>
+          <p:cNvPr id="10" name="내용 개체 틀 7">
+            <a:extLst>
+              <a:ext uri="{FF2B5EF4-FFF2-40B4-BE49-F238E27FC236}">
+                <a16:creationId xmlns:a16="http://schemas.microsoft.com/office/drawing/2014/main" id="{BEBA2C4A-B0BF-F2E4-EA6E-614C99CBA184}"/>
+              </a:ext>
+            </a:extLst>
+          </p:cNvPr>
+          <p:cNvSpPr>
+            <a:spLocks noGrp="1"/>
+          </p:cNvSpPr>
+          <p:nvPr>
+            <p:ph idx="1"/>
+          </p:nvPr>
+        </p:nvSpPr>
+        <p:spPr>
+          <a:xfrm>
+            <a:off x="4709160" y="1441450"/>
+            <a:ext cx="4069080" cy="4776470"/>
+          </a:xfrm>
+        </p:spPr>
+        <p:txBody>
+          <a:bodyPr>
+            <a:normAutofit/>
+          </a:bodyPr>
+          <a:lstStyle/>
+          <a:p>
+            <a:pPr lvl="3" marL="981075" indent="-268288">
+              <a:spcBef>
+                <a:spcPts val="300"/>
+              </a:spcBef>
+              <a:spcAft>
+                <a:spcPts val="300"/>
+              </a:spcAft>
+              <a:buFont typeface="+mj-ea"/>
+              <a:buAutoNum type="circleNumDbPlain" startAt="5"/>
+            </a:pPr>
+            <a:r>
               <a:rPr sz="1200" b="0">
                 <a:solidFill>
                   <a:srgbClr val="000000"/>
@@ -28351,7 +28627,7 @@
                 <a:latin typeface="맑은 고딕"/>
                 <a:ea typeface="맑은 고딕"/>
               </a:rPr>
-              <a:t/>
+              <a:t>"합의한 </a:t>
             </a:r>
             <a:r>
               <a:rPr sz="1200" b="1">
@@ -28361,7 +28637,7 @@
                 <a:latin typeface="맑은 고딕"/>
                 <a:ea typeface="맑은 고딕"/>
               </a:rPr>
-              <a:t>경계</a:t>
+              <a:t>도메인 모델의 정적 관점을 Markdown 파일</a:t>
             </a:r>
             <a:r>
               <a:rPr sz="1200" b="0">
@@ -28371,17 +28647,7 @@
                 <a:latin typeface="맑은 고딕"/>
                 <a:ea typeface="맑은 고딕"/>
               </a:rPr>
-              <a:t> —</a:t>
-            </a:r>
-            <a:r>
-              <a:rPr sz="1000" b="0">
-                <a:solidFill>
-                  <a:srgbClr val="000000"/>
-                </a:solidFill>
-                <a:latin typeface="맑은 고딕"/>
-                <a:ea typeface="맑은 고딕"/>
-              </a:rPr>
-              <a:t> 구현 결정과 미정 정책을 섞지 않았는가?</a:t>
+              <a:t>로 생성해라. 용어·관계·속성·조건·클래스 다이어그램 원본과 대표 예를 보존하고 새 정책·설계는 추가하지 마라."</a:t>
             </a:r>
           </a:p>
           <a:p>
@@ -28404,6 +28670,289 @@
                 <a:latin typeface="맑은 고딕"/>
                 <a:ea typeface="맑은 고딕"/>
               </a:rPr>
+              <a:t>점검 항목</a:t>
+            </a:r>
+          </a:p>
+          <a:p>
+            <a:pPr lvl="3" marL="1028700" indent="-304800">
+              <a:spcBef>
+                <a:spcPts val="300"/>
+              </a:spcBef>
+              <a:spcAft>
+                <a:spcPts val="300"/>
+              </a:spcAft>
+              <a:buFont typeface="+mj-lt"/>
+              <a:buAutoNum type="arabicPeriod" startAt="1"/>
+            </a:pPr>
+            <a:r>
+              <a:rPr sz="1200" b="0">
+                <a:solidFill>
+                  <a:srgbClr val="000000"/>
+                </a:solidFill>
+                <a:latin typeface="맑은 고딕"/>
+                <a:ea typeface="맑은 고딕"/>
+              </a:rPr>
+              <a:t/>
+            </a:r>
+            <a:r>
+              <a:rPr sz="1200" b="1">
+                <a:solidFill>
+                  <a:srgbClr val="000000"/>
+                </a:solidFill>
+                <a:latin typeface="맑은 고딕"/>
+                <a:ea typeface="맑은 고딕"/>
+              </a:rPr>
+              <a:t>근거</a:t>
+            </a:r>
+            <a:r>
+              <a:rPr sz="1200" b="0">
+                <a:solidFill>
+                  <a:srgbClr val="000000"/>
+                </a:solidFill>
+                <a:latin typeface="맑은 고딕"/>
+                <a:ea typeface="맑은 고딕"/>
+              </a:rPr>
+              <a:t> —</a:t>
+            </a:r>
+            <a:r>
+              <a:rPr sz="1000" b="0">
+                <a:solidFill>
+                  <a:srgbClr val="000000"/>
+                </a:solidFill>
+                <a:latin typeface="맑은 고딕"/>
+                <a:ea typeface="맑은 고딕"/>
+              </a:rPr>
+              <a:t> 요구에 없는 개념·속성을 확정했는가?</a:t>
+            </a:r>
+          </a:p>
+          <a:p>
+            <a:pPr lvl="3" marL="1028700" indent="-304800">
+              <a:spcBef>
+                <a:spcPts val="300"/>
+              </a:spcBef>
+              <a:spcAft>
+                <a:spcPts val="300"/>
+              </a:spcAft>
+              <a:buFont typeface="+mj-lt"/>
+              <a:buAutoNum type="arabicPeriod" startAt="2"/>
+            </a:pPr>
+            <a:r>
+              <a:rPr sz="1200" b="0">
+                <a:solidFill>
+                  <a:srgbClr val="000000"/>
+                </a:solidFill>
+                <a:latin typeface="맑은 고딕"/>
+                <a:ea typeface="맑은 고딕"/>
+              </a:rPr>
+              <a:t/>
+            </a:r>
+            <a:r>
+              <a:rPr sz="1200" b="1">
+                <a:solidFill>
+                  <a:srgbClr val="000000"/>
+                </a:solidFill>
+                <a:latin typeface="맑은 고딕"/>
+                <a:ea typeface="맑은 고딕"/>
+              </a:rPr>
+              <a:t>의미</a:t>
+            </a:r>
+            <a:r>
+              <a:rPr sz="1200" b="0">
+                <a:solidFill>
+                  <a:srgbClr val="000000"/>
+                </a:solidFill>
+                <a:latin typeface="맑은 고딕"/>
+                <a:ea typeface="맑은 고딕"/>
+              </a:rPr>
+              <a:t> —</a:t>
+            </a:r>
+            <a:r>
+              <a:rPr sz="1000" b="0">
+                <a:solidFill>
+                  <a:srgbClr val="000000"/>
+                </a:solidFill>
+                <a:latin typeface="맑은 고딕"/>
+                <a:ea typeface="맑은 고딕"/>
+              </a:rPr>
+              <a:t> 판매가와 단가의 시점이 구별되는가?</a:t>
+            </a:r>
+          </a:p>
+          <a:p>
+            <a:pPr lvl="3" marL="1028700" indent="-304800">
+              <a:spcBef>
+                <a:spcPts val="300"/>
+              </a:spcBef>
+              <a:spcAft>
+                <a:spcPts val="300"/>
+              </a:spcAft>
+              <a:buFont typeface="+mj-lt"/>
+              <a:buAutoNum type="arabicPeriod" startAt="3"/>
+            </a:pPr>
+            <a:r>
+              <a:rPr sz="1200" b="0">
+                <a:solidFill>
+                  <a:srgbClr val="000000"/>
+                </a:solidFill>
+                <a:latin typeface="맑은 고딕"/>
+                <a:ea typeface="맑은 고딕"/>
+              </a:rPr>
+              <a:t/>
+            </a:r>
+            <a:r>
+              <a:rPr sz="1200" b="1">
+                <a:solidFill>
+                  <a:srgbClr val="000000"/>
+                </a:solidFill>
+                <a:latin typeface="맑은 고딕"/>
+                <a:ea typeface="맑은 고딕"/>
+              </a:rPr>
+              <a:t>관계</a:t>
+            </a:r>
+            <a:r>
+              <a:rPr sz="1200" b="0">
+                <a:solidFill>
+                  <a:srgbClr val="000000"/>
+                </a:solidFill>
+                <a:latin typeface="맑은 고딕"/>
+                <a:ea typeface="맑은 고딕"/>
+              </a:rPr>
+              <a:t> —</a:t>
+            </a:r>
+            <a:r>
+              <a:rPr sz="1000" b="0">
+                <a:solidFill>
+                  <a:srgbClr val="000000"/>
+                </a:solidFill>
+                <a:latin typeface="맑은 고딕"/>
+                <a:ea typeface="맑은 고딕"/>
+              </a:rPr>
+              <a:t> 도식과 목록의 대상·개수가 같은가?</a:t>
+            </a:r>
+          </a:p>
+          <a:p>
+            <a:pPr lvl="3" marL="1028700" indent="-304800">
+              <a:spcBef>
+                <a:spcPts val="300"/>
+              </a:spcBef>
+              <a:spcAft>
+                <a:spcPts val="300"/>
+              </a:spcAft>
+              <a:buFont typeface="+mj-lt"/>
+              <a:buAutoNum type="arabicPeriod" startAt="4"/>
+            </a:pPr>
+            <a:r>
+              <a:rPr sz="1200" b="0">
+                <a:solidFill>
+                  <a:srgbClr val="000000"/>
+                </a:solidFill>
+                <a:latin typeface="맑은 고딕"/>
+                <a:ea typeface="맑은 고딕"/>
+              </a:rPr>
+              <a:t/>
+            </a:r>
+            <a:r>
+              <a:rPr sz="1200" b="1">
+                <a:solidFill>
+                  <a:srgbClr val="000000"/>
+                </a:solidFill>
+                <a:latin typeface="맑은 고딕"/>
+                <a:ea typeface="맑은 고딕"/>
+              </a:rPr>
+              <a:t>조건</a:t>
+            </a:r>
+            <a:r>
+              <a:rPr sz="1200" b="0">
+                <a:solidFill>
+                  <a:srgbClr val="000000"/>
+                </a:solidFill>
+                <a:latin typeface="맑은 고딕"/>
+                <a:ea typeface="맑은 고딕"/>
+              </a:rPr>
+              <a:t> —</a:t>
+            </a:r>
+            <a:r>
+              <a:rPr sz="1000" b="0">
+                <a:solidFill>
+                  <a:srgbClr val="000000"/>
+                </a:solidFill>
+                <a:latin typeface="맑은 고딕"/>
+                <a:ea typeface="맑은 고딕"/>
+              </a:rPr>
+              <a:t> 합계·값의 범위·변경 전후를 예로 확인했는가?</a:t>
+            </a:r>
+          </a:p>
+          <a:p>
+            <a:pPr lvl="3" marL="1028700" indent="-304800">
+              <a:spcBef>
+                <a:spcPts val="300"/>
+              </a:spcBef>
+              <a:spcAft>
+                <a:spcPts val="300"/>
+              </a:spcAft>
+              <a:buFont typeface="+mj-lt"/>
+              <a:buAutoNum type="arabicPeriod" startAt="5"/>
+            </a:pPr>
+            <a:r>
+              <a:rPr sz="1200" b="0">
+                <a:solidFill>
+                  <a:srgbClr val="000000"/>
+                </a:solidFill>
+                <a:latin typeface="맑은 고딕"/>
+                <a:ea typeface="맑은 고딕"/>
+              </a:rPr>
+              <a:t/>
+            </a:r>
+            <a:r>
+              <a:rPr sz="1200" b="1">
+                <a:solidFill>
+                  <a:srgbClr val="000000"/>
+                </a:solidFill>
+                <a:latin typeface="맑은 고딕"/>
+                <a:ea typeface="맑은 고딕"/>
+              </a:rPr>
+              <a:t>경계</a:t>
+            </a:r>
+            <a:r>
+              <a:rPr sz="1200" b="0">
+                <a:solidFill>
+                  <a:srgbClr val="000000"/>
+                </a:solidFill>
+                <a:latin typeface="맑은 고딕"/>
+                <a:ea typeface="맑은 고딕"/>
+              </a:rPr>
+              <a:t> —</a:t>
+            </a:r>
+            <a:r>
+              <a:rPr sz="1000" b="0">
+                <a:solidFill>
+                  <a:srgbClr val="000000"/>
+                </a:solidFill>
+                <a:latin typeface="맑은 고딕"/>
+                <a:ea typeface="맑은 고딕"/>
+              </a:rPr>
+              <a:t> 구현 결정과 미정 정책을 섞지 않았는가?</a:t>
+            </a:r>
+          </a:p>
+          <a:p>
+            <a:pPr lvl="2" marL="723900" indent="-368300">
+              <a:spcBef>
+                <a:spcPts val="300"/>
+              </a:spcBef>
+              <a:spcAft>
+                <a:spcPts val="300"/>
+              </a:spcAft>
+              <a:buSzPct val="90000"/>
+              <a:buFont typeface="Wingdings" pitchFamily="2" charset="2"/>
+              <a:buChar char=""/>
+            </a:pPr>
+            <a:r>
+              <a:rPr sz="1400" b="1">
+                <a:solidFill>
+                  <a:srgbClr val="000000"/>
+                </a:solidFill>
+                <a:latin typeface="맑은 고딕"/>
+                <a:ea typeface="맑은 고딕"/>
+              </a:rPr>
               <a:t>결과물</a:t>
             </a:r>
           </a:p>
@@ -28418,16 +28967,6 @@
               <a:buNone/>
             </a:pPr>
             <a:r>
-              <a:rPr sz="1200" b="1">
-                <a:solidFill>
-                  <a:srgbClr val="000000"/>
-                </a:solidFill>
-                <a:latin typeface="맑은 고딕"/>
-                <a:ea typeface="맑은 고딕"/>
-              </a:rPr>
-              <a:t>도메인 모델의 정적 관점을 담은 최종 MD</a:t>
-            </a:r>
-            <a:r>
               <a:rPr sz="1200" b="0">
                 <a:solidFill>
                   <a:srgbClr val="000000"/>
@@ -28435,7 +28974,7 @@
                 <a:latin typeface="맑은 고딕"/>
                 <a:ea typeface="맑은 고딕"/>
               </a:rPr>
-              <a:t>를 저장소의 </a:t>
+              <a:t>주문한다-정적모델.md</a:t>
             </a:r>
             <a:r>
               <a:rPr sz="1200" b="0">
@@ -28445,17 +28984,57 @@
                 <a:latin typeface="맑은 고딕"/>
                 <a:ea typeface="맑은 고딕"/>
               </a:rPr>
+              <a:t> —</a:t>
+            </a:r>
+            <a:r>
+              <a:rPr sz="1000" b="0">
+                <a:solidFill>
+                  <a:srgbClr val="000000"/>
+                </a:solidFill>
+                <a:latin typeface="맑은 고딕"/>
+                <a:ea typeface="맑은 고딕"/>
+              </a:rPr>
+              <a:t> 도메인 모델의 정적 관점을 담아 저장소의 </a:t>
+            </a:r>
+            <a:r>
+              <a:rPr sz="1000" b="0">
+                <a:solidFill>
+                  <a:srgbClr val="000000"/>
+                </a:solidFill>
+                <a:latin typeface="맑은 고딕"/>
+                <a:ea typeface="맑은 고딕"/>
+              </a:rPr>
               <a:t>docs</a:t>
             </a:r>
             <a:r>
-              <a:rPr sz="1200" b="0">
-                <a:solidFill>
-                  <a:srgbClr val="000000"/>
-                </a:solidFill>
-                <a:latin typeface="맑은 고딕"/>
-                <a:ea typeface="맑은 고딕"/>
-              </a:rPr>
-              <a:t>에 두고 커밋한다. 실습 5에 요구사항 정의서와 함께 명시적으로 첨부한다.</a:t>
+              <a:rPr sz="1000" b="0">
+                <a:solidFill>
+                  <a:srgbClr val="000000"/>
+                </a:solidFill>
+                <a:latin typeface="맑은 고딕"/>
+                <a:ea typeface="맑은 고딕"/>
+              </a:rPr>
+              <a:t>에 두고 커밋한다. </a:t>
+            </a:r>
+            <a:r>
+              <a:rPr sz="1000" b="1">
+                <a:solidFill>
+                  <a:srgbClr val="000000"/>
+                </a:solidFill>
+                <a:latin typeface="맑은 고딕"/>
+                <a:ea typeface="맑은 고딕"/>
+              </a:rPr>
+              <a:t>실습 5의 투입물</a:t>
+            </a:r>
+            <a:r>
+              <a:rPr sz="1000" b="0">
+                <a:solidFill>
+                  <a:srgbClr val="000000"/>
+                </a:solidFill>
+                <a:latin typeface="맑은 고딕"/>
+                <a:ea typeface="맑은 고딕"/>
+              </a:rPr>
+              <a:t>이며 요구사항 정의서와 함께 첨부한다</a:t>
             </a:r>
           </a:p>
         </p:txBody>

--- a/courses/ai-native/sessions/s04.pptx
+++ b/courses/ai-native/sessions/s04.pptx
@@ -2919,7 +2919,7 @@
             <a:pPr lvl="0"/>
             <a:r>
               <a:rPr lang="ko-KR" sz="1200"/>
-              <a:t>용어 네 개를 독립된 산출물·필수 단계로 나누지 않는다. 한 모델을 여러 그림과 파일로 표현할 수 있다.</a:t>
+              <a:t>용어 4개를 독립된 산출물·필수 단계로 나누지 않는다. 한 모델을 여러 그림과 파일로 표현할 수 있다.</a:t>
             </a:r>
           </a:p>
         </p:txBody>
@@ -5064,7 +5064,7 @@
                       </a:r>
                     </a:p>
                   </a:txBody>
-                  <a:tcPr marL="6750" marR="6750" marT="6750" marB="0" anchor="ctr">
+                  <a:tcPr marL="6750" marR="6750" marT="6750" marB="6750" anchor="ctr">
                     <a:lnL>
                       <a:noFill/>
                     </a:lnL>
@@ -5126,7 +5126,7 @@
                       </a:r>
                     </a:p>
                   </a:txBody>
-                  <a:tcPr marL="6750" marR="6750" marT="6750" marB="0" anchor="ctr">
+                  <a:tcPr marL="6750" marR="6750" marT="6750" marB="6750" anchor="ctr">
                     <a:lnL w="9525" cap="flat" cmpd="sng" algn="ctr">
                       <a:solidFill>
                         <a:schemeClr val="bg1">
@@ -5196,7 +5196,7 @@
                       </a:r>
                     </a:p>
                   </a:txBody>
-                  <a:tcPr marL="6750" marR="6750" marT="6750" marB="0" anchor="ctr">
+                  <a:tcPr marL="6750" marR="6750" marT="6750" marB="6750" anchor="ctr">
                     <a:lnL w="9525" cap="flat" cmpd="sng" algn="ctr">
                       <a:solidFill>
                         <a:schemeClr val="bg1">
@@ -5268,7 +5268,7 @@
                       </a:r>
                     </a:p>
                   </a:txBody>
-                  <a:tcPr marL="81005" marR="6750" marT="6750" marB="0" anchor="ctr">
+                  <a:tcPr marL="81005" marR="6750" marT="6750" marB="6750" anchor="ctr">
                     <a:lnL>
                       <a:noFill/>
                     </a:lnL>
@@ -5322,7 +5322,7 @@
                       </a:r>
                     </a:p>
                   </a:txBody>
-                  <a:tcPr marL="81005" marR="6750" marT="6750" marB="0" anchor="ctr">
+                  <a:tcPr marL="81005" marR="6750" marT="6750" marB="6750" anchor="ctr">
                     <a:lnL>
                       <a:noFill/>
                     </a:lnL>
@@ -5378,7 +5378,7 @@
                       </a:r>
                     </a:p>
                   </a:txBody>
-                  <a:tcPr marL="81005" marR="6750" marT="6750" marB="0" anchor="ctr">
+                  <a:tcPr marL="81005" marR="6750" marT="6750" marB="6750" anchor="ctr">
                     <a:lnL>
                       <a:noFill/>
                     </a:lnL>
@@ -5436,7 +5436,7 @@
                       </a:r>
                     </a:p>
                   </a:txBody>
-                  <a:tcPr marL="81005" marR="6750" marT="6750" marB="0" anchor="ctr">
+                  <a:tcPr marL="81005" marR="6750" marT="6750" marB="6750" anchor="ctr">
                     <a:lnL>
                       <a:noFill/>
                     </a:lnL>
@@ -5490,7 +5490,7 @@
                       </a:r>
                     </a:p>
                   </a:txBody>
-                  <a:tcPr marL="81005" marR="6750" marT="6750" marB="0" anchor="ctr">
+                  <a:tcPr marL="81005" marR="6750" marT="6750" marB="6750" anchor="ctr">
                     <a:lnL>
                       <a:noFill/>
                     </a:lnL>
@@ -5546,7 +5546,7 @@
                       </a:r>
                     </a:p>
                   </a:txBody>
-                  <a:tcPr marL="81005" marR="6750" marT="6750" marB="0" anchor="ctr">
+                  <a:tcPr marL="81005" marR="6750" marT="6750" marB="6750" anchor="ctr">
                     <a:lnL>
                       <a:noFill/>
                     </a:lnL>
@@ -5604,7 +5604,7 @@
                       </a:r>
                     </a:p>
                   </a:txBody>
-                  <a:tcPr marL="81005" marR="6750" marT="6750" marB="0" anchor="ctr">
+                  <a:tcPr marL="81005" marR="6750" marT="6750" marB="6750" anchor="ctr">
                     <a:lnL>
                       <a:noFill/>
                     </a:lnL>
@@ -5658,7 +5658,7 @@
                       </a:r>
                     </a:p>
                   </a:txBody>
-                  <a:tcPr marL="81005" marR="6750" marT="6750" marB="0" anchor="ctr">
+                  <a:tcPr marL="81005" marR="6750" marT="6750" marB="6750" anchor="ctr">
                     <a:lnL>
                       <a:noFill/>
                     </a:lnL>
@@ -5714,7 +5714,7 @@
                       </a:r>
                     </a:p>
                   </a:txBody>
-                  <a:tcPr marL="81005" marR="6750" marT="6750" marB="0" anchor="ctr">
+                  <a:tcPr marL="81005" marR="6750" marT="6750" marB="6750" anchor="ctr">
                     <a:lnL>
                       <a:noFill/>
                     </a:lnL>
@@ -5772,7 +5772,7 @@
                       </a:r>
                     </a:p>
                   </a:txBody>
-                  <a:tcPr marL="81005" marR="6750" marT="6750" marB="0" anchor="ctr">
+                  <a:tcPr marL="81005" marR="6750" marT="6750" marB="6750" anchor="ctr">
                     <a:lnL>
                       <a:noFill/>
                     </a:lnL>
@@ -5826,7 +5826,7 @@
                       </a:r>
                     </a:p>
                   </a:txBody>
-                  <a:tcPr marL="81005" marR="6750" marT="6750" marB="0" anchor="ctr">
+                  <a:tcPr marL="81005" marR="6750" marT="6750" marB="6750" anchor="ctr">
                     <a:lnL>
                       <a:noFill/>
                     </a:lnL>
@@ -5882,7 +5882,7 @@
                       </a:r>
                     </a:p>
                   </a:txBody>
-                  <a:tcPr marL="81005" marR="6750" marT="6750" marB="0" anchor="ctr">
+                  <a:tcPr marL="81005" marR="6750" marT="6750" marB="6750" anchor="ctr">
                     <a:lnL>
                       <a:noFill/>
                     </a:lnL>
@@ -5940,7 +5940,7 @@
                       </a:r>
                     </a:p>
                   </a:txBody>
-                  <a:tcPr marL="81005" marR="6750" marT="6750" marB="0" anchor="ctr">
+                  <a:tcPr marL="81005" marR="6750" marT="6750" marB="6750" anchor="ctr">
                     <a:lnL>
                       <a:noFill/>
                     </a:lnL>
@@ -5994,7 +5994,7 @@
                       </a:r>
                     </a:p>
                   </a:txBody>
-                  <a:tcPr marL="81005" marR="6750" marT="6750" marB="0" anchor="ctr">
+                  <a:tcPr marL="81005" marR="6750" marT="6750" marB="6750" anchor="ctr">
                     <a:lnL>
                       <a:noFill/>
                     </a:lnL>
@@ -6050,7 +6050,7 @@
                       </a:r>
                     </a:p>
                   </a:txBody>
-                  <a:tcPr marL="81005" marR="6750" marT="6750" marB="0" anchor="ctr">
+                  <a:tcPr marL="81005" marR="6750" marT="6750" marB="6750" anchor="ctr">
                     <a:lnL>
                       <a:noFill/>
                     </a:lnL>
@@ -6108,7 +6108,7 @@
                       </a:r>
                     </a:p>
                   </a:txBody>
-                  <a:tcPr marL="81005" marR="6750" marT="6750" marB="0" anchor="ctr">
+                  <a:tcPr marL="81005" marR="6750" marT="6750" marB="6750" anchor="ctr">
                     <a:lnL>
                       <a:noFill/>
                     </a:lnL>
@@ -6162,7 +6162,7 @@
                       </a:r>
                     </a:p>
                   </a:txBody>
-                  <a:tcPr marL="81005" marR="6750" marT="6750" marB="0" anchor="ctr">
+                  <a:tcPr marL="81005" marR="6750" marT="6750" marB="6750" anchor="ctr">
                     <a:lnL>
                       <a:noFill/>
                     </a:lnL>
@@ -6218,7 +6218,7 @@
                       </a:r>
                     </a:p>
                   </a:txBody>
-                  <a:tcPr marL="81005" marR="6750" marT="6750" marB="0" anchor="ctr">
+                  <a:tcPr marL="81005" marR="6750" marT="6750" marB="6750" anchor="ctr">
                     <a:lnL>
                       <a:noFill/>
                     </a:lnL>
@@ -6836,7 +6836,7 @@
                       </a:r>
                     </a:p>
                   </a:txBody>
-                  <a:tcPr marL="6750" marR="6750" marT="6750" marB="0" anchor="ctr">
+                  <a:tcPr marL="6750" marR="6750" marT="6750" marB="6750" anchor="ctr">
                     <a:lnL>
                       <a:noFill/>
                     </a:lnL>
@@ -6898,7 +6898,7 @@
                       </a:r>
                     </a:p>
                   </a:txBody>
-                  <a:tcPr marL="6750" marR="6750" marT="6750" marB="0" anchor="ctr">
+                  <a:tcPr marL="6750" marR="6750" marT="6750" marB="6750" anchor="ctr">
                     <a:lnL w="9525" cap="flat" cmpd="sng" algn="ctr">
                       <a:solidFill>
                         <a:schemeClr val="bg1">
@@ -6968,7 +6968,7 @@
                       </a:r>
                     </a:p>
                   </a:txBody>
-                  <a:tcPr marL="6750" marR="6750" marT="6750" marB="0" anchor="ctr">
+                  <a:tcPr marL="6750" marR="6750" marT="6750" marB="6750" anchor="ctr">
                     <a:lnL w="9525" cap="flat" cmpd="sng" algn="ctr">
                       <a:solidFill>
                         <a:schemeClr val="bg1">
@@ -7038,7 +7038,7 @@
                       </a:r>
                     </a:p>
                   </a:txBody>
-                  <a:tcPr marL="6750" marR="6750" marT="6750" marB="0" anchor="ctr">
+                  <a:tcPr marL="6750" marR="6750" marT="6750" marB="6750" anchor="ctr">
                     <a:lnL w="9525" cap="flat" cmpd="sng" algn="ctr">
                       <a:solidFill>
                         <a:schemeClr val="bg1">
@@ -7110,7 +7110,7 @@
                       </a:r>
                     </a:p>
                   </a:txBody>
-                  <a:tcPr marL="81005" marR="6750" marT="6750" marB="0" anchor="ctr">
+                  <a:tcPr marL="81005" marR="6750" marT="6750" marB="6750" anchor="ctr">
                     <a:lnL>
                       <a:noFill/>
                     </a:lnL>
@@ -7164,7 +7164,7 @@
                       </a:r>
                     </a:p>
                   </a:txBody>
-                  <a:tcPr marL="81005" marR="6750" marT="6750" marB="0" anchor="ctr">
+                  <a:tcPr marL="81005" marR="6750" marT="6750" marB="6750" anchor="ctr">
                     <a:lnL>
                       <a:noFill/>
                     </a:lnL>
@@ -7220,7 +7220,7 @@
                       </a:r>
                     </a:p>
                   </a:txBody>
-                  <a:tcPr marL="81005" marR="6750" marT="6750" marB="0" anchor="ctr">
+                  <a:tcPr marL="81005" marR="6750" marT="6750" marB="6750" anchor="ctr">
                     <a:lnL>
                       <a:noFill/>
                     </a:lnL>
@@ -7276,7 +7276,7 @@
                       </a:r>
                     </a:p>
                   </a:txBody>
-                  <a:tcPr marL="81005" marR="6750" marT="6750" marB="0" anchor="ctr">
+                  <a:tcPr marL="81005" marR="6750" marT="6750" marB="6750" anchor="ctr">
                     <a:lnL>
                       <a:noFill/>
                     </a:lnL>
@@ -7334,7 +7334,7 @@
                       </a:r>
                     </a:p>
                   </a:txBody>
-                  <a:tcPr marL="81005" marR="6750" marT="6750" marB="0" anchor="ctr">
+                  <a:tcPr marL="81005" marR="6750" marT="6750" marB="6750" anchor="ctr">
                     <a:lnL>
                       <a:noFill/>
                     </a:lnL>
@@ -7388,7 +7388,7 @@
                       </a:r>
                     </a:p>
                   </a:txBody>
-                  <a:tcPr marL="81005" marR="6750" marT="6750" marB="0" anchor="ctr">
+                  <a:tcPr marL="81005" marR="6750" marT="6750" marB="6750" anchor="ctr">
                     <a:lnL>
                       <a:noFill/>
                     </a:lnL>
@@ -7444,7 +7444,7 @@
                       </a:r>
                     </a:p>
                   </a:txBody>
-                  <a:tcPr marL="81005" marR="6750" marT="6750" marB="0" anchor="ctr">
+                  <a:tcPr marL="81005" marR="6750" marT="6750" marB="6750" anchor="ctr">
                     <a:lnL>
                       <a:noFill/>
                     </a:lnL>
@@ -7500,7 +7500,7 @@
                       </a:r>
                     </a:p>
                   </a:txBody>
-                  <a:tcPr marL="81005" marR="6750" marT="6750" marB="0" anchor="ctr">
+                  <a:tcPr marL="81005" marR="6750" marT="6750" marB="6750" anchor="ctr">
                     <a:lnL>
                       <a:noFill/>
                     </a:lnL>
@@ -9097,7 +9097,7 @@
                       </a:r>
                     </a:p>
                   </a:txBody>
-                  <a:tcPr marL="6750" marR="6750" marT="6750" marB="0" anchor="ctr">
+                  <a:tcPr marL="6750" marR="6750" marT="6750" marB="6750" anchor="ctr">
                     <a:lnL>
                       <a:noFill/>
                     </a:lnL>
@@ -9159,7 +9159,7 @@
                       </a:r>
                     </a:p>
                   </a:txBody>
-                  <a:tcPr marL="6750" marR="6750" marT="6750" marB="0" anchor="ctr">
+                  <a:tcPr marL="6750" marR="6750" marT="6750" marB="6750" anchor="ctr">
                     <a:lnL w="9525" cap="flat" cmpd="sng" algn="ctr">
                       <a:solidFill>
                         <a:schemeClr val="bg1">
@@ -9229,7 +9229,7 @@
                       </a:r>
                     </a:p>
                   </a:txBody>
-                  <a:tcPr marL="6750" marR="6750" marT="6750" marB="0" anchor="ctr">
+                  <a:tcPr marL="6750" marR="6750" marT="6750" marB="6750" anchor="ctr">
                     <a:lnL w="9525" cap="flat" cmpd="sng" algn="ctr">
                       <a:solidFill>
                         <a:schemeClr val="bg1">
@@ -9301,7 +9301,7 @@
                       </a:r>
                     </a:p>
                   </a:txBody>
-                  <a:tcPr marL="81005" marR="6750" marT="6750" marB="0" anchor="ctr">
+                  <a:tcPr marL="81005" marR="6750" marT="6750" marB="6750" anchor="ctr">
                     <a:lnL>
                       <a:noFill/>
                     </a:lnL>
@@ -9355,7 +9355,7 @@
                       </a:r>
                     </a:p>
                   </a:txBody>
-                  <a:tcPr marL="81005" marR="6750" marT="6750" marB="0" anchor="ctr">
+                  <a:tcPr marL="81005" marR="6750" marT="6750" marB="6750" anchor="ctr">
                     <a:lnL>
                       <a:noFill/>
                     </a:lnL>
@@ -9411,7 +9411,7 @@
                       </a:r>
                     </a:p>
                   </a:txBody>
-                  <a:tcPr marL="81005" marR="6750" marT="6750" marB="0" anchor="ctr">
+                  <a:tcPr marL="81005" marR="6750" marT="6750" marB="6750" anchor="ctr">
                     <a:lnL>
                       <a:noFill/>
                     </a:lnL>
@@ -9469,7 +9469,7 @@
                       </a:r>
                     </a:p>
                   </a:txBody>
-                  <a:tcPr marL="81005" marR="6750" marT="6750" marB="0" anchor="ctr">
+                  <a:tcPr marL="81005" marR="6750" marT="6750" marB="6750" anchor="ctr">
                     <a:lnL>
                       <a:noFill/>
                     </a:lnL>
@@ -9523,7 +9523,7 @@
                       </a:r>
                     </a:p>
                   </a:txBody>
-                  <a:tcPr marL="81005" marR="6750" marT="6750" marB="0" anchor="ctr">
+                  <a:tcPr marL="81005" marR="6750" marT="6750" marB="6750" anchor="ctr">
                     <a:lnL>
                       <a:noFill/>
                     </a:lnL>
@@ -9579,7 +9579,7 @@
                       </a:r>
                     </a:p>
                   </a:txBody>
-                  <a:tcPr marL="81005" marR="6750" marT="6750" marB="0" anchor="ctr">
+                  <a:tcPr marL="81005" marR="6750" marT="6750" marB="6750" anchor="ctr">
                     <a:lnL>
                       <a:noFill/>
                     </a:lnL>
@@ -9637,7 +9637,7 @@
                       </a:r>
                     </a:p>
                   </a:txBody>
-                  <a:tcPr marL="81005" marR="6750" marT="6750" marB="0" anchor="ctr">
+                  <a:tcPr marL="81005" marR="6750" marT="6750" marB="6750" anchor="ctr">
                     <a:lnL>
                       <a:noFill/>
                     </a:lnL>
@@ -9691,7 +9691,7 @@
                       </a:r>
                     </a:p>
                   </a:txBody>
-                  <a:tcPr marL="81005" marR="6750" marT="6750" marB="0" anchor="ctr">
+                  <a:tcPr marL="81005" marR="6750" marT="6750" marB="6750" anchor="ctr">
                     <a:lnL>
                       <a:noFill/>
                     </a:lnL>
@@ -9747,7 +9747,7 @@
                       </a:r>
                     </a:p>
                   </a:txBody>
-                  <a:tcPr marL="81005" marR="6750" marT="6750" marB="0" anchor="ctr">
+                  <a:tcPr marL="81005" marR="6750" marT="6750" marB="6750" anchor="ctr">
                     <a:lnL>
                       <a:noFill/>
                     </a:lnL>
@@ -9805,7 +9805,7 @@
                       </a:r>
                     </a:p>
                   </a:txBody>
-                  <a:tcPr marL="81005" marR="6750" marT="6750" marB="0" anchor="ctr">
+                  <a:tcPr marL="81005" marR="6750" marT="6750" marB="6750" anchor="ctr">
                     <a:lnL>
                       <a:noFill/>
                     </a:lnL>
@@ -9859,7 +9859,7 @@
                       </a:r>
                     </a:p>
                   </a:txBody>
-                  <a:tcPr marL="81005" marR="6750" marT="6750" marB="0" anchor="ctr">
+                  <a:tcPr marL="81005" marR="6750" marT="6750" marB="6750" anchor="ctr">
                     <a:lnL>
                       <a:noFill/>
                     </a:lnL>
@@ -9915,7 +9915,7 @@
                       </a:r>
                     </a:p>
                   </a:txBody>
-                  <a:tcPr marL="81005" marR="6750" marT="6750" marB="0" anchor="ctr">
+                  <a:tcPr marL="81005" marR="6750" marT="6750" marB="6750" anchor="ctr">
                     <a:lnL>
                       <a:noFill/>
                     </a:lnL>
@@ -9973,7 +9973,7 @@
                       </a:r>
                     </a:p>
                   </a:txBody>
-                  <a:tcPr marL="81005" marR="6750" marT="6750" marB="0" anchor="ctr">
+                  <a:tcPr marL="81005" marR="6750" marT="6750" marB="6750" anchor="ctr">
                     <a:lnL>
                       <a:noFill/>
                     </a:lnL>
@@ -10027,7 +10027,7 @@
                       </a:r>
                     </a:p>
                   </a:txBody>
-                  <a:tcPr marL="81005" marR="6750" marT="6750" marB="0" anchor="ctr">
+                  <a:tcPr marL="81005" marR="6750" marT="6750" marB="6750" anchor="ctr">
                     <a:lnL>
                       <a:noFill/>
                     </a:lnL>
@@ -10083,7 +10083,7 @@
                       </a:r>
                     </a:p>
                   </a:txBody>
-                  <a:tcPr marL="81005" marR="6750" marT="6750" marB="0" anchor="ctr">
+                  <a:tcPr marL="81005" marR="6750" marT="6750" marB="6750" anchor="ctr">
                     <a:lnL>
                       <a:noFill/>
                     </a:lnL>
@@ -10141,7 +10141,7 @@
                       </a:r>
                     </a:p>
                   </a:txBody>
-                  <a:tcPr marL="81005" marR="6750" marT="6750" marB="0" anchor="ctr">
+                  <a:tcPr marL="81005" marR="6750" marT="6750" marB="6750" anchor="ctr">
                     <a:lnL>
                       <a:noFill/>
                     </a:lnL>
@@ -10195,7 +10195,7 @@
                       </a:r>
                     </a:p>
                   </a:txBody>
-                  <a:tcPr marL="81005" marR="6750" marT="6750" marB="0" anchor="ctr">
+                  <a:tcPr marL="81005" marR="6750" marT="6750" marB="6750" anchor="ctr">
                     <a:lnL>
                       <a:noFill/>
                     </a:lnL>
@@ -10251,7 +10251,7 @@
                       </a:r>
                     </a:p>
                   </a:txBody>
-                  <a:tcPr marL="81005" marR="6750" marT="6750" marB="0" anchor="ctr">
+                  <a:tcPr marL="81005" marR="6750" marT="6750" marB="6750" anchor="ctr">
                     <a:lnL>
                       <a:noFill/>
                     </a:lnL>
@@ -11351,7 +11351,7 @@
                       </a:r>
                     </a:p>
                   </a:txBody>
-                  <a:tcPr marL="6750" marR="6750" marT="6750" marB="0" anchor="ctr">
+                  <a:tcPr marL="6750" marR="6750" marT="6750" marB="6750" anchor="ctr">
                     <a:lnL>
                       <a:noFill/>
                     </a:lnL>
@@ -11413,7 +11413,7 @@
                       </a:r>
                     </a:p>
                   </a:txBody>
-                  <a:tcPr marL="6750" marR="6750" marT="6750" marB="0" anchor="ctr">
+                  <a:tcPr marL="6750" marR="6750" marT="6750" marB="6750" anchor="ctr">
                     <a:lnL w="9525" cap="flat" cmpd="sng" algn="ctr">
                       <a:solidFill>
                         <a:schemeClr val="bg1">
@@ -11483,7 +11483,7 @@
                       </a:r>
                     </a:p>
                   </a:txBody>
-                  <a:tcPr marL="6750" marR="6750" marT="6750" marB="0" anchor="ctr">
+                  <a:tcPr marL="6750" marR="6750" marT="6750" marB="6750" anchor="ctr">
                     <a:lnL w="9525" cap="flat" cmpd="sng" algn="ctr">
                       <a:solidFill>
                         <a:schemeClr val="bg1">
@@ -11555,7 +11555,7 @@
                       </a:r>
                     </a:p>
                   </a:txBody>
-                  <a:tcPr marL="81005" marR="6750" marT="6750" marB="0" anchor="ctr">
+                  <a:tcPr marL="81005" marR="6750" marT="6750" marB="6750" anchor="ctr">
                     <a:lnL>
                       <a:noFill/>
                     </a:lnL>
@@ -11609,7 +11609,7 @@
                       </a:r>
                     </a:p>
                   </a:txBody>
-                  <a:tcPr marL="81005" marR="6750" marT="6750" marB="0" anchor="ctr">
+                  <a:tcPr marL="81005" marR="6750" marT="6750" marB="6750" anchor="ctr">
                     <a:lnL>
                       <a:noFill/>
                     </a:lnL>
@@ -11665,7 +11665,7 @@
                       </a:r>
                     </a:p>
                   </a:txBody>
-                  <a:tcPr marL="81005" marR="6750" marT="6750" marB="0" anchor="ctr">
+                  <a:tcPr marL="81005" marR="6750" marT="6750" marB="6750" anchor="ctr">
                     <a:lnL>
                       <a:noFill/>
                     </a:lnL>
@@ -11723,7 +11723,7 @@
                       </a:r>
                     </a:p>
                   </a:txBody>
-                  <a:tcPr marL="81005" marR="6750" marT="6750" marB="0" anchor="ctr">
+                  <a:tcPr marL="81005" marR="6750" marT="6750" marB="6750" anchor="ctr">
                     <a:lnL>
                       <a:noFill/>
                     </a:lnL>
@@ -11777,7 +11777,7 @@
                       </a:r>
                     </a:p>
                   </a:txBody>
-                  <a:tcPr marL="81005" marR="6750" marT="6750" marB="0" anchor="ctr">
+                  <a:tcPr marL="81005" marR="6750" marT="6750" marB="6750" anchor="ctr">
                     <a:lnL>
                       <a:noFill/>
                     </a:lnL>
@@ -11833,7 +11833,7 @@
                       </a:r>
                     </a:p>
                   </a:txBody>
-                  <a:tcPr marL="81005" marR="6750" marT="6750" marB="0" anchor="ctr">
+                  <a:tcPr marL="81005" marR="6750" marT="6750" marB="6750" anchor="ctr">
                     <a:lnL>
                       <a:noFill/>
                     </a:lnL>
@@ -12453,7 +12453,7 @@
                       </a:r>
                     </a:p>
                   </a:txBody>
-                  <a:tcPr marL="6750" marR="6750" marT="6750" marB="0" anchor="ctr">
+                  <a:tcPr marL="6750" marR="6750" marT="6750" marB="6750" anchor="ctr">
                     <a:lnL>
                       <a:noFill/>
                     </a:lnL>
@@ -12515,7 +12515,7 @@
                       </a:r>
                     </a:p>
                   </a:txBody>
-                  <a:tcPr marL="6750" marR="6750" marT="6750" marB="0" anchor="ctr">
+                  <a:tcPr marL="6750" marR="6750" marT="6750" marB="6750" anchor="ctr">
                     <a:lnL w="9525" cap="flat" cmpd="sng" algn="ctr">
                       <a:solidFill>
                         <a:schemeClr val="bg1">
@@ -12585,7 +12585,7 @@
                       </a:r>
                     </a:p>
                   </a:txBody>
-                  <a:tcPr marL="6750" marR="6750" marT="6750" marB="0" anchor="ctr">
+                  <a:tcPr marL="6750" marR="6750" marT="6750" marB="6750" anchor="ctr">
                     <a:lnL w="9525" cap="flat" cmpd="sng" algn="ctr">
                       <a:solidFill>
                         <a:schemeClr val="bg1">
@@ -12657,7 +12657,7 @@
                       </a:r>
                     </a:p>
                   </a:txBody>
-                  <a:tcPr marL="81005" marR="6750" marT="6750" marB="0" anchor="ctr">
+                  <a:tcPr marL="81005" marR="6750" marT="6750" marB="6750" anchor="ctr">
                     <a:lnL>
                       <a:noFill/>
                     </a:lnL>
@@ -12711,7 +12711,7 @@
                       </a:r>
                     </a:p>
                   </a:txBody>
-                  <a:tcPr marL="81005" marR="6750" marT="6750" marB="0" anchor="ctr">
+                  <a:tcPr marL="81005" marR="6750" marT="6750" marB="6750" anchor="ctr">
                     <a:lnL>
                       <a:noFill/>
                     </a:lnL>
@@ -12767,7 +12767,7 @@
                       </a:r>
                     </a:p>
                   </a:txBody>
-                  <a:tcPr marL="81005" marR="6750" marT="6750" marB="0" anchor="ctr">
+                  <a:tcPr marL="81005" marR="6750" marT="6750" marB="6750" anchor="ctr">
                     <a:lnL>
                       <a:noFill/>
                     </a:lnL>
@@ -12825,7 +12825,7 @@
                       </a:r>
                     </a:p>
                   </a:txBody>
-                  <a:tcPr marL="81005" marR="6750" marT="6750" marB="0" anchor="ctr">
+                  <a:tcPr marL="81005" marR="6750" marT="6750" marB="6750" anchor="ctr">
                     <a:lnL>
                       <a:noFill/>
                     </a:lnL>
@@ -12879,7 +12879,7 @@
                       </a:r>
                     </a:p>
                   </a:txBody>
-                  <a:tcPr marL="81005" marR="6750" marT="6750" marB="0" anchor="ctr">
+                  <a:tcPr marL="81005" marR="6750" marT="6750" marB="6750" anchor="ctr">
                     <a:lnL>
                       <a:noFill/>
                     </a:lnL>
@@ -12935,7 +12935,7 @@
                       </a:r>
                     </a:p>
                   </a:txBody>
-                  <a:tcPr marL="81005" marR="6750" marT="6750" marB="0" anchor="ctr">
+                  <a:tcPr marL="81005" marR="6750" marT="6750" marB="6750" anchor="ctr">
                     <a:lnL>
                       <a:noFill/>
                     </a:lnL>
@@ -12993,7 +12993,7 @@
                       </a:r>
                     </a:p>
                   </a:txBody>
-                  <a:tcPr marL="81005" marR="6750" marT="6750" marB="0" anchor="ctr">
+                  <a:tcPr marL="81005" marR="6750" marT="6750" marB="6750" anchor="ctr">
                     <a:lnL>
                       <a:noFill/>
                     </a:lnL>
@@ -13047,7 +13047,7 @@
                       </a:r>
                     </a:p>
                   </a:txBody>
-                  <a:tcPr marL="81005" marR="6750" marT="6750" marB="0" anchor="ctr">
+                  <a:tcPr marL="81005" marR="6750" marT="6750" marB="6750" anchor="ctr">
                     <a:lnL>
                       <a:noFill/>
                     </a:lnL>
@@ -13103,7 +13103,7 @@
                       </a:r>
                     </a:p>
                   </a:txBody>
-                  <a:tcPr marL="81005" marR="6750" marT="6750" marB="0" anchor="ctr">
+                  <a:tcPr marL="81005" marR="6750" marT="6750" marB="6750" anchor="ctr">
                     <a:lnL>
                       <a:noFill/>
                     </a:lnL>
@@ -13161,7 +13161,7 @@
                       </a:r>
                     </a:p>
                   </a:txBody>
-                  <a:tcPr marL="81005" marR="6750" marT="6750" marB="0" anchor="ctr">
+                  <a:tcPr marL="81005" marR="6750" marT="6750" marB="6750" anchor="ctr">
                     <a:lnL>
                       <a:noFill/>
                     </a:lnL>
@@ -13215,7 +13215,7 @@
                       </a:r>
                     </a:p>
                   </a:txBody>
-                  <a:tcPr marL="81005" marR="6750" marT="6750" marB="0" anchor="ctr">
+                  <a:tcPr marL="81005" marR="6750" marT="6750" marB="6750" anchor="ctr">
                     <a:lnL>
                       <a:noFill/>
                     </a:lnL>
@@ -13271,7 +13271,7 @@
                       </a:r>
                     </a:p>
                   </a:txBody>
-                  <a:tcPr marL="81005" marR="6750" marT="6750" marB="0" anchor="ctr">
+                  <a:tcPr marL="81005" marR="6750" marT="6750" marB="6750" anchor="ctr">
                     <a:lnL>
                       <a:noFill/>
                     </a:lnL>
@@ -13329,7 +13329,7 @@
                       </a:r>
                     </a:p>
                   </a:txBody>
-                  <a:tcPr marL="81005" marR="6750" marT="6750" marB="0" anchor="ctr">
+                  <a:tcPr marL="81005" marR="6750" marT="6750" marB="6750" anchor="ctr">
                     <a:lnL>
                       <a:noFill/>
                     </a:lnL>
@@ -13383,7 +13383,7 @@
                       </a:r>
                     </a:p>
                   </a:txBody>
-                  <a:tcPr marL="81005" marR="6750" marT="6750" marB="0" anchor="ctr">
+                  <a:tcPr marL="81005" marR="6750" marT="6750" marB="6750" anchor="ctr">
                     <a:lnL>
                       <a:noFill/>
                     </a:lnL>
@@ -13439,7 +13439,7 @@
                       </a:r>
                     </a:p>
                   </a:txBody>
-                  <a:tcPr marL="81005" marR="6750" marT="6750" marB="0" anchor="ctr">
+                  <a:tcPr marL="81005" marR="6750" marT="6750" marB="6750" anchor="ctr">
                     <a:lnL>
                       <a:noFill/>
                     </a:lnL>
@@ -13497,7 +13497,7 @@
                       </a:r>
                     </a:p>
                   </a:txBody>
-                  <a:tcPr marL="81005" marR="6750" marT="6750" marB="0" anchor="ctr">
+                  <a:tcPr marL="81005" marR="6750" marT="6750" marB="6750" anchor="ctr">
                     <a:lnL>
                       <a:noFill/>
                     </a:lnL>
@@ -13551,7 +13551,7 @@
                       </a:r>
                     </a:p>
                   </a:txBody>
-                  <a:tcPr marL="81005" marR="6750" marT="6750" marB="0" anchor="ctr">
+                  <a:tcPr marL="81005" marR="6750" marT="6750" marB="6750" anchor="ctr">
                     <a:lnL>
                       <a:noFill/>
                     </a:lnL>
@@ -13607,7 +13607,7 @@
                       </a:r>
                     </a:p>
                   </a:txBody>
-                  <a:tcPr marL="81005" marR="6750" marT="6750" marB="0" anchor="ctr">
+                  <a:tcPr marL="81005" marR="6750" marT="6750" marB="6750" anchor="ctr">
                     <a:lnL>
                       <a:noFill/>
                     </a:lnL>
@@ -14689,7 +14689,7 @@
                       </a:r>
                     </a:p>
                   </a:txBody>
-                  <a:tcPr marL="6750" marR="6750" marT="6750" marB="0" anchor="ctr">
+                  <a:tcPr marL="6750" marR="6750" marT="6750" marB="6750" anchor="ctr">
                     <a:lnL>
                       <a:noFill/>
                     </a:lnL>
@@ -14751,7 +14751,7 @@
                       </a:r>
                     </a:p>
                   </a:txBody>
-                  <a:tcPr marL="6750" marR="6750" marT="6750" marB="0" anchor="ctr">
+                  <a:tcPr marL="6750" marR="6750" marT="6750" marB="6750" anchor="ctr">
                     <a:lnL w="9525" cap="flat" cmpd="sng" algn="ctr">
                       <a:solidFill>
                         <a:schemeClr val="bg1">
@@ -14821,7 +14821,7 @@
                       </a:r>
                     </a:p>
                   </a:txBody>
-                  <a:tcPr marL="6750" marR="6750" marT="6750" marB="0" anchor="ctr">
+                  <a:tcPr marL="6750" marR="6750" marT="6750" marB="6750" anchor="ctr">
                     <a:lnL w="9525" cap="flat" cmpd="sng" algn="ctr">
                       <a:solidFill>
                         <a:schemeClr val="bg1">
@@ -14893,7 +14893,7 @@
                       </a:r>
                     </a:p>
                   </a:txBody>
-                  <a:tcPr marL="81005" marR="6750" marT="6750" marB="0" anchor="ctr">
+                  <a:tcPr marL="81005" marR="6750" marT="6750" marB="6750" anchor="ctr">
                     <a:lnL>
                       <a:noFill/>
                     </a:lnL>
@@ -14947,7 +14947,7 @@
                       </a:r>
                     </a:p>
                   </a:txBody>
-                  <a:tcPr marL="81005" marR="6750" marT="6750" marB="0" anchor="ctr">
+                  <a:tcPr marL="81005" marR="6750" marT="6750" marB="6750" anchor="ctr">
                     <a:lnL>
                       <a:noFill/>
                     </a:lnL>
@@ -15003,7 +15003,7 @@
                       </a:r>
                     </a:p>
                   </a:txBody>
-                  <a:tcPr marL="81005" marR="6750" marT="6750" marB="0" anchor="ctr">
+                  <a:tcPr marL="81005" marR="6750" marT="6750" marB="6750" anchor="ctr">
                     <a:lnL>
                       <a:noFill/>
                     </a:lnL>
@@ -15061,7 +15061,7 @@
                       </a:r>
                     </a:p>
                   </a:txBody>
-                  <a:tcPr marL="81005" marR="6750" marT="6750" marB="0" anchor="ctr">
+                  <a:tcPr marL="81005" marR="6750" marT="6750" marB="6750" anchor="ctr">
                     <a:lnL>
                       <a:noFill/>
                     </a:lnL>
@@ -15115,7 +15115,7 @@
                       </a:r>
                     </a:p>
                   </a:txBody>
-                  <a:tcPr marL="81005" marR="6750" marT="6750" marB="0" anchor="ctr">
+                  <a:tcPr marL="81005" marR="6750" marT="6750" marB="6750" anchor="ctr">
                     <a:lnL>
                       <a:noFill/>
                     </a:lnL>
@@ -15171,7 +15171,7 @@
                       </a:r>
                     </a:p>
                   </a:txBody>
-                  <a:tcPr marL="81005" marR="6750" marT="6750" marB="0" anchor="ctr">
+                  <a:tcPr marL="81005" marR="6750" marT="6750" marB="6750" anchor="ctr">
                     <a:lnL>
                       <a:noFill/>
                     </a:lnL>
@@ -15229,7 +15229,7 @@
                       </a:r>
                     </a:p>
                   </a:txBody>
-                  <a:tcPr marL="81005" marR="6750" marT="6750" marB="0" anchor="ctr">
+                  <a:tcPr marL="81005" marR="6750" marT="6750" marB="6750" anchor="ctr">
                     <a:lnL>
                       <a:noFill/>
                     </a:lnL>
@@ -15283,7 +15283,7 @@
                       </a:r>
                     </a:p>
                   </a:txBody>
-                  <a:tcPr marL="81005" marR="6750" marT="6750" marB="0" anchor="ctr">
+                  <a:tcPr marL="81005" marR="6750" marT="6750" marB="6750" anchor="ctr">
                     <a:lnL>
                       <a:noFill/>
                     </a:lnL>
@@ -15339,7 +15339,7 @@
                       </a:r>
                     </a:p>
                   </a:txBody>
-                  <a:tcPr marL="81005" marR="6750" marT="6750" marB="0" anchor="ctr">
+                  <a:tcPr marL="81005" marR="6750" marT="6750" marB="6750" anchor="ctr">
                     <a:lnL>
                       <a:noFill/>
                     </a:lnL>
@@ -15397,7 +15397,7 @@
                       </a:r>
                     </a:p>
                   </a:txBody>
-                  <a:tcPr marL="81005" marR="6750" marT="6750" marB="0" anchor="ctr">
+                  <a:tcPr marL="81005" marR="6750" marT="6750" marB="6750" anchor="ctr">
                     <a:lnL>
                       <a:noFill/>
                     </a:lnL>
@@ -15451,7 +15451,7 @@
                       </a:r>
                     </a:p>
                   </a:txBody>
-                  <a:tcPr marL="81005" marR="6750" marT="6750" marB="0" anchor="ctr">
+                  <a:tcPr marL="81005" marR="6750" marT="6750" marB="6750" anchor="ctr">
                     <a:lnL>
                       <a:noFill/>
                     </a:lnL>
@@ -15507,7 +15507,7 @@
                       </a:r>
                     </a:p>
                   </a:txBody>
-                  <a:tcPr marL="81005" marR="6750" marT="6750" marB="0" anchor="ctr">
+                  <a:tcPr marL="81005" marR="6750" marT="6750" marB="6750" anchor="ctr">
                     <a:lnL>
                       <a:noFill/>
                     </a:lnL>
@@ -18131,7 +18131,7 @@
                       </a:r>
                     </a:p>
                   </a:txBody>
-                  <a:tcPr marL="6750" marR="6750" marT="6750" marB="0" anchor="ctr">
+                  <a:tcPr marL="6750" marR="6750" marT="6750" marB="6750" anchor="ctr">
                     <a:lnL>
                       <a:noFill/>
                     </a:lnL>
@@ -18193,7 +18193,7 @@
                       </a:r>
                     </a:p>
                   </a:txBody>
-                  <a:tcPr marL="6750" marR="6750" marT="6750" marB="0" anchor="ctr">
+                  <a:tcPr marL="6750" marR="6750" marT="6750" marB="6750" anchor="ctr">
                     <a:lnL w="9525" cap="flat" cmpd="sng" algn="ctr">
                       <a:solidFill>
                         <a:schemeClr val="bg1">
@@ -18263,7 +18263,7 @@
                       </a:r>
                     </a:p>
                   </a:txBody>
-                  <a:tcPr marL="6750" marR="6750" marT="6750" marB="0" anchor="ctr">
+                  <a:tcPr marL="6750" marR="6750" marT="6750" marB="6750" anchor="ctr">
                     <a:lnL w="9525" cap="flat" cmpd="sng" algn="ctr">
                       <a:solidFill>
                         <a:schemeClr val="bg1">
@@ -18335,7 +18335,7 @@
                       </a:r>
                     </a:p>
                   </a:txBody>
-                  <a:tcPr marL="81005" marR="6750" marT="6750" marB="0" anchor="ctr">
+                  <a:tcPr marL="81005" marR="6750" marT="6750" marB="6750" anchor="ctr">
                     <a:lnL>
                       <a:noFill/>
                     </a:lnL>
@@ -18389,7 +18389,7 @@
                       </a:r>
                     </a:p>
                   </a:txBody>
-                  <a:tcPr marL="81005" marR="6750" marT="6750" marB="0" anchor="ctr">
+                  <a:tcPr marL="81005" marR="6750" marT="6750" marB="6750" anchor="ctr">
                     <a:lnL>
                       <a:noFill/>
                     </a:lnL>
@@ -18445,7 +18445,7 @@
                       </a:r>
                     </a:p>
                   </a:txBody>
-                  <a:tcPr marL="81005" marR="6750" marT="6750" marB="0" anchor="ctr">
+                  <a:tcPr marL="81005" marR="6750" marT="6750" marB="6750" anchor="ctr">
                     <a:lnL>
                       <a:noFill/>
                     </a:lnL>
@@ -18503,7 +18503,7 @@
                       </a:r>
                     </a:p>
                   </a:txBody>
-                  <a:tcPr marL="81005" marR="6750" marT="6750" marB="0" anchor="ctr">
+                  <a:tcPr marL="81005" marR="6750" marT="6750" marB="6750" anchor="ctr">
                     <a:lnL>
                       <a:noFill/>
                     </a:lnL>
@@ -18557,7 +18557,7 @@
                       </a:r>
                     </a:p>
                   </a:txBody>
-                  <a:tcPr marL="81005" marR="6750" marT="6750" marB="0" anchor="ctr">
+                  <a:tcPr marL="81005" marR="6750" marT="6750" marB="6750" anchor="ctr">
                     <a:lnL>
                       <a:noFill/>
                     </a:lnL>
@@ -18613,7 +18613,7 @@
                       </a:r>
                     </a:p>
                   </a:txBody>
-                  <a:tcPr marL="81005" marR="6750" marT="6750" marB="0" anchor="ctr">
+                  <a:tcPr marL="81005" marR="6750" marT="6750" marB="6750" anchor="ctr">
                     <a:lnL>
                       <a:noFill/>
                     </a:lnL>
@@ -18671,7 +18671,7 @@
                       </a:r>
                     </a:p>
                   </a:txBody>
-                  <a:tcPr marL="81005" marR="6750" marT="6750" marB="0" anchor="ctr">
+                  <a:tcPr marL="81005" marR="6750" marT="6750" marB="6750" anchor="ctr">
                     <a:lnL>
                       <a:noFill/>
                     </a:lnL>
@@ -18725,7 +18725,7 @@
                       </a:r>
                     </a:p>
                   </a:txBody>
-                  <a:tcPr marL="81005" marR="6750" marT="6750" marB="0" anchor="ctr">
+                  <a:tcPr marL="81005" marR="6750" marT="6750" marB="6750" anchor="ctr">
                     <a:lnL>
                       <a:noFill/>
                     </a:lnL>
@@ -18781,7 +18781,7 @@
                       </a:r>
                     </a:p>
                   </a:txBody>
-                  <a:tcPr marL="81005" marR="6750" marT="6750" marB="0" anchor="ctr">
+                  <a:tcPr marL="81005" marR="6750" marT="6750" marB="6750" anchor="ctr">
                     <a:lnL>
                       <a:noFill/>
                     </a:lnL>
@@ -18839,7 +18839,7 @@
                       </a:r>
                     </a:p>
                   </a:txBody>
-                  <a:tcPr marL="81005" marR="6750" marT="6750" marB="0" anchor="ctr">
+                  <a:tcPr marL="81005" marR="6750" marT="6750" marB="6750" anchor="ctr">
                     <a:lnL>
                       <a:noFill/>
                     </a:lnL>
@@ -18893,7 +18893,7 @@
                       </a:r>
                     </a:p>
                   </a:txBody>
-                  <a:tcPr marL="81005" marR="6750" marT="6750" marB="0" anchor="ctr">
+                  <a:tcPr marL="81005" marR="6750" marT="6750" marB="6750" anchor="ctr">
                     <a:lnL>
                       <a:noFill/>
                     </a:lnL>
@@ -18949,7 +18949,7 @@
                       </a:r>
                     </a:p>
                   </a:txBody>
-                  <a:tcPr marL="81005" marR="6750" marT="6750" marB="0" anchor="ctr">
+                  <a:tcPr marL="81005" marR="6750" marT="6750" marB="6750" anchor="ctr">
                     <a:lnL>
                       <a:noFill/>
                     </a:lnL>
@@ -19007,7 +19007,7 @@
                       </a:r>
                     </a:p>
                   </a:txBody>
-                  <a:tcPr marL="81005" marR="6750" marT="6750" marB="0" anchor="ctr">
+                  <a:tcPr marL="81005" marR="6750" marT="6750" marB="6750" anchor="ctr">
                     <a:lnL>
                       <a:noFill/>
                     </a:lnL>
@@ -19061,7 +19061,7 @@
                       </a:r>
                     </a:p>
                   </a:txBody>
-                  <a:tcPr marL="81005" marR="6750" marT="6750" marB="0" anchor="ctr">
+                  <a:tcPr marL="81005" marR="6750" marT="6750" marB="6750" anchor="ctr">
                     <a:lnL>
                       <a:noFill/>
                     </a:lnL>
@@ -19117,7 +19117,7 @@
                       </a:r>
                     </a:p>
                   </a:txBody>
-                  <a:tcPr marL="81005" marR="6750" marT="6750" marB="0" anchor="ctr">
+                  <a:tcPr marL="81005" marR="6750" marT="6750" marB="6750" anchor="ctr">
                     <a:lnL>
                       <a:noFill/>
                     </a:lnL>
@@ -19704,7 +19704,7 @@
                       </a:r>
                     </a:p>
                   </a:txBody>
-                  <a:tcPr marL="6750" marR="6750" marT="6750" marB="0" anchor="ctr">
+                  <a:tcPr marL="6750" marR="6750" marT="6750" marB="6750" anchor="ctr">
                     <a:lnL>
                       <a:noFill/>
                     </a:lnL>
@@ -19766,7 +19766,7 @@
                       </a:r>
                     </a:p>
                   </a:txBody>
-                  <a:tcPr marL="6750" marR="6750" marT="6750" marB="0" anchor="ctr">
+                  <a:tcPr marL="6750" marR="6750" marT="6750" marB="6750" anchor="ctr">
                     <a:lnL w="9525" cap="flat" cmpd="sng" algn="ctr">
                       <a:solidFill>
                         <a:schemeClr val="bg1">
@@ -19836,7 +19836,7 @@
                       </a:r>
                     </a:p>
                   </a:txBody>
-                  <a:tcPr marL="6750" marR="6750" marT="6750" marB="0" anchor="ctr">
+                  <a:tcPr marL="6750" marR="6750" marT="6750" marB="6750" anchor="ctr">
                     <a:lnL w="9525" cap="flat" cmpd="sng" algn="ctr">
                       <a:solidFill>
                         <a:schemeClr val="bg1">
@@ -19908,7 +19908,7 @@
                       </a:r>
                     </a:p>
                   </a:txBody>
-                  <a:tcPr marL="81005" marR="6750" marT="6750" marB="0" anchor="ctr">
+                  <a:tcPr marL="81005" marR="6750" marT="6750" marB="6750" anchor="ctr">
                     <a:lnL>
                       <a:noFill/>
                     </a:lnL>
@@ -19962,7 +19962,7 @@
                       </a:r>
                     </a:p>
                   </a:txBody>
-                  <a:tcPr marL="81005" marR="6750" marT="6750" marB="0" anchor="ctr">
+                  <a:tcPr marL="81005" marR="6750" marT="6750" marB="6750" anchor="ctr">
                     <a:lnL>
                       <a:noFill/>
                     </a:lnL>
@@ -20018,7 +20018,7 @@
                       </a:r>
                     </a:p>
                   </a:txBody>
-                  <a:tcPr marL="81005" marR="6750" marT="6750" marB="0" anchor="ctr">
+                  <a:tcPr marL="81005" marR="6750" marT="6750" marB="6750" anchor="ctr">
                     <a:lnL>
                       <a:noFill/>
                     </a:lnL>
@@ -20076,7 +20076,7 @@
                       </a:r>
                     </a:p>
                   </a:txBody>
-                  <a:tcPr marL="81005" marR="6750" marT="6750" marB="0" anchor="ctr">
+                  <a:tcPr marL="81005" marR="6750" marT="6750" marB="6750" anchor="ctr">
                     <a:lnL>
                       <a:noFill/>
                     </a:lnL>
@@ -20130,7 +20130,7 @@
                       </a:r>
                     </a:p>
                   </a:txBody>
-                  <a:tcPr marL="81005" marR="6750" marT="6750" marB="0" anchor="ctr">
+                  <a:tcPr marL="81005" marR="6750" marT="6750" marB="6750" anchor="ctr">
                     <a:lnL>
                       <a:noFill/>
                     </a:lnL>
@@ -20186,7 +20186,7 @@
                       </a:r>
                     </a:p>
                   </a:txBody>
-                  <a:tcPr marL="81005" marR="6750" marT="6750" marB="0" anchor="ctr">
+                  <a:tcPr marL="81005" marR="6750" marT="6750" marB="6750" anchor="ctr">
                     <a:lnL>
                       <a:noFill/>
                     </a:lnL>
@@ -20244,7 +20244,7 @@
                       </a:r>
                     </a:p>
                   </a:txBody>
-                  <a:tcPr marL="81005" marR="6750" marT="6750" marB="0" anchor="ctr">
+                  <a:tcPr marL="81005" marR="6750" marT="6750" marB="6750" anchor="ctr">
                     <a:lnL>
                       <a:noFill/>
                     </a:lnL>
@@ -20298,7 +20298,7 @@
                       </a:r>
                     </a:p>
                   </a:txBody>
-                  <a:tcPr marL="81005" marR="6750" marT="6750" marB="0" anchor="ctr">
+                  <a:tcPr marL="81005" marR="6750" marT="6750" marB="6750" anchor="ctr">
                     <a:lnL>
                       <a:noFill/>
                     </a:lnL>
@@ -20354,7 +20354,7 @@
                       </a:r>
                     </a:p>
                   </a:txBody>
-                  <a:tcPr marL="81005" marR="6750" marT="6750" marB="0" anchor="ctr">
+                  <a:tcPr marL="81005" marR="6750" marT="6750" marB="6750" anchor="ctr">
                     <a:lnL>
                       <a:noFill/>
                     </a:lnL>
@@ -20412,7 +20412,7 @@
                       </a:r>
                     </a:p>
                   </a:txBody>
-                  <a:tcPr marL="81005" marR="6750" marT="6750" marB="0" anchor="ctr">
+                  <a:tcPr marL="81005" marR="6750" marT="6750" marB="6750" anchor="ctr">
                     <a:lnL>
                       <a:noFill/>
                     </a:lnL>
@@ -20466,7 +20466,7 @@
                       </a:r>
                     </a:p>
                   </a:txBody>
-                  <a:tcPr marL="81005" marR="6750" marT="6750" marB="0" anchor="ctr">
+                  <a:tcPr marL="81005" marR="6750" marT="6750" marB="6750" anchor="ctr">
                     <a:lnL>
                       <a:noFill/>
                     </a:lnL>
@@ -20522,7 +20522,7 @@
                       </a:r>
                     </a:p>
                   </a:txBody>
-                  <a:tcPr marL="81005" marR="6750" marT="6750" marB="0" anchor="ctr">
+                  <a:tcPr marL="81005" marR="6750" marT="6750" marB="6750" anchor="ctr">
                     <a:lnL>
                       <a:noFill/>
                     </a:lnL>
@@ -20580,7 +20580,7 @@
                       </a:r>
                     </a:p>
                   </a:txBody>
-                  <a:tcPr marL="81005" marR="6750" marT="6750" marB="0" anchor="ctr">
+                  <a:tcPr marL="81005" marR="6750" marT="6750" marB="6750" anchor="ctr">
                     <a:lnL>
                       <a:noFill/>
                     </a:lnL>
@@ -20634,7 +20634,7 @@
                       </a:r>
                     </a:p>
                   </a:txBody>
-                  <a:tcPr marL="81005" marR="6750" marT="6750" marB="0" anchor="ctr">
+                  <a:tcPr marL="81005" marR="6750" marT="6750" marB="6750" anchor="ctr">
                     <a:lnL>
                       <a:noFill/>
                     </a:lnL>
@@ -20690,7 +20690,7 @@
                       </a:r>
                     </a:p>
                   </a:txBody>
-                  <a:tcPr marL="81005" marR="6750" marT="6750" marB="0" anchor="ctr">
+                  <a:tcPr marL="81005" marR="6750" marT="6750" marB="6750" anchor="ctr">
                     <a:lnL>
                       <a:noFill/>
                     </a:lnL>
@@ -20748,7 +20748,7 @@
                       </a:r>
                     </a:p>
                   </a:txBody>
-                  <a:tcPr marL="81005" marR="6750" marT="6750" marB="0" anchor="ctr">
+                  <a:tcPr marL="81005" marR="6750" marT="6750" marB="6750" anchor="ctr">
                     <a:lnL>
                       <a:noFill/>
                     </a:lnL>
@@ -20802,7 +20802,7 @@
                       </a:r>
                     </a:p>
                   </a:txBody>
-                  <a:tcPr marL="81005" marR="6750" marT="6750" marB="0" anchor="ctr">
+                  <a:tcPr marL="81005" marR="6750" marT="6750" marB="6750" anchor="ctr">
                     <a:lnL>
                       <a:noFill/>
                     </a:lnL>
@@ -20858,7 +20858,7 @@
                       </a:r>
                     </a:p>
                   </a:txBody>
-                  <a:tcPr marL="81005" marR="6750" marT="6750" marB="0" anchor="ctr">
+                  <a:tcPr marL="81005" marR="6750" marT="6750" marB="6750" anchor="ctr">
                     <a:lnL>
                       <a:noFill/>
                     </a:lnL>
@@ -23034,7 +23034,7 @@
                 <a:latin typeface="맑은 고딕"/>
                 <a:ea typeface="맑은 고딕"/>
               </a:rPr>
-              <a:t>다. 장바구니에 담을 때 호출해 두고 오래된 값을 쓰면 시점의 요구를 충족하지 못한다.</a:t>
+              <a:t>다. 장바구니에 담을 때 호출해 오래된 값을 사용하면 시점의 요구를 못 채운다.</a:t>
             </a:r>
           </a:p>
           <a:p>
@@ -25021,7 +25021,7 @@
                       </a:r>
                     </a:p>
                   </a:txBody>
-                  <a:tcPr marL="6750" marR="6750" marT="6750" marB="0" anchor="ctr">
+                  <a:tcPr marL="6750" marR="6750" marT="6750" marB="6750" anchor="ctr">
                     <a:lnL>
                       <a:noFill/>
                     </a:lnL>
@@ -25083,7 +25083,7 @@
                       </a:r>
                     </a:p>
                   </a:txBody>
-                  <a:tcPr marL="6750" marR="6750" marT="6750" marB="0" anchor="ctr">
+                  <a:tcPr marL="6750" marR="6750" marT="6750" marB="6750" anchor="ctr">
                     <a:lnL w="9525" cap="flat" cmpd="sng" algn="ctr">
                       <a:solidFill>
                         <a:schemeClr val="bg1">
@@ -25155,7 +25155,7 @@
                       </a:r>
                     </a:p>
                   </a:txBody>
-                  <a:tcPr marL="81005" marR="6750" marT="6750" marB="0" anchor="ctr">
+                  <a:tcPr marL="81005" marR="6750" marT="6750" marB="6750" anchor="ctr">
                     <a:lnL>
                       <a:noFill/>
                     </a:lnL>
@@ -25209,7 +25209,7 @@
                       </a:r>
                     </a:p>
                   </a:txBody>
-                  <a:tcPr marL="81005" marR="6750" marT="6750" marB="0" anchor="ctr">
+                  <a:tcPr marL="81005" marR="6750" marT="6750" marB="6750" anchor="ctr">
                     <a:lnL>
                       <a:noFill/>
                     </a:lnL>
@@ -25267,7 +25267,7 @@
                       </a:r>
                     </a:p>
                   </a:txBody>
-                  <a:tcPr marL="81005" marR="6750" marT="6750" marB="0" anchor="ctr">
+                  <a:tcPr marL="81005" marR="6750" marT="6750" marB="6750" anchor="ctr">
                     <a:lnL>
                       <a:noFill/>
                     </a:lnL>
@@ -25321,7 +25321,7 @@
                       </a:r>
                     </a:p>
                   </a:txBody>
-                  <a:tcPr marL="81005" marR="6750" marT="6750" marB="0" anchor="ctr">
+                  <a:tcPr marL="81005" marR="6750" marT="6750" marB="6750" anchor="ctr">
                     <a:lnL>
                       <a:noFill/>
                     </a:lnL>
@@ -25379,7 +25379,7 @@
                       </a:r>
                     </a:p>
                   </a:txBody>
-                  <a:tcPr marL="81005" marR="6750" marT="6750" marB="0" anchor="ctr">
+                  <a:tcPr marL="81005" marR="6750" marT="6750" marB="6750" anchor="ctr">
                     <a:lnL>
                       <a:noFill/>
                     </a:lnL>
@@ -25433,7 +25433,7 @@
                       </a:r>
                     </a:p>
                   </a:txBody>
-                  <a:tcPr marL="81005" marR="6750" marT="6750" marB="0" anchor="ctr">
+                  <a:tcPr marL="81005" marR="6750" marT="6750" marB="6750" anchor="ctr">
                     <a:lnL>
                       <a:noFill/>
                     </a:lnL>
@@ -25491,7 +25491,7 @@
                       </a:r>
                     </a:p>
                   </a:txBody>
-                  <a:tcPr marL="81005" marR="6750" marT="6750" marB="0" anchor="ctr">
+                  <a:tcPr marL="81005" marR="6750" marT="6750" marB="6750" anchor="ctr">
                     <a:lnL>
                       <a:noFill/>
                     </a:lnL>
@@ -25545,7 +25545,7 @@
                       </a:r>
                     </a:p>
                   </a:txBody>
-                  <a:tcPr marL="81005" marR="6750" marT="6750" marB="0" anchor="ctr">
+                  <a:tcPr marL="81005" marR="6750" marT="6750" marB="6750" anchor="ctr">
                     <a:lnL>
                       <a:noFill/>
                     </a:lnL>
@@ -25603,7 +25603,7 @@
                       </a:r>
                     </a:p>
                   </a:txBody>
-                  <a:tcPr marL="81005" marR="6750" marT="6750" marB="0" anchor="ctr">
+                  <a:tcPr marL="81005" marR="6750" marT="6750" marB="6750" anchor="ctr">
                     <a:lnL>
                       <a:noFill/>
                     </a:lnL>
@@ -25657,7 +25657,7 @@
                       </a:r>
                     </a:p>
                   </a:txBody>
-                  <a:tcPr marL="81005" marR="6750" marT="6750" marB="0" anchor="ctr">
+                  <a:tcPr marL="81005" marR="6750" marT="6750" marB="6750" anchor="ctr">
                     <a:lnL>
                       <a:noFill/>
                     </a:lnL>
@@ -26657,7 +26657,7 @@
                       </a:r>
                     </a:p>
                   </a:txBody>
-                  <a:tcPr marL="6750" marR="6750" marT="6750" marB="0" anchor="ctr">
+                  <a:tcPr marL="6750" marR="6750" marT="6750" marB="6750" anchor="ctr">
                     <a:lnL>
                       <a:noFill/>
                     </a:lnL>
@@ -26719,7 +26719,7 @@
                       </a:r>
                     </a:p>
                   </a:txBody>
-                  <a:tcPr marL="6750" marR="6750" marT="6750" marB="0" anchor="ctr">
+                  <a:tcPr marL="6750" marR="6750" marT="6750" marB="6750" anchor="ctr">
                     <a:lnL w="9525" cap="flat" cmpd="sng" algn="ctr">
                       <a:solidFill>
                         <a:schemeClr val="bg1">
@@ -26789,7 +26789,7 @@
                       </a:r>
                     </a:p>
                   </a:txBody>
-                  <a:tcPr marL="6750" marR="6750" marT="6750" marB="0" anchor="ctr">
+                  <a:tcPr marL="6750" marR="6750" marT="6750" marB="6750" anchor="ctr">
                     <a:lnL w="9525" cap="flat" cmpd="sng" algn="ctr">
                       <a:solidFill>
                         <a:schemeClr val="bg1">
@@ -26861,7 +26861,7 @@
                       </a:r>
                     </a:p>
                   </a:txBody>
-                  <a:tcPr marL="81005" marR="6750" marT="6750" marB="0" anchor="ctr">
+                  <a:tcPr marL="81005" marR="6750" marT="6750" marB="6750" anchor="ctr">
                     <a:lnL>
                       <a:noFill/>
                     </a:lnL>
@@ -26915,7 +26915,7 @@
                       </a:r>
                     </a:p>
                   </a:txBody>
-                  <a:tcPr marL="81005" marR="6750" marT="6750" marB="0" anchor="ctr">
+                  <a:tcPr marL="81005" marR="6750" marT="6750" marB="6750" anchor="ctr">
                     <a:lnL>
                       <a:noFill/>
                     </a:lnL>
@@ -26971,7 +26971,7 @@
                       </a:r>
                     </a:p>
                   </a:txBody>
-                  <a:tcPr marL="81005" marR="6750" marT="6750" marB="0" anchor="ctr">
+                  <a:tcPr marL="81005" marR="6750" marT="6750" marB="6750" anchor="ctr">
                     <a:lnL>
                       <a:noFill/>
                     </a:lnL>
@@ -27029,7 +27029,7 @@
                       </a:r>
                     </a:p>
                   </a:txBody>
-                  <a:tcPr marL="81005" marR="6750" marT="6750" marB="0" anchor="ctr">
+                  <a:tcPr marL="81005" marR="6750" marT="6750" marB="6750" anchor="ctr">
                     <a:lnL>
                       <a:noFill/>
                     </a:lnL>
@@ -27083,7 +27083,7 @@
                       </a:r>
                     </a:p>
                   </a:txBody>
-                  <a:tcPr marL="81005" marR="6750" marT="6750" marB="0" anchor="ctr">
+                  <a:tcPr marL="81005" marR="6750" marT="6750" marB="6750" anchor="ctr">
                     <a:lnL>
                       <a:noFill/>
                     </a:lnL>
@@ -27139,7 +27139,7 @@
                       </a:r>
                     </a:p>
                   </a:txBody>
-                  <a:tcPr marL="81005" marR="6750" marT="6750" marB="0" anchor="ctr">
+                  <a:tcPr marL="81005" marR="6750" marT="6750" marB="6750" anchor="ctr">
                     <a:lnL>
                       <a:noFill/>
                     </a:lnL>
@@ -27197,7 +27197,7 @@
                       </a:r>
                     </a:p>
                   </a:txBody>
-                  <a:tcPr marL="81005" marR="6750" marT="6750" marB="0" anchor="ctr">
+                  <a:tcPr marL="81005" marR="6750" marT="6750" marB="6750" anchor="ctr">
                     <a:lnL>
                       <a:noFill/>
                     </a:lnL>
@@ -27251,7 +27251,7 @@
                       </a:r>
                     </a:p>
                   </a:txBody>
-                  <a:tcPr marL="81005" marR="6750" marT="6750" marB="0" anchor="ctr">
+                  <a:tcPr marL="81005" marR="6750" marT="6750" marB="6750" anchor="ctr">
                     <a:lnL>
                       <a:noFill/>
                     </a:lnL>
@@ -27307,7 +27307,7 @@
                       </a:r>
                     </a:p>
                   </a:txBody>
-                  <a:tcPr marL="81005" marR="6750" marT="6750" marB="0" anchor="ctr">
+                  <a:tcPr marL="81005" marR="6750" marT="6750" marB="6750" anchor="ctr">
                     <a:lnL>
                       <a:noFill/>
                     </a:lnL>
@@ -27365,7 +27365,7 @@
                       </a:r>
                     </a:p>
                   </a:txBody>
-                  <a:tcPr marL="81005" marR="6750" marT="6750" marB="0" anchor="ctr">
+                  <a:tcPr marL="81005" marR="6750" marT="6750" marB="6750" anchor="ctr">
                     <a:lnL>
                       <a:noFill/>
                     </a:lnL>
@@ -27419,7 +27419,7 @@
                       </a:r>
                     </a:p>
                   </a:txBody>
-                  <a:tcPr marL="81005" marR="6750" marT="6750" marB="0" anchor="ctr">
+                  <a:tcPr marL="81005" marR="6750" marT="6750" marB="6750" anchor="ctr">
                     <a:lnL>
                       <a:noFill/>
                     </a:lnL>
@@ -27475,7 +27475,7 @@
                       </a:r>
                     </a:p>
                   </a:txBody>
-                  <a:tcPr marL="81005" marR="6750" marT="6750" marB="0" anchor="ctr">
+                  <a:tcPr marL="81005" marR="6750" marT="6750" marB="6750" anchor="ctr">
                     <a:lnL>
                       <a:noFill/>
                     </a:lnL>
@@ -27533,7 +27533,7 @@
                       </a:r>
                     </a:p>
                   </a:txBody>
-                  <a:tcPr marL="81005" marR="6750" marT="6750" marB="0" anchor="ctr">
+                  <a:tcPr marL="81005" marR="6750" marT="6750" marB="6750" anchor="ctr">
                     <a:lnL>
                       <a:noFill/>
                     </a:lnL>
@@ -27587,7 +27587,7 @@
                       </a:r>
                     </a:p>
                   </a:txBody>
-                  <a:tcPr marL="81005" marR="6750" marT="6750" marB="0" anchor="ctr">
+                  <a:tcPr marL="81005" marR="6750" marT="6750" marB="6750" anchor="ctr">
                     <a:lnL>
                       <a:noFill/>
                     </a:lnL>
@@ -27643,7 +27643,7 @@
                       </a:r>
                     </a:p>
                   </a:txBody>
-                  <a:tcPr marL="81005" marR="6750" marT="6750" marB="0" anchor="ctr">
+                  <a:tcPr marL="81005" marR="6750" marT="6750" marB="6750" anchor="ctr">
                     <a:lnL>
                       <a:noFill/>
                     </a:lnL>
@@ -31804,7 +31804,7 @@
                       </a:r>
                     </a:p>
                   </a:txBody>
-                  <a:tcPr marL="6750" marR="6750" marT="6750" marB="0" anchor="ctr">
+                  <a:tcPr marL="6750" marR="6750" marT="6750" marB="6750" anchor="ctr">
                     <a:lnL>
                       <a:noFill/>
                     </a:lnL>
@@ -31866,7 +31866,7 @@
                       </a:r>
                     </a:p>
                   </a:txBody>
-                  <a:tcPr marL="6750" marR="6750" marT="6750" marB="0" anchor="ctr">
+                  <a:tcPr marL="6750" marR="6750" marT="6750" marB="6750" anchor="ctr">
                     <a:lnL w="9525" cap="flat" cmpd="sng" algn="ctr">
                       <a:solidFill>
                         <a:schemeClr val="bg1">
@@ -31936,7 +31936,7 @@
                       </a:r>
                     </a:p>
                   </a:txBody>
-                  <a:tcPr marL="6750" marR="6750" marT="6750" marB="0" anchor="ctr">
+                  <a:tcPr marL="6750" marR="6750" marT="6750" marB="6750" anchor="ctr">
                     <a:lnL w="9525" cap="flat" cmpd="sng" algn="ctr">
                       <a:solidFill>
                         <a:schemeClr val="bg1">
@@ -32008,7 +32008,7 @@
                       </a:r>
                     </a:p>
                   </a:txBody>
-                  <a:tcPr marL="81005" marR="6750" marT="6750" marB="0" anchor="ctr">
+                  <a:tcPr marL="81005" marR="6750" marT="6750" marB="6750" anchor="ctr">
                     <a:lnL>
                       <a:noFill/>
                     </a:lnL>
@@ -32062,7 +32062,7 @@
                       </a:r>
                     </a:p>
                   </a:txBody>
-                  <a:tcPr marL="81005" marR="6750" marT="6750" marB="0" anchor="ctr">
+                  <a:tcPr marL="81005" marR="6750" marT="6750" marB="6750" anchor="ctr">
                     <a:lnL>
                       <a:noFill/>
                     </a:lnL>
@@ -32118,7 +32118,7 @@
                       </a:r>
                     </a:p>
                   </a:txBody>
-                  <a:tcPr marL="81005" marR="6750" marT="6750" marB="0" anchor="ctr">
+                  <a:tcPr marL="81005" marR="6750" marT="6750" marB="6750" anchor="ctr">
                     <a:lnL>
                       <a:noFill/>
                     </a:lnL>
@@ -32176,7 +32176,7 @@
                       </a:r>
                     </a:p>
                   </a:txBody>
-                  <a:tcPr marL="81005" marR="6750" marT="6750" marB="0" anchor="ctr">
+                  <a:tcPr marL="81005" marR="6750" marT="6750" marB="6750" anchor="ctr">
                     <a:lnL>
                       <a:noFill/>
                     </a:lnL>
@@ -32230,7 +32230,7 @@
                       </a:r>
                     </a:p>
                   </a:txBody>
-                  <a:tcPr marL="81005" marR="6750" marT="6750" marB="0" anchor="ctr">
+                  <a:tcPr marL="81005" marR="6750" marT="6750" marB="6750" anchor="ctr">
                     <a:lnL>
                       <a:noFill/>
                     </a:lnL>
@@ -32286,7 +32286,7 @@
                       </a:r>
                     </a:p>
                   </a:txBody>
-                  <a:tcPr marL="81005" marR="6750" marT="6750" marB="0" anchor="ctr">
+                  <a:tcPr marL="81005" marR="6750" marT="6750" marB="6750" anchor="ctr">
                     <a:lnL>
                       <a:noFill/>
                     </a:lnL>
@@ -32344,7 +32344,7 @@
                       </a:r>
                     </a:p>
                   </a:txBody>
-                  <a:tcPr marL="81005" marR="6750" marT="6750" marB="0" anchor="ctr">
+                  <a:tcPr marL="81005" marR="6750" marT="6750" marB="6750" anchor="ctr">
                     <a:lnL>
                       <a:noFill/>
                     </a:lnL>
@@ -32398,7 +32398,7 @@
                       </a:r>
                     </a:p>
                   </a:txBody>
-                  <a:tcPr marL="81005" marR="6750" marT="6750" marB="0" anchor="ctr">
+                  <a:tcPr marL="81005" marR="6750" marT="6750" marB="6750" anchor="ctr">
                     <a:lnL>
                       <a:noFill/>
                     </a:lnL>
@@ -32454,7 +32454,7 @@
                       </a:r>
                     </a:p>
                   </a:txBody>
-                  <a:tcPr marL="81005" marR="6750" marT="6750" marB="0" anchor="ctr">
+                  <a:tcPr marL="81005" marR="6750" marT="6750" marB="6750" anchor="ctr">
                     <a:lnL>
                       <a:noFill/>
                     </a:lnL>
@@ -32512,7 +32512,7 @@
                       </a:r>
                     </a:p>
                   </a:txBody>
-                  <a:tcPr marL="81005" marR="6750" marT="6750" marB="0" anchor="ctr">
+                  <a:tcPr marL="81005" marR="6750" marT="6750" marB="6750" anchor="ctr">
                     <a:lnL>
                       <a:noFill/>
                     </a:lnL>
@@ -32566,7 +32566,7 @@
                       </a:r>
                     </a:p>
                   </a:txBody>
-                  <a:tcPr marL="81005" marR="6750" marT="6750" marB="0" anchor="ctr">
+                  <a:tcPr marL="81005" marR="6750" marT="6750" marB="6750" anchor="ctr">
                     <a:lnL>
                       <a:noFill/>
                     </a:lnL>
@@ -32622,7 +32622,7 @@
                       </a:r>
                     </a:p>
                   </a:txBody>
-                  <a:tcPr marL="81005" marR="6750" marT="6750" marB="0" anchor="ctr">
+                  <a:tcPr marL="81005" marR="6750" marT="6750" marB="6750" anchor="ctr">
                     <a:lnL>
                       <a:noFill/>
                     </a:lnL>
@@ -32680,7 +32680,7 @@
                       </a:r>
                     </a:p>
                   </a:txBody>
-                  <a:tcPr marL="81005" marR="6750" marT="6750" marB="0" anchor="ctr">
+                  <a:tcPr marL="81005" marR="6750" marT="6750" marB="6750" anchor="ctr">
                     <a:lnL>
                       <a:noFill/>
                     </a:lnL>
@@ -32734,7 +32734,7 @@
                       </a:r>
                     </a:p>
                   </a:txBody>
-                  <a:tcPr marL="81005" marR="6750" marT="6750" marB="0" anchor="ctr">
+                  <a:tcPr marL="81005" marR="6750" marT="6750" marB="6750" anchor="ctr">
                     <a:lnL>
                       <a:noFill/>
                     </a:lnL>
@@ -32790,7 +32790,7 @@
                       </a:r>
                     </a:p>
                   </a:txBody>
-                  <a:tcPr marL="81005" marR="6750" marT="6750" marB="0" anchor="ctr">
+                  <a:tcPr marL="81005" marR="6750" marT="6750" marB="6750" anchor="ctr">
                     <a:lnL>
                       <a:noFill/>
                     </a:lnL>
@@ -32848,7 +32848,7 @@
                       </a:r>
                     </a:p>
                   </a:txBody>
-                  <a:tcPr marL="81005" marR="6750" marT="6750" marB="0" anchor="ctr">
+                  <a:tcPr marL="81005" marR="6750" marT="6750" marB="6750" anchor="ctr">
                     <a:lnL>
                       <a:noFill/>
                     </a:lnL>
@@ -32902,7 +32902,7 @@
                       </a:r>
                     </a:p>
                   </a:txBody>
-                  <a:tcPr marL="81005" marR="6750" marT="6750" marB="0" anchor="ctr">
+                  <a:tcPr marL="81005" marR="6750" marT="6750" marB="6750" anchor="ctr">
                     <a:lnL>
                       <a:noFill/>
                     </a:lnL>
@@ -32958,7 +32958,7 @@
                       </a:r>
                     </a:p>
                   </a:txBody>
-                  <a:tcPr marL="81005" marR="6750" marT="6750" marB="0" anchor="ctr">
+                  <a:tcPr marL="81005" marR="6750" marT="6750" marB="6750" anchor="ctr">
                     <a:lnL>
                       <a:noFill/>
                     </a:lnL>
@@ -33016,7 +33016,7 @@
                       </a:r>
                     </a:p>
                   </a:txBody>
-                  <a:tcPr marL="81005" marR="6750" marT="6750" marB="0" anchor="ctr">
+                  <a:tcPr marL="81005" marR="6750" marT="6750" marB="6750" anchor="ctr">
                     <a:lnL>
                       <a:noFill/>
                     </a:lnL>
@@ -33070,7 +33070,7 @@
                       </a:r>
                     </a:p>
                   </a:txBody>
-                  <a:tcPr marL="81005" marR="6750" marT="6750" marB="0" anchor="ctr">
+                  <a:tcPr marL="81005" marR="6750" marT="6750" marB="6750" anchor="ctr">
                     <a:lnL>
                       <a:noFill/>
                     </a:lnL>
@@ -33126,7 +33126,7 @@
                       </a:r>
                     </a:p>
                   </a:txBody>
-                  <a:tcPr marL="81005" marR="6750" marT="6750" marB="0" anchor="ctr">
+                  <a:tcPr marL="81005" marR="6750" marT="6750" marB="6750" anchor="ctr">
                     <a:lnL>
                       <a:noFill/>
                     </a:lnL>
@@ -33901,7 +33901,7 @@
                 <a:latin typeface="맑은 고딕"/>
                 <a:ea typeface="맑은 고딕"/>
               </a:rPr>
-              <a:t>이 미정 사항으로부터 허용 또는 금지 정책, 새로운 개념이나 상태를 도출하지 않는다.</a:t>
+              <a:t>이 미정 사항에서 허용 또는 금지 정책, 새로운 개념이나 상태를 도출하지 않는다.</a:t>
             </a:r>
           </a:p>
         </p:txBody>
@@ -34121,7 +34121,7 @@
                       </a:r>
                     </a:p>
                   </a:txBody>
-                  <a:tcPr marL="6750" marR="6750" marT="6750" marB="0" anchor="ctr">
+                  <a:tcPr marL="6750" marR="6750" marT="6750" marB="6750" anchor="ctr">
                     <a:lnL>
                       <a:noFill/>
                     </a:lnL>
@@ -34183,7 +34183,7 @@
                       </a:r>
                     </a:p>
                   </a:txBody>
-                  <a:tcPr marL="6750" marR="6750" marT="6750" marB="0" anchor="ctr">
+                  <a:tcPr marL="6750" marR="6750" marT="6750" marB="6750" anchor="ctr">
                     <a:lnL w="9525" cap="flat" cmpd="sng" algn="ctr">
                       <a:solidFill>
                         <a:schemeClr val="bg1">
@@ -34255,7 +34255,7 @@
                       </a:r>
                     </a:p>
                   </a:txBody>
-                  <a:tcPr marL="81005" marR="6750" marT="6750" marB="0" anchor="ctr">
+                  <a:tcPr marL="81005" marR="6750" marT="6750" marB="6750" anchor="ctr">
                     <a:lnL>
                       <a:noFill/>
                     </a:lnL>
@@ -34309,7 +34309,7 @@
                       </a:r>
                     </a:p>
                   </a:txBody>
-                  <a:tcPr marL="81005" marR="6750" marT="6750" marB="0" anchor="ctr">
+                  <a:tcPr marL="81005" marR="6750" marT="6750" marB="6750" anchor="ctr">
                     <a:lnL>
                       <a:noFill/>
                     </a:lnL>
@@ -34367,7 +34367,7 @@
                       </a:r>
                     </a:p>
                   </a:txBody>
-                  <a:tcPr marL="81005" marR="6750" marT="6750" marB="0" anchor="ctr">
+                  <a:tcPr marL="81005" marR="6750" marT="6750" marB="6750" anchor="ctr">
                     <a:lnL>
                       <a:noFill/>
                     </a:lnL>
@@ -34421,7 +34421,7 @@
                       </a:r>
                     </a:p>
                   </a:txBody>
-                  <a:tcPr marL="81005" marR="6750" marT="6750" marB="0" anchor="ctr">
+                  <a:tcPr marL="81005" marR="6750" marT="6750" marB="6750" anchor="ctr">
                     <a:lnL>
                       <a:noFill/>
                     </a:lnL>
@@ -34479,7 +34479,7 @@
                       </a:r>
                     </a:p>
                   </a:txBody>
-                  <a:tcPr marL="81005" marR="6750" marT="6750" marB="0" anchor="ctr">
+                  <a:tcPr marL="81005" marR="6750" marT="6750" marB="6750" anchor="ctr">
                     <a:lnL>
                       <a:noFill/>
                     </a:lnL>
@@ -34533,7 +34533,7 @@
                       </a:r>
                     </a:p>
                   </a:txBody>
-                  <a:tcPr marL="81005" marR="6750" marT="6750" marB="0" anchor="ctr">
+                  <a:tcPr marL="81005" marR="6750" marT="6750" marB="6750" anchor="ctr">
                     <a:lnL>
                       <a:noFill/>
                     </a:lnL>
@@ -34591,7 +34591,7 @@
                       </a:r>
                     </a:p>
                   </a:txBody>
-                  <a:tcPr marL="81005" marR="6750" marT="6750" marB="0" anchor="ctr">
+                  <a:tcPr marL="81005" marR="6750" marT="6750" marB="6750" anchor="ctr">
                     <a:lnL>
                       <a:noFill/>
                     </a:lnL>
@@ -34645,7 +34645,7 @@
                       </a:r>
                     </a:p>
                   </a:txBody>
-                  <a:tcPr marL="81005" marR="6750" marT="6750" marB="0" anchor="ctr">
+                  <a:tcPr marL="81005" marR="6750" marT="6750" marB="6750" anchor="ctr">
                     <a:lnL>
                       <a:noFill/>
                     </a:lnL>
@@ -36405,7 +36405,7 @@
                       </a:r>
                     </a:p>
                   </a:txBody>
-                  <a:tcPr marL="6750" marR="6750" marT="6750" marB="0" anchor="ctr">
+                  <a:tcPr marL="6750" marR="6750" marT="6750" marB="6750" anchor="ctr">
                     <a:lnL>
                       <a:noFill/>
                     </a:lnL>
@@ -36467,7 +36467,7 @@
                       </a:r>
                     </a:p>
                   </a:txBody>
-                  <a:tcPr marL="6750" marR="6750" marT="6750" marB="0" anchor="ctr">
+                  <a:tcPr marL="6750" marR="6750" marT="6750" marB="6750" anchor="ctr">
                     <a:lnL w="9525" cap="flat" cmpd="sng" algn="ctr">
                       <a:solidFill>
                         <a:schemeClr val="bg1">
@@ -36537,7 +36537,7 @@
                       </a:r>
                     </a:p>
                   </a:txBody>
-                  <a:tcPr marL="6750" marR="6750" marT="6750" marB="0" anchor="ctr">
+                  <a:tcPr marL="6750" marR="6750" marT="6750" marB="6750" anchor="ctr">
                     <a:lnL w="9525" cap="flat" cmpd="sng" algn="ctr">
                       <a:solidFill>
                         <a:schemeClr val="bg1">
@@ -36609,7 +36609,7 @@
                       </a:r>
                     </a:p>
                   </a:txBody>
-                  <a:tcPr marL="81005" marR="6750" marT="6750" marB="0" anchor="ctr">
+                  <a:tcPr marL="81005" marR="6750" marT="6750" marB="6750" anchor="ctr">
                     <a:lnL>
                       <a:noFill/>
                     </a:lnL>
@@ -36663,7 +36663,7 @@
                       </a:r>
                     </a:p>
                   </a:txBody>
-                  <a:tcPr marL="81005" marR="6750" marT="6750" marB="0" anchor="ctr">
+                  <a:tcPr marL="81005" marR="6750" marT="6750" marB="6750" anchor="ctr">
                     <a:lnL>
                       <a:noFill/>
                     </a:lnL>
@@ -36719,7 +36719,7 @@
                       </a:r>
                     </a:p>
                   </a:txBody>
-                  <a:tcPr marL="81005" marR="6750" marT="6750" marB="0" anchor="ctr">
+                  <a:tcPr marL="81005" marR="6750" marT="6750" marB="6750" anchor="ctr">
                     <a:lnL>
                       <a:noFill/>
                     </a:lnL>
@@ -36777,7 +36777,7 @@
                       </a:r>
                     </a:p>
                   </a:txBody>
-                  <a:tcPr marL="81005" marR="6750" marT="6750" marB="0" anchor="ctr">
+                  <a:tcPr marL="81005" marR="6750" marT="6750" marB="6750" anchor="ctr">
                     <a:lnL>
                       <a:noFill/>
                     </a:lnL>
@@ -36831,7 +36831,7 @@
                       </a:r>
                     </a:p>
                   </a:txBody>
-                  <a:tcPr marL="81005" marR="6750" marT="6750" marB="0" anchor="ctr">
+                  <a:tcPr marL="81005" marR="6750" marT="6750" marB="6750" anchor="ctr">
                     <a:lnL>
                       <a:noFill/>
                     </a:lnL>
@@ -36887,7 +36887,7 @@
                       </a:r>
                     </a:p>
                   </a:txBody>
-                  <a:tcPr marL="81005" marR="6750" marT="6750" marB="0" anchor="ctr">
+                  <a:tcPr marL="81005" marR="6750" marT="6750" marB="6750" anchor="ctr">
                     <a:lnL>
                       <a:noFill/>
                     </a:lnL>
@@ -36945,7 +36945,7 @@
                       </a:r>
                     </a:p>
                   </a:txBody>
-                  <a:tcPr marL="81005" marR="6750" marT="6750" marB="0" anchor="ctr">
+                  <a:tcPr marL="81005" marR="6750" marT="6750" marB="6750" anchor="ctr">
                     <a:lnL>
                       <a:noFill/>
                     </a:lnL>
@@ -36999,7 +36999,7 @@
                       </a:r>
                     </a:p>
                   </a:txBody>
-                  <a:tcPr marL="81005" marR="6750" marT="6750" marB="0" anchor="ctr">
+                  <a:tcPr marL="81005" marR="6750" marT="6750" marB="6750" anchor="ctr">
                     <a:lnL>
                       <a:noFill/>
                     </a:lnL>
@@ -37055,7 +37055,7 @@
                       </a:r>
                     </a:p>
                   </a:txBody>
-                  <a:tcPr marL="81005" marR="6750" marT="6750" marB="0" anchor="ctr">
+                  <a:tcPr marL="81005" marR="6750" marT="6750" marB="6750" anchor="ctr">
                     <a:lnL>
                       <a:noFill/>
                     </a:lnL>
@@ -37113,7 +37113,7 @@
                       </a:r>
                     </a:p>
                   </a:txBody>
-                  <a:tcPr marL="81005" marR="6750" marT="6750" marB="0" anchor="ctr">
+                  <a:tcPr marL="81005" marR="6750" marT="6750" marB="6750" anchor="ctr">
                     <a:lnL>
                       <a:noFill/>
                     </a:lnL>
@@ -37167,7 +37167,7 @@
                       </a:r>
                     </a:p>
                   </a:txBody>
-                  <a:tcPr marL="81005" marR="6750" marT="6750" marB="0" anchor="ctr">
+                  <a:tcPr marL="81005" marR="6750" marT="6750" marB="6750" anchor="ctr">
                     <a:lnL>
                       <a:noFill/>
                     </a:lnL>
@@ -37223,7 +37223,7 @@
                       </a:r>
                     </a:p>
                   </a:txBody>
-                  <a:tcPr marL="81005" marR="6750" marT="6750" marB="0" anchor="ctr">
+                  <a:tcPr marL="81005" marR="6750" marT="6750" marB="6750" anchor="ctr">
                     <a:lnL>
                       <a:noFill/>
                     </a:lnL>
@@ -38002,7 +38002,7 @@
                 <a:latin typeface="맑은 고딕"/>
                 <a:ea typeface="맑은 고딕"/>
               </a:rPr>
-              <a:t>는 업무 담당자와 개발자가 모델에 기반해 함께 쓰는 말이다. 코드의 이름도 그 말과 이어져야 한다.</a:t>
+              <a:t>는 업무 담당자와 개발자가 모델에 기반해 함께 사용하는 말이다. 코드의 이름도 그 말과 이어져야 한다.</a:t>
             </a:r>
           </a:p>
           <a:p>
@@ -38264,7 +38264,7 @@
                 <a:latin typeface="맑은 고딕"/>
                 <a:ea typeface="맑은 고딕"/>
               </a:rPr>
-              <a:t>에서 그 이름을 쓰는 자리도 함께 고친다. 지난 대화를 기억할 것이라고 가정하지 않는다.</a:t>
+              <a:t>에서 그 이름을 사용하는 자리도 함께 고친다. 지난 대화를 기억할 것이라고 가정하지 않는다.</a:t>
             </a:r>
           </a:p>
         </p:txBody>

--- a/courses/ai-native/sessions/s04.pptx
+++ b/courses/ai-native/sessions/s04.pptx
@@ -5030,7 +5030,7 @@
         </p:nvGraphicFramePr>
         <p:xfrm>
           <a:off x="2180146" y="1837690"/>
-          <a:ext cx="4770120" cy="3873500"/>
+          <a:ext cx="4770120" cy="2016000"/>
         </p:xfrm>
         <a:graphic>
           <a:graphicData uri="http://schemas.openxmlformats.org/drawingml/2006/table">
@@ -6801,7 +6801,7 @@
         </p:nvGraphicFramePr>
         <p:xfrm>
           <a:off x="2167446" y="1837690"/>
-          <a:ext cx="4795520" cy="3873500"/>
+          <a:ext cx="4795520" cy="864000"/>
         </p:xfrm>
         <a:graphic>
           <a:graphicData uri="http://schemas.openxmlformats.org/drawingml/2006/table">
@@ -9063,7 +9063,7 @@
         </p:nvGraphicFramePr>
         <p:xfrm>
           <a:off x="1705166" y="2112010"/>
-          <a:ext cx="5720080" cy="3873500"/>
+          <a:ext cx="5720080" cy="2016000"/>
         </p:xfrm>
         <a:graphic>
           <a:graphicData uri="http://schemas.openxmlformats.org/drawingml/2006/table">
@@ -11317,7 +11317,7 @@
         </p:nvGraphicFramePr>
         <p:xfrm>
           <a:off x="1761046" y="2112010"/>
-          <a:ext cx="5608320" cy="3873500"/>
+          <a:ext cx="5608320" cy="864000"/>
         </p:xfrm>
         <a:graphic>
           <a:graphicData uri="http://schemas.openxmlformats.org/drawingml/2006/table">
@@ -12419,7 +12419,7 @@
         </p:nvGraphicFramePr>
         <p:xfrm>
           <a:off x="2599246" y="1837690"/>
-          <a:ext cx="3931920" cy="3873500"/>
+          <a:ext cx="3931920" cy="2016000"/>
         </p:xfrm>
         <a:graphic>
           <a:graphicData uri="http://schemas.openxmlformats.org/drawingml/2006/table">
@@ -14655,7 +14655,7 @@
         </p:nvGraphicFramePr>
         <p:xfrm>
           <a:off x="2222056" y="1837690"/>
-          <a:ext cx="4686300" cy="3873500"/>
+          <a:ext cx="4686300" cy="1440000"/>
         </p:xfrm>
         <a:graphic>
           <a:graphicData uri="http://schemas.openxmlformats.org/drawingml/2006/table">
@@ -18097,7 +18097,7 @@
         </p:nvGraphicFramePr>
         <p:xfrm>
           <a:off x="1314006" y="1837690"/>
-          <a:ext cx="6502400" cy="3873500"/>
+          <a:ext cx="6502400" cy="1728000"/>
         </p:xfrm>
         <a:graphic>
           <a:graphicData uri="http://schemas.openxmlformats.org/drawingml/2006/table">
@@ -19670,7 +19670,7 @@
         </p:nvGraphicFramePr>
         <p:xfrm>
           <a:off x="1705166" y="2112010"/>
-          <a:ext cx="5720080" cy="3873500"/>
+          <a:ext cx="5720080" cy="2016000"/>
         </p:xfrm>
         <a:graphic>
           <a:graphicData uri="http://schemas.openxmlformats.org/drawingml/2006/table">
@@ -24988,7 +24988,7 @@
         </p:nvGraphicFramePr>
         <p:xfrm>
           <a:off x="2863406" y="2112010"/>
-          <a:ext cx="3403600" cy="3873500"/>
+          <a:ext cx="3403600" cy="1728000"/>
         </p:xfrm>
         <a:graphic>
           <a:graphicData uri="http://schemas.openxmlformats.org/drawingml/2006/table">
@@ -26623,7 +26623,7 @@
         </p:nvGraphicFramePr>
         <p:xfrm>
           <a:off x="1579436" y="2112010"/>
-          <a:ext cx="5971540" cy="3873500"/>
+          <a:ext cx="5971540" cy="1728000"/>
         </p:xfrm>
         <a:graphic>
           <a:graphicData uri="http://schemas.openxmlformats.org/drawingml/2006/table">
@@ -31770,7 +31770,7 @@
         </p:nvGraphicFramePr>
         <p:xfrm>
           <a:off x="2222056" y="2956842"/>
-          <a:ext cx="4686300" cy="3873500"/>
+          <a:ext cx="4686300" cy="2304000"/>
         </p:xfrm>
         <a:graphic>
           <a:graphicData uri="http://schemas.openxmlformats.org/drawingml/2006/table">
@@ -33165,6 +33165,98 @@
           </a:graphicData>
         </a:graphic>
       </p:graphicFrame>
+      <p:sp>
+        <p:nvSpPr>
+          <p:cNvPr id="34" name="TextBox 12">
+            <a:extLst>
+              <a:ext uri="{FF2B5EF4-FFF2-40B4-BE49-F238E27FC236}">
+                <a16:creationId xmlns:a16="http://schemas.microsoft.com/office/drawing/2014/main" id="{654EDDB4-901F-3D48-A715-17D163E8A7AC}"/>
+              </a:ext>
+            </a:extLst>
+          </p:cNvPr>
+          <p:cNvSpPr txBox="1"/>
+          <p:nvPr/>
+        </p:nvSpPr>
+        <p:spPr>
+          <a:xfrm>
+            <a:off x="365760" y="5489442"/>
+            <a:ext cx="8412480" cy="437444"/>
+          </a:xfrm>
+          <a:prstGeom prst="rect">
+            <a:avLst/>
+          </a:prstGeom>
+          <a:noFill/>
+        </p:spPr>
+        <p:txBody>
+          <a:bodyPr wrap="square">
+            <a:spAutoFit/>
+          </a:bodyPr>
+          <a:lstStyle/>
+          <a:p>
+            <a:pPr lvl="2" marL="411480" indent="-137160">
+              <a:spcBef>
+                <a:spcPts val="300"/>
+              </a:spcBef>
+              <a:spcAft>
+                <a:spcPts val="300"/>
+              </a:spcAft>
+              <a:buSzPct val="90000"/>
+              <a:buFont typeface="Wingdings" pitchFamily="2" charset="2"/>
+              <a:buChar char=""/>
+            </a:pPr>
+            <a:r>
+              <a:rPr sz="1000" b="0">
+                <a:solidFill>
+                  <a:srgbClr val="000000"/>
+                </a:solidFill>
+                <a:latin typeface="맑은 고딕"/>
+                <a:ea typeface="맑은 고딕"/>
+              </a:rPr>
+              <a:t>생성 시점에는 </a:t>
+            </a:r>
+            <a:r>
+              <a:rPr sz="1000" b="0">
+                <a:solidFill>
+                  <a:srgbClr val="000000"/>
+                </a:solidFill>
+                <a:latin typeface="맑은 고딕"/>
+                <a:ea typeface="맑은 고딕"/>
+              </a:rPr>
+              <a:t>unitPrice = salePrice = 1,000원</a:t>
+            </a:r>
+            <a:r>
+              <a:rPr sz="1000" b="0">
+                <a:solidFill>
+                  <a:srgbClr val="000000"/>
+                </a:solidFill>
+                <a:latin typeface="맑은 고딕"/>
+                <a:ea typeface="맑은 고딕"/>
+              </a:rPr>
+              <a:t>이고, </a:t>
+            </a:r>
+            <a:r>
+              <a:rPr sz="1000" b="0">
+                <a:solidFill>
+                  <a:srgbClr val="000000"/>
+                </a:solidFill>
+                <a:latin typeface="맑은 고딕"/>
+                <a:ea typeface="맑은 고딕"/>
+              </a:rPr>
+              <a:t>totalAmount = 1,000원 × 2 = 2,000원</a:t>
+            </a:r>
+            <a:r>
+              <a:rPr sz="1000" b="0">
+                <a:solidFill>
+                  <a:srgbClr val="000000"/>
+                </a:solidFill>
+                <a:latin typeface="맑은 고딕"/>
+                <a:ea typeface="맑은 고딕"/>
+              </a:rPr>
+              <a:t>이다. 이후 현재 판매가가 1,200원으로 바뀌어도 기존 주문은 확정 단가 1,000원과 총액 2,000원을 유지한다.</a:t>
+            </a:r>
+          </a:p>
+        </p:txBody>
+      </p:sp>
     </p:spTree>
     <p:extLst>
       <p:ext uri="{BB962C8B-B14F-4D97-AF65-F5344CB8AC3E}">
@@ -33392,69 +33484,6 @@
             <a:normAutofit/>
           </a:bodyPr>
           <a:lstStyle/>
-          <a:p>
-            <a:pPr lvl="2" marL="411480" indent="-137160">
-              <a:spcBef>
-                <a:spcPts val="300"/>
-              </a:spcBef>
-              <a:spcAft>
-                <a:spcPts val="300"/>
-              </a:spcAft>
-              <a:buSzPct val="90000"/>
-              <a:buFont typeface="Wingdings" pitchFamily="2" charset="2"/>
-              <a:buChar char=""/>
-            </a:pPr>
-            <a:r>
-              <a:rPr sz="1000" b="0">
-                <a:solidFill>
-                  <a:srgbClr val="000000"/>
-                </a:solidFill>
-                <a:latin typeface="맑은 고딕"/>
-                <a:ea typeface="맑은 고딕"/>
-              </a:rPr>
-              <a:t>생성 시점에는 </a:t>
-            </a:r>
-            <a:r>
-              <a:rPr sz="1000" b="0">
-                <a:solidFill>
-                  <a:srgbClr val="000000"/>
-                </a:solidFill>
-                <a:latin typeface="맑은 고딕"/>
-                <a:ea typeface="맑은 고딕"/>
-              </a:rPr>
-              <a:t>unitPrice = salePrice = 1,000원</a:t>
-            </a:r>
-            <a:r>
-              <a:rPr sz="1000" b="0">
-                <a:solidFill>
-                  <a:srgbClr val="000000"/>
-                </a:solidFill>
-                <a:latin typeface="맑은 고딕"/>
-                <a:ea typeface="맑은 고딕"/>
-              </a:rPr>
-              <a:t>이고, </a:t>
-            </a:r>
-            <a:r>
-              <a:rPr sz="1000" b="0">
-                <a:solidFill>
-                  <a:srgbClr val="000000"/>
-                </a:solidFill>
-                <a:latin typeface="맑은 고딕"/>
-                <a:ea typeface="맑은 고딕"/>
-              </a:rPr>
-              <a:t>totalAmount = 1,000원 × 2 = 2,000원</a:t>
-            </a:r>
-            <a:r>
-              <a:rPr sz="1000" b="0">
-                <a:solidFill>
-                  <a:srgbClr val="000000"/>
-                </a:solidFill>
-                <a:latin typeface="맑은 고딕"/>
-                <a:ea typeface="맑은 고딕"/>
-              </a:rPr>
-              <a:t>이다. 이후 현재 판매가가 1,200원으로 바뀌어도 기존 주문은 확정 단가 1,000원과 총액 2,000원을 유지한다.</a:t>
-            </a:r>
-          </a:p>
           <a:p>
             <a:pPr marL="322580" indent="-139700">
               <a:spcBef>
@@ -34088,7 +34117,7 @@
         </p:nvGraphicFramePr>
         <p:xfrm>
           <a:off x="2402396" y="3523788"/>
-          <a:ext cx="4325620" cy="3873500"/>
+          <a:ext cx="4325620" cy="1440000"/>
         </p:xfrm>
         <a:graphic>
           <a:graphicData uri="http://schemas.openxmlformats.org/drawingml/2006/table">
@@ -36371,7 +36400,7 @@
         </p:nvGraphicFramePr>
         <p:xfrm>
           <a:off x="1985836" y="1999788"/>
-          <a:ext cx="5158740" cy="3873500"/>
+          <a:ext cx="5158740" cy="1440000"/>
         </p:xfrm>
         <a:graphic>
           <a:graphicData uri="http://schemas.openxmlformats.org/drawingml/2006/table">
